--- a/uplift_model_deck.pptx
+++ b/uplift_model_deck.pptx
@@ -12823,12 +12823,12 @@
         </p:nvSpPr>
         <p:spPr>
           <a:xfrm>
-            <a:off x="548640" y="1417320"/>
-            <a:ext cx="5349240" cy="1600200"/>
+            <a:off x="548640" y="1371600"/>
+            <a:ext cx="5349240" cy="1965960"/>
           </a:xfrm>
           <a:prstGeom prst="roundRect">
             <a:avLst>
-              <a:gd name="adj" fmla="val 5714"/>
+              <a:gd name="adj" fmla="val 4651"/>
             </a:avLst>
           </a:prstGeom>
           <a:solidFill>
@@ -12850,8 +12850,8 @@
         </p:nvSpPr>
         <p:spPr>
           <a:xfrm>
-            <a:off x="822960" y="1581912"/>
-            <a:ext cx="4800600" cy="320040"/>
+            <a:off x="777240" y="1508760"/>
+            <a:ext cx="4892040" cy="274320"/>
           </a:xfrm>
           <a:prstGeom prst="rect">
             <a:avLst/>
@@ -12867,7 +12867,7 @@
               <a:buNone/>
             </a:pPr>
             <a:r>
-              <a:rPr lang="en-US" sz="1150" b="1" spc="150" kern="0" dirty="0">
+              <a:rPr lang="en-US" sz="1100" b="1" dirty="0">
                 <a:solidFill>
                   <a:srgbClr val="1E2761"/>
                 </a:solidFill>
@@ -12875,68 +12875,1513 @@
                 <a:ea typeface="Calibri" pitchFamily="34" charset="-122"/>
                 <a:cs typeface="Calibri" pitchFamily="34" charset="-120"/>
               </a:rPr>
-              <a:t>TRAIN</a:t>
+              <a:t>TRAIN   </a:t>
             </a:r>
-            <a:endParaRPr lang="en-US" sz="1150" dirty="0"/>
-          </a:p>
-        </p:txBody>
-      </p:sp>
-      <p:sp>
-        <p:nvSpPr>
-          <p:cNvPr id="6" name="Text 4"/>
-          <p:cNvSpPr txBox="1"/>
-          <p:nvPr/>
-        </p:nvSpPr>
-        <p:spPr>
-          <a:xfrm>
-            <a:off x="822960" y="1920240"/>
-            <a:ext cx="4800600" cy="914400"/>
-          </a:xfrm>
-          <a:prstGeom prst="rect">
-            <a:avLst/>
-          </a:prstGeom>
-          <a:noFill/>
-          <a:ln/>
-        </p:spPr>
-        <p:txBody>
-          <a:bodyPr wrap="square" lIns="0" tIns="0" rIns="0" bIns="0" rtlCol="0" anchor="ctr"/>
-          <a:lstStyle/>
-          <a:p>
             <a:pPr indent="0" marL="0">
-              <a:lnSpc>
-                <a:spcPct val="120000"/>
-              </a:lnSpc>
               <a:buNone/>
             </a:pPr>
             <a:r>
-              <a:rPr lang="en-US" sz="1200" dirty="0">
+              <a:rPr lang="en-US" sz="1100" i="1" dirty="0">
                 <a:solidFill>
-                  <a:srgbClr val="33344A"/>
+                  <a:srgbClr val="6B7280"/>
                 </a:solidFill>
                 <a:latin typeface="Calibri" pitchFamily="34" charset="0"/>
                 <a:ea typeface="Calibri" pitchFamily="34" charset="-122"/>
                 <a:cs typeface="Calibri" pitchFamily="34" charset="-120"/>
               </a:rPr>
-              <a:t>One GBM/logistic model, fit on ALL customers — treatment and control together. Features = customer attributes (utilization, tenure, income band, existing balances) plus a single is_treated flag. Label = responded (Y).</a:t>
+              <a:t>pooled — ONE model, ONE fit() call</a:t>
             </a:r>
-            <a:endParaRPr lang="en-US" sz="1200" dirty="0"/>
-          </a:p>
-        </p:txBody>
-      </p:sp>
-      <p:sp>
-        <p:nvSpPr>
-          <p:cNvPr id="7" name="Shape 5"/>
+            <a:endParaRPr lang="en-US" sz="1100" dirty="0"/>
+          </a:p>
+        </p:txBody>
+      </p:sp>
+      <p:graphicFrame>
+        <p:nvGraphicFramePr>
+          <p:cNvPr id="6" name="Table 0"/>
+          <p:cNvGraphicFramePr>
+            <a:graphicFrameLocks noGrp="1"/>
+          </p:cNvGraphicFramePr>
+          <p:nvPr>
+            <p:extLst>
+              <p:ext uri="{D42A27DB-BD31-4B8C-83A1-F6EECF244321}">
+                <p14:modId xmlns:p14="http://schemas.microsoft.com/office/powerpoint/2010/main" val="1579011935"/>
+              </p:ext>
+            </p:extLst>
+          </p:nvPr>
+        </p:nvGraphicFramePr>
+        <p:xfrm>
+          <a:off x="777240" y="1828800"/>
+          <a:ext cx="4892040" cy="1371600"/>
+        </p:xfrm>
+        <a:graphic>
+          <a:graphicData uri="http://schemas.openxmlformats.org/drawingml/2006/table">
+            <a:tbl>
+              <a:tblPr/>
+              <a:tblGrid>
+                <a:gridCol w="1858975"/>
+                <a:gridCol w="1565453"/>
+                <a:gridCol w="1467612"/>
+              </a:tblGrid>
+              <a:tr h="195943">
+                <a:tc>
+                  <a:txBody>
+                    <a:bodyPr/>
+                    <a:lstStyle/>
+                    <a:p>
+                      <a:pPr algn="ctr" indent="0" marL="0">
+                        <a:buNone/>
+                      </a:pPr>
+                      <a:r>
+                        <a:rPr lang="en-US" sz="1050" b="1" dirty="0">
+                          <a:solidFill>
+                            <a:srgbClr val="FFFFFF"/>
+                          </a:solidFill>
+                          <a:latin typeface="Calibri" pitchFamily="34" charset="0"/>
+                          <a:ea typeface="Calibri" pitchFamily="34" charset="-122"/>
+                          <a:cs typeface="Calibri" pitchFamily="34" charset="-120"/>
+                        </a:rPr>
+                        <a:t>Customer</a:t>
+                      </a:r>
+                      <a:endParaRPr lang="en-US" sz="1050" dirty="0">
+                        <a:latin typeface="Calibri" charset="0"/>
+                        <a:ea typeface="Calibri" charset="0"/>
+                        <a:cs typeface="Calibri" charset="0"/>
+                      </a:endParaRPr>
+                    </a:p>
+                  </a:txBody>
+                  <a:tcPr marL="45720" marR="45720" marT="18288" marB="18288" anchor="ctr">
+                    <a:lnL w="12700" cap="flat" cmpd="sng" algn="ctr">
+                      <a:solidFill>
+                        <a:srgbClr val="E4E7F0"/>
+                      </a:solidFill>
+                      <a:prstDash val="solid"/>
+                      <a:round/>
+                      <a:headEnd type="none" w="med" len="med"/>
+                      <a:tailEnd type="none" w="med" len="med"/>
+                    </a:lnL>
+                    <a:lnR w="12700" cap="flat" cmpd="sng" algn="ctr">
+                      <a:solidFill>
+                        <a:srgbClr val="E4E7F0"/>
+                      </a:solidFill>
+                      <a:prstDash val="solid"/>
+                      <a:round/>
+                      <a:headEnd type="none" w="med" len="med"/>
+                      <a:tailEnd type="none" w="med" len="med"/>
+                    </a:lnR>
+                    <a:lnT w="12700" cap="flat" cmpd="sng" algn="ctr">
+                      <a:solidFill>
+                        <a:srgbClr val="E4E7F0"/>
+                      </a:solidFill>
+                      <a:prstDash val="solid"/>
+                      <a:round/>
+                      <a:headEnd type="none" w="med" len="med"/>
+                      <a:tailEnd type="none" w="med" len="med"/>
+                    </a:lnT>
+                    <a:lnB w="12700" cap="flat" cmpd="sng" algn="ctr">
+                      <a:solidFill>
+                        <a:srgbClr val="E4E7F0"/>
+                      </a:solidFill>
+                      <a:prstDash val="solid"/>
+                      <a:round/>
+                      <a:headEnd type="none" w="med" len="med"/>
+                      <a:tailEnd type="none" w="med" len="med"/>
+                    </a:lnB>
+                    <a:solidFill>
+                      <a:srgbClr val="1E2761"/>
+                    </a:solidFill>
+                  </a:tcPr>
+                </a:tc>
+                <a:tc>
+                  <a:txBody>
+                    <a:bodyPr/>
+                    <a:lstStyle/>
+                    <a:p>
+                      <a:pPr algn="ctr" indent="0" marL="0">
+                        <a:buNone/>
+                      </a:pPr>
+                      <a:r>
+                        <a:rPr lang="en-US" sz="1050" b="1" dirty="0">
+                          <a:solidFill>
+                            <a:srgbClr val="FFFFFF"/>
+                          </a:solidFill>
+                          <a:latin typeface="Calibri" pitchFamily="34" charset="0"/>
+                          <a:ea typeface="Calibri" pitchFamily="34" charset="-122"/>
+                          <a:cs typeface="Calibri" pitchFamily="34" charset="-120"/>
+                        </a:rPr>
+                        <a:t>is_treated</a:t>
+                      </a:r>
+                      <a:endParaRPr lang="en-US" sz="1050" dirty="0">
+                        <a:latin typeface="Calibri" charset="0"/>
+                        <a:ea typeface="Calibri" charset="0"/>
+                        <a:cs typeface="Calibri" charset="0"/>
+                      </a:endParaRPr>
+                    </a:p>
+                  </a:txBody>
+                  <a:tcPr marL="45720" marR="45720" marT="18288" marB="18288" anchor="ctr">
+                    <a:lnL w="12700" cap="flat" cmpd="sng" algn="ctr">
+                      <a:solidFill>
+                        <a:srgbClr val="E4E7F0"/>
+                      </a:solidFill>
+                      <a:prstDash val="solid"/>
+                      <a:round/>
+                      <a:headEnd type="none" w="med" len="med"/>
+                      <a:tailEnd type="none" w="med" len="med"/>
+                    </a:lnL>
+                    <a:lnR w="12700" cap="flat" cmpd="sng" algn="ctr">
+                      <a:solidFill>
+                        <a:srgbClr val="E4E7F0"/>
+                      </a:solidFill>
+                      <a:prstDash val="solid"/>
+                      <a:round/>
+                      <a:headEnd type="none" w="med" len="med"/>
+                      <a:tailEnd type="none" w="med" len="med"/>
+                    </a:lnR>
+                    <a:lnT w="12700" cap="flat" cmpd="sng" algn="ctr">
+                      <a:solidFill>
+                        <a:srgbClr val="E4E7F0"/>
+                      </a:solidFill>
+                      <a:prstDash val="solid"/>
+                      <a:round/>
+                      <a:headEnd type="none" w="med" len="med"/>
+                      <a:tailEnd type="none" w="med" len="med"/>
+                    </a:lnT>
+                    <a:lnB w="12700" cap="flat" cmpd="sng" algn="ctr">
+                      <a:solidFill>
+                        <a:srgbClr val="E4E7F0"/>
+                      </a:solidFill>
+                      <a:prstDash val="solid"/>
+                      <a:round/>
+                      <a:headEnd type="none" w="med" len="med"/>
+                      <a:tailEnd type="none" w="med" len="med"/>
+                    </a:lnB>
+                    <a:solidFill>
+                      <a:srgbClr val="1E2761"/>
+                    </a:solidFill>
+                  </a:tcPr>
+                </a:tc>
+                <a:tc>
+                  <a:txBody>
+                    <a:bodyPr/>
+                    <a:lstStyle/>
+                    <a:p>
+                      <a:pPr algn="ctr" indent="0" marL="0">
+                        <a:buNone/>
+                      </a:pPr>
+                      <a:r>
+                        <a:rPr lang="en-US" sz="1050" b="1" dirty="0">
+                          <a:solidFill>
+                            <a:srgbClr val="FFFFFF"/>
+                          </a:solidFill>
+                          <a:latin typeface="Calibri" pitchFamily="34" charset="0"/>
+                          <a:ea typeface="Calibri" pitchFamily="34" charset="-122"/>
+                          <a:cs typeface="Calibri" pitchFamily="34" charset="-120"/>
+                        </a:rPr>
+                        <a:t>Y</a:t>
+                      </a:r>
+                      <a:endParaRPr lang="en-US" sz="1050" dirty="0">
+                        <a:latin typeface="Calibri" charset="0"/>
+                        <a:ea typeface="Calibri" charset="0"/>
+                        <a:cs typeface="Calibri" charset="0"/>
+                      </a:endParaRPr>
+                    </a:p>
+                  </a:txBody>
+                  <a:tcPr marL="45720" marR="45720" marT="18288" marB="18288" anchor="ctr">
+                    <a:lnL w="12700" cap="flat" cmpd="sng" algn="ctr">
+                      <a:solidFill>
+                        <a:srgbClr val="E4E7F0"/>
+                      </a:solidFill>
+                      <a:prstDash val="solid"/>
+                      <a:round/>
+                      <a:headEnd type="none" w="med" len="med"/>
+                      <a:tailEnd type="none" w="med" len="med"/>
+                    </a:lnL>
+                    <a:lnR w="12700" cap="flat" cmpd="sng" algn="ctr">
+                      <a:solidFill>
+                        <a:srgbClr val="E4E7F0"/>
+                      </a:solidFill>
+                      <a:prstDash val="solid"/>
+                      <a:round/>
+                      <a:headEnd type="none" w="med" len="med"/>
+                      <a:tailEnd type="none" w="med" len="med"/>
+                    </a:lnR>
+                    <a:lnT w="12700" cap="flat" cmpd="sng" algn="ctr">
+                      <a:solidFill>
+                        <a:srgbClr val="E4E7F0"/>
+                      </a:solidFill>
+                      <a:prstDash val="solid"/>
+                      <a:round/>
+                      <a:headEnd type="none" w="med" len="med"/>
+                      <a:tailEnd type="none" w="med" len="med"/>
+                    </a:lnT>
+                    <a:lnB w="12700" cap="flat" cmpd="sng" algn="ctr">
+                      <a:solidFill>
+                        <a:srgbClr val="E4E7F0"/>
+                      </a:solidFill>
+                      <a:prstDash val="solid"/>
+                      <a:round/>
+                      <a:headEnd type="none" w="med" len="med"/>
+                      <a:tailEnd type="none" w="med" len="med"/>
+                    </a:lnB>
+                    <a:solidFill>
+                      <a:srgbClr val="1E2761"/>
+                    </a:solidFill>
+                  </a:tcPr>
+                </a:tc>
+              </a:tr>
+              <a:tr h="195943">
+                <a:tc>
+                  <a:txBody>
+                    <a:bodyPr/>
+                    <a:lstStyle/>
+                    <a:p>
+                      <a:pPr algn="ctr" indent="0" marL="0">
+                        <a:buNone/>
+                      </a:pPr>
+                      <a:r>
+                        <a:rPr lang="en-US" sz="1050" b="1" dirty="0">
+                          <a:solidFill>
+                            <a:srgbClr val="33344A"/>
+                          </a:solidFill>
+                          <a:latin typeface="Calibri" pitchFamily="34" charset="0"/>
+                          <a:ea typeface="Calibri" pitchFamily="34" charset="-122"/>
+                          <a:cs typeface="Calibri" pitchFamily="34" charset="-120"/>
+                        </a:rPr>
+                        <a:t>A</a:t>
+                      </a:r>
+                      <a:endParaRPr lang="en-US" sz="1050" dirty="0">
+                        <a:latin typeface="Calibri" charset="0"/>
+                        <a:ea typeface="Calibri" charset="0"/>
+                        <a:cs typeface="Calibri" charset="0"/>
+                      </a:endParaRPr>
+                    </a:p>
+                  </a:txBody>
+                  <a:tcPr marL="45720" marR="45720" marT="18288" marB="18288" anchor="ctr">
+                    <a:lnL w="12700" cap="flat" cmpd="sng" algn="ctr">
+                      <a:solidFill>
+                        <a:srgbClr val="E4E7F0"/>
+                      </a:solidFill>
+                      <a:prstDash val="solid"/>
+                      <a:round/>
+                      <a:headEnd type="none" w="med" len="med"/>
+                      <a:tailEnd type="none" w="med" len="med"/>
+                    </a:lnL>
+                    <a:lnR w="12700" cap="flat" cmpd="sng" algn="ctr">
+                      <a:solidFill>
+                        <a:srgbClr val="E4E7F0"/>
+                      </a:solidFill>
+                      <a:prstDash val="solid"/>
+                      <a:round/>
+                      <a:headEnd type="none" w="med" len="med"/>
+                      <a:tailEnd type="none" w="med" len="med"/>
+                    </a:lnR>
+                    <a:lnT w="12700" cap="flat" cmpd="sng" algn="ctr">
+                      <a:solidFill>
+                        <a:srgbClr val="E4E7F0"/>
+                      </a:solidFill>
+                      <a:prstDash val="solid"/>
+                      <a:round/>
+                      <a:headEnd type="none" w="med" len="med"/>
+                      <a:tailEnd type="none" w="med" len="med"/>
+                    </a:lnT>
+                    <a:lnB w="12700" cap="flat" cmpd="sng" algn="ctr">
+                      <a:solidFill>
+                        <a:srgbClr val="E4E7F0"/>
+                      </a:solidFill>
+                      <a:prstDash val="solid"/>
+                      <a:round/>
+                      <a:headEnd type="none" w="med" len="med"/>
+                      <a:tailEnd type="none" w="med" len="med"/>
+                    </a:lnB>
+                    <a:solidFill>
+                      <a:srgbClr val="FFFFFF"/>
+                    </a:solidFill>
+                  </a:tcPr>
+                </a:tc>
+                <a:tc>
+                  <a:txBody>
+                    <a:bodyPr/>
+                    <a:lstStyle/>
+                    <a:p>
+                      <a:pPr algn="ctr" indent="0" marL="0">
+                        <a:buNone/>
+                      </a:pPr>
+                      <a:r>
+                        <a:rPr lang="en-US" sz="1050" dirty="0">
+                          <a:solidFill>
+                            <a:srgbClr val="1E2761"/>
+                          </a:solidFill>
+                          <a:latin typeface="Calibri" pitchFamily="34" charset="0"/>
+                          <a:ea typeface="Calibri" pitchFamily="34" charset="-122"/>
+                          <a:cs typeface="Calibri" pitchFamily="34" charset="-120"/>
+                        </a:rPr>
+                        <a:t>0</a:t>
+                      </a:r>
+                      <a:endParaRPr lang="en-US" sz="1050" dirty="0">
+                        <a:latin typeface="Calibri" charset="0"/>
+                        <a:ea typeface="Calibri" charset="0"/>
+                        <a:cs typeface="Calibri" charset="0"/>
+                      </a:endParaRPr>
+                    </a:p>
+                  </a:txBody>
+                  <a:tcPr marL="45720" marR="45720" marT="18288" marB="18288" anchor="ctr">
+                    <a:lnL w="12700" cap="flat" cmpd="sng" algn="ctr">
+                      <a:solidFill>
+                        <a:srgbClr val="E4E7F0"/>
+                      </a:solidFill>
+                      <a:prstDash val="solid"/>
+                      <a:round/>
+                      <a:headEnd type="none" w="med" len="med"/>
+                      <a:tailEnd type="none" w="med" len="med"/>
+                    </a:lnL>
+                    <a:lnR w="12700" cap="flat" cmpd="sng" algn="ctr">
+                      <a:solidFill>
+                        <a:srgbClr val="E4E7F0"/>
+                      </a:solidFill>
+                      <a:prstDash val="solid"/>
+                      <a:round/>
+                      <a:headEnd type="none" w="med" len="med"/>
+                      <a:tailEnd type="none" w="med" len="med"/>
+                    </a:lnR>
+                    <a:lnT w="12700" cap="flat" cmpd="sng" algn="ctr">
+                      <a:solidFill>
+                        <a:srgbClr val="E4E7F0"/>
+                      </a:solidFill>
+                      <a:prstDash val="solid"/>
+                      <a:round/>
+                      <a:headEnd type="none" w="med" len="med"/>
+                      <a:tailEnd type="none" w="med" len="med"/>
+                    </a:lnT>
+                    <a:lnB w="12700" cap="flat" cmpd="sng" algn="ctr">
+                      <a:solidFill>
+                        <a:srgbClr val="E4E7F0"/>
+                      </a:solidFill>
+                      <a:prstDash val="solid"/>
+                      <a:round/>
+                      <a:headEnd type="none" w="med" len="med"/>
+                      <a:tailEnd type="none" w="med" len="med"/>
+                    </a:lnB>
+                    <a:solidFill>
+                      <a:srgbClr val="FFFFFF"/>
+                    </a:solidFill>
+                  </a:tcPr>
+                </a:tc>
+                <a:tc>
+                  <a:txBody>
+                    <a:bodyPr/>
+                    <a:lstStyle/>
+                    <a:p>
+                      <a:pPr algn="ctr" indent="0" marL="0">
+                        <a:buNone/>
+                      </a:pPr>
+                      <a:r>
+                        <a:rPr lang="en-US" sz="1050" dirty="0">
+                          <a:solidFill>
+                            <a:srgbClr val="33344A"/>
+                          </a:solidFill>
+                          <a:latin typeface="Calibri" pitchFamily="34" charset="0"/>
+                          <a:ea typeface="Calibri" pitchFamily="34" charset="-122"/>
+                          <a:cs typeface="Calibri" pitchFamily="34" charset="-120"/>
+                        </a:rPr>
+                        <a:t>0</a:t>
+                      </a:r>
+                      <a:endParaRPr lang="en-US" sz="1050" dirty="0">
+                        <a:latin typeface="Calibri" charset="0"/>
+                        <a:ea typeface="Calibri" charset="0"/>
+                        <a:cs typeface="Calibri" charset="0"/>
+                      </a:endParaRPr>
+                    </a:p>
+                  </a:txBody>
+                  <a:tcPr marL="45720" marR="45720" marT="18288" marB="18288" anchor="ctr">
+                    <a:lnL w="12700" cap="flat" cmpd="sng" algn="ctr">
+                      <a:solidFill>
+                        <a:srgbClr val="E4E7F0"/>
+                      </a:solidFill>
+                      <a:prstDash val="solid"/>
+                      <a:round/>
+                      <a:headEnd type="none" w="med" len="med"/>
+                      <a:tailEnd type="none" w="med" len="med"/>
+                    </a:lnL>
+                    <a:lnR w="12700" cap="flat" cmpd="sng" algn="ctr">
+                      <a:solidFill>
+                        <a:srgbClr val="E4E7F0"/>
+                      </a:solidFill>
+                      <a:prstDash val="solid"/>
+                      <a:round/>
+                      <a:headEnd type="none" w="med" len="med"/>
+                      <a:tailEnd type="none" w="med" len="med"/>
+                    </a:lnR>
+                    <a:lnT w="12700" cap="flat" cmpd="sng" algn="ctr">
+                      <a:solidFill>
+                        <a:srgbClr val="E4E7F0"/>
+                      </a:solidFill>
+                      <a:prstDash val="solid"/>
+                      <a:round/>
+                      <a:headEnd type="none" w="med" len="med"/>
+                      <a:tailEnd type="none" w="med" len="med"/>
+                    </a:lnT>
+                    <a:lnB w="12700" cap="flat" cmpd="sng" algn="ctr">
+                      <a:solidFill>
+                        <a:srgbClr val="E4E7F0"/>
+                      </a:solidFill>
+                      <a:prstDash val="solid"/>
+                      <a:round/>
+                      <a:headEnd type="none" w="med" len="med"/>
+                      <a:tailEnd type="none" w="med" len="med"/>
+                    </a:lnB>
+                    <a:solidFill>
+                      <a:srgbClr val="FFFFFF"/>
+                    </a:solidFill>
+                  </a:tcPr>
+                </a:tc>
+              </a:tr>
+              <a:tr h="195943">
+                <a:tc>
+                  <a:txBody>
+                    <a:bodyPr/>
+                    <a:lstStyle/>
+                    <a:p>
+                      <a:pPr algn="ctr" indent="0" marL="0">
+                        <a:buNone/>
+                      </a:pPr>
+                      <a:r>
+                        <a:rPr lang="en-US" sz="1050" b="1" dirty="0">
+                          <a:solidFill>
+                            <a:srgbClr val="33344A"/>
+                          </a:solidFill>
+                          <a:latin typeface="Calibri" pitchFamily="34" charset="0"/>
+                          <a:ea typeface="Calibri" pitchFamily="34" charset="-122"/>
+                          <a:cs typeface="Calibri" pitchFamily="34" charset="-120"/>
+                        </a:rPr>
+                        <a:t>B</a:t>
+                      </a:r>
+                      <a:endParaRPr lang="en-US" sz="1050" dirty="0">
+                        <a:latin typeface="Calibri" charset="0"/>
+                        <a:ea typeface="Calibri" charset="0"/>
+                        <a:cs typeface="Calibri" charset="0"/>
+                      </a:endParaRPr>
+                    </a:p>
+                  </a:txBody>
+                  <a:tcPr marL="45720" marR="45720" marT="18288" marB="18288" anchor="ctr">
+                    <a:lnL w="12700" cap="flat" cmpd="sng" algn="ctr">
+                      <a:solidFill>
+                        <a:srgbClr val="E4E7F0"/>
+                      </a:solidFill>
+                      <a:prstDash val="solid"/>
+                      <a:round/>
+                      <a:headEnd type="none" w="med" len="med"/>
+                      <a:tailEnd type="none" w="med" len="med"/>
+                    </a:lnL>
+                    <a:lnR w="12700" cap="flat" cmpd="sng" algn="ctr">
+                      <a:solidFill>
+                        <a:srgbClr val="E4E7F0"/>
+                      </a:solidFill>
+                      <a:prstDash val="solid"/>
+                      <a:round/>
+                      <a:headEnd type="none" w="med" len="med"/>
+                      <a:tailEnd type="none" w="med" len="med"/>
+                    </a:lnR>
+                    <a:lnT w="12700" cap="flat" cmpd="sng" algn="ctr">
+                      <a:solidFill>
+                        <a:srgbClr val="E4E7F0"/>
+                      </a:solidFill>
+                      <a:prstDash val="solid"/>
+                      <a:round/>
+                      <a:headEnd type="none" w="med" len="med"/>
+                      <a:tailEnd type="none" w="med" len="med"/>
+                    </a:lnT>
+                    <a:lnB w="12700" cap="flat" cmpd="sng" algn="ctr">
+                      <a:solidFill>
+                        <a:srgbClr val="E4E7F0"/>
+                      </a:solidFill>
+                      <a:prstDash val="solid"/>
+                      <a:round/>
+                      <a:headEnd type="none" w="med" len="med"/>
+                      <a:tailEnd type="none" w="med" len="med"/>
+                    </a:lnB>
+                    <a:solidFill>
+                      <a:srgbClr val="F4F6FB"/>
+                    </a:solidFill>
+                  </a:tcPr>
+                </a:tc>
+                <a:tc>
+                  <a:txBody>
+                    <a:bodyPr/>
+                    <a:lstStyle/>
+                    <a:p>
+                      <a:pPr algn="ctr" indent="0" marL="0">
+                        <a:buNone/>
+                      </a:pPr>
+                      <a:r>
+                        <a:rPr lang="en-US" sz="1050" dirty="0">
+                          <a:solidFill>
+                            <a:srgbClr val="1E2761"/>
+                          </a:solidFill>
+                          <a:latin typeface="Calibri" pitchFamily="34" charset="0"/>
+                          <a:ea typeface="Calibri" pitchFamily="34" charset="-122"/>
+                          <a:cs typeface="Calibri" pitchFamily="34" charset="-120"/>
+                        </a:rPr>
+                        <a:t>0</a:t>
+                      </a:r>
+                      <a:endParaRPr lang="en-US" sz="1050" dirty="0">
+                        <a:latin typeface="Calibri" charset="0"/>
+                        <a:ea typeface="Calibri" charset="0"/>
+                        <a:cs typeface="Calibri" charset="0"/>
+                      </a:endParaRPr>
+                    </a:p>
+                  </a:txBody>
+                  <a:tcPr marL="45720" marR="45720" marT="18288" marB="18288" anchor="ctr">
+                    <a:lnL w="12700" cap="flat" cmpd="sng" algn="ctr">
+                      <a:solidFill>
+                        <a:srgbClr val="E4E7F0"/>
+                      </a:solidFill>
+                      <a:prstDash val="solid"/>
+                      <a:round/>
+                      <a:headEnd type="none" w="med" len="med"/>
+                      <a:tailEnd type="none" w="med" len="med"/>
+                    </a:lnL>
+                    <a:lnR w="12700" cap="flat" cmpd="sng" algn="ctr">
+                      <a:solidFill>
+                        <a:srgbClr val="E4E7F0"/>
+                      </a:solidFill>
+                      <a:prstDash val="solid"/>
+                      <a:round/>
+                      <a:headEnd type="none" w="med" len="med"/>
+                      <a:tailEnd type="none" w="med" len="med"/>
+                    </a:lnR>
+                    <a:lnT w="12700" cap="flat" cmpd="sng" algn="ctr">
+                      <a:solidFill>
+                        <a:srgbClr val="E4E7F0"/>
+                      </a:solidFill>
+                      <a:prstDash val="solid"/>
+                      <a:round/>
+                      <a:headEnd type="none" w="med" len="med"/>
+                      <a:tailEnd type="none" w="med" len="med"/>
+                    </a:lnT>
+                    <a:lnB w="12700" cap="flat" cmpd="sng" algn="ctr">
+                      <a:solidFill>
+                        <a:srgbClr val="E4E7F0"/>
+                      </a:solidFill>
+                      <a:prstDash val="solid"/>
+                      <a:round/>
+                      <a:headEnd type="none" w="med" len="med"/>
+                      <a:tailEnd type="none" w="med" len="med"/>
+                    </a:lnB>
+                    <a:solidFill>
+                      <a:srgbClr val="F4F6FB"/>
+                    </a:solidFill>
+                  </a:tcPr>
+                </a:tc>
+                <a:tc>
+                  <a:txBody>
+                    <a:bodyPr/>
+                    <a:lstStyle/>
+                    <a:p>
+                      <a:pPr algn="ctr" indent="0" marL="0">
+                        <a:buNone/>
+                      </a:pPr>
+                      <a:r>
+                        <a:rPr lang="en-US" sz="1050" dirty="0">
+                          <a:solidFill>
+                            <a:srgbClr val="33344A"/>
+                          </a:solidFill>
+                          <a:latin typeface="Calibri" pitchFamily="34" charset="0"/>
+                          <a:ea typeface="Calibri" pitchFamily="34" charset="-122"/>
+                          <a:cs typeface="Calibri" pitchFamily="34" charset="-120"/>
+                        </a:rPr>
+                        <a:t>1</a:t>
+                      </a:r>
+                      <a:endParaRPr lang="en-US" sz="1050" dirty="0">
+                        <a:latin typeface="Calibri" charset="0"/>
+                        <a:ea typeface="Calibri" charset="0"/>
+                        <a:cs typeface="Calibri" charset="0"/>
+                      </a:endParaRPr>
+                    </a:p>
+                  </a:txBody>
+                  <a:tcPr marL="45720" marR="45720" marT="18288" marB="18288" anchor="ctr">
+                    <a:lnL w="12700" cap="flat" cmpd="sng" algn="ctr">
+                      <a:solidFill>
+                        <a:srgbClr val="E4E7F0"/>
+                      </a:solidFill>
+                      <a:prstDash val="solid"/>
+                      <a:round/>
+                      <a:headEnd type="none" w="med" len="med"/>
+                      <a:tailEnd type="none" w="med" len="med"/>
+                    </a:lnL>
+                    <a:lnR w="12700" cap="flat" cmpd="sng" algn="ctr">
+                      <a:solidFill>
+                        <a:srgbClr val="E4E7F0"/>
+                      </a:solidFill>
+                      <a:prstDash val="solid"/>
+                      <a:round/>
+                      <a:headEnd type="none" w="med" len="med"/>
+                      <a:tailEnd type="none" w="med" len="med"/>
+                    </a:lnR>
+                    <a:lnT w="12700" cap="flat" cmpd="sng" algn="ctr">
+                      <a:solidFill>
+                        <a:srgbClr val="E4E7F0"/>
+                      </a:solidFill>
+                      <a:prstDash val="solid"/>
+                      <a:round/>
+                      <a:headEnd type="none" w="med" len="med"/>
+                      <a:tailEnd type="none" w="med" len="med"/>
+                    </a:lnT>
+                    <a:lnB w="12700" cap="flat" cmpd="sng" algn="ctr">
+                      <a:solidFill>
+                        <a:srgbClr val="E4E7F0"/>
+                      </a:solidFill>
+                      <a:prstDash val="solid"/>
+                      <a:round/>
+                      <a:headEnd type="none" w="med" len="med"/>
+                      <a:tailEnd type="none" w="med" len="med"/>
+                    </a:lnB>
+                    <a:solidFill>
+                      <a:srgbClr val="F4F6FB"/>
+                    </a:solidFill>
+                  </a:tcPr>
+                </a:tc>
+              </a:tr>
+              <a:tr h="195943">
+                <a:tc>
+                  <a:txBody>
+                    <a:bodyPr/>
+                    <a:lstStyle/>
+                    <a:p>
+                      <a:pPr algn="ctr" indent="0" marL="0">
+                        <a:buNone/>
+                      </a:pPr>
+                      <a:r>
+                        <a:rPr lang="en-US" sz="1050" b="1" dirty="0">
+                          <a:solidFill>
+                            <a:srgbClr val="33344A"/>
+                          </a:solidFill>
+                          <a:latin typeface="Calibri" pitchFamily="34" charset="0"/>
+                          <a:ea typeface="Calibri" pitchFamily="34" charset="-122"/>
+                          <a:cs typeface="Calibri" pitchFamily="34" charset="-120"/>
+                        </a:rPr>
+                        <a:t>C</a:t>
+                      </a:r>
+                      <a:endParaRPr lang="en-US" sz="1050" dirty="0">
+                        <a:latin typeface="Calibri" charset="0"/>
+                        <a:ea typeface="Calibri" charset="0"/>
+                        <a:cs typeface="Calibri" charset="0"/>
+                      </a:endParaRPr>
+                    </a:p>
+                  </a:txBody>
+                  <a:tcPr marL="45720" marR="45720" marT="18288" marB="18288" anchor="ctr">
+                    <a:lnL w="12700" cap="flat" cmpd="sng" algn="ctr">
+                      <a:solidFill>
+                        <a:srgbClr val="E4E7F0"/>
+                      </a:solidFill>
+                      <a:prstDash val="solid"/>
+                      <a:round/>
+                      <a:headEnd type="none" w="med" len="med"/>
+                      <a:tailEnd type="none" w="med" len="med"/>
+                    </a:lnL>
+                    <a:lnR w="12700" cap="flat" cmpd="sng" algn="ctr">
+                      <a:solidFill>
+                        <a:srgbClr val="E4E7F0"/>
+                      </a:solidFill>
+                      <a:prstDash val="solid"/>
+                      <a:round/>
+                      <a:headEnd type="none" w="med" len="med"/>
+                      <a:tailEnd type="none" w="med" len="med"/>
+                    </a:lnR>
+                    <a:lnT w="12700" cap="flat" cmpd="sng" algn="ctr">
+                      <a:solidFill>
+                        <a:srgbClr val="E4E7F0"/>
+                      </a:solidFill>
+                      <a:prstDash val="solid"/>
+                      <a:round/>
+                      <a:headEnd type="none" w="med" len="med"/>
+                      <a:tailEnd type="none" w="med" len="med"/>
+                    </a:lnT>
+                    <a:lnB w="12700" cap="flat" cmpd="sng" algn="ctr">
+                      <a:solidFill>
+                        <a:srgbClr val="E4E7F0"/>
+                      </a:solidFill>
+                      <a:prstDash val="solid"/>
+                      <a:round/>
+                      <a:headEnd type="none" w="med" len="med"/>
+                      <a:tailEnd type="none" w="med" len="med"/>
+                    </a:lnB>
+                    <a:solidFill>
+                      <a:srgbClr val="FFFFFF"/>
+                    </a:solidFill>
+                  </a:tcPr>
+                </a:tc>
+                <a:tc>
+                  <a:txBody>
+                    <a:bodyPr/>
+                    <a:lstStyle/>
+                    <a:p>
+                      <a:pPr algn="ctr" indent="0" marL="0">
+                        <a:buNone/>
+                      </a:pPr>
+                      <a:r>
+                        <a:rPr lang="en-US" sz="1050" dirty="0">
+                          <a:solidFill>
+                            <a:srgbClr val="1E2761"/>
+                          </a:solidFill>
+                          <a:latin typeface="Calibri" pitchFamily="34" charset="0"/>
+                          <a:ea typeface="Calibri" pitchFamily="34" charset="-122"/>
+                          <a:cs typeface="Calibri" pitchFamily="34" charset="-120"/>
+                        </a:rPr>
+                        <a:t>0</a:t>
+                      </a:r>
+                      <a:endParaRPr lang="en-US" sz="1050" dirty="0">
+                        <a:latin typeface="Calibri" charset="0"/>
+                        <a:ea typeface="Calibri" charset="0"/>
+                        <a:cs typeface="Calibri" charset="0"/>
+                      </a:endParaRPr>
+                    </a:p>
+                  </a:txBody>
+                  <a:tcPr marL="45720" marR="45720" marT="18288" marB="18288" anchor="ctr">
+                    <a:lnL w="12700" cap="flat" cmpd="sng" algn="ctr">
+                      <a:solidFill>
+                        <a:srgbClr val="E4E7F0"/>
+                      </a:solidFill>
+                      <a:prstDash val="solid"/>
+                      <a:round/>
+                      <a:headEnd type="none" w="med" len="med"/>
+                      <a:tailEnd type="none" w="med" len="med"/>
+                    </a:lnL>
+                    <a:lnR w="12700" cap="flat" cmpd="sng" algn="ctr">
+                      <a:solidFill>
+                        <a:srgbClr val="E4E7F0"/>
+                      </a:solidFill>
+                      <a:prstDash val="solid"/>
+                      <a:round/>
+                      <a:headEnd type="none" w="med" len="med"/>
+                      <a:tailEnd type="none" w="med" len="med"/>
+                    </a:lnR>
+                    <a:lnT w="12700" cap="flat" cmpd="sng" algn="ctr">
+                      <a:solidFill>
+                        <a:srgbClr val="E4E7F0"/>
+                      </a:solidFill>
+                      <a:prstDash val="solid"/>
+                      <a:round/>
+                      <a:headEnd type="none" w="med" len="med"/>
+                      <a:tailEnd type="none" w="med" len="med"/>
+                    </a:lnT>
+                    <a:lnB w="12700" cap="flat" cmpd="sng" algn="ctr">
+                      <a:solidFill>
+                        <a:srgbClr val="E4E7F0"/>
+                      </a:solidFill>
+                      <a:prstDash val="solid"/>
+                      <a:round/>
+                      <a:headEnd type="none" w="med" len="med"/>
+                      <a:tailEnd type="none" w="med" len="med"/>
+                    </a:lnB>
+                    <a:solidFill>
+                      <a:srgbClr val="FFFFFF"/>
+                    </a:solidFill>
+                  </a:tcPr>
+                </a:tc>
+                <a:tc>
+                  <a:txBody>
+                    <a:bodyPr/>
+                    <a:lstStyle/>
+                    <a:p>
+                      <a:pPr algn="ctr" indent="0" marL="0">
+                        <a:buNone/>
+                      </a:pPr>
+                      <a:r>
+                        <a:rPr lang="en-US" sz="1050" dirty="0">
+                          <a:solidFill>
+                            <a:srgbClr val="33344A"/>
+                          </a:solidFill>
+                          <a:latin typeface="Calibri" pitchFamily="34" charset="0"/>
+                          <a:ea typeface="Calibri" pitchFamily="34" charset="-122"/>
+                          <a:cs typeface="Calibri" pitchFamily="34" charset="-120"/>
+                        </a:rPr>
+                        <a:t>0</a:t>
+                      </a:r>
+                      <a:endParaRPr lang="en-US" sz="1050" dirty="0">
+                        <a:latin typeface="Calibri" charset="0"/>
+                        <a:ea typeface="Calibri" charset="0"/>
+                        <a:cs typeface="Calibri" charset="0"/>
+                      </a:endParaRPr>
+                    </a:p>
+                  </a:txBody>
+                  <a:tcPr marL="45720" marR="45720" marT="18288" marB="18288" anchor="ctr">
+                    <a:lnL w="12700" cap="flat" cmpd="sng" algn="ctr">
+                      <a:solidFill>
+                        <a:srgbClr val="E4E7F0"/>
+                      </a:solidFill>
+                      <a:prstDash val="solid"/>
+                      <a:round/>
+                      <a:headEnd type="none" w="med" len="med"/>
+                      <a:tailEnd type="none" w="med" len="med"/>
+                    </a:lnL>
+                    <a:lnR w="12700" cap="flat" cmpd="sng" algn="ctr">
+                      <a:solidFill>
+                        <a:srgbClr val="E4E7F0"/>
+                      </a:solidFill>
+                      <a:prstDash val="solid"/>
+                      <a:round/>
+                      <a:headEnd type="none" w="med" len="med"/>
+                      <a:tailEnd type="none" w="med" len="med"/>
+                    </a:lnR>
+                    <a:lnT w="12700" cap="flat" cmpd="sng" algn="ctr">
+                      <a:solidFill>
+                        <a:srgbClr val="E4E7F0"/>
+                      </a:solidFill>
+                      <a:prstDash val="solid"/>
+                      <a:round/>
+                      <a:headEnd type="none" w="med" len="med"/>
+                      <a:tailEnd type="none" w="med" len="med"/>
+                    </a:lnT>
+                    <a:lnB w="12700" cap="flat" cmpd="sng" algn="ctr">
+                      <a:solidFill>
+                        <a:srgbClr val="E4E7F0"/>
+                      </a:solidFill>
+                      <a:prstDash val="solid"/>
+                      <a:round/>
+                      <a:headEnd type="none" w="med" len="med"/>
+                      <a:tailEnd type="none" w="med" len="med"/>
+                    </a:lnB>
+                    <a:solidFill>
+                      <a:srgbClr val="FFFFFF"/>
+                    </a:solidFill>
+                  </a:tcPr>
+                </a:tc>
+              </a:tr>
+              <a:tr h="195943">
+                <a:tc>
+                  <a:txBody>
+                    <a:bodyPr/>
+                    <a:lstStyle/>
+                    <a:p>
+                      <a:pPr algn="ctr" indent="0" marL="0">
+                        <a:buNone/>
+                      </a:pPr>
+                      <a:r>
+                        <a:rPr lang="en-US" sz="1050" b="1" dirty="0">
+                          <a:solidFill>
+                            <a:srgbClr val="33344A"/>
+                          </a:solidFill>
+                          <a:latin typeface="Calibri" pitchFamily="34" charset="0"/>
+                          <a:ea typeface="Calibri" pitchFamily="34" charset="-122"/>
+                          <a:cs typeface="Calibri" pitchFamily="34" charset="-120"/>
+                        </a:rPr>
+                        <a:t>D</a:t>
+                      </a:r>
+                      <a:endParaRPr lang="en-US" sz="1050" dirty="0">
+                        <a:latin typeface="Calibri" charset="0"/>
+                        <a:ea typeface="Calibri" charset="0"/>
+                        <a:cs typeface="Calibri" charset="0"/>
+                      </a:endParaRPr>
+                    </a:p>
+                  </a:txBody>
+                  <a:tcPr marL="45720" marR="45720" marT="18288" marB="18288" anchor="ctr">
+                    <a:lnL w="12700" cap="flat" cmpd="sng" algn="ctr">
+                      <a:solidFill>
+                        <a:srgbClr val="E4E7F0"/>
+                      </a:solidFill>
+                      <a:prstDash val="solid"/>
+                      <a:round/>
+                      <a:headEnd type="none" w="med" len="med"/>
+                      <a:tailEnd type="none" w="med" len="med"/>
+                    </a:lnL>
+                    <a:lnR w="12700" cap="flat" cmpd="sng" algn="ctr">
+                      <a:solidFill>
+                        <a:srgbClr val="E4E7F0"/>
+                      </a:solidFill>
+                      <a:prstDash val="solid"/>
+                      <a:round/>
+                      <a:headEnd type="none" w="med" len="med"/>
+                      <a:tailEnd type="none" w="med" len="med"/>
+                    </a:lnR>
+                    <a:lnT w="12700" cap="flat" cmpd="sng" algn="ctr">
+                      <a:solidFill>
+                        <a:srgbClr val="E4E7F0"/>
+                      </a:solidFill>
+                      <a:prstDash val="solid"/>
+                      <a:round/>
+                      <a:headEnd type="none" w="med" len="med"/>
+                      <a:tailEnd type="none" w="med" len="med"/>
+                    </a:lnT>
+                    <a:lnB w="12700" cap="flat" cmpd="sng" algn="ctr">
+                      <a:solidFill>
+                        <a:srgbClr val="E4E7F0"/>
+                      </a:solidFill>
+                      <a:prstDash val="solid"/>
+                      <a:round/>
+                      <a:headEnd type="none" w="med" len="med"/>
+                      <a:tailEnd type="none" w="med" len="med"/>
+                    </a:lnB>
+                    <a:solidFill>
+                      <a:srgbClr val="F4F6FB"/>
+                    </a:solidFill>
+                  </a:tcPr>
+                </a:tc>
+                <a:tc>
+                  <a:txBody>
+                    <a:bodyPr/>
+                    <a:lstStyle/>
+                    <a:p>
+                      <a:pPr algn="ctr" indent="0" marL="0">
+                        <a:buNone/>
+                      </a:pPr>
+                      <a:r>
+                        <a:rPr lang="en-US" sz="1050" dirty="0">
+                          <a:solidFill>
+                            <a:srgbClr val="B8892B"/>
+                          </a:solidFill>
+                          <a:latin typeface="Calibri" pitchFamily="34" charset="0"/>
+                          <a:ea typeface="Calibri" pitchFamily="34" charset="-122"/>
+                          <a:cs typeface="Calibri" pitchFamily="34" charset="-120"/>
+                        </a:rPr>
+                        <a:t>1</a:t>
+                      </a:r>
+                      <a:endParaRPr lang="en-US" sz="1050" dirty="0">
+                        <a:latin typeface="Calibri" charset="0"/>
+                        <a:ea typeface="Calibri" charset="0"/>
+                        <a:cs typeface="Calibri" charset="0"/>
+                      </a:endParaRPr>
+                    </a:p>
+                  </a:txBody>
+                  <a:tcPr marL="45720" marR="45720" marT="18288" marB="18288" anchor="ctr">
+                    <a:lnL w="12700" cap="flat" cmpd="sng" algn="ctr">
+                      <a:solidFill>
+                        <a:srgbClr val="E4E7F0"/>
+                      </a:solidFill>
+                      <a:prstDash val="solid"/>
+                      <a:round/>
+                      <a:headEnd type="none" w="med" len="med"/>
+                      <a:tailEnd type="none" w="med" len="med"/>
+                    </a:lnL>
+                    <a:lnR w="12700" cap="flat" cmpd="sng" algn="ctr">
+                      <a:solidFill>
+                        <a:srgbClr val="E4E7F0"/>
+                      </a:solidFill>
+                      <a:prstDash val="solid"/>
+                      <a:round/>
+                      <a:headEnd type="none" w="med" len="med"/>
+                      <a:tailEnd type="none" w="med" len="med"/>
+                    </a:lnR>
+                    <a:lnT w="12700" cap="flat" cmpd="sng" algn="ctr">
+                      <a:solidFill>
+                        <a:srgbClr val="E4E7F0"/>
+                      </a:solidFill>
+                      <a:prstDash val="solid"/>
+                      <a:round/>
+                      <a:headEnd type="none" w="med" len="med"/>
+                      <a:tailEnd type="none" w="med" len="med"/>
+                    </a:lnT>
+                    <a:lnB w="12700" cap="flat" cmpd="sng" algn="ctr">
+                      <a:solidFill>
+                        <a:srgbClr val="E4E7F0"/>
+                      </a:solidFill>
+                      <a:prstDash val="solid"/>
+                      <a:round/>
+                      <a:headEnd type="none" w="med" len="med"/>
+                      <a:tailEnd type="none" w="med" len="med"/>
+                    </a:lnB>
+                    <a:solidFill>
+                      <a:srgbClr val="F4F6FB"/>
+                    </a:solidFill>
+                  </a:tcPr>
+                </a:tc>
+                <a:tc>
+                  <a:txBody>
+                    <a:bodyPr/>
+                    <a:lstStyle/>
+                    <a:p>
+                      <a:pPr algn="ctr" indent="0" marL="0">
+                        <a:buNone/>
+                      </a:pPr>
+                      <a:r>
+                        <a:rPr lang="en-US" sz="1050" dirty="0">
+                          <a:solidFill>
+                            <a:srgbClr val="33344A"/>
+                          </a:solidFill>
+                          <a:latin typeface="Calibri" pitchFamily="34" charset="0"/>
+                          <a:ea typeface="Calibri" pitchFamily="34" charset="-122"/>
+                          <a:cs typeface="Calibri" pitchFamily="34" charset="-120"/>
+                        </a:rPr>
+                        <a:t>1</a:t>
+                      </a:r>
+                      <a:endParaRPr lang="en-US" sz="1050" dirty="0">
+                        <a:latin typeface="Calibri" charset="0"/>
+                        <a:ea typeface="Calibri" charset="0"/>
+                        <a:cs typeface="Calibri" charset="0"/>
+                      </a:endParaRPr>
+                    </a:p>
+                  </a:txBody>
+                  <a:tcPr marL="45720" marR="45720" marT="18288" marB="18288" anchor="ctr">
+                    <a:lnL w="12700" cap="flat" cmpd="sng" algn="ctr">
+                      <a:solidFill>
+                        <a:srgbClr val="E4E7F0"/>
+                      </a:solidFill>
+                      <a:prstDash val="solid"/>
+                      <a:round/>
+                      <a:headEnd type="none" w="med" len="med"/>
+                      <a:tailEnd type="none" w="med" len="med"/>
+                    </a:lnL>
+                    <a:lnR w="12700" cap="flat" cmpd="sng" algn="ctr">
+                      <a:solidFill>
+                        <a:srgbClr val="E4E7F0"/>
+                      </a:solidFill>
+                      <a:prstDash val="solid"/>
+                      <a:round/>
+                      <a:headEnd type="none" w="med" len="med"/>
+                      <a:tailEnd type="none" w="med" len="med"/>
+                    </a:lnR>
+                    <a:lnT w="12700" cap="flat" cmpd="sng" algn="ctr">
+                      <a:solidFill>
+                        <a:srgbClr val="E4E7F0"/>
+                      </a:solidFill>
+                      <a:prstDash val="solid"/>
+                      <a:round/>
+                      <a:headEnd type="none" w="med" len="med"/>
+                      <a:tailEnd type="none" w="med" len="med"/>
+                    </a:lnT>
+                    <a:lnB w="12700" cap="flat" cmpd="sng" algn="ctr">
+                      <a:solidFill>
+                        <a:srgbClr val="E4E7F0"/>
+                      </a:solidFill>
+                      <a:prstDash val="solid"/>
+                      <a:round/>
+                      <a:headEnd type="none" w="med" len="med"/>
+                      <a:tailEnd type="none" w="med" len="med"/>
+                    </a:lnB>
+                    <a:solidFill>
+                      <a:srgbClr val="F4F6FB"/>
+                    </a:solidFill>
+                  </a:tcPr>
+                </a:tc>
+              </a:tr>
+              <a:tr h="195943">
+                <a:tc>
+                  <a:txBody>
+                    <a:bodyPr/>
+                    <a:lstStyle/>
+                    <a:p>
+                      <a:pPr algn="ctr" indent="0" marL="0">
+                        <a:buNone/>
+                      </a:pPr>
+                      <a:r>
+                        <a:rPr lang="en-US" sz="1050" b="1" dirty="0">
+                          <a:solidFill>
+                            <a:srgbClr val="33344A"/>
+                          </a:solidFill>
+                          <a:latin typeface="Calibri" pitchFamily="34" charset="0"/>
+                          <a:ea typeface="Calibri" pitchFamily="34" charset="-122"/>
+                          <a:cs typeface="Calibri" pitchFamily="34" charset="-120"/>
+                        </a:rPr>
+                        <a:t>E</a:t>
+                      </a:r>
+                      <a:endParaRPr lang="en-US" sz="1050" dirty="0">
+                        <a:latin typeface="Calibri" charset="0"/>
+                        <a:ea typeface="Calibri" charset="0"/>
+                        <a:cs typeface="Calibri" charset="0"/>
+                      </a:endParaRPr>
+                    </a:p>
+                  </a:txBody>
+                  <a:tcPr marL="45720" marR="45720" marT="18288" marB="18288" anchor="ctr">
+                    <a:lnL w="12700" cap="flat" cmpd="sng" algn="ctr">
+                      <a:solidFill>
+                        <a:srgbClr val="E4E7F0"/>
+                      </a:solidFill>
+                      <a:prstDash val="solid"/>
+                      <a:round/>
+                      <a:headEnd type="none" w="med" len="med"/>
+                      <a:tailEnd type="none" w="med" len="med"/>
+                    </a:lnL>
+                    <a:lnR w="12700" cap="flat" cmpd="sng" algn="ctr">
+                      <a:solidFill>
+                        <a:srgbClr val="E4E7F0"/>
+                      </a:solidFill>
+                      <a:prstDash val="solid"/>
+                      <a:round/>
+                      <a:headEnd type="none" w="med" len="med"/>
+                      <a:tailEnd type="none" w="med" len="med"/>
+                    </a:lnR>
+                    <a:lnT w="12700" cap="flat" cmpd="sng" algn="ctr">
+                      <a:solidFill>
+                        <a:srgbClr val="E4E7F0"/>
+                      </a:solidFill>
+                      <a:prstDash val="solid"/>
+                      <a:round/>
+                      <a:headEnd type="none" w="med" len="med"/>
+                      <a:tailEnd type="none" w="med" len="med"/>
+                    </a:lnT>
+                    <a:lnB w="12700" cap="flat" cmpd="sng" algn="ctr">
+                      <a:solidFill>
+                        <a:srgbClr val="E4E7F0"/>
+                      </a:solidFill>
+                      <a:prstDash val="solid"/>
+                      <a:round/>
+                      <a:headEnd type="none" w="med" len="med"/>
+                      <a:tailEnd type="none" w="med" len="med"/>
+                    </a:lnB>
+                    <a:solidFill>
+                      <a:srgbClr val="FFFFFF"/>
+                    </a:solidFill>
+                  </a:tcPr>
+                </a:tc>
+                <a:tc>
+                  <a:txBody>
+                    <a:bodyPr/>
+                    <a:lstStyle/>
+                    <a:p>
+                      <a:pPr algn="ctr" indent="0" marL="0">
+                        <a:buNone/>
+                      </a:pPr>
+                      <a:r>
+                        <a:rPr lang="en-US" sz="1050" dirty="0">
+                          <a:solidFill>
+                            <a:srgbClr val="B8892B"/>
+                          </a:solidFill>
+                          <a:latin typeface="Calibri" pitchFamily="34" charset="0"/>
+                          <a:ea typeface="Calibri" pitchFamily="34" charset="-122"/>
+                          <a:cs typeface="Calibri" pitchFamily="34" charset="-120"/>
+                        </a:rPr>
+                        <a:t>1</a:t>
+                      </a:r>
+                      <a:endParaRPr lang="en-US" sz="1050" dirty="0">
+                        <a:latin typeface="Calibri" charset="0"/>
+                        <a:ea typeface="Calibri" charset="0"/>
+                        <a:cs typeface="Calibri" charset="0"/>
+                      </a:endParaRPr>
+                    </a:p>
+                  </a:txBody>
+                  <a:tcPr marL="45720" marR="45720" marT="18288" marB="18288" anchor="ctr">
+                    <a:lnL w="12700" cap="flat" cmpd="sng" algn="ctr">
+                      <a:solidFill>
+                        <a:srgbClr val="E4E7F0"/>
+                      </a:solidFill>
+                      <a:prstDash val="solid"/>
+                      <a:round/>
+                      <a:headEnd type="none" w="med" len="med"/>
+                      <a:tailEnd type="none" w="med" len="med"/>
+                    </a:lnL>
+                    <a:lnR w="12700" cap="flat" cmpd="sng" algn="ctr">
+                      <a:solidFill>
+                        <a:srgbClr val="E4E7F0"/>
+                      </a:solidFill>
+                      <a:prstDash val="solid"/>
+                      <a:round/>
+                      <a:headEnd type="none" w="med" len="med"/>
+                      <a:tailEnd type="none" w="med" len="med"/>
+                    </a:lnR>
+                    <a:lnT w="12700" cap="flat" cmpd="sng" algn="ctr">
+                      <a:solidFill>
+                        <a:srgbClr val="E4E7F0"/>
+                      </a:solidFill>
+                      <a:prstDash val="solid"/>
+                      <a:round/>
+                      <a:headEnd type="none" w="med" len="med"/>
+                      <a:tailEnd type="none" w="med" len="med"/>
+                    </a:lnT>
+                    <a:lnB w="12700" cap="flat" cmpd="sng" algn="ctr">
+                      <a:solidFill>
+                        <a:srgbClr val="E4E7F0"/>
+                      </a:solidFill>
+                      <a:prstDash val="solid"/>
+                      <a:round/>
+                      <a:headEnd type="none" w="med" len="med"/>
+                      <a:tailEnd type="none" w="med" len="med"/>
+                    </a:lnB>
+                    <a:solidFill>
+                      <a:srgbClr val="FFFFFF"/>
+                    </a:solidFill>
+                  </a:tcPr>
+                </a:tc>
+                <a:tc>
+                  <a:txBody>
+                    <a:bodyPr/>
+                    <a:lstStyle/>
+                    <a:p>
+                      <a:pPr algn="ctr" indent="0" marL="0">
+                        <a:buNone/>
+                      </a:pPr>
+                      <a:r>
+                        <a:rPr lang="en-US" sz="1050" dirty="0">
+                          <a:solidFill>
+                            <a:srgbClr val="33344A"/>
+                          </a:solidFill>
+                          <a:latin typeface="Calibri" pitchFamily="34" charset="0"/>
+                          <a:ea typeface="Calibri" pitchFamily="34" charset="-122"/>
+                          <a:cs typeface="Calibri" pitchFamily="34" charset="-120"/>
+                        </a:rPr>
+                        <a:t>0</a:t>
+                      </a:r>
+                      <a:endParaRPr lang="en-US" sz="1050" dirty="0">
+                        <a:latin typeface="Calibri" charset="0"/>
+                        <a:ea typeface="Calibri" charset="0"/>
+                        <a:cs typeface="Calibri" charset="0"/>
+                      </a:endParaRPr>
+                    </a:p>
+                  </a:txBody>
+                  <a:tcPr marL="45720" marR="45720" marT="18288" marB="18288" anchor="ctr">
+                    <a:lnL w="12700" cap="flat" cmpd="sng" algn="ctr">
+                      <a:solidFill>
+                        <a:srgbClr val="E4E7F0"/>
+                      </a:solidFill>
+                      <a:prstDash val="solid"/>
+                      <a:round/>
+                      <a:headEnd type="none" w="med" len="med"/>
+                      <a:tailEnd type="none" w="med" len="med"/>
+                    </a:lnL>
+                    <a:lnR w="12700" cap="flat" cmpd="sng" algn="ctr">
+                      <a:solidFill>
+                        <a:srgbClr val="E4E7F0"/>
+                      </a:solidFill>
+                      <a:prstDash val="solid"/>
+                      <a:round/>
+                      <a:headEnd type="none" w="med" len="med"/>
+                      <a:tailEnd type="none" w="med" len="med"/>
+                    </a:lnR>
+                    <a:lnT w="12700" cap="flat" cmpd="sng" algn="ctr">
+                      <a:solidFill>
+                        <a:srgbClr val="E4E7F0"/>
+                      </a:solidFill>
+                      <a:prstDash val="solid"/>
+                      <a:round/>
+                      <a:headEnd type="none" w="med" len="med"/>
+                      <a:tailEnd type="none" w="med" len="med"/>
+                    </a:lnT>
+                    <a:lnB w="12700" cap="flat" cmpd="sng" algn="ctr">
+                      <a:solidFill>
+                        <a:srgbClr val="E4E7F0"/>
+                      </a:solidFill>
+                      <a:prstDash val="solid"/>
+                      <a:round/>
+                      <a:headEnd type="none" w="med" len="med"/>
+                      <a:tailEnd type="none" w="med" len="med"/>
+                    </a:lnB>
+                    <a:solidFill>
+                      <a:srgbClr val="FFFFFF"/>
+                    </a:solidFill>
+                  </a:tcPr>
+                </a:tc>
+              </a:tr>
+              <a:tr h="195943">
+                <a:tc>
+                  <a:txBody>
+                    <a:bodyPr/>
+                    <a:lstStyle/>
+                    <a:p>
+                      <a:pPr algn="ctr" indent="0" marL="0">
+                        <a:buNone/>
+                      </a:pPr>
+                      <a:r>
+                        <a:rPr lang="en-US" sz="1050" b="1" dirty="0">
+                          <a:solidFill>
+                            <a:srgbClr val="33344A"/>
+                          </a:solidFill>
+                          <a:latin typeface="Calibri" pitchFamily="34" charset="0"/>
+                          <a:ea typeface="Calibri" pitchFamily="34" charset="-122"/>
+                          <a:cs typeface="Calibri" pitchFamily="34" charset="-120"/>
+                        </a:rPr>
+                        <a:t>F</a:t>
+                      </a:r>
+                      <a:endParaRPr lang="en-US" sz="1050" dirty="0">
+                        <a:latin typeface="Calibri" charset="0"/>
+                        <a:ea typeface="Calibri" charset="0"/>
+                        <a:cs typeface="Calibri" charset="0"/>
+                      </a:endParaRPr>
+                    </a:p>
+                  </a:txBody>
+                  <a:tcPr marL="45720" marR="45720" marT="18288" marB="18288" anchor="ctr">
+                    <a:lnL w="12700" cap="flat" cmpd="sng" algn="ctr">
+                      <a:solidFill>
+                        <a:srgbClr val="E4E7F0"/>
+                      </a:solidFill>
+                      <a:prstDash val="solid"/>
+                      <a:round/>
+                      <a:headEnd type="none" w="med" len="med"/>
+                      <a:tailEnd type="none" w="med" len="med"/>
+                    </a:lnL>
+                    <a:lnR w="12700" cap="flat" cmpd="sng" algn="ctr">
+                      <a:solidFill>
+                        <a:srgbClr val="E4E7F0"/>
+                      </a:solidFill>
+                      <a:prstDash val="solid"/>
+                      <a:round/>
+                      <a:headEnd type="none" w="med" len="med"/>
+                      <a:tailEnd type="none" w="med" len="med"/>
+                    </a:lnR>
+                    <a:lnT w="12700" cap="flat" cmpd="sng" algn="ctr">
+                      <a:solidFill>
+                        <a:srgbClr val="E4E7F0"/>
+                      </a:solidFill>
+                      <a:prstDash val="solid"/>
+                      <a:round/>
+                      <a:headEnd type="none" w="med" len="med"/>
+                      <a:tailEnd type="none" w="med" len="med"/>
+                    </a:lnT>
+                    <a:lnB w="12700" cap="flat" cmpd="sng" algn="ctr">
+                      <a:solidFill>
+                        <a:srgbClr val="E4E7F0"/>
+                      </a:solidFill>
+                      <a:prstDash val="solid"/>
+                      <a:round/>
+                      <a:headEnd type="none" w="med" len="med"/>
+                      <a:tailEnd type="none" w="med" len="med"/>
+                    </a:lnB>
+                    <a:solidFill>
+                      <a:srgbClr val="F4F6FB"/>
+                    </a:solidFill>
+                  </a:tcPr>
+                </a:tc>
+                <a:tc>
+                  <a:txBody>
+                    <a:bodyPr/>
+                    <a:lstStyle/>
+                    <a:p>
+                      <a:pPr algn="ctr" indent="0" marL="0">
+                        <a:buNone/>
+                      </a:pPr>
+                      <a:r>
+                        <a:rPr lang="en-US" sz="1050" dirty="0">
+                          <a:solidFill>
+                            <a:srgbClr val="B8892B"/>
+                          </a:solidFill>
+                          <a:latin typeface="Calibri" pitchFamily="34" charset="0"/>
+                          <a:ea typeface="Calibri" pitchFamily="34" charset="-122"/>
+                          <a:cs typeface="Calibri" pitchFamily="34" charset="-120"/>
+                        </a:rPr>
+                        <a:t>1</a:t>
+                      </a:r>
+                      <a:endParaRPr lang="en-US" sz="1050" dirty="0">
+                        <a:latin typeface="Calibri" charset="0"/>
+                        <a:ea typeface="Calibri" charset="0"/>
+                        <a:cs typeface="Calibri" charset="0"/>
+                      </a:endParaRPr>
+                    </a:p>
+                  </a:txBody>
+                  <a:tcPr marL="45720" marR="45720" marT="18288" marB="18288" anchor="ctr">
+                    <a:lnL w="12700" cap="flat" cmpd="sng" algn="ctr">
+                      <a:solidFill>
+                        <a:srgbClr val="E4E7F0"/>
+                      </a:solidFill>
+                      <a:prstDash val="solid"/>
+                      <a:round/>
+                      <a:headEnd type="none" w="med" len="med"/>
+                      <a:tailEnd type="none" w="med" len="med"/>
+                    </a:lnL>
+                    <a:lnR w="12700" cap="flat" cmpd="sng" algn="ctr">
+                      <a:solidFill>
+                        <a:srgbClr val="E4E7F0"/>
+                      </a:solidFill>
+                      <a:prstDash val="solid"/>
+                      <a:round/>
+                      <a:headEnd type="none" w="med" len="med"/>
+                      <a:tailEnd type="none" w="med" len="med"/>
+                    </a:lnR>
+                    <a:lnT w="12700" cap="flat" cmpd="sng" algn="ctr">
+                      <a:solidFill>
+                        <a:srgbClr val="E4E7F0"/>
+                      </a:solidFill>
+                      <a:prstDash val="solid"/>
+                      <a:round/>
+                      <a:headEnd type="none" w="med" len="med"/>
+                      <a:tailEnd type="none" w="med" len="med"/>
+                    </a:lnT>
+                    <a:lnB w="12700" cap="flat" cmpd="sng" algn="ctr">
+                      <a:solidFill>
+                        <a:srgbClr val="E4E7F0"/>
+                      </a:solidFill>
+                      <a:prstDash val="solid"/>
+                      <a:round/>
+                      <a:headEnd type="none" w="med" len="med"/>
+                      <a:tailEnd type="none" w="med" len="med"/>
+                    </a:lnB>
+                    <a:solidFill>
+                      <a:srgbClr val="F4F6FB"/>
+                    </a:solidFill>
+                  </a:tcPr>
+                </a:tc>
+                <a:tc>
+                  <a:txBody>
+                    <a:bodyPr/>
+                    <a:lstStyle/>
+                    <a:p>
+                      <a:pPr algn="ctr" indent="0" marL="0">
+                        <a:buNone/>
+                      </a:pPr>
+                      <a:r>
+                        <a:rPr lang="en-US" sz="1050" dirty="0">
+                          <a:solidFill>
+                            <a:srgbClr val="33344A"/>
+                          </a:solidFill>
+                          <a:latin typeface="Calibri" pitchFamily="34" charset="0"/>
+                          <a:ea typeface="Calibri" pitchFamily="34" charset="-122"/>
+                          <a:cs typeface="Calibri" pitchFamily="34" charset="-120"/>
+                        </a:rPr>
+                        <a:t>1</a:t>
+                      </a:r>
+                      <a:endParaRPr lang="en-US" sz="1050" dirty="0">
+                        <a:latin typeface="Calibri" charset="0"/>
+                        <a:ea typeface="Calibri" charset="0"/>
+                        <a:cs typeface="Calibri" charset="0"/>
+                      </a:endParaRPr>
+                    </a:p>
+                  </a:txBody>
+                  <a:tcPr marL="45720" marR="45720" marT="18288" marB="18288" anchor="ctr">
+                    <a:lnL w="12700" cap="flat" cmpd="sng" algn="ctr">
+                      <a:solidFill>
+                        <a:srgbClr val="E4E7F0"/>
+                      </a:solidFill>
+                      <a:prstDash val="solid"/>
+                      <a:round/>
+                      <a:headEnd type="none" w="med" len="med"/>
+                      <a:tailEnd type="none" w="med" len="med"/>
+                    </a:lnL>
+                    <a:lnR w="12700" cap="flat" cmpd="sng" algn="ctr">
+                      <a:solidFill>
+                        <a:srgbClr val="E4E7F0"/>
+                      </a:solidFill>
+                      <a:prstDash val="solid"/>
+                      <a:round/>
+                      <a:headEnd type="none" w="med" len="med"/>
+                      <a:tailEnd type="none" w="med" len="med"/>
+                    </a:lnR>
+                    <a:lnT w="12700" cap="flat" cmpd="sng" algn="ctr">
+                      <a:solidFill>
+                        <a:srgbClr val="E4E7F0"/>
+                      </a:solidFill>
+                      <a:prstDash val="solid"/>
+                      <a:round/>
+                      <a:headEnd type="none" w="med" len="med"/>
+                      <a:tailEnd type="none" w="med" len="med"/>
+                    </a:lnT>
+                    <a:lnB w="12700" cap="flat" cmpd="sng" algn="ctr">
+                      <a:solidFill>
+                        <a:srgbClr val="E4E7F0"/>
+                      </a:solidFill>
+                      <a:prstDash val="solid"/>
+                      <a:round/>
+                      <a:headEnd type="none" w="med" len="med"/>
+                      <a:tailEnd type="none" w="med" len="med"/>
+                    </a:lnB>
+                    <a:solidFill>
+                      <a:srgbClr val="F4F6FB"/>
+                    </a:solidFill>
+                  </a:tcPr>
+                </a:tc>
+              </a:tr>
+            </a:tbl>
+          </a:graphicData>
+        </a:graphic>
+      </p:graphicFrame>
+      <p:sp>
+        <p:nvSpPr>
+          <p:cNvPr id="7" name="Shape 4"/>
           <p:cNvSpPr/>
           <p:nvPr/>
         </p:nvSpPr>
         <p:spPr>
           <a:xfrm>
-            <a:off x="6263640" y="1417320"/>
-            <a:ext cx="5349240" cy="1600200"/>
+            <a:off x="6263640" y="1371600"/>
+            <a:ext cx="5349240" cy="1965960"/>
           </a:xfrm>
           <a:prstGeom prst="roundRect">
             <a:avLst>
-              <a:gd name="adj" fmla="val 5714"/>
+              <a:gd name="adj" fmla="val 4651"/>
             </a:avLst>
           </a:prstGeom>
           <a:solidFill>
@@ -12952,14 +14397,14 @@
       </p:sp>
       <p:sp>
         <p:nvSpPr>
-          <p:cNvPr id="8" name="Text 6"/>
+          <p:cNvPr id="8" name="Text 5"/>
           <p:cNvSpPr txBox="1"/>
           <p:nvPr/>
         </p:nvSpPr>
         <p:spPr>
           <a:xfrm>
-            <a:off x="6537960" y="1581912"/>
-            <a:ext cx="4800600" cy="320040"/>
+            <a:off x="6492240" y="1508760"/>
+            <a:ext cx="4892040" cy="274320"/>
           </a:xfrm>
           <a:prstGeom prst="rect">
             <a:avLst/>
@@ -12975,7 +14420,7 @@
               <a:buNone/>
             </a:pPr>
             <a:r>
-              <a:rPr lang="en-US" sz="1150" b="1" spc="150" kern="0" dirty="0">
+              <a:rPr lang="en-US" sz="1100" b="1" dirty="0">
                 <a:solidFill>
                   <a:srgbClr val="B8892B"/>
                 </a:solidFill>
@@ -12983,68 +14428,830 @@
                 <a:ea typeface="Calibri" pitchFamily="34" charset="-122"/>
                 <a:cs typeface="Calibri" pitchFamily="34" charset="-120"/>
               </a:rPr>
-              <a:t>SCORE</a:t>
+              <a:t>SCORE   </a:t>
             </a:r>
-            <a:endParaRPr lang="en-US" sz="1150" dirty="0"/>
-          </a:p>
-        </p:txBody>
-      </p:sp>
-      <p:sp>
-        <p:nvSpPr>
-          <p:cNvPr id="9" name="Text 7"/>
-          <p:cNvSpPr txBox="1"/>
-          <p:nvPr/>
-        </p:nvSpPr>
-        <p:spPr>
-          <a:xfrm>
-            <a:off x="6537960" y="1920240"/>
-            <a:ext cx="4800600" cy="914400"/>
-          </a:xfrm>
-          <a:prstGeom prst="rect">
-            <a:avLst/>
-          </a:prstGeom>
-          <a:noFill/>
-          <a:ln/>
-        </p:spPr>
-        <p:txBody>
-          <a:bodyPr wrap="square" lIns="0" tIns="0" rIns="0" bIns="0" rtlCol="0" anchor="ctr"/>
-          <a:lstStyle/>
-          <a:p>
             <a:pPr indent="0" marL="0">
-              <a:lnSpc>
-                <a:spcPct val="120000"/>
-              </a:lnSpc>
               <a:buNone/>
             </a:pPr>
             <a:r>
-              <a:rPr lang="en-US" sz="1200" dirty="0">
+              <a:rPr lang="en-US" sz="1100" i="1" dirty="0">
                 <a:solidFill>
-                  <a:srgbClr val="33344A"/>
+                  <a:srgbClr val="6B7280"/>
                 </a:solidFill>
                 <a:latin typeface="Calibri" pitchFamily="34" charset="0"/>
                 <a:ea typeface="Calibri" pitchFamily="34" charset="-122"/>
                 <a:cs typeface="Calibri" pitchFamily="34" charset="-120"/>
               </a:rPr>
-              <a:t>Score every customer twice — once with is_treated=1, once with is_treated=0 — then τ(x) = f(x,1) − f(x,0). Only one model ever goes to production; scoring is just two forward passes per customer.</a:t>
+              <a:t>same model — TWO predict() calls per customer</a:t>
             </a:r>
-            <a:endParaRPr lang="en-US" sz="1200" dirty="0"/>
-          </a:p>
-        </p:txBody>
-      </p:sp>
-      <p:sp>
-        <p:nvSpPr>
-          <p:cNvPr id="10" name="Shape 8"/>
+            <a:endParaRPr lang="en-US" sz="1100" dirty="0"/>
+          </a:p>
+        </p:txBody>
+      </p:sp>
+      <p:graphicFrame>
+        <p:nvGraphicFramePr>
+          <p:cNvPr id="11" name="Table 1"/>
+          <p:cNvGraphicFramePr>
+            <a:graphicFrameLocks noGrp="1"/>
+          </p:cNvGraphicFramePr>
+          <p:nvPr>
+            <p:extLst>
+              <p:ext uri="{D42A27DB-BD31-4B8C-83A1-F6EECF244321}">
+                <p14:modId xmlns:p14="http://schemas.microsoft.com/office/powerpoint/2010/main" val="1579011935"/>
+              </p:ext>
+            </p:extLst>
+          </p:nvPr>
+        </p:nvGraphicFramePr>
+        <p:xfrm>
+          <a:off x="6492240" y="1828800"/>
+          <a:ext cx="4892040" cy="1371600"/>
+        </p:xfrm>
+        <a:graphic>
+          <a:graphicData uri="http://schemas.openxmlformats.org/drawingml/2006/table">
+            <a:tbl>
+              <a:tblPr/>
+              <a:tblGrid>
+                <a:gridCol w="1761134"/>
+                <a:gridCol w="1663294"/>
+                <a:gridCol w="1467612"/>
+              </a:tblGrid>
+              <a:tr h="342900">
+                <a:tc>
+                  <a:txBody>
+                    <a:bodyPr/>
+                    <a:lstStyle/>
+                    <a:p>
+                      <a:pPr algn="ctr" indent="0" marL="0">
+                        <a:buNone/>
+                      </a:pPr>
+                      <a:r>
+                        <a:rPr lang="en-US" sz="1150" b="1" dirty="0">
+                          <a:solidFill>
+                            <a:srgbClr val="FFFFFF"/>
+                          </a:solidFill>
+                          <a:latin typeface="Calibri" pitchFamily="34" charset="0"/>
+                          <a:ea typeface="Calibri" pitchFamily="34" charset="-122"/>
+                          <a:cs typeface="Calibri" pitchFamily="34" charset="-120"/>
+                        </a:rPr>
+                        <a:t>Predict call</a:t>
+                      </a:r>
+                      <a:endParaRPr lang="en-US" sz="1150" dirty="0">
+                        <a:latin typeface="Calibri" charset="0"/>
+                        <a:ea typeface="Calibri" charset="0"/>
+                        <a:cs typeface="Calibri" charset="0"/>
+                      </a:endParaRPr>
+                    </a:p>
+                  </a:txBody>
+                  <a:tcPr marL="54864" marR="54864" marT="36576" marB="36576" anchor="ctr">
+                    <a:lnL w="12700" cap="flat" cmpd="sng" algn="ctr">
+                      <a:solidFill>
+                        <a:srgbClr val="F0DFB0"/>
+                      </a:solidFill>
+                      <a:prstDash val="solid"/>
+                      <a:round/>
+                      <a:headEnd type="none" w="med" len="med"/>
+                      <a:tailEnd type="none" w="med" len="med"/>
+                    </a:lnL>
+                    <a:lnR w="12700" cap="flat" cmpd="sng" algn="ctr">
+                      <a:solidFill>
+                        <a:srgbClr val="F0DFB0"/>
+                      </a:solidFill>
+                      <a:prstDash val="solid"/>
+                      <a:round/>
+                      <a:headEnd type="none" w="med" len="med"/>
+                      <a:tailEnd type="none" w="med" len="med"/>
+                    </a:lnR>
+                    <a:lnT w="12700" cap="flat" cmpd="sng" algn="ctr">
+                      <a:solidFill>
+                        <a:srgbClr val="F0DFB0"/>
+                      </a:solidFill>
+                      <a:prstDash val="solid"/>
+                      <a:round/>
+                      <a:headEnd type="none" w="med" len="med"/>
+                      <a:tailEnd type="none" w="med" len="med"/>
+                    </a:lnT>
+                    <a:lnB w="12700" cap="flat" cmpd="sng" algn="ctr">
+                      <a:solidFill>
+                        <a:srgbClr val="F0DFB0"/>
+                      </a:solidFill>
+                      <a:prstDash val="solid"/>
+                      <a:round/>
+                      <a:headEnd type="none" w="med" len="med"/>
+                      <a:tailEnd type="none" w="med" len="med"/>
+                    </a:lnB>
+                    <a:solidFill>
+                      <a:srgbClr val="B8892B"/>
+                    </a:solidFill>
+                  </a:tcPr>
+                </a:tc>
+                <a:tc>
+                  <a:txBody>
+                    <a:bodyPr/>
+                    <a:lstStyle/>
+                    <a:p>
+                      <a:pPr algn="ctr" indent="0" marL="0">
+                        <a:buNone/>
+                      </a:pPr>
+                      <a:r>
+                        <a:rPr lang="en-US" sz="1150" b="1" dirty="0">
+                          <a:solidFill>
+                            <a:srgbClr val="FFFFFF"/>
+                          </a:solidFill>
+                          <a:latin typeface="Calibri" pitchFamily="34" charset="0"/>
+                          <a:ea typeface="Calibri" pitchFamily="34" charset="-122"/>
+                          <a:cs typeface="Calibri" pitchFamily="34" charset="-120"/>
+                        </a:rPr>
+                        <a:t>is_treated in</a:t>
+                      </a:r>
+                      <a:endParaRPr lang="en-US" sz="1150" dirty="0">
+                        <a:latin typeface="Calibri" charset="0"/>
+                        <a:ea typeface="Calibri" charset="0"/>
+                        <a:cs typeface="Calibri" charset="0"/>
+                      </a:endParaRPr>
+                    </a:p>
+                  </a:txBody>
+                  <a:tcPr marL="54864" marR="54864" marT="36576" marB="36576" anchor="ctr">
+                    <a:lnL w="12700" cap="flat" cmpd="sng" algn="ctr">
+                      <a:solidFill>
+                        <a:srgbClr val="F0DFB0"/>
+                      </a:solidFill>
+                      <a:prstDash val="solid"/>
+                      <a:round/>
+                      <a:headEnd type="none" w="med" len="med"/>
+                      <a:tailEnd type="none" w="med" len="med"/>
+                    </a:lnL>
+                    <a:lnR w="12700" cap="flat" cmpd="sng" algn="ctr">
+                      <a:solidFill>
+                        <a:srgbClr val="F0DFB0"/>
+                      </a:solidFill>
+                      <a:prstDash val="solid"/>
+                      <a:round/>
+                      <a:headEnd type="none" w="med" len="med"/>
+                      <a:tailEnd type="none" w="med" len="med"/>
+                    </a:lnR>
+                    <a:lnT w="12700" cap="flat" cmpd="sng" algn="ctr">
+                      <a:solidFill>
+                        <a:srgbClr val="F0DFB0"/>
+                      </a:solidFill>
+                      <a:prstDash val="solid"/>
+                      <a:round/>
+                      <a:headEnd type="none" w="med" len="med"/>
+                      <a:tailEnd type="none" w="med" len="med"/>
+                    </a:lnT>
+                    <a:lnB w="12700" cap="flat" cmpd="sng" algn="ctr">
+                      <a:solidFill>
+                        <a:srgbClr val="F0DFB0"/>
+                      </a:solidFill>
+                      <a:prstDash val="solid"/>
+                      <a:round/>
+                      <a:headEnd type="none" w="med" len="med"/>
+                      <a:tailEnd type="none" w="med" len="med"/>
+                    </a:lnB>
+                    <a:solidFill>
+                      <a:srgbClr val="B8892B"/>
+                    </a:solidFill>
+                  </a:tcPr>
+                </a:tc>
+                <a:tc>
+                  <a:txBody>
+                    <a:bodyPr/>
+                    <a:lstStyle/>
+                    <a:p>
+                      <a:pPr algn="ctr" indent="0" marL="0">
+                        <a:buNone/>
+                      </a:pPr>
+                      <a:r>
+                        <a:rPr lang="en-US" sz="1150" b="1" dirty="0">
+                          <a:solidFill>
+                            <a:srgbClr val="FFFFFF"/>
+                          </a:solidFill>
+                          <a:latin typeface="Calibri" pitchFamily="34" charset="0"/>
+                          <a:ea typeface="Calibri" pitchFamily="34" charset="-122"/>
+                          <a:cs typeface="Calibri" pitchFamily="34" charset="-120"/>
+                        </a:rPr>
+                        <a:t>f(G, ·)</a:t>
+                      </a:r>
+                      <a:endParaRPr lang="en-US" sz="1150" dirty="0">
+                        <a:latin typeface="Calibri" charset="0"/>
+                        <a:ea typeface="Calibri" charset="0"/>
+                        <a:cs typeface="Calibri" charset="0"/>
+                      </a:endParaRPr>
+                    </a:p>
+                  </a:txBody>
+                  <a:tcPr marL="54864" marR="54864" marT="36576" marB="36576" anchor="ctr">
+                    <a:lnL w="12700" cap="flat" cmpd="sng" algn="ctr">
+                      <a:solidFill>
+                        <a:srgbClr val="F0DFB0"/>
+                      </a:solidFill>
+                      <a:prstDash val="solid"/>
+                      <a:round/>
+                      <a:headEnd type="none" w="med" len="med"/>
+                      <a:tailEnd type="none" w="med" len="med"/>
+                    </a:lnL>
+                    <a:lnR w="12700" cap="flat" cmpd="sng" algn="ctr">
+                      <a:solidFill>
+                        <a:srgbClr val="F0DFB0"/>
+                      </a:solidFill>
+                      <a:prstDash val="solid"/>
+                      <a:round/>
+                      <a:headEnd type="none" w="med" len="med"/>
+                      <a:tailEnd type="none" w="med" len="med"/>
+                    </a:lnR>
+                    <a:lnT w="12700" cap="flat" cmpd="sng" algn="ctr">
+                      <a:solidFill>
+                        <a:srgbClr val="F0DFB0"/>
+                      </a:solidFill>
+                      <a:prstDash val="solid"/>
+                      <a:round/>
+                      <a:headEnd type="none" w="med" len="med"/>
+                      <a:tailEnd type="none" w="med" len="med"/>
+                    </a:lnT>
+                    <a:lnB w="12700" cap="flat" cmpd="sng" algn="ctr">
+                      <a:solidFill>
+                        <a:srgbClr val="F0DFB0"/>
+                      </a:solidFill>
+                      <a:prstDash val="solid"/>
+                      <a:round/>
+                      <a:headEnd type="none" w="med" len="med"/>
+                      <a:tailEnd type="none" w="med" len="med"/>
+                    </a:lnB>
+                    <a:solidFill>
+                      <a:srgbClr val="B8892B"/>
+                    </a:solidFill>
+                  </a:tcPr>
+                </a:tc>
+              </a:tr>
+              <a:tr h="342900">
+                <a:tc>
+                  <a:txBody>
+                    <a:bodyPr/>
+                    <a:lstStyle/>
+                    <a:p>
+                      <a:pPr algn="ctr" indent="0" marL="0">
+                        <a:buNone/>
+                      </a:pPr>
+                      <a:r>
+                        <a:rPr lang="en-US" sz="1150" b="1" dirty="0">
+                          <a:solidFill>
+                            <a:srgbClr val="1E2761"/>
+                          </a:solidFill>
+                          <a:latin typeface="Calibri" pitchFamily="34" charset="0"/>
+                          <a:ea typeface="Calibri" pitchFamily="34" charset="-122"/>
+                          <a:cs typeface="Calibri" pitchFamily="34" charset="-120"/>
+                        </a:rPr>
+                        <a:t>Call 1</a:t>
+                      </a:r>
+                      <a:endParaRPr lang="en-US" sz="1150" dirty="0">
+                        <a:latin typeface="Calibri" charset="0"/>
+                        <a:ea typeface="Calibri" charset="0"/>
+                        <a:cs typeface="Calibri" charset="0"/>
+                      </a:endParaRPr>
+                    </a:p>
+                  </a:txBody>
+                  <a:tcPr marL="54864" marR="54864" marT="36576" marB="36576" anchor="ctr">
+                    <a:lnL w="12700" cap="flat" cmpd="sng" algn="ctr">
+                      <a:solidFill>
+                        <a:srgbClr val="F0DFB0"/>
+                      </a:solidFill>
+                      <a:prstDash val="solid"/>
+                      <a:round/>
+                      <a:headEnd type="none" w="med" len="med"/>
+                      <a:tailEnd type="none" w="med" len="med"/>
+                    </a:lnL>
+                    <a:lnR w="12700" cap="flat" cmpd="sng" algn="ctr">
+                      <a:solidFill>
+                        <a:srgbClr val="F0DFB0"/>
+                      </a:solidFill>
+                      <a:prstDash val="solid"/>
+                      <a:round/>
+                      <a:headEnd type="none" w="med" len="med"/>
+                      <a:tailEnd type="none" w="med" len="med"/>
+                    </a:lnR>
+                    <a:lnT w="12700" cap="flat" cmpd="sng" algn="ctr">
+                      <a:solidFill>
+                        <a:srgbClr val="F0DFB0"/>
+                      </a:solidFill>
+                      <a:prstDash val="solid"/>
+                      <a:round/>
+                      <a:headEnd type="none" w="med" len="med"/>
+                      <a:tailEnd type="none" w="med" len="med"/>
+                    </a:lnT>
+                    <a:lnB w="12700" cap="flat" cmpd="sng" algn="ctr">
+                      <a:solidFill>
+                        <a:srgbClr val="F0DFB0"/>
+                      </a:solidFill>
+                      <a:prstDash val="solid"/>
+                      <a:round/>
+                      <a:headEnd type="none" w="med" len="med"/>
+                      <a:tailEnd type="none" w="med" len="med"/>
+                    </a:lnB>
+                    <a:solidFill>
+                      <a:srgbClr val="FFFFFF"/>
+                    </a:solidFill>
+                  </a:tcPr>
+                </a:tc>
+                <a:tc>
+                  <a:txBody>
+                    <a:bodyPr/>
+                    <a:lstStyle/>
+                    <a:p>
+                      <a:pPr algn="ctr" indent="0" marL="0">
+                        <a:buNone/>
+                      </a:pPr>
+                      <a:r>
+                        <a:rPr lang="en-US" sz="1150" dirty="0">
+                          <a:solidFill>
+                            <a:srgbClr val="B8892B"/>
+                          </a:solidFill>
+                          <a:latin typeface="Calibri" pitchFamily="34" charset="0"/>
+                          <a:ea typeface="Calibri" pitchFamily="34" charset="-122"/>
+                          <a:cs typeface="Calibri" pitchFamily="34" charset="-120"/>
+                        </a:rPr>
+                        <a:t>1  (treated)</a:t>
+                      </a:r>
+                      <a:endParaRPr lang="en-US" sz="1150" dirty="0">
+                        <a:latin typeface="Calibri" charset="0"/>
+                        <a:ea typeface="Calibri" charset="0"/>
+                        <a:cs typeface="Calibri" charset="0"/>
+                      </a:endParaRPr>
+                    </a:p>
+                  </a:txBody>
+                  <a:tcPr marL="54864" marR="54864" marT="36576" marB="36576" anchor="ctr">
+                    <a:lnL w="12700" cap="flat" cmpd="sng" algn="ctr">
+                      <a:solidFill>
+                        <a:srgbClr val="F0DFB0"/>
+                      </a:solidFill>
+                      <a:prstDash val="solid"/>
+                      <a:round/>
+                      <a:headEnd type="none" w="med" len="med"/>
+                      <a:tailEnd type="none" w="med" len="med"/>
+                    </a:lnL>
+                    <a:lnR w="12700" cap="flat" cmpd="sng" algn="ctr">
+                      <a:solidFill>
+                        <a:srgbClr val="F0DFB0"/>
+                      </a:solidFill>
+                      <a:prstDash val="solid"/>
+                      <a:round/>
+                      <a:headEnd type="none" w="med" len="med"/>
+                      <a:tailEnd type="none" w="med" len="med"/>
+                    </a:lnR>
+                    <a:lnT w="12700" cap="flat" cmpd="sng" algn="ctr">
+                      <a:solidFill>
+                        <a:srgbClr val="F0DFB0"/>
+                      </a:solidFill>
+                      <a:prstDash val="solid"/>
+                      <a:round/>
+                      <a:headEnd type="none" w="med" len="med"/>
+                      <a:tailEnd type="none" w="med" len="med"/>
+                    </a:lnT>
+                    <a:lnB w="12700" cap="flat" cmpd="sng" algn="ctr">
+                      <a:solidFill>
+                        <a:srgbClr val="F0DFB0"/>
+                      </a:solidFill>
+                      <a:prstDash val="solid"/>
+                      <a:round/>
+                      <a:headEnd type="none" w="med" len="med"/>
+                      <a:tailEnd type="none" w="med" len="med"/>
+                    </a:lnB>
+                    <a:solidFill>
+                      <a:srgbClr val="FFFFFF"/>
+                    </a:solidFill>
+                  </a:tcPr>
+                </a:tc>
+                <a:tc>
+                  <a:txBody>
+                    <a:bodyPr/>
+                    <a:lstStyle/>
+                    <a:p>
+                      <a:pPr algn="ctr" indent="0" marL="0">
+                        <a:buNone/>
+                      </a:pPr>
+                      <a:r>
+                        <a:rPr lang="en-US" sz="1150" dirty="0">
+                          <a:solidFill>
+                            <a:srgbClr val="33344A"/>
+                          </a:solidFill>
+                          <a:latin typeface="Calibri" pitchFamily="34" charset="0"/>
+                          <a:ea typeface="Calibri" pitchFamily="34" charset="-122"/>
+                          <a:cs typeface="Calibri" pitchFamily="34" charset="-120"/>
+                        </a:rPr>
+                        <a:t>0.42</a:t>
+                      </a:r>
+                      <a:endParaRPr lang="en-US" sz="1150" dirty="0">
+                        <a:latin typeface="Calibri" charset="0"/>
+                        <a:ea typeface="Calibri" charset="0"/>
+                        <a:cs typeface="Calibri" charset="0"/>
+                      </a:endParaRPr>
+                    </a:p>
+                  </a:txBody>
+                  <a:tcPr marL="54864" marR="54864" marT="36576" marB="36576" anchor="ctr">
+                    <a:lnL w="12700" cap="flat" cmpd="sng" algn="ctr">
+                      <a:solidFill>
+                        <a:srgbClr val="F0DFB0"/>
+                      </a:solidFill>
+                      <a:prstDash val="solid"/>
+                      <a:round/>
+                      <a:headEnd type="none" w="med" len="med"/>
+                      <a:tailEnd type="none" w="med" len="med"/>
+                    </a:lnL>
+                    <a:lnR w="12700" cap="flat" cmpd="sng" algn="ctr">
+                      <a:solidFill>
+                        <a:srgbClr val="F0DFB0"/>
+                      </a:solidFill>
+                      <a:prstDash val="solid"/>
+                      <a:round/>
+                      <a:headEnd type="none" w="med" len="med"/>
+                      <a:tailEnd type="none" w="med" len="med"/>
+                    </a:lnR>
+                    <a:lnT w="12700" cap="flat" cmpd="sng" algn="ctr">
+                      <a:solidFill>
+                        <a:srgbClr val="F0DFB0"/>
+                      </a:solidFill>
+                      <a:prstDash val="solid"/>
+                      <a:round/>
+                      <a:headEnd type="none" w="med" len="med"/>
+                      <a:tailEnd type="none" w="med" len="med"/>
+                    </a:lnT>
+                    <a:lnB w="12700" cap="flat" cmpd="sng" algn="ctr">
+                      <a:solidFill>
+                        <a:srgbClr val="F0DFB0"/>
+                      </a:solidFill>
+                      <a:prstDash val="solid"/>
+                      <a:round/>
+                      <a:headEnd type="none" w="med" len="med"/>
+                      <a:tailEnd type="none" w="med" len="med"/>
+                    </a:lnB>
+                    <a:solidFill>
+                      <a:srgbClr val="FFFFFF"/>
+                    </a:solidFill>
+                  </a:tcPr>
+                </a:tc>
+              </a:tr>
+              <a:tr h="342900">
+                <a:tc>
+                  <a:txBody>
+                    <a:bodyPr/>
+                    <a:lstStyle/>
+                    <a:p>
+                      <a:pPr algn="ctr" indent="0" marL="0">
+                        <a:buNone/>
+                      </a:pPr>
+                      <a:r>
+                        <a:rPr lang="en-US" sz="1150" b="1" dirty="0">
+                          <a:solidFill>
+                            <a:srgbClr val="1E2761"/>
+                          </a:solidFill>
+                          <a:latin typeface="Calibri" pitchFamily="34" charset="0"/>
+                          <a:ea typeface="Calibri" pitchFamily="34" charset="-122"/>
+                          <a:cs typeface="Calibri" pitchFamily="34" charset="-120"/>
+                        </a:rPr>
+                        <a:t>Call 2</a:t>
+                      </a:r>
+                      <a:endParaRPr lang="en-US" sz="1150" dirty="0">
+                        <a:latin typeface="Calibri" charset="0"/>
+                        <a:ea typeface="Calibri" charset="0"/>
+                        <a:cs typeface="Calibri" charset="0"/>
+                      </a:endParaRPr>
+                    </a:p>
+                  </a:txBody>
+                  <a:tcPr marL="54864" marR="54864" marT="36576" marB="36576" anchor="ctr">
+                    <a:lnL w="12700" cap="flat" cmpd="sng" algn="ctr">
+                      <a:solidFill>
+                        <a:srgbClr val="F0DFB0"/>
+                      </a:solidFill>
+                      <a:prstDash val="solid"/>
+                      <a:round/>
+                      <a:headEnd type="none" w="med" len="med"/>
+                      <a:tailEnd type="none" w="med" len="med"/>
+                    </a:lnL>
+                    <a:lnR w="12700" cap="flat" cmpd="sng" algn="ctr">
+                      <a:solidFill>
+                        <a:srgbClr val="F0DFB0"/>
+                      </a:solidFill>
+                      <a:prstDash val="solid"/>
+                      <a:round/>
+                      <a:headEnd type="none" w="med" len="med"/>
+                      <a:tailEnd type="none" w="med" len="med"/>
+                    </a:lnR>
+                    <a:lnT w="12700" cap="flat" cmpd="sng" algn="ctr">
+                      <a:solidFill>
+                        <a:srgbClr val="F0DFB0"/>
+                      </a:solidFill>
+                      <a:prstDash val="solid"/>
+                      <a:round/>
+                      <a:headEnd type="none" w="med" len="med"/>
+                      <a:tailEnd type="none" w="med" len="med"/>
+                    </a:lnT>
+                    <a:lnB w="12700" cap="flat" cmpd="sng" algn="ctr">
+                      <a:solidFill>
+                        <a:srgbClr val="F0DFB0"/>
+                      </a:solidFill>
+                      <a:prstDash val="solid"/>
+                      <a:round/>
+                      <a:headEnd type="none" w="med" len="med"/>
+                      <a:tailEnd type="none" w="med" len="med"/>
+                    </a:lnB>
+                    <a:solidFill>
+                      <a:srgbClr val="FBF3E1"/>
+                    </a:solidFill>
+                  </a:tcPr>
+                </a:tc>
+                <a:tc>
+                  <a:txBody>
+                    <a:bodyPr/>
+                    <a:lstStyle/>
+                    <a:p>
+                      <a:pPr algn="ctr" indent="0" marL="0">
+                        <a:buNone/>
+                      </a:pPr>
+                      <a:r>
+                        <a:rPr lang="en-US" sz="1150" dirty="0">
+                          <a:solidFill>
+                            <a:srgbClr val="1E2761"/>
+                          </a:solidFill>
+                          <a:latin typeface="Calibri" pitchFamily="34" charset="0"/>
+                          <a:ea typeface="Calibri" pitchFamily="34" charset="-122"/>
+                          <a:cs typeface="Calibri" pitchFamily="34" charset="-120"/>
+                        </a:rPr>
+                        <a:t>0  (control)</a:t>
+                      </a:r>
+                      <a:endParaRPr lang="en-US" sz="1150" dirty="0">
+                        <a:latin typeface="Calibri" charset="0"/>
+                        <a:ea typeface="Calibri" charset="0"/>
+                        <a:cs typeface="Calibri" charset="0"/>
+                      </a:endParaRPr>
+                    </a:p>
+                  </a:txBody>
+                  <a:tcPr marL="54864" marR="54864" marT="36576" marB="36576" anchor="ctr">
+                    <a:lnL w="12700" cap="flat" cmpd="sng" algn="ctr">
+                      <a:solidFill>
+                        <a:srgbClr val="F0DFB0"/>
+                      </a:solidFill>
+                      <a:prstDash val="solid"/>
+                      <a:round/>
+                      <a:headEnd type="none" w="med" len="med"/>
+                      <a:tailEnd type="none" w="med" len="med"/>
+                    </a:lnL>
+                    <a:lnR w="12700" cap="flat" cmpd="sng" algn="ctr">
+                      <a:solidFill>
+                        <a:srgbClr val="F0DFB0"/>
+                      </a:solidFill>
+                      <a:prstDash val="solid"/>
+                      <a:round/>
+                      <a:headEnd type="none" w="med" len="med"/>
+                      <a:tailEnd type="none" w="med" len="med"/>
+                    </a:lnR>
+                    <a:lnT w="12700" cap="flat" cmpd="sng" algn="ctr">
+                      <a:solidFill>
+                        <a:srgbClr val="F0DFB0"/>
+                      </a:solidFill>
+                      <a:prstDash val="solid"/>
+                      <a:round/>
+                      <a:headEnd type="none" w="med" len="med"/>
+                      <a:tailEnd type="none" w="med" len="med"/>
+                    </a:lnT>
+                    <a:lnB w="12700" cap="flat" cmpd="sng" algn="ctr">
+                      <a:solidFill>
+                        <a:srgbClr val="F0DFB0"/>
+                      </a:solidFill>
+                      <a:prstDash val="solid"/>
+                      <a:round/>
+                      <a:headEnd type="none" w="med" len="med"/>
+                      <a:tailEnd type="none" w="med" len="med"/>
+                    </a:lnB>
+                    <a:solidFill>
+                      <a:srgbClr val="FBF3E1"/>
+                    </a:solidFill>
+                  </a:tcPr>
+                </a:tc>
+                <a:tc>
+                  <a:txBody>
+                    <a:bodyPr/>
+                    <a:lstStyle/>
+                    <a:p>
+                      <a:pPr algn="ctr" indent="0" marL="0">
+                        <a:buNone/>
+                      </a:pPr>
+                      <a:r>
+                        <a:rPr lang="en-US" sz="1150" dirty="0">
+                          <a:solidFill>
+                            <a:srgbClr val="33344A"/>
+                          </a:solidFill>
+                          <a:latin typeface="Calibri" pitchFamily="34" charset="0"/>
+                          <a:ea typeface="Calibri" pitchFamily="34" charset="-122"/>
+                          <a:cs typeface="Calibri" pitchFamily="34" charset="-120"/>
+                        </a:rPr>
+                        <a:t>0.31</a:t>
+                      </a:r>
+                      <a:endParaRPr lang="en-US" sz="1150" dirty="0">
+                        <a:latin typeface="Calibri" charset="0"/>
+                        <a:ea typeface="Calibri" charset="0"/>
+                        <a:cs typeface="Calibri" charset="0"/>
+                      </a:endParaRPr>
+                    </a:p>
+                  </a:txBody>
+                  <a:tcPr marL="54864" marR="54864" marT="36576" marB="36576" anchor="ctr">
+                    <a:lnL w="12700" cap="flat" cmpd="sng" algn="ctr">
+                      <a:solidFill>
+                        <a:srgbClr val="F0DFB0"/>
+                      </a:solidFill>
+                      <a:prstDash val="solid"/>
+                      <a:round/>
+                      <a:headEnd type="none" w="med" len="med"/>
+                      <a:tailEnd type="none" w="med" len="med"/>
+                    </a:lnL>
+                    <a:lnR w="12700" cap="flat" cmpd="sng" algn="ctr">
+                      <a:solidFill>
+                        <a:srgbClr val="F0DFB0"/>
+                      </a:solidFill>
+                      <a:prstDash val="solid"/>
+                      <a:round/>
+                      <a:headEnd type="none" w="med" len="med"/>
+                      <a:tailEnd type="none" w="med" len="med"/>
+                    </a:lnR>
+                    <a:lnT w="12700" cap="flat" cmpd="sng" algn="ctr">
+                      <a:solidFill>
+                        <a:srgbClr val="F0DFB0"/>
+                      </a:solidFill>
+                      <a:prstDash val="solid"/>
+                      <a:round/>
+                      <a:headEnd type="none" w="med" len="med"/>
+                      <a:tailEnd type="none" w="med" len="med"/>
+                    </a:lnT>
+                    <a:lnB w="12700" cap="flat" cmpd="sng" algn="ctr">
+                      <a:solidFill>
+                        <a:srgbClr val="F0DFB0"/>
+                      </a:solidFill>
+                      <a:prstDash val="solid"/>
+                      <a:round/>
+                      <a:headEnd type="none" w="med" len="med"/>
+                      <a:tailEnd type="none" w="med" len="med"/>
+                    </a:lnB>
+                    <a:solidFill>
+                      <a:srgbClr val="FBF3E1"/>
+                    </a:solidFill>
+                  </a:tcPr>
+                </a:tc>
+              </a:tr>
+              <a:tr h="342900">
+                <a:tc gridSpan="2">
+                  <a:txBody>
+                    <a:bodyPr/>
+                    <a:lstStyle/>
+                    <a:p>
+                      <a:pPr algn="l" indent="0" marL="0">
+                        <a:buNone/>
+                      </a:pPr>
+                      <a:r>
+                        <a:rPr lang="en-US" sz="1150" b="1" dirty="0">
+                          <a:solidFill>
+                            <a:srgbClr val="FFFFFF"/>
+                          </a:solidFill>
+                          <a:latin typeface="Calibri" pitchFamily="34" charset="0"/>
+                          <a:ea typeface="Calibri" pitchFamily="34" charset="-122"/>
+                          <a:cs typeface="Calibri" pitchFamily="34" charset="-120"/>
+                        </a:rPr>
+                        <a:t>τ(G) = f(G,1) − f(G,0)</a:t>
+                      </a:r>
+                      <a:endParaRPr lang="en-US" sz="1150" dirty="0">
+                        <a:latin typeface="Calibri" charset="0"/>
+                        <a:ea typeface="Calibri" charset="0"/>
+                        <a:cs typeface="Calibri" charset="0"/>
+                      </a:endParaRPr>
+                    </a:p>
+                  </a:txBody>
+                  <a:tcPr marL="54864" marR="54864" marT="36576" marB="36576" anchor="ctr">
+                    <a:lnL w="12700" cap="flat" cmpd="sng" algn="ctr">
+                      <a:solidFill>
+                        <a:srgbClr val="F0DFB0"/>
+                      </a:solidFill>
+                      <a:prstDash val="solid"/>
+                      <a:round/>
+                      <a:headEnd type="none" w="med" len="med"/>
+                      <a:tailEnd type="none" w="med" len="med"/>
+                    </a:lnL>
+                    <a:lnR w="12700" cap="flat" cmpd="sng" algn="ctr">
+                      <a:solidFill>
+                        <a:srgbClr val="F0DFB0"/>
+                      </a:solidFill>
+                      <a:prstDash val="solid"/>
+                      <a:round/>
+                      <a:headEnd type="none" w="med" len="med"/>
+                      <a:tailEnd type="none" w="med" len="med"/>
+                    </a:lnR>
+                    <a:lnT w="12700" cap="flat" cmpd="sng" algn="ctr">
+                      <a:solidFill>
+                        <a:srgbClr val="F0DFB0"/>
+                      </a:solidFill>
+                      <a:prstDash val="solid"/>
+                      <a:round/>
+                      <a:headEnd type="none" w="med" len="med"/>
+                      <a:tailEnd type="none" w="med" len="med"/>
+                    </a:lnT>
+                    <a:lnB w="12700" cap="flat" cmpd="sng" algn="ctr">
+                      <a:solidFill>
+                        <a:srgbClr val="F0DFB0"/>
+                      </a:solidFill>
+                      <a:prstDash val="solid"/>
+                      <a:round/>
+                      <a:headEnd type="none" w="med" len="med"/>
+                      <a:tailEnd type="none" w="med" len="med"/>
+                    </a:lnB>
+                    <a:solidFill>
+                      <a:srgbClr val="141B4D"/>
+                    </a:solidFill>
+                  </a:tcPr>
+                </a:tc>
+                <a:tc hMerge="1">
+                  <a:tcPr/>
+                </a:tc>
+                <a:tc>
+                  <a:txBody>
+                    <a:bodyPr/>
+                    <a:lstStyle/>
+                    <a:p>
+                      <a:pPr algn="ctr" indent="0" marL="0">
+                        <a:buNone/>
+                      </a:pPr>
+                      <a:r>
+                        <a:rPr lang="en-US" sz="1500" b="1" dirty="0">
+                          <a:solidFill>
+                            <a:srgbClr val="B8892B"/>
+                          </a:solidFill>
+                          <a:latin typeface="Calibri" pitchFamily="34" charset="0"/>
+                          <a:ea typeface="Calibri" pitchFamily="34" charset="-122"/>
+                          <a:cs typeface="Calibri" pitchFamily="34" charset="-120"/>
+                        </a:rPr>
+                        <a:t>0.11</a:t>
+                      </a:r>
+                      <a:endParaRPr lang="en-US" sz="1500" dirty="0">
+                        <a:latin typeface="Calibri" charset="0"/>
+                        <a:ea typeface="Calibri" charset="0"/>
+                        <a:cs typeface="Calibri" charset="0"/>
+                      </a:endParaRPr>
+                    </a:p>
+                  </a:txBody>
+                  <a:tcPr marL="54864" marR="54864" marT="36576" marB="36576" anchor="ctr">
+                    <a:lnL w="12700" cap="flat" cmpd="sng" algn="ctr">
+                      <a:solidFill>
+                        <a:srgbClr val="F0DFB0"/>
+                      </a:solidFill>
+                      <a:prstDash val="solid"/>
+                      <a:round/>
+                      <a:headEnd type="none" w="med" len="med"/>
+                      <a:tailEnd type="none" w="med" len="med"/>
+                    </a:lnL>
+                    <a:lnR w="12700" cap="flat" cmpd="sng" algn="ctr">
+                      <a:solidFill>
+                        <a:srgbClr val="F0DFB0"/>
+                      </a:solidFill>
+                      <a:prstDash val="solid"/>
+                      <a:round/>
+                      <a:headEnd type="none" w="med" len="med"/>
+                      <a:tailEnd type="none" w="med" len="med"/>
+                    </a:lnR>
+                    <a:lnT w="12700" cap="flat" cmpd="sng" algn="ctr">
+                      <a:solidFill>
+                        <a:srgbClr val="F0DFB0"/>
+                      </a:solidFill>
+                      <a:prstDash val="solid"/>
+                      <a:round/>
+                      <a:headEnd type="none" w="med" len="med"/>
+                      <a:tailEnd type="none" w="med" len="med"/>
+                    </a:lnT>
+                    <a:lnB w="12700" cap="flat" cmpd="sng" algn="ctr">
+                      <a:solidFill>
+                        <a:srgbClr val="F0DFB0"/>
+                      </a:solidFill>
+                      <a:prstDash val="solid"/>
+                      <a:round/>
+                      <a:headEnd type="none" w="med" len="med"/>
+                      <a:tailEnd type="none" w="med" len="med"/>
+                    </a:lnB>
+                    <a:solidFill>
+                      <a:srgbClr val="141B4D"/>
+                    </a:solidFill>
+                  </a:tcPr>
+                </a:tc>
+              </a:tr>
+            </a:tbl>
+          </a:graphicData>
+        </a:graphic>
+      </p:graphicFrame>
+      <p:sp>
+        <p:nvSpPr>
+          <p:cNvPr id="10" name="Shape 6"/>
           <p:cNvSpPr/>
           <p:nvPr/>
         </p:nvSpPr>
         <p:spPr>
           <a:xfrm>
-            <a:off x="548640" y="3200400"/>
-            <a:ext cx="5349240" cy="1463040"/>
+            <a:off x="548640" y="3474720"/>
+            <a:ext cx="5349240" cy="1234440"/>
           </a:xfrm>
           <a:prstGeom prst="roundRect">
             <a:avLst>
-              <a:gd name="adj" fmla="val 6250"/>
+              <a:gd name="adj" fmla="val 7407"/>
             </a:avLst>
           </a:prstGeom>
           <a:solidFill>
@@ -13055,14 +15262,14 @@
       </p:sp>
       <p:sp>
         <p:nvSpPr>
-          <p:cNvPr id="11" name="Text 9"/>
+          <p:cNvPr id="11" name="Text 7"/>
           <p:cNvSpPr txBox="1"/>
           <p:nvPr/>
         </p:nvSpPr>
         <p:spPr>
           <a:xfrm>
-            <a:off x="822960" y="3346704"/>
-            <a:ext cx="4800600" cy="320040"/>
+            <a:off x="822960" y="3602736"/>
+            <a:ext cx="4800600" cy="292608"/>
           </a:xfrm>
           <a:prstGeom prst="rect">
             <a:avLst/>
@@ -13094,14 +15301,14 @@
       </p:sp>
       <p:sp>
         <p:nvSpPr>
-          <p:cNvPr id="12" name="Text 10"/>
+          <p:cNvPr id="12" name="Text 8"/>
           <p:cNvSpPr txBox="1"/>
           <p:nvPr/>
         </p:nvSpPr>
         <p:spPr>
           <a:xfrm>
-            <a:off x="822960" y="3703320"/>
-            <a:ext cx="4800600" cy="777240"/>
+            <a:off x="822960" y="3931920"/>
+            <a:ext cx="4800600" cy="640080"/>
           </a:xfrm>
           <a:prstGeom prst="rect">
             <a:avLst/>
@@ -13128,7 +15335,7 @@
                 <a:ea typeface="Calibri" pitchFamily="34" charset="-122"/>
                 <a:cs typeface="Calibri" pitchFamily="34" charset="-120"/>
               </a:rPr>
-              <a:t>One model to build, validate, and monitor in production. Pools all customers together, so it's data-efficient — useful when the control holdout is small.</a:t>
+              <a:t>One model to build and monitor. Pools all customers, so it's data-efficient when the control holdout is small.</a:t>
             </a:r>
             <a:endParaRPr lang="en-US" sz="1150" dirty="0"/>
           </a:p>
@@ -13136,18 +15343,18 @@
       </p:sp>
       <p:sp>
         <p:nvSpPr>
-          <p:cNvPr id="13" name="Shape 11"/>
+          <p:cNvPr id="13" name="Shape 9"/>
           <p:cNvSpPr/>
           <p:nvPr/>
         </p:nvSpPr>
         <p:spPr>
           <a:xfrm>
-            <a:off x="6263640" y="3200400"/>
-            <a:ext cx="5349240" cy="1463040"/>
+            <a:off x="6263640" y="3474720"/>
+            <a:ext cx="5349240" cy="1234440"/>
           </a:xfrm>
           <a:prstGeom prst="roundRect">
             <a:avLst>
-              <a:gd name="adj" fmla="val 6250"/>
+              <a:gd name="adj" fmla="val 7407"/>
             </a:avLst>
           </a:prstGeom>
           <a:solidFill>
@@ -13158,14 +15365,14 @@
       </p:sp>
       <p:sp>
         <p:nvSpPr>
-          <p:cNvPr id="14" name="Text 12"/>
+          <p:cNvPr id="14" name="Text 10"/>
           <p:cNvSpPr txBox="1"/>
           <p:nvPr/>
         </p:nvSpPr>
         <p:spPr>
           <a:xfrm>
-            <a:off x="6537960" y="3346704"/>
-            <a:ext cx="4800600" cy="320040"/>
+            <a:off x="6537960" y="3602736"/>
+            <a:ext cx="4800600" cy="292608"/>
           </a:xfrm>
           <a:prstGeom prst="rect">
             <a:avLst/>
@@ -13197,14 +15404,14 @@
       </p:sp>
       <p:sp>
         <p:nvSpPr>
-          <p:cNvPr id="15" name="Text 13"/>
+          <p:cNvPr id="15" name="Text 11"/>
           <p:cNvSpPr txBox="1"/>
           <p:nvPr/>
         </p:nvSpPr>
         <p:spPr>
           <a:xfrm>
-            <a:off x="6537960" y="3703320"/>
-            <a:ext cx="4800600" cy="777240"/>
+            <a:off x="6537960" y="3931920"/>
+            <a:ext cx="4800600" cy="640080"/>
           </a:xfrm>
           <a:prstGeom prst="rect">
             <a:avLst/>
@@ -13231,7 +15438,7 @@
                 <a:ea typeface="Calibri" pitchFamily="34" charset="-122"/>
                 <a:cs typeface="Calibri" pitchFamily="34" charset="-120"/>
               </a:rPr>
-              <a:t>Regularization and tree-splitting have no reason to favor one is_treated feature over dozens of stronger baseline predictors. Left alone, the model can end up nearly ignoring treatment.</a:t>
+              <a:t>Regularization has no reason to favor one is_treated feature over dozens of stronger predictors — treatment can get nearly ignored.</a:t>
             </a:r>
             <a:endParaRPr lang="en-US" sz="1150" dirty="0"/>
           </a:p>
@@ -13239,18 +15446,18 @@
       </p:sp>
       <p:sp>
         <p:nvSpPr>
-          <p:cNvPr id="16" name="Shape 14"/>
+          <p:cNvPr id="16" name="Shape 12"/>
           <p:cNvSpPr/>
           <p:nvPr/>
         </p:nvSpPr>
         <p:spPr>
           <a:xfrm>
             <a:off x="548640" y="4846320"/>
-            <a:ext cx="11064240" cy="1188720"/>
+            <a:ext cx="11064240" cy="1051560"/>
           </a:xfrm>
           <a:prstGeom prst="roundRect">
             <a:avLst>
-              <a:gd name="adj" fmla="val 6154"/>
+              <a:gd name="adj" fmla="val 6957"/>
             </a:avLst>
           </a:prstGeom>
           <a:solidFill>
@@ -13261,14 +15468,14 @@
       </p:sp>
       <p:sp>
         <p:nvSpPr>
-          <p:cNvPr id="17" name="Text 15"/>
+          <p:cNvPr id="17" name="Text 13"/>
           <p:cNvSpPr txBox="1"/>
           <p:nvPr/>
         </p:nvSpPr>
         <p:spPr>
           <a:xfrm>
             <a:off x="868680" y="4846320"/>
-            <a:ext cx="10424160" cy="1188720"/>
+            <a:ext cx="10424160" cy="1051560"/>
           </a:xfrm>
           <a:prstGeom prst="rect">
             <a:avLst/>
@@ -13282,7 +15489,7 @@
           <a:p>
             <a:pPr indent="0" marL="0">
               <a:lnSpc>
-                <a:spcPct val="122000"/>
+                <a:spcPct val="120000"/>
               </a:lnSpc>
               <a:buNone/>
             </a:pPr>
@@ -13299,7 +15506,7 @@
             </a:r>
             <a:pPr indent="0" marL="0">
               <a:lnSpc>
-                <a:spcPct val="122000"/>
+                <a:spcPct val="120000"/>
               </a:lnSpc>
               <a:buNone/>
             </a:pPr>
@@ -13312,7 +15519,7 @@
                 <a:ea typeface="Calibri" pitchFamily="34" charset="-122"/>
                 <a:cs typeface="Calibri" pitchFamily="34" charset="-120"/>
               </a:rPr>
-              <a:t>our baseline behavioral features — utilization, tenure, existing balances — are much stronger predictors of response than the offer itself. A pooled model has every incentive to lean on those and treat is_treated as noise, which is exactly the risk we can't afford when the whole point is isolating the offer's effect.</a:t>
+              <a:t>baseline behavioral features — utilization, tenure, balances — predict response far better than the offer itself. A pooled model leans on those and treats is_treated as noise, exactly the risk we can't take when isolating the offer's effect is the whole point.</a:t>
             </a:r>
             <a:endParaRPr lang="en-US" sz="1250" dirty="0"/>
           </a:p>
@@ -13320,7 +15527,7 @@
       </p:sp>
       <p:sp>
         <p:nvSpPr>
-          <p:cNvPr id="18" name="Text 16"/>
+          <p:cNvPr id="18" name="Text 14"/>
           <p:cNvSpPr txBox="1"/>
           <p:nvPr/>
         </p:nvSpPr>
@@ -13359,7 +15566,7 @@
       </p:sp>
       <p:sp>
         <p:nvSpPr>
-          <p:cNvPr id="19" name="Text 17"/>
+          <p:cNvPr id="19" name="Text 15"/>
           <p:cNvSpPr txBox="1"/>
           <p:nvPr/>
         </p:nvSpPr>
@@ -13514,12 +15721,12 @@
         </p:nvSpPr>
         <p:spPr>
           <a:xfrm>
-            <a:off x="548640" y="1417320"/>
-            <a:ext cx="5349240" cy="1600200"/>
+            <a:off x="548640" y="1371600"/>
+            <a:ext cx="5349240" cy="1965960"/>
           </a:xfrm>
           <a:prstGeom prst="roundRect">
             <a:avLst>
-              <a:gd name="adj" fmla="val 5714"/>
+              <a:gd name="adj" fmla="val 4651"/>
             </a:avLst>
           </a:prstGeom>
           <a:solidFill>
@@ -13541,8 +15748,8 @@
         </p:nvSpPr>
         <p:spPr>
           <a:xfrm>
-            <a:off x="822960" y="1581912"/>
-            <a:ext cx="4800600" cy="320040"/>
+            <a:off x="777240" y="1508760"/>
+            <a:ext cx="4892040" cy="274320"/>
           </a:xfrm>
           <a:prstGeom prst="rect">
             <a:avLst/>
@@ -13558,7 +15765,7 @@
               <a:buNone/>
             </a:pPr>
             <a:r>
-              <a:rPr lang="en-US" sz="1150" b="1" spc="150" kern="0" dirty="0">
+              <a:rPr lang="en-US" sz="1100" b="1" dirty="0">
                 <a:solidFill>
                   <a:srgbClr val="1E2761"/>
                 </a:solidFill>
@@ -13566,68 +15773,1282 @@
                 <a:ea typeface="Calibri" pitchFamily="34" charset="-122"/>
                 <a:cs typeface="Calibri" pitchFamily="34" charset="-120"/>
               </a:rPr>
-              <a:t>TRAIN</a:t>
+              <a:t>TRAIN   </a:t>
             </a:r>
-            <a:endParaRPr lang="en-US" sz="1150" dirty="0"/>
-          </a:p>
-        </p:txBody>
-      </p:sp>
-      <p:sp>
-        <p:nvSpPr>
-          <p:cNvPr id="6" name="Text 4"/>
-          <p:cNvSpPr txBox="1"/>
-          <p:nvPr/>
-        </p:nvSpPr>
-        <p:spPr>
-          <a:xfrm>
-            <a:off x="822960" y="1920240"/>
-            <a:ext cx="4800600" cy="914400"/>
-          </a:xfrm>
-          <a:prstGeom prst="rect">
-            <a:avLst/>
-          </a:prstGeom>
-          <a:noFill/>
-          <a:ln/>
-        </p:spPr>
-        <p:txBody>
-          <a:bodyPr wrap="square" lIns="0" tIns="0" rIns="0" bIns="0" rtlCol="0" anchor="ctr"/>
-          <a:lstStyle/>
-          <a:p>
             <a:pPr indent="0" marL="0">
-              <a:lnSpc>
-                <a:spcPct val="120000"/>
-              </a:lnSpc>
               <a:buNone/>
             </a:pPr>
             <a:r>
-              <a:rPr lang="en-US" sz="1200" dirty="0">
+              <a:rPr lang="en-US" sz="1100" i="1" dirty="0">
                 <a:solidFill>
-                  <a:srgbClr val="33344A"/>
+                  <a:srgbClr val="6B7280"/>
                 </a:solidFill>
                 <a:latin typeface="Calibri" pitchFamily="34" charset="0"/>
                 <a:ea typeface="Calibri" pitchFamily="34" charset="-122"/>
                 <a:cs typeface="Calibri" pitchFamily="34" charset="-120"/>
               </a:rPr>
-              <a:t>Two fully separate models. Control model μ̂₀ trained only on the small holdout that received no offer. Treatment model μ̂₁ trained only on the (much larger) mailed group. Same features, same label, disjoint training rows.</a:t>
+              <a:t>two separate models, TWO fit() calls</a:t>
             </a:r>
-            <a:endParaRPr lang="en-US" sz="1200" dirty="0"/>
-          </a:p>
-        </p:txBody>
-      </p:sp>
-      <p:sp>
-        <p:nvSpPr>
-          <p:cNvPr id="7" name="Shape 5"/>
+            <a:endParaRPr lang="en-US" sz="1100" dirty="0"/>
+          </a:p>
+        </p:txBody>
+      </p:sp>
+      <p:sp>
+        <p:nvSpPr>
+          <p:cNvPr id="6" name="Text 4"/>
+          <p:cNvSpPr txBox="1"/>
+          <p:nvPr/>
+        </p:nvSpPr>
+        <p:spPr>
+          <a:xfrm>
+            <a:off x="777240" y="1828800"/>
+            <a:ext cx="2354580" cy="219456"/>
+          </a:xfrm>
+          <a:prstGeom prst="rect">
+            <a:avLst/>
+          </a:prstGeom>
+          <a:noFill/>
+          <a:ln/>
+        </p:spPr>
+        <p:txBody>
+          <a:bodyPr wrap="square" lIns="0" tIns="0" rIns="0" bIns="0" rtlCol="0" anchor="ctr"/>
+          <a:lstStyle/>
+          <a:p>
+            <a:pPr indent="0" marL="0">
+              <a:buNone/>
+            </a:pPr>
+            <a:r>
+              <a:rPr lang="en-US" sz="1050" b="1" dirty="0">
+                <a:solidFill>
+                  <a:srgbClr val="1E2761"/>
+                </a:solidFill>
+                <a:latin typeface="Calibri" pitchFamily="34" charset="0"/>
+                <a:ea typeface="Calibri" pitchFamily="34" charset="-122"/>
+                <a:cs typeface="Calibri" pitchFamily="34" charset="-120"/>
+              </a:rPr>
+              <a:t>Control model  →  μ̂₀</a:t>
+            </a:r>
+            <a:endParaRPr lang="en-US" sz="1050" dirty="0"/>
+          </a:p>
+        </p:txBody>
+      </p:sp>
+      <p:graphicFrame>
+        <p:nvGraphicFramePr>
+          <p:cNvPr id="7" name="Table 0"/>
+          <p:cNvGraphicFramePr>
+            <a:graphicFrameLocks noGrp="1"/>
+          </p:cNvGraphicFramePr>
+          <p:nvPr>
+            <p:extLst>
+              <p:ext uri="{D42A27DB-BD31-4B8C-83A1-F6EECF244321}">
+                <p14:modId xmlns:p14="http://schemas.microsoft.com/office/powerpoint/2010/main" val="1579011935"/>
+              </p:ext>
+            </p:extLst>
+          </p:nvPr>
+        </p:nvGraphicFramePr>
+        <p:xfrm>
+          <a:off x="777240" y="2066544"/>
+          <a:ext cx="2354580" cy="1133856"/>
+        </p:xfrm>
+        <a:graphic>
+          <a:graphicData uri="http://schemas.openxmlformats.org/drawingml/2006/table">
+            <a:tbl>
+              <a:tblPr/>
+              <a:tblGrid>
+                <a:gridCol w="1295019"/>
+                <a:gridCol w="1059561"/>
+              </a:tblGrid>
+              <a:tr h="283464">
+                <a:tc>
+                  <a:txBody>
+                    <a:bodyPr/>
+                    <a:lstStyle/>
+                    <a:p>
+                      <a:pPr algn="ctr" indent="0" marL="0">
+                        <a:buNone/>
+                      </a:pPr>
+                      <a:r>
+                        <a:rPr lang="en-US" sz="1050" b="1" dirty="0">
+                          <a:solidFill>
+                            <a:srgbClr val="FFFFFF"/>
+                          </a:solidFill>
+                          <a:latin typeface="Calibri" pitchFamily="34" charset="0"/>
+                          <a:ea typeface="Calibri" pitchFamily="34" charset="-122"/>
+                          <a:cs typeface="Calibri" pitchFamily="34" charset="-120"/>
+                        </a:rPr>
+                        <a:t>Customer</a:t>
+                      </a:r>
+                      <a:endParaRPr lang="en-US" sz="1050" dirty="0">
+                        <a:latin typeface="Calibri" charset="0"/>
+                        <a:ea typeface="Calibri" charset="0"/>
+                        <a:cs typeface="Calibri" charset="0"/>
+                      </a:endParaRPr>
+                    </a:p>
+                  </a:txBody>
+                  <a:tcPr marL="36576" marR="36576" marT="18288" marB="18288" anchor="ctr">
+                    <a:lnL w="12700" cap="flat" cmpd="sng" algn="ctr">
+                      <a:solidFill>
+                        <a:srgbClr val="E4E7F0"/>
+                      </a:solidFill>
+                      <a:prstDash val="solid"/>
+                      <a:round/>
+                      <a:headEnd type="none" w="med" len="med"/>
+                      <a:tailEnd type="none" w="med" len="med"/>
+                    </a:lnL>
+                    <a:lnR w="12700" cap="flat" cmpd="sng" algn="ctr">
+                      <a:solidFill>
+                        <a:srgbClr val="E4E7F0"/>
+                      </a:solidFill>
+                      <a:prstDash val="solid"/>
+                      <a:round/>
+                      <a:headEnd type="none" w="med" len="med"/>
+                      <a:tailEnd type="none" w="med" len="med"/>
+                    </a:lnR>
+                    <a:lnT w="12700" cap="flat" cmpd="sng" algn="ctr">
+                      <a:solidFill>
+                        <a:srgbClr val="E4E7F0"/>
+                      </a:solidFill>
+                      <a:prstDash val="solid"/>
+                      <a:round/>
+                      <a:headEnd type="none" w="med" len="med"/>
+                      <a:tailEnd type="none" w="med" len="med"/>
+                    </a:lnT>
+                    <a:lnB w="12700" cap="flat" cmpd="sng" algn="ctr">
+                      <a:solidFill>
+                        <a:srgbClr val="E4E7F0"/>
+                      </a:solidFill>
+                      <a:prstDash val="solid"/>
+                      <a:round/>
+                      <a:headEnd type="none" w="med" len="med"/>
+                      <a:tailEnd type="none" w="med" len="med"/>
+                    </a:lnB>
+                    <a:solidFill>
+                      <a:srgbClr val="1E2761"/>
+                    </a:solidFill>
+                  </a:tcPr>
+                </a:tc>
+                <a:tc>
+                  <a:txBody>
+                    <a:bodyPr/>
+                    <a:lstStyle/>
+                    <a:p>
+                      <a:pPr algn="ctr" indent="0" marL="0">
+                        <a:buNone/>
+                      </a:pPr>
+                      <a:r>
+                        <a:rPr lang="en-US" sz="1050" b="1" dirty="0">
+                          <a:solidFill>
+                            <a:srgbClr val="FFFFFF"/>
+                          </a:solidFill>
+                          <a:latin typeface="Calibri" pitchFamily="34" charset="0"/>
+                          <a:ea typeface="Calibri" pitchFamily="34" charset="-122"/>
+                          <a:cs typeface="Calibri" pitchFamily="34" charset="-120"/>
+                        </a:rPr>
+                        <a:t>Y</a:t>
+                      </a:r>
+                      <a:endParaRPr lang="en-US" sz="1050" dirty="0">
+                        <a:latin typeface="Calibri" charset="0"/>
+                        <a:ea typeface="Calibri" charset="0"/>
+                        <a:cs typeface="Calibri" charset="0"/>
+                      </a:endParaRPr>
+                    </a:p>
+                  </a:txBody>
+                  <a:tcPr marL="36576" marR="36576" marT="18288" marB="18288" anchor="ctr">
+                    <a:lnL w="12700" cap="flat" cmpd="sng" algn="ctr">
+                      <a:solidFill>
+                        <a:srgbClr val="E4E7F0"/>
+                      </a:solidFill>
+                      <a:prstDash val="solid"/>
+                      <a:round/>
+                      <a:headEnd type="none" w="med" len="med"/>
+                      <a:tailEnd type="none" w="med" len="med"/>
+                    </a:lnL>
+                    <a:lnR w="12700" cap="flat" cmpd="sng" algn="ctr">
+                      <a:solidFill>
+                        <a:srgbClr val="E4E7F0"/>
+                      </a:solidFill>
+                      <a:prstDash val="solid"/>
+                      <a:round/>
+                      <a:headEnd type="none" w="med" len="med"/>
+                      <a:tailEnd type="none" w="med" len="med"/>
+                    </a:lnR>
+                    <a:lnT w="12700" cap="flat" cmpd="sng" algn="ctr">
+                      <a:solidFill>
+                        <a:srgbClr val="E4E7F0"/>
+                      </a:solidFill>
+                      <a:prstDash val="solid"/>
+                      <a:round/>
+                      <a:headEnd type="none" w="med" len="med"/>
+                      <a:tailEnd type="none" w="med" len="med"/>
+                    </a:lnT>
+                    <a:lnB w="12700" cap="flat" cmpd="sng" algn="ctr">
+                      <a:solidFill>
+                        <a:srgbClr val="E4E7F0"/>
+                      </a:solidFill>
+                      <a:prstDash val="solid"/>
+                      <a:round/>
+                      <a:headEnd type="none" w="med" len="med"/>
+                      <a:tailEnd type="none" w="med" len="med"/>
+                    </a:lnB>
+                    <a:solidFill>
+                      <a:srgbClr val="1E2761"/>
+                    </a:solidFill>
+                  </a:tcPr>
+                </a:tc>
+              </a:tr>
+              <a:tr h="283464">
+                <a:tc>
+                  <a:txBody>
+                    <a:bodyPr/>
+                    <a:lstStyle/>
+                    <a:p>
+                      <a:pPr algn="ctr" indent="0" marL="0">
+                        <a:buNone/>
+                      </a:pPr>
+                      <a:r>
+                        <a:rPr lang="en-US" sz="1050" b="1" dirty="0">
+                          <a:solidFill>
+                            <a:srgbClr val="33344A"/>
+                          </a:solidFill>
+                          <a:latin typeface="Calibri" pitchFamily="34" charset="0"/>
+                          <a:ea typeface="Calibri" pitchFamily="34" charset="-122"/>
+                          <a:cs typeface="Calibri" pitchFamily="34" charset="-120"/>
+                        </a:rPr>
+                        <a:t>A</a:t>
+                      </a:r>
+                      <a:endParaRPr lang="en-US" sz="1050" dirty="0">
+                        <a:latin typeface="Calibri" charset="0"/>
+                        <a:ea typeface="Calibri" charset="0"/>
+                        <a:cs typeface="Calibri" charset="0"/>
+                      </a:endParaRPr>
+                    </a:p>
+                  </a:txBody>
+                  <a:tcPr marL="36576" marR="36576" marT="18288" marB="18288" anchor="ctr">
+                    <a:lnL w="12700" cap="flat" cmpd="sng" algn="ctr">
+                      <a:solidFill>
+                        <a:srgbClr val="E4E7F0"/>
+                      </a:solidFill>
+                      <a:prstDash val="solid"/>
+                      <a:round/>
+                      <a:headEnd type="none" w="med" len="med"/>
+                      <a:tailEnd type="none" w="med" len="med"/>
+                    </a:lnL>
+                    <a:lnR w="12700" cap="flat" cmpd="sng" algn="ctr">
+                      <a:solidFill>
+                        <a:srgbClr val="E4E7F0"/>
+                      </a:solidFill>
+                      <a:prstDash val="solid"/>
+                      <a:round/>
+                      <a:headEnd type="none" w="med" len="med"/>
+                      <a:tailEnd type="none" w="med" len="med"/>
+                    </a:lnR>
+                    <a:lnT w="12700" cap="flat" cmpd="sng" algn="ctr">
+                      <a:solidFill>
+                        <a:srgbClr val="E4E7F0"/>
+                      </a:solidFill>
+                      <a:prstDash val="solid"/>
+                      <a:round/>
+                      <a:headEnd type="none" w="med" len="med"/>
+                      <a:tailEnd type="none" w="med" len="med"/>
+                    </a:lnT>
+                    <a:lnB w="12700" cap="flat" cmpd="sng" algn="ctr">
+                      <a:solidFill>
+                        <a:srgbClr val="E4E7F0"/>
+                      </a:solidFill>
+                      <a:prstDash val="solid"/>
+                      <a:round/>
+                      <a:headEnd type="none" w="med" len="med"/>
+                      <a:tailEnd type="none" w="med" len="med"/>
+                    </a:lnB>
+                    <a:solidFill>
+                      <a:srgbClr val="FFFFFF"/>
+                    </a:solidFill>
+                  </a:tcPr>
+                </a:tc>
+                <a:tc>
+                  <a:txBody>
+                    <a:bodyPr/>
+                    <a:lstStyle/>
+                    <a:p>
+                      <a:pPr algn="ctr" indent="0" marL="0">
+                        <a:buNone/>
+                      </a:pPr>
+                      <a:r>
+                        <a:rPr lang="en-US" sz="1050" dirty="0">
+                          <a:solidFill>
+                            <a:srgbClr val="33344A"/>
+                          </a:solidFill>
+                          <a:latin typeface="Calibri" pitchFamily="34" charset="0"/>
+                          <a:ea typeface="Calibri" pitchFamily="34" charset="-122"/>
+                          <a:cs typeface="Calibri" pitchFamily="34" charset="-120"/>
+                        </a:rPr>
+                        <a:t>0</a:t>
+                      </a:r>
+                      <a:endParaRPr lang="en-US" sz="1050" dirty="0">
+                        <a:latin typeface="Calibri" charset="0"/>
+                        <a:ea typeface="Calibri" charset="0"/>
+                        <a:cs typeface="Calibri" charset="0"/>
+                      </a:endParaRPr>
+                    </a:p>
+                  </a:txBody>
+                  <a:tcPr marL="36576" marR="36576" marT="18288" marB="18288" anchor="ctr">
+                    <a:lnL w="12700" cap="flat" cmpd="sng" algn="ctr">
+                      <a:solidFill>
+                        <a:srgbClr val="E4E7F0"/>
+                      </a:solidFill>
+                      <a:prstDash val="solid"/>
+                      <a:round/>
+                      <a:headEnd type="none" w="med" len="med"/>
+                      <a:tailEnd type="none" w="med" len="med"/>
+                    </a:lnL>
+                    <a:lnR w="12700" cap="flat" cmpd="sng" algn="ctr">
+                      <a:solidFill>
+                        <a:srgbClr val="E4E7F0"/>
+                      </a:solidFill>
+                      <a:prstDash val="solid"/>
+                      <a:round/>
+                      <a:headEnd type="none" w="med" len="med"/>
+                      <a:tailEnd type="none" w="med" len="med"/>
+                    </a:lnR>
+                    <a:lnT w="12700" cap="flat" cmpd="sng" algn="ctr">
+                      <a:solidFill>
+                        <a:srgbClr val="E4E7F0"/>
+                      </a:solidFill>
+                      <a:prstDash val="solid"/>
+                      <a:round/>
+                      <a:headEnd type="none" w="med" len="med"/>
+                      <a:tailEnd type="none" w="med" len="med"/>
+                    </a:lnT>
+                    <a:lnB w="12700" cap="flat" cmpd="sng" algn="ctr">
+                      <a:solidFill>
+                        <a:srgbClr val="E4E7F0"/>
+                      </a:solidFill>
+                      <a:prstDash val="solid"/>
+                      <a:round/>
+                      <a:headEnd type="none" w="med" len="med"/>
+                      <a:tailEnd type="none" w="med" len="med"/>
+                    </a:lnB>
+                    <a:solidFill>
+                      <a:srgbClr val="FFFFFF"/>
+                    </a:solidFill>
+                  </a:tcPr>
+                </a:tc>
+              </a:tr>
+              <a:tr h="283464">
+                <a:tc>
+                  <a:txBody>
+                    <a:bodyPr/>
+                    <a:lstStyle/>
+                    <a:p>
+                      <a:pPr algn="ctr" indent="0" marL="0">
+                        <a:buNone/>
+                      </a:pPr>
+                      <a:r>
+                        <a:rPr lang="en-US" sz="1050" b="1" dirty="0">
+                          <a:solidFill>
+                            <a:srgbClr val="33344A"/>
+                          </a:solidFill>
+                          <a:latin typeface="Calibri" pitchFamily="34" charset="0"/>
+                          <a:ea typeface="Calibri" pitchFamily="34" charset="-122"/>
+                          <a:cs typeface="Calibri" pitchFamily="34" charset="-120"/>
+                        </a:rPr>
+                        <a:t>B</a:t>
+                      </a:r>
+                      <a:endParaRPr lang="en-US" sz="1050" dirty="0">
+                        <a:latin typeface="Calibri" charset="0"/>
+                        <a:ea typeface="Calibri" charset="0"/>
+                        <a:cs typeface="Calibri" charset="0"/>
+                      </a:endParaRPr>
+                    </a:p>
+                  </a:txBody>
+                  <a:tcPr marL="36576" marR="36576" marT="18288" marB="18288" anchor="ctr">
+                    <a:lnL w="12700" cap="flat" cmpd="sng" algn="ctr">
+                      <a:solidFill>
+                        <a:srgbClr val="E4E7F0"/>
+                      </a:solidFill>
+                      <a:prstDash val="solid"/>
+                      <a:round/>
+                      <a:headEnd type="none" w="med" len="med"/>
+                      <a:tailEnd type="none" w="med" len="med"/>
+                    </a:lnL>
+                    <a:lnR w="12700" cap="flat" cmpd="sng" algn="ctr">
+                      <a:solidFill>
+                        <a:srgbClr val="E4E7F0"/>
+                      </a:solidFill>
+                      <a:prstDash val="solid"/>
+                      <a:round/>
+                      <a:headEnd type="none" w="med" len="med"/>
+                      <a:tailEnd type="none" w="med" len="med"/>
+                    </a:lnR>
+                    <a:lnT w="12700" cap="flat" cmpd="sng" algn="ctr">
+                      <a:solidFill>
+                        <a:srgbClr val="E4E7F0"/>
+                      </a:solidFill>
+                      <a:prstDash val="solid"/>
+                      <a:round/>
+                      <a:headEnd type="none" w="med" len="med"/>
+                      <a:tailEnd type="none" w="med" len="med"/>
+                    </a:lnT>
+                    <a:lnB w="12700" cap="flat" cmpd="sng" algn="ctr">
+                      <a:solidFill>
+                        <a:srgbClr val="E4E7F0"/>
+                      </a:solidFill>
+                      <a:prstDash val="solid"/>
+                      <a:round/>
+                      <a:headEnd type="none" w="med" len="med"/>
+                      <a:tailEnd type="none" w="med" len="med"/>
+                    </a:lnB>
+                    <a:solidFill>
+                      <a:srgbClr val="F4F6FB"/>
+                    </a:solidFill>
+                  </a:tcPr>
+                </a:tc>
+                <a:tc>
+                  <a:txBody>
+                    <a:bodyPr/>
+                    <a:lstStyle/>
+                    <a:p>
+                      <a:pPr algn="ctr" indent="0" marL="0">
+                        <a:buNone/>
+                      </a:pPr>
+                      <a:r>
+                        <a:rPr lang="en-US" sz="1050" dirty="0">
+                          <a:solidFill>
+                            <a:srgbClr val="33344A"/>
+                          </a:solidFill>
+                          <a:latin typeface="Calibri" pitchFamily="34" charset="0"/>
+                          <a:ea typeface="Calibri" pitchFamily="34" charset="-122"/>
+                          <a:cs typeface="Calibri" pitchFamily="34" charset="-120"/>
+                        </a:rPr>
+                        <a:t>1</a:t>
+                      </a:r>
+                      <a:endParaRPr lang="en-US" sz="1050" dirty="0">
+                        <a:latin typeface="Calibri" charset="0"/>
+                        <a:ea typeface="Calibri" charset="0"/>
+                        <a:cs typeface="Calibri" charset="0"/>
+                      </a:endParaRPr>
+                    </a:p>
+                  </a:txBody>
+                  <a:tcPr marL="36576" marR="36576" marT="18288" marB="18288" anchor="ctr">
+                    <a:lnL w="12700" cap="flat" cmpd="sng" algn="ctr">
+                      <a:solidFill>
+                        <a:srgbClr val="E4E7F0"/>
+                      </a:solidFill>
+                      <a:prstDash val="solid"/>
+                      <a:round/>
+                      <a:headEnd type="none" w="med" len="med"/>
+                      <a:tailEnd type="none" w="med" len="med"/>
+                    </a:lnL>
+                    <a:lnR w="12700" cap="flat" cmpd="sng" algn="ctr">
+                      <a:solidFill>
+                        <a:srgbClr val="E4E7F0"/>
+                      </a:solidFill>
+                      <a:prstDash val="solid"/>
+                      <a:round/>
+                      <a:headEnd type="none" w="med" len="med"/>
+                      <a:tailEnd type="none" w="med" len="med"/>
+                    </a:lnR>
+                    <a:lnT w="12700" cap="flat" cmpd="sng" algn="ctr">
+                      <a:solidFill>
+                        <a:srgbClr val="E4E7F0"/>
+                      </a:solidFill>
+                      <a:prstDash val="solid"/>
+                      <a:round/>
+                      <a:headEnd type="none" w="med" len="med"/>
+                      <a:tailEnd type="none" w="med" len="med"/>
+                    </a:lnT>
+                    <a:lnB w="12700" cap="flat" cmpd="sng" algn="ctr">
+                      <a:solidFill>
+                        <a:srgbClr val="E4E7F0"/>
+                      </a:solidFill>
+                      <a:prstDash val="solid"/>
+                      <a:round/>
+                      <a:headEnd type="none" w="med" len="med"/>
+                      <a:tailEnd type="none" w="med" len="med"/>
+                    </a:lnB>
+                    <a:solidFill>
+                      <a:srgbClr val="F4F6FB"/>
+                    </a:solidFill>
+                  </a:tcPr>
+                </a:tc>
+              </a:tr>
+              <a:tr h="283464">
+                <a:tc>
+                  <a:txBody>
+                    <a:bodyPr/>
+                    <a:lstStyle/>
+                    <a:p>
+                      <a:pPr algn="ctr" indent="0" marL="0">
+                        <a:buNone/>
+                      </a:pPr>
+                      <a:r>
+                        <a:rPr lang="en-US" sz="1050" b="1" dirty="0">
+                          <a:solidFill>
+                            <a:srgbClr val="33344A"/>
+                          </a:solidFill>
+                          <a:latin typeface="Calibri" pitchFamily="34" charset="0"/>
+                          <a:ea typeface="Calibri" pitchFamily="34" charset="-122"/>
+                          <a:cs typeface="Calibri" pitchFamily="34" charset="-120"/>
+                        </a:rPr>
+                        <a:t>C</a:t>
+                      </a:r>
+                      <a:endParaRPr lang="en-US" sz="1050" dirty="0">
+                        <a:latin typeface="Calibri" charset="0"/>
+                        <a:ea typeface="Calibri" charset="0"/>
+                        <a:cs typeface="Calibri" charset="0"/>
+                      </a:endParaRPr>
+                    </a:p>
+                  </a:txBody>
+                  <a:tcPr marL="36576" marR="36576" marT="18288" marB="18288" anchor="ctr">
+                    <a:lnL w="12700" cap="flat" cmpd="sng" algn="ctr">
+                      <a:solidFill>
+                        <a:srgbClr val="E4E7F0"/>
+                      </a:solidFill>
+                      <a:prstDash val="solid"/>
+                      <a:round/>
+                      <a:headEnd type="none" w="med" len="med"/>
+                      <a:tailEnd type="none" w="med" len="med"/>
+                    </a:lnL>
+                    <a:lnR w="12700" cap="flat" cmpd="sng" algn="ctr">
+                      <a:solidFill>
+                        <a:srgbClr val="E4E7F0"/>
+                      </a:solidFill>
+                      <a:prstDash val="solid"/>
+                      <a:round/>
+                      <a:headEnd type="none" w="med" len="med"/>
+                      <a:tailEnd type="none" w="med" len="med"/>
+                    </a:lnR>
+                    <a:lnT w="12700" cap="flat" cmpd="sng" algn="ctr">
+                      <a:solidFill>
+                        <a:srgbClr val="E4E7F0"/>
+                      </a:solidFill>
+                      <a:prstDash val="solid"/>
+                      <a:round/>
+                      <a:headEnd type="none" w="med" len="med"/>
+                      <a:tailEnd type="none" w="med" len="med"/>
+                    </a:lnT>
+                    <a:lnB w="12700" cap="flat" cmpd="sng" algn="ctr">
+                      <a:solidFill>
+                        <a:srgbClr val="E4E7F0"/>
+                      </a:solidFill>
+                      <a:prstDash val="solid"/>
+                      <a:round/>
+                      <a:headEnd type="none" w="med" len="med"/>
+                      <a:tailEnd type="none" w="med" len="med"/>
+                    </a:lnB>
+                    <a:solidFill>
+                      <a:srgbClr val="FFFFFF"/>
+                    </a:solidFill>
+                  </a:tcPr>
+                </a:tc>
+                <a:tc>
+                  <a:txBody>
+                    <a:bodyPr/>
+                    <a:lstStyle/>
+                    <a:p>
+                      <a:pPr algn="ctr" indent="0" marL="0">
+                        <a:buNone/>
+                      </a:pPr>
+                      <a:r>
+                        <a:rPr lang="en-US" sz="1050" dirty="0">
+                          <a:solidFill>
+                            <a:srgbClr val="33344A"/>
+                          </a:solidFill>
+                          <a:latin typeface="Calibri" pitchFamily="34" charset="0"/>
+                          <a:ea typeface="Calibri" pitchFamily="34" charset="-122"/>
+                          <a:cs typeface="Calibri" pitchFamily="34" charset="-120"/>
+                        </a:rPr>
+                        <a:t>0</a:t>
+                      </a:r>
+                      <a:endParaRPr lang="en-US" sz="1050" dirty="0">
+                        <a:latin typeface="Calibri" charset="0"/>
+                        <a:ea typeface="Calibri" charset="0"/>
+                        <a:cs typeface="Calibri" charset="0"/>
+                      </a:endParaRPr>
+                    </a:p>
+                  </a:txBody>
+                  <a:tcPr marL="36576" marR="36576" marT="18288" marB="18288" anchor="ctr">
+                    <a:lnL w="12700" cap="flat" cmpd="sng" algn="ctr">
+                      <a:solidFill>
+                        <a:srgbClr val="E4E7F0"/>
+                      </a:solidFill>
+                      <a:prstDash val="solid"/>
+                      <a:round/>
+                      <a:headEnd type="none" w="med" len="med"/>
+                      <a:tailEnd type="none" w="med" len="med"/>
+                    </a:lnL>
+                    <a:lnR w="12700" cap="flat" cmpd="sng" algn="ctr">
+                      <a:solidFill>
+                        <a:srgbClr val="E4E7F0"/>
+                      </a:solidFill>
+                      <a:prstDash val="solid"/>
+                      <a:round/>
+                      <a:headEnd type="none" w="med" len="med"/>
+                      <a:tailEnd type="none" w="med" len="med"/>
+                    </a:lnR>
+                    <a:lnT w="12700" cap="flat" cmpd="sng" algn="ctr">
+                      <a:solidFill>
+                        <a:srgbClr val="E4E7F0"/>
+                      </a:solidFill>
+                      <a:prstDash val="solid"/>
+                      <a:round/>
+                      <a:headEnd type="none" w="med" len="med"/>
+                      <a:tailEnd type="none" w="med" len="med"/>
+                    </a:lnT>
+                    <a:lnB w="12700" cap="flat" cmpd="sng" algn="ctr">
+                      <a:solidFill>
+                        <a:srgbClr val="E4E7F0"/>
+                      </a:solidFill>
+                      <a:prstDash val="solid"/>
+                      <a:round/>
+                      <a:headEnd type="none" w="med" len="med"/>
+                      <a:tailEnd type="none" w="med" len="med"/>
+                    </a:lnB>
+                    <a:solidFill>
+                      <a:srgbClr val="FFFFFF"/>
+                    </a:solidFill>
+                  </a:tcPr>
+                </a:tc>
+              </a:tr>
+            </a:tbl>
+          </a:graphicData>
+        </a:graphic>
+      </p:graphicFrame>
+      <p:sp>
+        <p:nvSpPr>
+          <p:cNvPr id="8" name="Text 5"/>
+          <p:cNvSpPr txBox="1"/>
+          <p:nvPr/>
+        </p:nvSpPr>
+        <p:spPr>
+          <a:xfrm>
+            <a:off x="3314700" y="1828800"/>
+            <a:ext cx="2354580" cy="219456"/>
+          </a:xfrm>
+          <a:prstGeom prst="rect">
+            <a:avLst/>
+          </a:prstGeom>
+          <a:noFill/>
+          <a:ln/>
+        </p:spPr>
+        <p:txBody>
+          <a:bodyPr wrap="square" lIns="0" tIns="0" rIns="0" bIns="0" rtlCol="0" anchor="ctr"/>
+          <a:lstStyle/>
+          <a:p>
+            <a:pPr indent="0" marL="0">
+              <a:buNone/>
+            </a:pPr>
+            <a:r>
+              <a:rPr lang="en-US" sz="1050" b="1" dirty="0">
+                <a:solidFill>
+                  <a:srgbClr val="B8892B"/>
+                </a:solidFill>
+                <a:latin typeface="Calibri" pitchFamily="34" charset="0"/>
+                <a:ea typeface="Calibri" pitchFamily="34" charset="-122"/>
+                <a:cs typeface="Calibri" pitchFamily="34" charset="-120"/>
+              </a:rPr>
+              <a:t>Treatment model  →  μ̂₁</a:t>
+            </a:r>
+            <a:endParaRPr lang="en-US" sz="1050" dirty="0"/>
+          </a:p>
+        </p:txBody>
+      </p:sp>
+      <p:graphicFrame>
+        <p:nvGraphicFramePr>
+          <p:cNvPr id="13" name="Table 1"/>
+          <p:cNvGraphicFramePr>
+            <a:graphicFrameLocks noGrp="1"/>
+          </p:cNvGraphicFramePr>
+          <p:nvPr>
+            <p:extLst>
+              <p:ext uri="{D42A27DB-BD31-4B8C-83A1-F6EECF244321}">
+                <p14:modId xmlns:p14="http://schemas.microsoft.com/office/powerpoint/2010/main" val="1579011935"/>
+              </p:ext>
+            </p:extLst>
+          </p:nvPr>
+        </p:nvGraphicFramePr>
+        <p:xfrm>
+          <a:off x="3314700" y="2066544"/>
+          <a:ext cx="2354580" cy="1133856"/>
+        </p:xfrm>
+        <a:graphic>
+          <a:graphicData uri="http://schemas.openxmlformats.org/drawingml/2006/table">
+            <a:tbl>
+              <a:tblPr/>
+              <a:tblGrid>
+                <a:gridCol w="1295019"/>
+                <a:gridCol w="1059561"/>
+              </a:tblGrid>
+              <a:tr h="283464">
+                <a:tc>
+                  <a:txBody>
+                    <a:bodyPr/>
+                    <a:lstStyle/>
+                    <a:p>
+                      <a:pPr algn="ctr" indent="0" marL="0">
+                        <a:buNone/>
+                      </a:pPr>
+                      <a:r>
+                        <a:rPr lang="en-US" sz="1050" b="1" dirty="0">
+                          <a:solidFill>
+                            <a:srgbClr val="FFFFFF"/>
+                          </a:solidFill>
+                          <a:latin typeface="Calibri" pitchFamily="34" charset="0"/>
+                          <a:ea typeface="Calibri" pitchFamily="34" charset="-122"/>
+                          <a:cs typeface="Calibri" pitchFamily="34" charset="-120"/>
+                        </a:rPr>
+                        <a:t>Customer</a:t>
+                      </a:r>
+                      <a:endParaRPr lang="en-US" sz="1050" dirty="0">
+                        <a:latin typeface="Calibri" charset="0"/>
+                        <a:ea typeface="Calibri" charset="0"/>
+                        <a:cs typeface="Calibri" charset="0"/>
+                      </a:endParaRPr>
+                    </a:p>
+                  </a:txBody>
+                  <a:tcPr marL="36576" marR="36576" marT="18288" marB="18288" anchor="ctr">
+                    <a:lnL w="12700" cap="flat" cmpd="sng" algn="ctr">
+                      <a:solidFill>
+                        <a:srgbClr val="E4E7F0"/>
+                      </a:solidFill>
+                      <a:prstDash val="solid"/>
+                      <a:round/>
+                      <a:headEnd type="none" w="med" len="med"/>
+                      <a:tailEnd type="none" w="med" len="med"/>
+                    </a:lnL>
+                    <a:lnR w="12700" cap="flat" cmpd="sng" algn="ctr">
+                      <a:solidFill>
+                        <a:srgbClr val="E4E7F0"/>
+                      </a:solidFill>
+                      <a:prstDash val="solid"/>
+                      <a:round/>
+                      <a:headEnd type="none" w="med" len="med"/>
+                      <a:tailEnd type="none" w="med" len="med"/>
+                    </a:lnR>
+                    <a:lnT w="12700" cap="flat" cmpd="sng" algn="ctr">
+                      <a:solidFill>
+                        <a:srgbClr val="E4E7F0"/>
+                      </a:solidFill>
+                      <a:prstDash val="solid"/>
+                      <a:round/>
+                      <a:headEnd type="none" w="med" len="med"/>
+                      <a:tailEnd type="none" w="med" len="med"/>
+                    </a:lnT>
+                    <a:lnB w="12700" cap="flat" cmpd="sng" algn="ctr">
+                      <a:solidFill>
+                        <a:srgbClr val="E4E7F0"/>
+                      </a:solidFill>
+                      <a:prstDash val="solid"/>
+                      <a:round/>
+                      <a:headEnd type="none" w="med" len="med"/>
+                      <a:tailEnd type="none" w="med" len="med"/>
+                    </a:lnB>
+                    <a:solidFill>
+                      <a:srgbClr val="B8892B"/>
+                    </a:solidFill>
+                  </a:tcPr>
+                </a:tc>
+                <a:tc>
+                  <a:txBody>
+                    <a:bodyPr/>
+                    <a:lstStyle/>
+                    <a:p>
+                      <a:pPr algn="ctr" indent="0" marL="0">
+                        <a:buNone/>
+                      </a:pPr>
+                      <a:r>
+                        <a:rPr lang="en-US" sz="1050" b="1" dirty="0">
+                          <a:solidFill>
+                            <a:srgbClr val="FFFFFF"/>
+                          </a:solidFill>
+                          <a:latin typeface="Calibri" pitchFamily="34" charset="0"/>
+                          <a:ea typeface="Calibri" pitchFamily="34" charset="-122"/>
+                          <a:cs typeface="Calibri" pitchFamily="34" charset="-120"/>
+                        </a:rPr>
+                        <a:t>Y</a:t>
+                      </a:r>
+                      <a:endParaRPr lang="en-US" sz="1050" dirty="0">
+                        <a:latin typeface="Calibri" charset="0"/>
+                        <a:ea typeface="Calibri" charset="0"/>
+                        <a:cs typeface="Calibri" charset="0"/>
+                      </a:endParaRPr>
+                    </a:p>
+                  </a:txBody>
+                  <a:tcPr marL="36576" marR="36576" marT="18288" marB="18288" anchor="ctr">
+                    <a:lnL w="12700" cap="flat" cmpd="sng" algn="ctr">
+                      <a:solidFill>
+                        <a:srgbClr val="E4E7F0"/>
+                      </a:solidFill>
+                      <a:prstDash val="solid"/>
+                      <a:round/>
+                      <a:headEnd type="none" w="med" len="med"/>
+                      <a:tailEnd type="none" w="med" len="med"/>
+                    </a:lnL>
+                    <a:lnR w="12700" cap="flat" cmpd="sng" algn="ctr">
+                      <a:solidFill>
+                        <a:srgbClr val="E4E7F0"/>
+                      </a:solidFill>
+                      <a:prstDash val="solid"/>
+                      <a:round/>
+                      <a:headEnd type="none" w="med" len="med"/>
+                      <a:tailEnd type="none" w="med" len="med"/>
+                    </a:lnR>
+                    <a:lnT w="12700" cap="flat" cmpd="sng" algn="ctr">
+                      <a:solidFill>
+                        <a:srgbClr val="E4E7F0"/>
+                      </a:solidFill>
+                      <a:prstDash val="solid"/>
+                      <a:round/>
+                      <a:headEnd type="none" w="med" len="med"/>
+                      <a:tailEnd type="none" w="med" len="med"/>
+                    </a:lnT>
+                    <a:lnB w="12700" cap="flat" cmpd="sng" algn="ctr">
+                      <a:solidFill>
+                        <a:srgbClr val="E4E7F0"/>
+                      </a:solidFill>
+                      <a:prstDash val="solid"/>
+                      <a:round/>
+                      <a:headEnd type="none" w="med" len="med"/>
+                      <a:tailEnd type="none" w="med" len="med"/>
+                    </a:lnB>
+                    <a:solidFill>
+                      <a:srgbClr val="B8892B"/>
+                    </a:solidFill>
+                  </a:tcPr>
+                </a:tc>
+              </a:tr>
+              <a:tr h="283464">
+                <a:tc>
+                  <a:txBody>
+                    <a:bodyPr/>
+                    <a:lstStyle/>
+                    <a:p>
+                      <a:pPr algn="ctr" indent="0" marL="0">
+                        <a:buNone/>
+                      </a:pPr>
+                      <a:r>
+                        <a:rPr lang="en-US" sz="1050" b="1" dirty="0">
+                          <a:solidFill>
+                            <a:srgbClr val="33344A"/>
+                          </a:solidFill>
+                          <a:latin typeface="Calibri" pitchFamily="34" charset="0"/>
+                          <a:ea typeface="Calibri" pitchFamily="34" charset="-122"/>
+                          <a:cs typeface="Calibri" pitchFamily="34" charset="-120"/>
+                        </a:rPr>
+                        <a:t>D</a:t>
+                      </a:r>
+                      <a:endParaRPr lang="en-US" sz="1050" dirty="0">
+                        <a:latin typeface="Calibri" charset="0"/>
+                        <a:ea typeface="Calibri" charset="0"/>
+                        <a:cs typeface="Calibri" charset="0"/>
+                      </a:endParaRPr>
+                    </a:p>
+                  </a:txBody>
+                  <a:tcPr marL="36576" marR="36576" marT="18288" marB="18288" anchor="ctr">
+                    <a:lnL w="12700" cap="flat" cmpd="sng" algn="ctr">
+                      <a:solidFill>
+                        <a:srgbClr val="E4E7F0"/>
+                      </a:solidFill>
+                      <a:prstDash val="solid"/>
+                      <a:round/>
+                      <a:headEnd type="none" w="med" len="med"/>
+                      <a:tailEnd type="none" w="med" len="med"/>
+                    </a:lnL>
+                    <a:lnR w="12700" cap="flat" cmpd="sng" algn="ctr">
+                      <a:solidFill>
+                        <a:srgbClr val="E4E7F0"/>
+                      </a:solidFill>
+                      <a:prstDash val="solid"/>
+                      <a:round/>
+                      <a:headEnd type="none" w="med" len="med"/>
+                      <a:tailEnd type="none" w="med" len="med"/>
+                    </a:lnR>
+                    <a:lnT w="12700" cap="flat" cmpd="sng" algn="ctr">
+                      <a:solidFill>
+                        <a:srgbClr val="E4E7F0"/>
+                      </a:solidFill>
+                      <a:prstDash val="solid"/>
+                      <a:round/>
+                      <a:headEnd type="none" w="med" len="med"/>
+                      <a:tailEnd type="none" w="med" len="med"/>
+                    </a:lnT>
+                    <a:lnB w="12700" cap="flat" cmpd="sng" algn="ctr">
+                      <a:solidFill>
+                        <a:srgbClr val="E4E7F0"/>
+                      </a:solidFill>
+                      <a:prstDash val="solid"/>
+                      <a:round/>
+                      <a:headEnd type="none" w="med" len="med"/>
+                      <a:tailEnd type="none" w="med" len="med"/>
+                    </a:lnB>
+                    <a:solidFill>
+                      <a:srgbClr val="FFFFFF"/>
+                    </a:solidFill>
+                  </a:tcPr>
+                </a:tc>
+                <a:tc>
+                  <a:txBody>
+                    <a:bodyPr/>
+                    <a:lstStyle/>
+                    <a:p>
+                      <a:pPr algn="ctr" indent="0" marL="0">
+                        <a:buNone/>
+                      </a:pPr>
+                      <a:r>
+                        <a:rPr lang="en-US" sz="1050" dirty="0">
+                          <a:solidFill>
+                            <a:srgbClr val="33344A"/>
+                          </a:solidFill>
+                          <a:latin typeface="Calibri" pitchFamily="34" charset="0"/>
+                          <a:ea typeface="Calibri" pitchFamily="34" charset="-122"/>
+                          <a:cs typeface="Calibri" pitchFamily="34" charset="-120"/>
+                        </a:rPr>
+                        <a:t>1</a:t>
+                      </a:r>
+                      <a:endParaRPr lang="en-US" sz="1050" dirty="0">
+                        <a:latin typeface="Calibri" charset="0"/>
+                        <a:ea typeface="Calibri" charset="0"/>
+                        <a:cs typeface="Calibri" charset="0"/>
+                      </a:endParaRPr>
+                    </a:p>
+                  </a:txBody>
+                  <a:tcPr marL="36576" marR="36576" marT="18288" marB="18288" anchor="ctr">
+                    <a:lnL w="12700" cap="flat" cmpd="sng" algn="ctr">
+                      <a:solidFill>
+                        <a:srgbClr val="E4E7F0"/>
+                      </a:solidFill>
+                      <a:prstDash val="solid"/>
+                      <a:round/>
+                      <a:headEnd type="none" w="med" len="med"/>
+                      <a:tailEnd type="none" w="med" len="med"/>
+                    </a:lnL>
+                    <a:lnR w="12700" cap="flat" cmpd="sng" algn="ctr">
+                      <a:solidFill>
+                        <a:srgbClr val="E4E7F0"/>
+                      </a:solidFill>
+                      <a:prstDash val="solid"/>
+                      <a:round/>
+                      <a:headEnd type="none" w="med" len="med"/>
+                      <a:tailEnd type="none" w="med" len="med"/>
+                    </a:lnR>
+                    <a:lnT w="12700" cap="flat" cmpd="sng" algn="ctr">
+                      <a:solidFill>
+                        <a:srgbClr val="E4E7F0"/>
+                      </a:solidFill>
+                      <a:prstDash val="solid"/>
+                      <a:round/>
+                      <a:headEnd type="none" w="med" len="med"/>
+                      <a:tailEnd type="none" w="med" len="med"/>
+                    </a:lnT>
+                    <a:lnB w="12700" cap="flat" cmpd="sng" algn="ctr">
+                      <a:solidFill>
+                        <a:srgbClr val="E4E7F0"/>
+                      </a:solidFill>
+                      <a:prstDash val="solid"/>
+                      <a:round/>
+                      <a:headEnd type="none" w="med" len="med"/>
+                      <a:tailEnd type="none" w="med" len="med"/>
+                    </a:lnB>
+                    <a:solidFill>
+                      <a:srgbClr val="FFFFFF"/>
+                    </a:solidFill>
+                  </a:tcPr>
+                </a:tc>
+              </a:tr>
+              <a:tr h="283464">
+                <a:tc>
+                  <a:txBody>
+                    <a:bodyPr/>
+                    <a:lstStyle/>
+                    <a:p>
+                      <a:pPr algn="ctr" indent="0" marL="0">
+                        <a:buNone/>
+                      </a:pPr>
+                      <a:r>
+                        <a:rPr lang="en-US" sz="1050" b="1" dirty="0">
+                          <a:solidFill>
+                            <a:srgbClr val="33344A"/>
+                          </a:solidFill>
+                          <a:latin typeface="Calibri" pitchFamily="34" charset="0"/>
+                          <a:ea typeface="Calibri" pitchFamily="34" charset="-122"/>
+                          <a:cs typeface="Calibri" pitchFamily="34" charset="-120"/>
+                        </a:rPr>
+                        <a:t>E</a:t>
+                      </a:r>
+                      <a:endParaRPr lang="en-US" sz="1050" dirty="0">
+                        <a:latin typeface="Calibri" charset="0"/>
+                        <a:ea typeface="Calibri" charset="0"/>
+                        <a:cs typeface="Calibri" charset="0"/>
+                      </a:endParaRPr>
+                    </a:p>
+                  </a:txBody>
+                  <a:tcPr marL="36576" marR="36576" marT="18288" marB="18288" anchor="ctr">
+                    <a:lnL w="12700" cap="flat" cmpd="sng" algn="ctr">
+                      <a:solidFill>
+                        <a:srgbClr val="E4E7F0"/>
+                      </a:solidFill>
+                      <a:prstDash val="solid"/>
+                      <a:round/>
+                      <a:headEnd type="none" w="med" len="med"/>
+                      <a:tailEnd type="none" w="med" len="med"/>
+                    </a:lnL>
+                    <a:lnR w="12700" cap="flat" cmpd="sng" algn="ctr">
+                      <a:solidFill>
+                        <a:srgbClr val="E4E7F0"/>
+                      </a:solidFill>
+                      <a:prstDash val="solid"/>
+                      <a:round/>
+                      <a:headEnd type="none" w="med" len="med"/>
+                      <a:tailEnd type="none" w="med" len="med"/>
+                    </a:lnR>
+                    <a:lnT w="12700" cap="flat" cmpd="sng" algn="ctr">
+                      <a:solidFill>
+                        <a:srgbClr val="E4E7F0"/>
+                      </a:solidFill>
+                      <a:prstDash val="solid"/>
+                      <a:round/>
+                      <a:headEnd type="none" w="med" len="med"/>
+                      <a:tailEnd type="none" w="med" len="med"/>
+                    </a:lnT>
+                    <a:lnB w="12700" cap="flat" cmpd="sng" algn="ctr">
+                      <a:solidFill>
+                        <a:srgbClr val="E4E7F0"/>
+                      </a:solidFill>
+                      <a:prstDash val="solid"/>
+                      <a:round/>
+                      <a:headEnd type="none" w="med" len="med"/>
+                      <a:tailEnd type="none" w="med" len="med"/>
+                    </a:lnB>
+                    <a:solidFill>
+                      <a:srgbClr val="F4F6FB"/>
+                    </a:solidFill>
+                  </a:tcPr>
+                </a:tc>
+                <a:tc>
+                  <a:txBody>
+                    <a:bodyPr/>
+                    <a:lstStyle/>
+                    <a:p>
+                      <a:pPr algn="ctr" indent="0" marL="0">
+                        <a:buNone/>
+                      </a:pPr>
+                      <a:r>
+                        <a:rPr lang="en-US" sz="1050" dirty="0">
+                          <a:solidFill>
+                            <a:srgbClr val="33344A"/>
+                          </a:solidFill>
+                          <a:latin typeface="Calibri" pitchFamily="34" charset="0"/>
+                          <a:ea typeface="Calibri" pitchFamily="34" charset="-122"/>
+                          <a:cs typeface="Calibri" pitchFamily="34" charset="-120"/>
+                        </a:rPr>
+                        <a:t>0</a:t>
+                      </a:r>
+                      <a:endParaRPr lang="en-US" sz="1050" dirty="0">
+                        <a:latin typeface="Calibri" charset="0"/>
+                        <a:ea typeface="Calibri" charset="0"/>
+                        <a:cs typeface="Calibri" charset="0"/>
+                      </a:endParaRPr>
+                    </a:p>
+                  </a:txBody>
+                  <a:tcPr marL="36576" marR="36576" marT="18288" marB="18288" anchor="ctr">
+                    <a:lnL w="12700" cap="flat" cmpd="sng" algn="ctr">
+                      <a:solidFill>
+                        <a:srgbClr val="E4E7F0"/>
+                      </a:solidFill>
+                      <a:prstDash val="solid"/>
+                      <a:round/>
+                      <a:headEnd type="none" w="med" len="med"/>
+                      <a:tailEnd type="none" w="med" len="med"/>
+                    </a:lnL>
+                    <a:lnR w="12700" cap="flat" cmpd="sng" algn="ctr">
+                      <a:solidFill>
+                        <a:srgbClr val="E4E7F0"/>
+                      </a:solidFill>
+                      <a:prstDash val="solid"/>
+                      <a:round/>
+                      <a:headEnd type="none" w="med" len="med"/>
+                      <a:tailEnd type="none" w="med" len="med"/>
+                    </a:lnR>
+                    <a:lnT w="12700" cap="flat" cmpd="sng" algn="ctr">
+                      <a:solidFill>
+                        <a:srgbClr val="E4E7F0"/>
+                      </a:solidFill>
+                      <a:prstDash val="solid"/>
+                      <a:round/>
+                      <a:headEnd type="none" w="med" len="med"/>
+                      <a:tailEnd type="none" w="med" len="med"/>
+                    </a:lnT>
+                    <a:lnB w="12700" cap="flat" cmpd="sng" algn="ctr">
+                      <a:solidFill>
+                        <a:srgbClr val="E4E7F0"/>
+                      </a:solidFill>
+                      <a:prstDash val="solid"/>
+                      <a:round/>
+                      <a:headEnd type="none" w="med" len="med"/>
+                      <a:tailEnd type="none" w="med" len="med"/>
+                    </a:lnB>
+                    <a:solidFill>
+                      <a:srgbClr val="F4F6FB"/>
+                    </a:solidFill>
+                  </a:tcPr>
+                </a:tc>
+              </a:tr>
+              <a:tr h="283464">
+                <a:tc>
+                  <a:txBody>
+                    <a:bodyPr/>
+                    <a:lstStyle/>
+                    <a:p>
+                      <a:pPr algn="ctr" indent="0" marL="0">
+                        <a:buNone/>
+                      </a:pPr>
+                      <a:r>
+                        <a:rPr lang="en-US" sz="1050" b="1" dirty="0">
+                          <a:solidFill>
+                            <a:srgbClr val="33344A"/>
+                          </a:solidFill>
+                          <a:latin typeface="Calibri" pitchFamily="34" charset="0"/>
+                          <a:ea typeface="Calibri" pitchFamily="34" charset="-122"/>
+                          <a:cs typeface="Calibri" pitchFamily="34" charset="-120"/>
+                        </a:rPr>
+                        <a:t>F</a:t>
+                      </a:r>
+                      <a:endParaRPr lang="en-US" sz="1050" dirty="0">
+                        <a:latin typeface="Calibri" charset="0"/>
+                        <a:ea typeface="Calibri" charset="0"/>
+                        <a:cs typeface="Calibri" charset="0"/>
+                      </a:endParaRPr>
+                    </a:p>
+                  </a:txBody>
+                  <a:tcPr marL="36576" marR="36576" marT="18288" marB="18288" anchor="ctr">
+                    <a:lnL w="12700" cap="flat" cmpd="sng" algn="ctr">
+                      <a:solidFill>
+                        <a:srgbClr val="E4E7F0"/>
+                      </a:solidFill>
+                      <a:prstDash val="solid"/>
+                      <a:round/>
+                      <a:headEnd type="none" w="med" len="med"/>
+                      <a:tailEnd type="none" w="med" len="med"/>
+                    </a:lnL>
+                    <a:lnR w="12700" cap="flat" cmpd="sng" algn="ctr">
+                      <a:solidFill>
+                        <a:srgbClr val="E4E7F0"/>
+                      </a:solidFill>
+                      <a:prstDash val="solid"/>
+                      <a:round/>
+                      <a:headEnd type="none" w="med" len="med"/>
+                      <a:tailEnd type="none" w="med" len="med"/>
+                    </a:lnR>
+                    <a:lnT w="12700" cap="flat" cmpd="sng" algn="ctr">
+                      <a:solidFill>
+                        <a:srgbClr val="E4E7F0"/>
+                      </a:solidFill>
+                      <a:prstDash val="solid"/>
+                      <a:round/>
+                      <a:headEnd type="none" w="med" len="med"/>
+                      <a:tailEnd type="none" w="med" len="med"/>
+                    </a:lnT>
+                    <a:lnB w="12700" cap="flat" cmpd="sng" algn="ctr">
+                      <a:solidFill>
+                        <a:srgbClr val="E4E7F0"/>
+                      </a:solidFill>
+                      <a:prstDash val="solid"/>
+                      <a:round/>
+                      <a:headEnd type="none" w="med" len="med"/>
+                      <a:tailEnd type="none" w="med" len="med"/>
+                    </a:lnB>
+                    <a:solidFill>
+                      <a:srgbClr val="FFFFFF"/>
+                    </a:solidFill>
+                  </a:tcPr>
+                </a:tc>
+                <a:tc>
+                  <a:txBody>
+                    <a:bodyPr/>
+                    <a:lstStyle/>
+                    <a:p>
+                      <a:pPr algn="ctr" indent="0" marL="0">
+                        <a:buNone/>
+                      </a:pPr>
+                      <a:r>
+                        <a:rPr lang="en-US" sz="1050" dirty="0">
+                          <a:solidFill>
+                            <a:srgbClr val="33344A"/>
+                          </a:solidFill>
+                          <a:latin typeface="Calibri" pitchFamily="34" charset="0"/>
+                          <a:ea typeface="Calibri" pitchFamily="34" charset="-122"/>
+                          <a:cs typeface="Calibri" pitchFamily="34" charset="-120"/>
+                        </a:rPr>
+                        <a:t>1</a:t>
+                      </a:r>
+                      <a:endParaRPr lang="en-US" sz="1050" dirty="0">
+                        <a:latin typeface="Calibri" charset="0"/>
+                        <a:ea typeface="Calibri" charset="0"/>
+                        <a:cs typeface="Calibri" charset="0"/>
+                      </a:endParaRPr>
+                    </a:p>
+                  </a:txBody>
+                  <a:tcPr marL="36576" marR="36576" marT="18288" marB="18288" anchor="ctr">
+                    <a:lnL w="12700" cap="flat" cmpd="sng" algn="ctr">
+                      <a:solidFill>
+                        <a:srgbClr val="E4E7F0"/>
+                      </a:solidFill>
+                      <a:prstDash val="solid"/>
+                      <a:round/>
+                      <a:headEnd type="none" w="med" len="med"/>
+                      <a:tailEnd type="none" w="med" len="med"/>
+                    </a:lnL>
+                    <a:lnR w="12700" cap="flat" cmpd="sng" algn="ctr">
+                      <a:solidFill>
+                        <a:srgbClr val="E4E7F0"/>
+                      </a:solidFill>
+                      <a:prstDash val="solid"/>
+                      <a:round/>
+                      <a:headEnd type="none" w="med" len="med"/>
+                      <a:tailEnd type="none" w="med" len="med"/>
+                    </a:lnR>
+                    <a:lnT w="12700" cap="flat" cmpd="sng" algn="ctr">
+                      <a:solidFill>
+                        <a:srgbClr val="E4E7F0"/>
+                      </a:solidFill>
+                      <a:prstDash val="solid"/>
+                      <a:round/>
+                      <a:headEnd type="none" w="med" len="med"/>
+                      <a:tailEnd type="none" w="med" len="med"/>
+                    </a:lnT>
+                    <a:lnB w="12700" cap="flat" cmpd="sng" algn="ctr">
+                      <a:solidFill>
+                        <a:srgbClr val="E4E7F0"/>
+                      </a:solidFill>
+                      <a:prstDash val="solid"/>
+                      <a:round/>
+                      <a:headEnd type="none" w="med" len="med"/>
+                      <a:tailEnd type="none" w="med" len="med"/>
+                    </a:lnB>
+                    <a:solidFill>
+                      <a:srgbClr val="FFFFFF"/>
+                    </a:solidFill>
+                  </a:tcPr>
+                </a:tc>
+              </a:tr>
+            </a:tbl>
+          </a:graphicData>
+        </a:graphic>
+      </p:graphicFrame>
+      <p:sp>
+        <p:nvSpPr>
+          <p:cNvPr id="10" name="Shape 6"/>
           <p:cNvSpPr/>
           <p:nvPr/>
         </p:nvSpPr>
         <p:spPr>
           <a:xfrm>
-            <a:off x="6263640" y="1417320"/>
-            <a:ext cx="5349240" cy="1600200"/>
+            <a:off x="6263640" y="1371600"/>
+            <a:ext cx="5349240" cy="1965960"/>
           </a:xfrm>
           <a:prstGeom prst="roundRect">
             <a:avLst>
-              <a:gd name="adj" fmla="val 5714"/>
+              <a:gd name="adj" fmla="val 4651"/>
             </a:avLst>
           </a:prstGeom>
           <a:solidFill>
@@ -13643,14 +17064,14 @@
       </p:sp>
       <p:sp>
         <p:nvSpPr>
-          <p:cNvPr id="8" name="Text 6"/>
+          <p:cNvPr id="11" name="Text 7"/>
           <p:cNvSpPr txBox="1"/>
           <p:nvPr/>
         </p:nvSpPr>
         <p:spPr>
           <a:xfrm>
-            <a:off x="6537960" y="1581912"/>
-            <a:ext cx="4800600" cy="320040"/>
+            <a:off x="6492240" y="1508760"/>
+            <a:ext cx="4892040" cy="274320"/>
           </a:xfrm>
           <a:prstGeom prst="rect">
             <a:avLst/>
@@ -13666,7 +17087,7 @@
               <a:buNone/>
             </a:pPr>
             <a:r>
-              <a:rPr lang="en-US" sz="1150" b="1" spc="150" kern="0" dirty="0">
+              <a:rPr lang="en-US" sz="1100" b="1" dirty="0">
                 <a:solidFill>
                   <a:srgbClr val="B8892B"/>
                 </a:solidFill>
@@ -13674,68 +17095,830 @@
                 <a:ea typeface="Calibri" pitchFamily="34" charset="-122"/>
                 <a:cs typeface="Calibri" pitchFamily="34" charset="-120"/>
               </a:rPr>
-              <a:t>SCORE</a:t>
+              <a:t>SCORE   </a:t>
             </a:r>
-            <a:endParaRPr lang="en-US" sz="1150" dirty="0"/>
-          </a:p>
-        </p:txBody>
-      </p:sp>
-      <p:sp>
-        <p:nvSpPr>
-          <p:cNvPr id="9" name="Text 7"/>
-          <p:cNvSpPr txBox="1"/>
-          <p:nvPr/>
-        </p:nvSpPr>
-        <p:spPr>
-          <a:xfrm>
-            <a:off x="6537960" y="1920240"/>
-            <a:ext cx="4800600" cy="914400"/>
-          </a:xfrm>
-          <a:prstGeom prst="rect">
-            <a:avLst/>
-          </a:prstGeom>
-          <a:noFill/>
-          <a:ln/>
-        </p:spPr>
-        <p:txBody>
-          <a:bodyPr wrap="square" lIns="0" tIns="0" rIns="0" bIns="0" rtlCol="0" anchor="ctr"/>
-          <a:lstStyle/>
-          <a:p>
             <a:pPr indent="0" marL="0">
-              <a:lnSpc>
-                <a:spcPct val="120000"/>
-              </a:lnSpc>
               <a:buNone/>
             </a:pPr>
             <a:r>
-              <a:rPr lang="en-US" sz="1200" dirty="0">
+              <a:rPr lang="en-US" sz="1100" i="1" dirty="0">
                 <a:solidFill>
-                  <a:srgbClr val="33344A"/>
+                  <a:srgbClr val="6B7280"/>
                 </a:solidFill>
                 <a:latin typeface="Calibri" pitchFamily="34" charset="0"/>
                 <a:ea typeface="Calibri" pitchFamily="34" charset="-122"/>
                 <a:cs typeface="Calibri" pitchFamily="34" charset="-120"/>
               </a:rPr>
-              <a:t>Score every customer with both models regardless of which arm they were actually in, then τ(x) = μ̂₁(x) − μ̂₀(x). Two independent forward passes, one subtraction.</a:t>
+              <a:t>both models — ONE predict() call each</a:t>
             </a:r>
-            <a:endParaRPr lang="en-US" sz="1200" dirty="0"/>
-          </a:p>
-        </p:txBody>
-      </p:sp>
-      <p:sp>
-        <p:nvSpPr>
-          <p:cNvPr id="10" name="Shape 8"/>
+            <a:endParaRPr lang="en-US" sz="1100" dirty="0"/>
+          </a:p>
+        </p:txBody>
+      </p:sp>
+      <p:graphicFrame>
+        <p:nvGraphicFramePr>
+          <p:cNvPr id="19" name="Table 2"/>
+          <p:cNvGraphicFramePr>
+            <a:graphicFrameLocks noGrp="1"/>
+          </p:cNvGraphicFramePr>
+          <p:nvPr>
+            <p:extLst>
+              <p:ext uri="{D42A27DB-BD31-4B8C-83A1-F6EECF244321}">
+                <p14:modId xmlns:p14="http://schemas.microsoft.com/office/powerpoint/2010/main" val="1579011935"/>
+              </p:ext>
+            </p:extLst>
+          </p:nvPr>
+        </p:nvGraphicFramePr>
+        <p:xfrm>
+          <a:off x="6492240" y="1828800"/>
+          <a:ext cx="4892040" cy="1371600"/>
+        </p:xfrm>
+        <a:graphic>
+          <a:graphicData uri="http://schemas.openxmlformats.org/drawingml/2006/table">
+            <a:tbl>
+              <a:tblPr/>
+              <a:tblGrid>
+                <a:gridCol w="2152498"/>
+                <a:gridCol w="1369771"/>
+                <a:gridCol w="1369771"/>
+              </a:tblGrid>
+              <a:tr h="342900">
+                <a:tc>
+                  <a:txBody>
+                    <a:bodyPr/>
+                    <a:lstStyle/>
+                    <a:p>
+                      <a:pPr algn="ctr" indent="0" marL="0">
+                        <a:buNone/>
+                      </a:pPr>
+                      <a:r>
+                        <a:rPr lang="en-US" sz="1100" b="1" dirty="0">
+                          <a:solidFill>
+                            <a:srgbClr val="FFFFFF"/>
+                          </a:solidFill>
+                          <a:latin typeface="Calibri" pitchFamily="34" charset="0"/>
+                          <a:ea typeface="Calibri" pitchFamily="34" charset="-122"/>
+                          <a:cs typeface="Calibri" pitchFamily="34" charset="-120"/>
+                        </a:rPr>
+                        <a:t>Model</a:t>
+                      </a:r>
+                      <a:endParaRPr lang="en-US" sz="1100" dirty="0">
+                        <a:latin typeface="Calibri" charset="0"/>
+                        <a:ea typeface="Calibri" charset="0"/>
+                        <a:cs typeface="Calibri" charset="0"/>
+                      </a:endParaRPr>
+                    </a:p>
+                  </a:txBody>
+                  <a:tcPr marL="54864" marR="54864" marT="36576" marB="36576" anchor="ctr">
+                    <a:lnL w="12700" cap="flat" cmpd="sng" algn="ctr">
+                      <a:solidFill>
+                        <a:srgbClr val="F0DFB0"/>
+                      </a:solidFill>
+                      <a:prstDash val="solid"/>
+                      <a:round/>
+                      <a:headEnd type="none" w="med" len="med"/>
+                      <a:tailEnd type="none" w="med" len="med"/>
+                    </a:lnL>
+                    <a:lnR w="12700" cap="flat" cmpd="sng" algn="ctr">
+                      <a:solidFill>
+                        <a:srgbClr val="F0DFB0"/>
+                      </a:solidFill>
+                      <a:prstDash val="solid"/>
+                      <a:round/>
+                      <a:headEnd type="none" w="med" len="med"/>
+                      <a:tailEnd type="none" w="med" len="med"/>
+                    </a:lnR>
+                    <a:lnT w="12700" cap="flat" cmpd="sng" algn="ctr">
+                      <a:solidFill>
+                        <a:srgbClr val="F0DFB0"/>
+                      </a:solidFill>
+                      <a:prstDash val="solid"/>
+                      <a:round/>
+                      <a:headEnd type="none" w="med" len="med"/>
+                      <a:tailEnd type="none" w="med" len="med"/>
+                    </a:lnT>
+                    <a:lnB w="12700" cap="flat" cmpd="sng" algn="ctr">
+                      <a:solidFill>
+                        <a:srgbClr val="F0DFB0"/>
+                      </a:solidFill>
+                      <a:prstDash val="solid"/>
+                      <a:round/>
+                      <a:headEnd type="none" w="med" len="med"/>
+                      <a:tailEnd type="none" w="med" len="med"/>
+                    </a:lnB>
+                    <a:solidFill>
+                      <a:srgbClr val="B8892B"/>
+                    </a:solidFill>
+                  </a:tcPr>
+                </a:tc>
+                <a:tc>
+                  <a:txBody>
+                    <a:bodyPr/>
+                    <a:lstStyle/>
+                    <a:p>
+                      <a:pPr algn="ctr" indent="0" marL="0">
+                        <a:buNone/>
+                      </a:pPr>
+                      <a:r>
+                        <a:rPr lang="en-US" sz="1100" b="1" dirty="0">
+                          <a:solidFill>
+                            <a:srgbClr val="FFFFFF"/>
+                          </a:solidFill>
+                          <a:latin typeface="Calibri" pitchFamily="34" charset="0"/>
+                          <a:ea typeface="Calibri" pitchFamily="34" charset="-122"/>
+                          <a:cs typeface="Calibri" pitchFamily="34" charset="-120"/>
+                        </a:rPr>
+                        <a:t>Call</a:t>
+                      </a:r>
+                      <a:endParaRPr lang="en-US" sz="1100" dirty="0">
+                        <a:latin typeface="Calibri" charset="0"/>
+                        <a:ea typeface="Calibri" charset="0"/>
+                        <a:cs typeface="Calibri" charset="0"/>
+                      </a:endParaRPr>
+                    </a:p>
+                  </a:txBody>
+                  <a:tcPr marL="54864" marR="54864" marT="36576" marB="36576" anchor="ctr">
+                    <a:lnL w="12700" cap="flat" cmpd="sng" algn="ctr">
+                      <a:solidFill>
+                        <a:srgbClr val="F0DFB0"/>
+                      </a:solidFill>
+                      <a:prstDash val="solid"/>
+                      <a:round/>
+                      <a:headEnd type="none" w="med" len="med"/>
+                      <a:tailEnd type="none" w="med" len="med"/>
+                    </a:lnL>
+                    <a:lnR w="12700" cap="flat" cmpd="sng" algn="ctr">
+                      <a:solidFill>
+                        <a:srgbClr val="F0DFB0"/>
+                      </a:solidFill>
+                      <a:prstDash val="solid"/>
+                      <a:round/>
+                      <a:headEnd type="none" w="med" len="med"/>
+                      <a:tailEnd type="none" w="med" len="med"/>
+                    </a:lnR>
+                    <a:lnT w="12700" cap="flat" cmpd="sng" algn="ctr">
+                      <a:solidFill>
+                        <a:srgbClr val="F0DFB0"/>
+                      </a:solidFill>
+                      <a:prstDash val="solid"/>
+                      <a:round/>
+                      <a:headEnd type="none" w="med" len="med"/>
+                      <a:tailEnd type="none" w="med" len="med"/>
+                    </a:lnT>
+                    <a:lnB w="12700" cap="flat" cmpd="sng" algn="ctr">
+                      <a:solidFill>
+                        <a:srgbClr val="F0DFB0"/>
+                      </a:solidFill>
+                      <a:prstDash val="solid"/>
+                      <a:round/>
+                      <a:headEnd type="none" w="med" len="med"/>
+                      <a:tailEnd type="none" w="med" len="med"/>
+                    </a:lnB>
+                    <a:solidFill>
+                      <a:srgbClr val="B8892B"/>
+                    </a:solidFill>
+                  </a:tcPr>
+                </a:tc>
+                <a:tc>
+                  <a:txBody>
+                    <a:bodyPr/>
+                    <a:lstStyle/>
+                    <a:p>
+                      <a:pPr algn="ctr" indent="0" marL="0">
+                        <a:buNone/>
+                      </a:pPr>
+                      <a:r>
+                        <a:rPr lang="en-US" sz="1100" b="1" dirty="0">
+                          <a:solidFill>
+                            <a:srgbClr val="FFFFFF"/>
+                          </a:solidFill>
+                          <a:latin typeface="Calibri" pitchFamily="34" charset="0"/>
+                          <a:ea typeface="Calibri" pitchFamily="34" charset="-122"/>
+                          <a:cs typeface="Calibri" pitchFamily="34" charset="-120"/>
+                        </a:rPr>
+                        <a:t>Output</a:t>
+                      </a:r>
+                      <a:endParaRPr lang="en-US" sz="1100" dirty="0">
+                        <a:latin typeface="Calibri" charset="0"/>
+                        <a:ea typeface="Calibri" charset="0"/>
+                        <a:cs typeface="Calibri" charset="0"/>
+                      </a:endParaRPr>
+                    </a:p>
+                  </a:txBody>
+                  <a:tcPr marL="54864" marR="54864" marT="36576" marB="36576" anchor="ctr">
+                    <a:lnL w="12700" cap="flat" cmpd="sng" algn="ctr">
+                      <a:solidFill>
+                        <a:srgbClr val="F0DFB0"/>
+                      </a:solidFill>
+                      <a:prstDash val="solid"/>
+                      <a:round/>
+                      <a:headEnd type="none" w="med" len="med"/>
+                      <a:tailEnd type="none" w="med" len="med"/>
+                    </a:lnL>
+                    <a:lnR w="12700" cap="flat" cmpd="sng" algn="ctr">
+                      <a:solidFill>
+                        <a:srgbClr val="F0DFB0"/>
+                      </a:solidFill>
+                      <a:prstDash val="solid"/>
+                      <a:round/>
+                      <a:headEnd type="none" w="med" len="med"/>
+                      <a:tailEnd type="none" w="med" len="med"/>
+                    </a:lnR>
+                    <a:lnT w="12700" cap="flat" cmpd="sng" algn="ctr">
+                      <a:solidFill>
+                        <a:srgbClr val="F0DFB0"/>
+                      </a:solidFill>
+                      <a:prstDash val="solid"/>
+                      <a:round/>
+                      <a:headEnd type="none" w="med" len="med"/>
+                      <a:tailEnd type="none" w="med" len="med"/>
+                    </a:lnT>
+                    <a:lnB w="12700" cap="flat" cmpd="sng" algn="ctr">
+                      <a:solidFill>
+                        <a:srgbClr val="F0DFB0"/>
+                      </a:solidFill>
+                      <a:prstDash val="solid"/>
+                      <a:round/>
+                      <a:headEnd type="none" w="med" len="med"/>
+                      <a:tailEnd type="none" w="med" len="med"/>
+                    </a:lnB>
+                    <a:solidFill>
+                      <a:srgbClr val="B8892B"/>
+                    </a:solidFill>
+                  </a:tcPr>
+                </a:tc>
+              </a:tr>
+              <a:tr h="342900">
+                <a:tc>
+                  <a:txBody>
+                    <a:bodyPr/>
+                    <a:lstStyle/>
+                    <a:p>
+                      <a:pPr algn="l" indent="0" marL="0">
+                        <a:buNone/>
+                      </a:pPr>
+                      <a:r>
+                        <a:rPr lang="en-US" sz="1100" b="1" dirty="0">
+                          <a:solidFill>
+                            <a:srgbClr val="1E2761"/>
+                          </a:solidFill>
+                          <a:latin typeface="Calibri" pitchFamily="34" charset="0"/>
+                          <a:ea typeface="Calibri" pitchFamily="34" charset="-122"/>
+                          <a:cs typeface="Calibri" pitchFamily="34" charset="-120"/>
+                        </a:rPr>
+                        <a:t>μ̂₀ — control model</a:t>
+                      </a:r>
+                      <a:endParaRPr lang="en-US" sz="1100" dirty="0">
+                        <a:latin typeface="Calibri" charset="0"/>
+                        <a:ea typeface="Calibri" charset="0"/>
+                        <a:cs typeface="Calibri" charset="0"/>
+                      </a:endParaRPr>
+                    </a:p>
+                  </a:txBody>
+                  <a:tcPr marL="54864" marR="54864" marT="36576" marB="36576" anchor="ctr">
+                    <a:lnL w="12700" cap="flat" cmpd="sng" algn="ctr">
+                      <a:solidFill>
+                        <a:srgbClr val="F0DFB0"/>
+                      </a:solidFill>
+                      <a:prstDash val="solid"/>
+                      <a:round/>
+                      <a:headEnd type="none" w="med" len="med"/>
+                      <a:tailEnd type="none" w="med" len="med"/>
+                    </a:lnL>
+                    <a:lnR w="12700" cap="flat" cmpd="sng" algn="ctr">
+                      <a:solidFill>
+                        <a:srgbClr val="F0DFB0"/>
+                      </a:solidFill>
+                      <a:prstDash val="solid"/>
+                      <a:round/>
+                      <a:headEnd type="none" w="med" len="med"/>
+                      <a:tailEnd type="none" w="med" len="med"/>
+                    </a:lnR>
+                    <a:lnT w="12700" cap="flat" cmpd="sng" algn="ctr">
+                      <a:solidFill>
+                        <a:srgbClr val="F0DFB0"/>
+                      </a:solidFill>
+                      <a:prstDash val="solid"/>
+                      <a:round/>
+                      <a:headEnd type="none" w="med" len="med"/>
+                      <a:tailEnd type="none" w="med" len="med"/>
+                    </a:lnT>
+                    <a:lnB w="12700" cap="flat" cmpd="sng" algn="ctr">
+                      <a:solidFill>
+                        <a:srgbClr val="F0DFB0"/>
+                      </a:solidFill>
+                      <a:prstDash val="solid"/>
+                      <a:round/>
+                      <a:headEnd type="none" w="med" len="med"/>
+                      <a:tailEnd type="none" w="med" len="med"/>
+                    </a:lnB>
+                    <a:solidFill>
+                      <a:srgbClr val="FFFFFF"/>
+                    </a:solidFill>
+                  </a:tcPr>
+                </a:tc>
+                <a:tc>
+                  <a:txBody>
+                    <a:bodyPr/>
+                    <a:lstStyle/>
+                    <a:p>
+                      <a:pPr algn="ctr" indent="0" marL="0">
+                        <a:buNone/>
+                      </a:pPr>
+                      <a:r>
+                        <a:rPr lang="en-US" sz="1100" dirty="0">
+                          <a:solidFill>
+                            <a:srgbClr val="33344A"/>
+                          </a:solidFill>
+                          <a:latin typeface="Calibri" pitchFamily="34" charset="0"/>
+                          <a:ea typeface="Calibri" pitchFamily="34" charset="-122"/>
+                          <a:cs typeface="Calibri" pitchFamily="34" charset="-120"/>
+                        </a:rPr>
+                        <a:t>predict(G)</a:t>
+                      </a:r>
+                      <a:endParaRPr lang="en-US" sz="1100" dirty="0">
+                        <a:latin typeface="Calibri" charset="0"/>
+                        <a:ea typeface="Calibri" charset="0"/>
+                        <a:cs typeface="Calibri" charset="0"/>
+                      </a:endParaRPr>
+                    </a:p>
+                  </a:txBody>
+                  <a:tcPr marL="54864" marR="54864" marT="36576" marB="36576" anchor="ctr">
+                    <a:lnL w="12700" cap="flat" cmpd="sng" algn="ctr">
+                      <a:solidFill>
+                        <a:srgbClr val="F0DFB0"/>
+                      </a:solidFill>
+                      <a:prstDash val="solid"/>
+                      <a:round/>
+                      <a:headEnd type="none" w="med" len="med"/>
+                      <a:tailEnd type="none" w="med" len="med"/>
+                    </a:lnL>
+                    <a:lnR w="12700" cap="flat" cmpd="sng" algn="ctr">
+                      <a:solidFill>
+                        <a:srgbClr val="F0DFB0"/>
+                      </a:solidFill>
+                      <a:prstDash val="solid"/>
+                      <a:round/>
+                      <a:headEnd type="none" w="med" len="med"/>
+                      <a:tailEnd type="none" w="med" len="med"/>
+                    </a:lnR>
+                    <a:lnT w="12700" cap="flat" cmpd="sng" algn="ctr">
+                      <a:solidFill>
+                        <a:srgbClr val="F0DFB0"/>
+                      </a:solidFill>
+                      <a:prstDash val="solid"/>
+                      <a:round/>
+                      <a:headEnd type="none" w="med" len="med"/>
+                      <a:tailEnd type="none" w="med" len="med"/>
+                    </a:lnT>
+                    <a:lnB w="12700" cap="flat" cmpd="sng" algn="ctr">
+                      <a:solidFill>
+                        <a:srgbClr val="F0DFB0"/>
+                      </a:solidFill>
+                      <a:prstDash val="solid"/>
+                      <a:round/>
+                      <a:headEnd type="none" w="med" len="med"/>
+                      <a:tailEnd type="none" w="med" len="med"/>
+                    </a:lnB>
+                    <a:solidFill>
+                      <a:srgbClr val="FFFFFF"/>
+                    </a:solidFill>
+                  </a:tcPr>
+                </a:tc>
+                <a:tc>
+                  <a:txBody>
+                    <a:bodyPr/>
+                    <a:lstStyle/>
+                    <a:p>
+                      <a:pPr algn="ctr" indent="0" marL="0">
+                        <a:buNone/>
+                      </a:pPr>
+                      <a:r>
+                        <a:rPr lang="en-US" sz="1100" dirty="0">
+                          <a:solidFill>
+                            <a:srgbClr val="33344A"/>
+                          </a:solidFill>
+                          <a:latin typeface="Calibri" pitchFamily="34" charset="0"/>
+                          <a:ea typeface="Calibri" pitchFamily="34" charset="-122"/>
+                          <a:cs typeface="Calibri" pitchFamily="34" charset="-120"/>
+                        </a:rPr>
+                        <a:t>0.19</a:t>
+                      </a:r>
+                      <a:endParaRPr lang="en-US" sz="1100" dirty="0">
+                        <a:latin typeface="Calibri" charset="0"/>
+                        <a:ea typeface="Calibri" charset="0"/>
+                        <a:cs typeface="Calibri" charset="0"/>
+                      </a:endParaRPr>
+                    </a:p>
+                  </a:txBody>
+                  <a:tcPr marL="54864" marR="54864" marT="36576" marB="36576" anchor="ctr">
+                    <a:lnL w="12700" cap="flat" cmpd="sng" algn="ctr">
+                      <a:solidFill>
+                        <a:srgbClr val="F0DFB0"/>
+                      </a:solidFill>
+                      <a:prstDash val="solid"/>
+                      <a:round/>
+                      <a:headEnd type="none" w="med" len="med"/>
+                      <a:tailEnd type="none" w="med" len="med"/>
+                    </a:lnL>
+                    <a:lnR w="12700" cap="flat" cmpd="sng" algn="ctr">
+                      <a:solidFill>
+                        <a:srgbClr val="F0DFB0"/>
+                      </a:solidFill>
+                      <a:prstDash val="solid"/>
+                      <a:round/>
+                      <a:headEnd type="none" w="med" len="med"/>
+                      <a:tailEnd type="none" w="med" len="med"/>
+                    </a:lnR>
+                    <a:lnT w="12700" cap="flat" cmpd="sng" algn="ctr">
+                      <a:solidFill>
+                        <a:srgbClr val="F0DFB0"/>
+                      </a:solidFill>
+                      <a:prstDash val="solid"/>
+                      <a:round/>
+                      <a:headEnd type="none" w="med" len="med"/>
+                      <a:tailEnd type="none" w="med" len="med"/>
+                    </a:lnT>
+                    <a:lnB w="12700" cap="flat" cmpd="sng" algn="ctr">
+                      <a:solidFill>
+                        <a:srgbClr val="F0DFB0"/>
+                      </a:solidFill>
+                      <a:prstDash val="solid"/>
+                      <a:round/>
+                      <a:headEnd type="none" w="med" len="med"/>
+                      <a:tailEnd type="none" w="med" len="med"/>
+                    </a:lnB>
+                    <a:solidFill>
+                      <a:srgbClr val="FFFFFF"/>
+                    </a:solidFill>
+                  </a:tcPr>
+                </a:tc>
+              </a:tr>
+              <a:tr h="342900">
+                <a:tc>
+                  <a:txBody>
+                    <a:bodyPr/>
+                    <a:lstStyle/>
+                    <a:p>
+                      <a:pPr algn="l" indent="0" marL="0">
+                        <a:buNone/>
+                      </a:pPr>
+                      <a:r>
+                        <a:rPr lang="en-US" sz="1100" b="1" dirty="0">
+                          <a:solidFill>
+                            <a:srgbClr val="B8892B"/>
+                          </a:solidFill>
+                          <a:latin typeface="Calibri" pitchFamily="34" charset="0"/>
+                          <a:ea typeface="Calibri" pitchFamily="34" charset="-122"/>
+                          <a:cs typeface="Calibri" pitchFamily="34" charset="-120"/>
+                        </a:rPr>
+                        <a:t>μ̂₁ — treatment model</a:t>
+                      </a:r>
+                      <a:endParaRPr lang="en-US" sz="1100" dirty="0">
+                        <a:latin typeface="Calibri" charset="0"/>
+                        <a:ea typeface="Calibri" charset="0"/>
+                        <a:cs typeface="Calibri" charset="0"/>
+                      </a:endParaRPr>
+                    </a:p>
+                  </a:txBody>
+                  <a:tcPr marL="54864" marR="54864" marT="36576" marB="36576" anchor="ctr">
+                    <a:lnL w="12700" cap="flat" cmpd="sng" algn="ctr">
+                      <a:solidFill>
+                        <a:srgbClr val="F0DFB0"/>
+                      </a:solidFill>
+                      <a:prstDash val="solid"/>
+                      <a:round/>
+                      <a:headEnd type="none" w="med" len="med"/>
+                      <a:tailEnd type="none" w="med" len="med"/>
+                    </a:lnL>
+                    <a:lnR w="12700" cap="flat" cmpd="sng" algn="ctr">
+                      <a:solidFill>
+                        <a:srgbClr val="F0DFB0"/>
+                      </a:solidFill>
+                      <a:prstDash val="solid"/>
+                      <a:round/>
+                      <a:headEnd type="none" w="med" len="med"/>
+                      <a:tailEnd type="none" w="med" len="med"/>
+                    </a:lnR>
+                    <a:lnT w="12700" cap="flat" cmpd="sng" algn="ctr">
+                      <a:solidFill>
+                        <a:srgbClr val="F0DFB0"/>
+                      </a:solidFill>
+                      <a:prstDash val="solid"/>
+                      <a:round/>
+                      <a:headEnd type="none" w="med" len="med"/>
+                      <a:tailEnd type="none" w="med" len="med"/>
+                    </a:lnT>
+                    <a:lnB w="12700" cap="flat" cmpd="sng" algn="ctr">
+                      <a:solidFill>
+                        <a:srgbClr val="F0DFB0"/>
+                      </a:solidFill>
+                      <a:prstDash val="solid"/>
+                      <a:round/>
+                      <a:headEnd type="none" w="med" len="med"/>
+                      <a:tailEnd type="none" w="med" len="med"/>
+                    </a:lnB>
+                    <a:solidFill>
+                      <a:srgbClr val="FBF3E1"/>
+                    </a:solidFill>
+                  </a:tcPr>
+                </a:tc>
+                <a:tc>
+                  <a:txBody>
+                    <a:bodyPr/>
+                    <a:lstStyle/>
+                    <a:p>
+                      <a:pPr algn="ctr" indent="0" marL="0">
+                        <a:buNone/>
+                      </a:pPr>
+                      <a:r>
+                        <a:rPr lang="en-US" sz="1100" dirty="0">
+                          <a:solidFill>
+                            <a:srgbClr val="33344A"/>
+                          </a:solidFill>
+                          <a:latin typeface="Calibri" pitchFamily="34" charset="0"/>
+                          <a:ea typeface="Calibri" pitchFamily="34" charset="-122"/>
+                          <a:cs typeface="Calibri" pitchFamily="34" charset="-120"/>
+                        </a:rPr>
+                        <a:t>predict(G)</a:t>
+                      </a:r>
+                      <a:endParaRPr lang="en-US" sz="1100" dirty="0">
+                        <a:latin typeface="Calibri" charset="0"/>
+                        <a:ea typeface="Calibri" charset="0"/>
+                        <a:cs typeface="Calibri" charset="0"/>
+                      </a:endParaRPr>
+                    </a:p>
+                  </a:txBody>
+                  <a:tcPr marL="54864" marR="54864" marT="36576" marB="36576" anchor="ctr">
+                    <a:lnL w="12700" cap="flat" cmpd="sng" algn="ctr">
+                      <a:solidFill>
+                        <a:srgbClr val="F0DFB0"/>
+                      </a:solidFill>
+                      <a:prstDash val="solid"/>
+                      <a:round/>
+                      <a:headEnd type="none" w="med" len="med"/>
+                      <a:tailEnd type="none" w="med" len="med"/>
+                    </a:lnL>
+                    <a:lnR w="12700" cap="flat" cmpd="sng" algn="ctr">
+                      <a:solidFill>
+                        <a:srgbClr val="F0DFB0"/>
+                      </a:solidFill>
+                      <a:prstDash val="solid"/>
+                      <a:round/>
+                      <a:headEnd type="none" w="med" len="med"/>
+                      <a:tailEnd type="none" w="med" len="med"/>
+                    </a:lnR>
+                    <a:lnT w="12700" cap="flat" cmpd="sng" algn="ctr">
+                      <a:solidFill>
+                        <a:srgbClr val="F0DFB0"/>
+                      </a:solidFill>
+                      <a:prstDash val="solid"/>
+                      <a:round/>
+                      <a:headEnd type="none" w="med" len="med"/>
+                      <a:tailEnd type="none" w="med" len="med"/>
+                    </a:lnT>
+                    <a:lnB w="12700" cap="flat" cmpd="sng" algn="ctr">
+                      <a:solidFill>
+                        <a:srgbClr val="F0DFB0"/>
+                      </a:solidFill>
+                      <a:prstDash val="solid"/>
+                      <a:round/>
+                      <a:headEnd type="none" w="med" len="med"/>
+                      <a:tailEnd type="none" w="med" len="med"/>
+                    </a:lnB>
+                    <a:solidFill>
+                      <a:srgbClr val="FBF3E1"/>
+                    </a:solidFill>
+                  </a:tcPr>
+                </a:tc>
+                <a:tc>
+                  <a:txBody>
+                    <a:bodyPr/>
+                    <a:lstStyle/>
+                    <a:p>
+                      <a:pPr algn="ctr" indent="0" marL="0">
+                        <a:buNone/>
+                      </a:pPr>
+                      <a:r>
+                        <a:rPr lang="en-US" sz="1100" dirty="0">
+                          <a:solidFill>
+                            <a:srgbClr val="33344A"/>
+                          </a:solidFill>
+                          <a:latin typeface="Calibri" pitchFamily="34" charset="0"/>
+                          <a:ea typeface="Calibri" pitchFamily="34" charset="-122"/>
+                          <a:cs typeface="Calibri" pitchFamily="34" charset="-120"/>
+                        </a:rPr>
+                        <a:t>0.35</a:t>
+                      </a:r>
+                      <a:endParaRPr lang="en-US" sz="1100" dirty="0">
+                        <a:latin typeface="Calibri" charset="0"/>
+                        <a:ea typeface="Calibri" charset="0"/>
+                        <a:cs typeface="Calibri" charset="0"/>
+                      </a:endParaRPr>
+                    </a:p>
+                  </a:txBody>
+                  <a:tcPr marL="54864" marR="54864" marT="36576" marB="36576" anchor="ctr">
+                    <a:lnL w="12700" cap="flat" cmpd="sng" algn="ctr">
+                      <a:solidFill>
+                        <a:srgbClr val="F0DFB0"/>
+                      </a:solidFill>
+                      <a:prstDash val="solid"/>
+                      <a:round/>
+                      <a:headEnd type="none" w="med" len="med"/>
+                      <a:tailEnd type="none" w="med" len="med"/>
+                    </a:lnL>
+                    <a:lnR w="12700" cap="flat" cmpd="sng" algn="ctr">
+                      <a:solidFill>
+                        <a:srgbClr val="F0DFB0"/>
+                      </a:solidFill>
+                      <a:prstDash val="solid"/>
+                      <a:round/>
+                      <a:headEnd type="none" w="med" len="med"/>
+                      <a:tailEnd type="none" w="med" len="med"/>
+                    </a:lnR>
+                    <a:lnT w="12700" cap="flat" cmpd="sng" algn="ctr">
+                      <a:solidFill>
+                        <a:srgbClr val="F0DFB0"/>
+                      </a:solidFill>
+                      <a:prstDash val="solid"/>
+                      <a:round/>
+                      <a:headEnd type="none" w="med" len="med"/>
+                      <a:tailEnd type="none" w="med" len="med"/>
+                    </a:lnT>
+                    <a:lnB w="12700" cap="flat" cmpd="sng" algn="ctr">
+                      <a:solidFill>
+                        <a:srgbClr val="F0DFB0"/>
+                      </a:solidFill>
+                      <a:prstDash val="solid"/>
+                      <a:round/>
+                      <a:headEnd type="none" w="med" len="med"/>
+                      <a:tailEnd type="none" w="med" len="med"/>
+                    </a:lnB>
+                    <a:solidFill>
+                      <a:srgbClr val="FBF3E1"/>
+                    </a:solidFill>
+                  </a:tcPr>
+                </a:tc>
+              </a:tr>
+              <a:tr h="342900">
+                <a:tc gridSpan="2">
+                  <a:txBody>
+                    <a:bodyPr/>
+                    <a:lstStyle/>
+                    <a:p>
+                      <a:pPr algn="l" indent="0" marL="0">
+                        <a:buNone/>
+                      </a:pPr>
+                      <a:r>
+                        <a:rPr lang="en-US" sz="1100" b="1" dirty="0">
+                          <a:solidFill>
+                            <a:srgbClr val="FFFFFF"/>
+                          </a:solidFill>
+                          <a:latin typeface="Calibri" pitchFamily="34" charset="0"/>
+                          <a:ea typeface="Calibri" pitchFamily="34" charset="-122"/>
+                          <a:cs typeface="Calibri" pitchFamily="34" charset="-120"/>
+                        </a:rPr>
+                        <a:t>τ(G) = μ̂₁(G) − μ̂₀(G)</a:t>
+                      </a:r>
+                      <a:endParaRPr lang="en-US" sz="1100" dirty="0">
+                        <a:latin typeface="Calibri" charset="0"/>
+                        <a:ea typeface="Calibri" charset="0"/>
+                        <a:cs typeface="Calibri" charset="0"/>
+                      </a:endParaRPr>
+                    </a:p>
+                  </a:txBody>
+                  <a:tcPr marL="54864" marR="54864" marT="36576" marB="36576" anchor="ctr">
+                    <a:lnL w="12700" cap="flat" cmpd="sng" algn="ctr">
+                      <a:solidFill>
+                        <a:srgbClr val="F0DFB0"/>
+                      </a:solidFill>
+                      <a:prstDash val="solid"/>
+                      <a:round/>
+                      <a:headEnd type="none" w="med" len="med"/>
+                      <a:tailEnd type="none" w="med" len="med"/>
+                    </a:lnL>
+                    <a:lnR w="12700" cap="flat" cmpd="sng" algn="ctr">
+                      <a:solidFill>
+                        <a:srgbClr val="F0DFB0"/>
+                      </a:solidFill>
+                      <a:prstDash val="solid"/>
+                      <a:round/>
+                      <a:headEnd type="none" w="med" len="med"/>
+                      <a:tailEnd type="none" w="med" len="med"/>
+                    </a:lnR>
+                    <a:lnT w="12700" cap="flat" cmpd="sng" algn="ctr">
+                      <a:solidFill>
+                        <a:srgbClr val="F0DFB0"/>
+                      </a:solidFill>
+                      <a:prstDash val="solid"/>
+                      <a:round/>
+                      <a:headEnd type="none" w="med" len="med"/>
+                      <a:tailEnd type="none" w="med" len="med"/>
+                    </a:lnT>
+                    <a:lnB w="12700" cap="flat" cmpd="sng" algn="ctr">
+                      <a:solidFill>
+                        <a:srgbClr val="F0DFB0"/>
+                      </a:solidFill>
+                      <a:prstDash val="solid"/>
+                      <a:round/>
+                      <a:headEnd type="none" w="med" len="med"/>
+                      <a:tailEnd type="none" w="med" len="med"/>
+                    </a:lnB>
+                    <a:solidFill>
+                      <a:srgbClr val="141B4D"/>
+                    </a:solidFill>
+                  </a:tcPr>
+                </a:tc>
+                <a:tc hMerge="1">
+                  <a:tcPr/>
+                </a:tc>
+                <a:tc>
+                  <a:txBody>
+                    <a:bodyPr/>
+                    <a:lstStyle/>
+                    <a:p>
+                      <a:pPr algn="ctr" indent="0" marL="0">
+                        <a:buNone/>
+                      </a:pPr>
+                      <a:r>
+                        <a:rPr lang="en-US" sz="1500" b="1" dirty="0">
+                          <a:solidFill>
+                            <a:srgbClr val="B8892B"/>
+                          </a:solidFill>
+                          <a:latin typeface="Calibri" pitchFamily="34" charset="0"/>
+                          <a:ea typeface="Calibri" pitchFamily="34" charset="-122"/>
+                          <a:cs typeface="Calibri" pitchFamily="34" charset="-120"/>
+                        </a:rPr>
+                        <a:t>0.16</a:t>
+                      </a:r>
+                      <a:endParaRPr lang="en-US" sz="1500" dirty="0">
+                        <a:latin typeface="Calibri" charset="0"/>
+                        <a:ea typeface="Calibri" charset="0"/>
+                        <a:cs typeface="Calibri" charset="0"/>
+                      </a:endParaRPr>
+                    </a:p>
+                  </a:txBody>
+                  <a:tcPr marL="54864" marR="54864" marT="36576" marB="36576" anchor="ctr">
+                    <a:lnL w="12700" cap="flat" cmpd="sng" algn="ctr">
+                      <a:solidFill>
+                        <a:srgbClr val="F0DFB0"/>
+                      </a:solidFill>
+                      <a:prstDash val="solid"/>
+                      <a:round/>
+                      <a:headEnd type="none" w="med" len="med"/>
+                      <a:tailEnd type="none" w="med" len="med"/>
+                    </a:lnL>
+                    <a:lnR w="12700" cap="flat" cmpd="sng" algn="ctr">
+                      <a:solidFill>
+                        <a:srgbClr val="F0DFB0"/>
+                      </a:solidFill>
+                      <a:prstDash val="solid"/>
+                      <a:round/>
+                      <a:headEnd type="none" w="med" len="med"/>
+                      <a:tailEnd type="none" w="med" len="med"/>
+                    </a:lnR>
+                    <a:lnT w="12700" cap="flat" cmpd="sng" algn="ctr">
+                      <a:solidFill>
+                        <a:srgbClr val="F0DFB0"/>
+                      </a:solidFill>
+                      <a:prstDash val="solid"/>
+                      <a:round/>
+                      <a:headEnd type="none" w="med" len="med"/>
+                      <a:tailEnd type="none" w="med" len="med"/>
+                    </a:lnT>
+                    <a:lnB w="12700" cap="flat" cmpd="sng" algn="ctr">
+                      <a:solidFill>
+                        <a:srgbClr val="F0DFB0"/>
+                      </a:solidFill>
+                      <a:prstDash val="solid"/>
+                      <a:round/>
+                      <a:headEnd type="none" w="med" len="med"/>
+                      <a:tailEnd type="none" w="med" len="med"/>
+                    </a:lnB>
+                    <a:solidFill>
+                      <a:srgbClr val="141B4D"/>
+                    </a:solidFill>
+                  </a:tcPr>
+                </a:tc>
+              </a:tr>
+            </a:tbl>
+          </a:graphicData>
+        </a:graphic>
+      </p:graphicFrame>
+      <p:sp>
+        <p:nvSpPr>
+          <p:cNvPr id="13" name="Shape 8"/>
           <p:cNvSpPr/>
           <p:nvPr/>
         </p:nvSpPr>
         <p:spPr>
           <a:xfrm>
-            <a:off x="548640" y="3200400"/>
-            <a:ext cx="5349240" cy="1463040"/>
+            <a:off x="548640" y="3474720"/>
+            <a:ext cx="5349240" cy="1234440"/>
           </a:xfrm>
           <a:prstGeom prst="roundRect">
             <a:avLst>
-              <a:gd name="adj" fmla="val 6250"/>
+              <a:gd name="adj" fmla="val 7407"/>
             </a:avLst>
           </a:prstGeom>
           <a:solidFill>
@@ -13746,14 +17929,14 @@
       </p:sp>
       <p:sp>
         <p:nvSpPr>
-          <p:cNvPr id="11" name="Text 9"/>
+          <p:cNvPr id="14" name="Text 9"/>
           <p:cNvSpPr txBox="1"/>
           <p:nvPr/>
         </p:nvSpPr>
         <p:spPr>
           <a:xfrm>
-            <a:off x="822960" y="3346704"/>
-            <a:ext cx="4800600" cy="320040"/>
+            <a:off x="822960" y="3602736"/>
+            <a:ext cx="4800600" cy="292608"/>
           </a:xfrm>
           <a:prstGeom prst="rect">
             <a:avLst/>
@@ -13785,14 +17968,14 @@
       </p:sp>
       <p:sp>
         <p:nvSpPr>
-          <p:cNvPr id="12" name="Text 10"/>
+          <p:cNvPr id="15" name="Text 10"/>
           <p:cNvSpPr txBox="1"/>
           <p:nvPr/>
         </p:nvSpPr>
         <p:spPr>
           <a:xfrm>
-            <a:off x="822960" y="3703320"/>
-            <a:ext cx="4800600" cy="777240"/>
+            <a:off x="822960" y="3931920"/>
+            <a:ext cx="4800600" cy="640080"/>
           </a:xfrm>
           <a:prstGeom prst="rect">
             <a:avLst/>
@@ -13819,7 +18002,7 @@
                 <a:ea typeface="Calibri" pitchFamily="34" charset="-122"/>
                 <a:cs typeface="Calibri" pitchFamily="34" charset="-120"/>
               </a:rPr>
-              <a:t>Each model specializes freely — no shared regularization fighting over the treatment signal. Conceptually the simplest uplift estimator: it's just “model B minus model A.”</a:t>
+              <a:t>Each model specializes freely — no shared regularization fighting over the treatment signal. Simplest to reason about: “model B minus model A.”</a:t>
             </a:r>
             <a:endParaRPr lang="en-US" sz="1150" dirty="0"/>
           </a:p>
@@ -13827,18 +18010,18 @@
       </p:sp>
       <p:sp>
         <p:nvSpPr>
-          <p:cNvPr id="13" name="Shape 11"/>
+          <p:cNvPr id="16" name="Shape 11"/>
           <p:cNvSpPr/>
           <p:nvPr/>
         </p:nvSpPr>
         <p:spPr>
           <a:xfrm>
-            <a:off x="6263640" y="3200400"/>
-            <a:ext cx="5349240" cy="1463040"/>
+            <a:off x="6263640" y="3474720"/>
+            <a:ext cx="5349240" cy="1234440"/>
           </a:xfrm>
           <a:prstGeom prst="roundRect">
             <a:avLst>
-              <a:gd name="adj" fmla="val 6250"/>
+              <a:gd name="adj" fmla="val 7407"/>
             </a:avLst>
           </a:prstGeom>
           <a:solidFill>
@@ -13849,14 +18032,14 @@
       </p:sp>
       <p:sp>
         <p:nvSpPr>
-          <p:cNvPr id="14" name="Text 12"/>
+          <p:cNvPr id="17" name="Text 12"/>
           <p:cNvSpPr txBox="1"/>
           <p:nvPr/>
         </p:nvSpPr>
         <p:spPr>
           <a:xfrm>
-            <a:off x="6537960" y="3346704"/>
-            <a:ext cx="4800600" cy="320040"/>
+            <a:off x="6537960" y="3602736"/>
+            <a:ext cx="4800600" cy="292608"/>
           </a:xfrm>
           <a:prstGeom prst="rect">
             <a:avLst/>
@@ -13888,14 +18071,14 @@
       </p:sp>
       <p:sp>
         <p:nvSpPr>
-          <p:cNvPr id="15" name="Text 13"/>
+          <p:cNvPr id="18" name="Text 13"/>
           <p:cNvSpPr txBox="1"/>
           <p:nvPr/>
         </p:nvSpPr>
         <p:spPr>
           <a:xfrm>
-            <a:off x="6537960" y="3703320"/>
-            <a:ext cx="4800600" cy="777240"/>
+            <a:off x="6537960" y="3931920"/>
+            <a:ext cx="4800600" cy="640080"/>
           </a:xfrm>
           <a:prstGeom prst="rect">
             <a:avLst/>
@@ -13922,7 +18105,7 @@
                 <a:ea typeface="Calibri" pitchFamily="34" charset="-122"/>
                 <a:cs typeface="Calibri" pitchFamily="34" charset="-120"/>
               </a:rPr>
-              <a:t>Quality depends entirely on how well each arm is estimated alone. A small arm's model is noisy, and subtracting two independently-noisy predictions adds their variances together.</a:t>
+              <a:t>Quality depends on how well each arm is estimated alone. A small arm's model is noisy, and subtracting two noisy predictions adds their variances.</a:t>
             </a:r>
             <a:endParaRPr lang="en-US" sz="1150" dirty="0"/>
           </a:p>
@@ -13930,18 +18113,18 @@
       </p:sp>
       <p:sp>
         <p:nvSpPr>
-          <p:cNvPr id="16" name="Shape 14"/>
+          <p:cNvPr id="19" name="Shape 14"/>
           <p:cNvSpPr/>
           <p:nvPr/>
         </p:nvSpPr>
         <p:spPr>
           <a:xfrm>
             <a:off x="548640" y="4846320"/>
-            <a:ext cx="11064240" cy="1188720"/>
+            <a:ext cx="11064240" cy="1051560"/>
           </a:xfrm>
           <a:prstGeom prst="roundRect">
             <a:avLst>
-              <a:gd name="adj" fmla="val 6154"/>
+              <a:gd name="adj" fmla="val 6957"/>
             </a:avLst>
           </a:prstGeom>
           <a:solidFill>
@@ -13952,14 +18135,14 @@
       </p:sp>
       <p:sp>
         <p:nvSpPr>
-          <p:cNvPr id="17" name="Text 15"/>
+          <p:cNvPr id="20" name="Text 15"/>
           <p:cNvSpPr txBox="1"/>
           <p:nvPr/>
         </p:nvSpPr>
         <p:spPr>
           <a:xfrm>
             <a:off x="868680" y="4846320"/>
-            <a:ext cx="10424160" cy="1188720"/>
+            <a:ext cx="10424160" cy="1051560"/>
           </a:xfrm>
           <a:prstGeom prst="rect">
             <a:avLst/>
@@ -13973,7 +18156,7 @@
           <a:p>
             <a:pPr indent="0" marL="0">
               <a:lnSpc>
-                <a:spcPct val="122000"/>
+                <a:spcPct val="120000"/>
               </a:lnSpc>
               <a:buNone/>
             </a:pPr>
@@ -13990,7 +18173,7 @@
             </a:r>
             <a:pPr indent="0" marL="0">
               <a:lnSpc>
-                <a:spcPct val="122000"/>
+                <a:spcPct val="120000"/>
               </a:lnSpc>
               <a:buNone/>
             </a:pPr>
@@ -14003,7 +18186,7 @@
                 <a:ea typeface="Calibri" pitchFamily="34" charset="-122"/>
                 <a:cs typeface="Calibri" pitchFamily="34" charset="-120"/>
               </a:rPr>
-              <a:t>control is deliberately a small holdout — you can't withhold the offer from too many good prospects. That starves the control model of data right where T-Learner needs it most, and its noise gets baked straight into every uplift score. This is the exact gap X-Learner's imputation step is built to close.</a:t>
+              <a:t>control is deliberately a small holdout — you can't withhold the offer from too many good prospects. That starves the control model exactly where T-Learner needs it most; its noise lands straight in every uplift score. Closing that gap is the reason X-Learner exists.</a:t>
             </a:r>
             <a:endParaRPr lang="en-US" sz="1250" dirty="0"/>
           </a:p>
@@ -14011,7 +18194,7 @@
       </p:sp>
       <p:sp>
         <p:nvSpPr>
-          <p:cNvPr id="18" name="Text 16"/>
+          <p:cNvPr id="21" name="Text 16"/>
           <p:cNvSpPr txBox="1"/>
           <p:nvPr/>
         </p:nvSpPr>
@@ -14050,7 +18233,7 @@
       </p:sp>
       <p:sp>
         <p:nvSpPr>
-          <p:cNvPr id="19" name="Text 17"/>
+          <p:cNvPr id="22" name="Text 17"/>
           <p:cNvSpPr txBox="1"/>
           <p:nvPr/>
         </p:nvSpPr>

--- a/uplift_model_deck.pptx
+++ b/uplift_model_deck.pptx
@@ -2629,7 +2629,7 @@
                 <a:ea typeface="Calibri" pitchFamily="34" charset="-122"/>
                 <a:cs typeface="Calibri" pitchFamily="34" charset="-120"/>
               </a:rPr>
-              <a:t>X-Learner doesn't use μ̂₁ − μ̂₀ directly. It first imputes what each observed unit's effect probably was, using the OTHER arm's model as its counterfactual:</a:t>
+              <a:t>X-Learner doesn't use μ̂₁ − μ̂₀ directly — it first imputes each unit's likely effect using the OTHER arm's model as counterfactual. (Y = 1 if the customer applied for the card, 0 if not.)</a:t>
             </a:r>
             <a:endParaRPr lang="en-US" sz="1300" dirty="0"/>
           </a:p>
@@ -11302,14 +11302,95 @@
       </p:sp>
       <p:sp>
         <p:nvSpPr>
-          <p:cNvPr id="6" name="Text 4"/>
+          <p:cNvPr id="6" name="Shape 4"/>
+          <p:cNvSpPr/>
+          <p:nvPr/>
+        </p:nvSpPr>
+        <p:spPr>
+          <a:xfrm>
+            <a:off x="548640" y="3657600"/>
+            <a:ext cx="5212080" cy="777240"/>
+          </a:xfrm>
+          <a:prstGeom prst="roundRect">
+            <a:avLst>
+              <a:gd name="adj" fmla="val 7059"/>
+            </a:avLst>
+          </a:prstGeom>
+          <a:solidFill>
+            <a:srgbClr val="EAF0FC"/>
+          </a:solidFill>
+          <a:ln/>
+        </p:spPr>
+      </p:sp>
+      <p:sp>
+        <p:nvSpPr>
+          <p:cNvPr id="7" name="Text 5"/>
           <p:cNvSpPr txBox="1"/>
           <p:nvPr/>
         </p:nvSpPr>
         <p:spPr>
           <a:xfrm>
-            <a:off x="548640" y="3611880"/>
-            <a:ext cx="5212080" cy="548640"/>
+            <a:off x="777240" y="3657600"/>
+            <a:ext cx="4892040" cy="777240"/>
+          </a:xfrm>
+          <a:prstGeom prst="rect">
+            <a:avLst/>
+          </a:prstGeom>
+          <a:noFill/>
+          <a:ln/>
+        </p:spPr>
+        <p:txBody>
+          <a:bodyPr wrap="square" lIns="0" tIns="0" rIns="0" bIns="0" rtlCol="0" anchor="ctr"/>
+          <a:lstStyle/>
+          <a:p>
+            <a:pPr indent="0" marL="0">
+              <a:lnSpc>
+                <a:spcPct val="120000"/>
+              </a:lnSpc>
+              <a:buNone/>
+            </a:pPr>
+            <a:r>
+              <a:rPr lang="en-US" sz="1150" b="1" dirty="0">
+                <a:solidFill>
+                  <a:srgbClr val="1E2761"/>
+                </a:solidFill>
+                <a:latin typeface="Calibri" pitchFamily="34" charset="0"/>
+                <a:ea typeface="Calibri" pitchFamily="34" charset="-122"/>
+                <a:cs typeface="Calibri" pitchFamily="34" charset="-120"/>
+              </a:rPr>
+              <a:t>In our prescreen example:  </a:t>
+            </a:r>
+            <a:pPr indent="0" marL="0">
+              <a:lnSpc>
+                <a:spcPct val="120000"/>
+              </a:lnSpc>
+              <a:buNone/>
+            </a:pPr>
+            <a:r>
+              <a:rPr lang="en-US" sz="1150" dirty="0">
+                <a:solidFill>
+                  <a:srgbClr val="33344A"/>
+                </a:solidFill>
+                <a:latin typeface="Calibri" pitchFamily="34" charset="0"/>
+                <a:ea typeface="Calibri" pitchFamily="34" charset="-122"/>
+                <a:cs typeface="Calibri" pitchFamily="34" charset="-120"/>
+              </a:rPr>
+              <a:t>Y = 1 if the customer applies for the credit card, 0 if not.  T = 1 if they received the prescreen mail offer (treatment), 0 if they were held out (control).</a:t>
+            </a:r>
+            <a:endParaRPr lang="en-US" sz="1150" dirty="0"/>
+          </a:p>
+        </p:txBody>
+      </p:sp>
+      <p:sp>
+        <p:nvSpPr>
+          <p:cNvPr id="8" name="Text 6"/>
+          <p:cNvSpPr txBox="1"/>
+          <p:nvPr/>
+        </p:nvSpPr>
+        <p:spPr>
+          <a:xfrm>
+            <a:off x="548640" y="4526280"/>
+            <a:ext cx="5212080" cy="411480"/>
           </a:xfrm>
           <a:prstGeom prst="rect">
             <a:avLst/>
@@ -11325,7 +11406,7 @@
               <a:buNone/>
             </a:pPr>
             <a:r>
-              <a:rPr lang="en-US" sz="1150" i="1" dirty="0">
+              <a:rPr lang="en-US" sz="1100" i="1" dirty="0">
                 <a:solidFill>
                   <a:srgbClr val="6B7280"/>
                 </a:solidFill>
@@ -11335,13 +11416,13 @@
               </a:rPr>
               <a:t>the treatment effect — not the response probability — is the thing we're trying to score.</a:t>
             </a:r>
-            <a:endParaRPr lang="en-US" sz="1150" dirty="0"/>
-          </a:p>
-        </p:txBody>
-      </p:sp>
-      <p:sp>
-        <p:nvSpPr>
-          <p:cNvPr id="7" name="Shape 5"/>
+            <a:endParaRPr lang="en-US" sz="1100" dirty="0"/>
+          </a:p>
+        </p:txBody>
+      </p:sp>
+      <p:sp>
+        <p:nvSpPr>
+          <p:cNvPr id="9" name="Shape 7"/>
           <p:cNvSpPr/>
           <p:nvPr/>
         </p:nvSpPr>
@@ -11363,7 +11444,7 @@
       </p:sp>
       <p:sp>
         <p:nvSpPr>
-          <p:cNvPr id="8" name="Text 6"/>
+          <p:cNvPr id="10" name="Text 8"/>
           <p:cNvSpPr txBox="1"/>
           <p:nvPr/>
         </p:nvSpPr>
@@ -11402,7 +11483,7 @@
       </p:sp>
       <p:sp>
         <p:nvSpPr>
-          <p:cNvPr id="9" name="Text 7"/>
+          <p:cNvPr id="11" name="Text 9"/>
           <p:cNvSpPr txBox="1"/>
           <p:nvPr/>
         </p:nvSpPr>
@@ -11436,7 +11517,7 @@
                 <a:ea typeface="Calibri" pitchFamily="34" charset="-122"/>
                 <a:cs typeface="Calibri" pitchFamily="34" charset="-120"/>
               </a:rPr>
-              <a:t>Respond only if treated — the offer changes their decision. This is the target segment.</a:t>
+              <a:t>Apply only if they get the offer (Y=1 under T=1, Y=0 under T=0) — the offer changes their decision. This is the target segment.</a:t>
             </a:r>
             <a:endParaRPr lang="en-US" sz="1100" dirty="0"/>
           </a:p>
@@ -11444,7 +11525,7 @@
       </p:sp>
       <p:sp>
         <p:nvSpPr>
-          <p:cNvPr id="10" name="Shape 8"/>
+          <p:cNvPr id="12" name="Shape 10"/>
           <p:cNvSpPr/>
           <p:nvPr/>
         </p:nvSpPr>
@@ -11466,7 +11547,7 @@
       </p:sp>
       <p:sp>
         <p:nvSpPr>
-          <p:cNvPr id="11" name="Text 9"/>
+          <p:cNvPr id="13" name="Text 11"/>
           <p:cNvSpPr txBox="1"/>
           <p:nvPr/>
         </p:nvSpPr>
@@ -11505,7 +11586,7 @@
       </p:sp>
       <p:sp>
         <p:nvSpPr>
-          <p:cNvPr id="12" name="Text 10"/>
+          <p:cNvPr id="14" name="Text 12"/>
           <p:cNvSpPr txBox="1"/>
           <p:nvPr/>
         </p:nvSpPr>
@@ -11539,7 +11620,7 @@
                 <a:ea typeface="Calibri" pitchFamily="34" charset="-122"/>
                 <a:cs typeface="Calibri" pitchFamily="34" charset="-120"/>
               </a:rPr>
-              <a:t>Respond either way. Treating them is wasted budget.</a:t>
+              <a:t>Apply either way (Y=1 regardless of T). Mailing them is wasted budget.</a:t>
             </a:r>
             <a:endParaRPr lang="en-US" sz="1100" dirty="0"/>
           </a:p>
@@ -11547,7 +11628,7 @@
       </p:sp>
       <p:sp>
         <p:nvSpPr>
-          <p:cNvPr id="13" name="Shape 11"/>
+          <p:cNvPr id="15" name="Shape 13"/>
           <p:cNvSpPr/>
           <p:nvPr/>
         </p:nvSpPr>
@@ -11569,7 +11650,7 @@
       </p:sp>
       <p:sp>
         <p:nvSpPr>
-          <p:cNvPr id="14" name="Text 12"/>
+          <p:cNvPr id="16" name="Text 14"/>
           <p:cNvSpPr txBox="1"/>
           <p:nvPr/>
         </p:nvSpPr>
@@ -11608,7 +11689,7 @@
       </p:sp>
       <p:sp>
         <p:nvSpPr>
-          <p:cNvPr id="15" name="Text 13"/>
+          <p:cNvPr id="17" name="Text 15"/>
           <p:cNvSpPr txBox="1"/>
           <p:nvPr/>
         </p:nvSpPr>
@@ -11642,7 +11723,7 @@
                 <a:ea typeface="Calibri" pitchFamily="34" charset="-122"/>
                 <a:cs typeface="Calibri" pitchFamily="34" charset="-120"/>
               </a:rPr>
-              <a:t>Never respond, treated or not. Nothing to gain.</a:t>
+              <a:t>Never apply, offer or not (Y=0 regardless of T). Nothing to gain.</a:t>
             </a:r>
             <a:endParaRPr lang="en-US" sz="1100" dirty="0"/>
           </a:p>
@@ -11650,7 +11731,7 @@
       </p:sp>
       <p:sp>
         <p:nvSpPr>
-          <p:cNvPr id="16" name="Shape 14"/>
+          <p:cNvPr id="18" name="Shape 16"/>
           <p:cNvSpPr/>
           <p:nvPr/>
         </p:nvSpPr>
@@ -11672,7 +11753,7 @@
       </p:sp>
       <p:sp>
         <p:nvSpPr>
-          <p:cNvPr id="17" name="Text 15"/>
+          <p:cNvPr id="19" name="Text 17"/>
           <p:cNvSpPr txBox="1"/>
           <p:nvPr/>
         </p:nvSpPr>
@@ -11711,7 +11792,7 @@
       </p:sp>
       <p:sp>
         <p:nvSpPr>
-          <p:cNvPr id="18" name="Text 16"/>
+          <p:cNvPr id="20" name="Text 18"/>
           <p:cNvSpPr txBox="1"/>
           <p:nvPr/>
         </p:nvSpPr>
@@ -11745,7 +11826,7 @@
                 <a:ea typeface="Calibri" pitchFamily="34" charset="-122"/>
                 <a:cs typeface="Calibri" pitchFamily="34" charset="-120"/>
               </a:rPr>
-              <a:t>Respond less if treated — the offer backfires.</a:t>
+              <a:t>Apply LESS often if they get the offer — the mailing backfires.</a:t>
             </a:r>
             <a:endParaRPr lang="en-US" sz="1100" dirty="0"/>
           </a:p>
@@ -11753,7 +11834,7 @@
       </p:sp>
       <p:sp>
         <p:nvSpPr>
-          <p:cNvPr id="19" name="Text 17"/>
+          <p:cNvPr id="21" name="Text 19"/>
           <p:cNvSpPr txBox="1"/>
           <p:nvPr/>
         </p:nvSpPr>
@@ -11792,7 +11873,7 @@
       </p:sp>
       <p:sp>
         <p:nvSpPr>
-          <p:cNvPr id="20" name="Text 18"/>
+          <p:cNvPr id="22" name="Text 20"/>
           <p:cNvSpPr txBox="1"/>
           <p:nvPr/>
         </p:nvSpPr>
@@ -12142,7 +12223,7 @@
                 <a:ea typeface="Calibri" pitchFamily="34" charset="-122"/>
                 <a:cs typeface="Calibri" pitchFamily="34" charset="-120"/>
               </a:rPr>
-              <a:t>One model, treatment as just another input feature. τ(x) = f(x,1) − f(x,0).</a:t>
+              <a:t>One model, is_treated (got the offer, 1/0) as just another input feature. τ(x) = f(x,1) − f(x,0), where 1/0 flips whether the offer was sent.</a:t>
             </a:r>
             <a:endParaRPr lang="en-US" sz="1300" dirty="0"/>
           </a:p>
@@ -12351,7 +12432,7 @@
                 <a:ea typeface="Calibri" pitchFamily="34" charset="-122"/>
                 <a:cs typeface="Calibri" pitchFamily="34" charset="-120"/>
               </a:rPr>
-              <a:t>Two fully separate models, one per arm. τ(x) = μ₁(x) − μ₀(x).</a:t>
+              <a:t>Two fully separate models, one per arm. τ(x) = μ₁(x) − μ₀(x), where μ₁ is the offer-group model and μ₀ is the no-offer (control) model.</a:t>
             </a:r>
             <a:endParaRPr lang="en-US" sz="1300" dirty="0"/>
           </a:p>
@@ -12621,7 +12702,7 @@
                 <a:ea typeface="Calibri" pitchFamily="34" charset="-122"/>
                 <a:cs typeface="Calibri" pitchFamily="34" charset="-120"/>
               </a:rPr>
-              <a:t>Two outcome models feed two effect models, combined by a weight g(x).</a:t>
+              <a:t>Two outcome models feed two effect models, combined by a weight g(x). Same Y (applied?) and is_treated (got the offer?) as above.</a:t>
             </a:r>
             <a:endParaRPr lang="en-US" sz="1300" dirty="0"/>
           </a:p>
@@ -12824,11 +12905,11 @@
         <p:spPr>
           <a:xfrm>
             <a:off x="548640" y="1371600"/>
-            <a:ext cx="5349240" cy="1965960"/>
+            <a:ext cx="5349240" cy="2103120"/>
           </a:xfrm>
           <a:prstGeom prst="roundRect">
             <a:avLst>
-              <a:gd name="adj" fmla="val 4651"/>
+              <a:gd name="adj" fmla="val 4348"/>
             </a:avLst>
           </a:prstGeom>
           <a:solidFill>
@@ -12850,8 +12931,8 @@
         </p:nvSpPr>
         <p:spPr>
           <a:xfrm>
-            <a:off x="777240" y="1508760"/>
-            <a:ext cx="4892040" cy="274320"/>
+            <a:off x="777240" y="1499616"/>
+            <a:ext cx="4892040" cy="256032"/>
           </a:xfrm>
           <a:prstGeom prst="rect">
             <a:avLst/>
@@ -12892,6 +12973,45 @@
               <a:t>pooled — ONE model, ONE fit() call</a:t>
             </a:r>
             <a:endParaRPr lang="en-US" sz="1100" dirty="0"/>
+          </a:p>
+        </p:txBody>
+      </p:sp>
+      <p:sp>
+        <p:nvSpPr>
+          <p:cNvPr id="6" name="Text 4"/>
+          <p:cNvSpPr txBox="1"/>
+          <p:nvPr/>
+        </p:nvSpPr>
+        <p:spPr>
+          <a:xfrm>
+            <a:off x="777240" y="1773936"/>
+            <a:ext cx="4892040" cy="201168"/>
+          </a:xfrm>
+          <a:prstGeom prst="rect">
+            <a:avLst/>
+          </a:prstGeom>
+          <a:noFill/>
+          <a:ln/>
+        </p:spPr>
+        <p:txBody>
+          <a:bodyPr wrap="square" lIns="0" tIns="0" rIns="0" bIns="0" rtlCol="0" anchor="ctr"/>
+          <a:lstStyle/>
+          <a:p>
+            <a:pPr indent="0" marL="0">
+              <a:buNone/>
+            </a:pPr>
+            <a:r>
+              <a:rPr lang="en-US" sz="900" i="1" dirty="0">
+                <a:solidFill>
+                  <a:srgbClr val="6B7280"/>
+                </a:solidFill>
+                <a:latin typeface="Calibri" pitchFamily="34" charset="0"/>
+                <a:ea typeface="Calibri" pitchFamily="34" charset="-122"/>
+                <a:cs typeface="Calibri" pitchFamily="34" charset="-120"/>
+              </a:rPr>
+              <a:t>is_treated: 1 = got the prescreen offer, 0 = control  ·  Y: 1 = applied for the card, 0 = didn't</a:t>
+            </a:r>
+            <a:endParaRPr lang="en-US" sz="900" dirty="0"/>
           </a:p>
         </p:txBody>
       </p:sp>
@@ -12910,8 +13030,8 @@
           </p:nvPr>
         </p:nvGraphicFramePr>
         <p:xfrm>
-          <a:off x="777240" y="1828800"/>
-          <a:ext cx="4892040" cy="1371600"/>
+          <a:off x="777240" y="1993392"/>
+          <a:ext cx="4892040" cy="1344168"/>
         </p:xfrm>
         <a:graphic>
           <a:graphicData uri="http://schemas.openxmlformats.org/drawingml/2006/table">
@@ -12922,7 +13042,7 @@
                 <a:gridCol w="1565453"/>
                 <a:gridCol w="1467612"/>
               </a:tblGrid>
-              <a:tr h="195943">
+              <a:tr h="192024">
                 <a:tc>
                   <a:txBody>
                     <a:bodyPr/>
@@ -13128,7 +13248,7 @@
                   </a:tcPr>
                 </a:tc>
               </a:tr>
-              <a:tr h="195943">
+              <a:tr h="192024">
                 <a:tc>
                   <a:txBody>
                     <a:bodyPr/>
@@ -13334,7 +13454,7 @@
                   </a:tcPr>
                 </a:tc>
               </a:tr>
-              <a:tr h="195943">
+              <a:tr h="192024">
                 <a:tc>
                   <a:txBody>
                     <a:bodyPr/>
@@ -13540,7 +13660,7 @@
                   </a:tcPr>
                 </a:tc>
               </a:tr>
-              <a:tr h="195943">
+              <a:tr h="192024">
                 <a:tc>
                   <a:txBody>
                     <a:bodyPr/>
@@ -13746,7 +13866,7 @@
                   </a:tcPr>
                 </a:tc>
               </a:tr>
-              <a:tr h="195943">
+              <a:tr h="192024">
                 <a:tc>
                   <a:txBody>
                     <a:bodyPr/>
@@ -13952,7 +14072,7 @@
                   </a:tcPr>
                 </a:tc>
               </a:tr>
-              <a:tr h="195943">
+              <a:tr h="192024">
                 <a:tc>
                   <a:txBody>
                     <a:bodyPr/>
@@ -14158,7 +14278,7 @@
                   </a:tcPr>
                 </a:tc>
               </a:tr>
-              <a:tr h="195943">
+              <a:tr h="192024">
                 <a:tc>
                   <a:txBody>
                     <a:bodyPr/>
@@ -14370,18 +14490,18 @@
       </p:graphicFrame>
       <p:sp>
         <p:nvSpPr>
-          <p:cNvPr id="7" name="Shape 4"/>
+          <p:cNvPr id="8" name="Shape 5"/>
           <p:cNvSpPr/>
           <p:nvPr/>
         </p:nvSpPr>
         <p:spPr>
           <a:xfrm>
             <a:off x="6263640" y="1371600"/>
-            <a:ext cx="5349240" cy="1965960"/>
+            <a:ext cx="5349240" cy="2103120"/>
           </a:xfrm>
           <a:prstGeom prst="roundRect">
             <a:avLst>
-              <a:gd name="adj" fmla="val 4651"/>
+              <a:gd name="adj" fmla="val 4348"/>
             </a:avLst>
           </a:prstGeom>
           <a:solidFill>
@@ -14397,14 +14517,14 @@
       </p:sp>
       <p:sp>
         <p:nvSpPr>
-          <p:cNvPr id="8" name="Text 5"/>
+          <p:cNvPr id="9" name="Text 6"/>
           <p:cNvSpPr txBox="1"/>
           <p:nvPr/>
         </p:nvSpPr>
         <p:spPr>
           <a:xfrm>
-            <a:off x="6492240" y="1508760"/>
-            <a:ext cx="4892040" cy="274320"/>
+            <a:off x="6492240" y="1499616"/>
+            <a:ext cx="4892040" cy="256032"/>
           </a:xfrm>
           <a:prstGeom prst="rect">
             <a:avLst/>
@@ -14442,9 +14562,48 @@
                 <a:ea typeface="Calibri" pitchFamily="34" charset="-122"/>
                 <a:cs typeface="Calibri" pitchFamily="34" charset="-120"/>
               </a:rPr>
-              <a:t>same model — TWO predict() calls per customer</a:t>
+              <a:t>one model, run for BOTH mailing scenarios on customer G</a:t>
             </a:r>
             <a:endParaRPr lang="en-US" sz="1100" dirty="0"/>
+          </a:p>
+        </p:txBody>
+      </p:sp>
+      <p:sp>
+        <p:nvSpPr>
+          <p:cNvPr id="10" name="Text 7"/>
+          <p:cNvSpPr txBox="1"/>
+          <p:nvPr/>
+        </p:nvSpPr>
+        <p:spPr>
+          <a:xfrm>
+            <a:off x="6492240" y="1773936"/>
+            <a:ext cx="4892040" cy="201168"/>
+          </a:xfrm>
+          <a:prstGeom prst="rect">
+            <a:avLst/>
+          </a:prstGeom>
+          <a:noFill/>
+          <a:ln/>
+        </p:spPr>
+        <p:txBody>
+          <a:bodyPr wrap="square" lIns="0" tIns="0" rIns="0" bIns="0" rtlCol="0" anchor="ctr"/>
+          <a:lstStyle/>
+          <a:p>
+            <a:pPr indent="0" marL="0">
+              <a:buNone/>
+            </a:pPr>
+            <a:r>
+              <a:rPr lang="en-US" sz="900" i="1" dirty="0">
+                <a:solidFill>
+                  <a:srgbClr val="6B7280"/>
+                </a:solidFill>
+                <a:latin typeface="Calibri" pitchFamily="34" charset="0"/>
+                <a:ea typeface="Calibri" pitchFamily="34" charset="-122"/>
+                <a:cs typeface="Calibri" pitchFamily="34" charset="-120"/>
+              </a:rPr>
+              <a:t>Same customer G, same model — we just flip is_treated and ask “what if?” twice</a:t>
+            </a:r>
+            <a:endParaRPr lang="en-US" sz="900" dirty="0"/>
           </a:p>
         </p:txBody>
       </p:sp>
@@ -14463,8 +14622,8 @@
           </p:nvPr>
         </p:nvGraphicFramePr>
         <p:xfrm>
-          <a:off x="6492240" y="1828800"/>
-          <a:ext cx="4892040" cy="1371600"/>
+          <a:off x="6492240" y="1993392"/>
+          <a:ext cx="4892040" cy="1344168"/>
         </p:xfrm>
         <a:graphic>
           <a:graphicData uri="http://schemas.openxmlformats.org/drawingml/2006/table">
@@ -14475,7 +14634,7 @@
                 <a:gridCol w="1663294"/>
                 <a:gridCol w="1467612"/>
               </a:tblGrid>
-              <a:tr h="342900">
+              <a:tr h="336042">
                 <a:tc>
                   <a:txBody>
                     <a:bodyPr/>
@@ -14493,7 +14652,7 @@
                           <a:ea typeface="Calibri" pitchFamily="34" charset="-122"/>
                           <a:cs typeface="Calibri" pitchFamily="34" charset="-120"/>
                         </a:rPr>
-                        <a:t>Predict call</a:t>
+                        <a:t>Mailing scenario</a:t>
                       </a:r>
                       <a:endParaRPr lang="en-US" sz="1150" dirty="0">
                         <a:latin typeface="Calibri" charset="0"/>
@@ -14561,7 +14720,7 @@
                           <a:ea typeface="Calibri" pitchFamily="34" charset="-122"/>
                           <a:cs typeface="Calibri" pitchFamily="34" charset="-120"/>
                         </a:rPr>
-                        <a:t>is_treated in</a:t>
+                        <a:t>is_treated</a:t>
                       </a:r>
                       <a:endParaRPr lang="en-US" sz="1150" dirty="0">
                         <a:latin typeface="Calibri" charset="0"/>
@@ -14629,7 +14788,7 @@
                           <a:ea typeface="Calibri" pitchFamily="34" charset="-122"/>
                           <a:cs typeface="Calibri" pitchFamily="34" charset="-120"/>
                         </a:rPr>
-                        <a:t>f(G, ·)</a:t>
+                        <a:t>P(applied)</a:t>
                       </a:r>
                       <a:endParaRPr lang="en-US" sz="1150" dirty="0">
                         <a:latin typeface="Calibri" charset="0"/>
@@ -14681,7 +14840,7 @@
                   </a:tcPr>
                 </a:tc>
               </a:tr>
-              <a:tr h="342900">
+              <a:tr h="336042">
                 <a:tc>
                   <a:txBody>
                     <a:bodyPr/>
@@ -14699,7 +14858,7 @@
                           <a:ea typeface="Calibri" pitchFamily="34" charset="-122"/>
                           <a:cs typeface="Calibri" pitchFamily="34" charset="-120"/>
                         </a:rPr>
-                        <a:t>Call 1</a:t>
+                        <a:t>G gets the offer</a:t>
                       </a:r>
                       <a:endParaRPr lang="en-US" sz="1150" dirty="0">
                         <a:latin typeface="Calibri" charset="0"/>
@@ -14767,7 +14926,7 @@
                           <a:ea typeface="Calibri" pitchFamily="34" charset="-122"/>
                           <a:cs typeface="Calibri" pitchFamily="34" charset="-120"/>
                         </a:rPr>
-                        <a:t>1  (treated)</a:t>
+                        <a:t>1</a:t>
                       </a:r>
                       <a:endParaRPr lang="en-US" sz="1150" dirty="0">
                         <a:latin typeface="Calibri" charset="0"/>
@@ -14887,7 +15046,7 @@
                   </a:tcPr>
                 </a:tc>
               </a:tr>
-              <a:tr h="342900">
+              <a:tr h="336042">
                 <a:tc>
                   <a:txBody>
                     <a:bodyPr/>
@@ -14905,7 +15064,7 @@
                           <a:ea typeface="Calibri" pitchFamily="34" charset="-122"/>
                           <a:cs typeface="Calibri" pitchFamily="34" charset="-120"/>
                         </a:rPr>
-                        <a:t>Call 2</a:t>
+                        <a:t>G doesn't get it</a:t>
                       </a:r>
                       <a:endParaRPr lang="en-US" sz="1150" dirty="0">
                         <a:latin typeface="Calibri" charset="0"/>
@@ -14973,7 +15132,7 @@
                           <a:ea typeface="Calibri" pitchFamily="34" charset="-122"/>
                           <a:cs typeface="Calibri" pitchFamily="34" charset="-120"/>
                         </a:rPr>
-                        <a:t>0  (control)</a:t>
+                        <a:t>0</a:t>
                       </a:r>
                       <a:endParaRPr lang="en-US" sz="1150" dirty="0">
                         <a:latin typeface="Calibri" charset="0"/>
@@ -15093,7 +15252,7 @@
                   </a:tcPr>
                 </a:tc>
               </a:tr>
-              <a:tr h="342900">
+              <a:tr h="336042">
                 <a:tc gridSpan="2">
                   <a:txBody>
                     <a:bodyPr/>
@@ -15240,13 +15399,13 @@
       </p:graphicFrame>
       <p:sp>
         <p:nvSpPr>
-          <p:cNvPr id="10" name="Shape 6"/>
+          <p:cNvPr id="12" name="Shape 8"/>
           <p:cNvSpPr/>
           <p:nvPr/>
         </p:nvSpPr>
         <p:spPr>
           <a:xfrm>
-            <a:off x="548640" y="3474720"/>
+            <a:off x="548640" y="3611880"/>
             <a:ext cx="5349240" cy="1234440"/>
           </a:xfrm>
           <a:prstGeom prst="roundRect">
@@ -15262,13 +15421,13 @@
       </p:sp>
       <p:sp>
         <p:nvSpPr>
-          <p:cNvPr id="11" name="Text 7"/>
+          <p:cNvPr id="13" name="Text 9"/>
           <p:cNvSpPr txBox="1"/>
           <p:nvPr/>
         </p:nvSpPr>
         <p:spPr>
           <a:xfrm>
-            <a:off x="822960" y="3602736"/>
+            <a:off x="822960" y="3739896"/>
             <a:ext cx="4800600" cy="292608"/>
           </a:xfrm>
           <a:prstGeom prst="rect">
@@ -15301,13 +15460,13 @@
       </p:sp>
       <p:sp>
         <p:nvSpPr>
-          <p:cNvPr id="12" name="Text 8"/>
+          <p:cNvPr id="14" name="Text 10"/>
           <p:cNvSpPr txBox="1"/>
           <p:nvPr/>
         </p:nvSpPr>
         <p:spPr>
           <a:xfrm>
-            <a:off x="822960" y="3931920"/>
+            <a:off x="822960" y="4069080"/>
             <a:ext cx="4800600" cy="640080"/>
           </a:xfrm>
           <a:prstGeom prst="rect">
@@ -15343,13 +15502,13 @@
       </p:sp>
       <p:sp>
         <p:nvSpPr>
-          <p:cNvPr id="13" name="Shape 9"/>
+          <p:cNvPr id="15" name="Shape 11"/>
           <p:cNvSpPr/>
           <p:nvPr/>
         </p:nvSpPr>
         <p:spPr>
           <a:xfrm>
-            <a:off x="6263640" y="3474720"/>
+            <a:off x="6263640" y="3611880"/>
             <a:ext cx="5349240" cy="1234440"/>
           </a:xfrm>
           <a:prstGeom prst="roundRect">
@@ -15365,13 +15524,13 @@
       </p:sp>
       <p:sp>
         <p:nvSpPr>
-          <p:cNvPr id="14" name="Text 10"/>
+          <p:cNvPr id="16" name="Text 12"/>
           <p:cNvSpPr txBox="1"/>
           <p:nvPr/>
         </p:nvSpPr>
         <p:spPr>
           <a:xfrm>
-            <a:off x="6537960" y="3602736"/>
+            <a:off x="6537960" y="3739896"/>
             <a:ext cx="4800600" cy="292608"/>
           </a:xfrm>
           <a:prstGeom prst="rect">
@@ -15404,13 +15563,13 @@
       </p:sp>
       <p:sp>
         <p:nvSpPr>
-          <p:cNvPr id="15" name="Text 11"/>
+          <p:cNvPr id="17" name="Text 13"/>
           <p:cNvSpPr txBox="1"/>
           <p:nvPr/>
         </p:nvSpPr>
         <p:spPr>
           <a:xfrm>
-            <a:off x="6537960" y="3931920"/>
+            <a:off x="6537960" y="4069080"/>
             <a:ext cx="4800600" cy="640080"/>
           </a:xfrm>
           <a:prstGeom prst="rect">
@@ -15446,13 +15605,13 @@
       </p:sp>
       <p:sp>
         <p:nvSpPr>
-          <p:cNvPr id="16" name="Shape 12"/>
+          <p:cNvPr id="18" name="Shape 14"/>
           <p:cNvSpPr/>
           <p:nvPr/>
         </p:nvSpPr>
         <p:spPr>
           <a:xfrm>
-            <a:off x="548640" y="4846320"/>
+            <a:off x="548640" y="4983480"/>
             <a:ext cx="11064240" cy="1051560"/>
           </a:xfrm>
           <a:prstGeom prst="roundRect">
@@ -15468,13 +15627,13 @@
       </p:sp>
       <p:sp>
         <p:nvSpPr>
-          <p:cNvPr id="17" name="Text 13"/>
+          <p:cNvPr id="19" name="Text 15"/>
           <p:cNvSpPr txBox="1"/>
           <p:nvPr/>
         </p:nvSpPr>
         <p:spPr>
           <a:xfrm>
-            <a:off x="868680" y="4846320"/>
+            <a:off x="868680" y="4983480"/>
             <a:ext cx="10424160" cy="1051560"/>
           </a:xfrm>
           <a:prstGeom prst="rect">
@@ -15527,7 +15686,7 @@
       </p:sp>
       <p:sp>
         <p:nvSpPr>
-          <p:cNvPr id="18" name="Text 14"/>
+          <p:cNvPr id="20" name="Text 16"/>
           <p:cNvSpPr txBox="1"/>
           <p:nvPr/>
         </p:nvSpPr>
@@ -15566,7 +15725,7 @@
       </p:sp>
       <p:sp>
         <p:nvSpPr>
-          <p:cNvPr id="19" name="Text 15"/>
+          <p:cNvPr id="21" name="Text 17"/>
           <p:cNvSpPr txBox="1"/>
           <p:nvPr/>
         </p:nvSpPr>
@@ -15722,11 +15881,11 @@
         <p:spPr>
           <a:xfrm>
             <a:off x="548640" y="1371600"/>
-            <a:ext cx="5349240" cy="1965960"/>
+            <a:ext cx="5349240" cy="2103120"/>
           </a:xfrm>
           <a:prstGeom prst="roundRect">
             <a:avLst>
-              <a:gd name="adj" fmla="val 4651"/>
+              <a:gd name="adj" fmla="val 4348"/>
             </a:avLst>
           </a:prstGeom>
           <a:solidFill>
@@ -15748,8 +15907,8 @@
         </p:nvSpPr>
         <p:spPr>
           <a:xfrm>
-            <a:off x="777240" y="1508760"/>
-            <a:ext cx="4892040" cy="274320"/>
+            <a:off x="777240" y="1499616"/>
+            <a:ext cx="4892040" cy="256032"/>
           </a:xfrm>
           <a:prstGeom prst="rect">
             <a:avLst/>
@@ -15801,8 +15960,8 @@
         </p:nvSpPr>
         <p:spPr>
           <a:xfrm>
-            <a:off x="777240" y="1828800"/>
-            <a:ext cx="2354580" cy="219456"/>
+            <a:off x="777240" y="1773936"/>
+            <a:ext cx="4892040" cy="201168"/>
           </a:xfrm>
           <a:prstGeom prst="rect">
             <a:avLst/>
@@ -15818,7 +15977,46 @@
               <a:buNone/>
             </a:pPr>
             <a:r>
-              <a:rPr lang="en-US" sz="1050" b="1" dirty="0">
+              <a:rPr lang="en-US" sz="900" i="1" dirty="0">
+                <a:solidFill>
+                  <a:srgbClr val="6B7280"/>
+                </a:solidFill>
+                <a:latin typeface="Calibri" pitchFamily="34" charset="0"/>
+                <a:ea typeface="Calibri" pitchFamily="34" charset="-122"/>
+                <a:cs typeface="Calibri" pitchFamily="34" charset="-120"/>
+              </a:rPr>
+              <a:t>Y: 1 = applied for the card, 0 = didn't  ·  which model a customer trains depends on whether they got the offer</a:t>
+            </a:r>
+            <a:endParaRPr lang="en-US" sz="900" dirty="0"/>
+          </a:p>
+        </p:txBody>
+      </p:sp>
+      <p:sp>
+        <p:nvSpPr>
+          <p:cNvPr id="7" name="Text 5"/>
+          <p:cNvSpPr txBox="1"/>
+          <p:nvPr/>
+        </p:nvSpPr>
+        <p:spPr>
+          <a:xfrm>
+            <a:off x="777240" y="2011680"/>
+            <a:ext cx="2354580" cy="219456"/>
+          </a:xfrm>
+          <a:prstGeom prst="rect">
+            <a:avLst/>
+          </a:prstGeom>
+          <a:noFill/>
+          <a:ln/>
+        </p:spPr>
+        <p:txBody>
+          <a:bodyPr wrap="square" lIns="0" tIns="0" rIns="0" bIns="0" rtlCol="0" anchor="ctr"/>
+          <a:lstStyle/>
+          <a:p>
+            <a:pPr indent="0" marL="0">
+              <a:buNone/>
+            </a:pPr>
+            <a:r>
+              <a:rPr lang="en-US" sz="1000" b="1" dirty="0">
                 <a:solidFill>
                   <a:srgbClr val="1E2761"/>
                 </a:solidFill>
@@ -15826,9 +16024,9 @@
                 <a:ea typeface="Calibri" pitchFamily="34" charset="-122"/>
                 <a:cs typeface="Calibri" pitchFamily="34" charset="-120"/>
               </a:rPr>
-              <a:t>Control model  →  μ̂₀</a:t>
-            </a:r>
-            <a:endParaRPr lang="en-US" sz="1050" dirty="0"/>
+              <a:t>Control model (no offer)  →  μ̂₀</a:t>
+            </a:r>
+            <a:endParaRPr lang="en-US" sz="1000" dirty="0"/>
           </a:p>
         </p:txBody>
       </p:sp>
@@ -15847,8 +16045,8 @@
           </p:nvPr>
         </p:nvGraphicFramePr>
         <p:xfrm>
-          <a:off x="777240" y="2066544"/>
-          <a:ext cx="2354580" cy="1133856"/>
+          <a:off x="777240" y="2231136"/>
+          <a:ext cx="2354580" cy="1106424"/>
         </p:xfrm>
         <a:graphic>
           <a:graphicData uri="http://schemas.openxmlformats.org/drawingml/2006/table">
@@ -15858,7 +16056,7 @@
                 <a:gridCol w="1295019"/>
                 <a:gridCol w="1059561"/>
               </a:tblGrid>
-              <a:tr h="283464">
+              <a:tr h="276606">
                 <a:tc>
                   <a:txBody>
                     <a:bodyPr/>
@@ -15996,7 +16194,7 @@
                   </a:tcPr>
                 </a:tc>
               </a:tr>
-              <a:tr h="283464">
+              <a:tr h="276606">
                 <a:tc>
                   <a:txBody>
                     <a:bodyPr/>
@@ -16134,7 +16332,7 @@
                   </a:tcPr>
                 </a:tc>
               </a:tr>
-              <a:tr h="283464">
+              <a:tr h="276606">
                 <a:tc>
                   <a:txBody>
                     <a:bodyPr/>
@@ -16272,7 +16470,7 @@
                   </a:tcPr>
                 </a:tc>
               </a:tr>
-              <a:tr h="283464">
+              <a:tr h="276606">
                 <a:tc>
                   <a:txBody>
                     <a:bodyPr/>
@@ -16416,13 +16614,13 @@
       </p:graphicFrame>
       <p:sp>
         <p:nvSpPr>
-          <p:cNvPr id="8" name="Text 5"/>
+          <p:cNvPr id="9" name="Text 6"/>
           <p:cNvSpPr txBox="1"/>
           <p:nvPr/>
         </p:nvSpPr>
         <p:spPr>
           <a:xfrm>
-            <a:off x="3314700" y="1828800"/>
+            <a:off x="3314700" y="2011680"/>
             <a:ext cx="2354580" cy="219456"/>
           </a:xfrm>
           <a:prstGeom prst="rect">
@@ -16439,7 +16637,7 @@
               <a:buNone/>
             </a:pPr>
             <a:r>
-              <a:rPr lang="en-US" sz="1050" b="1" dirty="0">
+              <a:rPr lang="en-US" sz="1000" b="1" dirty="0">
                 <a:solidFill>
                   <a:srgbClr val="B8892B"/>
                 </a:solidFill>
@@ -16447,9 +16645,9 @@
                 <a:ea typeface="Calibri" pitchFamily="34" charset="-122"/>
                 <a:cs typeface="Calibri" pitchFamily="34" charset="-120"/>
               </a:rPr>
-              <a:t>Treatment model  →  μ̂₁</a:t>
-            </a:r>
-            <a:endParaRPr lang="en-US" sz="1050" dirty="0"/>
+              <a:t>Treatment model (got offer)  →  μ̂₁</a:t>
+            </a:r>
+            <a:endParaRPr lang="en-US" sz="1000" dirty="0"/>
           </a:p>
         </p:txBody>
       </p:sp>
@@ -16468,8 +16666,8 @@
           </p:nvPr>
         </p:nvGraphicFramePr>
         <p:xfrm>
-          <a:off x="3314700" y="2066544"/>
-          <a:ext cx="2354580" cy="1133856"/>
+          <a:off x="3314700" y="2231136"/>
+          <a:ext cx="2354580" cy="1106424"/>
         </p:xfrm>
         <a:graphic>
           <a:graphicData uri="http://schemas.openxmlformats.org/drawingml/2006/table">
@@ -16479,7 +16677,7 @@
                 <a:gridCol w="1295019"/>
                 <a:gridCol w="1059561"/>
               </a:tblGrid>
-              <a:tr h="283464">
+              <a:tr h="276606">
                 <a:tc>
                   <a:txBody>
                     <a:bodyPr/>
@@ -16617,7 +16815,7 @@
                   </a:tcPr>
                 </a:tc>
               </a:tr>
-              <a:tr h="283464">
+              <a:tr h="276606">
                 <a:tc>
                   <a:txBody>
                     <a:bodyPr/>
@@ -16755,7 +16953,7 @@
                   </a:tcPr>
                 </a:tc>
               </a:tr>
-              <a:tr h="283464">
+              <a:tr h="276606">
                 <a:tc>
                   <a:txBody>
                     <a:bodyPr/>
@@ -16893,7 +17091,7 @@
                   </a:tcPr>
                 </a:tc>
               </a:tr>
-              <a:tr h="283464">
+              <a:tr h="276606">
                 <a:tc>
                   <a:txBody>
                     <a:bodyPr/>
@@ -17037,18 +17235,18 @@
       </p:graphicFrame>
       <p:sp>
         <p:nvSpPr>
-          <p:cNvPr id="10" name="Shape 6"/>
+          <p:cNvPr id="11" name="Shape 7"/>
           <p:cNvSpPr/>
           <p:nvPr/>
         </p:nvSpPr>
         <p:spPr>
           <a:xfrm>
             <a:off x="6263640" y="1371600"/>
-            <a:ext cx="5349240" cy="1965960"/>
+            <a:ext cx="5349240" cy="2103120"/>
           </a:xfrm>
           <a:prstGeom prst="roundRect">
             <a:avLst>
-              <a:gd name="adj" fmla="val 4651"/>
+              <a:gd name="adj" fmla="val 4348"/>
             </a:avLst>
           </a:prstGeom>
           <a:solidFill>
@@ -17064,14 +17262,14 @@
       </p:sp>
       <p:sp>
         <p:nvSpPr>
-          <p:cNvPr id="11" name="Text 7"/>
+          <p:cNvPr id="12" name="Text 8"/>
           <p:cNvSpPr txBox="1"/>
           <p:nvPr/>
         </p:nvSpPr>
         <p:spPr>
           <a:xfrm>
-            <a:off x="6492240" y="1508760"/>
-            <a:ext cx="4892040" cy="274320"/>
+            <a:off x="6492240" y="1499616"/>
+            <a:ext cx="4892040" cy="256032"/>
           </a:xfrm>
           <a:prstGeom prst="rect">
             <a:avLst/>
@@ -17109,9 +17307,48 @@
                 <a:ea typeface="Calibri" pitchFamily="34" charset="-122"/>
                 <a:cs typeface="Calibri" pitchFamily="34" charset="-120"/>
               </a:rPr>
-              <a:t>both models — ONE predict() call each</a:t>
+              <a:t>each model scores customer G under ITS OWN scenario</a:t>
             </a:r>
             <a:endParaRPr lang="en-US" sz="1100" dirty="0"/>
+          </a:p>
+        </p:txBody>
+      </p:sp>
+      <p:sp>
+        <p:nvSpPr>
+          <p:cNvPr id="13" name="Text 9"/>
+          <p:cNvSpPr txBox="1"/>
+          <p:nvPr/>
+        </p:nvSpPr>
+        <p:spPr>
+          <a:xfrm>
+            <a:off x="6492240" y="1773936"/>
+            <a:ext cx="4892040" cy="201168"/>
+          </a:xfrm>
+          <a:prstGeom prst="rect">
+            <a:avLst/>
+          </a:prstGeom>
+          <a:noFill/>
+          <a:ln/>
+        </p:spPr>
+        <p:txBody>
+          <a:bodyPr wrap="square" lIns="0" tIns="0" rIns="0" bIns="0" rtlCol="0" anchor="ctr"/>
+          <a:lstStyle/>
+          <a:p>
+            <a:pPr indent="0" marL="0">
+              <a:buNone/>
+            </a:pPr>
+            <a:r>
+              <a:rPr lang="en-US" sz="900" i="1" dirty="0">
+                <a:solidFill>
+                  <a:srgbClr val="6B7280"/>
+                </a:solidFill>
+                <a:latin typeface="Calibri" pitchFamily="34" charset="0"/>
+                <a:ea typeface="Calibri" pitchFamily="34" charset="-122"/>
+                <a:cs typeface="Calibri" pitchFamily="34" charset="-120"/>
+              </a:rPr>
+              <a:t>No flag to flip — which model you ask IS the mailing scenario</a:t>
+            </a:r>
+            <a:endParaRPr lang="en-US" sz="900" dirty="0"/>
           </a:p>
         </p:txBody>
       </p:sp>
@@ -17130,8 +17367,8 @@
           </p:nvPr>
         </p:nvGraphicFramePr>
         <p:xfrm>
-          <a:off x="6492240" y="1828800"/>
-          <a:ext cx="4892040" cy="1371600"/>
+          <a:off x="6492240" y="1993392"/>
+          <a:ext cx="4892040" cy="1344168"/>
         </p:xfrm>
         <a:graphic>
           <a:graphicData uri="http://schemas.openxmlformats.org/drawingml/2006/table">
@@ -17142,7 +17379,7 @@
                 <a:gridCol w="1369771"/>
                 <a:gridCol w="1369771"/>
               </a:tblGrid>
-              <a:tr h="342900">
+              <a:tr h="336042">
                 <a:tc>
                   <a:txBody>
                     <a:bodyPr/>
@@ -17228,7 +17465,7 @@
                           <a:ea typeface="Calibri" pitchFamily="34" charset="-122"/>
                           <a:cs typeface="Calibri" pitchFamily="34" charset="-120"/>
                         </a:rPr>
-                        <a:t>Call</a:t>
+                        <a:t>Mailing scenario</a:t>
                       </a:r>
                       <a:endParaRPr lang="en-US" sz="1100" dirty="0">
                         <a:latin typeface="Calibri" charset="0"/>
@@ -17296,7 +17533,7 @@
                           <a:ea typeface="Calibri" pitchFamily="34" charset="-122"/>
                           <a:cs typeface="Calibri" pitchFamily="34" charset="-120"/>
                         </a:rPr>
-                        <a:t>Output</a:t>
+                        <a:t>P(applied)</a:t>
                       </a:r>
                       <a:endParaRPr lang="en-US" sz="1100" dirty="0">
                         <a:latin typeface="Calibri" charset="0"/>
@@ -17348,7 +17585,7 @@
                   </a:tcPr>
                 </a:tc>
               </a:tr>
-              <a:tr h="342900">
+              <a:tr h="336042">
                 <a:tc>
                   <a:txBody>
                     <a:bodyPr/>
@@ -17434,7 +17671,7 @@
                           <a:ea typeface="Calibri" pitchFamily="34" charset="-122"/>
                           <a:cs typeface="Calibri" pitchFamily="34" charset="-120"/>
                         </a:rPr>
-                        <a:t>predict(G)</a:t>
+                        <a:t>G doesn't get it</a:t>
                       </a:r>
                       <a:endParaRPr lang="en-US" sz="1100" dirty="0">
                         <a:latin typeface="Calibri" charset="0"/>
@@ -17554,7 +17791,7 @@
                   </a:tcPr>
                 </a:tc>
               </a:tr>
-              <a:tr h="342900">
+              <a:tr h="336042">
                 <a:tc>
                   <a:txBody>
                     <a:bodyPr/>
@@ -17640,7 +17877,7 @@
                           <a:ea typeface="Calibri" pitchFamily="34" charset="-122"/>
                           <a:cs typeface="Calibri" pitchFamily="34" charset="-120"/>
                         </a:rPr>
-                        <a:t>predict(G)</a:t>
+                        <a:t>G gets the offer</a:t>
                       </a:r>
                       <a:endParaRPr lang="en-US" sz="1100" dirty="0">
                         <a:latin typeface="Calibri" charset="0"/>
@@ -17760,7 +17997,7 @@
                   </a:tcPr>
                 </a:tc>
               </a:tr>
-              <a:tr h="342900">
+              <a:tr h="336042">
                 <a:tc gridSpan="2">
                   <a:txBody>
                     <a:bodyPr/>
@@ -17907,13 +18144,13 @@
       </p:graphicFrame>
       <p:sp>
         <p:nvSpPr>
-          <p:cNvPr id="13" name="Shape 8"/>
+          <p:cNvPr id="15" name="Shape 10"/>
           <p:cNvSpPr/>
           <p:nvPr/>
         </p:nvSpPr>
         <p:spPr>
           <a:xfrm>
-            <a:off x="548640" y="3474720"/>
+            <a:off x="548640" y="3611880"/>
             <a:ext cx="5349240" cy="1234440"/>
           </a:xfrm>
           <a:prstGeom prst="roundRect">
@@ -17929,13 +18166,13 @@
       </p:sp>
       <p:sp>
         <p:nvSpPr>
-          <p:cNvPr id="14" name="Text 9"/>
+          <p:cNvPr id="16" name="Text 11"/>
           <p:cNvSpPr txBox="1"/>
           <p:nvPr/>
         </p:nvSpPr>
         <p:spPr>
           <a:xfrm>
-            <a:off x="822960" y="3602736"/>
+            <a:off x="822960" y="3739896"/>
             <a:ext cx="4800600" cy="292608"/>
           </a:xfrm>
           <a:prstGeom prst="rect">
@@ -17968,13 +18205,13 @@
       </p:sp>
       <p:sp>
         <p:nvSpPr>
-          <p:cNvPr id="15" name="Text 10"/>
+          <p:cNvPr id="17" name="Text 12"/>
           <p:cNvSpPr txBox="1"/>
           <p:nvPr/>
         </p:nvSpPr>
         <p:spPr>
           <a:xfrm>
-            <a:off x="822960" y="3931920"/>
+            <a:off x="822960" y="4069080"/>
             <a:ext cx="4800600" cy="640080"/>
           </a:xfrm>
           <a:prstGeom prst="rect">
@@ -18010,13 +18247,13 @@
       </p:sp>
       <p:sp>
         <p:nvSpPr>
-          <p:cNvPr id="16" name="Shape 11"/>
+          <p:cNvPr id="18" name="Shape 13"/>
           <p:cNvSpPr/>
           <p:nvPr/>
         </p:nvSpPr>
         <p:spPr>
           <a:xfrm>
-            <a:off x="6263640" y="3474720"/>
+            <a:off x="6263640" y="3611880"/>
             <a:ext cx="5349240" cy="1234440"/>
           </a:xfrm>
           <a:prstGeom prst="roundRect">
@@ -18032,13 +18269,13 @@
       </p:sp>
       <p:sp>
         <p:nvSpPr>
-          <p:cNvPr id="17" name="Text 12"/>
+          <p:cNvPr id="19" name="Text 14"/>
           <p:cNvSpPr txBox="1"/>
           <p:nvPr/>
         </p:nvSpPr>
         <p:spPr>
           <a:xfrm>
-            <a:off x="6537960" y="3602736"/>
+            <a:off x="6537960" y="3739896"/>
             <a:ext cx="4800600" cy="292608"/>
           </a:xfrm>
           <a:prstGeom prst="rect">
@@ -18071,13 +18308,13 @@
       </p:sp>
       <p:sp>
         <p:nvSpPr>
-          <p:cNvPr id="18" name="Text 13"/>
+          <p:cNvPr id="20" name="Text 15"/>
           <p:cNvSpPr txBox="1"/>
           <p:nvPr/>
         </p:nvSpPr>
         <p:spPr>
           <a:xfrm>
-            <a:off x="6537960" y="3931920"/>
+            <a:off x="6537960" y="4069080"/>
             <a:ext cx="4800600" cy="640080"/>
           </a:xfrm>
           <a:prstGeom prst="rect">
@@ -18113,13 +18350,13 @@
       </p:sp>
       <p:sp>
         <p:nvSpPr>
-          <p:cNvPr id="19" name="Shape 14"/>
+          <p:cNvPr id="21" name="Shape 16"/>
           <p:cNvSpPr/>
           <p:nvPr/>
         </p:nvSpPr>
         <p:spPr>
           <a:xfrm>
-            <a:off x="548640" y="4846320"/>
+            <a:off x="548640" y="4983480"/>
             <a:ext cx="11064240" cy="1051560"/>
           </a:xfrm>
           <a:prstGeom prst="roundRect">
@@ -18135,13 +18372,13 @@
       </p:sp>
       <p:sp>
         <p:nvSpPr>
-          <p:cNvPr id="20" name="Text 15"/>
+          <p:cNvPr id="22" name="Text 17"/>
           <p:cNvSpPr txBox="1"/>
           <p:nvPr/>
         </p:nvSpPr>
         <p:spPr>
           <a:xfrm>
-            <a:off x="868680" y="4846320"/>
+            <a:off x="868680" y="4983480"/>
             <a:ext cx="10424160" cy="1051560"/>
           </a:xfrm>
           <a:prstGeom prst="rect">
@@ -18194,7 +18431,7 @@
       </p:sp>
       <p:sp>
         <p:nvSpPr>
-          <p:cNvPr id="21" name="Text 16"/>
+          <p:cNvPr id="23" name="Text 18"/>
           <p:cNvSpPr txBox="1"/>
           <p:nvPr/>
         </p:nvSpPr>
@@ -18233,7 +18470,7 @@
       </p:sp>
       <p:sp>
         <p:nvSpPr>
-          <p:cNvPr id="22" name="Text 17"/>
+          <p:cNvPr id="24" name="Text 19"/>
           <p:cNvSpPr txBox="1"/>
           <p:nvPr/>
         </p:nvSpPr>
@@ -20983,12 +21220,12 @@
           <a:p>
             <a:pPr indent="0" marL="0">
               <a:lnSpc>
-                <a:spcPct val="130000"/>
+                <a:spcPct val="128000"/>
               </a:lnSpc>
               <a:buNone/>
             </a:pPr>
             <a:r>
-              <a:rPr lang="en-US" sz="1350" b="1" dirty="0">
+              <a:rPr lang="en-US" sz="1300" b="1" dirty="0">
                 <a:solidFill>
                   <a:srgbClr val="1E2761"/>
                 </a:solidFill>
@@ -21000,12 +21237,12 @@
             </a:r>
             <a:pPr indent="0" marL="0">
               <a:lnSpc>
-                <a:spcPct val="130000"/>
+                <a:spcPct val="128000"/>
               </a:lnSpc>
               <a:buNone/>
             </a:pPr>
             <a:r>
-              <a:rPr lang="en-US" sz="1350" dirty="0">
+              <a:rPr lang="en-US" sz="1300" dirty="0">
                 <a:solidFill>
                   <a:srgbClr val="33344A"/>
                 </a:solidFill>
@@ -21013,17 +21250,17 @@
                 <a:ea typeface="Calibri" pitchFamily="34" charset="-122"/>
                 <a:cs typeface="Calibri" pitchFamily="34" charset="-120"/>
               </a:rPr>
-              <a:t>learns μ̂₀(x) = E[Y(0) | X=x] — trained only on control-group rows.
+              <a:t>learns μ̂₀(x) = E[Y(0) | X=x] — trained only on customers who did NOT get the offer.
 </a:t>
             </a:r>
             <a:pPr indent="0" marL="0">
               <a:lnSpc>
-                <a:spcPct val="130000"/>
+                <a:spcPct val="128000"/>
               </a:lnSpc>
               <a:buNone/>
             </a:pPr>
             <a:r>
-              <a:rPr lang="en-US" sz="1350" b="1" dirty="0">
+              <a:rPr lang="en-US" sz="1300" b="1" dirty="0">
                 <a:solidFill>
                   <a:srgbClr val="1E2761"/>
                 </a:solidFill>
@@ -21035,12 +21272,12 @@
             </a:r>
             <a:pPr indent="0" marL="0">
               <a:lnSpc>
-                <a:spcPct val="130000"/>
+                <a:spcPct val="128000"/>
               </a:lnSpc>
               <a:buNone/>
             </a:pPr>
             <a:r>
-              <a:rPr lang="en-US" sz="1350" dirty="0">
+              <a:rPr lang="en-US" sz="1300" dirty="0">
                 <a:solidFill>
                   <a:srgbClr val="33344A"/>
                 </a:solidFill>
@@ -21048,9 +21285,9 @@
                 <a:ea typeface="Calibri" pitchFamily="34" charset="-122"/>
                 <a:cs typeface="Calibri" pitchFamily="34" charset="-120"/>
               </a:rPr>
-              <a:t>learns μ̂₁(x) = E[Y(1) | X=x] — trained only on treatment-group rows.</a:t>
-            </a:r>
-            <a:endParaRPr lang="en-US" sz="1350" dirty="0"/>
+              <a:t>learns μ̂₁(x) = E[Y(1) | X=x] — trained only on customers who DID get the offer. (Y = 1 if they applied for the card, 0 if not.)</a:t>
+            </a:r>
+            <a:endParaRPr lang="en-US" sz="1300" dirty="0"/>
           </a:p>
         </p:txBody>
       </p:sp>

--- a/uplift_model_deck.pptx
+++ b/uplift_model_deck.pptx
@@ -15985,7 +15985,7 @@
                 <a:ea typeface="Calibri" pitchFamily="34" charset="-122"/>
                 <a:cs typeface="Calibri" pitchFamily="34" charset="-120"/>
               </a:rPr>
-              <a:t>Y: 1 = applied for the card, 0 = didn't  ·  which model a customer trains depends on whether they got the offer</a:t>
+              <a:t>Control = A, B, C — did NOT get the offer/coupon.  Treatment = D, E, F — DID get the offer/coupon. Y: 1 = applied, 0 = didn't.</a:t>
             </a:r>
             <a:endParaRPr lang="en-US" sz="900" dirty="0"/>
           </a:p>
@@ -16024,7 +16024,7 @@
                 <a:ea typeface="Calibri" pitchFamily="34" charset="-122"/>
                 <a:cs typeface="Calibri" pitchFamily="34" charset="-120"/>
               </a:rPr>
-              <a:t>Control model (no offer)  →  μ̂₀</a:t>
+              <a:t>Control (A,B,C)  →  μ̂₀</a:t>
             </a:r>
             <a:endParaRPr lang="en-US" sz="1000" dirty="0"/>
           </a:p>
@@ -16645,7 +16645,7 @@
                 <a:ea typeface="Calibri" pitchFamily="34" charset="-122"/>
                 <a:cs typeface="Calibri" pitchFamily="34" charset="-120"/>
               </a:rPr>
-              <a:t>Treatment model (got offer)  →  μ̂₁</a:t>
+              <a:t>Treatment (D,E,F)  →  μ̂₁</a:t>
             </a:r>
             <a:endParaRPr lang="en-US" sz="1000" dirty="0"/>
           </a:p>

--- a/uplift_model_deck.pptx
+++ b/uplift_model_deck.pptx
@@ -14601,7 +14601,7 @@
                 <a:ea typeface="Calibri" pitchFamily="34" charset="-122"/>
                 <a:cs typeface="Calibri" pitchFamily="34" charset="-120"/>
               </a:rPr>
-              <a:t>Same customer G, same model — we just flip is_treated and ask “what if?” twice</a:t>
+              <a:t>Two separate scoring calls — each with its own input table and output table</a:t>
             </a:r>
             <a:endParaRPr lang="en-US" sz="900" dirty="0"/>
           </a:p>
@@ -14623,18 +14623,17 @@
         </p:nvGraphicFramePr>
         <p:xfrm>
           <a:off x="6492240" y="1993392"/>
-          <a:ext cx="4892040" cy="1344168"/>
+          <a:ext cx="2286000" cy="384048"/>
         </p:xfrm>
         <a:graphic>
           <a:graphicData uri="http://schemas.openxmlformats.org/drawingml/2006/table">
             <a:tbl>
               <a:tblPr/>
               <a:tblGrid>
-                <a:gridCol w="1761134"/>
-                <a:gridCol w="1663294"/>
-                <a:gridCol w="1467612"/>
+                <a:gridCol w="1028700"/>
+                <a:gridCol w="1257300"/>
               </a:tblGrid>
-              <a:tr h="336042">
+              <a:tr h="192024">
                 <a:tc>
                   <a:txBody>
                     <a:bodyPr/>
@@ -14644,7 +14643,7 @@
                         <a:buNone/>
                       </a:pPr>
                       <a:r>
-                        <a:rPr lang="en-US" sz="1150" b="1" dirty="0">
+                        <a:rPr lang="en-US" sz="850" b="1" dirty="0">
                           <a:solidFill>
                             <a:srgbClr val="FFFFFF"/>
                           </a:solidFill>
@@ -14652,16 +14651,16 @@
                           <a:ea typeface="Calibri" pitchFamily="34" charset="-122"/>
                           <a:cs typeface="Calibri" pitchFamily="34" charset="-120"/>
                         </a:rPr>
-                        <a:t>Mailing scenario</a:t>
+                        <a:t>Customer</a:t>
                       </a:r>
-                      <a:endParaRPr lang="en-US" sz="1150" dirty="0">
+                      <a:endParaRPr lang="en-US" sz="850" dirty="0">
                         <a:latin typeface="Calibri" charset="0"/>
                         <a:ea typeface="Calibri" charset="0"/>
                         <a:cs typeface="Calibri" charset="0"/>
                       </a:endParaRPr>
                     </a:p>
                   </a:txBody>
-                  <a:tcPr marL="54864" marR="54864" marT="36576" marB="36576" anchor="ctr">
+                  <a:tcPr marL="36576" marR="36576" marT="18288" marB="18288" anchor="ctr">
                     <a:lnL w="12700" cap="flat" cmpd="sng" algn="ctr">
                       <a:solidFill>
                         <a:srgbClr val="F0DFB0"/>
@@ -14699,7 +14698,7 @@
                       <a:tailEnd type="none" w="med" len="med"/>
                     </a:lnB>
                     <a:solidFill>
-                      <a:srgbClr val="B8892B"/>
+                      <a:srgbClr val="1E2761"/>
                     </a:solidFill>
                   </a:tcPr>
                 </a:tc>
@@ -14712,7 +14711,7 @@
                         <a:buNone/>
                       </a:pPr>
                       <a:r>
-                        <a:rPr lang="en-US" sz="1150" b="1" dirty="0">
+                        <a:rPr lang="en-US" sz="850" b="1" dirty="0">
                           <a:solidFill>
                             <a:srgbClr val="FFFFFF"/>
                           </a:solidFill>
@@ -14720,16 +14719,16 @@
                           <a:ea typeface="Calibri" pitchFamily="34" charset="-122"/>
                           <a:cs typeface="Calibri" pitchFamily="34" charset="-120"/>
                         </a:rPr>
-                        <a:t>is_treated</a:t>
+                        <a:t>receive_offer</a:t>
                       </a:r>
-                      <a:endParaRPr lang="en-US" sz="1150" dirty="0">
+                      <a:endParaRPr lang="en-US" sz="850" dirty="0">
                         <a:latin typeface="Calibri" charset="0"/>
                         <a:ea typeface="Calibri" charset="0"/>
                         <a:cs typeface="Calibri" charset="0"/>
                       </a:endParaRPr>
                     </a:p>
                   </a:txBody>
-                  <a:tcPr marL="54864" marR="54864" marT="36576" marB="36576" anchor="ctr">
+                  <a:tcPr marL="36576" marR="36576" marT="18288" marB="18288" anchor="ctr">
                     <a:lnL w="12700" cap="flat" cmpd="sng" algn="ctr">
                       <a:solidFill>
                         <a:srgbClr val="F0DFB0"/>
@@ -14767,10 +14766,12 @@
                       <a:tailEnd type="none" w="med" len="med"/>
                     </a:lnB>
                     <a:solidFill>
-                      <a:srgbClr val="B8892B"/>
+                      <a:srgbClr val="1E2761"/>
                     </a:solidFill>
                   </a:tcPr>
                 </a:tc>
+              </a:tr>
+              <a:tr h="192024">
                 <a:tc>
                   <a:txBody>
                     <a:bodyPr/>
@@ -14780,77 +14781,7 @@
                         <a:buNone/>
                       </a:pPr>
                       <a:r>
-                        <a:rPr lang="en-US" sz="1150" b="1" dirty="0">
-                          <a:solidFill>
-                            <a:srgbClr val="FFFFFF"/>
-                          </a:solidFill>
-                          <a:latin typeface="Calibri" pitchFamily="34" charset="0"/>
-                          <a:ea typeface="Calibri" pitchFamily="34" charset="-122"/>
-                          <a:cs typeface="Calibri" pitchFamily="34" charset="-120"/>
-                        </a:rPr>
-                        <a:t>P(applied)</a:t>
-                      </a:r>
-                      <a:endParaRPr lang="en-US" sz="1150" dirty="0">
-                        <a:latin typeface="Calibri" charset="0"/>
-                        <a:ea typeface="Calibri" charset="0"/>
-                        <a:cs typeface="Calibri" charset="0"/>
-                      </a:endParaRPr>
-                    </a:p>
-                  </a:txBody>
-                  <a:tcPr marL="54864" marR="54864" marT="36576" marB="36576" anchor="ctr">
-                    <a:lnL w="12700" cap="flat" cmpd="sng" algn="ctr">
-                      <a:solidFill>
-                        <a:srgbClr val="F0DFB0"/>
-                      </a:solidFill>
-                      <a:prstDash val="solid"/>
-                      <a:round/>
-                      <a:headEnd type="none" w="med" len="med"/>
-                      <a:tailEnd type="none" w="med" len="med"/>
-                    </a:lnL>
-                    <a:lnR w="12700" cap="flat" cmpd="sng" algn="ctr">
-                      <a:solidFill>
-                        <a:srgbClr val="F0DFB0"/>
-                      </a:solidFill>
-                      <a:prstDash val="solid"/>
-                      <a:round/>
-                      <a:headEnd type="none" w="med" len="med"/>
-                      <a:tailEnd type="none" w="med" len="med"/>
-                    </a:lnR>
-                    <a:lnT w="12700" cap="flat" cmpd="sng" algn="ctr">
-                      <a:solidFill>
-                        <a:srgbClr val="F0DFB0"/>
-                      </a:solidFill>
-                      <a:prstDash val="solid"/>
-                      <a:round/>
-                      <a:headEnd type="none" w="med" len="med"/>
-                      <a:tailEnd type="none" w="med" len="med"/>
-                    </a:lnT>
-                    <a:lnB w="12700" cap="flat" cmpd="sng" algn="ctr">
-                      <a:solidFill>
-                        <a:srgbClr val="F0DFB0"/>
-                      </a:solidFill>
-                      <a:prstDash val="solid"/>
-                      <a:round/>
-                      <a:headEnd type="none" w="med" len="med"/>
-                      <a:tailEnd type="none" w="med" len="med"/>
-                    </a:lnB>
-                    <a:solidFill>
-                      <a:srgbClr val="B8892B"/>
-                    </a:solidFill>
-                  </a:tcPr>
-                </a:tc>
-              </a:tr>
-              <a:tr h="336042">
-                <a:tc>
-                  <a:txBody>
-                    <a:bodyPr/>
-                    <a:lstStyle/>
-                    <a:p>
-                      <a:pPr algn="ctr" indent="0" marL="0">
-                        <a:buNone/>
-                      </a:pPr>
-                      <a:r>
-                        <a:rPr lang="en-US" sz="1150" b="1" dirty="0">
+                        <a:rPr lang="en-US" sz="1100" b="1" dirty="0">
                           <a:solidFill>
                             <a:srgbClr val="1E2761"/>
                           </a:solidFill>
@@ -14858,16 +14789,16 @@
                           <a:ea typeface="Calibri" pitchFamily="34" charset="-122"/>
                           <a:cs typeface="Calibri" pitchFamily="34" charset="-120"/>
                         </a:rPr>
-                        <a:t>G gets the offer</a:t>
+                        <a:t>G</a:t>
                       </a:r>
-                      <a:endParaRPr lang="en-US" sz="1150" dirty="0">
+                      <a:endParaRPr lang="en-US" sz="1100" dirty="0">
                         <a:latin typeface="Calibri" charset="0"/>
                         <a:ea typeface="Calibri" charset="0"/>
                         <a:cs typeface="Calibri" charset="0"/>
                       </a:endParaRPr>
                     </a:p>
                   </a:txBody>
-                  <a:tcPr marL="54864" marR="54864" marT="36576" marB="36576" anchor="ctr">
+                  <a:tcPr marL="36576" marR="36576" marT="18288" marB="18288" anchor="ctr">
                     <a:lnL w="12700" cap="flat" cmpd="sng" algn="ctr">
                       <a:solidFill>
                         <a:srgbClr val="F0DFB0"/>
@@ -14918,7 +14849,7 @@
                         <a:buNone/>
                       </a:pPr>
                       <a:r>
-                        <a:rPr lang="en-US" sz="1150" dirty="0">
+                        <a:rPr lang="en-US" sz="1100" b="1" dirty="0">
                           <a:solidFill>
                             <a:srgbClr val="B8892B"/>
                           </a:solidFill>
@@ -14928,14 +14859,14 @@
                         </a:rPr>
                         <a:t>1</a:t>
                       </a:r>
-                      <a:endParaRPr lang="en-US" sz="1150" dirty="0">
+                      <a:endParaRPr lang="en-US" sz="1100" dirty="0">
                         <a:latin typeface="Calibri" charset="0"/>
                         <a:ea typeface="Calibri" charset="0"/>
                         <a:cs typeface="Calibri" charset="0"/>
                       </a:endParaRPr>
                     </a:p>
                   </a:txBody>
-                  <a:tcPr marL="54864" marR="54864" marT="36576" marB="36576" anchor="ctr">
+                  <a:tcPr marL="36576" marR="36576" marT="18288" marB="18288" anchor="ctr">
                     <a:lnL w="12700" cap="flat" cmpd="sng" algn="ctr">
                       <a:solidFill>
                         <a:srgbClr val="F0DFB0"/>
@@ -14974,6 +14905,314 @@
                     </a:lnB>
                     <a:solidFill>
                       <a:srgbClr val="FFFFFF"/>
+                    </a:solidFill>
+                  </a:tcPr>
+                </a:tc>
+              </a:tr>
+            </a:tbl>
+          </a:graphicData>
+        </a:graphic>
+      </p:graphicFrame>
+      <p:sp>
+        <p:nvSpPr>
+          <p:cNvPr id="12" name="Text 8"/>
+          <p:cNvSpPr txBox="1"/>
+          <p:nvPr/>
+        </p:nvSpPr>
+        <p:spPr>
+          <a:xfrm>
+            <a:off x="8778240" y="1993392"/>
+            <a:ext cx="365760" cy="384048"/>
+          </a:xfrm>
+          <a:prstGeom prst="rect">
+            <a:avLst/>
+          </a:prstGeom>
+          <a:noFill/>
+          <a:ln/>
+        </p:spPr>
+        <p:txBody>
+          <a:bodyPr wrap="square" lIns="0" tIns="0" rIns="0" bIns="0" rtlCol="0" anchor="ctr"/>
+          <a:lstStyle/>
+          <a:p>
+            <a:pPr algn="ctr" indent="0" marL="0">
+              <a:buNone/>
+            </a:pPr>
+            <a:r>
+              <a:rPr lang="en-US" sz="1600" b="1" dirty="0">
+                <a:solidFill>
+                  <a:srgbClr val="6B7280"/>
+                </a:solidFill>
+                <a:latin typeface="Calibri" pitchFamily="34" charset="0"/>
+                <a:ea typeface="Calibri" pitchFamily="34" charset="-122"/>
+                <a:cs typeface="Calibri" pitchFamily="34" charset="-120"/>
+              </a:rPr>
+              <a:t>→</a:t>
+            </a:r>
+            <a:endParaRPr lang="en-US" sz="1600" dirty="0"/>
+          </a:p>
+        </p:txBody>
+      </p:sp>
+      <p:graphicFrame>
+        <p:nvGraphicFramePr>
+          <p:cNvPr id="16" name="Table 2"/>
+          <p:cNvGraphicFramePr>
+            <a:graphicFrameLocks noGrp="1"/>
+          </p:cNvGraphicFramePr>
+          <p:nvPr>
+            <p:extLst>
+              <p:ext uri="{D42A27DB-BD31-4B8C-83A1-F6EECF244321}">
+                <p14:modId xmlns:p14="http://schemas.microsoft.com/office/powerpoint/2010/main" val="1579011935"/>
+              </p:ext>
+            </p:extLst>
+          </p:nvPr>
+        </p:nvGraphicFramePr>
+        <p:xfrm>
+          <a:off x="9144000" y="1993392"/>
+          <a:ext cx="1554480" cy="384048"/>
+        </p:xfrm>
+        <a:graphic>
+          <a:graphicData uri="http://schemas.openxmlformats.org/drawingml/2006/table">
+            <a:tbl>
+              <a:tblPr/>
+              <a:tblGrid>
+                <a:gridCol w="1554480"/>
+              </a:tblGrid>
+              <a:tr h="192024">
+                <a:tc>
+                  <a:txBody>
+                    <a:bodyPr/>
+                    <a:lstStyle/>
+                    <a:p>
+                      <a:pPr algn="ctr" indent="0" marL="0">
+                        <a:buNone/>
+                      </a:pPr>
+                      <a:r>
+                        <a:rPr lang="en-US" sz="850" b="1" dirty="0">
+                          <a:solidFill>
+                            <a:srgbClr val="FFFFFF"/>
+                          </a:solidFill>
+                          <a:latin typeface="Calibri" pitchFamily="34" charset="0"/>
+                          <a:ea typeface="Calibri" pitchFamily="34" charset="-122"/>
+                          <a:cs typeface="Calibri" pitchFamily="34" charset="-120"/>
+                        </a:rPr>
+                        <a:t>P(applied)</a:t>
+                      </a:r>
+                      <a:endParaRPr lang="en-US" sz="850" dirty="0">
+                        <a:latin typeface="Calibri" charset="0"/>
+                        <a:ea typeface="Calibri" charset="0"/>
+                        <a:cs typeface="Calibri" charset="0"/>
+                      </a:endParaRPr>
+                    </a:p>
+                  </a:txBody>
+                  <a:tcPr marL="36576" marR="36576" marT="18288" marB="18288" anchor="ctr">
+                    <a:lnL w="12700" cap="flat" cmpd="sng" algn="ctr">
+                      <a:solidFill>
+                        <a:srgbClr val="F0DFB0"/>
+                      </a:solidFill>
+                      <a:prstDash val="solid"/>
+                      <a:round/>
+                      <a:headEnd type="none" w="med" len="med"/>
+                      <a:tailEnd type="none" w="med" len="med"/>
+                    </a:lnL>
+                    <a:lnR w="12700" cap="flat" cmpd="sng" algn="ctr">
+                      <a:solidFill>
+                        <a:srgbClr val="F0DFB0"/>
+                      </a:solidFill>
+                      <a:prstDash val="solid"/>
+                      <a:round/>
+                      <a:headEnd type="none" w="med" len="med"/>
+                      <a:tailEnd type="none" w="med" len="med"/>
+                    </a:lnR>
+                    <a:lnT w="12700" cap="flat" cmpd="sng" algn="ctr">
+                      <a:solidFill>
+                        <a:srgbClr val="F0DFB0"/>
+                      </a:solidFill>
+                      <a:prstDash val="solid"/>
+                      <a:round/>
+                      <a:headEnd type="none" w="med" len="med"/>
+                      <a:tailEnd type="none" w="med" len="med"/>
+                    </a:lnT>
+                    <a:lnB w="12700" cap="flat" cmpd="sng" algn="ctr">
+                      <a:solidFill>
+                        <a:srgbClr val="F0DFB0"/>
+                      </a:solidFill>
+                      <a:prstDash val="solid"/>
+                      <a:round/>
+                      <a:headEnd type="none" w="med" len="med"/>
+                      <a:tailEnd type="none" w="med" len="med"/>
+                    </a:lnB>
+                    <a:solidFill>
+                      <a:srgbClr val="B8892B"/>
+                    </a:solidFill>
+                  </a:tcPr>
+                </a:tc>
+              </a:tr>
+              <a:tr h="192024">
+                <a:tc>
+                  <a:txBody>
+                    <a:bodyPr/>
+                    <a:lstStyle/>
+                    <a:p>
+                      <a:pPr algn="ctr" indent="0" marL="0">
+                        <a:buNone/>
+                      </a:pPr>
+                      <a:r>
+                        <a:rPr lang="en-US" sz="1250" b="1" dirty="0">
+                          <a:solidFill>
+                            <a:srgbClr val="141B4D"/>
+                          </a:solidFill>
+                          <a:latin typeface="Calibri" pitchFamily="34" charset="0"/>
+                          <a:ea typeface="Calibri" pitchFamily="34" charset="-122"/>
+                          <a:cs typeface="Calibri" pitchFamily="34" charset="-120"/>
+                        </a:rPr>
+                        <a:t>0.42</a:t>
+                      </a:r>
+                      <a:endParaRPr lang="en-US" sz="1250" dirty="0">
+                        <a:latin typeface="Calibri" charset="0"/>
+                        <a:ea typeface="Calibri" charset="0"/>
+                        <a:cs typeface="Calibri" charset="0"/>
+                      </a:endParaRPr>
+                    </a:p>
+                  </a:txBody>
+                  <a:tcPr marL="36576" marR="36576" marT="18288" marB="18288" anchor="ctr">
+                    <a:lnL w="12700" cap="flat" cmpd="sng" algn="ctr">
+                      <a:solidFill>
+                        <a:srgbClr val="F0DFB0"/>
+                      </a:solidFill>
+                      <a:prstDash val="solid"/>
+                      <a:round/>
+                      <a:headEnd type="none" w="med" len="med"/>
+                      <a:tailEnd type="none" w="med" len="med"/>
+                    </a:lnL>
+                    <a:lnR w="12700" cap="flat" cmpd="sng" algn="ctr">
+                      <a:solidFill>
+                        <a:srgbClr val="F0DFB0"/>
+                      </a:solidFill>
+                      <a:prstDash val="solid"/>
+                      <a:round/>
+                      <a:headEnd type="none" w="med" len="med"/>
+                      <a:tailEnd type="none" w="med" len="med"/>
+                    </a:lnR>
+                    <a:lnT w="12700" cap="flat" cmpd="sng" algn="ctr">
+                      <a:solidFill>
+                        <a:srgbClr val="F0DFB0"/>
+                      </a:solidFill>
+                      <a:prstDash val="solid"/>
+                      <a:round/>
+                      <a:headEnd type="none" w="med" len="med"/>
+                      <a:tailEnd type="none" w="med" len="med"/>
+                    </a:lnT>
+                    <a:lnB w="12700" cap="flat" cmpd="sng" algn="ctr">
+                      <a:solidFill>
+                        <a:srgbClr val="F0DFB0"/>
+                      </a:solidFill>
+                      <a:prstDash val="solid"/>
+                      <a:round/>
+                      <a:headEnd type="none" w="med" len="med"/>
+                      <a:tailEnd type="none" w="med" len="med"/>
+                    </a:lnB>
+                    <a:solidFill>
+                      <a:srgbClr val="FFFFFF"/>
+                    </a:solidFill>
+                  </a:tcPr>
+                </a:tc>
+              </a:tr>
+            </a:tbl>
+          </a:graphicData>
+        </a:graphic>
+      </p:graphicFrame>
+      <p:graphicFrame>
+        <p:nvGraphicFramePr>
+          <p:cNvPr id="21" name="Table 3"/>
+          <p:cNvGraphicFramePr>
+            <a:graphicFrameLocks noGrp="1"/>
+          </p:cNvGraphicFramePr>
+          <p:nvPr>
+            <p:extLst>
+              <p:ext uri="{D42A27DB-BD31-4B8C-83A1-F6EECF244321}">
+                <p14:modId xmlns:p14="http://schemas.microsoft.com/office/powerpoint/2010/main" val="1579011935"/>
+              </p:ext>
+            </p:extLst>
+          </p:nvPr>
+        </p:nvGraphicFramePr>
+        <p:xfrm>
+          <a:off x="6492240" y="2487168"/>
+          <a:ext cx="2286000" cy="384048"/>
+        </p:xfrm>
+        <a:graphic>
+          <a:graphicData uri="http://schemas.openxmlformats.org/drawingml/2006/table">
+            <a:tbl>
+              <a:tblPr/>
+              <a:tblGrid>
+                <a:gridCol w="1028700"/>
+                <a:gridCol w="1257300"/>
+              </a:tblGrid>
+              <a:tr h="192024">
+                <a:tc>
+                  <a:txBody>
+                    <a:bodyPr/>
+                    <a:lstStyle/>
+                    <a:p>
+                      <a:pPr algn="ctr" indent="0" marL="0">
+                        <a:buNone/>
+                      </a:pPr>
+                      <a:r>
+                        <a:rPr lang="en-US" sz="850" b="1" dirty="0">
+                          <a:solidFill>
+                            <a:srgbClr val="FFFFFF"/>
+                          </a:solidFill>
+                          <a:latin typeface="Calibri" pitchFamily="34" charset="0"/>
+                          <a:ea typeface="Calibri" pitchFamily="34" charset="-122"/>
+                          <a:cs typeface="Calibri" pitchFamily="34" charset="-120"/>
+                        </a:rPr>
+                        <a:t>Customer</a:t>
+                      </a:r>
+                      <a:endParaRPr lang="en-US" sz="850" dirty="0">
+                        <a:latin typeface="Calibri" charset="0"/>
+                        <a:ea typeface="Calibri" charset="0"/>
+                        <a:cs typeface="Calibri" charset="0"/>
+                      </a:endParaRPr>
+                    </a:p>
+                  </a:txBody>
+                  <a:tcPr marL="36576" marR="36576" marT="18288" marB="18288" anchor="ctr">
+                    <a:lnL w="12700" cap="flat" cmpd="sng" algn="ctr">
+                      <a:solidFill>
+                        <a:srgbClr val="F0DFB0"/>
+                      </a:solidFill>
+                      <a:prstDash val="solid"/>
+                      <a:round/>
+                      <a:headEnd type="none" w="med" len="med"/>
+                      <a:tailEnd type="none" w="med" len="med"/>
+                    </a:lnL>
+                    <a:lnR w="12700" cap="flat" cmpd="sng" algn="ctr">
+                      <a:solidFill>
+                        <a:srgbClr val="F0DFB0"/>
+                      </a:solidFill>
+                      <a:prstDash val="solid"/>
+                      <a:round/>
+                      <a:headEnd type="none" w="med" len="med"/>
+                      <a:tailEnd type="none" w="med" len="med"/>
+                    </a:lnR>
+                    <a:lnT w="12700" cap="flat" cmpd="sng" algn="ctr">
+                      <a:solidFill>
+                        <a:srgbClr val="F0DFB0"/>
+                      </a:solidFill>
+                      <a:prstDash val="solid"/>
+                      <a:round/>
+                      <a:headEnd type="none" w="med" len="med"/>
+                      <a:tailEnd type="none" w="med" len="med"/>
+                    </a:lnT>
+                    <a:lnB w="12700" cap="flat" cmpd="sng" algn="ctr">
+                      <a:solidFill>
+                        <a:srgbClr val="F0DFB0"/>
+                      </a:solidFill>
+                      <a:prstDash val="solid"/>
+                      <a:round/>
+                      <a:headEnd type="none" w="med" len="med"/>
+                      <a:tailEnd type="none" w="med" len="med"/>
+                    </a:lnB>
+                    <a:solidFill>
+                      <a:srgbClr val="1E2761"/>
                     </a:solidFill>
                   </a:tcPr>
                 </a:tc>
@@ -14986,24 +15225,24 @@
                         <a:buNone/>
                       </a:pPr>
                       <a:r>
-                        <a:rPr lang="en-US" sz="1150" dirty="0">
+                        <a:rPr lang="en-US" sz="850" b="1" dirty="0">
                           <a:solidFill>
-                            <a:srgbClr val="33344A"/>
+                            <a:srgbClr val="FFFFFF"/>
                           </a:solidFill>
                           <a:latin typeface="Calibri" pitchFamily="34" charset="0"/>
                           <a:ea typeface="Calibri" pitchFamily="34" charset="-122"/>
                           <a:cs typeface="Calibri" pitchFamily="34" charset="-120"/>
                         </a:rPr>
-                        <a:t>0.42</a:t>
+                        <a:t>receive_offer</a:t>
                       </a:r>
-                      <a:endParaRPr lang="en-US" sz="1150" dirty="0">
+                      <a:endParaRPr lang="en-US" sz="850" dirty="0">
                         <a:latin typeface="Calibri" charset="0"/>
                         <a:ea typeface="Calibri" charset="0"/>
                         <a:cs typeface="Calibri" charset="0"/>
                       </a:endParaRPr>
                     </a:p>
                   </a:txBody>
-                  <a:tcPr marL="54864" marR="54864" marT="36576" marB="36576" anchor="ctr">
+                  <a:tcPr marL="36576" marR="36576" marT="18288" marB="18288" anchor="ctr">
                     <a:lnL w="12700" cap="flat" cmpd="sng" algn="ctr">
                       <a:solidFill>
                         <a:srgbClr val="F0DFB0"/>
@@ -15041,12 +15280,12 @@
                       <a:tailEnd type="none" w="med" len="med"/>
                     </a:lnB>
                     <a:solidFill>
-                      <a:srgbClr val="FFFFFF"/>
+                      <a:srgbClr val="1E2761"/>
                     </a:solidFill>
                   </a:tcPr>
                 </a:tc>
               </a:tr>
-              <a:tr h="336042">
+              <a:tr h="192024">
                 <a:tc>
                   <a:txBody>
                     <a:bodyPr/>
@@ -15056,7 +15295,7 @@
                         <a:buNone/>
                       </a:pPr>
                       <a:r>
-                        <a:rPr lang="en-US" sz="1150" b="1" dirty="0">
+                        <a:rPr lang="en-US" sz="1100" b="1" dirty="0">
                           <a:solidFill>
                             <a:srgbClr val="1E2761"/>
                           </a:solidFill>
@@ -15064,16 +15303,16 @@
                           <a:ea typeface="Calibri" pitchFamily="34" charset="-122"/>
                           <a:cs typeface="Calibri" pitchFamily="34" charset="-120"/>
                         </a:rPr>
-                        <a:t>G doesn't get it</a:t>
+                        <a:t>G</a:t>
                       </a:r>
-                      <a:endParaRPr lang="en-US" sz="1150" dirty="0">
+                      <a:endParaRPr lang="en-US" sz="1100" dirty="0">
                         <a:latin typeface="Calibri" charset="0"/>
                         <a:ea typeface="Calibri" charset="0"/>
                         <a:cs typeface="Calibri" charset="0"/>
                       </a:endParaRPr>
                     </a:p>
                   </a:txBody>
-                  <a:tcPr marL="54864" marR="54864" marT="36576" marB="36576" anchor="ctr">
+                  <a:tcPr marL="36576" marR="36576" marT="18288" marB="18288" anchor="ctr">
                     <a:lnL w="12700" cap="flat" cmpd="sng" algn="ctr">
                       <a:solidFill>
                         <a:srgbClr val="F0DFB0"/>
@@ -15124,7 +15363,7 @@
                         <a:buNone/>
                       </a:pPr>
                       <a:r>
-                        <a:rPr lang="en-US" sz="1150" dirty="0">
+                        <a:rPr lang="en-US" sz="1100" b="1" dirty="0">
                           <a:solidFill>
                             <a:srgbClr val="1E2761"/>
                           </a:solidFill>
@@ -15134,14 +15373,14 @@
                         </a:rPr>
                         <a:t>0</a:t>
                       </a:r>
-                      <a:endParaRPr lang="en-US" sz="1150" dirty="0">
+                      <a:endParaRPr lang="en-US" sz="1100" dirty="0">
                         <a:latin typeface="Calibri" charset="0"/>
                         <a:ea typeface="Calibri" charset="0"/>
                         <a:cs typeface="Calibri" charset="0"/>
                       </a:endParaRPr>
                     </a:p>
                   </a:txBody>
-                  <a:tcPr marL="54864" marR="54864" marT="36576" marB="36576" anchor="ctr">
+                  <a:tcPr marL="36576" marR="36576" marT="18288" marB="18288" anchor="ctr">
                     <a:lnL w="12700" cap="flat" cmpd="sng" algn="ctr">
                       <a:solidFill>
                         <a:srgbClr val="F0DFB0"/>
@@ -15183,6 +15422,76 @@
                     </a:solidFill>
                   </a:tcPr>
                 </a:tc>
+              </a:tr>
+            </a:tbl>
+          </a:graphicData>
+        </a:graphic>
+      </p:graphicFrame>
+      <p:sp>
+        <p:nvSpPr>
+          <p:cNvPr id="15" name="Text 9"/>
+          <p:cNvSpPr txBox="1"/>
+          <p:nvPr/>
+        </p:nvSpPr>
+        <p:spPr>
+          <a:xfrm>
+            <a:off x="8778240" y="2487168"/>
+            <a:ext cx="365760" cy="384048"/>
+          </a:xfrm>
+          <a:prstGeom prst="rect">
+            <a:avLst/>
+          </a:prstGeom>
+          <a:noFill/>
+          <a:ln/>
+        </p:spPr>
+        <p:txBody>
+          <a:bodyPr wrap="square" lIns="0" tIns="0" rIns="0" bIns="0" rtlCol="0" anchor="ctr"/>
+          <a:lstStyle/>
+          <a:p>
+            <a:pPr algn="ctr" indent="0" marL="0">
+              <a:buNone/>
+            </a:pPr>
+            <a:r>
+              <a:rPr lang="en-US" sz="1600" b="1" dirty="0">
+                <a:solidFill>
+                  <a:srgbClr val="6B7280"/>
+                </a:solidFill>
+                <a:latin typeface="Calibri" pitchFamily="34" charset="0"/>
+                <a:ea typeface="Calibri" pitchFamily="34" charset="-122"/>
+                <a:cs typeface="Calibri" pitchFamily="34" charset="-120"/>
+              </a:rPr>
+              <a:t>→</a:t>
+            </a:r>
+            <a:endParaRPr lang="en-US" sz="1600" dirty="0"/>
+          </a:p>
+        </p:txBody>
+      </p:sp>
+      <p:graphicFrame>
+        <p:nvGraphicFramePr>
+          <p:cNvPr id="26" name="Table 4"/>
+          <p:cNvGraphicFramePr>
+            <a:graphicFrameLocks noGrp="1"/>
+          </p:cNvGraphicFramePr>
+          <p:nvPr>
+            <p:extLst>
+              <p:ext uri="{D42A27DB-BD31-4B8C-83A1-F6EECF244321}">
+                <p14:modId xmlns:p14="http://schemas.microsoft.com/office/powerpoint/2010/main" val="1579011935"/>
+              </p:ext>
+            </p:extLst>
+          </p:nvPr>
+        </p:nvGraphicFramePr>
+        <p:xfrm>
+          <a:off x="9144000" y="2487168"/>
+          <a:ext cx="1554480" cy="384048"/>
+        </p:xfrm>
+        <a:graphic>
+          <a:graphicData uri="http://schemas.openxmlformats.org/drawingml/2006/table">
+            <a:tbl>
+              <a:tblPr/>
+              <a:tblGrid>
+                <a:gridCol w="1554480"/>
+              </a:tblGrid>
+              <a:tr h="192024">
                 <a:tc>
                   <a:txBody>
                     <a:bodyPr/>
@@ -15192,77 +15501,7 @@
                         <a:buNone/>
                       </a:pPr>
                       <a:r>
-                        <a:rPr lang="en-US" sz="1150" dirty="0">
-                          <a:solidFill>
-                            <a:srgbClr val="33344A"/>
-                          </a:solidFill>
-                          <a:latin typeface="Calibri" pitchFamily="34" charset="0"/>
-                          <a:ea typeface="Calibri" pitchFamily="34" charset="-122"/>
-                          <a:cs typeface="Calibri" pitchFamily="34" charset="-120"/>
-                        </a:rPr>
-                        <a:t>0.31</a:t>
-                      </a:r>
-                      <a:endParaRPr lang="en-US" sz="1150" dirty="0">
-                        <a:latin typeface="Calibri" charset="0"/>
-                        <a:ea typeface="Calibri" charset="0"/>
-                        <a:cs typeface="Calibri" charset="0"/>
-                      </a:endParaRPr>
-                    </a:p>
-                  </a:txBody>
-                  <a:tcPr marL="54864" marR="54864" marT="36576" marB="36576" anchor="ctr">
-                    <a:lnL w="12700" cap="flat" cmpd="sng" algn="ctr">
-                      <a:solidFill>
-                        <a:srgbClr val="F0DFB0"/>
-                      </a:solidFill>
-                      <a:prstDash val="solid"/>
-                      <a:round/>
-                      <a:headEnd type="none" w="med" len="med"/>
-                      <a:tailEnd type="none" w="med" len="med"/>
-                    </a:lnL>
-                    <a:lnR w="12700" cap="flat" cmpd="sng" algn="ctr">
-                      <a:solidFill>
-                        <a:srgbClr val="F0DFB0"/>
-                      </a:solidFill>
-                      <a:prstDash val="solid"/>
-                      <a:round/>
-                      <a:headEnd type="none" w="med" len="med"/>
-                      <a:tailEnd type="none" w="med" len="med"/>
-                    </a:lnR>
-                    <a:lnT w="12700" cap="flat" cmpd="sng" algn="ctr">
-                      <a:solidFill>
-                        <a:srgbClr val="F0DFB0"/>
-                      </a:solidFill>
-                      <a:prstDash val="solid"/>
-                      <a:round/>
-                      <a:headEnd type="none" w="med" len="med"/>
-                      <a:tailEnd type="none" w="med" len="med"/>
-                    </a:lnT>
-                    <a:lnB w="12700" cap="flat" cmpd="sng" algn="ctr">
-                      <a:solidFill>
-                        <a:srgbClr val="F0DFB0"/>
-                      </a:solidFill>
-                      <a:prstDash val="solid"/>
-                      <a:round/>
-                      <a:headEnd type="none" w="med" len="med"/>
-                      <a:tailEnd type="none" w="med" len="med"/>
-                    </a:lnB>
-                    <a:solidFill>
-                      <a:srgbClr val="FBF3E1"/>
-                    </a:solidFill>
-                  </a:tcPr>
-                </a:tc>
-              </a:tr>
-              <a:tr h="336042">
-                <a:tc gridSpan="2">
-                  <a:txBody>
-                    <a:bodyPr/>
-                    <a:lstStyle/>
-                    <a:p>
-                      <a:pPr algn="l" indent="0" marL="0">
-                        <a:buNone/>
-                      </a:pPr>
-                      <a:r>
-                        <a:rPr lang="en-US" sz="1150" b="1" dirty="0">
+                        <a:rPr lang="en-US" sz="850" b="1" dirty="0">
                           <a:solidFill>
                             <a:srgbClr val="FFFFFF"/>
                           </a:solidFill>
@@ -15270,16 +15509,16 @@
                           <a:ea typeface="Calibri" pitchFamily="34" charset="-122"/>
                           <a:cs typeface="Calibri" pitchFamily="34" charset="-120"/>
                         </a:rPr>
-                        <a:t>τ(G) = f(G,1) − f(G,0)</a:t>
+                        <a:t>P(applied)</a:t>
                       </a:r>
-                      <a:endParaRPr lang="en-US" sz="1150" dirty="0">
+                      <a:endParaRPr lang="en-US" sz="850" dirty="0">
                         <a:latin typeface="Calibri" charset="0"/>
                         <a:ea typeface="Calibri" charset="0"/>
                         <a:cs typeface="Calibri" charset="0"/>
                       </a:endParaRPr>
                     </a:p>
                   </a:txBody>
-                  <a:tcPr marL="54864" marR="54864" marT="36576" marB="36576" anchor="ctr">
+                  <a:tcPr marL="36576" marR="36576" marT="18288" marB="18288" anchor="ctr">
                     <a:lnL w="12700" cap="flat" cmpd="sng" algn="ctr">
                       <a:solidFill>
                         <a:srgbClr val="F0DFB0"/>
@@ -15317,13 +15556,12 @@
                       <a:tailEnd type="none" w="med" len="med"/>
                     </a:lnB>
                     <a:solidFill>
-                      <a:srgbClr val="141B4D"/>
+                      <a:srgbClr val="B8892B"/>
                     </a:solidFill>
                   </a:tcPr>
                 </a:tc>
-                <a:tc hMerge="1">
-                  <a:tcPr/>
-                </a:tc>
+              </a:tr>
+              <a:tr h="192024">
                 <a:tc>
                   <a:txBody>
                     <a:bodyPr/>
@@ -15333,24 +15571,24 @@
                         <a:buNone/>
                       </a:pPr>
                       <a:r>
-                        <a:rPr lang="en-US" sz="1500" b="1" dirty="0">
+                        <a:rPr lang="en-US" sz="1250" b="1" dirty="0">
                           <a:solidFill>
-                            <a:srgbClr val="B8892B"/>
+                            <a:srgbClr val="141B4D"/>
                           </a:solidFill>
                           <a:latin typeface="Calibri" pitchFamily="34" charset="0"/>
                           <a:ea typeface="Calibri" pitchFamily="34" charset="-122"/>
                           <a:cs typeface="Calibri" pitchFamily="34" charset="-120"/>
                         </a:rPr>
-                        <a:t>0.11</a:t>
+                        <a:t>0.31</a:t>
                       </a:r>
-                      <a:endParaRPr lang="en-US" sz="1500" dirty="0">
+                      <a:endParaRPr lang="en-US" sz="1250" dirty="0">
                         <a:latin typeface="Calibri" charset="0"/>
                         <a:ea typeface="Calibri" charset="0"/>
                         <a:cs typeface="Calibri" charset="0"/>
                       </a:endParaRPr>
                     </a:p>
                   </a:txBody>
-                  <a:tcPr marL="54864" marR="54864" marT="36576" marB="36576" anchor="ctr">
+                  <a:tcPr marL="36576" marR="36576" marT="18288" marB="18288" anchor="ctr">
                     <a:lnL w="12700" cap="flat" cmpd="sng" algn="ctr">
                       <a:solidFill>
                         <a:srgbClr val="F0DFB0"/>
@@ -15388,7 +15626,7 @@
                       <a:tailEnd type="none" w="med" len="med"/>
                     </a:lnB>
                     <a:solidFill>
-                      <a:srgbClr val="141B4D"/>
+                      <a:srgbClr val="FBF3E1"/>
                     </a:solidFill>
                   </a:tcPr>
                 </a:tc>
@@ -15399,7 +15637,82 @@
       </p:graphicFrame>
       <p:sp>
         <p:nvSpPr>
-          <p:cNvPr id="12" name="Shape 8"/>
+          <p:cNvPr id="17" name="Shape 10"/>
+          <p:cNvSpPr/>
+          <p:nvPr/>
+        </p:nvSpPr>
+        <p:spPr>
+          <a:xfrm>
+            <a:off x="6492240" y="2962656"/>
+            <a:ext cx="4892040" cy="374904"/>
+          </a:xfrm>
+          <a:prstGeom prst="roundRect">
+            <a:avLst>
+              <a:gd name="adj" fmla="val 14634"/>
+            </a:avLst>
+          </a:prstGeom>
+          <a:solidFill>
+            <a:srgbClr val="141B4D"/>
+          </a:solidFill>
+          <a:ln/>
+        </p:spPr>
+      </p:sp>
+      <p:sp>
+        <p:nvSpPr>
+          <p:cNvPr id="18" name="Text 11"/>
+          <p:cNvSpPr txBox="1"/>
+          <p:nvPr/>
+        </p:nvSpPr>
+        <p:spPr>
+          <a:xfrm>
+            <a:off x="6675120" y="2962656"/>
+            <a:ext cx="4526280" cy="374904"/>
+          </a:xfrm>
+          <a:prstGeom prst="rect">
+            <a:avLst/>
+          </a:prstGeom>
+          <a:noFill/>
+          <a:ln/>
+        </p:spPr>
+        <p:txBody>
+          <a:bodyPr wrap="square" lIns="0" tIns="0" rIns="0" bIns="0" rtlCol="0" anchor="ctr"/>
+          <a:lstStyle/>
+          <a:p>
+            <a:pPr indent="0" marL="0">
+              <a:buNone/>
+            </a:pPr>
+            <a:r>
+              <a:rPr lang="en-US" sz="1150" b="1" dirty="0">
+                <a:solidFill>
+                  <a:srgbClr val="FFFFFF"/>
+                </a:solidFill>
+                <a:latin typeface="Calibri" pitchFamily="34" charset="0"/>
+                <a:ea typeface="Calibri" pitchFamily="34" charset="-122"/>
+                <a:cs typeface="Calibri" pitchFamily="34" charset="-120"/>
+              </a:rPr>
+              <a:t>τ(G) = f(G,1) − f(G,0) = 0.42 − 0.31 = </a:t>
+            </a:r>
+            <a:pPr indent="0" marL="0">
+              <a:buNone/>
+            </a:pPr>
+            <a:r>
+              <a:rPr lang="en-US" sz="1400" b="1" dirty="0">
+                <a:solidFill>
+                  <a:srgbClr val="B8892B"/>
+                </a:solidFill>
+                <a:latin typeface="Calibri" pitchFamily="34" charset="0"/>
+                <a:ea typeface="Calibri" pitchFamily="34" charset="-122"/>
+                <a:cs typeface="Calibri" pitchFamily="34" charset="-120"/>
+              </a:rPr>
+              <a:t>0.11</a:t>
+            </a:r>
+            <a:endParaRPr lang="en-US" sz="1150" dirty="0"/>
+          </a:p>
+        </p:txBody>
+      </p:sp>
+      <p:sp>
+        <p:nvSpPr>
+          <p:cNvPr id="19" name="Shape 12"/>
           <p:cNvSpPr/>
           <p:nvPr/>
         </p:nvSpPr>
@@ -15421,7 +15734,7 @@
       </p:sp>
       <p:sp>
         <p:nvSpPr>
-          <p:cNvPr id="13" name="Text 9"/>
+          <p:cNvPr id="20" name="Text 13"/>
           <p:cNvSpPr txBox="1"/>
           <p:nvPr/>
         </p:nvSpPr>
@@ -15460,7 +15773,7 @@
       </p:sp>
       <p:sp>
         <p:nvSpPr>
-          <p:cNvPr id="14" name="Text 10"/>
+          <p:cNvPr id="21" name="Text 14"/>
           <p:cNvSpPr txBox="1"/>
           <p:nvPr/>
         </p:nvSpPr>
@@ -15502,7 +15815,7 @@
       </p:sp>
       <p:sp>
         <p:nvSpPr>
-          <p:cNvPr id="15" name="Shape 11"/>
+          <p:cNvPr id="22" name="Shape 15"/>
           <p:cNvSpPr/>
           <p:nvPr/>
         </p:nvSpPr>
@@ -15524,7 +15837,7 @@
       </p:sp>
       <p:sp>
         <p:nvSpPr>
-          <p:cNvPr id="16" name="Text 12"/>
+          <p:cNvPr id="23" name="Text 16"/>
           <p:cNvSpPr txBox="1"/>
           <p:nvPr/>
         </p:nvSpPr>
@@ -15563,7 +15876,7 @@
       </p:sp>
       <p:sp>
         <p:nvSpPr>
-          <p:cNvPr id="17" name="Text 13"/>
+          <p:cNvPr id="24" name="Text 17"/>
           <p:cNvSpPr txBox="1"/>
           <p:nvPr/>
         </p:nvSpPr>
@@ -15605,7 +15918,7 @@
       </p:sp>
       <p:sp>
         <p:nvSpPr>
-          <p:cNvPr id="18" name="Shape 14"/>
+          <p:cNvPr id="25" name="Shape 18"/>
           <p:cNvSpPr/>
           <p:nvPr/>
         </p:nvSpPr>
@@ -15627,7 +15940,7 @@
       </p:sp>
       <p:sp>
         <p:nvSpPr>
-          <p:cNvPr id="19" name="Text 15"/>
+          <p:cNvPr id="26" name="Text 19"/>
           <p:cNvSpPr txBox="1"/>
           <p:nvPr/>
         </p:nvSpPr>
@@ -15686,7 +15999,7 @@
       </p:sp>
       <p:sp>
         <p:nvSpPr>
-          <p:cNvPr id="20" name="Text 16"/>
+          <p:cNvPr id="27" name="Text 20"/>
           <p:cNvSpPr txBox="1"/>
           <p:nvPr/>
         </p:nvSpPr>
@@ -15725,7 +16038,7 @@
       </p:sp>
       <p:sp>
         <p:nvSpPr>
-          <p:cNvPr id="21" name="Text 17"/>
+          <p:cNvPr id="28" name="Text 21"/>
           <p:cNvSpPr txBox="1"/>
           <p:nvPr/>
         </p:nvSpPr>
@@ -17346,7 +17659,7 @@
                 <a:ea typeface="Calibri" pitchFamily="34" charset="-122"/>
                 <a:cs typeface="Calibri" pitchFamily="34" charset="-120"/>
               </a:rPr>
-              <a:t>No flag to flip — which model you ask IS the mailing scenario</a:t>
+              <a:t>Two separate scoring calls — each with its own input table and output table</a:t>
             </a:r>
             <a:endParaRPr lang="en-US" sz="900" dirty="0"/>
           </a:p>
@@ -17368,18 +17681,17 @@
         </p:nvGraphicFramePr>
         <p:xfrm>
           <a:off x="6492240" y="1993392"/>
-          <a:ext cx="4892040" cy="1344168"/>
+          <a:ext cx="2468880" cy="384048"/>
         </p:xfrm>
         <a:graphic>
           <a:graphicData uri="http://schemas.openxmlformats.org/drawingml/2006/table">
             <a:tbl>
               <a:tblPr/>
               <a:tblGrid>
-                <a:gridCol w="2152498"/>
-                <a:gridCol w="1369771"/>
-                <a:gridCol w="1369771"/>
+                <a:gridCol w="839419"/>
+                <a:gridCol w="1629461"/>
               </a:tblGrid>
-              <a:tr h="336042">
+              <a:tr h="192024">
                 <a:tc>
                   <a:txBody>
                     <a:bodyPr/>
@@ -17389,7 +17701,7 @@
                         <a:buNone/>
                       </a:pPr>
                       <a:r>
-                        <a:rPr lang="en-US" sz="1100" b="1" dirty="0">
+                        <a:rPr lang="en-US" sz="850" b="1" dirty="0">
                           <a:solidFill>
                             <a:srgbClr val="FFFFFF"/>
                           </a:solidFill>
@@ -17397,16 +17709,16 @@
                           <a:ea typeface="Calibri" pitchFamily="34" charset="-122"/>
                           <a:cs typeface="Calibri" pitchFamily="34" charset="-120"/>
                         </a:rPr>
-                        <a:t>Model</a:t>
+                        <a:t>Customer</a:t>
                       </a:r>
-                      <a:endParaRPr lang="en-US" sz="1100" dirty="0">
+                      <a:endParaRPr lang="en-US" sz="850" dirty="0">
                         <a:latin typeface="Calibri" charset="0"/>
                         <a:ea typeface="Calibri" charset="0"/>
                         <a:cs typeface="Calibri" charset="0"/>
                       </a:endParaRPr>
                     </a:p>
                   </a:txBody>
-                  <a:tcPr marL="54864" marR="54864" marT="36576" marB="36576" anchor="ctr">
+                  <a:tcPr marL="36576" marR="36576" marT="18288" marB="18288" anchor="ctr">
                     <a:lnL w="12700" cap="flat" cmpd="sng" algn="ctr">
                       <a:solidFill>
                         <a:srgbClr val="F0DFB0"/>
@@ -17444,7 +17756,7 @@
                       <a:tailEnd type="none" w="med" len="med"/>
                     </a:lnB>
                     <a:solidFill>
-                      <a:srgbClr val="B8892B"/>
+                      <a:srgbClr val="1E2761"/>
                     </a:solidFill>
                   </a:tcPr>
                 </a:tc>
@@ -17457,7 +17769,7 @@
                         <a:buNone/>
                       </a:pPr>
                       <a:r>
-                        <a:rPr lang="en-US" sz="1100" b="1" dirty="0">
+                        <a:rPr lang="en-US" sz="850" b="1" dirty="0">
                           <a:solidFill>
                             <a:srgbClr val="FFFFFF"/>
                           </a:solidFill>
@@ -17465,16 +17777,16 @@
                           <a:ea typeface="Calibri" pitchFamily="34" charset="-122"/>
                           <a:cs typeface="Calibri" pitchFamily="34" charset="-120"/>
                         </a:rPr>
-                        <a:t>Mailing scenario</a:t>
+                        <a:t>model</a:t>
                       </a:r>
-                      <a:endParaRPr lang="en-US" sz="1100" dirty="0">
+                      <a:endParaRPr lang="en-US" sz="850" dirty="0">
                         <a:latin typeface="Calibri" charset="0"/>
                         <a:ea typeface="Calibri" charset="0"/>
                         <a:cs typeface="Calibri" charset="0"/>
                       </a:endParaRPr>
                     </a:p>
                   </a:txBody>
-                  <a:tcPr marL="54864" marR="54864" marT="36576" marB="36576" anchor="ctr">
+                  <a:tcPr marL="36576" marR="36576" marT="18288" marB="18288" anchor="ctr">
                     <a:lnL w="12700" cap="flat" cmpd="sng" algn="ctr">
                       <a:solidFill>
                         <a:srgbClr val="F0DFB0"/>
@@ -17512,10 +17824,12 @@
                       <a:tailEnd type="none" w="med" len="med"/>
                     </a:lnB>
                     <a:solidFill>
-                      <a:srgbClr val="B8892B"/>
+                      <a:srgbClr val="1E2761"/>
                     </a:solidFill>
                   </a:tcPr>
                 </a:tc>
+              </a:tr>
+              <a:tr h="192024">
                 <a:tc>
                   <a:txBody>
                     <a:bodyPr/>
@@ -17525,77 +17839,7 @@
                         <a:buNone/>
                       </a:pPr>
                       <a:r>
-                        <a:rPr lang="en-US" sz="1100" b="1" dirty="0">
-                          <a:solidFill>
-                            <a:srgbClr val="FFFFFF"/>
-                          </a:solidFill>
-                          <a:latin typeface="Calibri" pitchFamily="34" charset="0"/>
-                          <a:ea typeface="Calibri" pitchFamily="34" charset="-122"/>
-                          <a:cs typeface="Calibri" pitchFamily="34" charset="-120"/>
-                        </a:rPr>
-                        <a:t>P(applied)</a:t>
-                      </a:r>
-                      <a:endParaRPr lang="en-US" sz="1100" dirty="0">
-                        <a:latin typeface="Calibri" charset="0"/>
-                        <a:ea typeface="Calibri" charset="0"/>
-                        <a:cs typeface="Calibri" charset="0"/>
-                      </a:endParaRPr>
-                    </a:p>
-                  </a:txBody>
-                  <a:tcPr marL="54864" marR="54864" marT="36576" marB="36576" anchor="ctr">
-                    <a:lnL w="12700" cap="flat" cmpd="sng" algn="ctr">
-                      <a:solidFill>
-                        <a:srgbClr val="F0DFB0"/>
-                      </a:solidFill>
-                      <a:prstDash val="solid"/>
-                      <a:round/>
-                      <a:headEnd type="none" w="med" len="med"/>
-                      <a:tailEnd type="none" w="med" len="med"/>
-                    </a:lnL>
-                    <a:lnR w="12700" cap="flat" cmpd="sng" algn="ctr">
-                      <a:solidFill>
-                        <a:srgbClr val="F0DFB0"/>
-                      </a:solidFill>
-                      <a:prstDash val="solid"/>
-                      <a:round/>
-                      <a:headEnd type="none" w="med" len="med"/>
-                      <a:tailEnd type="none" w="med" len="med"/>
-                    </a:lnR>
-                    <a:lnT w="12700" cap="flat" cmpd="sng" algn="ctr">
-                      <a:solidFill>
-                        <a:srgbClr val="F0DFB0"/>
-                      </a:solidFill>
-                      <a:prstDash val="solid"/>
-                      <a:round/>
-                      <a:headEnd type="none" w="med" len="med"/>
-                      <a:tailEnd type="none" w="med" len="med"/>
-                    </a:lnT>
-                    <a:lnB w="12700" cap="flat" cmpd="sng" algn="ctr">
-                      <a:solidFill>
-                        <a:srgbClr val="F0DFB0"/>
-                      </a:solidFill>
-                      <a:prstDash val="solid"/>
-                      <a:round/>
-                      <a:headEnd type="none" w="med" len="med"/>
-                      <a:tailEnd type="none" w="med" len="med"/>
-                    </a:lnB>
-                    <a:solidFill>
-                      <a:srgbClr val="B8892B"/>
-                    </a:solidFill>
-                  </a:tcPr>
-                </a:tc>
-              </a:tr>
-              <a:tr h="336042">
-                <a:tc>
-                  <a:txBody>
-                    <a:bodyPr/>
-                    <a:lstStyle/>
-                    <a:p>
-                      <a:pPr algn="l" indent="0" marL="0">
-                        <a:buNone/>
-                      </a:pPr>
-                      <a:r>
-                        <a:rPr lang="en-US" sz="1100" b="1" dirty="0">
+                        <a:rPr lang="en-US" sz="1050" b="1" dirty="0">
                           <a:solidFill>
                             <a:srgbClr val="1E2761"/>
                           </a:solidFill>
@@ -17603,16 +17847,16 @@
                           <a:ea typeface="Calibri" pitchFamily="34" charset="-122"/>
                           <a:cs typeface="Calibri" pitchFamily="34" charset="-120"/>
                         </a:rPr>
-                        <a:t>μ̂₀ — control model</a:t>
+                        <a:t>G</a:t>
                       </a:r>
-                      <a:endParaRPr lang="en-US" sz="1100" dirty="0">
+                      <a:endParaRPr lang="en-US" sz="1050" dirty="0">
                         <a:latin typeface="Calibri" charset="0"/>
                         <a:ea typeface="Calibri" charset="0"/>
                         <a:cs typeface="Calibri" charset="0"/>
                       </a:endParaRPr>
                     </a:p>
                   </a:txBody>
-                  <a:tcPr marL="54864" marR="54864" marT="36576" marB="36576" anchor="ctr">
+                  <a:tcPr marL="36576" marR="36576" marT="18288" marB="18288" anchor="ctr">
                     <a:lnL w="12700" cap="flat" cmpd="sng" algn="ctr">
                       <a:solidFill>
                         <a:srgbClr val="F0DFB0"/>
@@ -17663,24 +17907,24 @@
                         <a:buNone/>
                       </a:pPr>
                       <a:r>
-                        <a:rPr lang="en-US" sz="1100" dirty="0">
+                        <a:rPr lang="en-US" sz="1050" b="1" dirty="0">
                           <a:solidFill>
-                            <a:srgbClr val="33344A"/>
+                            <a:srgbClr val="1E2761"/>
                           </a:solidFill>
                           <a:latin typeface="Calibri" pitchFamily="34" charset="0"/>
                           <a:ea typeface="Calibri" pitchFamily="34" charset="-122"/>
                           <a:cs typeface="Calibri" pitchFamily="34" charset="-120"/>
                         </a:rPr>
-                        <a:t>G doesn't get it</a:t>
+                        <a:t>μ̂₀</a:t>
                       </a:r>
-                      <a:endParaRPr lang="en-US" sz="1100" dirty="0">
+                      <a:endParaRPr lang="en-US" sz="1050" dirty="0">
                         <a:latin typeface="Calibri" charset="0"/>
                         <a:ea typeface="Calibri" charset="0"/>
                         <a:cs typeface="Calibri" charset="0"/>
                       </a:endParaRPr>
                     </a:p>
                   </a:txBody>
-                  <a:tcPr marL="54864" marR="54864" marT="36576" marB="36576" anchor="ctr">
+                  <a:tcPr marL="36576" marR="36576" marT="18288" marB="18288" anchor="ctr">
                     <a:lnL w="12700" cap="flat" cmpd="sng" algn="ctr">
                       <a:solidFill>
                         <a:srgbClr val="F0DFB0"/>
@@ -17719,6 +17963,314 @@
                     </a:lnB>
                     <a:solidFill>
                       <a:srgbClr val="FFFFFF"/>
+                    </a:solidFill>
+                  </a:tcPr>
+                </a:tc>
+              </a:tr>
+            </a:tbl>
+          </a:graphicData>
+        </a:graphic>
+      </p:graphicFrame>
+      <p:sp>
+        <p:nvSpPr>
+          <p:cNvPr id="15" name="Text 10"/>
+          <p:cNvSpPr txBox="1"/>
+          <p:nvPr/>
+        </p:nvSpPr>
+        <p:spPr>
+          <a:xfrm>
+            <a:off x="8961120" y="1993392"/>
+            <a:ext cx="365760" cy="384048"/>
+          </a:xfrm>
+          <a:prstGeom prst="rect">
+            <a:avLst/>
+          </a:prstGeom>
+          <a:noFill/>
+          <a:ln/>
+        </p:spPr>
+        <p:txBody>
+          <a:bodyPr wrap="square" lIns="0" tIns="0" rIns="0" bIns="0" rtlCol="0" anchor="ctr"/>
+          <a:lstStyle/>
+          <a:p>
+            <a:pPr algn="ctr" indent="0" marL="0">
+              <a:buNone/>
+            </a:pPr>
+            <a:r>
+              <a:rPr lang="en-US" sz="1600" b="1" dirty="0">
+                <a:solidFill>
+                  <a:srgbClr val="6B7280"/>
+                </a:solidFill>
+                <a:latin typeface="Calibri" pitchFamily="34" charset="0"/>
+                <a:ea typeface="Calibri" pitchFamily="34" charset="-122"/>
+                <a:cs typeface="Calibri" pitchFamily="34" charset="-120"/>
+              </a:rPr>
+              <a:t>→</a:t>
+            </a:r>
+            <a:endParaRPr lang="en-US" sz="1600" dirty="0"/>
+          </a:p>
+        </p:txBody>
+      </p:sp>
+      <p:graphicFrame>
+        <p:nvGraphicFramePr>
+          <p:cNvPr id="25" name="Table 3"/>
+          <p:cNvGraphicFramePr>
+            <a:graphicFrameLocks noGrp="1"/>
+          </p:cNvGraphicFramePr>
+          <p:nvPr>
+            <p:extLst>
+              <p:ext uri="{D42A27DB-BD31-4B8C-83A1-F6EECF244321}">
+                <p14:modId xmlns:p14="http://schemas.microsoft.com/office/powerpoint/2010/main" val="1579011935"/>
+              </p:ext>
+            </p:extLst>
+          </p:nvPr>
+        </p:nvGraphicFramePr>
+        <p:xfrm>
+          <a:off x="9326880" y="1993392"/>
+          <a:ext cx="1554480" cy="384048"/>
+        </p:xfrm>
+        <a:graphic>
+          <a:graphicData uri="http://schemas.openxmlformats.org/drawingml/2006/table">
+            <a:tbl>
+              <a:tblPr/>
+              <a:tblGrid>
+                <a:gridCol w="1554480"/>
+              </a:tblGrid>
+              <a:tr h="192024">
+                <a:tc>
+                  <a:txBody>
+                    <a:bodyPr/>
+                    <a:lstStyle/>
+                    <a:p>
+                      <a:pPr algn="ctr" indent="0" marL="0">
+                        <a:buNone/>
+                      </a:pPr>
+                      <a:r>
+                        <a:rPr lang="en-US" sz="850" b="1" dirty="0">
+                          <a:solidFill>
+                            <a:srgbClr val="FFFFFF"/>
+                          </a:solidFill>
+                          <a:latin typeface="Calibri" pitchFamily="34" charset="0"/>
+                          <a:ea typeface="Calibri" pitchFamily="34" charset="-122"/>
+                          <a:cs typeface="Calibri" pitchFamily="34" charset="-120"/>
+                        </a:rPr>
+                        <a:t>P(applied)</a:t>
+                      </a:r>
+                      <a:endParaRPr lang="en-US" sz="850" dirty="0">
+                        <a:latin typeface="Calibri" charset="0"/>
+                        <a:ea typeface="Calibri" charset="0"/>
+                        <a:cs typeface="Calibri" charset="0"/>
+                      </a:endParaRPr>
+                    </a:p>
+                  </a:txBody>
+                  <a:tcPr marL="36576" marR="36576" marT="18288" marB="18288" anchor="ctr">
+                    <a:lnL w="12700" cap="flat" cmpd="sng" algn="ctr">
+                      <a:solidFill>
+                        <a:srgbClr val="F0DFB0"/>
+                      </a:solidFill>
+                      <a:prstDash val="solid"/>
+                      <a:round/>
+                      <a:headEnd type="none" w="med" len="med"/>
+                      <a:tailEnd type="none" w="med" len="med"/>
+                    </a:lnL>
+                    <a:lnR w="12700" cap="flat" cmpd="sng" algn="ctr">
+                      <a:solidFill>
+                        <a:srgbClr val="F0DFB0"/>
+                      </a:solidFill>
+                      <a:prstDash val="solid"/>
+                      <a:round/>
+                      <a:headEnd type="none" w="med" len="med"/>
+                      <a:tailEnd type="none" w="med" len="med"/>
+                    </a:lnR>
+                    <a:lnT w="12700" cap="flat" cmpd="sng" algn="ctr">
+                      <a:solidFill>
+                        <a:srgbClr val="F0DFB0"/>
+                      </a:solidFill>
+                      <a:prstDash val="solid"/>
+                      <a:round/>
+                      <a:headEnd type="none" w="med" len="med"/>
+                      <a:tailEnd type="none" w="med" len="med"/>
+                    </a:lnT>
+                    <a:lnB w="12700" cap="flat" cmpd="sng" algn="ctr">
+                      <a:solidFill>
+                        <a:srgbClr val="F0DFB0"/>
+                      </a:solidFill>
+                      <a:prstDash val="solid"/>
+                      <a:round/>
+                      <a:headEnd type="none" w="med" len="med"/>
+                      <a:tailEnd type="none" w="med" len="med"/>
+                    </a:lnB>
+                    <a:solidFill>
+                      <a:srgbClr val="B8892B"/>
+                    </a:solidFill>
+                  </a:tcPr>
+                </a:tc>
+              </a:tr>
+              <a:tr h="192024">
+                <a:tc>
+                  <a:txBody>
+                    <a:bodyPr/>
+                    <a:lstStyle/>
+                    <a:p>
+                      <a:pPr algn="ctr" indent="0" marL="0">
+                        <a:buNone/>
+                      </a:pPr>
+                      <a:r>
+                        <a:rPr lang="en-US" sz="1250" b="1" dirty="0">
+                          <a:solidFill>
+                            <a:srgbClr val="141B4D"/>
+                          </a:solidFill>
+                          <a:latin typeface="Calibri" pitchFamily="34" charset="0"/>
+                          <a:ea typeface="Calibri" pitchFamily="34" charset="-122"/>
+                          <a:cs typeface="Calibri" pitchFamily="34" charset="-120"/>
+                        </a:rPr>
+                        <a:t>0.19</a:t>
+                      </a:r>
+                      <a:endParaRPr lang="en-US" sz="1250" dirty="0">
+                        <a:latin typeface="Calibri" charset="0"/>
+                        <a:ea typeface="Calibri" charset="0"/>
+                        <a:cs typeface="Calibri" charset="0"/>
+                      </a:endParaRPr>
+                    </a:p>
+                  </a:txBody>
+                  <a:tcPr marL="36576" marR="36576" marT="18288" marB="18288" anchor="ctr">
+                    <a:lnL w="12700" cap="flat" cmpd="sng" algn="ctr">
+                      <a:solidFill>
+                        <a:srgbClr val="F0DFB0"/>
+                      </a:solidFill>
+                      <a:prstDash val="solid"/>
+                      <a:round/>
+                      <a:headEnd type="none" w="med" len="med"/>
+                      <a:tailEnd type="none" w="med" len="med"/>
+                    </a:lnL>
+                    <a:lnR w="12700" cap="flat" cmpd="sng" algn="ctr">
+                      <a:solidFill>
+                        <a:srgbClr val="F0DFB0"/>
+                      </a:solidFill>
+                      <a:prstDash val="solid"/>
+                      <a:round/>
+                      <a:headEnd type="none" w="med" len="med"/>
+                      <a:tailEnd type="none" w="med" len="med"/>
+                    </a:lnR>
+                    <a:lnT w="12700" cap="flat" cmpd="sng" algn="ctr">
+                      <a:solidFill>
+                        <a:srgbClr val="F0DFB0"/>
+                      </a:solidFill>
+                      <a:prstDash val="solid"/>
+                      <a:round/>
+                      <a:headEnd type="none" w="med" len="med"/>
+                      <a:tailEnd type="none" w="med" len="med"/>
+                    </a:lnT>
+                    <a:lnB w="12700" cap="flat" cmpd="sng" algn="ctr">
+                      <a:solidFill>
+                        <a:srgbClr val="F0DFB0"/>
+                      </a:solidFill>
+                      <a:prstDash val="solid"/>
+                      <a:round/>
+                      <a:headEnd type="none" w="med" len="med"/>
+                      <a:tailEnd type="none" w="med" len="med"/>
+                    </a:lnB>
+                    <a:solidFill>
+                      <a:srgbClr val="FFFFFF"/>
+                    </a:solidFill>
+                  </a:tcPr>
+                </a:tc>
+              </a:tr>
+            </a:tbl>
+          </a:graphicData>
+        </a:graphic>
+      </p:graphicFrame>
+      <p:graphicFrame>
+        <p:nvGraphicFramePr>
+          <p:cNvPr id="31" name="Table 4"/>
+          <p:cNvGraphicFramePr>
+            <a:graphicFrameLocks noGrp="1"/>
+          </p:cNvGraphicFramePr>
+          <p:nvPr>
+            <p:extLst>
+              <p:ext uri="{D42A27DB-BD31-4B8C-83A1-F6EECF244321}">
+                <p14:modId xmlns:p14="http://schemas.microsoft.com/office/powerpoint/2010/main" val="1579011935"/>
+              </p:ext>
+            </p:extLst>
+          </p:nvPr>
+        </p:nvGraphicFramePr>
+        <p:xfrm>
+          <a:off x="6492240" y="2487168"/>
+          <a:ext cx="2468880" cy="384048"/>
+        </p:xfrm>
+        <a:graphic>
+          <a:graphicData uri="http://schemas.openxmlformats.org/drawingml/2006/table">
+            <a:tbl>
+              <a:tblPr/>
+              <a:tblGrid>
+                <a:gridCol w="839419"/>
+                <a:gridCol w="1629461"/>
+              </a:tblGrid>
+              <a:tr h="192024">
+                <a:tc>
+                  <a:txBody>
+                    <a:bodyPr/>
+                    <a:lstStyle/>
+                    <a:p>
+                      <a:pPr algn="ctr" indent="0" marL="0">
+                        <a:buNone/>
+                      </a:pPr>
+                      <a:r>
+                        <a:rPr lang="en-US" sz="850" b="1" dirty="0">
+                          <a:solidFill>
+                            <a:srgbClr val="FFFFFF"/>
+                          </a:solidFill>
+                          <a:latin typeface="Calibri" pitchFamily="34" charset="0"/>
+                          <a:ea typeface="Calibri" pitchFamily="34" charset="-122"/>
+                          <a:cs typeface="Calibri" pitchFamily="34" charset="-120"/>
+                        </a:rPr>
+                        <a:t>Customer</a:t>
+                      </a:r>
+                      <a:endParaRPr lang="en-US" sz="850" dirty="0">
+                        <a:latin typeface="Calibri" charset="0"/>
+                        <a:ea typeface="Calibri" charset="0"/>
+                        <a:cs typeface="Calibri" charset="0"/>
+                      </a:endParaRPr>
+                    </a:p>
+                  </a:txBody>
+                  <a:tcPr marL="36576" marR="36576" marT="18288" marB="18288" anchor="ctr">
+                    <a:lnL w="12700" cap="flat" cmpd="sng" algn="ctr">
+                      <a:solidFill>
+                        <a:srgbClr val="F0DFB0"/>
+                      </a:solidFill>
+                      <a:prstDash val="solid"/>
+                      <a:round/>
+                      <a:headEnd type="none" w="med" len="med"/>
+                      <a:tailEnd type="none" w="med" len="med"/>
+                    </a:lnL>
+                    <a:lnR w="12700" cap="flat" cmpd="sng" algn="ctr">
+                      <a:solidFill>
+                        <a:srgbClr val="F0DFB0"/>
+                      </a:solidFill>
+                      <a:prstDash val="solid"/>
+                      <a:round/>
+                      <a:headEnd type="none" w="med" len="med"/>
+                      <a:tailEnd type="none" w="med" len="med"/>
+                    </a:lnR>
+                    <a:lnT w="12700" cap="flat" cmpd="sng" algn="ctr">
+                      <a:solidFill>
+                        <a:srgbClr val="F0DFB0"/>
+                      </a:solidFill>
+                      <a:prstDash val="solid"/>
+                      <a:round/>
+                      <a:headEnd type="none" w="med" len="med"/>
+                      <a:tailEnd type="none" w="med" len="med"/>
+                    </a:lnT>
+                    <a:lnB w="12700" cap="flat" cmpd="sng" algn="ctr">
+                      <a:solidFill>
+                        <a:srgbClr val="F0DFB0"/>
+                      </a:solidFill>
+                      <a:prstDash val="solid"/>
+                      <a:round/>
+                      <a:headEnd type="none" w="med" len="med"/>
+                      <a:tailEnd type="none" w="med" len="med"/>
+                    </a:lnB>
+                    <a:solidFill>
+                      <a:srgbClr val="1E2761"/>
                     </a:solidFill>
                   </a:tcPr>
                 </a:tc>
@@ -17731,24 +18283,24 @@
                         <a:buNone/>
                       </a:pPr>
                       <a:r>
-                        <a:rPr lang="en-US" sz="1100" dirty="0">
+                        <a:rPr lang="en-US" sz="850" b="1" dirty="0">
                           <a:solidFill>
-                            <a:srgbClr val="33344A"/>
+                            <a:srgbClr val="FFFFFF"/>
                           </a:solidFill>
                           <a:latin typeface="Calibri" pitchFamily="34" charset="0"/>
                           <a:ea typeface="Calibri" pitchFamily="34" charset="-122"/>
                           <a:cs typeface="Calibri" pitchFamily="34" charset="-120"/>
                         </a:rPr>
-                        <a:t>0.19</a:t>
+                        <a:t>model</a:t>
                       </a:r>
-                      <a:endParaRPr lang="en-US" sz="1100" dirty="0">
+                      <a:endParaRPr lang="en-US" sz="850" dirty="0">
                         <a:latin typeface="Calibri" charset="0"/>
                         <a:ea typeface="Calibri" charset="0"/>
                         <a:cs typeface="Calibri" charset="0"/>
                       </a:endParaRPr>
                     </a:p>
                   </a:txBody>
-                  <a:tcPr marL="54864" marR="54864" marT="36576" marB="36576" anchor="ctr">
+                  <a:tcPr marL="36576" marR="36576" marT="18288" marB="18288" anchor="ctr">
                     <a:lnL w="12700" cap="flat" cmpd="sng" algn="ctr">
                       <a:solidFill>
                         <a:srgbClr val="F0DFB0"/>
@@ -17786,39 +18338,39 @@
                       <a:tailEnd type="none" w="med" len="med"/>
                     </a:lnB>
                     <a:solidFill>
-                      <a:srgbClr val="FFFFFF"/>
+                      <a:srgbClr val="1E2761"/>
                     </a:solidFill>
                   </a:tcPr>
                 </a:tc>
               </a:tr>
-              <a:tr h="336042">
+              <a:tr h="192024">
                 <a:tc>
                   <a:txBody>
                     <a:bodyPr/>
                     <a:lstStyle/>
                     <a:p>
-                      <a:pPr algn="l" indent="0" marL="0">
+                      <a:pPr algn="ctr" indent="0" marL="0">
                         <a:buNone/>
                       </a:pPr>
                       <a:r>
-                        <a:rPr lang="en-US" sz="1100" b="1" dirty="0">
+                        <a:rPr lang="en-US" sz="1050" b="1" dirty="0">
                           <a:solidFill>
-                            <a:srgbClr val="B8892B"/>
+                            <a:srgbClr val="1E2761"/>
                           </a:solidFill>
                           <a:latin typeface="Calibri" pitchFamily="34" charset="0"/>
                           <a:ea typeface="Calibri" pitchFamily="34" charset="-122"/>
                           <a:cs typeface="Calibri" pitchFamily="34" charset="-120"/>
                         </a:rPr>
-                        <a:t>μ̂₁ — treatment model</a:t>
+                        <a:t>G</a:t>
                       </a:r>
-                      <a:endParaRPr lang="en-US" sz="1100" dirty="0">
+                      <a:endParaRPr lang="en-US" sz="1050" dirty="0">
                         <a:latin typeface="Calibri" charset="0"/>
                         <a:ea typeface="Calibri" charset="0"/>
                         <a:cs typeface="Calibri" charset="0"/>
                       </a:endParaRPr>
                     </a:p>
                   </a:txBody>
-                  <a:tcPr marL="54864" marR="54864" marT="36576" marB="36576" anchor="ctr">
+                  <a:tcPr marL="36576" marR="36576" marT="18288" marB="18288" anchor="ctr">
                     <a:lnL w="12700" cap="flat" cmpd="sng" algn="ctr">
                       <a:solidFill>
                         <a:srgbClr val="F0DFB0"/>
@@ -17869,24 +18421,24 @@
                         <a:buNone/>
                       </a:pPr>
                       <a:r>
-                        <a:rPr lang="en-US" sz="1100" dirty="0">
+                        <a:rPr lang="en-US" sz="1050" b="1" dirty="0">
                           <a:solidFill>
-                            <a:srgbClr val="33344A"/>
+                            <a:srgbClr val="B8892B"/>
                           </a:solidFill>
                           <a:latin typeface="Calibri" pitchFamily="34" charset="0"/>
                           <a:ea typeface="Calibri" pitchFamily="34" charset="-122"/>
                           <a:cs typeface="Calibri" pitchFamily="34" charset="-120"/>
                         </a:rPr>
-                        <a:t>G gets the offer</a:t>
+                        <a:t>μ̂₁</a:t>
                       </a:r>
-                      <a:endParaRPr lang="en-US" sz="1100" dirty="0">
+                      <a:endParaRPr lang="en-US" sz="1050" dirty="0">
                         <a:latin typeface="Calibri" charset="0"/>
                         <a:ea typeface="Calibri" charset="0"/>
                         <a:cs typeface="Calibri" charset="0"/>
                       </a:endParaRPr>
                     </a:p>
                   </a:txBody>
-                  <a:tcPr marL="54864" marR="54864" marT="36576" marB="36576" anchor="ctr">
+                  <a:tcPr marL="36576" marR="36576" marT="18288" marB="18288" anchor="ctr">
                     <a:lnL w="12700" cap="flat" cmpd="sng" algn="ctr">
                       <a:solidFill>
                         <a:srgbClr val="F0DFB0"/>
@@ -17928,6 +18480,76 @@
                     </a:solidFill>
                   </a:tcPr>
                 </a:tc>
+              </a:tr>
+            </a:tbl>
+          </a:graphicData>
+        </a:graphic>
+      </p:graphicFrame>
+      <p:sp>
+        <p:nvSpPr>
+          <p:cNvPr id="18" name="Text 11"/>
+          <p:cNvSpPr txBox="1"/>
+          <p:nvPr/>
+        </p:nvSpPr>
+        <p:spPr>
+          <a:xfrm>
+            <a:off x="8961120" y="2487168"/>
+            <a:ext cx="365760" cy="384048"/>
+          </a:xfrm>
+          <a:prstGeom prst="rect">
+            <a:avLst/>
+          </a:prstGeom>
+          <a:noFill/>
+          <a:ln/>
+        </p:spPr>
+        <p:txBody>
+          <a:bodyPr wrap="square" lIns="0" tIns="0" rIns="0" bIns="0" rtlCol="0" anchor="ctr"/>
+          <a:lstStyle/>
+          <a:p>
+            <a:pPr algn="ctr" indent="0" marL="0">
+              <a:buNone/>
+            </a:pPr>
+            <a:r>
+              <a:rPr lang="en-US" sz="1600" b="1" dirty="0">
+                <a:solidFill>
+                  <a:srgbClr val="6B7280"/>
+                </a:solidFill>
+                <a:latin typeface="Calibri" pitchFamily="34" charset="0"/>
+                <a:ea typeface="Calibri" pitchFamily="34" charset="-122"/>
+                <a:cs typeface="Calibri" pitchFamily="34" charset="-120"/>
+              </a:rPr>
+              <a:t>→</a:t>
+            </a:r>
+            <a:endParaRPr lang="en-US" sz="1600" dirty="0"/>
+          </a:p>
+        </p:txBody>
+      </p:sp>
+      <p:graphicFrame>
+        <p:nvGraphicFramePr>
+          <p:cNvPr id="37" name="Table 5"/>
+          <p:cNvGraphicFramePr>
+            <a:graphicFrameLocks noGrp="1"/>
+          </p:cNvGraphicFramePr>
+          <p:nvPr>
+            <p:extLst>
+              <p:ext uri="{D42A27DB-BD31-4B8C-83A1-F6EECF244321}">
+                <p14:modId xmlns:p14="http://schemas.microsoft.com/office/powerpoint/2010/main" val="1579011935"/>
+              </p:ext>
+            </p:extLst>
+          </p:nvPr>
+        </p:nvGraphicFramePr>
+        <p:xfrm>
+          <a:off x="9326880" y="2487168"/>
+          <a:ext cx="1554480" cy="384048"/>
+        </p:xfrm>
+        <a:graphic>
+          <a:graphicData uri="http://schemas.openxmlformats.org/drawingml/2006/table">
+            <a:tbl>
+              <a:tblPr/>
+              <a:tblGrid>
+                <a:gridCol w="1554480"/>
+              </a:tblGrid>
+              <a:tr h="192024">
                 <a:tc>
                   <a:txBody>
                     <a:bodyPr/>
@@ -17937,77 +18559,7 @@
                         <a:buNone/>
                       </a:pPr>
                       <a:r>
-                        <a:rPr lang="en-US" sz="1100" dirty="0">
-                          <a:solidFill>
-                            <a:srgbClr val="33344A"/>
-                          </a:solidFill>
-                          <a:latin typeface="Calibri" pitchFamily="34" charset="0"/>
-                          <a:ea typeface="Calibri" pitchFamily="34" charset="-122"/>
-                          <a:cs typeface="Calibri" pitchFamily="34" charset="-120"/>
-                        </a:rPr>
-                        <a:t>0.35</a:t>
-                      </a:r>
-                      <a:endParaRPr lang="en-US" sz="1100" dirty="0">
-                        <a:latin typeface="Calibri" charset="0"/>
-                        <a:ea typeface="Calibri" charset="0"/>
-                        <a:cs typeface="Calibri" charset="0"/>
-                      </a:endParaRPr>
-                    </a:p>
-                  </a:txBody>
-                  <a:tcPr marL="54864" marR="54864" marT="36576" marB="36576" anchor="ctr">
-                    <a:lnL w="12700" cap="flat" cmpd="sng" algn="ctr">
-                      <a:solidFill>
-                        <a:srgbClr val="F0DFB0"/>
-                      </a:solidFill>
-                      <a:prstDash val="solid"/>
-                      <a:round/>
-                      <a:headEnd type="none" w="med" len="med"/>
-                      <a:tailEnd type="none" w="med" len="med"/>
-                    </a:lnL>
-                    <a:lnR w="12700" cap="flat" cmpd="sng" algn="ctr">
-                      <a:solidFill>
-                        <a:srgbClr val="F0DFB0"/>
-                      </a:solidFill>
-                      <a:prstDash val="solid"/>
-                      <a:round/>
-                      <a:headEnd type="none" w="med" len="med"/>
-                      <a:tailEnd type="none" w="med" len="med"/>
-                    </a:lnR>
-                    <a:lnT w="12700" cap="flat" cmpd="sng" algn="ctr">
-                      <a:solidFill>
-                        <a:srgbClr val="F0DFB0"/>
-                      </a:solidFill>
-                      <a:prstDash val="solid"/>
-                      <a:round/>
-                      <a:headEnd type="none" w="med" len="med"/>
-                      <a:tailEnd type="none" w="med" len="med"/>
-                    </a:lnT>
-                    <a:lnB w="12700" cap="flat" cmpd="sng" algn="ctr">
-                      <a:solidFill>
-                        <a:srgbClr val="F0DFB0"/>
-                      </a:solidFill>
-                      <a:prstDash val="solid"/>
-                      <a:round/>
-                      <a:headEnd type="none" w="med" len="med"/>
-                      <a:tailEnd type="none" w="med" len="med"/>
-                    </a:lnB>
-                    <a:solidFill>
-                      <a:srgbClr val="FBF3E1"/>
-                    </a:solidFill>
-                  </a:tcPr>
-                </a:tc>
-              </a:tr>
-              <a:tr h="336042">
-                <a:tc gridSpan="2">
-                  <a:txBody>
-                    <a:bodyPr/>
-                    <a:lstStyle/>
-                    <a:p>
-                      <a:pPr algn="l" indent="0" marL="0">
-                        <a:buNone/>
-                      </a:pPr>
-                      <a:r>
-                        <a:rPr lang="en-US" sz="1100" b="1" dirty="0">
+                        <a:rPr lang="en-US" sz="850" b="1" dirty="0">
                           <a:solidFill>
                             <a:srgbClr val="FFFFFF"/>
                           </a:solidFill>
@@ -18015,16 +18567,16 @@
                           <a:ea typeface="Calibri" pitchFamily="34" charset="-122"/>
                           <a:cs typeface="Calibri" pitchFamily="34" charset="-120"/>
                         </a:rPr>
-                        <a:t>τ(G) = μ̂₁(G) − μ̂₀(G)</a:t>
+                        <a:t>P(applied)</a:t>
                       </a:r>
-                      <a:endParaRPr lang="en-US" sz="1100" dirty="0">
+                      <a:endParaRPr lang="en-US" sz="850" dirty="0">
                         <a:latin typeface="Calibri" charset="0"/>
                         <a:ea typeface="Calibri" charset="0"/>
                         <a:cs typeface="Calibri" charset="0"/>
                       </a:endParaRPr>
                     </a:p>
                   </a:txBody>
-                  <a:tcPr marL="54864" marR="54864" marT="36576" marB="36576" anchor="ctr">
+                  <a:tcPr marL="36576" marR="36576" marT="18288" marB="18288" anchor="ctr">
                     <a:lnL w="12700" cap="flat" cmpd="sng" algn="ctr">
                       <a:solidFill>
                         <a:srgbClr val="F0DFB0"/>
@@ -18062,13 +18614,12 @@
                       <a:tailEnd type="none" w="med" len="med"/>
                     </a:lnB>
                     <a:solidFill>
-                      <a:srgbClr val="141B4D"/>
+                      <a:srgbClr val="B8892B"/>
                     </a:solidFill>
                   </a:tcPr>
                 </a:tc>
-                <a:tc hMerge="1">
-                  <a:tcPr/>
-                </a:tc>
+              </a:tr>
+              <a:tr h="192024">
                 <a:tc>
                   <a:txBody>
                     <a:bodyPr/>
@@ -18078,24 +18629,24 @@
                         <a:buNone/>
                       </a:pPr>
                       <a:r>
-                        <a:rPr lang="en-US" sz="1500" b="1" dirty="0">
+                        <a:rPr lang="en-US" sz="1250" b="1" dirty="0">
                           <a:solidFill>
-                            <a:srgbClr val="B8892B"/>
+                            <a:srgbClr val="141B4D"/>
                           </a:solidFill>
                           <a:latin typeface="Calibri" pitchFamily="34" charset="0"/>
                           <a:ea typeface="Calibri" pitchFamily="34" charset="-122"/>
                           <a:cs typeface="Calibri" pitchFamily="34" charset="-120"/>
                         </a:rPr>
-                        <a:t>0.16</a:t>
+                        <a:t>0.35</a:t>
                       </a:r>
-                      <a:endParaRPr lang="en-US" sz="1500" dirty="0">
+                      <a:endParaRPr lang="en-US" sz="1250" dirty="0">
                         <a:latin typeface="Calibri" charset="0"/>
                         <a:ea typeface="Calibri" charset="0"/>
                         <a:cs typeface="Calibri" charset="0"/>
                       </a:endParaRPr>
                     </a:p>
                   </a:txBody>
-                  <a:tcPr marL="54864" marR="54864" marT="36576" marB="36576" anchor="ctr">
+                  <a:tcPr marL="36576" marR="36576" marT="18288" marB="18288" anchor="ctr">
                     <a:lnL w="12700" cap="flat" cmpd="sng" algn="ctr">
                       <a:solidFill>
                         <a:srgbClr val="F0DFB0"/>
@@ -18133,7 +18684,7 @@
                       <a:tailEnd type="none" w="med" len="med"/>
                     </a:lnB>
                     <a:solidFill>
-                      <a:srgbClr val="141B4D"/>
+                      <a:srgbClr val="FBF3E1"/>
                     </a:solidFill>
                   </a:tcPr>
                 </a:tc>
@@ -18144,7 +18695,82 @@
       </p:graphicFrame>
       <p:sp>
         <p:nvSpPr>
-          <p:cNvPr id="15" name="Shape 10"/>
+          <p:cNvPr id="20" name="Shape 12"/>
+          <p:cNvSpPr/>
+          <p:nvPr/>
+        </p:nvSpPr>
+        <p:spPr>
+          <a:xfrm>
+            <a:off x="6492240" y="2962656"/>
+            <a:ext cx="4892040" cy="374904"/>
+          </a:xfrm>
+          <a:prstGeom prst="roundRect">
+            <a:avLst>
+              <a:gd name="adj" fmla="val 14634"/>
+            </a:avLst>
+          </a:prstGeom>
+          <a:solidFill>
+            <a:srgbClr val="141B4D"/>
+          </a:solidFill>
+          <a:ln/>
+        </p:spPr>
+      </p:sp>
+      <p:sp>
+        <p:nvSpPr>
+          <p:cNvPr id="21" name="Text 13"/>
+          <p:cNvSpPr txBox="1"/>
+          <p:nvPr/>
+        </p:nvSpPr>
+        <p:spPr>
+          <a:xfrm>
+            <a:off x="6675120" y="2962656"/>
+            <a:ext cx="4526280" cy="374904"/>
+          </a:xfrm>
+          <a:prstGeom prst="rect">
+            <a:avLst/>
+          </a:prstGeom>
+          <a:noFill/>
+          <a:ln/>
+        </p:spPr>
+        <p:txBody>
+          <a:bodyPr wrap="square" lIns="0" tIns="0" rIns="0" bIns="0" rtlCol="0" anchor="ctr"/>
+          <a:lstStyle/>
+          <a:p>
+            <a:pPr indent="0" marL="0">
+              <a:buNone/>
+            </a:pPr>
+            <a:r>
+              <a:rPr lang="en-US" sz="1150" b="1" dirty="0">
+                <a:solidFill>
+                  <a:srgbClr val="FFFFFF"/>
+                </a:solidFill>
+                <a:latin typeface="Calibri" pitchFamily="34" charset="0"/>
+                <a:ea typeface="Calibri" pitchFamily="34" charset="-122"/>
+                <a:cs typeface="Calibri" pitchFamily="34" charset="-120"/>
+              </a:rPr>
+              <a:t>τ(G) = μ̂₁(G) − μ̂₀(G) = 0.35 − 0.19 = </a:t>
+            </a:r>
+            <a:pPr indent="0" marL="0">
+              <a:buNone/>
+            </a:pPr>
+            <a:r>
+              <a:rPr lang="en-US" sz="1400" b="1" dirty="0">
+                <a:solidFill>
+                  <a:srgbClr val="B8892B"/>
+                </a:solidFill>
+                <a:latin typeface="Calibri" pitchFamily="34" charset="0"/>
+                <a:ea typeface="Calibri" pitchFamily="34" charset="-122"/>
+                <a:cs typeface="Calibri" pitchFamily="34" charset="-120"/>
+              </a:rPr>
+              <a:t>0.16</a:t>
+            </a:r>
+            <a:endParaRPr lang="en-US" sz="1150" dirty="0"/>
+          </a:p>
+        </p:txBody>
+      </p:sp>
+      <p:sp>
+        <p:nvSpPr>
+          <p:cNvPr id="22" name="Shape 14"/>
           <p:cNvSpPr/>
           <p:nvPr/>
         </p:nvSpPr>
@@ -18166,7 +18792,7 @@
       </p:sp>
       <p:sp>
         <p:nvSpPr>
-          <p:cNvPr id="16" name="Text 11"/>
+          <p:cNvPr id="23" name="Text 15"/>
           <p:cNvSpPr txBox="1"/>
           <p:nvPr/>
         </p:nvSpPr>
@@ -18205,7 +18831,7 @@
       </p:sp>
       <p:sp>
         <p:nvSpPr>
-          <p:cNvPr id="17" name="Text 12"/>
+          <p:cNvPr id="24" name="Text 16"/>
           <p:cNvSpPr txBox="1"/>
           <p:nvPr/>
         </p:nvSpPr>
@@ -18247,7 +18873,7 @@
       </p:sp>
       <p:sp>
         <p:nvSpPr>
-          <p:cNvPr id="18" name="Shape 13"/>
+          <p:cNvPr id="25" name="Shape 17"/>
           <p:cNvSpPr/>
           <p:nvPr/>
         </p:nvSpPr>
@@ -18269,7 +18895,7 @@
       </p:sp>
       <p:sp>
         <p:nvSpPr>
-          <p:cNvPr id="19" name="Text 14"/>
+          <p:cNvPr id="26" name="Text 18"/>
           <p:cNvSpPr txBox="1"/>
           <p:nvPr/>
         </p:nvSpPr>
@@ -18308,7 +18934,7 @@
       </p:sp>
       <p:sp>
         <p:nvSpPr>
-          <p:cNvPr id="20" name="Text 15"/>
+          <p:cNvPr id="27" name="Text 19"/>
           <p:cNvSpPr txBox="1"/>
           <p:nvPr/>
         </p:nvSpPr>
@@ -18350,7 +18976,7 @@
       </p:sp>
       <p:sp>
         <p:nvSpPr>
-          <p:cNvPr id="21" name="Shape 16"/>
+          <p:cNvPr id="28" name="Shape 20"/>
           <p:cNvSpPr/>
           <p:nvPr/>
         </p:nvSpPr>
@@ -18372,7 +18998,7 @@
       </p:sp>
       <p:sp>
         <p:nvSpPr>
-          <p:cNvPr id="22" name="Text 17"/>
+          <p:cNvPr id="29" name="Text 21"/>
           <p:cNvSpPr txBox="1"/>
           <p:nvPr/>
         </p:nvSpPr>
@@ -18431,7 +19057,7 @@
       </p:sp>
       <p:sp>
         <p:nvSpPr>
-          <p:cNvPr id="23" name="Text 18"/>
+          <p:cNvPr id="30" name="Text 22"/>
           <p:cNvSpPr txBox="1"/>
           <p:nvPr/>
         </p:nvSpPr>
@@ -18470,7 +19096,7 @@
       </p:sp>
       <p:sp>
         <p:nvSpPr>
-          <p:cNvPr id="24" name="Text 19"/>
+          <p:cNvPr id="31" name="Text 23"/>
           <p:cNvSpPr txBox="1"/>
           <p:nvPr/>
         </p:nvSpPr>

--- a/uplift_model_deck.pptx
+++ b/uplift_model_deck.pptx
@@ -18983,11 +18983,11 @@
         <p:spPr>
           <a:xfrm>
             <a:off x="548640" y="4983480"/>
-            <a:ext cx="11064240" cy="1051560"/>
+            <a:ext cx="11064240" cy="1188720"/>
           </a:xfrm>
           <a:prstGeom prst="roundRect">
             <a:avLst>
-              <a:gd name="adj" fmla="val 6957"/>
+              <a:gd name="adj" fmla="val 6154"/>
             </a:avLst>
           </a:prstGeom>
           <a:solidFill>
@@ -19005,7 +19005,7 @@
         <p:spPr>
           <a:xfrm>
             <a:off x="868680" y="4983480"/>
-            <a:ext cx="10424160" cy="1051560"/>
+            <a:ext cx="10424160" cy="1188720"/>
           </a:xfrm>
           <a:prstGeom prst="rect">
             <a:avLst/>
@@ -19019,12 +19019,12 @@
           <a:p>
             <a:pPr indent="0" marL="0">
               <a:lnSpc>
-                <a:spcPct val="120000"/>
+                <a:spcPct val="122000"/>
               </a:lnSpc>
               <a:buNone/>
             </a:pPr>
             <a:r>
-              <a:rPr lang="en-US" sz="1250" b="1" dirty="0">
+              <a:rPr lang="en-US" sz="1200" b="1" dirty="0">
                 <a:solidFill>
                   <a:srgbClr val="B8892B"/>
                 </a:solidFill>
@@ -19036,12 +19036,12 @@
             </a:r>
             <a:pPr indent="0" marL="0">
               <a:lnSpc>
-                <a:spcPct val="120000"/>
+                <a:spcPct val="122000"/>
               </a:lnSpc>
               <a:buNone/>
             </a:pPr>
             <a:r>
-              <a:rPr lang="en-US" sz="1250" dirty="0">
+              <a:rPr lang="en-US" sz="1200" dirty="0">
                 <a:solidFill>
                   <a:srgbClr val="FFFFFF"/>
                 </a:solidFill>
@@ -19049,9 +19049,43 @@
                 <a:ea typeface="Calibri" pitchFamily="34" charset="-122"/>
                 <a:cs typeface="Calibri" pitchFamily="34" charset="-120"/>
               </a:rPr>
-              <a:t>control is deliberately a small holdout — you can't withhold the offer from too many good prospects. That starves the control model exactly where T-Learner needs it most; its noise lands straight in every uplift score. Closing that gap is the reason X-Learner exists.</a:t>
-            </a:r>
-            <a:endParaRPr lang="en-US" sz="1250" dirty="0"/>
+              <a:t>T-Learner isn't broken by design — if control and treatment were roughly balanced (50/50), both models would have plenty of data and this would likely work fine. </a:t>
+            </a:r>
+            <a:pPr indent="0" marL="0">
+              <a:lnSpc>
+                <a:spcPct val="122000"/>
+              </a:lnSpc>
+              <a:buNone/>
+            </a:pPr>
+            <a:r>
+              <a:rPr lang="en-US" sz="1200" b="1" dirty="0">
+                <a:solidFill>
+                  <a:srgbClr val="C9D2F0"/>
+                </a:solidFill>
+                <a:latin typeface="Calibri" pitchFamily="34" charset="0"/>
+                <a:ea typeface="Calibri" pitchFamily="34" charset="-122"/>
+                <a:cs typeface="Calibri" pitchFamily="34" charset="-120"/>
+              </a:rPr>
+              <a:t>The problem is our specific setup: </a:t>
+            </a:r>
+            <a:pPr indent="0" marL="0">
+              <a:lnSpc>
+                <a:spcPct val="122000"/>
+              </a:lnSpc>
+              <a:buNone/>
+            </a:pPr>
+            <a:r>
+              <a:rPr lang="en-US" sz="1200" dirty="0">
+                <a:solidFill>
+                  <a:srgbClr val="FFFFFF"/>
+                </a:solidFill>
+                <a:latin typeface="Calibri" pitchFamily="34" charset="0"/>
+                <a:ea typeface="Calibri" pitchFamily="34" charset="-122"/>
+                <a:cs typeface="Calibri" pitchFamily="34" charset="-120"/>
+              </a:rPr>
+              <a:t>control is deliberately a small holdout — you can't withhold the offer from too many good prospects. That imbalance starves the control model exactly where T-Learner needs it most, and its noise lands straight in every uplift score. Closing that imbalance gap is the reason X-Learner exists.</a:t>
+            </a:r>
+            <a:endParaRPr lang="en-US" sz="1200" dirty="0"/>
           </a:p>
         </p:txBody>
       </p:sp>

--- a/uplift_model_deck.pptx
+++ b/uplift_model_deck.pptx
@@ -2690,7 +2690,7 @@
                 <a:ea typeface="Courier New" pitchFamily="34" charset="-122"/>
                 <a:cs typeface="Courier New" pitchFamily="34" charset="-120"/>
               </a:rPr>
-              <a:t>D̃ᵢᶠ = μ̂₁(Xᵢ) − Yᵢ</a:t>
+              <a:t>D̃ᵢᶜ = μ̂₁(Xᵢ) − Appliedᵢ</a:t>
             </a:r>
             <a:endParaRPr lang="en-US" sz="1500" dirty="0"/>
           </a:p>
@@ -2751,7 +2751,7 @@
                 <a:ea typeface="Courier New" pitchFamily="34" charset="-122"/>
                 <a:cs typeface="Courier New" pitchFamily="34" charset="-120"/>
               </a:rPr>
-              <a:t>D̃ᵢᵀ = Yᵢ − μ̂₀(Xᵢ)</a:t>
+              <a:t>D̃ᵢᵀ = Appliedᵢ − μ̂₀(Xᵢ)</a:t>
             </a:r>
             <a:endParaRPr lang="en-US" sz="1500" dirty="0"/>
           </a:p>
@@ -3017,7 +3017,7 @@
                           <a:ea typeface="Calibri" pitchFamily="34" charset="-122"/>
                           <a:cs typeface="Calibri" pitchFamily="34" charset="-120"/>
                         </a:rPr>
-                        <a:t>Y</a:t>
+                        <a:t>Applied</a:t>
                       </a:r>
                       <a:endParaRPr lang="en-US" sz="1300" dirty="0">
                         <a:latin typeface="Calibri" charset="0"/>
@@ -3085,7 +3085,7 @@
                           <a:ea typeface="Calibri" pitchFamily="34" charset="-122"/>
                           <a:cs typeface="Calibri" pitchFamily="34" charset="-120"/>
                         </a:rPr>
-                        <a:t>D̃ᶜ = μ̂₁ − Y</a:t>
+                        <a:t>D̃ᶜ</a:t>
                       </a:r>
                       <a:endParaRPr lang="en-US" sz="1300" dirty="0">
                         <a:latin typeface="Calibri" charset="0"/>
@@ -4077,7 +4077,7 @@
                           <a:ea typeface="Calibri" pitchFamily="34" charset="-122"/>
                           <a:cs typeface="Calibri" pitchFamily="34" charset="-120"/>
                         </a:rPr>
-                        <a:t>Y</a:t>
+                        <a:t>Applied</a:t>
                       </a:r>
                       <a:endParaRPr lang="en-US" sz="1300" dirty="0">
                         <a:latin typeface="Calibri" charset="0"/>
@@ -4213,7 +4213,7 @@
                           <a:ea typeface="Calibri" pitchFamily="34" charset="-122"/>
                           <a:cs typeface="Calibri" pitchFamily="34" charset="-120"/>
                         </a:rPr>
-                        <a:t>D̃ᵀ = Y − μ̂₀</a:t>
+                        <a:t>D̃ᵀ</a:t>
                       </a:r>
                       <a:endParaRPr lang="en-US" sz="1300" dirty="0">
                         <a:latin typeface="Calibri" charset="0"/>
@@ -5487,7 +5487,7 @@
                 <a:ea typeface="Calibri" pitchFamily="34" charset="-122"/>
                 <a:cs typeface="Calibri" pitchFamily="34" charset="-120"/>
               </a:rPr>
-              <a:t>A is control, so A's real Y and its counterfactual μ̂₁(A) build a control-side pseudo effect. That label trains effect model C only. A never contributes a label to effect model T's training set.</a:t>
+              <a:t>A is control, so A's real Applied outcome and its counterfactual μ̂₁(A) build a control-side pseudo effect. That label trains effect model C only. A never contributes a label to effect model T's training set.</a:t>
             </a:r>
             <a:endParaRPr lang="en-US" sz="1250" dirty="0"/>
           </a:p>
@@ -11375,7 +11375,7 @@
                 <a:ea typeface="Calibri" pitchFamily="34" charset="-122"/>
                 <a:cs typeface="Calibri" pitchFamily="34" charset="-120"/>
               </a:rPr>
-              <a:t>Y = 1 if the customer applies for the credit card, 0 if not.  T = 1 if they received the prescreen mail offer (treatment), 0 if they were held out (control).</a:t>
+              <a:t>Y (our Applied column) = 1 if the customer applies for the credit card, 0 if not.  T (our receive_offer column) = 1 if they received the prescreen mail offer (treatment), 0 if held out (control).</a:t>
             </a:r>
             <a:endParaRPr lang="en-US" sz="1150" dirty="0"/>
           </a:p>
@@ -12223,7 +12223,7 @@
                 <a:ea typeface="Calibri" pitchFamily="34" charset="-122"/>
                 <a:cs typeface="Calibri" pitchFamily="34" charset="-120"/>
               </a:rPr>
-              <a:t>One model, is_treated (got the offer, 1/0) as just another input feature. τ(x) = f(x,1) − f(x,0), where 1/0 flips whether the offer was sent.</a:t>
+              <a:t>One model, receive_offer (got the offer, 1/0) as just another input feature. τ(x) = f(x,1) − f(x,0), where 1/0 flips whether the offer was sent.</a:t>
             </a:r>
             <a:endParaRPr lang="en-US" sz="1300" dirty="0"/>
           </a:p>
@@ -12432,7 +12432,7 @@
                 <a:ea typeface="Calibri" pitchFamily="34" charset="-122"/>
                 <a:cs typeface="Calibri" pitchFamily="34" charset="-120"/>
               </a:rPr>
-              <a:t>Two fully separate models, one per arm. τ(x) = μ₁(x) − μ₀(x), where μ₁ is the offer-group model and μ₀ is the no-offer (control) model.</a:t>
+              <a:t>Two fully separate models, one per arm. τ(x) = μ̂₁(x) − μ̂₀(x), where μ̂₁ is the offer-group model and μ̂₀ is the no-offer (control) model.</a:t>
             </a:r>
             <a:endParaRPr lang="en-US" sz="1300" dirty="0"/>
           </a:p>
@@ -12702,7 +12702,7 @@
                 <a:ea typeface="Calibri" pitchFamily="34" charset="-122"/>
                 <a:cs typeface="Calibri" pitchFamily="34" charset="-120"/>
               </a:rPr>
-              <a:t>Two outcome models feed two effect models, combined by a weight g(x). Same Y (applied?) and is_treated (got the offer?) as above.</a:t>
+              <a:t>Two outcome models feed two effect models, combined by a weight g(x). Same Applied and receive_offer columns as above.</a:t>
             </a:r>
             <a:endParaRPr lang="en-US" sz="1300" dirty="0"/>
           </a:p>
@@ -12976,45 +12976,6 @@
           </a:p>
         </p:txBody>
       </p:sp>
-      <p:sp>
-        <p:nvSpPr>
-          <p:cNvPr id="6" name="Text 4"/>
-          <p:cNvSpPr txBox="1"/>
-          <p:nvPr/>
-        </p:nvSpPr>
-        <p:spPr>
-          <a:xfrm>
-            <a:off x="777240" y="1773936"/>
-            <a:ext cx="4892040" cy="201168"/>
-          </a:xfrm>
-          <a:prstGeom prst="rect">
-            <a:avLst/>
-          </a:prstGeom>
-          <a:noFill/>
-          <a:ln/>
-        </p:spPr>
-        <p:txBody>
-          <a:bodyPr wrap="square" lIns="0" tIns="0" rIns="0" bIns="0" rtlCol="0" anchor="ctr"/>
-          <a:lstStyle/>
-          <a:p>
-            <a:pPr indent="0" marL="0">
-              <a:buNone/>
-            </a:pPr>
-            <a:r>
-              <a:rPr lang="en-US" sz="900" i="1" dirty="0">
-                <a:solidFill>
-                  <a:srgbClr val="6B7280"/>
-                </a:solidFill>
-                <a:latin typeface="Calibri" pitchFamily="34" charset="0"/>
-                <a:ea typeface="Calibri" pitchFamily="34" charset="-122"/>
-                <a:cs typeface="Calibri" pitchFamily="34" charset="-120"/>
-              </a:rPr>
-              <a:t>is_treated: 1 = got the prescreen offer, 0 = control  ·  Y: 1 = applied for the card, 0 = didn't</a:t>
-            </a:r>
-            <a:endParaRPr lang="en-US" sz="900" dirty="0"/>
-          </a:p>
-        </p:txBody>
-      </p:sp>
       <p:graphicFrame>
         <p:nvGraphicFramePr>
           <p:cNvPr id="6" name="Table 0"/>
@@ -13030,19 +12991,19 @@
           </p:nvPr>
         </p:nvGraphicFramePr>
         <p:xfrm>
-          <a:off x="777240" y="1993392"/>
-          <a:ext cx="4892040" cy="1344168"/>
+          <a:off x="777240" y="1828800"/>
+          <a:ext cx="4892040" cy="1508760"/>
         </p:xfrm>
         <a:graphic>
           <a:graphicData uri="http://schemas.openxmlformats.org/drawingml/2006/table">
             <a:tbl>
               <a:tblPr/>
               <a:tblGrid>
-                <a:gridCol w="1858975"/>
+                <a:gridCol w="1663294"/>
+                <a:gridCol w="1663294"/>
                 <a:gridCol w="1565453"/>
-                <a:gridCol w="1467612"/>
               </a:tblGrid>
-              <a:tr h="192024">
+              <a:tr h="215537">
                 <a:tc>
                   <a:txBody>
                     <a:bodyPr/>
@@ -13128,7 +13089,7 @@
                           <a:ea typeface="Calibri" pitchFamily="34" charset="-122"/>
                           <a:cs typeface="Calibri" pitchFamily="34" charset="-120"/>
                         </a:rPr>
-                        <a:t>is_treated</a:t>
+                        <a:t>receive_offer</a:t>
                       </a:r>
                       <a:endParaRPr lang="en-US" sz="1050" dirty="0">
                         <a:latin typeface="Calibri" charset="0"/>
@@ -13196,7 +13157,7 @@
                           <a:ea typeface="Calibri" pitchFamily="34" charset="-122"/>
                           <a:cs typeface="Calibri" pitchFamily="34" charset="-120"/>
                         </a:rPr>
-                        <a:t>Y</a:t>
+                        <a:t>Applied</a:t>
                       </a:r>
                       <a:endParaRPr lang="en-US" sz="1050" dirty="0">
                         <a:latin typeface="Calibri" charset="0"/>
@@ -13248,7 +13209,7 @@
                   </a:tcPr>
                 </a:tc>
               </a:tr>
-              <a:tr h="192024">
+              <a:tr h="215537">
                 <a:tc>
                   <a:txBody>
                     <a:bodyPr/>
@@ -13454,7 +13415,7 @@
                   </a:tcPr>
                 </a:tc>
               </a:tr>
-              <a:tr h="192024">
+              <a:tr h="215537">
                 <a:tc>
                   <a:txBody>
                     <a:bodyPr/>
@@ -13660,7 +13621,7 @@
                   </a:tcPr>
                 </a:tc>
               </a:tr>
-              <a:tr h="192024">
+              <a:tr h="215537">
                 <a:tc>
                   <a:txBody>
                     <a:bodyPr/>
@@ -13866,7 +13827,7 @@
                   </a:tcPr>
                 </a:tc>
               </a:tr>
-              <a:tr h="192024">
+              <a:tr h="215537">
                 <a:tc>
                   <a:txBody>
                     <a:bodyPr/>
@@ -14072,7 +14033,7 @@
                   </a:tcPr>
                 </a:tc>
               </a:tr>
-              <a:tr h="192024">
+              <a:tr h="215537">
                 <a:tc>
                   <a:txBody>
                     <a:bodyPr/>
@@ -14278,7 +14239,7 @@
                   </a:tcPr>
                 </a:tc>
               </a:tr>
-              <a:tr h="192024">
+              <a:tr h="215537">
                 <a:tc>
                   <a:txBody>
                     <a:bodyPr/>
@@ -14490,7 +14451,7 @@
       </p:graphicFrame>
       <p:sp>
         <p:nvSpPr>
-          <p:cNvPr id="8" name="Shape 5"/>
+          <p:cNvPr id="7" name="Shape 4"/>
           <p:cNvSpPr/>
           <p:nvPr/>
         </p:nvSpPr>
@@ -14517,7 +14478,7 @@
       </p:sp>
       <p:sp>
         <p:nvSpPr>
-          <p:cNvPr id="9" name="Text 6"/>
+          <p:cNvPr id="8" name="Text 5"/>
           <p:cNvSpPr txBox="1"/>
           <p:nvPr/>
         </p:nvSpPr>
@@ -14565,45 +14526,6 @@
               <a:t>one model, run for BOTH mailing scenarios on customer G</a:t>
             </a:r>
             <a:endParaRPr lang="en-US" sz="1100" dirty="0"/>
-          </a:p>
-        </p:txBody>
-      </p:sp>
-      <p:sp>
-        <p:nvSpPr>
-          <p:cNvPr id="10" name="Text 7"/>
-          <p:cNvSpPr txBox="1"/>
-          <p:nvPr/>
-        </p:nvSpPr>
-        <p:spPr>
-          <a:xfrm>
-            <a:off x="6492240" y="1773936"/>
-            <a:ext cx="4892040" cy="201168"/>
-          </a:xfrm>
-          <a:prstGeom prst="rect">
-            <a:avLst/>
-          </a:prstGeom>
-          <a:noFill/>
-          <a:ln/>
-        </p:spPr>
-        <p:txBody>
-          <a:bodyPr wrap="square" lIns="0" tIns="0" rIns="0" bIns="0" rtlCol="0" anchor="ctr"/>
-          <a:lstStyle/>
-          <a:p>
-            <a:pPr indent="0" marL="0">
-              <a:buNone/>
-            </a:pPr>
-            <a:r>
-              <a:rPr lang="en-US" sz="900" i="1" dirty="0">
-                <a:solidFill>
-                  <a:srgbClr val="6B7280"/>
-                </a:solidFill>
-                <a:latin typeface="Calibri" pitchFamily="34" charset="0"/>
-                <a:ea typeface="Calibri" pitchFamily="34" charset="-122"/>
-                <a:cs typeface="Calibri" pitchFamily="34" charset="-120"/>
-              </a:rPr>
-              <a:t>Two separate scoring calls — each with its own input table and output table</a:t>
-            </a:r>
-            <a:endParaRPr lang="en-US" sz="900" dirty="0"/>
           </a:p>
         </p:txBody>
       </p:sp>
@@ -14622,8 +14544,8 @@
           </p:nvPr>
         </p:nvGraphicFramePr>
         <p:xfrm>
-          <a:off x="6492240" y="1993392"/>
-          <a:ext cx="2286000" cy="384048"/>
+          <a:off x="6492240" y="1828800"/>
+          <a:ext cx="2286000" cy="420624"/>
         </p:xfrm>
         <a:graphic>
           <a:graphicData uri="http://schemas.openxmlformats.org/drawingml/2006/table">
@@ -14633,7 +14555,7 @@
                 <a:gridCol w="1028700"/>
                 <a:gridCol w="1257300"/>
               </a:tblGrid>
-              <a:tr h="192024">
+              <a:tr h="210312">
                 <a:tc>
                   <a:txBody>
                     <a:bodyPr/>
@@ -14771,7 +14693,7 @@
                   </a:tcPr>
                 </a:tc>
               </a:tr>
-              <a:tr h="192024">
+              <a:tr h="210312">
                 <a:tc>
                   <a:txBody>
                     <a:bodyPr/>
@@ -14915,14 +14837,14 @@
       </p:graphicFrame>
       <p:sp>
         <p:nvSpPr>
-          <p:cNvPr id="12" name="Text 8"/>
+          <p:cNvPr id="10" name="Text 6"/>
           <p:cNvSpPr txBox="1"/>
           <p:nvPr/>
         </p:nvSpPr>
         <p:spPr>
           <a:xfrm>
-            <a:off x="8778240" y="1993392"/>
-            <a:ext cx="365760" cy="384048"/>
+            <a:off x="8778240" y="1828800"/>
+            <a:ext cx="365760" cy="420624"/>
           </a:xfrm>
           <a:prstGeom prst="rect">
             <a:avLst/>
@@ -14967,8 +14889,8 @@
           </p:nvPr>
         </p:nvGraphicFramePr>
         <p:xfrm>
-          <a:off x="9144000" y="1993392"/>
-          <a:ext cx="1554480" cy="384048"/>
+          <a:off x="9144000" y="1828800"/>
+          <a:ext cx="1554480" cy="420624"/>
         </p:xfrm>
         <a:graphic>
           <a:graphicData uri="http://schemas.openxmlformats.org/drawingml/2006/table">
@@ -14977,7 +14899,7 @@
               <a:tblGrid>
                 <a:gridCol w="1554480"/>
               </a:tblGrid>
-              <a:tr h="192024">
+              <a:tr h="210312">
                 <a:tc>
                   <a:txBody>
                     <a:bodyPr/>
@@ -14995,7 +14917,7 @@
                           <a:ea typeface="Calibri" pitchFamily="34" charset="-122"/>
                           <a:cs typeface="Calibri" pitchFamily="34" charset="-120"/>
                         </a:rPr>
-                        <a:t>P(applied)</a:t>
+                        <a:t>Applied</a:t>
                       </a:r>
                       <a:endParaRPr lang="en-US" sz="850" dirty="0">
                         <a:latin typeface="Calibri" charset="0"/>
@@ -15047,7 +14969,7 @@
                   </a:tcPr>
                 </a:tc>
               </a:tr>
-              <a:tr h="192024">
+              <a:tr h="210312">
                 <a:tc>
                   <a:txBody>
                     <a:bodyPr/>
@@ -15136,8 +15058,8 @@
           </p:nvPr>
         </p:nvGraphicFramePr>
         <p:xfrm>
-          <a:off x="6492240" y="2487168"/>
-          <a:ext cx="2286000" cy="384048"/>
+          <a:off x="6492240" y="2368296"/>
+          <a:ext cx="2286000" cy="420624"/>
         </p:xfrm>
         <a:graphic>
           <a:graphicData uri="http://schemas.openxmlformats.org/drawingml/2006/table">
@@ -15147,7 +15069,7 @@
                 <a:gridCol w="1028700"/>
                 <a:gridCol w="1257300"/>
               </a:tblGrid>
-              <a:tr h="192024">
+              <a:tr h="210312">
                 <a:tc>
                   <a:txBody>
                     <a:bodyPr/>
@@ -15285,7 +15207,7 @@
                   </a:tcPr>
                 </a:tc>
               </a:tr>
-              <a:tr h="192024">
+              <a:tr h="210312">
                 <a:tc>
                   <a:txBody>
                     <a:bodyPr/>
@@ -15429,14 +15351,14 @@
       </p:graphicFrame>
       <p:sp>
         <p:nvSpPr>
-          <p:cNvPr id="15" name="Text 9"/>
+          <p:cNvPr id="13" name="Text 7"/>
           <p:cNvSpPr txBox="1"/>
           <p:nvPr/>
         </p:nvSpPr>
         <p:spPr>
           <a:xfrm>
-            <a:off x="8778240" y="2487168"/>
-            <a:ext cx="365760" cy="384048"/>
+            <a:off x="8778240" y="2368296"/>
+            <a:ext cx="365760" cy="420624"/>
           </a:xfrm>
           <a:prstGeom prst="rect">
             <a:avLst/>
@@ -15481,8 +15403,8 @@
           </p:nvPr>
         </p:nvGraphicFramePr>
         <p:xfrm>
-          <a:off x="9144000" y="2487168"/>
-          <a:ext cx="1554480" cy="384048"/>
+          <a:off x="9144000" y="2368296"/>
+          <a:ext cx="1554480" cy="420624"/>
         </p:xfrm>
         <a:graphic>
           <a:graphicData uri="http://schemas.openxmlformats.org/drawingml/2006/table">
@@ -15491,7 +15413,7 @@
               <a:tblGrid>
                 <a:gridCol w="1554480"/>
               </a:tblGrid>
-              <a:tr h="192024">
+              <a:tr h="210312">
                 <a:tc>
                   <a:txBody>
                     <a:bodyPr/>
@@ -15509,7 +15431,7 @@
                           <a:ea typeface="Calibri" pitchFamily="34" charset="-122"/>
                           <a:cs typeface="Calibri" pitchFamily="34" charset="-120"/>
                         </a:rPr>
-                        <a:t>P(applied)</a:t>
+                        <a:t>Applied</a:t>
                       </a:r>
                       <a:endParaRPr lang="en-US" sz="850" dirty="0">
                         <a:latin typeface="Calibri" charset="0"/>
@@ -15561,7 +15483,7 @@
                   </a:tcPr>
                 </a:tc>
               </a:tr>
-              <a:tr h="192024">
+              <a:tr h="210312">
                 <a:tc>
                   <a:txBody>
                     <a:bodyPr/>
@@ -15637,18 +15559,18 @@
       </p:graphicFrame>
       <p:sp>
         <p:nvSpPr>
-          <p:cNvPr id="17" name="Shape 10"/>
+          <p:cNvPr id="15" name="Shape 8"/>
           <p:cNvSpPr/>
           <p:nvPr/>
         </p:nvSpPr>
         <p:spPr>
           <a:xfrm>
-            <a:off x="6492240" y="2962656"/>
-            <a:ext cx="4892040" cy="374904"/>
+            <a:off x="6492240" y="2898648"/>
+            <a:ext cx="4892040" cy="438912"/>
           </a:xfrm>
           <a:prstGeom prst="roundRect">
             <a:avLst>
-              <a:gd name="adj" fmla="val 14634"/>
+              <a:gd name="adj" fmla="val 12500"/>
             </a:avLst>
           </a:prstGeom>
           <a:solidFill>
@@ -15659,14 +15581,14 @@
       </p:sp>
       <p:sp>
         <p:nvSpPr>
-          <p:cNvPr id="18" name="Text 11"/>
+          <p:cNvPr id="16" name="Text 9"/>
           <p:cNvSpPr txBox="1"/>
           <p:nvPr/>
         </p:nvSpPr>
         <p:spPr>
           <a:xfrm>
-            <a:off x="6675120" y="2962656"/>
-            <a:ext cx="4526280" cy="374904"/>
+            <a:off x="6675120" y="2898648"/>
+            <a:ext cx="4526280" cy="438912"/>
           </a:xfrm>
           <a:prstGeom prst="rect">
             <a:avLst/>
@@ -15712,7 +15634,7 @@
       </p:sp>
       <p:sp>
         <p:nvSpPr>
-          <p:cNvPr id="19" name="Shape 12"/>
+          <p:cNvPr id="17" name="Shape 10"/>
           <p:cNvSpPr/>
           <p:nvPr/>
         </p:nvSpPr>
@@ -15734,7 +15656,7 @@
       </p:sp>
       <p:sp>
         <p:nvSpPr>
-          <p:cNvPr id="20" name="Text 13"/>
+          <p:cNvPr id="18" name="Text 11"/>
           <p:cNvSpPr txBox="1"/>
           <p:nvPr/>
         </p:nvSpPr>
@@ -15773,7 +15695,7 @@
       </p:sp>
       <p:sp>
         <p:nvSpPr>
-          <p:cNvPr id="21" name="Text 14"/>
+          <p:cNvPr id="19" name="Text 12"/>
           <p:cNvSpPr txBox="1"/>
           <p:nvPr/>
         </p:nvSpPr>
@@ -15807,7 +15729,7 @@
                 <a:ea typeface="Calibri" pitchFamily="34" charset="-122"/>
                 <a:cs typeface="Calibri" pitchFamily="34" charset="-120"/>
               </a:rPr>
-              <a:t>One model to build and monitor. Pools all customers, so it's data-efficient when the control holdout is small.</a:t>
+              <a:t>One model to build and monitor. Pools all customers, so it's data-efficient even with a small treatment group.</a:t>
             </a:r>
             <a:endParaRPr lang="en-US" sz="1150" dirty="0"/>
           </a:p>
@@ -15815,7 +15737,7 @@
       </p:sp>
       <p:sp>
         <p:nvSpPr>
-          <p:cNvPr id="22" name="Shape 15"/>
+          <p:cNvPr id="20" name="Shape 13"/>
           <p:cNvSpPr/>
           <p:nvPr/>
         </p:nvSpPr>
@@ -15837,7 +15759,7 @@
       </p:sp>
       <p:sp>
         <p:nvSpPr>
-          <p:cNvPr id="23" name="Text 16"/>
+          <p:cNvPr id="21" name="Text 14"/>
           <p:cNvSpPr txBox="1"/>
           <p:nvPr/>
         </p:nvSpPr>
@@ -15876,7 +15798,7 @@
       </p:sp>
       <p:sp>
         <p:nvSpPr>
-          <p:cNvPr id="24" name="Text 17"/>
+          <p:cNvPr id="22" name="Text 15"/>
           <p:cNvSpPr txBox="1"/>
           <p:nvPr/>
         </p:nvSpPr>
@@ -15910,7 +15832,7 @@
                 <a:ea typeface="Calibri" pitchFamily="34" charset="-122"/>
                 <a:cs typeface="Calibri" pitchFamily="34" charset="-120"/>
               </a:rPr>
-              <a:t>Regularization has no reason to favor one is_treated feature over dozens of stronger predictors — treatment can get nearly ignored.</a:t>
+              <a:t>Regularization has no reason to favor one receive_offer feature over dozens of stronger predictors — treatment can get nearly ignored.</a:t>
             </a:r>
             <a:endParaRPr lang="en-US" sz="1150" dirty="0"/>
           </a:p>
@@ -15918,7 +15840,7 @@
       </p:sp>
       <p:sp>
         <p:nvSpPr>
-          <p:cNvPr id="25" name="Shape 18"/>
+          <p:cNvPr id="23" name="Shape 16"/>
           <p:cNvSpPr/>
           <p:nvPr/>
         </p:nvSpPr>
@@ -15940,7 +15862,7 @@
       </p:sp>
       <p:sp>
         <p:nvSpPr>
-          <p:cNvPr id="26" name="Text 19"/>
+          <p:cNvPr id="24" name="Text 17"/>
           <p:cNvSpPr txBox="1"/>
           <p:nvPr/>
         </p:nvSpPr>
@@ -15991,7 +15913,7 @@
                 <a:ea typeface="Calibri" pitchFamily="34" charset="-122"/>
                 <a:cs typeface="Calibri" pitchFamily="34" charset="-120"/>
               </a:rPr>
-              <a:t>baseline behavioral features — utilization, tenure, balances — predict response far better than the offer itself. A pooled model leans on those and treats is_treated as noise, exactly the risk we can't take when isolating the offer's effect is the whole point.</a:t>
+              <a:t>baseline behavioral features — utilization, tenure, balances — predict response far better than the offer itself. A pooled model leans on those and treats receive_offer as noise, exactly the risk we can't take when isolating the offer's effect is the whole point.</a:t>
             </a:r>
             <a:endParaRPr lang="en-US" sz="1250" dirty="0"/>
           </a:p>
@@ -15999,7 +15921,7 @@
       </p:sp>
       <p:sp>
         <p:nvSpPr>
-          <p:cNvPr id="27" name="Text 20"/>
+          <p:cNvPr id="25" name="Text 18"/>
           <p:cNvSpPr txBox="1"/>
           <p:nvPr/>
         </p:nvSpPr>
@@ -16038,7 +15960,7 @@
       </p:sp>
       <p:sp>
         <p:nvSpPr>
-          <p:cNvPr id="28" name="Text 21"/>
+          <p:cNvPr id="26" name="Text 19"/>
           <p:cNvSpPr txBox="1"/>
           <p:nvPr/>
         </p:nvSpPr>
@@ -16273,46 +16195,7 @@
         </p:nvSpPr>
         <p:spPr>
           <a:xfrm>
-            <a:off x="777240" y="1773936"/>
-            <a:ext cx="4892040" cy="201168"/>
-          </a:xfrm>
-          <a:prstGeom prst="rect">
-            <a:avLst/>
-          </a:prstGeom>
-          <a:noFill/>
-          <a:ln/>
-        </p:spPr>
-        <p:txBody>
-          <a:bodyPr wrap="square" lIns="0" tIns="0" rIns="0" bIns="0" rtlCol="0" anchor="ctr"/>
-          <a:lstStyle/>
-          <a:p>
-            <a:pPr indent="0" marL="0">
-              <a:buNone/>
-            </a:pPr>
-            <a:r>
-              <a:rPr lang="en-US" sz="900" i="1" dirty="0">
-                <a:solidFill>
-                  <a:srgbClr val="6B7280"/>
-                </a:solidFill>
-                <a:latin typeface="Calibri" pitchFamily="34" charset="0"/>
-                <a:ea typeface="Calibri" pitchFamily="34" charset="-122"/>
-                <a:cs typeface="Calibri" pitchFamily="34" charset="-120"/>
-              </a:rPr>
-              <a:t>Control = A, B, C — did NOT get the offer/coupon.  Treatment = D, E, F — DID get the offer/coupon. Y: 1 = applied, 0 = didn't.</a:t>
-            </a:r>
-            <a:endParaRPr lang="en-US" sz="900" dirty="0"/>
-          </a:p>
-        </p:txBody>
-      </p:sp>
-      <p:sp>
-        <p:nvSpPr>
-          <p:cNvPr id="7" name="Text 5"/>
-          <p:cNvSpPr txBox="1"/>
-          <p:nvPr/>
-        </p:nvSpPr>
-        <p:spPr>
-          <a:xfrm>
-            <a:off x="777240" y="2011680"/>
+            <a:off x="777240" y="1828800"/>
             <a:ext cx="2354580" cy="219456"/>
           </a:xfrm>
           <a:prstGeom prst="rect">
@@ -16358,18 +16241,18 @@
           </p:nvPr>
         </p:nvGraphicFramePr>
         <p:xfrm>
-          <a:off x="777240" y="2231136"/>
-          <a:ext cx="2354580" cy="1106424"/>
+          <a:off x="777240" y="2048256"/>
+          <a:ext cx="2354580" cy="1289304"/>
         </p:xfrm>
         <a:graphic>
           <a:graphicData uri="http://schemas.openxmlformats.org/drawingml/2006/table">
             <a:tbl>
               <a:tblPr/>
               <a:tblGrid>
-                <a:gridCol w="1295019"/>
-                <a:gridCol w="1059561"/>
+                <a:gridCol w="1177290"/>
+                <a:gridCol w="1177290"/>
               </a:tblGrid>
-              <a:tr h="276606">
+              <a:tr h="322326">
                 <a:tc>
                   <a:txBody>
                     <a:bodyPr/>
@@ -16455,7 +16338,7 @@
                           <a:ea typeface="Calibri" pitchFamily="34" charset="-122"/>
                           <a:cs typeface="Calibri" pitchFamily="34" charset="-120"/>
                         </a:rPr>
-                        <a:t>Y</a:t>
+                        <a:t>Applied</a:t>
                       </a:r>
                       <a:endParaRPr lang="en-US" sz="1050" dirty="0">
                         <a:latin typeface="Calibri" charset="0"/>
@@ -16507,7 +16390,7 @@
                   </a:tcPr>
                 </a:tc>
               </a:tr>
-              <a:tr h="276606">
+              <a:tr h="322326">
                 <a:tc>
                   <a:txBody>
                     <a:bodyPr/>
@@ -16645,7 +16528,7 @@
                   </a:tcPr>
                 </a:tc>
               </a:tr>
-              <a:tr h="276606">
+              <a:tr h="322326">
                 <a:tc>
                   <a:txBody>
                     <a:bodyPr/>
@@ -16783,7 +16666,7 @@
                   </a:tcPr>
                 </a:tc>
               </a:tr>
-              <a:tr h="276606">
+              <a:tr h="322326">
                 <a:tc>
                   <a:txBody>
                     <a:bodyPr/>
@@ -16927,13 +16810,13 @@
       </p:graphicFrame>
       <p:sp>
         <p:nvSpPr>
-          <p:cNvPr id="9" name="Text 6"/>
+          <p:cNvPr id="8" name="Text 5"/>
           <p:cNvSpPr txBox="1"/>
           <p:nvPr/>
         </p:nvSpPr>
         <p:spPr>
           <a:xfrm>
-            <a:off x="3314700" y="2011680"/>
+            <a:off x="3314700" y="1828800"/>
             <a:ext cx="2354580" cy="219456"/>
           </a:xfrm>
           <a:prstGeom prst="rect">
@@ -16979,18 +16862,18 @@
           </p:nvPr>
         </p:nvGraphicFramePr>
         <p:xfrm>
-          <a:off x="3314700" y="2231136"/>
-          <a:ext cx="2354580" cy="1106424"/>
+          <a:off x="3314700" y="2048256"/>
+          <a:ext cx="2354580" cy="1289304"/>
         </p:xfrm>
         <a:graphic>
           <a:graphicData uri="http://schemas.openxmlformats.org/drawingml/2006/table">
             <a:tbl>
               <a:tblPr/>
               <a:tblGrid>
-                <a:gridCol w="1295019"/>
-                <a:gridCol w="1059561"/>
+                <a:gridCol w="1177290"/>
+                <a:gridCol w="1177290"/>
               </a:tblGrid>
-              <a:tr h="276606">
+              <a:tr h="322326">
                 <a:tc>
                   <a:txBody>
                     <a:bodyPr/>
@@ -17076,7 +16959,7 @@
                           <a:ea typeface="Calibri" pitchFamily="34" charset="-122"/>
                           <a:cs typeface="Calibri" pitchFamily="34" charset="-120"/>
                         </a:rPr>
-                        <a:t>Y</a:t>
+                        <a:t>Applied</a:t>
                       </a:r>
                       <a:endParaRPr lang="en-US" sz="1050" dirty="0">
                         <a:latin typeface="Calibri" charset="0"/>
@@ -17128,7 +17011,7 @@
                   </a:tcPr>
                 </a:tc>
               </a:tr>
-              <a:tr h="276606">
+              <a:tr h="322326">
                 <a:tc>
                   <a:txBody>
                     <a:bodyPr/>
@@ -17266,7 +17149,7 @@
                   </a:tcPr>
                 </a:tc>
               </a:tr>
-              <a:tr h="276606">
+              <a:tr h="322326">
                 <a:tc>
                   <a:txBody>
                     <a:bodyPr/>
@@ -17404,7 +17287,7 @@
                   </a:tcPr>
                 </a:tc>
               </a:tr>
-              <a:tr h="276606">
+              <a:tr h="322326">
                 <a:tc>
                   <a:txBody>
                     <a:bodyPr/>
@@ -17548,7 +17431,7 @@
       </p:graphicFrame>
       <p:sp>
         <p:nvSpPr>
-          <p:cNvPr id="11" name="Shape 7"/>
+          <p:cNvPr id="10" name="Shape 6"/>
           <p:cNvSpPr/>
           <p:nvPr/>
         </p:nvSpPr>
@@ -17575,7 +17458,7 @@
       </p:sp>
       <p:sp>
         <p:nvSpPr>
-          <p:cNvPr id="12" name="Text 8"/>
+          <p:cNvPr id="11" name="Text 7"/>
           <p:cNvSpPr txBox="1"/>
           <p:nvPr/>
         </p:nvSpPr>
@@ -17623,45 +17506,6 @@
               <a:t>each model scores customer G under ITS OWN scenario</a:t>
             </a:r>
             <a:endParaRPr lang="en-US" sz="1100" dirty="0"/>
-          </a:p>
-        </p:txBody>
-      </p:sp>
-      <p:sp>
-        <p:nvSpPr>
-          <p:cNvPr id="13" name="Text 9"/>
-          <p:cNvSpPr txBox="1"/>
-          <p:nvPr/>
-        </p:nvSpPr>
-        <p:spPr>
-          <a:xfrm>
-            <a:off x="6492240" y="1773936"/>
-            <a:ext cx="4892040" cy="201168"/>
-          </a:xfrm>
-          <a:prstGeom prst="rect">
-            <a:avLst/>
-          </a:prstGeom>
-          <a:noFill/>
-          <a:ln/>
-        </p:spPr>
-        <p:txBody>
-          <a:bodyPr wrap="square" lIns="0" tIns="0" rIns="0" bIns="0" rtlCol="0" anchor="ctr"/>
-          <a:lstStyle/>
-          <a:p>
-            <a:pPr indent="0" marL="0">
-              <a:buNone/>
-            </a:pPr>
-            <a:r>
-              <a:rPr lang="en-US" sz="900" i="1" dirty="0">
-                <a:solidFill>
-                  <a:srgbClr val="6B7280"/>
-                </a:solidFill>
-                <a:latin typeface="Calibri" pitchFamily="34" charset="0"/>
-                <a:ea typeface="Calibri" pitchFamily="34" charset="-122"/>
-                <a:cs typeface="Calibri" pitchFamily="34" charset="-120"/>
-              </a:rPr>
-              <a:t>Two separate scoring calls — each with its own input table and output table</a:t>
-            </a:r>
-            <a:endParaRPr lang="en-US" sz="900" dirty="0"/>
           </a:p>
         </p:txBody>
       </p:sp>
@@ -17680,8 +17524,8 @@
           </p:nvPr>
         </p:nvGraphicFramePr>
         <p:xfrm>
-          <a:off x="6492240" y="1993392"/>
-          <a:ext cx="2468880" cy="384048"/>
+          <a:off x="6492240" y="1828800"/>
+          <a:ext cx="2468880" cy="420624"/>
         </p:xfrm>
         <a:graphic>
           <a:graphicData uri="http://schemas.openxmlformats.org/drawingml/2006/table">
@@ -17691,7 +17535,7 @@
                 <a:gridCol w="839419"/>
                 <a:gridCol w="1629461"/>
               </a:tblGrid>
-              <a:tr h="192024">
+              <a:tr h="210312">
                 <a:tc>
                   <a:txBody>
                     <a:bodyPr/>
@@ -17829,7 +17673,7 @@
                   </a:tcPr>
                 </a:tc>
               </a:tr>
-              <a:tr h="192024">
+              <a:tr h="210312">
                 <a:tc>
                   <a:txBody>
                     <a:bodyPr/>
@@ -17973,14 +17817,14 @@
       </p:graphicFrame>
       <p:sp>
         <p:nvSpPr>
-          <p:cNvPr id="15" name="Text 10"/>
+          <p:cNvPr id="13" name="Text 8"/>
           <p:cNvSpPr txBox="1"/>
           <p:nvPr/>
         </p:nvSpPr>
         <p:spPr>
           <a:xfrm>
-            <a:off x="8961120" y="1993392"/>
-            <a:ext cx="365760" cy="384048"/>
+            <a:off x="8961120" y="1828800"/>
+            <a:ext cx="365760" cy="420624"/>
           </a:xfrm>
           <a:prstGeom prst="rect">
             <a:avLst/>
@@ -18025,8 +17869,8 @@
           </p:nvPr>
         </p:nvGraphicFramePr>
         <p:xfrm>
-          <a:off x="9326880" y="1993392"/>
-          <a:ext cx="1554480" cy="384048"/>
+          <a:off x="9326880" y="1828800"/>
+          <a:ext cx="1554480" cy="420624"/>
         </p:xfrm>
         <a:graphic>
           <a:graphicData uri="http://schemas.openxmlformats.org/drawingml/2006/table">
@@ -18035,7 +17879,7 @@
               <a:tblGrid>
                 <a:gridCol w="1554480"/>
               </a:tblGrid>
-              <a:tr h="192024">
+              <a:tr h="210312">
                 <a:tc>
                   <a:txBody>
                     <a:bodyPr/>
@@ -18053,7 +17897,7 @@
                           <a:ea typeface="Calibri" pitchFamily="34" charset="-122"/>
                           <a:cs typeface="Calibri" pitchFamily="34" charset="-120"/>
                         </a:rPr>
-                        <a:t>P(applied)</a:t>
+                        <a:t>Applied</a:t>
                       </a:r>
                       <a:endParaRPr lang="en-US" sz="850" dirty="0">
                         <a:latin typeface="Calibri" charset="0"/>
@@ -18105,7 +17949,7 @@
                   </a:tcPr>
                 </a:tc>
               </a:tr>
-              <a:tr h="192024">
+              <a:tr h="210312">
                 <a:tc>
                   <a:txBody>
                     <a:bodyPr/>
@@ -18194,8 +18038,8 @@
           </p:nvPr>
         </p:nvGraphicFramePr>
         <p:xfrm>
-          <a:off x="6492240" y="2487168"/>
-          <a:ext cx="2468880" cy="384048"/>
+          <a:off x="6492240" y="2368296"/>
+          <a:ext cx="2468880" cy="420624"/>
         </p:xfrm>
         <a:graphic>
           <a:graphicData uri="http://schemas.openxmlformats.org/drawingml/2006/table">
@@ -18205,7 +18049,7 @@
                 <a:gridCol w="839419"/>
                 <a:gridCol w="1629461"/>
               </a:tblGrid>
-              <a:tr h="192024">
+              <a:tr h="210312">
                 <a:tc>
                   <a:txBody>
                     <a:bodyPr/>
@@ -18343,7 +18187,7 @@
                   </a:tcPr>
                 </a:tc>
               </a:tr>
-              <a:tr h="192024">
+              <a:tr h="210312">
                 <a:tc>
                   <a:txBody>
                     <a:bodyPr/>
@@ -18487,14 +18331,14 @@
       </p:graphicFrame>
       <p:sp>
         <p:nvSpPr>
-          <p:cNvPr id="18" name="Text 11"/>
+          <p:cNvPr id="16" name="Text 9"/>
           <p:cNvSpPr txBox="1"/>
           <p:nvPr/>
         </p:nvSpPr>
         <p:spPr>
           <a:xfrm>
-            <a:off x="8961120" y="2487168"/>
-            <a:ext cx="365760" cy="384048"/>
+            <a:off x="8961120" y="2368296"/>
+            <a:ext cx="365760" cy="420624"/>
           </a:xfrm>
           <a:prstGeom prst="rect">
             <a:avLst/>
@@ -18539,8 +18383,8 @@
           </p:nvPr>
         </p:nvGraphicFramePr>
         <p:xfrm>
-          <a:off x="9326880" y="2487168"/>
-          <a:ext cx="1554480" cy="384048"/>
+          <a:off x="9326880" y="2368296"/>
+          <a:ext cx="1554480" cy="420624"/>
         </p:xfrm>
         <a:graphic>
           <a:graphicData uri="http://schemas.openxmlformats.org/drawingml/2006/table">
@@ -18549,7 +18393,7 @@
               <a:tblGrid>
                 <a:gridCol w="1554480"/>
               </a:tblGrid>
-              <a:tr h="192024">
+              <a:tr h="210312">
                 <a:tc>
                   <a:txBody>
                     <a:bodyPr/>
@@ -18567,7 +18411,7 @@
                           <a:ea typeface="Calibri" pitchFamily="34" charset="-122"/>
                           <a:cs typeface="Calibri" pitchFamily="34" charset="-120"/>
                         </a:rPr>
-                        <a:t>P(applied)</a:t>
+                        <a:t>Applied</a:t>
                       </a:r>
                       <a:endParaRPr lang="en-US" sz="850" dirty="0">
                         <a:latin typeface="Calibri" charset="0"/>
@@ -18619,7 +18463,7 @@
                   </a:tcPr>
                 </a:tc>
               </a:tr>
-              <a:tr h="192024">
+              <a:tr h="210312">
                 <a:tc>
                   <a:txBody>
                     <a:bodyPr/>
@@ -18695,18 +18539,18 @@
       </p:graphicFrame>
       <p:sp>
         <p:nvSpPr>
-          <p:cNvPr id="20" name="Shape 12"/>
+          <p:cNvPr id="18" name="Shape 10"/>
           <p:cNvSpPr/>
           <p:nvPr/>
         </p:nvSpPr>
         <p:spPr>
           <a:xfrm>
-            <a:off x="6492240" y="2962656"/>
-            <a:ext cx="4892040" cy="374904"/>
+            <a:off x="6492240" y="2898648"/>
+            <a:ext cx="4892040" cy="438912"/>
           </a:xfrm>
           <a:prstGeom prst="roundRect">
             <a:avLst>
-              <a:gd name="adj" fmla="val 14634"/>
+              <a:gd name="adj" fmla="val 12500"/>
             </a:avLst>
           </a:prstGeom>
           <a:solidFill>
@@ -18717,14 +18561,14 @@
       </p:sp>
       <p:sp>
         <p:nvSpPr>
-          <p:cNvPr id="21" name="Text 13"/>
+          <p:cNvPr id="19" name="Text 11"/>
           <p:cNvSpPr txBox="1"/>
           <p:nvPr/>
         </p:nvSpPr>
         <p:spPr>
           <a:xfrm>
-            <a:off x="6675120" y="2962656"/>
-            <a:ext cx="4526280" cy="374904"/>
+            <a:off x="6675120" y="2898648"/>
+            <a:ext cx="4526280" cy="438912"/>
           </a:xfrm>
           <a:prstGeom prst="rect">
             <a:avLst/>
@@ -18770,7 +18614,7 @@
       </p:sp>
       <p:sp>
         <p:nvSpPr>
-          <p:cNvPr id="22" name="Shape 14"/>
+          <p:cNvPr id="20" name="Shape 12"/>
           <p:cNvSpPr/>
           <p:nvPr/>
         </p:nvSpPr>
@@ -18792,7 +18636,7 @@
       </p:sp>
       <p:sp>
         <p:nvSpPr>
-          <p:cNvPr id="23" name="Text 15"/>
+          <p:cNvPr id="21" name="Text 13"/>
           <p:cNvSpPr txBox="1"/>
           <p:nvPr/>
         </p:nvSpPr>
@@ -18831,7 +18675,7 @@
       </p:sp>
       <p:sp>
         <p:nvSpPr>
-          <p:cNvPr id="24" name="Text 16"/>
+          <p:cNvPr id="22" name="Text 14"/>
           <p:cNvSpPr txBox="1"/>
           <p:nvPr/>
         </p:nvSpPr>
@@ -18873,7 +18717,7 @@
       </p:sp>
       <p:sp>
         <p:nvSpPr>
-          <p:cNvPr id="25" name="Shape 17"/>
+          <p:cNvPr id="23" name="Shape 15"/>
           <p:cNvSpPr/>
           <p:nvPr/>
         </p:nvSpPr>
@@ -18895,7 +18739,7 @@
       </p:sp>
       <p:sp>
         <p:nvSpPr>
-          <p:cNvPr id="26" name="Text 18"/>
+          <p:cNvPr id="24" name="Text 16"/>
           <p:cNvSpPr txBox="1"/>
           <p:nvPr/>
         </p:nvSpPr>
@@ -18934,7 +18778,7 @@
       </p:sp>
       <p:sp>
         <p:nvSpPr>
-          <p:cNvPr id="27" name="Text 19"/>
+          <p:cNvPr id="25" name="Text 17"/>
           <p:cNvSpPr txBox="1"/>
           <p:nvPr/>
         </p:nvSpPr>
@@ -18976,7 +18820,7 @@
       </p:sp>
       <p:sp>
         <p:nvSpPr>
-          <p:cNvPr id="28" name="Shape 20"/>
+          <p:cNvPr id="26" name="Shape 18"/>
           <p:cNvSpPr/>
           <p:nvPr/>
         </p:nvSpPr>
@@ -18998,7 +18842,7 @@
       </p:sp>
       <p:sp>
         <p:nvSpPr>
-          <p:cNvPr id="29" name="Text 21"/>
+          <p:cNvPr id="27" name="Text 19"/>
           <p:cNvSpPr txBox="1"/>
           <p:nvPr/>
         </p:nvSpPr>
@@ -19049,7 +18893,7 @@
                 <a:ea typeface="Calibri" pitchFamily="34" charset="-122"/>
                 <a:cs typeface="Calibri" pitchFamily="34" charset="-120"/>
               </a:rPr>
-              <a:t>T-Learner isn't broken by design — if control and treatment were roughly balanced (50/50), both models would have plenty of data and this would likely work fine. </a:t>
+              <a:t>T-Learner isn't broken by design — if receive_offer were roughly 50/50, μ̂₀ and μ̂₁ would train on comparable sample sizes and subtracting two similarly-precise models wouldn't cost much. </a:t>
             </a:r>
             <a:pPr indent="0" marL="0">
               <a:lnSpc>
@@ -19083,7 +18927,7 @@
                 <a:ea typeface="Calibri" pitchFamily="34" charset="-122"/>
                 <a:cs typeface="Calibri" pitchFamily="34" charset="-120"/>
               </a:rPr>
-              <a:t>control is deliberately a small holdout — you can't withhold the offer from too many good prospects. That imbalance starves the control model exactly where T-Learner needs it most, and its noise lands straight in every uplift score. Closing that imbalance gap is the reason X-Learner exists.</a:t>
+              <a:t>about 70% of customers are held-out control (no offer) and only ~30% receive the mailed offer — you can't afford to mail everyone in a live campaign. That imbalance starves μ̂₁, the offer-side model, exactly where T-Learner needs it most: τ(x)=μ̂₁(x)−μ̂₀(x) inherits nearly all of μ̂₁'s extra noise. Closing that gap without needing a bigger treatment group is the reason X-Learner exists.</a:t>
             </a:r>
             <a:endParaRPr lang="en-US" sz="1200" dirty="0"/>
           </a:p>
@@ -19091,7 +18935,7 @@
       </p:sp>
       <p:sp>
         <p:nvSpPr>
-          <p:cNvPr id="30" name="Text 22"/>
+          <p:cNvPr id="28" name="Text 20"/>
           <p:cNvSpPr txBox="1"/>
           <p:nvPr/>
         </p:nvSpPr>
@@ -19130,7 +18974,7 @@
       </p:sp>
       <p:sp>
         <p:nvSpPr>
-          <p:cNvPr id="31" name="Text 23"/>
+          <p:cNvPr id="29" name="Text 21"/>
           <p:cNvSpPr txBox="1"/>
           <p:nvPr/>
         </p:nvSpPr>
@@ -19672,7 +19516,7 @@
                           <a:ea typeface="Calibri" pitchFamily="34" charset="-122"/>
                           <a:cs typeface="Calibri" pitchFamily="34" charset="-120"/>
                         </a:rPr>
-                        <a:t>Implicit — read off one shared model's treatment term</a:t>
+                        <a:t>Implicit — read off one shared model's receive_offer term</a:t>
                       </a:r>
                       <a:endParaRPr lang="en-US" sz="1200" dirty="0">
                         <a:latin typeface="Calibri" charset="0"/>
@@ -20172,7 +20016,7 @@
                           <a:ea typeface="Calibri" pitchFamily="34" charset="-122"/>
                           <a:cs typeface="Calibri" pitchFamily="34" charset="-120"/>
                         </a:rPr>
-                        <a:t>e.g. a small control holdout</a:t>
+                        <a:t>e.g. a small treatment group</a:t>
                       </a:r>
                       <a:endParaRPr lang="en-US" sz="1200" dirty="0">
                         <a:latin typeface="Calibri" charset="0"/>
@@ -20631,7 +20475,7 @@
                 <a:ea typeface="Calibri" pitchFamily="34" charset="-122"/>
                 <a:cs typeface="Calibri" pitchFamily="34" charset="-120"/>
               </a:rPr>
-              <a:t>control is deliberately a small holdout — you can't withhold the offer from too many good prospects. That's exactly T-Learner's weak point. X-Learner's imputation step lets the small arm's effect model borrow strength from the large arm's well-estimated outcome model.</a:t>
+              <a:t>about 70% of customers are held-out control (no offer) and only ~30% receive the mailed offer — you can't afford to mail everyone in a live campaign. That's exactly T-Learner's weak point: μ̂₁, the offer-side model, is trained on the smaller group and is noisy. X-Learner's imputation step lets the offer-side effect estimate borrow strength from the reliable, well-estimated control-side model instead.</a:t>
             </a:r>
             <a:endParaRPr lang="en-US" sz="1300" dirty="0"/>
           </a:p>
@@ -21202,7 +21046,7 @@
                 <a:ea typeface="Calibri" pitchFamily="34" charset="-122"/>
                 <a:cs typeface="Calibri" pitchFamily="34" charset="-120"/>
               </a:rPr>
-              <a:t>Counterfactual predictions turn Y into an imputed effect</a:t>
+              <a:t>Counterfactual predictions turn Applied into an imputed effect</a:t>
             </a:r>
             <a:endParaRPr lang="en-US" sz="1150" dirty="0"/>
           </a:p>
@@ -22166,7 +22010,7 @@
                           <a:ea typeface="Calibri" pitchFamily="34" charset="-122"/>
                           <a:cs typeface="Calibri" pitchFamily="34" charset="-120"/>
                         </a:rPr>
-                        <a:t>True Arm</a:t>
+                        <a:t>receive_offer</a:t>
                       </a:r>
                       <a:endParaRPr lang="en-US" sz="1250" dirty="0">
                         <a:latin typeface="Calibri" charset="0"/>
@@ -22234,7 +22078,7 @@
                           <a:ea typeface="Calibri" pitchFamily="34" charset="-122"/>
                           <a:cs typeface="Calibri" pitchFamily="34" charset="-120"/>
                         </a:rPr>
-                        <a:t>True Y</a:t>
+                        <a:t>Applied</a:t>
                       </a:r>
                       <a:endParaRPr lang="en-US" sz="1250" dirty="0">
                         <a:latin typeface="Calibri" charset="0"/>
@@ -22323,7 +22167,7 @@
                           <a:ea typeface="Calibri" pitchFamily="34" charset="-122"/>
                           <a:cs typeface="Calibri" pitchFamily="34" charset="-120"/>
                         </a:rPr>
-                        <a:t>control prediction</a:t>
+                        <a:t>pred. Applied, no offer</a:t>
                       </a:r>
                       <a:endParaRPr lang="en-US" sz="1250" dirty="0">
                         <a:latin typeface="Calibri" charset="0"/>
@@ -22412,7 +22256,7 @@
                           <a:ea typeface="Calibri" pitchFamily="34" charset="-122"/>
                           <a:cs typeface="Calibri" pitchFamily="34" charset="-120"/>
                         </a:rPr>
-                        <a:t>treatment prediction</a:t>
+                        <a:t>pred. Applied, w/ offer</a:t>
                       </a:r>
                       <a:endParaRPr lang="en-US" sz="1250" dirty="0">
                         <a:latin typeface="Calibri" charset="0"/>
@@ -22550,7 +22394,7 @@
                           <a:ea typeface="Calibri" pitchFamily="34" charset="-122"/>
                           <a:cs typeface="Calibri" pitchFamily="34" charset="-120"/>
                         </a:rPr>
-                        <a:t>Control</a:t>
+                        <a:t>0 (control)</a:t>
                       </a:r>
                       <a:endParaRPr lang="en-US" sz="1250" dirty="0">
                         <a:latin typeface="Calibri" charset="0"/>
@@ -22892,7 +22736,7 @@
                           <a:ea typeface="Calibri" pitchFamily="34" charset="-122"/>
                           <a:cs typeface="Calibri" pitchFamily="34" charset="-120"/>
                         </a:rPr>
-                        <a:t>Control</a:t>
+                        <a:t>0 (control)</a:t>
                       </a:r>
                       <a:endParaRPr lang="en-US" sz="1250" dirty="0">
                         <a:latin typeface="Calibri" charset="0"/>
@@ -23234,7 +23078,7 @@
                           <a:ea typeface="Calibri" pitchFamily="34" charset="-122"/>
                           <a:cs typeface="Calibri" pitchFamily="34" charset="-120"/>
                         </a:rPr>
-                        <a:t>Control</a:t>
+                        <a:t>0 (control)</a:t>
                       </a:r>
                       <a:endParaRPr lang="en-US" sz="1250" dirty="0">
                         <a:latin typeface="Calibri" charset="0"/>
@@ -23576,7 +23420,7 @@
                           <a:ea typeface="Calibri" pitchFamily="34" charset="-122"/>
                           <a:cs typeface="Calibri" pitchFamily="34" charset="-120"/>
                         </a:rPr>
-                        <a:t>Treatment</a:t>
+                        <a:t>1 (offer sent)</a:t>
                       </a:r>
                       <a:endParaRPr lang="en-US" sz="1250" dirty="0">
                         <a:latin typeface="Calibri" charset="0"/>
@@ -23918,7 +23762,7 @@
                           <a:ea typeface="Calibri" pitchFamily="34" charset="-122"/>
                           <a:cs typeface="Calibri" pitchFamily="34" charset="-120"/>
                         </a:rPr>
-                        <a:t>Treatment</a:t>
+                        <a:t>1 (offer sent)</a:t>
                       </a:r>
                       <a:endParaRPr lang="en-US" sz="1250" dirty="0">
                         <a:latin typeface="Calibri" charset="0"/>
@@ -24260,7 +24104,7 @@
                           <a:ea typeface="Calibri" pitchFamily="34" charset="-122"/>
                           <a:cs typeface="Calibri" pitchFamily="34" charset="-120"/>
                         </a:rPr>
-                        <a:t>Treatment</a:t>
+                        <a:t>1 (offer sent)</a:t>
                       </a:r>
                       <a:endParaRPr lang="en-US" sz="1250" dirty="0">
                         <a:latin typeface="Calibri" charset="0"/>

--- a/uplift_model_deck.pptx
+++ b/uplift_model_deck.pptx
@@ -1224,15 +1224,15 @@
               <a:rPr lang="en-US" dirty="0"/>
               <a:t>1-minute Chinese answer (verbatim, for rehearsal):
 X-learner 的流程是这样的：
-1. 先把历史实验数据分成 treatment 和 control 两组，分别训练两个 outcome model，一个学有 offer 时的结果，一个学没 offer 时的结果。
+1. 先把历史实验数据分成 treatment（新 offer）和 control（旧 offer）两组，分别训练两个 outcome model，一个学新 offer 下的结果，一个学旧 offer 下的结果。
 2. 然后对每个样本做反事实预测，构造 pseudo effect：对 control 组样本，用 treatment model 预测值减真实结果；对 treatment 组样本，用真实结果减 control model 预测值。构造两类 pseudo effect（control-side pseudo effect, treatment-side pseudo effect）。
 3. 接着用这些 pseudo effect 分别训练两个 effect model，effect model C 和 effect model T。它们输出的是连续的 uplift 分数，而不是回复概率。
-4. 最后再用一个权重 g(x) 把两个 effect model 的结果融合，得到最终 uplift，用来排序和选人。这样做的好处是，它不只是看谁最可能回复，而是看谁因为 offer 会产生最大的增量响应。
+4. 最后再用一个权重 g(x) 把两个 effect model 的结果融合，得到最终 uplift，用来排序和选人。这样做的好处是，它不只是看谁最可能回复，而是看谁因为换成新 offer 会产生最大的增量响应。
 English equivalent:
-1. Split historical experiment data into treatment and control, train two outcome models — one for what happens with the offer, one without.
+1. Split historical experiment data into treatment (new offer) and control (old offer), train two outcome models — one for what happens with the new offer, one for the existing offer.
 2. For each unit, do a counterfactual prediction to build a pseudo effect: for control units, treatment-model prediction minus actual outcome; for treatment units, actual outcome minus control-model prediction. Two kinds of pseudo effect result.
 3. Train two effect models on these pseudo effects. Their output is a continuous uplift score, not a response probability.
-4. Finally, blend the two effect models with a weight g(x) into the final uplift score, used for ranking and targeting. The benefit: you're not just looking at who's most likely to respond, but who will produce the biggest incremental response because of the offer.</a:t>
+4. Finally, blend the two effect models with a weight g(x) into the final uplift score, used for ranking and targeting. The benefit: you're not just looking at who's most likely to respond, but who will produce the biggest incremental response from switching to the new offer.</a:t>
             </a:r>
             <a:endParaRPr lang="en-US" dirty="0"/>
           </a:p>
@@ -2735,7 +2735,7 @@
                 <a:ea typeface="Calibri" pitchFamily="34" charset="-122"/>
                 <a:cs typeface="Calibri" pitchFamily="34" charset="-120"/>
               </a:rPr>
-              <a:t>learns μ̂₀(x) = E[Y(0) | X=x] — trained only on customers who did NOT get the offer.
+              <a:t>learns μ̂₀(x) = E[Y(0) | X=x] — trained only on customers who stayed on the existing offer (control).
 </a:t>
             </a:r>
             <a:pPr indent="0" marL="0">
@@ -2770,7 +2770,7 @@
                 <a:ea typeface="Calibri" pitchFamily="34" charset="-122"/>
                 <a:cs typeface="Calibri" pitchFamily="34" charset="-120"/>
               </a:rPr>
-              <a:t>learns μ̂₁(x) = E[Y(1) | X=x] — trained only on customers who DID get the offer. (Y = 1 if they applied for the card, 0 if not.)</a:t>
+              <a:t>learns μ̂₁(x) = E[Y(1) | X=x] — trained only on customers who got the new offer (treatment). (Y = 1 if they applied for the card, 0 if not.)</a:t>
             </a:r>
             <a:endParaRPr lang="en-US" sz="1300" dirty="0"/>
           </a:p>
@@ -2991,7 +2991,7 @@
                           <a:ea typeface="Calibri" pitchFamily="34" charset="-122"/>
                           <a:cs typeface="Calibri" pitchFamily="34" charset="-120"/>
                         </a:rPr>
-                        <a:t>receive_offer</a:t>
+                        <a:t>new_offer</a:t>
                       </a:r>
                       <a:endParaRPr lang="en-US" sz="1250" dirty="0">
                         <a:latin typeface="Calibri" charset="0"/>
@@ -3148,7 +3148,7 @@
                           <a:ea typeface="Calibri" pitchFamily="34" charset="-122"/>
                           <a:cs typeface="Calibri" pitchFamily="34" charset="-120"/>
                         </a:rPr>
-                        <a:t>pred. Applied, no offer</a:t>
+                        <a:t>pred. Applied, old offer</a:t>
                       </a:r>
                       <a:endParaRPr lang="en-US" sz="1250" dirty="0">
                         <a:latin typeface="Calibri" charset="0"/>
@@ -3237,7 +3237,7 @@
                           <a:ea typeface="Calibri" pitchFamily="34" charset="-122"/>
                           <a:cs typeface="Calibri" pitchFamily="34" charset="-120"/>
                         </a:rPr>
-                        <a:t>pred. Applied, w/ offer</a:t>
+                        <a:t>pred. Applied, new offer</a:t>
                       </a:r>
                       <a:endParaRPr lang="en-US" sz="1250" dirty="0">
                         <a:latin typeface="Calibri" charset="0"/>
@@ -3375,7 +3375,7 @@
                           <a:ea typeface="Calibri" pitchFamily="34" charset="-122"/>
                           <a:cs typeface="Calibri" pitchFamily="34" charset="-120"/>
                         </a:rPr>
-                        <a:t>0 (control)</a:t>
+                        <a:t>0 (old offer)</a:t>
                       </a:r>
                       <a:endParaRPr lang="en-US" sz="1250" dirty="0">
                         <a:latin typeface="Calibri" charset="0"/>
@@ -3717,7 +3717,7 @@
                           <a:ea typeface="Calibri" pitchFamily="34" charset="-122"/>
                           <a:cs typeface="Calibri" pitchFamily="34" charset="-120"/>
                         </a:rPr>
-                        <a:t>0 (control)</a:t>
+                        <a:t>0 (old offer)</a:t>
                       </a:r>
                       <a:endParaRPr lang="en-US" sz="1250" dirty="0">
                         <a:latin typeface="Calibri" charset="0"/>
@@ -4059,7 +4059,7 @@
                           <a:ea typeface="Calibri" pitchFamily="34" charset="-122"/>
                           <a:cs typeface="Calibri" pitchFamily="34" charset="-120"/>
                         </a:rPr>
-                        <a:t>0 (control)</a:t>
+                        <a:t>0 (old offer)</a:t>
                       </a:r>
                       <a:endParaRPr lang="en-US" sz="1250" dirty="0">
                         <a:latin typeface="Calibri" charset="0"/>
@@ -4401,7 +4401,7 @@
                           <a:ea typeface="Calibri" pitchFamily="34" charset="-122"/>
                           <a:cs typeface="Calibri" pitchFamily="34" charset="-120"/>
                         </a:rPr>
-                        <a:t>1 (offer sent)</a:t>
+                        <a:t>1 (new offer)</a:t>
                       </a:r>
                       <a:endParaRPr lang="en-US" sz="1250" dirty="0">
                         <a:latin typeface="Calibri" charset="0"/>
@@ -4743,7 +4743,7 @@
                           <a:ea typeface="Calibri" pitchFamily="34" charset="-122"/>
                           <a:cs typeface="Calibri" pitchFamily="34" charset="-120"/>
                         </a:rPr>
-                        <a:t>1 (offer sent)</a:t>
+                        <a:t>1 (new offer)</a:t>
                       </a:r>
                       <a:endParaRPr lang="en-US" sz="1250" dirty="0">
                         <a:latin typeface="Calibri" charset="0"/>
@@ -5085,7 +5085,7 @@
                           <a:ea typeface="Calibri" pitchFamily="34" charset="-122"/>
                           <a:cs typeface="Calibri" pitchFamily="34" charset="-120"/>
                         </a:rPr>
-                        <a:t>1 (offer sent)</a:t>
+                        <a:t>1 (new offer)</a:t>
                       </a:r>
                       <a:endParaRPr lang="en-US" sz="1250" dirty="0">
                         <a:latin typeface="Calibri" charset="0"/>
@@ -8106,7 +8106,7 @@
                 <a:ea typeface="Calibri" pitchFamily="34" charset="-122"/>
                 <a:cs typeface="Calibri" pitchFamily="34" charset="-120"/>
               </a:rPr>
-              <a:t>for a treated customer we don't need a model to guess their outcome — we use their own real, observed Applied value, and only borrow μ̂₀ (fit on the large control group) to estimate what would've happened without the offer. The minority (treatment) arm no longer needs a full noisy model of its own — just one more regression on these pseudo effects. These are continuous, signed numbers, not 0/1 labels, and each becomes a training label in Layer 3.</a:t>
+              <a:t>for a new-offer customer we don't need a model to guess their outcome — we use their own real, observed Applied value, and only borrow μ̂₀ (fit on the large old-offer group) to estimate what would've happened had they stayed on the old offer instead. The minority (treatment) arm no longer needs a full noisy model of its own — just one more regression on these pseudo effects. These are continuous, signed numbers, not 0/1 labels, and each becomes a training label in Layer 3.</a:t>
             </a:r>
             <a:endParaRPr lang="en-US" sz="1150" dirty="0"/>
           </a:p>
@@ -11748,7 +11748,7 @@
                           <a:ea typeface="Calibri" pitchFamily="34" charset="-122"/>
                           <a:cs typeface="Calibri" pitchFamily="34" charset="-120"/>
                         </a:rPr>
-                        <a:t>Mail — send first</a:t>
+                        <a:t>Switch to new offer — first</a:t>
                       </a:r>
                       <a:endParaRPr lang="en-US" sz="1200" dirty="0">
                         <a:latin typeface="Calibri" charset="0"/>
@@ -12160,7 +12160,7 @@
                           <a:ea typeface="Calibri" pitchFamily="34" charset="-122"/>
                           <a:cs typeface="Calibri" pitchFamily="34" charset="-120"/>
                         </a:rPr>
-                        <a:t>Don't mail — offer likely backfires</a:t>
+                        <a:t>Keep old offer — new one likely backfires</a:t>
                       </a:r>
                       <a:endParaRPr lang="en-US" sz="1200" dirty="0">
                         <a:latin typeface="Calibri" charset="0"/>
@@ -12252,7 +12252,7 @@
                 <a:ea typeface="Calibri" pitchFamily="34" charset="-122"/>
                 <a:cs typeface="Calibri" pitchFamily="34" charset="-120"/>
               </a:rPr>
-              <a:t>The final score drives three things: rank the file high-to-low, mail down to a budget cutoff, and treat a low or negative score as a decision NOT to spend — not just a low priority.</a:t>
+              <a:t>The final score drives three things: rank the file high-to-low, roll out the new offer down to a budget/capacity cutoff, and treat a low or negative score as a decision to keep that customer on the old offer — not just a low priority.</a:t>
             </a:r>
             <a:endParaRPr lang="en-US" sz="1200" dirty="0"/>
           </a:p>
@@ -12355,7 +12355,7 @@
                 <a:ea typeface="Calibri" pitchFamily="34" charset="-122"/>
                 <a:cs typeface="Calibri" pitchFamily="34" charset="-120"/>
               </a:rPr>
-              <a:t>In the full simulation, mailing everyone nets an overall incremental lift close to zero — persuadable gains are offset by sleeping-dog losses.</a:t>
+              <a:t>In the full simulation, switching everyone to the new offer nets an overall incremental lift close to zero — persuadable gains are offset by sleeping-dog losses.</a:t>
             </a:r>
             <a:endParaRPr lang="en-US" sz="1300" dirty="0"/>
           </a:p>
@@ -14269,7 +14269,7 @@
                 <a:ea typeface="Calibri" pitchFamily="34" charset="-122"/>
                 <a:cs typeface="Calibri" pitchFamily="34" charset="-120"/>
               </a:rPr>
-              <a:t>A response model predicts who's likely to respond — but that includes people who'd say yes with no offer at all. An uplift model predicts the incremental effect of the offer itself, so targeting can focus on the one segment where the offer changes the outcome.</a:t>
+              <a:t>A response model predicts who's likely to respond — but that includes people who'd apply on the existing offer anyway. An uplift model predicts the incremental effect of switching someone to the new offer, so targeting can focus on the one segment where the new offer actually changes the outcome.</a:t>
             </a:r>
             <a:endParaRPr lang="en-US" sz="1350" dirty="0"/>
           </a:p>
@@ -14364,7 +14364,7 @@
               <a:buNone/>
             </a:pPr>
             <a:r>
-              <a:rPr lang="en-US" sz="1150" b="1" dirty="0">
+              <a:rPr lang="en-US" sz="1100" b="1" dirty="0">
                 <a:solidFill>
                   <a:srgbClr val="1E2761"/>
                 </a:solidFill>
@@ -14381,7 +14381,7 @@
               <a:buNone/>
             </a:pPr>
             <a:r>
-              <a:rPr lang="en-US" sz="1150" dirty="0">
+              <a:rPr lang="en-US" sz="1100" dirty="0">
                 <a:solidFill>
                   <a:srgbClr val="33344A"/>
                 </a:solidFill>
@@ -14389,9 +14389,9 @@
                 <a:ea typeface="Calibri" pitchFamily="34" charset="-122"/>
                 <a:cs typeface="Calibri" pitchFamily="34" charset="-120"/>
               </a:rPr>
-              <a:t>Y (our Applied column) = 1 if the customer applies for the credit card, 0 if not.  T (our receive_offer column) = 1 if they received the prescreen mail offer (treatment), 0 if held out (control).</a:t>
-            </a:r>
-            <a:endParaRPr lang="en-US" sz="1150" dirty="0"/>
+              <a:t>Y (our Applied column) = 1 if the customer applies for the credit card, 0 if not.  T (our new_offer column) = 1 if they received the new offer variant (treatment), 0 if they received the existing offer (control) — everyone gets an offer, this is old vs. new.</a:t>
+            </a:r>
+            <a:endParaRPr lang="en-US" sz="1100" dirty="0"/>
           </a:p>
         </p:txBody>
       </p:sp>
@@ -14428,7 +14428,7 @@
                 <a:ea typeface="Calibri" pitchFamily="34" charset="-122"/>
                 <a:cs typeface="Calibri" pitchFamily="34" charset="-120"/>
               </a:rPr>
-              <a:t>the treatment effect — not the response probability — is the thing we're trying to score.</a:t>
+              <a:t>τ(x) — our uplift score — is the treatment effect we're trying to estimate, not the raw response probability.</a:t>
             </a:r>
             <a:endParaRPr lang="en-US" sz="1100" dirty="0"/>
           </a:p>
@@ -14531,7 +14531,7 @@
                 <a:ea typeface="Calibri" pitchFamily="34" charset="-122"/>
                 <a:cs typeface="Calibri" pitchFamily="34" charset="-120"/>
               </a:rPr>
-              <a:t>Apply only if they get the offer (Y=1 under T=1, Y=0 under T=0) — the offer changes their decision. This is the target segment.</a:t>
+              <a:t>Apply only with the new offer (Y=1 under T=1, Y=0 under T=0) — switching the offer changes their decision. This is the target segment.</a:t>
             </a:r>
             <a:endParaRPr lang="en-US" sz="1100" dirty="0"/>
           </a:p>
@@ -14634,7 +14634,7 @@
                 <a:ea typeface="Calibri" pitchFamily="34" charset="-122"/>
                 <a:cs typeface="Calibri" pitchFamily="34" charset="-120"/>
               </a:rPr>
-              <a:t>Apply either way (Y=1 regardless of T). Mailing them is wasted budget.</a:t>
+              <a:t>Apply on either offer (Y=1 regardless of T). Giving them the new offer is wasted — the old one would've worked too.</a:t>
             </a:r>
             <a:endParaRPr lang="en-US" sz="1100" dirty="0"/>
           </a:p>
@@ -14737,7 +14737,7 @@
                 <a:ea typeface="Calibri" pitchFamily="34" charset="-122"/>
                 <a:cs typeface="Calibri" pitchFamily="34" charset="-120"/>
               </a:rPr>
-              <a:t>Never apply, offer or not (Y=0 regardless of T). Nothing to gain.</a:t>
+              <a:t>Never apply, old or new offer (Y=0 regardless of T). Nothing to gain.</a:t>
             </a:r>
             <a:endParaRPr lang="en-US" sz="1100" dirty="0"/>
           </a:p>
@@ -14840,7 +14840,7 @@
                 <a:ea typeface="Calibri" pitchFamily="34" charset="-122"/>
                 <a:cs typeface="Calibri" pitchFamily="34" charset="-120"/>
               </a:rPr>
-              <a:t>Apply LESS often if they get the offer — the mailing backfires.</a:t>
+              <a:t>Apply LESS often with the new offer than they would have with the old one — the new offer backfires.</a:t>
             </a:r>
             <a:endParaRPr lang="en-US" sz="1100" dirty="0"/>
           </a:p>
@@ -15237,7 +15237,7 @@
                 <a:ea typeface="Calibri" pitchFamily="34" charset="-122"/>
                 <a:cs typeface="Calibri" pitchFamily="34" charset="-120"/>
               </a:rPr>
-              <a:t>One model, receive_offer (got the offer, 1/0) as just another input feature. τ(x) = f(x,1) − f(x,0), where 1/0 flips whether the offer was sent.</a:t>
+              <a:t>One model, new_offer (old vs. new offer, 1/0) as just another input feature. τ(x) = f(x,1) − f(x,0) — our uplift score — where 1/0 flips which offer they got.</a:t>
             </a:r>
             <a:endParaRPr lang="en-US" sz="1300" dirty="0"/>
           </a:p>
@@ -15446,7 +15446,7 @@
                 <a:ea typeface="Calibri" pitchFamily="34" charset="-122"/>
                 <a:cs typeface="Calibri" pitchFamily="34" charset="-120"/>
               </a:rPr>
-              <a:t>Two fully separate models, one per arm. τ(x) = μ̂₁(x) − μ̂₀(x), where μ̂₁ is the offer-group model and μ̂₀ is the no-offer (control) model.</a:t>
+              <a:t>Two fully separate outcome models, one per arm. τ(x) = μ̂₁(x) − μ̂₀(x), where μ̂₁ is the new-offer outcome model and μ̂₀ is the old-offer (control) outcome model.</a:t>
             </a:r>
             <a:endParaRPr lang="en-US" sz="1300" dirty="0"/>
           </a:p>
@@ -15716,7 +15716,7 @@
                 <a:ea typeface="Calibri" pitchFamily="34" charset="-122"/>
                 <a:cs typeface="Calibri" pitchFamily="34" charset="-120"/>
               </a:rPr>
-              <a:t>Two outcome models feed two effect models, combined by a weight g(x). Same Applied and receive_offer columns as above.</a:t>
+              <a:t>Two outcome models feed two effect models, combined by a weight g(x). Same Applied and new_offer columns as above.</a:t>
             </a:r>
             <a:endParaRPr lang="en-US" sz="1300" dirty="0"/>
           </a:p>
@@ -16103,7 +16103,7 @@
                           <a:ea typeface="Calibri" pitchFamily="34" charset="-122"/>
                           <a:cs typeface="Calibri" pitchFamily="34" charset="-120"/>
                         </a:rPr>
-                        <a:t>receive_offer</a:t>
+                        <a:t>new_offer</a:t>
                       </a:r>
                       <a:endParaRPr lang="en-US" sz="1050" dirty="0">
                         <a:latin typeface="Calibri" charset="0"/>
@@ -17537,7 +17537,7 @@
                 <a:ea typeface="Calibri" pitchFamily="34" charset="-122"/>
                 <a:cs typeface="Calibri" pitchFamily="34" charset="-120"/>
               </a:rPr>
-              <a:t>one model, run for BOTH mailing scenarios on customer G</a:t>
+              <a:t>one model, run for BOTH offer scenarios on customer G</a:t>
             </a:r>
             <a:endParaRPr lang="en-US" sz="1100" dirty="0"/>
           </a:p>
@@ -17655,7 +17655,7 @@
                           <a:ea typeface="Calibri" pitchFamily="34" charset="-122"/>
                           <a:cs typeface="Calibri" pitchFamily="34" charset="-120"/>
                         </a:rPr>
-                        <a:t>receive_offer</a:t>
+                        <a:t>new_offer</a:t>
                       </a:r>
                       <a:endParaRPr lang="en-US" sz="850" dirty="0">
                         <a:latin typeface="Calibri" charset="0"/>
@@ -18169,7 +18169,7 @@
                           <a:ea typeface="Calibri" pitchFamily="34" charset="-122"/>
                           <a:cs typeface="Calibri" pitchFamily="34" charset="-120"/>
                         </a:rPr>
-                        <a:t>receive_offer</a:t>
+                        <a:t>new_offer</a:t>
                       </a:r>
                       <a:endParaRPr lang="en-US" sz="850" dirty="0">
                         <a:latin typeface="Calibri" charset="0"/>
@@ -18846,7 +18846,7 @@
                 <a:ea typeface="Calibri" pitchFamily="34" charset="-122"/>
                 <a:cs typeface="Calibri" pitchFamily="34" charset="-120"/>
               </a:rPr>
-              <a:t>Regularization has no reason to favor one receive_offer feature over dozens of stronger predictors — treatment can get nearly ignored.</a:t>
+              <a:t>Regularization has no reason to favor one new_offer feature over dozens of stronger predictors — the offer signal can get nearly ignored.</a:t>
             </a:r>
             <a:endParaRPr lang="en-US" sz="1150" dirty="0"/>
           </a:p>
@@ -18927,7 +18927,7 @@
                 <a:ea typeface="Calibri" pitchFamily="34" charset="-122"/>
                 <a:cs typeface="Calibri" pitchFamily="34" charset="-120"/>
               </a:rPr>
-              <a:t>baseline behavioral features — utilization, tenure, balances — predict response far better than the offer itself. A pooled model leans on those and treats receive_offer as noise, exactly the risk we can't take when isolating the offer's effect is the whole point.</a:t>
+              <a:t>baseline behavioral features — utilization, tenure, balances — predict response far better than which offer they got. A pooled model leans on those and treats new_offer as noise, exactly the risk we can't take when isolating the new offer's effect is the whole point.</a:t>
             </a:r>
             <a:endParaRPr lang="en-US" sz="1250" dirty="0"/>
           </a:p>
@@ -19234,7 +19234,7 @@
                 <a:ea typeface="Calibri" pitchFamily="34" charset="-122"/>
                 <a:cs typeface="Calibri" pitchFamily="34" charset="-120"/>
               </a:rPr>
-              <a:t>Control (A,B,C)  →  μ̂₀</a:t>
+              <a:t>Control (A,B,C) → μ̂₀ model</a:t>
             </a:r>
             <a:endParaRPr lang="en-US" sz="1000" dirty="0"/>
           </a:p>
@@ -19855,7 +19855,7 @@
                 <a:ea typeface="Calibri" pitchFamily="34" charset="-122"/>
                 <a:cs typeface="Calibri" pitchFamily="34" charset="-120"/>
               </a:rPr>
-              <a:t>Treatment (D,E,F)  →  μ̂₁</a:t>
+              <a:t>Treatment (D,E,F) → μ̂₁ model</a:t>
             </a:r>
             <a:endParaRPr lang="en-US" sz="1000" dirty="0"/>
           </a:p>
@@ -21907,7 +21907,7 @@
                 <a:ea typeface="Calibri" pitchFamily="34" charset="-122"/>
                 <a:cs typeface="Calibri" pitchFamily="34" charset="-120"/>
               </a:rPr>
-              <a:t>T-Learner isn't broken by design — if receive_offer were roughly 50/50, μ̂₀ and μ̂₁ would train on comparable sample sizes and subtracting two similarly-precise models wouldn't cost much. </a:t>
+              <a:t>T-Learner isn't broken by design — if new_offer were roughly 50/50, μ̂₀ and μ̂₁ would train on comparable sample sizes and subtracting two similarly-precise models wouldn't cost much. </a:t>
             </a:r>
             <a:pPr indent="0" marL="0">
               <a:lnSpc>
@@ -21941,7 +21941,7 @@
                 <a:ea typeface="Calibri" pitchFamily="34" charset="-122"/>
                 <a:cs typeface="Calibri" pitchFamily="34" charset="-120"/>
               </a:rPr>
-              <a:t>about 70% of customers are held-out control (no offer) and only ~30% receive the mailed offer — you can't afford to mail everyone in a live campaign. That imbalance starves μ̂₁, the offer-side model, exactly where T-Learner needs it most: τ(x)=μ̂₁(x)−μ̂₀(x) inherits nearly all of μ̂₁'s extra noise. Closing that gap without needing a bigger treatment group is the reason X-Learner exists.</a:t>
+              <a:t>about 70% of customers stay on the existing offer (control) and only ~30% are rolled out to the new offer (treatment) — a deliberately smaller test slice to limit risk before scaling a new offer design. That imbalance starves μ̂₁, the new-offer-side model, exactly where T-Learner needs it most: τ(x)=μ̂₁(x)−μ̂₀(x) inherits nearly all of μ̂₁'s extra noise. Closing that gap without needing a bigger treatment group is the reason X-Learner exists.</a:t>
             </a:r>
             <a:endParaRPr lang="en-US" sz="1200" dirty="0"/>
           </a:p>
@@ -22210,7 +22210,7 @@
                 <a:ea typeface="Calibri" pitchFamily="34" charset="-122"/>
                 <a:cs typeface="Calibri" pitchFamily="34" charset="-120"/>
               </a:rPr>
-              <a:t>μ̂₀(x), μ̂₁(x) = the two outcome models — predicted P(Applied), without vs. with the offer.   τ(x) = μ̂₁(x) − μ̂₀(x) = the uplift score we're estimating.   n₀, n₁ = how many customers trained each model.   Var(·) = how noisy a model's predictions are — it shrinks as n grows.</a:t>
+              <a:t>μ̂₀(x), μ̂₁(x) = the two outcome models — predicted P(Applied) under the old offer vs. the new offer.   τ(x) = μ̂₁(x) − μ̂₀(x) = the uplift score we're estimating.   n₀, n₁ = how many customers trained each model (sample size).   Var(·) = how noisy a model's predictions are — it shrinks as n grows.</a:t>
             </a:r>
             <a:endParaRPr lang="en-US" sz="1100" dirty="0"/>
           </a:p>
@@ -22379,7 +22379,7 @@
                 <a:ea typeface="Cambria" pitchFamily="34" charset="-122"/>
                 <a:cs typeface="Cambria" pitchFamily="34" charset="-120"/>
               </a:rPr>
-              <a:t>✓  If receive_offer Were 50/50</a:t>
+              <a:t>✓  If new_offer Were 50/50</a:t>
             </a:r>
             <a:endParaRPr lang="en-US" sz="1550" dirty="0"/>
           </a:p>
@@ -22592,7 +22592,7 @@
                 <a:ea typeface="Cambria" pitchFamily="34" charset="-122"/>
                 <a:cs typeface="Cambria" pitchFamily="34" charset="-120"/>
               </a:rPr>
-              <a:t>✗  Our Real Setup — Control ≈70% / Treatment ≈30%</a:t>
+              <a:t>✗  Our Real Setup — Old Offer ≈70% / New Offer ≈30%</a:t>
             </a:r>
             <a:endParaRPr lang="en-US" sz="1400" dirty="0"/>
           </a:p>
@@ -22820,7 +22820,7 @@
                 <a:ea typeface="Calibri" pitchFamily="34" charset="-122"/>
                 <a:cs typeface="Calibri" pitchFamily="34" charset="-120"/>
               </a:rPr>
-              <a:t>Not a better model for the small arm — it stops asking μ̂₁ to predict outcomes for everyone. For each treated customer it uses their own real, observed Applied outcome, and only needs μ̂₀ (the reliable, large-sample model) to estimate the counterfactual. The minority arm's job shrinks from “run a whole noisy model on every customer” down to “fit one more regression on a small-but-real dataset.” Next: how that actually works, layer by layer.</a:t>
+              <a:t>Not a better model for the small arm — it stops asking μ̂₁ to predict outcomes for everyone. For each new-offer customer it uses their own real, observed Applied outcome, and only needs μ̂₀ (the reliable, large-sample old-offer model) to estimate what would've happened under the old offer instead. The minority arm's job shrinks from “run a whole noisy model on every customer” down to “fit one more regression on a small-but-real dataset.” Next: how that actually works, layer by layer.</a:t>
             </a:r>
             <a:endParaRPr lang="en-US" sz="1150" dirty="0"/>
           </a:p>
@@ -23409,7 +23409,7 @@
                           <a:ea typeface="Calibri" pitchFamily="34" charset="-122"/>
                           <a:cs typeface="Calibri" pitchFamily="34" charset="-120"/>
                         </a:rPr>
-                        <a:t>Implicit — read off one shared model's receive_offer term</a:t>
+                        <a:t>Implicit — read off one shared model's new_offer term</a:t>
                       </a:r>
                       <a:endParaRPr lang="en-US" sz="1200" dirty="0">
                         <a:latin typeface="Calibri" charset="0"/>
@@ -24368,7 +24368,7 @@
                 <a:ea typeface="Calibri" pitchFamily="34" charset="-122"/>
                 <a:cs typeface="Calibri" pitchFamily="34" charset="-120"/>
               </a:rPr>
-              <a:t>about 70% of customers are held-out control (no offer) and only ~30% receive the mailed offer — you can't afford to mail everyone in a live campaign. That's exactly T-Learner's weak point: μ̂₁, the offer-side model, is trained on the smaller group and is noisy. X-Learner's imputation step lets the offer-side effect estimate borrow strength from the reliable, well-estimated control-side model instead.</a:t>
+              <a:t>about 70% of customers stay on the existing offer (control) and only ~30% are rolled out to the new offer (treatment) — a deliberately smaller test slice to limit risk before scaling a new offer design. That's exactly T-Learner's weak point: μ̂₁, the new-offer-side model, is trained on the smaller group and is noisy. X-Learner's imputation step lets the new-offer-side effect estimate borrow strength from the reliable, well-estimated existing-offer-side model instead.</a:t>
             </a:r>
             <a:endParaRPr lang="en-US" sz="1300" dirty="0"/>
           </a:p>

--- a/uplift_model_deck.pptx
+++ b/uplift_model_deck.pptx
@@ -2690,8 +2690,8 @@
         </p:nvSpPr>
         <p:spPr>
           <a:xfrm>
-            <a:off x="548640" y="1417320"/>
-            <a:ext cx="11064240" cy="777240"/>
+            <a:off x="548640" y="1280160"/>
+            <a:ext cx="11064240" cy="566928"/>
           </a:xfrm>
           <a:prstGeom prst="rect">
             <a:avLst/>
@@ -2705,12 +2705,12 @@
           <a:p>
             <a:pPr indent="0" marL="0">
               <a:lnSpc>
-                <a:spcPct val="128000"/>
+                <a:spcPct val="122000"/>
               </a:lnSpc>
               <a:buNone/>
             </a:pPr>
             <a:r>
-              <a:rPr lang="en-US" sz="1300" b="1" dirty="0">
+              <a:rPr lang="en-US" sz="1150" b="1" dirty="0">
                 <a:solidFill>
                   <a:srgbClr val="1E2761"/>
                 </a:solidFill>
@@ -2722,12 +2722,12 @@
             </a:r>
             <a:pPr indent="0" marL="0">
               <a:lnSpc>
-                <a:spcPct val="128000"/>
+                <a:spcPct val="122000"/>
               </a:lnSpc>
               <a:buNone/>
             </a:pPr>
             <a:r>
-              <a:rPr lang="en-US" sz="1300" dirty="0">
+              <a:rPr lang="en-US" sz="1150" dirty="0">
                 <a:solidFill>
                   <a:srgbClr val="33344A"/>
                 </a:solidFill>
@@ -2740,12 +2740,12 @@
             </a:r>
             <a:pPr indent="0" marL="0">
               <a:lnSpc>
-                <a:spcPct val="128000"/>
+                <a:spcPct val="122000"/>
               </a:lnSpc>
               <a:buNone/>
             </a:pPr>
             <a:r>
-              <a:rPr lang="en-US" sz="1300" b="1" dirty="0">
+              <a:rPr lang="en-US" sz="1150" b="1" dirty="0">
                 <a:solidFill>
                   <a:srgbClr val="1E2761"/>
                 </a:solidFill>
@@ -2757,12 +2757,12 @@
             </a:r>
             <a:pPr indent="0" marL="0">
               <a:lnSpc>
-                <a:spcPct val="128000"/>
+                <a:spcPct val="122000"/>
               </a:lnSpc>
               <a:buNone/>
             </a:pPr>
             <a:r>
-              <a:rPr lang="en-US" sz="1300" dirty="0">
+              <a:rPr lang="en-US" sz="1150" dirty="0">
                 <a:solidFill>
                   <a:srgbClr val="33344A"/>
                 </a:solidFill>
@@ -2772,7 +2772,7 @@
               </a:rPr>
               <a:t>learns μ̂₁(x) = E[Y(1) | X=x] — trained only on customers who got the new offer (treatment). (Y = 1 if they applied for the card, 0 if not.)</a:t>
             </a:r>
-            <a:endParaRPr lang="en-US" sz="1300" dirty="0"/>
+            <a:endParaRPr lang="en-US" sz="1150" dirty="0"/>
           </a:p>
         </p:txBody>
       </p:sp>
@@ -2784,16 +2784,16 @@
         </p:nvSpPr>
         <p:spPr>
           <a:xfrm>
-            <a:off x="548640" y="2240280"/>
-            <a:ext cx="11064240" cy="502920"/>
+            <a:off x="548640" y="1883664"/>
+            <a:ext cx="11064240" cy="365760"/>
           </a:xfrm>
           <a:prstGeom prst="roundRect">
             <a:avLst>
-              <a:gd name="adj" fmla="val 10909"/>
+              <a:gd name="adj" fmla="val 15000"/>
             </a:avLst>
           </a:prstGeom>
           <a:solidFill>
-            <a:srgbClr val="EAF0FC"/>
+            <a:srgbClr val="F2F2F5"/>
           </a:solidFill>
           <a:ln/>
         </p:spPr>
@@ -2806,8 +2806,8 @@
         </p:nvSpPr>
         <p:spPr>
           <a:xfrm>
-            <a:off x="777240" y="2240280"/>
-            <a:ext cx="10607040" cy="502920"/>
+            <a:off x="777240" y="1883664"/>
+            <a:ext cx="10607040" cy="365760"/>
           </a:xfrm>
           <a:prstGeom prst="rect">
             <a:avLst/>
@@ -2823,7 +2823,7 @@
               <a:buNone/>
             </a:pPr>
             <a:r>
-              <a:rPr lang="en-US" sz="1150" i="1" dirty="0">
+              <a:rPr lang="en-US" sz="1050" i="1" dirty="0">
                 <a:solidFill>
                   <a:srgbClr val="1E2761"/>
                 </a:solidFill>
@@ -2831,22 +2831,49 @@
                 <a:ea typeface="Calibri" pitchFamily="34" charset="-122"/>
                 <a:cs typeface="Calibri" pitchFamily="34" charset="-120"/>
               </a:rPr>
-              <a:t>Both models are trained with out-of-fold / cross-fitted predictions — never a model scoring its own training rows. That avoids leakage and an overly optimistic effect estimate later.</a:t>
-            </a:r>
-            <a:endParaRPr lang="en-US" sz="1150" dirty="0"/>
+              <a:t>Both models are trained with out-of-fold / cross-fitted predictions — never a model scoring its own training rows. That avoids leakage later.</a:t>
+            </a:r>
+            <a:endParaRPr lang="en-US" sz="1050" dirty="0"/>
           </a:p>
         </p:txBody>
       </p:sp>
       <p:sp>
         <p:nvSpPr>
-          <p:cNvPr id="7" name="Text 5"/>
+          <p:cNvPr id="7" name="Shape 5"/>
+          <p:cNvSpPr/>
+          <p:nvPr/>
+        </p:nvSpPr>
+        <p:spPr>
+          <a:xfrm>
+            <a:off x="548640" y="2340864"/>
+            <a:ext cx="11064240" cy="1554480"/>
+          </a:xfrm>
+          <a:prstGeom prst="roundRect">
+            <a:avLst>
+              <a:gd name="adj" fmla="val 5882"/>
+            </a:avLst>
+          </a:prstGeom>
+          <a:solidFill>
+            <a:srgbClr val="EAF0FC"/>
+          </a:solidFill>
+          <a:ln w="12700">
+            <a:solidFill>
+              <a:srgbClr val="1E2761"/>
+            </a:solidFill>
+            <a:prstDash val="solid"/>
+          </a:ln>
+        </p:spPr>
+      </p:sp>
+      <p:sp>
+        <p:nvSpPr>
+          <p:cNvPr id="8" name="Text 6"/>
           <p:cNvSpPr txBox="1"/>
           <p:nvPr/>
         </p:nvSpPr>
         <p:spPr>
           <a:xfrm>
-            <a:off x="548640" y="2926080"/>
-            <a:ext cx="11064240" cy="320040"/>
+            <a:off x="777240" y="2468880"/>
+            <a:ext cx="10607040" cy="237744"/>
           </a:xfrm>
           <a:prstGeom prst="rect">
             <a:avLst/>
@@ -2862,7 +2889,7 @@
               <a:buNone/>
             </a:pPr>
             <a:r>
-              <a:rPr lang="en-US" sz="1250" b="1" dirty="0">
+              <a:rPr lang="en-US" sz="1100" b="1" dirty="0">
                 <a:solidFill>
                   <a:srgbClr val="1E2761"/>
                 </a:solidFill>
@@ -2870,9 +2897,62 @@
                 <a:ea typeface="Calibri" pitchFamily="34" charset="-122"/>
                 <a:cs typeface="Calibri" pitchFamily="34" charset="-120"/>
               </a:rPr>
-              <a:t>Once trained, both models score EVERY customer — including their own counterfactual arm:</a:t>
-            </a:r>
-            <a:endParaRPr lang="en-US" sz="1250" dirty="0"/>
+              <a:t>TRAIN   </a:t>
+            </a:r>
+            <a:pPr indent="0" marL="0">
+              <a:buNone/>
+            </a:pPr>
+            <a:r>
+              <a:rPr lang="en-US" sz="1100" i="1" dirty="0">
+                <a:solidFill>
+                  <a:srgbClr val="6B7280"/>
+                </a:solidFill>
+                <a:latin typeface="Calibri" pitchFamily="34" charset="0"/>
+                <a:ea typeface="Calibri" pitchFamily="34" charset="-122"/>
+                <a:cs typeface="Calibri" pitchFamily="34" charset="-120"/>
+              </a:rPr>
+              <a:t>each outcome model fit ONLY on its own arm</a:t>
+            </a:r>
+            <a:endParaRPr lang="en-US" sz="1100" dirty="0"/>
+          </a:p>
+        </p:txBody>
+      </p:sp>
+      <p:sp>
+        <p:nvSpPr>
+          <p:cNvPr id="9" name="Text 7"/>
+          <p:cNvSpPr txBox="1"/>
+          <p:nvPr/>
+        </p:nvSpPr>
+        <p:spPr>
+          <a:xfrm>
+            <a:off x="777240" y="2779776"/>
+            <a:ext cx="5074920" cy="201168"/>
+          </a:xfrm>
+          <a:prstGeom prst="rect">
+            <a:avLst/>
+          </a:prstGeom>
+          <a:noFill/>
+          <a:ln/>
+        </p:spPr>
+        <p:txBody>
+          <a:bodyPr wrap="square" lIns="0" tIns="0" rIns="0" bIns="0" rtlCol="0" anchor="ctr"/>
+          <a:lstStyle/>
+          <a:p>
+            <a:pPr indent="0" marL="0">
+              <a:buNone/>
+            </a:pPr>
+            <a:r>
+              <a:rPr lang="en-US" sz="1050" b="1" dirty="0">
+                <a:solidFill>
+                  <a:srgbClr val="1E2761"/>
+                </a:solidFill>
+                <a:latin typeface="Calibri" pitchFamily="34" charset="0"/>
+                <a:ea typeface="Calibri" pitchFamily="34" charset="-122"/>
+                <a:cs typeface="Calibri" pitchFamily="34" charset="-120"/>
+              </a:rPr>
+              <a:t>Control (A,B,C) → μ̂₀ model</a:t>
+            </a:r>
+            <a:endParaRPr lang="en-US" sz="1050" dirty="0"/>
           </a:p>
         </p:txBody>
       </p:sp>
@@ -2891,21 +2971,18 @@
           </p:nvPr>
         </p:nvGraphicFramePr>
         <p:xfrm>
-          <a:off x="1280160" y="3337560"/>
-          <a:ext cx="9646920" cy="3017520"/>
+          <a:off x="777240" y="2999232"/>
+          <a:ext cx="5074920" cy="749808"/>
         </p:xfrm>
         <a:graphic>
           <a:graphicData uri="http://schemas.openxmlformats.org/drawingml/2006/table">
             <a:tbl>
               <a:tblPr/>
               <a:tblGrid>
-                <a:gridCol w="1463040"/>
-                <a:gridCol w="1874520"/>
-                <a:gridCol w="1463040"/>
-                <a:gridCol w="2423160"/>
-                <a:gridCol w="2423160"/>
+                <a:gridCol w="2537460"/>
+                <a:gridCol w="2537460"/>
               </a:tblGrid>
-              <a:tr h="429768">
+              <a:tr h="187452">
                 <a:tc>
                   <a:txBody>
                     <a:bodyPr/>
@@ -2915,7 +2992,7 @@
                         <a:buNone/>
                       </a:pPr>
                       <a:r>
-                        <a:rPr lang="en-US" sz="1250" b="1" dirty="0">
+                        <a:rPr lang="en-US" sz="1100" b="1" dirty="0">
                           <a:solidFill>
                             <a:srgbClr val="FFFFFF"/>
                           </a:solidFill>
@@ -2925,14 +3002,14 @@
                         </a:rPr>
                         <a:t>Customer</a:t>
                       </a:r>
-                      <a:endParaRPr lang="en-US" sz="1250" dirty="0">
+                      <a:endParaRPr lang="en-US" sz="1100" dirty="0">
                         <a:latin typeface="Calibri" charset="0"/>
                         <a:ea typeface="Calibri" charset="0"/>
                         <a:cs typeface="Calibri" charset="0"/>
                       </a:endParaRPr>
                     </a:p>
                   </a:txBody>
-                  <a:tcPr marL="91440" marR="91440" marT="45720" marB="45720" anchor="ctr">
+                  <a:tcPr marL="45720" marR="45720" marT="18288" marB="18288" anchor="ctr">
                     <a:lnL w="12700" cap="flat" cmpd="sng" algn="ctr">
                       <a:solidFill>
                         <a:srgbClr val="E4E7F0"/>
@@ -2983,7 +3060,7 @@
                         <a:buNone/>
                       </a:pPr>
                       <a:r>
-                        <a:rPr lang="en-US" sz="1250" b="1" dirty="0">
+                        <a:rPr lang="en-US" sz="1100" b="1" dirty="0">
                           <a:solidFill>
                             <a:srgbClr val="FFFFFF"/>
                           </a:solidFill>
@@ -2991,16 +3068,16 @@
                           <a:ea typeface="Calibri" pitchFamily="34" charset="-122"/>
                           <a:cs typeface="Calibri" pitchFamily="34" charset="-120"/>
                         </a:rPr>
-                        <a:t>new_offer</a:t>
+                        <a:t>Applied</a:t>
                       </a:r>
-                      <a:endParaRPr lang="en-US" sz="1250" dirty="0">
+                      <a:endParaRPr lang="en-US" sz="1100" dirty="0">
                         <a:latin typeface="Calibri" charset="0"/>
                         <a:ea typeface="Calibri" charset="0"/>
                         <a:cs typeface="Calibri" charset="0"/>
                       </a:endParaRPr>
                     </a:p>
                   </a:txBody>
-                  <a:tcPr marL="91440" marR="91440" marT="45720" marB="45720" anchor="ctr">
+                  <a:tcPr marL="45720" marR="45720" marT="18288" marB="18288" anchor="ctr">
                     <a:lnL w="12700" cap="flat" cmpd="sng" algn="ctr">
                       <a:solidFill>
                         <a:srgbClr val="E4E7F0"/>
@@ -3031,6 +3108,1224 @@
                     <a:lnB w="12700" cap="flat" cmpd="sng" algn="ctr">
                       <a:solidFill>
                         <a:srgbClr val="E4E7F0"/>
+                      </a:solidFill>
+                      <a:prstDash val="solid"/>
+                      <a:round/>
+                      <a:headEnd type="none" w="med" len="med"/>
+                      <a:tailEnd type="none" w="med" len="med"/>
+                    </a:lnB>
+                    <a:solidFill>
+                      <a:srgbClr val="1E2761"/>
+                    </a:solidFill>
+                  </a:tcPr>
+                </a:tc>
+              </a:tr>
+              <a:tr h="187452">
+                <a:tc>
+                  <a:txBody>
+                    <a:bodyPr/>
+                    <a:lstStyle/>
+                    <a:p>
+                      <a:pPr algn="ctr" indent="0" marL="0">
+                        <a:buNone/>
+                      </a:pPr>
+                      <a:r>
+                        <a:rPr lang="en-US" sz="1100" b="1" dirty="0">
+                          <a:solidFill>
+                            <a:srgbClr val="33344A"/>
+                          </a:solidFill>
+                          <a:latin typeface="Calibri" pitchFamily="34" charset="0"/>
+                          <a:ea typeface="Calibri" pitchFamily="34" charset="-122"/>
+                          <a:cs typeface="Calibri" pitchFamily="34" charset="-120"/>
+                        </a:rPr>
+                        <a:t>A</a:t>
+                      </a:r>
+                      <a:endParaRPr lang="en-US" sz="1100" dirty="0">
+                        <a:latin typeface="Calibri" charset="0"/>
+                        <a:ea typeface="Calibri" charset="0"/>
+                        <a:cs typeface="Calibri" charset="0"/>
+                      </a:endParaRPr>
+                    </a:p>
+                  </a:txBody>
+                  <a:tcPr marL="45720" marR="45720" marT="18288" marB="18288" anchor="ctr">
+                    <a:lnL w="12700" cap="flat" cmpd="sng" algn="ctr">
+                      <a:solidFill>
+                        <a:srgbClr val="E4E7F0"/>
+                      </a:solidFill>
+                      <a:prstDash val="solid"/>
+                      <a:round/>
+                      <a:headEnd type="none" w="med" len="med"/>
+                      <a:tailEnd type="none" w="med" len="med"/>
+                    </a:lnL>
+                    <a:lnR w="12700" cap="flat" cmpd="sng" algn="ctr">
+                      <a:solidFill>
+                        <a:srgbClr val="E4E7F0"/>
+                      </a:solidFill>
+                      <a:prstDash val="solid"/>
+                      <a:round/>
+                      <a:headEnd type="none" w="med" len="med"/>
+                      <a:tailEnd type="none" w="med" len="med"/>
+                    </a:lnR>
+                    <a:lnT w="12700" cap="flat" cmpd="sng" algn="ctr">
+                      <a:solidFill>
+                        <a:srgbClr val="E4E7F0"/>
+                      </a:solidFill>
+                      <a:prstDash val="solid"/>
+                      <a:round/>
+                      <a:headEnd type="none" w="med" len="med"/>
+                      <a:tailEnd type="none" w="med" len="med"/>
+                    </a:lnT>
+                    <a:lnB w="12700" cap="flat" cmpd="sng" algn="ctr">
+                      <a:solidFill>
+                        <a:srgbClr val="E4E7F0"/>
+                      </a:solidFill>
+                      <a:prstDash val="solid"/>
+                      <a:round/>
+                      <a:headEnd type="none" w="med" len="med"/>
+                      <a:tailEnd type="none" w="med" len="med"/>
+                    </a:lnB>
+                    <a:solidFill>
+                      <a:srgbClr val="FFFFFF"/>
+                    </a:solidFill>
+                  </a:tcPr>
+                </a:tc>
+                <a:tc>
+                  <a:txBody>
+                    <a:bodyPr/>
+                    <a:lstStyle/>
+                    <a:p>
+                      <a:pPr algn="ctr" indent="0" marL="0">
+                        <a:buNone/>
+                      </a:pPr>
+                      <a:r>
+                        <a:rPr lang="en-US" sz="1100" dirty="0">
+                          <a:solidFill>
+                            <a:srgbClr val="33344A"/>
+                          </a:solidFill>
+                          <a:latin typeface="Calibri" pitchFamily="34" charset="0"/>
+                          <a:ea typeface="Calibri" pitchFamily="34" charset="-122"/>
+                          <a:cs typeface="Calibri" pitchFamily="34" charset="-120"/>
+                        </a:rPr>
+                        <a:t>0</a:t>
+                      </a:r>
+                      <a:endParaRPr lang="en-US" sz="1100" dirty="0">
+                        <a:latin typeface="Calibri" charset="0"/>
+                        <a:ea typeface="Calibri" charset="0"/>
+                        <a:cs typeface="Calibri" charset="0"/>
+                      </a:endParaRPr>
+                    </a:p>
+                  </a:txBody>
+                  <a:tcPr marL="45720" marR="45720" marT="18288" marB="18288" anchor="ctr">
+                    <a:lnL w="12700" cap="flat" cmpd="sng" algn="ctr">
+                      <a:solidFill>
+                        <a:srgbClr val="E4E7F0"/>
+                      </a:solidFill>
+                      <a:prstDash val="solid"/>
+                      <a:round/>
+                      <a:headEnd type="none" w="med" len="med"/>
+                      <a:tailEnd type="none" w="med" len="med"/>
+                    </a:lnL>
+                    <a:lnR w="12700" cap="flat" cmpd="sng" algn="ctr">
+                      <a:solidFill>
+                        <a:srgbClr val="E4E7F0"/>
+                      </a:solidFill>
+                      <a:prstDash val="solid"/>
+                      <a:round/>
+                      <a:headEnd type="none" w="med" len="med"/>
+                      <a:tailEnd type="none" w="med" len="med"/>
+                    </a:lnR>
+                    <a:lnT w="12700" cap="flat" cmpd="sng" algn="ctr">
+                      <a:solidFill>
+                        <a:srgbClr val="E4E7F0"/>
+                      </a:solidFill>
+                      <a:prstDash val="solid"/>
+                      <a:round/>
+                      <a:headEnd type="none" w="med" len="med"/>
+                      <a:tailEnd type="none" w="med" len="med"/>
+                    </a:lnT>
+                    <a:lnB w="12700" cap="flat" cmpd="sng" algn="ctr">
+                      <a:solidFill>
+                        <a:srgbClr val="E4E7F0"/>
+                      </a:solidFill>
+                      <a:prstDash val="solid"/>
+                      <a:round/>
+                      <a:headEnd type="none" w="med" len="med"/>
+                      <a:tailEnd type="none" w="med" len="med"/>
+                    </a:lnB>
+                    <a:solidFill>
+                      <a:srgbClr val="FFFFFF"/>
+                    </a:solidFill>
+                  </a:tcPr>
+                </a:tc>
+              </a:tr>
+              <a:tr h="187452">
+                <a:tc>
+                  <a:txBody>
+                    <a:bodyPr/>
+                    <a:lstStyle/>
+                    <a:p>
+                      <a:pPr algn="ctr" indent="0" marL="0">
+                        <a:buNone/>
+                      </a:pPr>
+                      <a:r>
+                        <a:rPr lang="en-US" sz="1100" b="1" dirty="0">
+                          <a:solidFill>
+                            <a:srgbClr val="33344A"/>
+                          </a:solidFill>
+                          <a:latin typeface="Calibri" pitchFamily="34" charset="0"/>
+                          <a:ea typeface="Calibri" pitchFamily="34" charset="-122"/>
+                          <a:cs typeface="Calibri" pitchFamily="34" charset="-120"/>
+                        </a:rPr>
+                        <a:t>B</a:t>
+                      </a:r>
+                      <a:endParaRPr lang="en-US" sz="1100" dirty="0">
+                        <a:latin typeface="Calibri" charset="0"/>
+                        <a:ea typeface="Calibri" charset="0"/>
+                        <a:cs typeface="Calibri" charset="0"/>
+                      </a:endParaRPr>
+                    </a:p>
+                  </a:txBody>
+                  <a:tcPr marL="45720" marR="45720" marT="18288" marB="18288" anchor="ctr">
+                    <a:lnL w="12700" cap="flat" cmpd="sng" algn="ctr">
+                      <a:solidFill>
+                        <a:srgbClr val="E4E7F0"/>
+                      </a:solidFill>
+                      <a:prstDash val="solid"/>
+                      <a:round/>
+                      <a:headEnd type="none" w="med" len="med"/>
+                      <a:tailEnd type="none" w="med" len="med"/>
+                    </a:lnL>
+                    <a:lnR w="12700" cap="flat" cmpd="sng" algn="ctr">
+                      <a:solidFill>
+                        <a:srgbClr val="E4E7F0"/>
+                      </a:solidFill>
+                      <a:prstDash val="solid"/>
+                      <a:round/>
+                      <a:headEnd type="none" w="med" len="med"/>
+                      <a:tailEnd type="none" w="med" len="med"/>
+                    </a:lnR>
+                    <a:lnT w="12700" cap="flat" cmpd="sng" algn="ctr">
+                      <a:solidFill>
+                        <a:srgbClr val="E4E7F0"/>
+                      </a:solidFill>
+                      <a:prstDash val="solid"/>
+                      <a:round/>
+                      <a:headEnd type="none" w="med" len="med"/>
+                      <a:tailEnd type="none" w="med" len="med"/>
+                    </a:lnT>
+                    <a:lnB w="12700" cap="flat" cmpd="sng" algn="ctr">
+                      <a:solidFill>
+                        <a:srgbClr val="E4E7F0"/>
+                      </a:solidFill>
+                      <a:prstDash val="solid"/>
+                      <a:round/>
+                      <a:headEnd type="none" w="med" len="med"/>
+                      <a:tailEnd type="none" w="med" len="med"/>
+                    </a:lnB>
+                    <a:solidFill>
+                      <a:srgbClr val="F4F6FB"/>
+                    </a:solidFill>
+                  </a:tcPr>
+                </a:tc>
+                <a:tc>
+                  <a:txBody>
+                    <a:bodyPr/>
+                    <a:lstStyle/>
+                    <a:p>
+                      <a:pPr algn="ctr" indent="0" marL="0">
+                        <a:buNone/>
+                      </a:pPr>
+                      <a:r>
+                        <a:rPr lang="en-US" sz="1100" dirty="0">
+                          <a:solidFill>
+                            <a:srgbClr val="33344A"/>
+                          </a:solidFill>
+                          <a:latin typeface="Calibri" pitchFamily="34" charset="0"/>
+                          <a:ea typeface="Calibri" pitchFamily="34" charset="-122"/>
+                          <a:cs typeface="Calibri" pitchFamily="34" charset="-120"/>
+                        </a:rPr>
+                        <a:t>1</a:t>
+                      </a:r>
+                      <a:endParaRPr lang="en-US" sz="1100" dirty="0">
+                        <a:latin typeface="Calibri" charset="0"/>
+                        <a:ea typeface="Calibri" charset="0"/>
+                        <a:cs typeface="Calibri" charset="0"/>
+                      </a:endParaRPr>
+                    </a:p>
+                  </a:txBody>
+                  <a:tcPr marL="45720" marR="45720" marT="18288" marB="18288" anchor="ctr">
+                    <a:lnL w="12700" cap="flat" cmpd="sng" algn="ctr">
+                      <a:solidFill>
+                        <a:srgbClr val="E4E7F0"/>
+                      </a:solidFill>
+                      <a:prstDash val="solid"/>
+                      <a:round/>
+                      <a:headEnd type="none" w="med" len="med"/>
+                      <a:tailEnd type="none" w="med" len="med"/>
+                    </a:lnL>
+                    <a:lnR w="12700" cap="flat" cmpd="sng" algn="ctr">
+                      <a:solidFill>
+                        <a:srgbClr val="E4E7F0"/>
+                      </a:solidFill>
+                      <a:prstDash val="solid"/>
+                      <a:round/>
+                      <a:headEnd type="none" w="med" len="med"/>
+                      <a:tailEnd type="none" w="med" len="med"/>
+                    </a:lnR>
+                    <a:lnT w="12700" cap="flat" cmpd="sng" algn="ctr">
+                      <a:solidFill>
+                        <a:srgbClr val="E4E7F0"/>
+                      </a:solidFill>
+                      <a:prstDash val="solid"/>
+                      <a:round/>
+                      <a:headEnd type="none" w="med" len="med"/>
+                      <a:tailEnd type="none" w="med" len="med"/>
+                    </a:lnT>
+                    <a:lnB w="12700" cap="flat" cmpd="sng" algn="ctr">
+                      <a:solidFill>
+                        <a:srgbClr val="E4E7F0"/>
+                      </a:solidFill>
+                      <a:prstDash val="solid"/>
+                      <a:round/>
+                      <a:headEnd type="none" w="med" len="med"/>
+                      <a:tailEnd type="none" w="med" len="med"/>
+                    </a:lnB>
+                    <a:solidFill>
+                      <a:srgbClr val="F4F6FB"/>
+                    </a:solidFill>
+                  </a:tcPr>
+                </a:tc>
+              </a:tr>
+              <a:tr h="187452">
+                <a:tc>
+                  <a:txBody>
+                    <a:bodyPr/>
+                    <a:lstStyle/>
+                    <a:p>
+                      <a:pPr algn="ctr" indent="0" marL="0">
+                        <a:buNone/>
+                      </a:pPr>
+                      <a:r>
+                        <a:rPr lang="en-US" sz="1100" b="1" dirty="0">
+                          <a:solidFill>
+                            <a:srgbClr val="33344A"/>
+                          </a:solidFill>
+                          <a:latin typeface="Calibri" pitchFamily="34" charset="0"/>
+                          <a:ea typeface="Calibri" pitchFamily="34" charset="-122"/>
+                          <a:cs typeface="Calibri" pitchFamily="34" charset="-120"/>
+                        </a:rPr>
+                        <a:t>C</a:t>
+                      </a:r>
+                      <a:endParaRPr lang="en-US" sz="1100" dirty="0">
+                        <a:latin typeface="Calibri" charset="0"/>
+                        <a:ea typeface="Calibri" charset="0"/>
+                        <a:cs typeface="Calibri" charset="0"/>
+                      </a:endParaRPr>
+                    </a:p>
+                  </a:txBody>
+                  <a:tcPr marL="45720" marR="45720" marT="18288" marB="18288" anchor="ctr">
+                    <a:lnL w="12700" cap="flat" cmpd="sng" algn="ctr">
+                      <a:solidFill>
+                        <a:srgbClr val="E4E7F0"/>
+                      </a:solidFill>
+                      <a:prstDash val="solid"/>
+                      <a:round/>
+                      <a:headEnd type="none" w="med" len="med"/>
+                      <a:tailEnd type="none" w="med" len="med"/>
+                    </a:lnL>
+                    <a:lnR w="12700" cap="flat" cmpd="sng" algn="ctr">
+                      <a:solidFill>
+                        <a:srgbClr val="E4E7F0"/>
+                      </a:solidFill>
+                      <a:prstDash val="solid"/>
+                      <a:round/>
+                      <a:headEnd type="none" w="med" len="med"/>
+                      <a:tailEnd type="none" w="med" len="med"/>
+                    </a:lnR>
+                    <a:lnT w="12700" cap="flat" cmpd="sng" algn="ctr">
+                      <a:solidFill>
+                        <a:srgbClr val="E4E7F0"/>
+                      </a:solidFill>
+                      <a:prstDash val="solid"/>
+                      <a:round/>
+                      <a:headEnd type="none" w="med" len="med"/>
+                      <a:tailEnd type="none" w="med" len="med"/>
+                    </a:lnT>
+                    <a:lnB w="12700" cap="flat" cmpd="sng" algn="ctr">
+                      <a:solidFill>
+                        <a:srgbClr val="E4E7F0"/>
+                      </a:solidFill>
+                      <a:prstDash val="solid"/>
+                      <a:round/>
+                      <a:headEnd type="none" w="med" len="med"/>
+                      <a:tailEnd type="none" w="med" len="med"/>
+                    </a:lnB>
+                    <a:solidFill>
+                      <a:srgbClr val="FFFFFF"/>
+                    </a:solidFill>
+                  </a:tcPr>
+                </a:tc>
+                <a:tc>
+                  <a:txBody>
+                    <a:bodyPr/>
+                    <a:lstStyle/>
+                    <a:p>
+                      <a:pPr algn="ctr" indent="0" marL="0">
+                        <a:buNone/>
+                      </a:pPr>
+                      <a:r>
+                        <a:rPr lang="en-US" sz="1100" dirty="0">
+                          <a:solidFill>
+                            <a:srgbClr val="33344A"/>
+                          </a:solidFill>
+                          <a:latin typeface="Calibri" pitchFamily="34" charset="0"/>
+                          <a:ea typeface="Calibri" pitchFamily="34" charset="-122"/>
+                          <a:cs typeface="Calibri" pitchFamily="34" charset="-120"/>
+                        </a:rPr>
+                        <a:t>0</a:t>
+                      </a:r>
+                      <a:endParaRPr lang="en-US" sz="1100" dirty="0">
+                        <a:latin typeface="Calibri" charset="0"/>
+                        <a:ea typeface="Calibri" charset="0"/>
+                        <a:cs typeface="Calibri" charset="0"/>
+                      </a:endParaRPr>
+                    </a:p>
+                  </a:txBody>
+                  <a:tcPr marL="45720" marR="45720" marT="18288" marB="18288" anchor="ctr">
+                    <a:lnL w="12700" cap="flat" cmpd="sng" algn="ctr">
+                      <a:solidFill>
+                        <a:srgbClr val="E4E7F0"/>
+                      </a:solidFill>
+                      <a:prstDash val="solid"/>
+                      <a:round/>
+                      <a:headEnd type="none" w="med" len="med"/>
+                      <a:tailEnd type="none" w="med" len="med"/>
+                    </a:lnL>
+                    <a:lnR w="12700" cap="flat" cmpd="sng" algn="ctr">
+                      <a:solidFill>
+                        <a:srgbClr val="E4E7F0"/>
+                      </a:solidFill>
+                      <a:prstDash val="solid"/>
+                      <a:round/>
+                      <a:headEnd type="none" w="med" len="med"/>
+                      <a:tailEnd type="none" w="med" len="med"/>
+                    </a:lnR>
+                    <a:lnT w="12700" cap="flat" cmpd="sng" algn="ctr">
+                      <a:solidFill>
+                        <a:srgbClr val="E4E7F0"/>
+                      </a:solidFill>
+                      <a:prstDash val="solid"/>
+                      <a:round/>
+                      <a:headEnd type="none" w="med" len="med"/>
+                      <a:tailEnd type="none" w="med" len="med"/>
+                    </a:lnT>
+                    <a:lnB w="12700" cap="flat" cmpd="sng" algn="ctr">
+                      <a:solidFill>
+                        <a:srgbClr val="E4E7F0"/>
+                      </a:solidFill>
+                      <a:prstDash val="solid"/>
+                      <a:round/>
+                      <a:headEnd type="none" w="med" len="med"/>
+                      <a:tailEnd type="none" w="med" len="med"/>
+                    </a:lnB>
+                    <a:solidFill>
+                      <a:srgbClr val="FFFFFF"/>
+                    </a:solidFill>
+                  </a:tcPr>
+                </a:tc>
+              </a:tr>
+            </a:tbl>
+          </a:graphicData>
+        </a:graphic>
+      </p:graphicFrame>
+      <p:sp>
+        <p:nvSpPr>
+          <p:cNvPr id="11" name="Text 8"/>
+          <p:cNvSpPr txBox="1"/>
+          <p:nvPr/>
+        </p:nvSpPr>
+        <p:spPr>
+          <a:xfrm>
+            <a:off x="6309360" y="2779776"/>
+            <a:ext cx="5074920" cy="201168"/>
+          </a:xfrm>
+          <a:prstGeom prst="rect">
+            <a:avLst/>
+          </a:prstGeom>
+          <a:noFill/>
+          <a:ln/>
+        </p:spPr>
+        <p:txBody>
+          <a:bodyPr wrap="square" lIns="0" tIns="0" rIns="0" bIns="0" rtlCol="0" anchor="ctr"/>
+          <a:lstStyle/>
+          <a:p>
+            <a:pPr indent="0" marL="0">
+              <a:buNone/>
+            </a:pPr>
+            <a:r>
+              <a:rPr lang="en-US" sz="1050" b="1" dirty="0">
+                <a:solidFill>
+                  <a:srgbClr val="B8892B"/>
+                </a:solidFill>
+                <a:latin typeface="Calibri" pitchFamily="34" charset="0"/>
+                <a:ea typeface="Calibri" pitchFamily="34" charset="-122"/>
+                <a:cs typeface="Calibri" pitchFamily="34" charset="-120"/>
+              </a:rPr>
+              <a:t>Treatment (D,E,F) → μ̂₁ model</a:t>
+            </a:r>
+            <a:endParaRPr lang="en-US" sz="1050" dirty="0"/>
+          </a:p>
+        </p:txBody>
+      </p:sp>
+      <p:graphicFrame>
+        <p:nvGraphicFramePr>
+          <p:cNvPr id="21" name="Table 1"/>
+          <p:cNvGraphicFramePr>
+            <a:graphicFrameLocks noGrp="1"/>
+          </p:cNvGraphicFramePr>
+          <p:nvPr>
+            <p:extLst>
+              <p:ext uri="{D42A27DB-BD31-4B8C-83A1-F6EECF244321}">
+                <p14:modId xmlns:p14="http://schemas.microsoft.com/office/powerpoint/2010/main" val="1579011935"/>
+              </p:ext>
+            </p:extLst>
+          </p:nvPr>
+        </p:nvGraphicFramePr>
+        <p:xfrm>
+          <a:off x="6309360" y="2999232"/>
+          <a:ext cx="5074920" cy="749808"/>
+        </p:xfrm>
+        <a:graphic>
+          <a:graphicData uri="http://schemas.openxmlformats.org/drawingml/2006/table">
+            <a:tbl>
+              <a:tblPr/>
+              <a:tblGrid>
+                <a:gridCol w="2537460"/>
+                <a:gridCol w="2537460"/>
+              </a:tblGrid>
+              <a:tr h="187452">
+                <a:tc>
+                  <a:txBody>
+                    <a:bodyPr/>
+                    <a:lstStyle/>
+                    <a:p>
+                      <a:pPr algn="ctr" indent="0" marL="0">
+                        <a:buNone/>
+                      </a:pPr>
+                      <a:r>
+                        <a:rPr lang="en-US" sz="1100" b="1" dirty="0">
+                          <a:solidFill>
+                            <a:srgbClr val="FFFFFF"/>
+                          </a:solidFill>
+                          <a:latin typeface="Calibri" pitchFamily="34" charset="0"/>
+                          <a:ea typeface="Calibri" pitchFamily="34" charset="-122"/>
+                          <a:cs typeface="Calibri" pitchFamily="34" charset="-120"/>
+                        </a:rPr>
+                        <a:t>Customer</a:t>
+                      </a:r>
+                      <a:endParaRPr lang="en-US" sz="1100" dirty="0">
+                        <a:latin typeface="Calibri" charset="0"/>
+                        <a:ea typeface="Calibri" charset="0"/>
+                        <a:cs typeface="Calibri" charset="0"/>
+                      </a:endParaRPr>
+                    </a:p>
+                  </a:txBody>
+                  <a:tcPr marL="45720" marR="45720" marT="18288" marB="18288" anchor="ctr">
+                    <a:lnL w="12700" cap="flat" cmpd="sng" algn="ctr">
+                      <a:solidFill>
+                        <a:srgbClr val="E4E7F0"/>
+                      </a:solidFill>
+                      <a:prstDash val="solid"/>
+                      <a:round/>
+                      <a:headEnd type="none" w="med" len="med"/>
+                      <a:tailEnd type="none" w="med" len="med"/>
+                    </a:lnL>
+                    <a:lnR w="12700" cap="flat" cmpd="sng" algn="ctr">
+                      <a:solidFill>
+                        <a:srgbClr val="E4E7F0"/>
+                      </a:solidFill>
+                      <a:prstDash val="solid"/>
+                      <a:round/>
+                      <a:headEnd type="none" w="med" len="med"/>
+                      <a:tailEnd type="none" w="med" len="med"/>
+                    </a:lnR>
+                    <a:lnT w="12700" cap="flat" cmpd="sng" algn="ctr">
+                      <a:solidFill>
+                        <a:srgbClr val="E4E7F0"/>
+                      </a:solidFill>
+                      <a:prstDash val="solid"/>
+                      <a:round/>
+                      <a:headEnd type="none" w="med" len="med"/>
+                      <a:tailEnd type="none" w="med" len="med"/>
+                    </a:lnT>
+                    <a:lnB w="12700" cap="flat" cmpd="sng" algn="ctr">
+                      <a:solidFill>
+                        <a:srgbClr val="E4E7F0"/>
+                      </a:solidFill>
+                      <a:prstDash val="solid"/>
+                      <a:round/>
+                      <a:headEnd type="none" w="med" len="med"/>
+                      <a:tailEnd type="none" w="med" len="med"/>
+                    </a:lnB>
+                    <a:solidFill>
+                      <a:srgbClr val="B8892B"/>
+                    </a:solidFill>
+                  </a:tcPr>
+                </a:tc>
+                <a:tc>
+                  <a:txBody>
+                    <a:bodyPr/>
+                    <a:lstStyle/>
+                    <a:p>
+                      <a:pPr algn="ctr" indent="0" marL="0">
+                        <a:buNone/>
+                      </a:pPr>
+                      <a:r>
+                        <a:rPr lang="en-US" sz="1100" b="1" dirty="0">
+                          <a:solidFill>
+                            <a:srgbClr val="FFFFFF"/>
+                          </a:solidFill>
+                          <a:latin typeface="Calibri" pitchFamily="34" charset="0"/>
+                          <a:ea typeface="Calibri" pitchFamily="34" charset="-122"/>
+                          <a:cs typeface="Calibri" pitchFamily="34" charset="-120"/>
+                        </a:rPr>
+                        <a:t>Applied</a:t>
+                      </a:r>
+                      <a:endParaRPr lang="en-US" sz="1100" dirty="0">
+                        <a:latin typeface="Calibri" charset="0"/>
+                        <a:ea typeface="Calibri" charset="0"/>
+                        <a:cs typeface="Calibri" charset="0"/>
+                      </a:endParaRPr>
+                    </a:p>
+                  </a:txBody>
+                  <a:tcPr marL="45720" marR="45720" marT="18288" marB="18288" anchor="ctr">
+                    <a:lnL w="12700" cap="flat" cmpd="sng" algn="ctr">
+                      <a:solidFill>
+                        <a:srgbClr val="E4E7F0"/>
+                      </a:solidFill>
+                      <a:prstDash val="solid"/>
+                      <a:round/>
+                      <a:headEnd type="none" w="med" len="med"/>
+                      <a:tailEnd type="none" w="med" len="med"/>
+                    </a:lnL>
+                    <a:lnR w="12700" cap="flat" cmpd="sng" algn="ctr">
+                      <a:solidFill>
+                        <a:srgbClr val="E4E7F0"/>
+                      </a:solidFill>
+                      <a:prstDash val="solid"/>
+                      <a:round/>
+                      <a:headEnd type="none" w="med" len="med"/>
+                      <a:tailEnd type="none" w="med" len="med"/>
+                    </a:lnR>
+                    <a:lnT w="12700" cap="flat" cmpd="sng" algn="ctr">
+                      <a:solidFill>
+                        <a:srgbClr val="E4E7F0"/>
+                      </a:solidFill>
+                      <a:prstDash val="solid"/>
+                      <a:round/>
+                      <a:headEnd type="none" w="med" len="med"/>
+                      <a:tailEnd type="none" w="med" len="med"/>
+                    </a:lnT>
+                    <a:lnB w="12700" cap="flat" cmpd="sng" algn="ctr">
+                      <a:solidFill>
+                        <a:srgbClr val="E4E7F0"/>
+                      </a:solidFill>
+                      <a:prstDash val="solid"/>
+                      <a:round/>
+                      <a:headEnd type="none" w="med" len="med"/>
+                      <a:tailEnd type="none" w="med" len="med"/>
+                    </a:lnB>
+                    <a:solidFill>
+                      <a:srgbClr val="B8892B"/>
+                    </a:solidFill>
+                  </a:tcPr>
+                </a:tc>
+              </a:tr>
+              <a:tr h="187452">
+                <a:tc>
+                  <a:txBody>
+                    <a:bodyPr/>
+                    <a:lstStyle/>
+                    <a:p>
+                      <a:pPr algn="ctr" indent="0" marL="0">
+                        <a:buNone/>
+                      </a:pPr>
+                      <a:r>
+                        <a:rPr lang="en-US" sz="1100" b="1" dirty="0">
+                          <a:solidFill>
+                            <a:srgbClr val="33344A"/>
+                          </a:solidFill>
+                          <a:latin typeface="Calibri" pitchFamily="34" charset="0"/>
+                          <a:ea typeface="Calibri" pitchFamily="34" charset="-122"/>
+                          <a:cs typeface="Calibri" pitchFamily="34" charset="-120"/>
+                        </a:rPr>
+                        <a:t>D</a:t>
+                      </a:r>
+                      <a:endParaRPr lang="en-US" sz="1100" dirty="0">
+                        <a:latin typeface="Calibri" charset="0"/>
+                        <a:ea typeface="Calibri" charset="0"/>
+                        <a:cs typeface="Calibri" charset="0"/>
+                      </a:endParaRPr>
+                    </a:p>
+                  </a:txBody>
+                  <a:tcPr marL="45720" marR="45720" marT="18288" marB="18288" anchor="ctr">
+                    <a:lnL w="12700" cap="flat" cmpd="sng" algn="ctr">
+                      <a:solidFill>
+                        <a:srgbClr val="E4E7F0"/>
+                      </a:solidFill>
+                      <a:prstDash val="solid"/>
+                      <a:round/>
+                      <a:headEnd type="none" w="med" len="med"/>
+                      <a:tailEnd type="none" w="med" len="med"/>
+                    </a:lnL>
+                    <a:lnR w="12700" cap="flat" cmpd="sng" algn="ctr">
+                      <a:solidFill>
+                        <a:srgbClr val="E4E7F0"/>
+                      </a:solidFill>
+                      <a:prstDash val="solid"/>
+                      <a:round/>
+                      <a:headEnd type="none" w="med" len="med"/>
+                      <a:tailEnd type="none" w="med" len="med"/>
+                    </a:lnR>
+                    <a:lnT w="12700" cap="flat" cmpd="sng" algn="ctr">
+                      <a:solidFill>
+                        <a:srgbClr val="E4E7F0"/>
+                      </a:solidFill>
+                      <a:prstDash val="solid"/>
+                      <a:round/>
+                      <a:headEnd type="none" w="med" len="med"/>
+                      <a:tailEnd type="none" w="med" len="med"/>
+                    </a:lnT>
+                    <a:lnB w="12700" cap="flat" cmpd="sng" algn="ctr">
+                      <a:solidFill>
+                        <a:srgbClr val="E4E7F0"/>
+                      </a:solidFill>
+                      <a:prstDash val="solid"/>
+                      <a:round/>
+                      <a:headEnd type="none" w="med" len="med"/>
+                      <a:tailEnd type="none" w="med" len="med"/>
+                    </a:lnB>
+                    <a:solidFill>
+                      <a:srgbClr val="FFFFFF"/>
+                    </a:solidFill>
+                  </a:tcPr>
+                </a:tc>
+                <a:tc>
+                  <a:txBody>
+                    <a:bodyPr/>
+                    <a:lstStyle/>
+                    <a:p>
+                      <a:pPr algn="ctr" indent="0" marL="0">
+                        <a:buNone/>
+                      </a:pPr>
+                      <a:r>
+                        <a:rPr lang="en-US" sz="1100" dirty="0">
+                          <a:solidFill>
+                            <a:srgbClr val="33344A"/>
+                          </a:solidFill>
+                          <a:latin typeface="Calibri" pitchFamily="34" charset="0"/>
+                          <a:ea typeface="Calibri" pitchFamily="34" charset="-122"/>
+                          <a:cs typeface="Calibri" pitchFamily="34" charset="-120"/>
+                        </a:rPr>
+                        <a:t>1</a:t>
+                      </a:r>
+                      <a:endParaRPr lang="en-US" sz="1100" dirty="0">
+                        <a:latin typeface="Calibri" charset="0"/>
+                        <a:ea typeface="Calibri" charset="0"/>
+                        <a:cs typeface="Calibri" charset="0"/>
+                      </a:endParaRPr>
+                    </a:p>
+                  </a:txBody>
+                  <a:tcPr marL="45720" marR="45720" marT="18288" marB="18288" anchor="ctr">
+                    <a:lnL w="12700" cap="flat" cmpd="sng" algn="ctr">
+                      <a:solidFill>
+                        <a:srgbClr val="E4E7F0"/>
+                      </a:solidFill>
+                      <a:prstDash val="solid"/>
+                      <a:round/>
+                      <a:headEnd type="none" w="med" len="med"/>
+                      <a:tailEnd type="none" w="med" len="med"/>
+                    </a:lnL>
+                    <a:lnR w="12700" cap="flat" cmpd="sng" algn="ctr">
+                      <a:solidFill>
+                        <a:srgbClr val="E4E7F0"/>
+                      </a:solidFill>
+                      <a:prstDash val="solid"/>
+                      <a:round/>
+                      <a:headEnd type="none" w="med" len="med"/>
+                      <a:tailEnd type="none" w="med" len="med"/>
+                    </a:lnR>
+                    <a:lnT w="12700" cap="flat" cmpd="sng" algn="ctr">
+                      <a:solidFill>
+                        <a:srgbClr val="E4E7F0"/>
+                      </a:solidFill>
+                      <a:prstDash val="solid"/>
+                      <a:round/>
+                      <a:headEnd type="none" w="med" len="med"/>
+                      <a:tailEnd type="none" w="med" len="med"/>
+                    </a:lnT>
+                    <a:lnB w="12700" cap="flat" cmpd="sng" algn="ctr">
+                      <a:solidFill>
+                        <a:srgbClr val="E4E7F0"/>
+                      </a:solidFill>
+                      <a:prstDash val="solid"/>
+                      <a:round/>
+                      <a:headEnd type="none" w="med" len="med"/>
+                      <a:tailEnd type="none" w="med" len="med"/>
+                    </a:lnB>
+                    <a:solidFill>
+                      <a:srgbClr val="FFFFFF"/>
+                    </a:solidFill>
+                  </a:tcPr>
+                </a:tc>
+              </a:tr>
+              <a:tr h="187452">
+                <a:tc>
+                  <a:txBody>
+                    <a:bodyPr/>
+                    <a:lstStyle/>
+                    <a:p>
+                      <a:pPr algn="ctr" indent="0" marL="0">
+                        <a:buNone/>
+                      </a:pPr>
+                      <a:r>
+                        <a:rPr lang="en-US" sz="1100" b="1" dirty="0">
+                          <a:solidFill>
+                            <a:srgbClr val="33344A"/>
+                          </a:solidFill>
+                          <a:latin typeface="Calibri" pitchFamily="34" charset="0"/>
+                          <a:ea typeface="Calibri" pitchFamily="34" charset="-122"/>
+                          <a:cs typeface="Calibri" pitchFamily="34" charset="-120"/>
+                        </a:rPr>
+                        <a:t>E</a:t>
+                      </a:r>
+                      <a:endParaRPr lang="en-US" sz="1100" dirty="0">
+                        <a:latin typeface="Calibri" charset="0"/>
+                        <a:ea typeface="Calibri" charset="0"/>
+                        <a:cs typeface="Calibri" charset="0"/>
+                      </a:endParaRPr>
+                    </a:p>
+                  </a:txBody>
+                  <a:tcPr marL="45720" marR="45720" marT="18288" marB="18288" anchor="ctr">
+                    <a:lnL w="12700" cap="flat" cmpd="sng" algn="ctr">
+                      <a:solidFill>
+                        <a:srgbClr val="E4E7F0"/>
+                      </a:solidFill>
+                      <a:prstDash val="solid"/>
+                      <a:round/>
+                      <a:headEnd type="none" w="med" len="med"/>
+                      <a:tailEnd type="none" w="med" len="med"/>
+                    </a:lnL>
+                    <a:lnR w="12700" cap="flat" cmpd="sng" algn="ctr">
+                      <a:solidFill>
+                        <a:srgbClr val="E4E7F0"/>
+                      </a:solidFill>
+                      <a:prstDash val="solid"/>
+                      <a:round/>
+                      <a:headEnd type="none" w="med" len="med"/>
+                      <a:tailEnd type="none" w="med" len="med"/>
+                    </a:lnR>
+                    <a:lnT w="12700" cap="flat" cmpd="sng" algn="ctr">
+                      <a:solidFill>
+                        <a:srgbClr val="E4E7F0"/>
+                      </a:solidFill>
+                      <a:prstDash val="solid"/>
+                      <a:round/>
+                      <a:headEnd type="none" w="med" len="med"/>
+                      <a:tailEnd type="none" w="med" len="med"/>
+                    </a:lnT>
+                    <a:lnB w="12700" cap="flat" cmpd="sng" algn="ctr">
+                      <a:solidFill>
+                        <a:srgbClr val="E4E7F0"/>
+                      </a:solidFill>
+                      <a:prstDash val="solid"/>
+                      <a:round/>
+                      <a:headEnd type="none" w="med" len="med"/>
+                      <a:tailEnd type="none" w="med" len="med"/>
+                    </a:lnB>
+                    <a:solidFill>
+                      <a:srgbClr val="F4F6FB"/>
+                    </a:solidFill>
+                  </a:tcPr>
+                </a:tc>
+                <a:tc>
+                  <a:txBody>
+                    <a:bodyPr/>
+                    <a:lstStyle/>
+                    <a:p>
+                      <a:pPr algn="ctr" indent="0" marL="0">
+                        <a:buNone/>
+                      </a:pPr>
+                      <a:r>
+                        <a:rPr lang="en-US" sz="1100" dirty="0">
+                          <a:solidFill>
+                            <a:srgbClr val="33344A"/>
+                          </a:solidFill>
+                          <a:latin typeface="Calibri" pitchFamily="34" charset="0"/>
+                          <a:ea typeface="Calibri" pitchFamily="34" charset="-122"/>
+                          <a:cs typeface="Calibri" pitchFamily="34" charset="-120"/>
+                        </a:rPr>
+                        <a:t>0</a:t>
+                      </a:r>
+                      <a:endParaRPr lang="en-US" sz="1100" dirty="0">
+                        <a:latin typeface="Calibri" charset="0"/>
+                        <a:ea typeface="Calibri" charset="0"/>
+                        <a:cs typeface="Calibri" charset="0"/>
+                      </a:endParaRPr>
+                    </a:p>
+                  </a:txBody>
+                  <a:tcPr marL="45720" marR="45720" marT="18288" marB="18288" anchor="ctr">
+                    <a:lnL w="12700" cap="flat" cmpd="sng" algn="ctr">
+                      <a:solidFill>
+                        <a:srgbClr val="E4E7F0"/>
+                      </a:solidFill>
+                      <a:prstDash val="solid"/>
+                      <a:round/>
+                      <a:headEnd type="none" w="med" len="med"/>
+                      <a:tailEnd type="none" w="med" len="med"/>
+                    </a:lnL>
+                    <a:lnR w="12700" cap="flat" cmpd="sng" algn="ctr">
+                      <a:solidFill>
+                        <a:srgbClr val="E4E7F0"/>
+                      </a:solidFill>
+                      <a:prstDash val="solid"/>
+                      <a:round/>
+                      <a:headEnd type="none" w="med" len="med"/>
+                      <a:tailEnd type="none" w="med" len="med"/>
+                    </a:lnR>
+                    <a:lnT w="12700" cap="flat" cmpd="sng" algn="ctr">
+                      <a:solidFill>
+                        <a:srgbClr val="E4E7F0"/>
+                      </a:solidFill>
+                      <a:prstDash val="solid"/>
+                      <a:round/>
+                      <a:headEnd type="none" w="med" len="med"/>
+                      <a:tailEnd type="none" w="med" len="med"/>
+                    </a:lnT>
+                    <a:lnB w="12700" cap="flat" cmpd="sng" algn="ctr">
+                      <a:solidFill>
+                        <a:srgbClr val="E4E7F0"/>
+                      </a:solidFill>
+                      <a:prstDash val="solid"/>
+                      <a:round/>
+                      <a:headEnd type="none" w="med" len="med"/>
+                      <a:tailEnd type="none" w="med" len="med"/>
+                    </a:lnB>
+                    <a:solidFill>
+                      <a:srgbClr val="F4F6FB"/>
+                    </a:solidFill>
+                  </a:tcPr>
+                </a:tc>
+              </a:tr>
+              <a:tr h="187452">
+                <a:tc>
+                  <a:txBody>
+                    <a:bodyPr/>
+                    <a:lstStyle/>
+                    <a:p>
+                      <a:pPr algn="ctr" indent="0" marL="0">
+                        <a:buNone/>
+                      </a:pPr>
+                      <a:r>
+                        <a:rPr lang="en-US" sz="1100" b="1" dirty="0">
+                          <a:solidFill>
+                            <a:srgbClr val="33344A"/>
+                          </a:solidFill>
+                          <a:latin typeface="Calibri" pitchFamily="34" charset="0"/>
+                          <a:ea typeface="Calibri" pitchFamily="34" charset="-122"/>
+                          <a:cs typeface="Calibri" pitchFamily="34" charset="-120"/>
+                        </a:rPr>
+                        <a:t>F</a:t>
+                      </a:r>
+                      <a:endParaRPr lang="en-US" sz="1100" dirty="0">
+                        <a:latin typeface="Calibri" charset="0"/>
+                        <a:ea typeface="Calibri" charset="0"/>
+                        <a:cs typeface="Calibri" charset="0"/>
+                      </a:endParaRPr>
+                    </a:p>
+                  </a:txBody>
+                  <a:tcPr marL="45720" marR="45720" marT="18288" marB="18288" anchor="ctr">
+                    <a:lnL w="12700" cap="flat" cmpd="sng" algn="ctr">
+                      <a:solidFill>
+                        <a:srgbClr val="E4E7F0"/>
+                      </a:solidFill>
+                      <a:prstDash val="solid"/>
+                      <a:round/>
+                      <a:headEnd type="none" w="med" len="med"/>
+                      <a:tailEnd type="none" w="med" len="med"/>
+                    </a:lnL>
+                    <a:lnR w="12700" cap="flat" cmpd="sng" algn="ctr">
+                      <a:solidFill>
+                        <a:srgbClr val="E4E7F0"/>
+                      </a:solidFill>
+                      <a:prstDash val="solid"/>
+                      <a:round/>
+                      <a:headEnd type="none" w="med" len="med"/>
+                      <a:tailEnd type="none" w="med" len="med"/>
+                    </a:lnR>
+                    <a:lnT w="12700" cap="flat" cmpd="sng" algn="ctr">
+                      <a:solidFill>
+                        <a:srgbClr val="E4E7F0"/>
+                      </a:solidFill>
+                      <a:prstDash val="solid"/>
+                      <a:round/>
+                      <a:headEnd type="none" w="med" len="med"/>
+                      <a:tailEnd type="none" w="med" len="med"/>
+                    </a:lnT>
+                    <a:lnB w="12700" cap="flat" cmpd="sng" algn="ctr">
+                      <a:solidFill>
+                        <a:srgbClr val="E4E7F0"/>
+                      </a:solidFill>
+                      <a:prstDash val="solid"/>
+                      <a:round/>
+                      <a:headEnd type="none" w="med" len="med"/>
+                      <a:tailEnd type="none" w="med" len="med"/>
+                    </a:lnB>
+                    <a:solidFill>
+                      <a:srgbClr val="FFFFFF"/>
+                    </a:solidFill>
+                  </a:tcPr>
+                </a:tc>
+                <a:tc>
+                  <a:txBody>
+                    <a:bodyPr/>
+                    <a:lstStyle/>
+                    <a:p>
+                      <a:pPr algn="ctr" indent="0" marL="0">
+                        <a:buNone/>
+                      </a:pPr>
+                      <a:r>
+                        <a:rPr lang="en-US" sz="1100" dirty="0">
+                          <a:solidFill>
+                            <a:srgbClr val="33344A"/>
+                          </a:solidFill>
+                          <a:latin typeface="Calibri" pitchFamily="34" charset="0"/>
+                          <a:ea typeface="Calibri" pitchFamily="34" charset="-122"/>
+                          <a:cs typeface="Calibri" pitchFamily="34" charset="-120"/>
+                        </a:rPr>
+                        <a:t>1</a:t>
+                      </a:r>
+                      <a:endParaRPr lang="en-US" sz="1100" dirty="0">
+                        <a:latin typeface="Calibri" charset="0"/>
+                        <a:ea typeface="Calibri" charset="0"/>
+                        <a:cs typeface="Calibri" charset="0"/>
+                      </a:endParaRPr>
+                    </a:p>
+                  </a:txBody>
+                  <a:tcPr marL="45720" marR="45720" marT="18288" marB="18288" anchor="ctr">
+                    <a:lnL w="12700" cap="flat" cmpd="sng" algn="ctr">
+                      <a:solidFill>
+                        <a:srgbClr val="E4E7F0"/>
+                      </a:solidFill>
+                      <a:prstDash val="solid"/>
+                      <a:round/>
+                      <a:headEnd type="none" w="med" len="med"/>
+                      <a:tailEnd type="none" w="med" len="med"/>
+                    </a:lnL>
+                    <a:lnR w="12700" cap="flat" cmpd="sng" algn="ctr">
+                      <a:solidFill>
+                        <a:srgbClr val="E4E7F0"/>
+                      </a:solidFill>
+                      <a:prstDash val="solid"/>
+                      <a:round/>
+                      <a:headEnd type="none" w="med" len="med"/>
+                      <a:tailEnd type="none" w="med" len="med"/>
+                    </a:lnR>
+                    <a:lnT w="12700" cap="flat" cmpd="sng" algn="ctr">
+                      <a:solidFill>
+                        <a:srgbClr val="E4E7F0"/>
+                      </a:solidFill>
+                      <a:prstDash val="solid"/>
+                      <a:round/>
+                      <a:headEnd type="none" w="med" len="med"/>
+                      <a:tailEnd type="none" w="med" len="med"/>
+                    </a:lnT>
+                    <a:lnB w="12700" cap="flat" cmpd="sng" algn="ctr">
+                      <a:solidFill>
+                        <a:srgbClr val="E4E7F0"/>
+                      </a:solidFill>
+                      <a:prstDash val="solid"/>
+                      <a:round/>
+                      <a:headEnd type="none" w="med" len="med"/>
+                      <a:tailEnd type="none" w="med" len="med"/>
+                    </a:lnB>
+                    <a:solidFill>
+                      <a:srgbClr val="FFFFFF"/>
+                    </a:solidFill>
+                  </a:tcPr>
+                </a:tc>
+              </a:tr>
+            </a:tbl>
+          </a:graphicData>
+        </a:graphic>
+      </p:graphicFrame>
+      <p:sp>
+        <p:nvSpPr>
+          <p:cNvPr id="13" name="Shape 9"/>
+          <p:cNvSpPr/>
+          <p:nvPr/>
+        </p:nvSpPr>
+        <p:spPr>
+          <a:xfrm>
+            <a:off x="548640" y="4032504"/>
+            <a:ext cx="11064240" cy="2286000"/>
+          </a:xfrm>
+          <a:prstGeom prst="roundRect">
+            <a:avLst>
+              <a:gd name="adj" fmla="val 4000"/>
+            </a:avLst>
+          </a:prstGeom>
+          <a:solidFill>
+            <a:srgbClr val="FBF3E1"/>
+          </a:solidFill>
+          <a:ln w="12700">
+            <a:solidFill>
+              <a:srgbClr val="B8892B"/>
+            </a:solidFill>
+            <a:prstDash val="solid"/>
+          </a:ln>
+        </p:spPr>
+      </p:sp>
+      <p:sp>
+        <p:nvSpPr>
+          <p:cNvPr id="14" name="Text 10"/>
+          <p:cNvSpPr txBox="1"/>
+          <p:nvPr/>
+        </p:nvSpPr>
+        <p:spPr>
+          <a:xfrm>
+            <a:off x="777240" y="4160520"/>
+            <a:ext cx="10607040" cy="237744"/>
+          </a:xfrm>
+          <a:prstGeom prst="rect">
+            <a:avLst/>
+          </a:prstGeom>
+          <a:noFill/>
+          <a:ln/>
+        </p:spPr>
+        <p:txBody>
+          <a:bodyPr wrap="square" lIns="0" tIns="0" rIns="0" bIns="0" rtlCol="0" anchor="ctr"/>
+          <a:lstStyle/>
+          <a:p>
+            <a:pPr indent="0" marL="0">
+              <a:buNone/>
+            </a:pPr>
+            <a:r>
+              <a:rPr lang="en-US" sz="1100" b="1" dirty="0">
+                <a:solidFill>
+                  <a:srgbClr val="B8892B"/>
+                </a:solidFill>
+                <a:latin typeface="Calibri" pitchFamily="34" charset="0"/>
+                <a:ea typeface="Calibri" pitchFamily="34" charset="-122"/>
+                <a:cs typeface="Calibri" pitchFamily="34" charset="-120"/>
+              </a:rPr>
+              <a:t>SCORE   </a:t>
+            </a:r>
+            <a:pPr indent="0" marL="0">
+              <a:buNone/>
+            </a:pPr>
+            <a:r>
+              <a:rPr lang="en-US" sz="1100" i="1" dirty="0">
+                <a:solidFill>
+                  <a:srgbClr val="6B7280"/>
+                </a:solidFill>
+                <a:latin typeface="Calibri" pitchFamily="34" charset="0"/>
+                <a:ea typeface="Calibri" pitchFamily="34" charset="-122"/>
+                <a:cs typeface="Calibri" pitchFamily="34" charset="-120"/>
+              </a:rPr>
+              <a:t>once trained, BOTH models score EVERY customer — including their own counterfactual arm</a:t>
+            </a:r>
+            <a:endParaRPr lang="en-US" sz="1100" dirty="0"/>
+          </a:p>
+        </p:txBody>
+      </p:sp>
+      <p:graphicFrame>
+        <p:nvGraphicFramePr>
+          <p:cNvPr id="31" name="Table 2"/>
+          <p:cNvGraphicFramePr>
+            <a:graphicFrameLocks noGrp="1"/>
+          </p:cNvGraphicFramePr>
+          <p:nvPr>
+            <p:extLst>
+              <p:ext uri="{D42A27DB-BD31-4B8C-83A1-F6EECF244321}">
+                <p14:modId xmlns:p14="http://schemas.microsoft.com/office/powerpoint/2010/main" val="1579011935"/>
+              </p:ext>
+            </p:extLst>
+          </p:nvPr>
+        </p:nvGraphicFramePr>
+        <p:xfrm>
+          <a:off x="914400" y="4471416"/>
+          <a:ext cx="10332720" cy="1709928"/>
+        </p:xfrm>
+        <a:graphic>
+          <a:graphicData uri="http://schemas.openxmlformats.org/drawingml/2006/table">
+            <a:tbl>
+              <a:tblPr/>
+              <a:tblGrid>
+                <a:gridCol w="1371600"/>
+                <a:gridCol w="1783080"/>
+                <a:gridCol w="1371600"/>
+                <a:gridCol w="2880360"/>
+                <a:gridCol w="2926080"/>
+              </a:tblGrid>
+              <a:tr h="244275">
+                <a:tc>
+                  <a:txBody>
+                    <a:bodyPr/>
+                    <a:lstStyle/>
+                    <a:p>
+                      <a:pPr algn="ctr" indent="0" marL="0">
+                        <a:buNone/>
+                      </a:pPr>
+                      <a:r>
+                        <a:rPr lang="en-US" sz="950" b="1" dirty="0">
+                          <a:solidFill>
+                            <a:srgbClr val="FFFFFF"/>
+                          </a:solidFill>
+                          <a:latin typeface="Calibri" pitchFamily="34" charset="0"/>
+                          <a:ea typeface="Calibri" pitchFamily="34" charset="-122"/>
+                          <a:cs typeface="Calibri" pitchFamily="34" charset="-120"/>
+                        </a:rPr>
+                        <a:t>Customer</a:t>
+                      </a:r>
+                      <a:endParaRPr lang="en-US" sz="950" dirty="0">
+                        <a:latin typeface="Calibri" charset="0"/>
+                        <a:ea typeface="Calibri" charset="0"/>
+                        <a:cs typeface="Calibri" charset="0"/>
+                      </a:endParaRPr>
+                    </a:p>
+                  </a:txBody>
+                  <a:tcPr marL="73152" marR="73152" marT="36576" marB="36576" anchor="ctr">
+                    <a:lnL w="12700" cap="flat" cmpd="sng" algn="ctr">
+                      <a:solidFill>
+                        <a:srgbClr val="F0DFB0"/>
+                      </a:solidFill>
+                      <a:prstDash val="solid"/>
+                      <a:round/>
+                      <a:headEnd type="none" w="med" len="med"/>
+                      <a:tailEnd type="none" w="med" len="med"/>
+                    </a:lnL>
+                    <a:lnR w="12700" cap="flat" cmpd="sng" algn="ctr">
+                      <a:solidFill>
+                        <a:srgbClr val="F0DFB0"/>
+                      </a:solidFill>
+                      <a:prstDash val="solid"/>
+                      <a:round/>
+                      <a:headEnd type="none" w="med" len="med"/>
+                      <a:tailEnd type="none" w="med" len="med"/>
+                    </a:lnR>
+                    <a:lnT w="12700" cap="flat" cmpd="sng" algn="ctr">
+                      <a:solidFill>
+                        <a:srgbClr val="F0DFB0"/>
+                      </a:solidFill>
+                      <a:prstDash val="solid"/>
+                      <a:round/>
+                      <a:headEnd type="none" w="med" len="med"/>
+                      <a:tailEnd type="none" w="med" len="med"/>
+                    </a:lnT>
+                    <a:lnB w="12700" cap="flat" cmpd="sng" algn="ctr">
+                      <a:solidFill>
+                        <a:srgbClr val="F0DFB0"/>
                       </a:solidFill>
                       <a:prstDash val="solid"/>
                       <a:round/>
@@ -3051,7 +4346,7 @@
                         <a:buNone/>
                       </a:pPr>
                       <a:r>
-                        <a:rPr lang="en-US" sz="1250" b="1" dirty="0">
+                        <a:rPr lang="en-US" sz="950" b="1" dirty="0">
                           <a:solidFill>
                             <a:srgbClr val="FFFFFF"/>
                           </a:solidFill>
@@ -3059,19 +4354,19 @@
                           <a:ea typeface="Calibri" pitchFamily="34" charset="-122"/>
                           <a:cs typeface="Calibri" pitchFamily="34" charset="-120"/>
                         </a:rPr>
-                        <a:t>Applied</a:t>
+                        <a:t>new_offer</a:t>
                       </a:r>
-                      <a:endParaRPr lang="en-US" sz="1250" dirty="0">
+                      <a:endParaRPr lang="en-US" sz="950" dirty="0">
                         <a:latin typeface="Calibri" charset="0"/>
                         <a:ea typeface="Calibri" charset="0"/>
                         <a:cs typeface="Calibri" charset="0"/>
                       </a:endParaRPr>
                     </a:p>
                   </a:txBody>
-                  <a:tcPr marL="91440" marR="91440" marT="45720" marB="45720" anchor="ctr">
+                  <a:tcPr marL="73152" marR="73152" marT="36576" marB="36576" anchor="ctr">
                     <a:lnL w="12700" cap="flat" cmpd="sng" algn="ctr">
                       <a:solidFill>
-                        <a:srgbClr val="E4E7F0"/>
+                        <a:srgbClr val="F0DFB0"/>
                       </a:solidFill>
                       <a:prstDash val="solid"/>
                       <a:round/>
@@ -3080,7 +4375,7 @@
                     </a:lnL>
                     <a:lnR w="12700" cap="flat" cmpd="sng" algn="ctr">
                       <a:solidFill>
-                        <a:srgbClr val="E4E7F0"/>
+                        <a:srgbClr val="F0DFB0"/>
                       </a:solidFill>
                       <a:prstDash val="solid"/>
                       <a:round/>
@@ -3089,7 +4384,7 @@
                     </a:lnR>
                     <a:lnT w="12700" cap="flat" cmpd="sng" algn="ctr">
                       <a:solidFill>
-                        <a:srgbClr val="E4E7F0"/>
+                        <a:srgbClr val="F0DFB0"/>
                       </a:solidFill>
                       <a:prstDash val="solid"/>
                       <a:round/>
@@ -3098,7 +4393,7 @@
                     </a:lnT>
                     <a:lnB w="12700" cap="flat" cmpd="sng" algn="ctr">
                       <a:solidFill>
-                        <a:srgbClr val="E4E7F0"/>
+                        <a:srgbClr val="F0DFB0"/>
                       </a:solidFill>
                       <a:prstDash val="solid"/>
                       <a:round/>
@@ -3119,7 +4414,7 @@
                         <a:buNone/>
                       </a:pPr>
                       <a:r>
-                        <a:rPr lang="en-US" sz="1250" b="1" dirty="0">
+                        <a:rPr lang="en-US" sz="950" b="1" dirty="0">
                           <a:solidFill>
                             <a:srgbClr val="FFFFFF"/>
                           </a:solidFill>
@@ -3127,40 +4422,19 @@
                           <a:ea typeface="Calibri" pitchFamily="34" charset="-122"/>
                           <a:cs typeface="Calibri" pitchFamily="34" charset="-120"/>
                         </a:rPr>
-                        <a:t>μ̂₀(x)</a:t>
+                        <a:t>Applied</a:t>
                       </a:r>
-                      <a:endParaRPr lang="en-US" sz="1250" dirty="0">
-                        <a:latin typeface="Calibri" charset="0"/>
-                        <a:ea typeface="Calibri" charset="0"/>
-                        <a:cs typeface="Calibri" charset="0"/>
-                      </a:endParaRPr>
-                    </a:p>
-                    <a:p>
-                      <a:pPr algn="ctr" indent="0" marL="0">
-                        <a:buNone/>
-                      </a:pPr>
-                      <a:r>
-                        <a:rPr lang="en-US" sz="1250" b="1" dirty="0">
-                          <a:solidFill>
-                            <a:srgbClr val="FFFFFF"/>
-                          </a:solidFill>
-                          <a:latin typeface="Calibri" pitchFamily="34" charset="0"/>
-                          <a:ea typeface="Calibri" pitchFamily="34" charset="-122"/>
-                          <a:cs typeface="Calibri" pitchFamily="34" charset="-120"/>
-                        </a:rPr>
-                        <a:t>pred. Applied, old offer</a:t>
-                      </a:r>
-                      <a:endParaRPr lang="en-US" sz="1250" dirty="0">
+                      <a:endParaRPr lang="en-US" sz="950" dirty="0">
                         <a:latin typeface="Calibri" charset="0"/>
                         <a:ea typeface="Calibri" charset="0"/>
                         <a:cs typeface="Calibri" charset="0"/>
                       </a:endParaRPr>
                     </a:p>
                   </a:txBody>
-                  <a:tcPr marL="91440" marR="91440" marT="45720" marB="45720" anchor="ctr">
+                  <a:tcPr marL="73152" marR="73152" marT="36576" marB="36576" anchor="ctr">
                     <a:lnL w="12700" cap="flat" cmpd="sng" algn="ctr">
                       <a:solidFill>
-                        <a:srgbClr val="E4E7F0"/>
+                        <a:srgbClr val="F0DFB0"/>
                       </a:solidFill>
                       <a:prstDash val="solid"/>
                       <a:round/>
@@ -3169,7 +4443,7 @@
                     </a:lnL>
                     <a:lnR w="12700" cap="flat" cmpd="sng" algn="ctr">
                       <a:solidFill>
-                        <a:srgbClr val="E4E7F0"/>
+                        <a:srgbClr val="F0DFB0"/>
                       </a:solidFill>
                       <a:prstDash val="solid"/>
                       <a:round/>
@@ -3178,7 +4452,7 @@
                     </a:lnR>
                     <a:lnT w="12700" cap="flat" cmpd="sng" algn="ctr">
                       <a:solidFill>
-                        <a:srgbClr val="E4E7F0"/>
+                        <a:srgbClr val="F0DFB0"/>
                       </a:solidFill>
                       <a:prstDash val="solid"/>
                       <a:round/>
@@ -3187,7 +4461,7 @@
                     </a:lnT>
                     <a:lnB w="12700" cap="flat" cmpd="sng" algn="ctr">
                       <a:solidFill>
-                        <a:srgbClr val="E4E7F0"/>
+                        <a:srgbClr val="F0DFB0"/>
                       </a:solidFill>
                       <a:prstDash val="solid"/>
                       <a:round/>
@@ -3208,7 +4482,7 @@
                         <a:buNone/>
                       </a:pPr>
                       <a:r>
-                        <a:rPr lang="en-US" sz="1250" b="1" dirty="0">
+                        <a:rPr lang="en-US" sz="950" b="1" dirty="0">
                           <a:solidFill>
                             <a:srgbClr val="FFFFFF"/>
                           </a:solidFill>
@@ -3216,9 +4490,9 @@
                           <a:ea typeface="Calibri" pitchFamily="34" charset="-122"/>
                           <a:cs typeface="Calibri" pitchFamily="34" charset="-120"/>
                         </a:rPr>
-                        <a:t>μ̂₁(x)</a:t>
+                        <a:t>μ̂₀(x)</a:t>
                       </a:r>
-                      <a:endParaRPr lang="en-US" sz="1250" dirty="0">
+                      <a:endParaRPr lang="en-US" sz="950" dirty="0">
                         <a:latin typeface="Calibri" charset="0"/>
                         <a:ea typeface="Calibri" charset="0"/>
                         <a:cs typeface="Calibri" charset="0"/>
@@ -3229,7 +4503,96 @@
                         <a:buNone/>
                       </a:pPr>
                       <a:r>
-                        <a:rPr lang="en-US" sz="1250" b="1" dirty="0">
+                        <a:rPr lang="en-US" sz="950" b="1" dirty="0">
+                          <a:solidFill>
+                            <a:srgbClr val="FFFFFF"/>
+                          </a:solidFill>
+                          <a:latin typeface="Calibri" pitchFamily="34" charset="0"/>
+                          <a:ea typeface="Calibri" pitchFamily="34" charset="-122"/>
+                          <a:cs typeface="Calibri" pitchFamily="34" charset="-120"/>
+                        </a:rPr>
+                        <a:t>pred. Applied, old offer</a:t>
+                      </a:r>
+                      <a:endParaRPr lang="en-US" sz="950" dirty="0">
+                        <a:latin typeface="Calibri" charset="0"/>
+                        <a:ea typeface="Calibri" charset="0"/>
+                        <a:cs typeface="Calibri" charset="0"/>
+                      </a:endParaRPr>
+                    </a:p>
+                  </a:txBody>
+                  <a:tcPr marL="73152" marR="73152" marT="36576" marB="36576" anchor="ctr">
+                    <a:lnL w="12700" cap="flat" cmpd="sng" algn="ctr">
+                      <a:solidFill>
+                        <a:srgbClr val="F0DFB0"/>
+                      </a:solidFill>
+                      <a:prstDash val="solid"/>
+                      <a:round/>
+                      <a:headEnd type="none" w="med" len="med"/>
+                      <a:tailEnd type="none" w="med" len="med"/>
+                    </a:lnL>
+                    <a:lnR w="12700" cap="flat" cmpd="sng" algn="ctr">
+                      <a:solidFill>
+                        <a:srgbClr val="F0DFB0"/>
+                      </a:solidFill>
+                      <a:prstDash val="solid"/>
+                      <a:round/>
+                      <a:headEnd type="none" w="med" len="med"/>
+                      <a:tailEnd type="none" w="med" len="med"/>
+                    </a:lnR>
+                    <a:lnT w="12700" cap="flat" cmpd="sng" algn="ctr">
+                      <a:solidFill>
+                        <a:srgbClr val="F0DFB0"/>
+                      </a:solidFill>
+                      <a:prstDash val="solid"/>
+                      <a:round/>
+                      <a:headEnd type="none" w="med" len="med"/>
+                      <a:tailEnd type="none" w="med" len="med"/>
+                    </a:lnT>
+                    <a:lnB w="12700" cap="flat" cmpd="sng" algn="ctr">
+                      <a:solidFill>
+                        <a:srgbClr val="F0DFB0"/>
+                      </a:solidFill>
+                      <a:prstDash val="solid"/>
+                      <a:round/>
+                      <a:headEnd type="none" w="med" len="med"/>
+                      <a:tailEnd type="none" w="med" len="med"/>
+                    </a:lnB>
+                    <a:solidFill>
+                      <a:srgbClr val="1E2761"/>
+                    </a:solidFill>
+                  </a:tcPr>
+                </a:tc>
+                <a:tc>
+                  <a:txBody>
+                    <a:bodyPr/>
+                    <a:lstStyle/>
+                    <a:p>
+                      <a:pPr algn="ctr" indent="0" marL="0">
+                        <a:buNone/>
+                      </a:pPr>
+                      <a:r>
+                        <a:rPr lang="en-US" sz="950" b="1" dirty="0">
+                          <a:solidFill>
+                            <a:srgbClr val="FFFFFF"/>
+                          </a:solidFill>
+                          <a:latin typeface="Calibri" pitchFamily="34" charset="0"/>
+                          <a:ea typeface="Calibri" pitchFamily="34" charset="-122"/>
+                          <a:cs typeface="Calibri" pitchFamily="34" charset="-120"/>
+                        </a:rPr>
+                        <a:t>μ̂₁(x)</a:t>
+                      </a:r>
+                      <a:endParaRPr lang="en-US" sz="950" dirty="0">
+                        <a:latin typeface="Calibri" charset="0"/>
+                        <a:ea typeface="Calibri" charset="0"/>
+                        <a:cs typeface="Calibri" charset="0"/>
+                      </a:endParaRPr>
+                    </a:p>
+                    <a:p>
+                      <a:pPr algn="ctr" indent="0" marL="0">
+                        <a:buNone/>
+                      </a:pPr>
+                      <a:r>
+                        <a:rPr lang="en-US" sz="950" b="1" dirty="0">
                           <a:solidFill>
                             <a:srgbClr val="FFFFFF"/>
                           </a:solidFill>
@@ -3239,17 +4602,17 @@
                         </a:rPr>
                         <a:t>pred. Applied, new offer</a:t>
                       </a:r>
-                      <a:endParaRPr lang="en-US" sz="1250" dirty="0">
+                      <a:endParaRPr lang="en-US" sz="950" dirty="0">
                         <a:latin typeface="Calibri" charset="0"/>
                         <a:ea typeface="Calibri" charset="0"/>
                         <a:cs typeface="Calibri" charset="0"/>
                       </a:endParaRPr>
                     </a:p>
                   </a:txBody>
-                  <a:tcPr marL="91440" marR="91440" marT="45720" marB="45720" anchor="ctr">
+                  <a:tcPr marL="73152" marR="73152" marT="36576" marB="36576" anchor="ctr">
                     <a:lnL w="12700" cap="flat" cmpd="sng" algn="ctr">
                       <a:solidFill>
-                        <a:srgbClr val="E4E7F0"/>
+                        <a:srgbClr val="F0DFB0"/>
                       </a:solidFill>
                       <a:prstDash val="solid"/>
                       <a:round/>
@@ -3258,7 +4621,7 @@
                     </a:lnL>
                     <a:lnR w="12700" cap="flat" cmpd="sng" algn="ctr">
                       <a:solidFill>
-                        <a:srgbClr val="E4E7F0"/>
+                        <a:srgbClr val="F0DFB0"/>
                       </a:solidFill>
                       <a:prstDash val="solid"/>
                       <a:round/>
@@ -3267,7 +4630,7 @@
                     </a:lnR>
                     <a:lnT w="12700" cap="flat" cmpd="sng" algn="ctr">
                       <a:solidFill>
-                        <a:srgbClr val="E4E7F0"/>
+                        <a:srgbClr val="F0DFB0"/>
                       </a:solidFill>
                       <a:prstDash val="solid"/>
                       <a:round/>
@@ -3276,7 +4639,7 @@
                     </a:lnT>
                     <a:lnB w="12700" cap="flat" cmpd="sng" algn="ctr">
                       <a:solidFill>
-                        <a:srgbClr val="E4E7F0"/>
+                        <a:srgbClr val="F0DFB0"/>
                       </a:solidFill>
                       <a:prstDash val="solid"/>
                       <a:round/>
@@ -3289,7 +4652,7 @@
                   </a:tcPr>
                 </a:tc>
               </a:tr>
-              <a:tr h="429768">
+              <a:tr h="244275">
                 <a:tc>
                   <a:txBody>
                     <a:bodyPr/>
@@ -3299,7 +4662,7 @@
                         <a:buNone/>
                       </a:pPr>
                       <a:r>
-                        <a:rPr lang="en-US" sz="1250" b="1" dirty="0">
+                        <a:rPr lang="en-US" sz="1100" b="1" dirty="0">
                           <a:solidFill>
                             <a:srgbClr val="33344A"/>
                           </a:solidFill>
@@ -3309,17 +4672,17 @@
                         </a:rPr>
                         <a:t>A</a:t>
                       </a:r>
-                      <a:endParaRPr lang="en-US" sz="1250" dirty="0">
+                      <a:endParaRPr lang="en-US" sz="1100" dirty="0">
                         <a:latin typeface="Calibri" charset="0"/>
                         <a:ea typeface="Calibri" charset="0"/>
                         <a:cs typeface="Calibri" charset="0"/>
                       </a:endParaRPr>
                     </a:p>
                   </a:txBody>
-                  <a:tcPr marL="91440" marR="91440" marT="45720" marB="45720" anchor="ctr">
+                  <a:tcPr marL="73152" marR="73152" marT="36576" marB="36576" anchor="ctr">
                     <a:lnL w="12700" cap="flat" cmpd="sng" algn="ctr">
                       <a:solidFill>
-                        <a:srgbClr val="E4E7F0"/>
+                        <a:srgbClr val="F0DFB0"/>
                       </a:solidFill>
                       <a:prstDash val="solid"/>
                       <a:round/>
@@ -3328,7 +4691,7 @@
                     </a:lnL>
                     <a:lnR w="12700" cap="flat" cmpd="sng" algn="ctr">
                       <a:solidFill>
-                        <a:srgbClr val="E4E7F0"/>
+                        <a:srgbClr val="F0DFB0"/>
                       </a:solidFill>
                       <a:prstDash val="solid"/>
                       <a:round/>
@@ -3337,7 +4700,7 @@
                     </a:lnR>
                     <a:lnT w="12700" cap="flat" cmpd="sng" algn="ctr">
                       <a:solidFill>
-                        <a:srgbClr val="E4E7F0"/>
+                        <a:srgbClr val="F0DFB0"/>
                       </a:solidFill>
                       <a:prstDash val="solid"/>
                       <a:round/>
@@ -3346,7 +4709,7 @@
                     </a:lnT>
                     <a:lnB w="12700" cap="flat" cmpd="sng" algn="ctr">
                       <a:solidFill>
-                        <a:srgbClr val="E4E7F0"/>
+                        <a:srgbClr val="F0DFB0"/>
                       </a:solidFill>
                       <a:prstDash val="solid"/>
                       <a:round/>
@@ -3367,7 +4730,7 @@
                         <a:buNone/>
                       </a:pPr>
                       <a:r>
-                        <a:rPr lang="en-US" sz="1250" dirty="0">
+                        <a:rPr lang="en-US" sz="1100" dirty="0">
                           <a:solidFill>
                             <a:srgbClr val="1E2761"/>
                           </a:solidFill>
@@ -3377,17 +4740,17 @@
                         </a:rPr>
                         <a:t>0 (old offer)</a:t>
                       </a:r>
-                      <a:endParaRPr lang="en-US" sz="1250" dirty="0">
+                      <a:endParaRPr lang="en-US" sz="1100" dirty="0">
                         <a:latin typeface="Calibri" charset="0"/>
                         <a:ea typeface="Calibri" charset="0"/>
                         <a:cs typeface="Calibri" charset="0"/>
                       </a:endParaRPr>
                     </a:p>
                   </a:txBody>
-                  <a:tcPr marL="91440" marR="91440" marT="45720" marB="45720" anchor="ctr">
+                  <a:tcPr marL="73152" marR="73152" marT="36576" marB="36576" anchor="ctr">
                     <a:lnL w="12700" cap="flat" cmpd="sng" algn="ctr">
                       <a:solidFill>
-                        <a:srgbClr val="E4E7F0"/>
+                        <a:srgbClr val="F0DFB0"/>
                       </a:solidFill>
                       <a:prstDash val="solid"/>
                       <a:round/>
@@ -3396,7 +4759,7 @@
                     </a:lnL>
                     <a:lnR w="12700" cap="flat" cmpd="sng" algn="ctr">
                       <a:solidFill>
-                        <a:srgbClr val="E4E7F0"/>
+                        <a:srgbClr val="F0DFB0"/>
                       </a:solidFill>
                       <a:prstDash val="solid"/>
                       <a:round/>
@@ -3405,7 +4768,7 @@
                     </a:lnR>
                     <a:lnT w="12700" cap="flat" cmpd="sng" algn="ctr">
                       <a:solidFill>
-                        <a:srgbClr val="E4E7F0"/>
+                        <a:srgbClr val="F0DFB0"/>
                       </a:solidFill>
                       <a:prstDash val="solid"/>
                       <a:round/>
@@ -3414,7 +4777,7 @@
                     </a:lnT>
                     <a:lnB w="12700" cap="flat" cmpd="sng" algn="ctr">
                       <a:solidFill>
-                        <a:srgbClr val="E4E7F0"/>
+                        <a:srgbClr val="F0DFB0"/>
                       </a:solidFill>
                       <a:prstDash val="solid"/>
                       <a:round/>
@@ -3435,7 +4798,7 @@
                         <a:buNone/>
                       </a:pPr>
                       <a:r>
-                        <a:rPr lang="en-US" sz="1250" dirty="0">
+                        <a:rPr lang="en-US" sz="1100" dirty="0">
                           <a:solidFill>
                             <a:srgbClr val="33344A"/>
                           </a:solidFill>
@@ -3445,17 +4808,17 @@
                         </a:rPr>
                         <a:t>0</a:t>
                       </a:r>
-                      <a:endParaRPr lang="en-US" sz="1250" dirty="0">
+                      <a:endParaRPr lang="en-US" sz="1100" dirty="0">
                         <a:latin typeface="Calibri" charset="0"/>
                         <a:ea typeface="Calibri" charset="0"/>
                         <a:cs typeface="Calibri" charset="0"/>
                       </a:endParaRPr>
                     </a:p>
                   </a:txBody>
-                  <a:tcPr marL="91440" marR="91440" marT="45720" marB="45720" anchor="ctr">
+                  <a:tcPr marL="73152" marR="73152" marT="36576" marB="36576" anchor="ctr">
                     <a:lnL w="12700" cap="flat" cmpd="sng" algn="ctr">
                       <a:solidFill>
-                        <a:srgbClr val="E4E7F0"/>
+                        <a:srgbClr val="F0DFB0"/>
                       </a:solidFill>
                       <a:prstDash val="solid"/>
                       <a:round/>
@@ -3464,7 +4827,7 @@
                     </a:lnL>
                     <a:lnR w="12700" cap="flat" cmpd="sng" algn="ctr">
                       <a:solidFill>
-                        <a:srgbClr val="E4E7F0"/>
+                        <a:srgbClr val="F0DFB0"/>
                       </a:solidFill>
                       <a:prstDash val="solid"/>
                       <a:round/>
@@ -3473,7 +4836,7 @@
                     </a:lnR>
                     <a:lnT w="12700" cap="flat" cmpd="sng" algn="ctr">
                       <a:solidFill>
-                        <a:srgbClr val="E4E7F0"/>
+                        <a:srgbClr val="F0DFB0"/>
                       </a:solidFill>
                       <a:prstDash val="solid"/>
                       <a:round/>
@@ -3482,7 +4845,7 @@
                     </a:lnT>
                     <a:lnB w="12700" cap="flat" cmpd="sng" algn="ctr">
                       <a:solidFill>
-                        <a:srgbClr val="E4E7F0"/>
+                        <a:srgbClr val="F0DFB0"/>
                       </a:solidFill>
                       <a:prstDash val="solid"/>
                       <a:round/>
@@ -3503,7 +4866,7 @@
                         <a:buNone/>
                       </a:pPr>
                       <a:r>
-                        <a:rPr lang="en-US" sz="1250" dirty="0">
+                        <a:rPr lang="en-US" sz="1100" dirty="0">
                           <a:solidFill>
                             <a:srgbClr val="33344A"/>
                           </a:solidFill>
@@ -3513,17 +4876,17 @@
                         </a:rPr>
                         <a:t>0.20</a:t>
                       </a:r>
-                      <a:endParaRPr lang="en-US" sz="1250" dirty="0">
+                      <a:endParaRPr lang="en-US" sz="1100" dirty="0">
                         <a:latin typeface="Calibri" charset="0"/>
                         <a:ea typeface="Calibri" charset="0"/>
                         <a:cs typeface="Calibri" charset="0"/>
                       </a:endParaRPr>
                     </a:p>
                   </a:txBody>
-                  <a:tcPr marL="91440" marR="91440" marT="45720" marB="45720" anchor="ctr">
+                  <a:tcPr marL="73152" marR="73152" marT="36576" marB="36576" anchor="ctr">
                     <a:lnL w="12700" cap="flat" cmpd="sng" algn="ctr">
                       <a:solidFill>
-                        <a:srgbClr val="E4E7F0"/>
+                        <a:srgbClr val="F0DFB0"/>
                       </a:solidFill>
                       <a:prstDash val="solid"/>
                       <a:round/>
@@ -3532,7 +4895,7 @@
                     </a:lnL>
                     <a:lnR w="12700" cap="flat" cmpd="sng" algn="ctr">
                       <a:solidFill>
-                        <a:srgbClr val="E4E7F0"/>
+                        <a:srgbClr val="F0DFB0"/>
                       </a:solidFill>
                       <a:prstDash val="solid"/>
                       <a:round/>
@@ -3541,7 +4904,7 @@
                     </a:lnR>
                     <a:lnT w="12700" cap="flat" cmpd="sng" algn="ctr">
                       <a:solidFill>
-                        <a:srgbClr val="E4E7F0"/>
+                        <a:srgbClr val="F0DFB0"/>
                       </a:solidFill>
                       <a:prstDash val="solid"/>
                       <a:round/>
@@ -3550,7 +4913,7 @@
                     </a:lnT>
                     <a:lnB w="12700" cap="flat" cmpd="sng" algn="ctr">
                       <a:solidFill>
-                        <a:srgbClr val="E4E7F0"/>
+                        <a:srgbClr val="F0DFB0"/>
                       </a:solidFill>
                       <a:prstDash val="solid"/>
                       <a:round/>
@@ -3571,7 +4934,7 @@
                         <a:buNone/>
                       </a:pPr>
                       <a:r>
-                        <a:rPr lang="en-US" sz="1250" dirty="0">
+                        <a:rPr lang="en-US" sz="1100" dirty="0">
                           <a:solidFill>
                             <a:srgbClr val="33344A"/>
                           </a:solidFill>
@@ -3581,17 +4944,17 @@
                         </a:rPr>
                         <a:t>0.55</a:t>
                       </a:r>
-                      <a:endParaRPr lang="en-US" sz="1250" dirty="0">
+                      <a:endParaRPr lang="en-US" sz="1100" dirty="0">
                         <a:latin typeface="Calibri" charset="0"/>
                         <a:ea typeface="Calibri" charset="0"/>
                         <a:cs typeface="Calibri" charset="0"/>
                       </a:endParaRPr>
                     </a:p>
                   </a:txBody>
-                  <a:tcPr marL="91440" marR="91440" marT="45720" marB="45720" anchor="ctr">
+                  <a:tcPr marL="73152" marR="73152" marT="36576" marB="36576" anchor="ctr">
                     <a:lnL w="12700" cap="flat" cmpd="sng" algn="ctr">
                       <a:solidFill>
-                        <a:srgbClr val="E4E7F0"/>
+                        <a:srgbClr val="F0DFB0"/>
                       </a:solidFill>
                       <a:prstDash val="solid"/>
                       <a:round/>
@@ -3600,7 +4963,7 @@
                     </a:lnL>
                     <a:lnR w="12700" cap="flat" cmpd="sng" algn="ctr">
                       <a:solidFill>
-                        <a:srgbClr val="E4E7F0"/>
+                        <a:srgbClr val="F0DFB0"/>
                       </a:solidFill>
                       <a:prstDash val="solid"/>
                       <a:round/>
@@ -3609,7 +4972,7 @@
                     </a:lnR>
                     <a:lnT w="12700" cap="flat" cmpd="sng" algn="ctr">
                       <a:solidFill>
-                        <a:srgbClr val="E4E7F0"/>
+                        <a:srgbClr val="F0DFB0"/>
                       </a:solidFill>
                       <a:prstDash val="solid"/>
                       <a:round/>
@@ -3618,7 +4981,7 @@
                     </a:lnT>
                     <a:lnB w="12700" cap="flat" cmpd="sng" algn="ctr">
                       <a:solidFill>
-                        <a:srgbClr val="E4E7F0"/>
+                        <a:srgbClr val="F0DFB0"/>
                       </a:solidFill>
                       <a:prstDash val="solid"/>
                       <a:round/>
@@ -3631,7 +4994,7 @@
                   </a:tcPr>
                 </a:tc>
               </a:tr>
-              <a:tr h="429768">
+              <a:tr h="244275">
                 <a:tc>
                   <a:txBody>
                     <a:bodyPr/>
@@ -3641,7 +5004,7 @@
                         <a:buNone/>
                       </a:pPr>
                       <a:r>
-                        <a:rPr lang="en-US" sz="1250" b="1" dirty="0">
+                        <a:rPr lang="en-US" sz="1100" b="1" dirty="0">
                           <a:solidFill>
                             <a:srgbClr val="33344A"/>
                           </a:solidFill>
@@ -3651,17 +5014,17 @@
                         </a:rPr>
                         <a:t>B</a:t>
                       </a:r>
-                      <a:endParaRPr lang="en-US" sz="1250" dirty="0">
+                      <a:endParaRPr lang="en-US" sz="1100" dirty="0">
                         <a:latin typeface="Calibri" charset="0"/>
                         <a:ea typeface="Calibri" charset="0"/>
                         <a:cs typeface="Calibri" charset="0"/>
                       </a:endParaRPr>
                     </a:p>
                   </a:txBody>
-                  <a:tcPr marL="91440" marR="91440" marT="45720" marB="45720" anchor="ctr">
+                  <a:tcPr marL="73152" marR="73152" marT="36576" marB="36576" anchor="ctr">
                     <a:lnL w="12700" cap="flat" cmpd="sng" algn="ctr">
                       <a:solidFill>
-                        <a:srgbClr val="E4E7F0"/>
+                        <a:srgbClr val="F0DFB0"/>
                       </a:solidFill>
                       <a:prstDash val="solid"/>
                       <a:round/>
@@ -3670,7 +5033,7 @@
                     </a:lnL>
                     <a:lnR w="12700" cap="flat" cmpd="sng" algn="ctr">
                       <a:solidFill>
-                        <a:srgbClr val="E4E7F0"/>
+                        <a:srgbClr val="F0DFB0"/>
                       </a:solidFill>
                       <a:prstDash val="solid"/>
                       <a:round/>
@@ -3679,7 +5042,7 @@
                     </a:lnR>
                     <a:lnT w="12700" cap="flat" cmpd="sng" algn="ctr">
                       <a:solidFill>
-                        <a:srgbClr val="E4E7F0"/>
+                        <a:srgbClr val="F0DFB0"/>
                       </a:solidFill>
                       <a:prstDash val="solid"/>
                       <a:round/>
@@ -3688,7 +5051,7 @@
                     </a:lnT>
                     <a:lnB w="12700" cap="flat" cmpd="sng" algn="ctr">
                       <a:solidFill>
-                        <a:srgbClr val="E4E7F0"/>
+                        <a:srgbClr val="F0DFB0"/>
                       </a:solidFill>
                       <a:prstDash val="solid"/>
                       <a:round/>
@@ -3696,7 +5059,7 @@
                       <a:tailEnd type="none" w="med" len="med"/>
                     </a:lnB>
                     <a:solidFill>
-                      <a:srgbClr val="EAF0FC"/>
+                      <a:srgbClr val="FBF3E1"/>
                     </a:solidFill>
                   </a:tcPr>
                 </a:tc>
@@ -3709,7 +5072,7 @@
                         <a:buNone/>
                       </a:pPr>
                       <a:r>
-                        <a:rPr lang="en-US" sz="1250" dirty="0">
+                        <a:rPr lang="en-US" sz="1100" dirty="0">
                           <a:solidFill>
                             <a:srgbClr val="1E2761"/>
                           </a:solidFill>
@@ -3719,17 +5082,17 @@
                         </a:rPr>
                         <a:t>0 (old offer)</a:t>
                       </a:r>
-                      <a:endParaRPr lang="en-US" sz="1250" dirty="0">
+                      <a:endParaRPr lang="en-US" sz="1100" dirty="0">
                         <a:latin typeface="Calibri" charset="0"/>
                         <a:ea typeface="Calibri" charset="0"/>
                         <a:cs typeface="Calibri" charset="0"/>
                       </a:endParaRPr>
                     </a:p>
                   </a:txBody>
-                  <a:tcPr marL="91440" marR="91440" marT="45720" marB="45720" anchor="ctr">
+                  <a:tcPr marL="73152" marR="73152" marT="36576" marB="36576" anchor="ctr">
                     <a:lnL w="12700" cap="flat" cmpd="sng" algn="ctr">
                       <a:solidFill>
-                        <a:srgbClr val="E4E7F0"/>
+                        <a:srgbClr val="F0DFB0"/>
                       </a:solidFill>
                       <a:prstDash val="solid"/>
                       <a:round/>
@@ -3738,7 +5101,7 @@
                     </a:lnL>
                     <a:lnR w="12700" cap="flat" cmpd="sng" algn="ctr">
                       <a:solidFill>
-                        <a:srgbClr val="E4E7F0"/>
+                        <a:srgbClr val="F0DFB0"/>
                       </a:solidFill>
                       <a:prstDash val="solid"/>
                       <a:round/>
@@ -3747,7 +5110,7 @@
                     </a:lnR>
                     <a:lnT w="12700" cap="flat" cmpd="sng" algn="ctr">
                       <a:solidFill>
-                        <a:srgbClr val="E4E7F0"/>
+                        <a:srgbClr val="F0DFB0"/>
                       </a:solidFill>
                       <a:prstDash val="solid"/>
                       <a:round/>
@@ -3756,7 +5119,7 @@
                     </a:lnT>
                     <a:lnB w="12700" cap="flat" cmpd="sng" algn="ctr">
                       <a:solidFill>
-                        <a:srgbClr val="E4E7F0"/>
+                        <a:srgbClr val="F0DFB0"/>
                       </a:solidFill>
                       <a:prstDash val="solid"/>
                       <a:round/>
@@ -3764,7 +5127,7 @@
                       <a:tailEnd type="none" w="med" len="med"/>
                     </a:lnB>
                     <a:solidFill>
-                      <a:srgbClr val="EAF0FC"/>
+                      <a:srgbClr val="FBF3E1"/>
                     </a:solidFill>
                   </a:tcPr>
                 </a:tc>
@@ -3777,7 +5140,7 @@
                         <a:buNone/>
                       </a:pPr>
                       <a:r>
-                        <a:rPr lang="en-US" sz="1250" dirty="0">
+                        <a:rPr lang="en-US" sz="1100" dirty="0">
                           <a:solidFill>
                             <a:srgbClr val="33344A"/>
                           </a:solidFill>
@@ -3787,17 +5150,17 @@
                         </a:rPr>
                         <a:t>1</a:t>
                       </a:r>
-                      <a:endParaRPr lang="en-US" sz="1250" dirty="0">
+                      <a:endParaRPr lang="en-US" sz="1100" dirty="0">
                         <a:latin typeface="Calibri" charset="0"/>
                         <a:ea typeface="Calibri" charset="0"/>
                         <a:cs typeface="Calibri" charset="0"/>
                       </a:endParaRPr>
                     </a:p>
                   </a:txBody>
-                  <a:tcPr marL="91440" marR="91440" marT="45720" marB="45720" anchor="ctr">
+                  <a:tcPr marL="73152" marR="73152" marT="36576" marB="36576" anchor="ctr">
                     <a:lnL w="12700" cap="flat" cmpd="sng" algn="ctr">
                       <a:solidFill>
-                        <a:srgbClr val="E4E7F0"/>
+                        <a:srgbClr val="F0DFB0"/>
                       </a:solidFill>
                       <a:prstDash val="solid"/>
                       <a:round/>
@@ -3806,7 +5169,7 @@
                     </a:lnL>
                     <a:lnR w="12700" cap="flat" cmpd="sng" algn="ctr">
                       <a:solidFill>
-                        <a:srgbClr val="E4E7F0"/>
+                        <a:srgbClr val="F0DFB0"/>
                       </a:solidFill>
                       <a:prstDash val="solid"/>
                       <a:round/>
@@ -3815,7 +5178,7 @@
                     </a:lnR>
                     <a:lnT w="12700" cap="flat" cmpd="sng" algn="ctr">
                       <a:solidFill>
-                        <a:srgbClr val="E4E7F0"/>
+                        <a:srgbClr val="F0DFB0"/>
                       </a:solidFill>
                       <a:prstDash val="solid"/>
                       <a:round/>
@@ -3824,7 +5187,7 @@
                     </a:lnT>
                     <a:lnB w="12700" cap="flat" cmpd="sng" algn="ctr">
                       <a:solidFill>
-                        <a:srgbClr val="E4E7F0"/>
+                        <a:srgbClr val="F0DFB0"/>
                       </a:solidFill>
                       <a:prstDash val="solid"/>
                       <a:round/>
@@ -3832,7 +5195,7 @@
                       <a:tailEnd type="none" w="med" len="med"/>
                     </a:lnB>
                     <a:solidFill>
-                      <a:srgbClr val="EAF0FC"/>
+                      <a:srgbClr val="FBF3E1"/>
                     </a:solidFill>
                   </a:tcPr>
                 </a:tc>
@@ -3845,7 +5208,7 @@
                         <a:buNone/>
                       </a:pPr>
                       <a:r>
-                        <a:rPr lang="en-US" sz="1250" dirty="0">
+                        <a:rPr lang="en-US" sz="1100" dirty="0">
                           <a:solidFill>
                             <a:srgbClr val="33344A"/>
                           </a:solidFill>
@@ -3855,17 +5218,17 @@
                         </a:rPr>
                         <a:t>0.60</a:t>
                       </a:r>
-                      <a:endParaRPr lang="en-US" sz="1250" dirty="0">
+                      <a:endParaRPr lang="en-US" sz="1100" dirty="0">
                         <a:latin typeface="Calibri" charset="0"/>
                         <a:ea typeface="Calibri" charset="0"/>
                         <a:cs typeface="Calibri" charset="0"/>
                       </a:endParaRPr>
                     </a:p>
                   </a:txBody>
-                  <a:tcPr marL="91440" marR="91440" marT="45720" marB="45720" anchor="ctr">
+                  <a:tcPr marL="73152" marR="73152" marT="36576" marB="36576" anchor="ctr">
                     <a:lnL w="12700" cap="flat" cmpd="sng" algn="ctr">
                       <a:solidFill>
-                        <a:srgbClr val="E4E7F0"/>
+                        <a:srgbClr val="F0DFB0"/>
                       </a:solidFill>
                       <a:prstDash val="solid"/>
                       <a:round/>
@@ -3874,7 +5237,7 @@
                     </a:lnL>
                     <a:lnR w="12700" cap="flat" cmpd="sng" algn="ctr">
                       <a:solidFill>
-                        <a:srgbClr val="E4E7F0"/>
+                        <a:srgbClr val="F0DFB0"/>
                       </a:solidFill>
                       <a:prstDash val="solid"/>
                       <a:round/>
@@ -3883,7 +5246,7 @@
                     </a:lnR>
                     <a:lnT w="12700" cap="flat" cmpd="sng" algn="ctr">
                       <a:solidFill>
-                        <a:srgbClr val="E4E7F0"/>
+                        <a:srgbClr val="F0DFB0"/>
                       </a:solidFill>
                       <a:prstDash val="solid"/>
                       <a:round/>
@@ -3892,7 +5255,7 @@
                     </a:lnT>
                     <a:lnB w="12700" cap="flat" cmpd="sng" algn="ctr">
                       <a:solidFill>
-                        <a:srgbClr val="E4E7F0"/>
+                        <a:srgbClr val="F0DFB0"/>
                       </a:solidFill>
                       <a:prstDash val="solid"/>
                       <a:round/>
@@ -3900,7 +5263,7 @@
                       <a:tailEnd type="none" w="med" len="med"/>
                     </a:lnB>
                     <a:solidFill>
-                      <a:srgbClr val="EAF0FC"/>
+                      <a:srgbClr val="FBF3E1"/>
                     </a:solidFill>
                   </a:tcPr>
                 </a:tc>
@@ -3913,7 +5276,7 @@
                         <a:buNone/>
                       </a:pPr>
                       <a:r>
-                        <a:rPr lang="en-US" sz="1250" dirty="0">
+                        <a:rPr lang="en-US" sz="1100" dirty="0">
                           <a:solidFill>
                             <a:srgbClr val="33344A"/>
                           </a:solidFill>
@@ -3923,17 +5286,17 @@
                         </a:rPr>
                         <a:t>0.75</a:t>
                       </a:r>
-                      <a:endParaRPr lang="en-US" sz="1250" dirty="0">
+                      <a:endParaRPr lang="en-US" sz="1100" dirty="0">
                         <a:latin typeface="Calibri" charset="0"/>
                         <a:ea typeface="Calibri" charset="0"/>
                         <a:cs typeface="Calibri" charset="0"/>
                       </a:endParaRPr>
                     </a:p>
                   </a:txBody>
-                  <a:tcPr marL="91440" marR="91440" marT="45720" marB="45720" anchor="ctr">
+                  <a:tcPr marL="73152" marR="73152" marT="36576" marB="36576" anchor="ctr">
                     <a:lnL w="12700" cap="flat" cmpd="sng" algn="ctr">
                       <a:solidFill>
-                        <a:srgbClr val="E4E7F0"/>
+                        <a:srgbClr val="F0DFB0"/>
                       </a:solidFill>
                       <a:prstDash val="solid"/>
                       <a:round/>
@@ -3942,7 +5305,7 @@
                     </a:lnL>
                     <a:lnR w="12700" cap="flat" cmpd="sng" algn="ctr">
                       <a:solidFill>
-                        <a:srgbClr val="E4E7F0"/>
+                        <a:srgbClr val="F0DFB0"/>
                       </a:solidFill>
                       <a:prstDash val="solid"/>
                       <a:round/>
@@ -3951,7 +5314,7 @@
                     </a:lnR>
                     <a:lnT w="12700" cap="flat" cmpd="sng" algn="ctr">
                       <a:solidFill>
-                        <a:srgbClr val="E4E7F0"/>
+                        <a:srgbClr val="F0DFB0"/>
                       </a:solidFill>
                       <a:prstDash val="solid"/>
                       <a:round/>
@@ -3960,7 +5323,7 @@
                     </a:lnT>
                     <a:lnB w="12700" cap="flat" cmpd="sng" algn="ctr">
                       <a:solidFill>
-                        <a:srgbClr val="E4E7F0"/>
+                        <a:srgbClr val="F0DFB0"/>
                       </a:solidFill>
                       <a:prstDash val="solid"/>
                       <a:round/>
@@ -3968,12 +5331,12 @@
                       <a:tailEnd type="none" w="med" len="med"/>
                     </a:lnB>
                     <a:solidFill>
-                      <a:srgbClr val="EAF0FC"/>
+                      <a:srgbClr val="FBF3E1"/>
                     </a:solidFill>
                   </a:tcPr>
                 </a:tc>
               </a:tr>
-              <a:tr h="429768">
+              <a:tr h="244275">
                 <a:tc>
                   <a:txBody>
                     <a:bodyPr/>
@@ -3983,7 +5346,7 @@
                         <a:buNone/>
                       </a:pPr>
                       <a:r>
-                        <a:rPr lang="en-US" sz="1250" b="1" dirty="0">
+                        <a:rPr lang="en-US" sz="1100" b="1" dirty="0">
                           <a:solidFill>
                             <a:srgbClr val="33344A"/>
                           </a:solidFill>
@@ -3993,17 +5356,17 @@
                         </a:rPr>
                         <a:t>C</a:t>
                       </a:r>
-                      <a:endParaRPr lang="en-US" sz="1250" dirty="0">
+                      <a:endParaRPr lang="en-US" sz="1100" dirty="0">
                         <a:latin typeface="Calibri" charset="0"/>
                         <a:ea typeface="Calibri" charset="0"/>
                         <a:cs typeface="Calibri" charset="0"/>
                       </a:endParaRPr>
                     </a:p>
                   </a:txBody>
-                  <a:tcPr marL="91440" marR="91440" marT="45720" marB="45720" anchor="ctr">
+                  <a:tcPr marL="73152" marR="73152" marT="36576" marB="36576" anchor="ctr">
                     <a:lnL w="12700" cap="flat" cmpd="sng" algn="ctr">
                       <a:solidFill>
-                        <a:srgbClr val="E4E7F0"/>
+                        <a:srgbClr val="F0DFB0"/>
                       </a:solidFill>
                       <a:prstDash val="solid"/>
                       <a:round/>
@@ -4012,7 +5375,7 @@
                     </a:lnL>
                     <a:lnR w="12700" cap="flat" cmpd="sng" algn="ctr">
                       <a:solidFill>
-                        <a:srgbClr val="E4E7F0"/>
+                        <a:srgbClr val="F0DFB0"/>
                       </a:solidFill>
                       <a:prstDash val="solid"/>
                       <a:round/>
@@ -4021,7 +5384,7 @@
                     </a:lnR>
                     <a:lnT w="12700" cap="flat" cmpd="sng" algn="ctr">
                       <a:solidFill>
-                        <a:srgbClr val="E4E7F0"/>
+                        <a:srgbClr val="F0DFB0"/>
                       </a:solidFill>
                       <a:prstDash val="solid"/>
                       <a:round/>
@@ -4030,7 +5393,7 @@
                     </a:lnT>
                     <a:lnB w="12700" cap="flat" cmpd="sng" algn="ctr">
                       <a:solidFill>
-                        <a:srgbClr val="E4E7F0"/>
+                        <a:srgbClr val="F0DFB0"/>
                       </a:solidFill>
                       <a:prstDash val="solid"/>
                       <a:round/>
@@ -4051,7 +5414,7 @@
                         <a:buNone/>
                       </a:pPr>
                       <a:r>
-                        <a:rPr lang="en-US" sz="1250" dirty="0">
+                        <a:rPr lang="en-US" sz="1100" dirty="0">
                           <a:solidFill>
                             <a:srgbClr val="1E2761"/>
                           </a:solidFill>
@@ -4061,17 +5424,17 @@
                         </a:rPr>
                         <a:t>0 (old offer)</a:t>
                       </a:r>
-                      <a:endParaRPr lang="en-US" sz="1250" dirty="0">
+                      <a:endParaRPr lang="en-US" sz="1100" dirty="0">
                         <a:latin typeface="Calibri" charset="0"/>
                         <a:ea typeface="Calibri" charset="0"/>
                         <a:cs typeface="Calibri" charset="0"/>
                       </a:endParaRPr>
                     </a:p>
                   </a:txBody>
-                  <a:tcPr marL="91440" marR="91440" marT="45720" marB="45720" anchor="ctr">
+                  <a:tcPr marL="73152" marR="73152" marT="36576" marB="36576" anchor="ctr">
                     <a:lnL w="12700" cap="flat" cmpd="sng" algn="ctr">
                       <a:solidFill>
-                        <a:srgbClr val="E4E7F0"/>
+                        <a:srgbClr val="F0DFB0"/>
                       </a:solidFill>
                       <a:prstDash val="solid"/>
                       <a:round/>
@@ -4080,7 +5443,7 @@
                     </a:lnL>
                     <a:lnR w="12700" cap="flat" cmpd="sng" algn="ctr">
                       <a:solidFill>
-                        <a:srgbClr val="E4E7F0"/>
+                        <a:srgbClr val="F0DFB0"/>
                       </a:solidFill>
                       <a:prstDash val="solid"/>
                       <a:round/>
@@ -4089,7 +5452,7 @@
                     </a:lnR>
                     <a:lnT w="12700" cap="flat" cmpd="sng" algn="ctr">
                       <a:solidFill>
-                        <a:srgbClr val="E4E7F0"/>
+                        <a:srgbClr val="F0DFB0"/>
                       </a:solidFill>
                       <a:prstDash val="solid"/>
                       <a:round/>
@@ -4098,7 +5461,7 @@
                     </a:lnT>
                     <a:lnB w="12700" cap="flat" cmpd="sng" algn="ctr">
                       <a:solidFill>
-                        <a:srgbClr val="E4E7F0"/>
+                        <a:srgbClr val="F0DFB0"/>
                       </a:solidFill>
                       <a:prstDash val="solid"/>
                       <a:round/>
@@ -4119,7 +5482,7 @@
                         <a:buNone/>
                       </a:pPr>
                       <a:r>
-                        <a:rPr lang="en-US" sz="1250" dirty="0">
+                        <a:rPr lang="en-US" sz="1100" dirty="0">
                           <a:solidFill>
                             <a:srgbClr val="33344A"/>
                           </a:solidFill>
@@ -4129,17 +5492,17 @@
                         </a:rPr>
                         <a:t>0</a:t>
                       </a:r>
-                      <a:endParaRPr lang="en-US" sz="1250" dirty="0">
+                      <a:endParaRPr lang="en-US" sz="1100" dirty="0">
                         <a:latin typeface="Calibri" charset="0"/>
                         <a:ea typeface="Calibri" charset="0"/>
                         <a:cs typeface="Calibri" charset="0"/>
                       </a:endParaRPr>
                     </a:p>
                   </a:txBody>
-                  <a:tcPr marL="91440" marR="91440" marT="45720" marB="45720" anchor="ctr">
+                  <a:tcPr marL="73152" marR="73152" marT="36576" marB="36576" anchor="ctr">
                     <a:lnL w="12700" cap="flat" cmpd="sng" algn="ctr">
                       <a:solidFill>
-                        <a:srgbClr val="E4E7F0"/>
+                        <a:srgbClr val="F0DFB0"/>
                       </a:solidFill>
                       <a:prstDash val="solid"/>
                       <a:round/>
@@ -4148,7 +5511,7 @@
                     </a:lnL>
                     <a:lnR w="12700" cap="flat" cmpd="sng" algn="ctr">
                       <a:solidFill>
-                        <a:srgbClr val="E4E7F0"/>
+                        <a:srgbClr val="F0DFB0"/>
                       </a:solidFill>
                       <a:prstDash val="solid"/>
                       <a:round/>
@@ -4157,7 +5520,7 @@
                     </a:lnR>
                     <a:lnT w="12700" cap="flat" cmpd="sng" algn="ctr">
                       <a:solidFill>
-                        <a:srgbClr val="E4E7F0"/>
+                        <a:srgbClr val="F0DFB0"/>
                       </a:solidFill>
                       <a:prstDash val="solid"/>
                       <a:round/>
@@ -4166,7 +5529,7 @@
                     </a:lnT>
                     <a:lnB w="12700" cap="flat" cmpd="sng" algn="ctr">
                       <a:solidFill>
-                        <a:srgbClr val="E4E7F0"/>
+                        <a:srgbClr val="F0DFB0"/>
                       </a:solidFill>
                       <a:prstDash val="solid"/>
                       <a:round/>
@@ -4187,7 +5550,7 @@
                         <a:buNone/>
                       </a:pPr>
                       <a:r>
-                        <a:rPr lang="en-US" sz="1250" dirty="0">
+                        <a:rPr lang="en-US" sz="1100" dirty="0">
                           <a:solidFill>
                             <a:srgbClr val="33344A"/>
                           </a:solidFill>
@@ -4197,17 +5560,17 @@
                         </a:rPr>
                         <a:t>0.10</a:t>
                       </a:r>
-                      <a:endParaRPr lang="en-US" sz="1250" dirty="0">
+                      <a:endParaRPr lang="en-US" sz="1100" dirty="0">
                         <a:latin typeface="Calibri" charset="0"/>
                         <a:ea typeface="Calibri" charset="0"/>
                         <a:cs typeface="Calibri" charset="0"/>
                       </a:endParaRPr>
                     </a:p>
                   </a:txBody>
-                  <a:tcPr marL="91440" marR="91440" marT="45720" marB="45720" anchor="ctr">
+                  <a:tcPr marL="73152" marR="73152" marT="36576" marB="36576" anchor="ctr">
                     <a:lnL w="12700" cap="flat" cmpd="sng" algn="ctr">
                       <a:solidFill>
-                        <a:srgbClr val="E4E7F0"/>
+                        <a:srgbClr val="F0DFB0"/>
                       </a:solidFill>
                       <a:prstDash val="solid"/>
                       <a:round/>
@@ -4216,7 +5579,7 @@
                     </a:lnL>
                     <a:lnR w="12700" cap="flat" cmpd="sng" algn="ctr">
                       <a:solidFill>
-                        <a:srgbClr val="E4E7F0"/>
+                        <a:srgbClr val="F0DFB0"/>
                       </a:solidFill>
                       <a:prstDash val="solid"/>
                       <a:round/>
@@ -4225,7 +5588,7 @@
                     </a:lnR>
                     <a:lnT w="12700" cap="flat" cmpd="sng" algn="ctr">
                       <a:solidFill>
-                        <a:srgbClr val="E4E7F0"/>
+                        <a:srgbClr val="F0DFB0"/>
                       </a:solidFill>
                       <a:prstDash val="solid"/>
                       <a:round/>
@@ -4234,7 +5597,7 @@
                     </a:lnT>
                     <a:lnB w="12700" cap="flat" cmpd="sng" algn="ctr">
                       <a:solidFill>
-                        <a:srgbClr val="E4E7F0"/>
+                        <a:srgbClr val="F0DFB0"/>
                       </a:solidFill>
                       <a:prstDash val="solid"/>
                       <a:round/>
@@ -4255,7 +5618,7 @@
                         <a:buNone/>
                       </a:pPr>
                       <a:r>
-                        <a:rPr lang="en-US" sz="1250" dirty="0">
+                        <a:rPr lang="en-US" sz="1100" dirty="0">
                           <a:solidFill>
                             <a:srgbClr val="33344A"/>
                           </a:solidFill>
@@ -4265,17 +5628,17 @@
                         </a:rPr>
                         <a:t>0.30</a:t>
                       </a:r>
-                      <a:endParaRPr lang="en-US" sz="1250" dirty="0">
+                      <a:endParaRPr lang="en-US" sz="1100" dirty="0">
                         <a:latin typeface="Calibri" charset="0"/>
                         <a:ea typeface="Calibri" charset="0"/>
                         <a:cs typeface="Calibri" charset="0"/>
                       </a:endParaRPr>
                     </a:p>
                   </a:txBody>
-                  <a:tcPr marL="91440" marR="91440" marT="45720" marB="45720" anchor="ctr">
+                  <a:tcPr marL="73152" marR="73152" marT="36576" marB="36576" anchor="ctr">
                     <a:lnL w="12700" cap="flat" cmpd="sng" algn="ctr">
                       <a:solidFill>
-                        <a:srgbClr val="E4E7F0"/>
+                        <a:srgbClr val="F0DFB0"/>
                       </a:solidFill>
                       <a:prstDash val="solid"/>
                       <a:round/>
@@ -4284,7 +5647,7 @@
                     </a:lnL>
                     <a:lnR w="12700" cap="flat" cmpd="sng" algn="ctr">
                       <a:solidFill>
-                        <a:srgbClr val="E4E7F0"/>
+                        <a:srgbClr val="F0DFB0"/>
                       </a:solidFill>
                       <a:prstDash val="solid"/>
                       <a:round/>
@@ -4293,7 +5656,7 @@
                     </a:lnR>
                     <a:lnT w="12700" cap="flat" cmpd="sng" algn="ctr">
                       <a:solidFill>
-                        <a:srgbClr val="E4E7F0"/>
+                        <a:srgbClr val="F0DFB0"/>
                       </a:solidFill>
                       <a:prstDash val="solid"/>
                       <a:round/>
@@ -4302,7 +5665,7 @@
                     </a:lnT>
                     <a:lnB w="12700" cap="flat" cmpd="sng" algn="ctr">
                       <a:solidFill>
-                        <a:srgbClr val="E4E7F0"/>
+                        <a:srgbClr val="F0DFB0"/>
                       </a:solidFill>
                       <a:prstDash val="solid"/>
                       <a:round/>
@@ -4315,7 +5678,7 @@
                   </a:tcPr>
                 </a:tc>
               </a:tr>
-              <a:tr h="429768">
+              <a:tr h="244275">
                 <a:tc>
                   <a:txBody>
                     <a:bodyPr/>
@@ -4325,7 +5688,7 @@
                         <a:buNone/>
                       </a:pPr>
                       <a:r>
-                        <a:rPr lang="en-US" sz="1250" b="1" dirty="0">
+                        <a:rPr lang="en-US" sz="1100" b="1" dirty="0">
                           <a:solidFill>
                             <a:srgbClr val="33344A"/>
                           </a:solidFill>
@@ -4335,17 +5698,17 @@
                         </a:rPr>
                         <a:t>D</a:t>
                       </a:r>
-                      <a:endParaRPr lang="en-US" sz="1250" dirty="0">
+                      <a:endParaRPr lang="en-US" sz="1100" dirty="0">
                         <a:latin typeface="Calibri" charset="0"/>
                         <a:ea typeface="Calibri" charset="0"/>
                         <a:cs typeface="Calibri" charset="0"/>
                       </a:endParaRPr>
                     </a:p>
                   </a:txBody>
-                  <a:tcPr marL="91440" marR="91440" marT="45720" marB="45720" anchor="ctr">
+                  <a:tcPr marL="73152" marR="73152" marT="36576" marB="36576" anchor="ctr">
                     <a:lnL w="12700" cap="flat" cmpd="sng" algn="ctr">
                       <a:solidFill>
-                        <a:srgbClr val="E4E7F0"/>
+                        <a:srgbClr val="F0DFB0"/>
                       </a:solidFill>
                       <a:prstDash val="solid"/>
                       <a:round/>
@@ -4354,7 +5717,7 @@
                     </a:lnL>
                     <a:lnR w="12700" cap="flat" cmpd="sng" algn="ctr">
                       <a:solidFill>
-                        <a:srgbClr val="E4E7F0"/>
+                        <a:srgbClr val="F0DFB0"/>
                       </a:solidFill>
                       <a:prstDash val="solid"/>
                       <a:round/>
@@ -4363,7 +5726,7 @@
                     </a:lnR>
                     <a:lnT w="12700" cap="flat" cmpd="sng" algn="ctr">
                       <a:solidFill>
-                        <a:srgbClr val="E4E7F0"/>
+                        <a:srgbClr val="F0DFB0"/>
                       </a:solidFill>
                       <a:prstDash val="solid"/>
                       <a:round/>
@@ -4372,7 +5735,7 @@
                     </a:lnT>
                     <a:lnB w="12700" cap="flat" cmpd="sng" algn="ctr">
                       <a:solidFill>
-                        <a:srgbClr val="E4E7F0"/>
+                        <a:srgbClr val="F0DFB0"/>
                       </a:solidFill>
                       <a:prstDash val="solid"/>
                       <a:round/>
@@ -4380,7 +5743,7 @@
                       <a:tailEnd type="none" w="med" len="med"/>
                     </a:lnB>
                     <a:solidFill>
-                      <a:srgbClr val="EAF0FC"/>
+                      <a:srgbClr val="FBF3E1"/>
                     </a:solidFill>
                   </a:tcPr>
                 </a:tc>
@@ -4393,7 +5756,7 @@
                         <a:buNone/>
                       </a:pPr>
                       <a:r>
-                        <a:rPr lang="en-US" sz="1250" dirty="0">
+                        <a:rPr lang="en-US" sz="1100" dirty="0">
                           <a:solidFill>
                             <a:srgbClr val="B8892B"/>
                           </a:solidFill>
@@ -4403,17 +5766,17 @@
                         </a:rPr>
                         <a:t>1 (new offer)</a:t>
                       </a:r>
-                      <a:endParaRPr lang="en-US" sz="1250" dirty="0">
+                      <a:endParaRPr lang="en-US" sz="1100" dirty="0">
                         <a:latin typeface="Calibri" charset="0"/>
                         <a:ea typeface="Calibri" charset="0"/>
                         <a:cs typeface="Calibri" charset="0"/>
                       </a:endParaRPr>
                     </a:p>
                   </a:txBody>
-                  <a:tcPr marL="91440" marR="91440" marT="45720" marB="45720" anchor="ctr">
+                  <a:tcPr marL="73152" marR="73152" marT="36576" marB="36576" anchor="ctr">
                     <a:lnL w="12700" cap="flat" cmpd="sng" algn="ctr">
                       <a:solidFill>
-                        <a:srgbClr val="E4E7F0"/>
+                        <a:srgbClr val="F0DFB0"/>
                       </a:solidFill>
                       <a:prstDash val="solid"/>
                       <a:round/>
@@ -4422,7 +5785,7 @@
                     </a:lnL>
                     <a:lnR w="12700" cap="flat" cmpd="sng" algn="ctr">
                       <a:solidFill>
-                        <a:srgbClr val="E4E7F0"/>
+                        <a:srgbClr val="F0DFB0"/>
                       </a:solidFill>
                       <a:prstDash val="solid"/>
                       <a:round/>
@@ -4431,7 +5794,7 @@
                     </a:lnR>
                     <a:lnT w="12700" cap="flat" cmpd="sng" algn="ctr">
                       <a:solidFill>
-                        <a:srgbClr val="E4E7F0"/>
+                        <a:srgbClr val="F0DFB0"/>
                       </a:solidFill>
                       <a:prstDash val="solid"/>
                       <a:round/>
@@ -4440,7 +5803,7 @@
                     </a:lnT>
                     <a:lnB w="12700" cap="flat" cmpd="sng" algn="ctr">
                       <a:solidFill>
-                        <a:srgbClr val="E4E7F0"/>
+                        <a:srgbClr val="F0DFB0"/>
                       </a:solidFill>
                       <a:prstDash val="solid"/>
                       <a:round/>
@@ -4448,7 +5811,7 @@
                       <a:tailEnd type="none" w="med" len="med"/>
                     </a:lnB>
                     <a:solidFill>
-                      <a:srgbClr val="EAF0FC"/>
+                      <a:srgbClr val="FBF3E1"/>
                     </a:solidFill>
                   </a:tcPr>
                 </a:tc>
@@ -4461,7 +5824,7 @@
                         <a:buNone/>
                       </a:pPr>
                       <a:r>
-                        <a:rPr lang="en-US" sz="1250" dirty="0">
+                        <a:rPr lang="en-US" sz="1100" dirty="0">
                           <a:solidFill>
                             <a:srgbClr val="33344A"/>
                           </a:solidFill>
@@ -4471,17 +5834,17 @@
                         </a:rPr>
                         <a:t>1</a:t>
                       </a:r>
-                      <a:endParaRPr lang="en-US" sz="1250" dirty="0">
+                      <a:endParaRPr lang="en-US" sz="1100" dirty="0">
                         <a:latin typeface="Calibri" charset="0"/>
                         <a:ea typeface="Calibri" charset="0"/>
                         <a:cs typeface="Calibri" charset="0"/>
                       </a:endParaRPr>
                     </a:p>
                   </a:txBody>
-                  <a:tcPr marL="91440" marR="91440" marT="45720" marB="45720" anchor="ctr">
+                  <a:tcPr marL="73152" marR="73152" marT="36576" marB="36576" anchor="ctr">
                     <a:lnL w="12700" cap="flat" cmpd="sng" algn="ctr">
                       <a:solidFill>
-                        <a:srgbClr val="E4E7F0"/>
+                        <a:srgbClr val="F0DFB0"/>
                       </a:solidFill>
                       <a:prstDash val="solid"/>
                       <a:round/>
@@ -4490,7 +5853,7 @@
                     </a:lnL>
                     <a:lnR w="12700" cap="flat" cmpd="sng" algn="ctr">
                       <a:solidFill>
-                        <a:srgbClr val="E4E7F0"/>
+                        <a:srgbClr val="F0DFB0"/>
                       </a:solidFill>
                       <a:prstDash val="solid"/>
                       <a:round/>
@@ -4499,7 +5862,7 @@
                     </a:lnR>
                     <a:lnT w="12700" cap="flat" cmpd="sng" algn="ctr">
                       <a:solidFill>
-                        <a:srgbClr val="E4E7F0"/>
+                        <a:srgbClr val="F0DFB0"/>
                       </a:solidFill>
                       <a:prstDash val="solid"/>
                       <a:round/>
@@ -4508,7 +5871,7 @@
                     </a:lnT>
                     <a:lnB w="12700" cap="flat" cmpd="sng" algn="ctr">
                       <a:solidFill>
-                        <a:srgbClr val="E4E7F0"/>
+                        <a:srgbClr val="F0DFB0"/>
                       </a:solidFill>
                       <a:prstDash val="solid"/>
                       <a:round/>
@@ -4516,7 +5879,7 @@
                       <a:tailEnd type="none" w="med" len="med"/>
                     </a:lnB>
                     <a:solidFill>
-                      <a:srgbClr val="EAF0FC"/>
+                      <a:srgbClr val="FBF3E1"/>
                     </a:solidFill>
                   </a:tcPr>
                 </a:tc>
@@ -4529,7 +5892,7 @@
                         <a:buNone/>
                       </a:pPr>
                       <a:r>
-                        <a:rPr lang="en-US" sz="1250" dirty="0">
+                        <a:rPr lang="en-US" sz="1100" dirty="0">
                           <a:solidFill>
                             <a:srgbClr val="33344A"/>
                           </a:solidFill>
@@ -4539,17 +5902,17 @@
                         </a:rPr>
                         <a:t>0.35</a:t>
                       </a:r>
-                      <a:endParaRPr lang="en-US" sz="1250" dirty="0">
+                      <a:endParaRPr lang="en-US" sz="1100" dirty="0">
                         <a:latin typeface="Calibri" charset="0"/>
                         <a:ea typeface="Calibri" charset="0"/>
                         <a:cs typeface="Calibri" charset="0"/>
                       </a:endParaRPr>
                     </a:p>
                   </a:txBody>
-                  <a:tcPr marL="91440" marR="91440" marT="45720" marB="45720" anchor="ctr">
+                  <a:tcPr marL="73152" marR="73152" marT="36576" marB="36576" anchor="ctr">
                     <a:lnL w="12700" cap="flat" cmpd="sng" algn="ctr">
                       <a:solidFill>
-                        <a:srgbClr val="E4E7F0"/>
+                        <a:srgbClr val="F0DFB0"/>
                       </a:solidFill>
                       <a:prstDash val="solid"/>
                       <a:round/>
@@ -4558,7 +5921,7 @@
                     </a:lnL>
                     <a:lnR w="12700" cap="flat" cmpd="sng" algn="ctr">
                       <a:solidFill>
-                        <a:srgbClr val="E4E7F0"/>
+                        <a:srgbClr val="F0DFB0"/>
                       </a:solidFill>
                       <a:prstDash val="solid"/>
                       <a:round/>
@@ -4567,7 +5930,7 @@
                     </a:lnR>
                     <a:lnT w="12700" cap="flat" cmpd="sng" algn="ctr">
                       <a:solidFill>
-                        <a:srgbClr val="E4E7F0"/>
+                        <a:srgbClr val="F0DFB0"/>
                       </a:solidFill>
                       <a:prstDash val="solid"/>
                       <a:round/>
@@ -4576,7 +5939,7 @@
                     </a:lnT>
                     <a:lnB w="12700" cap="flat" cmpd="sng" algn="ctr">
                       <a:solidFill>
-                        <a:srgbClr val="E4E7F0"/>
+                        <a:srgbClr val="F0DFB0"/>
                       </a:solidFill>
                       <a:prstDash val="solid"/>
                       <a:round/>
@@ -4584,7 +5947,7 @@
                       <a:tailEnd type="none" w="med" len="med"/>
                     </a:lnB>
                     <a:solidFill>
-                      <a:srgbClr val="EAF0FC"/>
+                      <a:srgbClr val="FBF3E1"/>
                     </a:solidFill>
                   </a:tcPr>
                 </a:tc>
@@ -4597,7 +5960,7 @@
                         <a:buNone/>
                       </a:pPr>
                       <a:r>
-                        <a:rPr lang="en-US" sz="1250" dirty="0">
+                        <a:rPr lang="en-US" sz="1100" dirty="0">
                           <a:solidFill>
                             <a:srgbClr val="33344A"/>
                           </a:solidFill>
@@ -4607,17 +5970,17 @@
                         </a:rPr>
                         <a:t>0.80</a:t>
                       </a:r>
-                      <a:endParaRPr lang="en-US" sz="1250" dirty="0">
+                      <a:endParaRPr lang="en-US" sz="1100" dirty="0">
                         <a:latin typeface="Calibri" charset="0"/>
                         <a:ea typeface="Calibri" charset="0"/>
                         <a:cs typeface="Calibri" charset="0"/>
                       </a:endParaRPr>
                     </a:p>
                   </a:txBody>
-                  <a:tcPr marL="91440" marR="91440" marT="45720" marB="45720" anchor="ctr">
+                  <a:tcPr marL="73152" marR="73152" marT="36576" marB="36576" anchor="ctr">
                     <a:lnL w="12700" cap="flat" cmpd="sng" algn="ctr">
                       <a:solidFill>
-                        <a:srgbClr val="E4E7F0"/>
+                        <a:srgbClr val="F0DFB0"/>
                       </a:solidFill>
                       <a:prstDash val="solid"/>
                       <a:round/>
@@ -4626,7 +5989,7 @@
                     </a:lnL>
                     <a:lnR w="12700" cap="flat" cmpd="sng" algn="ctr">
                       <a:solidFill>
-                        <a:srgbClr val="E4E7F0"/>
+                        <a:srgbClr val="F0DFB0"/>
                       </a:solidFill>
                       <a:prstDash val="solid"/>
                       <a:round/>
@@ -4635,7 +5998,7 @@
                     </a:lnR>
                     <a:lnT w="12700" cap="flat" cmpd="sng" algn="ctr">
                       <a:solidFill>
-                        <a:srgbClr val="E4E7F0"/>
+                        <a:srgbClr val="F0DFB0"/>
                       </a:solidFill>
                       <a:prstDash val="solid"/>
                       <a:round/>
@@ -4644,7 +6007,7 @@
                     </a:lnT>
                     <a:lnB w="12700" cap="flat" cmpd="sng" algn="ctr">
                       <a:solidFill>
-                        <a:srgbClr val="E4E7F0"/>
+                        <a:srgbClr val="F0DFB0"/>
                       </a:solidFill>
                       <a:prstDash val="solid"/>
                       <a:round/>
@@ -4652,12 +6015,12 @@
                       <a:tailEnd type="none" w="med" len="med"/>
                     </a:lnB>
                     <a:solidFill>
-                      <a:srgbClr val="EAF0FC"/>
+                      <a:srgbClr val="FBF3E1"/>
                     </a:solidFill>
                   </a:tcPr>
                 </a:tc>
               </a:tr>
-              <a:tr h="429768">
+              <a:tr h="244275">
                 <a:tc>
                   <a:txBody>
                     <a:bodyPr/>
@@ -4667,7 +6030,7 @@
                         <a:buNone/>
                       </a:pPr>
                       <a:r>
-                        <a:rPr lang="en-US" sz="1250" b="1" dirty="0">
+                        <a:rPr lang="en-US" sz="1100" b="1" dirty="0">
                           <a:solidFill>
                             <a:srgbClr val="33344A"/>
                           </a:solidFill>
@@ -4677,17 +6040,17 @@
                         </a:rPr>
                         <a:t>E</a:t>
                       </a:r>
-                      <a:endParaRPr lang="en-US" sz="1250" dirty="0">
+                      <a:endParaRPr lang="en-US" sz="1100" dirty="0">
                         <a:latin typeface="Calibri" charset="0"/>
                         <a:ea typeface="Calibri" charset="0"/>
                         <a:cs typeface="Calibri" charset="0"/>
                       </a:endParaRPr>
                     </a:p>
                   </a:txBody>
-                  <a:tcPr marL="91440" marR="91440" marT="45720" marB="45720" anchor="ctr">
+                  <a:tcPr marL="73152" marR="73152" marT="36576" marB="36576" anchor="ctr">
                     <a:lnL w="12700" cap="flat" cmpd="sng" algn="ctr">
                       <a:solidFill>
-                        <a:srgbClr val="E4E7F0"/>
+                        <a:srgbClr val="F0DFB0"/>
                       </a:solidFill>
                       <a:prstDash val="solid"/>
                       <a:round/>
@@ -4696,7 +6059,7 @@
                     </a:lnL>
                     <a:lnR w="12700" cap="flat" cmpd="sng" algn="ctr">
                       <a:solidFill>
-                        <a:srgbClr val="E4E7F0"/>
+                        <a:srgbClr val="F0DFB0"/>
                       </a:solidFill>
                       <a:prstDash val="solid"/>
                       <a:round/>
@@ -4705,7 +6068,7 @@
                     </a:lnR>
                     <a:lnT w="12700" cap="flat" cmpd="sng" algn="ctr">
                       <a:solidFill>
-                        <a:srgbClr val="E4E7F0"/>
+                        <a:srgbClr val="F0DFB0"/>
                       </a:solidFill>
                       <a:prstDash val="solid"/>
                       <a:round/>
@@ -4714,7 +6077,7 @@
                     </a:lnT>
                     <a:lnB w="12700" cap="flat" cmpd="sng" algn="ctr">
                       <a:solidFill>
-                        <a:srgbClr val="E4E7F0"/>
+                        <a:srgbClr val="F0DFB0"/>
                       </a:solidFill>
                       <a:prstDash val="solid"/>
                       <a:round/>
@@ -4735,7 +6098,7 @@
                         <a:buNone/>
                       </a:pPr>
                       <a:r>
-                        <a:rPr lang="en-US" sz="1250" dirty="0">
+                        <a:rPr lang="en-US" sz="1100" dirty="0">
                           <a:solidFill>
                             <a:srgbClr val="B8892B"/>
                           </a:solidFill>
@@ -4745,17 +6108,17 @@
                         </a:rPr>
                         <a:t>1 (new offer)</a:t>
                       </a:r>
-                      <a:endParaRPr lang="en-US" sz="1250" dirty="0">
+                      <a:endParaRPr lang="en-US" sz="1100" dirty="0">
                         <a:latin typeface="Calibri" charset="0"/>
                         <a:ea typeface="Calibri" charset="0"/>
                         <a:cs typeface="Calibri" charset="0"/>
                       </a:endParaRPr>
                     </a:p>
                   </a:txBody>
-                  <a:tcPr marL="91440" marR="91440" marT="45720" marB="45720" anchor="ctr">
+                  <a:tcPr marL="73152" marR="73152" marT="36576" marB="36576" anchor="ctr">
                     <a:lnL w="12700" cap="flat" cmpd="sng" algn="ctr">
                       <a:solidFill>
-                        <a:srgbClr val="E4E7F0"/>
+                        <a:srgbClr val="F0DFB0"/>
                       </a:solidFill>
                       <a:prstDash val="solid"/>
                       <a:round/>
@@ -4764,7 +6127,7 @@
                     </a:lnL>
                     <a:lnR w="12700" cap="flat" cmpd="sng" algn="ctr">
                       <a:solidFill>
-                        <a:srgbClr val="E4E7F0"/>
+                        <a:srgbClr val="F0DFB0"/>
                       </a:solidFill>
                       <a:prstDash val="solid"/>
                       <a:round/>
@@ -4773,7 +6136,7 @@
                     </a:lnR>
                     <a:lnT w="12700" cap="flat" cmpd="sng" algn="ctr">
                       <a:solidFill>
-                        <a:srgbClr val="E4E7F0"/>
+                        <a:srgbClr val="F0DFB0"/>
                       </a:solidFill>
                       <a:prstDash val="solid"/>
                       <a:round/>
@@ -4782,7 +6145,7 @@
                     </a:lnT>
                     <a:lnB w="12700" cap="flat" cmpd="sng" algn="ctr">
                       <a:solidFill>
-                        <a:srgbClr val="E4E7F0"/>
+                        <a:srgbClr val="F0DFB0"/>
                       </a:solidFill>
                       <a:prstDash val="solid"/>
                       <a:round/>
@@ -4803,7 +6166,7 @@
                         <a:buNone/>
                       </a:pPr>
                       <a:r>
-                        <a:rPr lang="en-US" sz="1250" dirty="0">
+                        <a:rPr lang="en-US" sz="1100" dirty="0">
                           <a:solidFill>
                             <a:srgbClr val="33344A"/>
                           </a:solidFill>
@@ -4813,17 +6176,17 @@
                         </a:rPr>
                         <a:t>0</a:t>
                       </a:r>
-                      <a:endParaRPr lang="en-US" sz="1250" dirty="0">
+                      <a:endParaRPr lang="en-US" sz="1100" dirty="0">
                         <a:latin typeface="Calibri" charset="0"/>
                         <a:ea typeface="Calibri" charset="0"/>
                         <a:cs typeface="Calibri" charset="0"/>
                       </a:endParaRPr>
                     </a:p>
                   </a:txBody>
-                  <a:tcPr marL="91440" marR="91440" marT="45720" marB="45720" anchor="ctr">
+                  <a:tcPr marL="73152" marR="73152" marT="36576" marB="36576" anchor="ctr">
                     <a:lnL w="12700" cap="flat" cmpd="sng" algn="ctr">
                       <a:solidFill>
-                        <a:srgbClr val="E4E7F0"/>
+                        <a:srgbClr val="F0DFB0"/>
                       </a:solidFill>
                       <a:prstDash val="solid"/>
                       <a:round/>
@@ -4832,7 +6195,7 @@
                     </a:lnL>
                     <a:lnR w="12700" cap="flat" cmpd="sng" algn="ctr">
                       <a:solidFill>
-                        <a:srgbClr val="E4E7F0"/>
+                        <a:srgbClr val="F0DFB0"/>
                       </a:solidFill>
                       <a:prstDash val="solid"/>
                       <a:round/>
@@ -4841,7 +6204,7 @@
                     </a:lnR>
                     <a:lnT w="12700" cap="flat" cmpd="sng" algn="ctr">
                       <a:solidFill>
-                        <a:srgbClr val="E4E7F0"/>
+                        <a:srgbClr val="F0DFB0"/>
                       </a:solidFill>
                       <a:prstDash val="solid"/>
                       <a:round/>
@@ -4850,7 +6213,7 @@
                     </a:lnT>
                     <a:lnB w="12700" cap="flat" cmpd="sng" algn="ctr">
                       <a:solidFill>
-                        <a:srgbClr val="E4E7F0"/>
+                        <a:srgbClr val="F0DFB0"/>
                       </a:solidFill>
                       <a:prstDash val="solid"/>
                       <a:round/>
@@ -4871,7 +6234,7 @@
                         <a:buNone/>
                       </a:pPr>
                       <a:r>
-                        <a:rPr lang="en-US" sz="1250" dirty="0">
+                        <a:rPr lang="en-US" sz="1100" dirty="0">
                           <a:solidFill>
                             <a:srgbClr val="33344A"/>
                           </a:solidFill>
@@ -4881,17 +6244,17 @@
                         </a:rPr>
                         <a:t>0.25</a:t>
                       </a:r>
-                      <a:endParaRPr lang="en-US" sz="1250" dirty="0">
+                      <a:endParaRPr lang="en-US" sz="1100" dirty="0">
                         <a:latin typeface="Calibri" charset="0"/>
                         <a:ea typeface="Calibri" charset="0"/>
                         <a:cs typeface="Calibri" charset="0"/>
                       </a:endParaRPr>
                     </a:p>
                   </a:txBody>
-                  <a:tcPr marL="91440" marR="91440" marT="45720" marB="45720" anchor="ctr">
+                  <a:tcPr marL="73152" marR="73152" marT="36576" marB="36576" anchor="ctr">
                     <a:lnL w="12700" cap="flat" cmpd="sng" algn="ctr">
                       <a:solidFill>
-                        <a:srgbClr val="E4E7F0"/>
+                        <a:srgbClr val="F0DFB0"/>
                       </a:solidFill>
                       <a:prstDash val="solid"/>
                       <a:round/>
@@ -4900,7 +6263,7 @@
                     </a:lnL>
                     <a:lnR w="12700" cap="flat" cmpd="sng" algn="ctr">
                       <a:solidFill>
-                        <a:srgbClr val="E4E7F0"/>
+                        <a:srgbClr val="F0DFB0"/>
                       </a:solidFill>
                       <a:prstDash val="solid"/>
                       <a:round/>
@@ -4909,7 +6272,7 @@
                     </a:lnR>
                     <a:lnT w="12700" cap="flat" cmpd="sng" algn="ctr">
                       <a:solidFill>
-                        <a:srgbClr val="E4E7F0"/>
+                        <a:srgbClr val="F0DFB0"/>
                       </a:solidFill>
                       <a:prstDash val="solid"/>
                       <a:round/>
@@ -4918,7 +6281,7 @@
                     </a:lnT>
                     <a:lnB w="12700" cap="flat" cmpd="sng" algn="ctr">
                       <a:solidFill>
-                        <a:srgbClr val="E4E7F0"/>
+                        <a:srgbClr val="F0DFB0"/>
                       </a:solidFill>
                       <a:prstDash val="solid"/>
                       <a:round/>
@@ -4939,7 +6302,7 @@
                         <a:buNone/>
                       </a:pPr>
                       <a:r>
-                        <a:rPr lang="en-US" sz="1250" dirty="0">
+                        <a:rPr lang="en-US" sz="1100" dirty="0">
                           <a:solidFill>
                             <a:srgbClr val="33344A"/>
                           </a:solidFill>
@@ -4949,17 +6312,17 @@
                         </a:rPr>
                         <a:t>0.40</a:t>
                       </a:r>
-                      <a:endParaRPr lang="en-US" sz="1250" dirty="0">
+                      <a:endParaRPr lang="en-US" sz="1100" dirty="0">
                         <a:latin typeface="Calibri" charset="0"/>
                         <a:ea typeface="Calibri" charset="0"/>
                         <a:cs typeface="Calibri" charset="0"/>
                       </a:endParaRPr>
                     </a:p>
                   </a:txBody>
-                  <a:tcPr marL="91440" marR="91440" marT="45720" marB="45720" anchor="ctr">
+                  <a:tcPr marL="73152" marR="73152" marT="36576" marB="36576" anchor="ctr">
                     <a:lnL w="12700" cap="flat" cmpd="sng" algn="ctr">
                       <a:solidFill>
-                        <a:srgbClr val="E4E7F0"/>
+                        <a:srgbClr val="F0DFB0"/>
                       </a:solidFill>
                       <a:prstDash val="solid"/>
                       <a:round/>
@@ -4968,7 +6331,7 @@
                     </a:lnL>
                     <a:lnR w="12700" cap="flat" cmpd="sng" algn="ctr">
                       <a:solidFill>
-                        <a:srgbClr val="E4E7F0"/>
+                        <a:srgbClr val="F0DFB0"/>
                       </a:solidFill>
                       <a:prstDash val="solid"/>
                       <a:round/>
@@ -4977,7 +6340,7 @@
                     </a:lnR>
                     <a:lnT w="12700" cap="flat" cmpd="sng" algn="ctr">
                       <a:solidFill>
-                        <a:srgbClr val="E4E7F0"/>
+                        <a:srgbClr val="F0DFB0"/>
                       </a:solidFill>
                       <a:prstDash val="solid"/>
                       <a:round/>
@@ -4986,7 +6349,7 @@
                     </a:lnT>
                     <a:lnB w="12700" cap="flat" cmpd="sng" algn="ctr">
                       <a:solidFill>
-                        <a:srgbClr val="E4E7F0"/>
+                        <a:srgbClr val="F0DFB0"/>
                       </a:solidFill>
                       <a:prstDash val="solid"/>
                       <a:round/>
@@ -4999,7 +6362,7 @@
                   </a:tcPr>
                 </a:tc>
               </a:tr>
-              <a:tr h="429768">
+              <a:tr h="244275">
                 <a:tc>
                   <a:txBody>
                     <a:bodyPr/>
@@ -5009,7 +6372,7 @@
                         <a:buNone/>
                       </a:pPr>
                       <a:r>
-                        <a:rPr lang="en-US" sz="1250" b="1" dirty="0">
+                        <a:rPr lang="en-US" sz="1100" b="1" dirty="0">
                           <a:solidFill>
                             <a:srgbClr val="33344A"/>
                           </a:solidFill>
@@ -5019,17 +6382,17 @@
                         </a:rPr>
                         <a:t>F</a:t>
                       </a:r>
-                      <a:endParaRPr lang="en-US" sz="1250" dirty="0">
+                      <a:endParaRPr lang="en-US" sz="1100" dirty="0">
                         <a:latin typeface="Calibri" charset="0"/>
                         <a:ea typeface="Calibri" charset="0"/>
                         <a:cs typeface="Calibri" charset="0"/>
                       </a:endParaRPr>
                     </a:p>
                   </a:txBody>
-                  <a:tcPr marL="91440" marR="91440" marT="45720" marB="45720" anchor="ctr">
+                  <a:tcPr marL="73152" marR="73152" marT="36576" marB="36576" anchor="ctr">
                     <a:lnL w="12700" cap="flat" cmpd="sng" algn="ctr">
                       <a:solidFill>
-                        <a:srgbClr val="E4E7F0"/>
+                        <a:srgbClr val="F0DFB0"/>
                       </a:solidFill>
                       <a:prstDash val="solid"/>
                       <a:round/>
@@ -5038,7 +6401,7 @@
                     </a:lnL>
                     <a:lnR w="12700" cap="flat" cmpd="sng" algn="ctr">
                       <a:solidFill>
-                        <a:srgbClr val="E4E7F0"/>
+                        <a:srgbClr val="F0DFB0"/>
                       </a:solidFill>
                       <a:prstDash val="solid"/>
                       <a:round/>
@@ -5047,7 +6410,7 @@
                     </a:lnR>
                     <a:lnT w="12700" cap="flat" cmpd="sng" algn="ctr">
                       <a:solidFill>
-                        <a:srgbClr val="E4E7F0"/>
+                        <a:srgbClr val="F0DFB0"/>
                       </a:solidFill>
                       <a:prstDash val="solid"/>
                       <a:round/>
@@ -5056,7 +6419,7 @@
                     </a:lnT>
                     <a:lnB w="12700" cap="flat" cmpd="sng" algn="ctr">
                       <a:solidFill>
-                        <a:srgbClr val="E4E7F0"/>
+                        <a:srgbClr val="F0DFB0"/>
                       </a:solidFill>
                       <a:prstDash val="solid"/>
                       <a:round/>
@@ -5064,7 +6427,7 @@
                       <a:tailEnd type="none" w="med" len="med"/>
                     </a:lnB>
                     <a:solidFill>
-                      <a:srgbClr val="EAF0FC"/>
+                      <a:srgbClr val="FBF3E1"/>
                     </a:solidFill>
                   </a:tcPr>
                 </a:tc>
@@ -5077,7 +6440,7 @@
                         <a:buNone/>
                       </a:pPr>
                       <a:r>
-                        <a:rPr lang="en-US" sz="1250" dirty="0">
+                        <a:rPr lang="en-US" sz="1100" dirty="0">
                           <a:solidFill>
                             <a:srgbClr val="B8892B"/>
                           </a:solidFill>
@@ -5087,17 +6450,17 @@
                         </a:rPr>
                         <a:t>1 (new offer)</a:t>
                       </a:r>
-                      <a:endParaRPr lang="en-US" sz="1250" dirty="0">
+                      <a:endParaRPr lang="en-US" sz="1100" dirty="0">
                         <a:latin typeface="Calibri" charset="0"/>
                         <a:ea typeface="Calibri" charset="0"/>
                         <a:cs typeface="Calibri" charset="0"/>
                       </a:endParaRPr>
                     </a:p>
                   </a:txBody>
-                  <a:tcPr marL="91440" marR="91440" marT="45720" marB="45720" anchor="ctr">
+                  <a:tcPr marL="73152" marR="73152" marT="36576" marB="36576" anchor="ctr">
                     <a:lnL w="12700" cap="flat" cmpd="sng" algn="ctr">
                       <a:solidFill>
-                        <a:srgbClr val="E4E7F0"/>
+                        <a:srgbClr val="F0DFB0"/>
                       </a:solidFill>
                       <a:prstDash val="solid"/>
                       <a:round/>
@@ -5106,7 +6469,7 @@
                     </a:lnL>
                     <a:lnR w="12700" cap="flat" cmpd="sng" algn="ctr">
                       <a:solidFill>
-                        <a:srgbClr val="E4E7F0"/>
+                        <a:srgbClr val="F0DFB0"/>
                       </a:solidFill>
                       <a:prstDash val="solid"/>
                       <a:round/>
@@ -5115,7 +6478,7 @@
                     </a:lnR>
                     <a:lnT w="12700" cap="flat" cmpd="sng" algn="ctr">
                       <a:solidFill>
-                        <a:srgbClr val="E4E7F0"/>
+                        <a:srgbClr val="F0DFB0"/>
                       </a:solidFill>
                       <a:prstDash val="solid"/>
                       <a:round/>
@@ -5124,7 +6487,7 @@
                     </a:lnT>
                     <a:lnB w="12700" cap="flat" cmpd="sng" algn="ctr">
                       <a:solidFill>
-                        <a:srgbClr val="E4E7F0"/>
+                        <a:srgbClr val="F0DFB0"/>
                       </a:solidFill>
                       <a:prstDash val="solid"/>
                       <a:round/>
@@ -5132,7 +6495,7 @@
                       <a:tailEnd type="none" w="med" len="med"/>
                     </a:lnB>
                     <a:solidFill>
-                      <a:srgbClr val="EAF0FC"/>
+                      <a:srgbClr val="FBF3E1"/>
                     </a:solidFill>
                   </a:tcPr>
                 </a:tc>
@@ -5145,7 +6508,7 @@
                         <a:buNone/>
                       </a:pPr>
                       <a:r>
-                        <a:rPr lang="en-US" sz="1250" dirty="0">
+                        <a:rPr lang="en-US" sz="1100" dirty="0">
                           <a:solidFill>
                             <a:srgbClr val="33344A"/>
                           </a:solidFill>
@@ -5155,17 +6518,17 @@
                         </a:rPr>
                         <a:t>1</a:t>
                       </a:r>
-                      <a:endParaRPr lang="en-US" sz="1250" dirty="0">
+                      <a:endParaRPr lang="en-US" sz="1100" dirty="0">
                         <a:latin typeface="Calibri" charset="0"/>
                         <a:ea typeface="Calibri" charset="0"/>
                         <a:cs typeface="Calibri" charset="0"/>
                       </a:endParaRPr>
                     </a:p>
                   </a:txBody>
-                  <a:tcPr marL="91440" marR="91440" marT="45720" marB="45720" anchor="ctr">
+                  <a:tcPr marL="73152" marR="73152" marT="36576" marB="36576" anchor="ctr">
                     <a:lnL w="12700" cap="flat" cmpd="sng" algn="ctr">
                       <a:solidFill>
-                        <a:srgbClr val="E4E7F0"/>
+                        <a:srgbClr val="F0DFB0"/>
                       </a:solidFill>
                       <a:prstDash val="solid"/>
                       <a:round/>
@@ -5174,7 +6537,7 @@
                     </a:lnL>
                     <a:lnR w="12700" cap="flat" cmpd="sng" algn="ctr">
                       <a:solidFill>
-                        <a:srgbClr val="E4E7F0"/>
+                        <a:srgbClr val="F0DFB0"/>
                       </a:solidFill>
                       <a:prstDash val="solid"/>
                       <a:round/>
@@ -5183,7 +6546,7 @@
                     </a:lnR>
                     <a:lnT w="12700" cap="flat" cmpd="sng" algn="ctr">
                       <a:solidFill>
-                        <a:srgbClr val="E4E7F0"/>
+                        <a:srgbClr val="F0DFB0"/>
                       </a:solidFill>
                       <a:prstDash val="solid"/>
                       <a:round/>
@@ -5192,7 +6555,7 @@
                     </a:lnT>
                     <a:lnB w="12700" cap="flat" cmpd="sng" algn="ctr">
                       <a:solidFill>
-                        <a:srgbClr val="E4E7F0"/>
+                        <a:srgbClr val="F0DFB0"/>
                       </a:solidFill>
                       <a:prstDash val="solid"/>
                       <a:round/>
@@ -5200,7 +6563,7 @@
                       <a:tailEnd type="none" w="med" len="med"/>
                     </a:lnB>
                     <a:solidFill>
-                      <a:srgbClr val="EAF0FC"/>
+                      <a:srgbClr val="FBF3E1"/>
                     </a:solidFill>
                   </a:tcPr>
                 </a:tc>
@@ -5213,7 +6576,7 @@
                         <a:buNone/>
                       </a:pPr>
                       <a:r>
-                        <a:rPr lang="en-US" sz="1250" dirty="0">
+                        <a:rPr lang="en-US" sz="1100" dirty="0">
                           <a:solidFill>
                             <a:srgbClr val="33344A"/>
                           </a:solidFill>
@@ -5223,17 +6586,17 @@
                         </a:rPr>
                         <a:t>0.50</a:t>
                       </a:r>
-                      <a:endParaRPr lang="en-US" sz="1250" dirty="0">
+                      <a:endParaRPr lang="en-US" sz="1100" dirty="0">
                         <a:latin typeface="Calibri" charset="0"/>
                         <a:ea typeface="Calibri" charset="0"/>
                         <a:cs typeface="Calibri" charset="0"/>
                       </a:endParaRPr>
                     </a:p>
                   </a:txBody>
-                  <a:tcPr marL="91440" marR="91440" marT="45720" marB="45720" anchor="ctr">
+                  <a:tcPr marL="73152" marR="73152" marT="36576" marB="36576" anchor="ctr">
                     <a:lnL w="12700" cap="flat" cmpd="sng" algn="ctr">
                       <a:solidFill>
-                        <a:srgbClr val="E4E7F0"/>
+                        <a:srgbClr val="F0DFB0"/>
                       </a:solidFill>
                       <a:prstDash val="solid"/>
                       <a:round/>
@@ -5242,7 +6605,7 @@
                     </a:lnL>
                     <a:lnR w="12700" cap="flat" cmpd="sng" algn="ctr">
                       <a:solidFill>
-                        <a:srgbClr val="E4E7F0"/>
+                        <a:srgbClr val="F0DFB0"/>
                       </a:solidFill>
                       <a:prstDash val="solid"/>
                       <a:round/>
@@ -5251,7 +6614,7 @@
                     </a:lnR>
                     <a:lnT w="12700" cap="flat" cmpd="sng" algn="ctr">
                       <a:solidFill>
-                        <a:srgbClr val="E4E7F0"/>
+                        <a:srgbClr val="F0DFB0"/>
                       </a:solidFill>
                       <a:prstDash val="solid"/>
                       <a:round/>
@@ -5260,7 +6623,7 @@
                     </a:lnT>
                     <a:lnB w="12700" cap="flat" cmpd="sng" algn="ctr">
                       <a:solidFill>
-                        <a:srgbClr val="E4E7F0"/>
+                        <a:srgbClr val="F0DFB0"/>
                       </a:solidFill>
                       <a:prstDash val="solid"/>
                       <a:round/>
@@ -5268,7 +6631,7 @@
                       <a:tailEnd type="none" w="med" len="med"/>
                     </a:lnB>
                     <a:solidFill>
-                      <a:srgbClr val="EAF0FC"/>
+                      <a:srgbClr val="FBF3E1"/>
                     </a:solidFill>
                   </a:tcPr>
                 </a:tc>
@@ -5281,7 +6644,7 @@
                         <a:buNone/>
                       </a:pPr>
                       <a:r>
-                        <a:rPr lang="en-US" sz="1250" dirty="0">
+                        <a:rPr lang="en-US" sz="1100" dirty="0">
                           <a:solidFill>
                             <a:srgbClr val="33344A"/>
                           </a:solidFill>
@@ -5291,17 +6654,17 @@
                         </a:rPr>
                         <a:t>0.70</a:t>
                       </a:r>
-                      <a:endParaRPr lang="en-US" sz="1250" dirty="0">
+                      <a:endParaRPr lang="en-US" sz="1100" dirty="0">
                         <a:latin typeface="Calibri" charset="0"/>
                         <a:ea typeface="Calibri" charset="0"/>
                         <a:cs typeface="Calibri" charset="0"/>
                       </a:endParaRPr>
                     </a:p>
                   </a:txBody>
-                  <a:tcPr marL="91440" marR="91440" marT="45720" marB="45720" anchor="ctr">
+                  <a:tcPr marL="73152" marR="73152" marT="36576" marB="36576" anchor="ctr">
                     <a:lnL w="12700" cap="flat" cmpd="sng" algn="ctr">
                       <a:solidFill>
-                        <a:srgbClr val="E4E7F0"/>
+                        <a:srgbClr val="F0DFB0"/>
                       </a:solidFill>
                       <a:prstDash val="solid"/>
                       <a:round/>
@@ -5310,7 +6673,7 @@
                     </a:lnL>
                     <a:lnR w="12700" cap="flat" cmpd="sng" algn="ctr">
                       <a:solidFill>
-                        <a:srgbClr val="E4E7F0"/>
+                        <a:srgbClr val="F0DFB0"/>
                       </a:solidFill>
                       <a:prstDash val="solid"/>
                       <a:round/>
@@ -5319,7 +6682,7 @@
                     </a:lnR>
                     <a:lnT w="12700" cap="flat" cmpd="sng" algn="ctr">
                       <a:solidFill>
-                        <a:srgbClr val="E4E7F0"/>
+                        <a:srgbClr val="F0DFB0"/>
                       </a:solidFill>
                       <a:prstDash val="solid"/>
                       <a:round/>
@@ -5328,7 +6691,7 @@
                     </a:lnT>
                     <a:lnB w="12700" cap="flat" cmpd="sng" algn="ctr">
                       <a:solidFill>
-                        <a:srgbClr val="E4E7F0"/>
+                        <a:srgbClr val="F0DFB0"/>
                       </a:solidFill>
                       <a:prstDash val="solid"/>
                       <a:round/>
@@ -5336,7 +6699,7 @@
                       <a:tailEnd type="none" w="med" len="med"/>
                     </a:lnB>
                     <a:solidFill>
-                      <a:srgbClr val="EAF0FC"/>
+                      <a:srgbClr val="FBF3E1"/>
                     </a:solidFill>
                   </a:tcPr>
                 </a:tc>
@@ -5347,7 +6710,7 @@
       </p:graphicFrame>
       <p:sp>
         <p:nvSpPr>
-          <p:cNvPr id="9" name="Text 6"/>
+          <p:cNvPr id="16" name="Text 11"/>
           <p:cNvSpPr txBox="1"/>
           <p:nvPr/>
         </p:nvSpPr>
@@ -5386,7 +6749,7 @@
       </p:sp>
       <p:sp>
         <p:nvSpPr>
-          <p:cNvPr id="10" name="Text 7"/>
+          <p:cNvPr id="17" name="Text 12"/>
           <p:cNvSpPr txBox="1"/>
           <p:nvPr/>
         </p:nvSpPr>

--- a/uplift_model_deck.pptx
+++ b/uplift_model_deck.pptx
@@ -4168,11 +4168,11 @@
         <p:spPr>
           <a:xfrm>
             <a:off x="548640" y="4032504"/>
-            <a:ext cx="11064240" cy="2286000"/>
+            <a:ext cx="11064240" cy="2212848"/>
           </a:xfrm>
           <a:prstGeom prst="roundRect">
             <a:avLst>
-              <a:gd name="adj" fmla="val 4000"/>
+              <a:gd name="adj" fmla="val 4132"/>
             </a:avLst>
           </a:prstGeom>
           <a:solidFill>
@@ -4233,9 +4233,48 @@
                 <a:ea typeface="Calibri" pitchFamily="34" charset="-122"/>
                 <a:cs typeface="Calibri" pitchFamily="34" charset="-120"/>
               </a:rPr>
-              <a:t>once trained, BOTH models score EVERY customer — including their own counterfactual arm</a:t>
+              <a:t>once trained, BOTH models score EVERY customer — including their own counterfactual arm — as two separate passes</a:t>
             </a:r>
             <a:endParaRPr lang="en-US" sz="1100" dirty="0"/>
+          </a:p>
+        </p:txBody>
+      </p:sp>
+      <p:sp>
+        <p:nvSpPr>
+          <p:cNvPr id="15" name="Text 11"/>
+          <p:cNvSpPr txBox="1"/>
+          <p:nvPr/>
+        </p:nvSpPr>
+        <p:spPr>
+          <a:xfrm>
+            <a:off x="777240" y="4471416"/>
+            <a:ext cx="5074920" cy="201168"/>
+          </a:xfrm>
+          <a:prstGeom prst="rect">
+            <a:avLst/>
+          </a:prstGeom>
+          <a:noFill/>
+          <a:ln/>
+        </p:spPr>
+        <p:txBody>
+          <a:bodyPr wrap="square" lIns="0" tIns="0" rIns="0" bIns="0" rtlCol="0" anchor="ctr"/>
+          <a:lstStyle/>
+          <a:p>
+            <a:pPr indent="0" marL="0">
+              <a:buNone/>
+            </a:pPr>
+            <a:r>
+              <a:rPr lang="en-US" sz="1050" b="1" dirty="0">
+                <a:solidFill>
+                  <a:srgbClr val="1E2761"/>
+                </a:solidFill>
+                <a:latin typeface="Calibri" pitchFamily="34" charset="0"/>
+                <a:ea typeface="Calibri" pitchFamily="34" charset="-122"/>
+                <a:cs typeface="Calibri" pitchFamily="34" charset="-120"/>
+              </a:rPr>
+              <a:t>μ̂₀ scores ALL customers → pred. Applied, old offer</a:t>
+            </a:r>
+            <a:endParaRPr lang="en-US" sz="1050" dirty="0"/>
           </a:p>
         </p:txBody>
       </p:sp>
@@ -4254,21 +4293,20 @@
           </p:nvPr>
         </p:nvGraphicFramePr>
         <p:xfrm>
-          <a:off x="914400" y="4471416"/>
-          <a:ext cx="10332720" cy="1709928"/>
+          <a:off x="777240" y="4690872"/>
+          <a:ext cx="5074920" cy="1408176"/>
         </p:xfrm>
         <a:graphic>
           <a:graphicData uri="http://schemas.openxmlformats.org/drawingml/2006/table">
             <a:tbl>
               <a:tblPr/>
               <a:tblGrid>
-                <a:gridCol w="1371600"/>
-                <a:gridCol w="1783080"/>
-                <a:gridCol w="1371600"/>
-                <a:gridCol w="2880360"/>
-                <a:gridCol w="2926080"/>
+                <a:gridCol w="685800"/>
+                <a:gridCol w="1280160"/>
+                <a:gridCol w="685800"/>
+                <a:gridCol w="2423160"/>
               </a:tblGrid>
-              <a:tr h="244275">
+              <a:tr h="201168">
                 <a:tc>
                   <a:txBody>
                     <a:bodyPr/>
@@ -4286,7 +4324,7 @@
                           <a:ea typeface="Calibri" pitchFamily="34" charset="-122"/>
                           <a:cs typeface="Calibri" pitchFamily="34" charset="-120"/>
                         </a:rPr>
-                        <a:t>Customer</a:t>
+                        <a:t>Cust.</a:t>
                       </a:r>
                       <a:endParaRPr lang="en-US" sz="950" dirty="0">
                         <a:latin typeface="Calibri" charset="0"/>
@@ -4295,10 +4333,10 @@
                       </a:endParaRPr>
                     </a:p>
                   </a:txBody>
-                  <a:tcPr marL="73152" marR="73152" marT="36576" marB="36576" anchor="ctr">
+                  <a:tcPr marL="45720" marR="45720" marT="18288" marB="18288" anchor="ctr">
                     <a:lnL w="12700" cap="flat" cmpd="sng" algn="ctr">
                       <a:solidFill>
-                        <a:srgbClr val="F0DFB0"/>
+                        <a:srgbClr val="E4E7F0"/>
                       </a:solidFill>
                       <a:prstDash val="solid"/>
                       <a:round/>
@@ -4307,7 +4345,7 @@
                     </a:lnL>
                     <a:lnR w="12700" cap="flat" cmpd="sng" algn="ctr">
                       <a:solidFill>
-                        <a:srgbClr val="F0DFB0"/>
+                        <a:srgbClr val="E4E7F0"/>
                       </a:solidFill>
                       <a:prstDash val="solid"/>
                       <a:round/>
@@ -4316,7 +4354,7 @@
                     </a:lnR>
                     <a:lnT w="12700" cap="flat" cmpd="sng" algn="ctr">
                       <a:solidFill>
-                        <a:srgbClr val="F0DFB0"/>
+                        <a:srgbClr val="E4E7F0"/>
                       </a:solidFill>
                       <a:prstDash val="solid"/>
                       <a:round/>
@@ -4325,7 +4363,7 @@
                     </a:lnT>
                     <a:lnB w="12700" cap="flat" cmpd="sng" algn="ctr">
                       <a:solidFill>
-                        <a:srgbClr val="F0DFB0"/>
+                        <a:srgbClr val="E4E7F0"/>
                       </a:solidFill>
                       <a:prstDash val="solid"/>
                       <a:round/>
@@ -4363,10 +4401,10 @@
                       </a:endParaRPr>
                     </a:p>
                   </a:txBody>
-                  <a:tcPr marL="73152" marR="73152" marT="36576" marB="36576" anchor="ctr">
+                  <a:tcPr marL="45720" marR="45720" marT="18288" marB="18288" anchor="ctr">
                     <a:lnL w="12700" cap="flat" cmpd="sng" algn="ctr">
                       <a:solidFill>
-                        <a:srgbClr val="F0DFB0"/>
+                        <a:srgbClr val="E4E7F0"/>
                       </a:solidFill>
                       <a:prstDash val="solid"/>
                       <a:round/>
@@ -4375,7 +4413,7 @@
                     </a:lnL>
                     <a:lnR w="12700" cap="flat" cmpd="sng" algn="ctr">
                       <a:solidFill>
-                        <a:srgbClr val="F0DFB0"/>
+                        <a:srgbClr val="E4E7F0"/>
                       </a:solidFill>
                       <a:prstDash val="solid"/>
                       <a:round/>
@@ -4384,7 +4422,7 @@
                     </a:lnR>
                     <a:lnT w="12700" cap="flat" cmpd="sng" algn="ctr">
                       <a:solidFill>
-                        <a:srgbClr val="F0DFB0"/>
+                        <a:srgbClr val="E4E7F0"/>
                       </a:solidFill>
                       <a:prstDash val="solid"/>
                       <a:round/>
@@ -4393,7 +4431,7 @@
                     </a:lnT>
                     <a:lnB w="12700" cap="flat" cmpd="sng" algn="ctr">
                       <a:solidFill>
-                        <a:srgbClr val="F0DFB0"/>
+                        <a:srgbClr val="E4E7F0"/>
                       </a:solidFill>
                       <a:prstDash val="solid"/>
                       <a:round/>
@@ -4431,10 +4469,10 @@
                       </a:endParaRPr>
                     </a:p>
                   </a:txBody>
-                  <a:tcPr marL="73152" marR="73152" marT="36576" marB="36576" anchor="ctr">
+                  <a:tcPr marL="45720" marR="45720" marT="18288" marB="18288" anchor="ctr">
                     <a:lnL w="12700" cap="flat" cmpd="sng" algn="ctr">
                       <a:solidFill>
-                        <a:srgbClr val="F0DFB0"/>
+                        <a:srgbClr val="E4E7F0"/>
                       </a:solidFill>
                       <a:prstDash val="solid"/>
                       <a:round/>
@@ -4443,7 +4481,7 @@
                     </a:lnL>
                     <a:lnR w="12700" cap="flat" cmpd="sng" algn="ctr">
                       <a:solidFill>
-                        <a:srgbClr val="F0DFB0"/>
+                        <a:srgbClr val="E4E7F0"/>
                       </a:solidFill>
                       <a:prstDash val="solid"/>
                       <a:round/>
@@ -4452,7 +4490,7 @@
                     </a:lnR>
                     <a:lnT w="12700" cap="flat" cmpd="sng" algn="ctr">
                       <a:solidFill>
-                        <a:srgbClr val="F0DFB0"/>
+                        <a:srgbClr val="E4E7F0"/>
                       </a:solidFill>
                       <a:prstDash val="solid"/>
                       <a:round/>
@@ -4461,7 +4499,7 @@
                     </a:lnT>
                     <a:lnB w="12700" cap="flat" cmpd="sng" algn="ctr">
                       <a:solidFill>
-                        <a:srgbClr val="F0DFB0"/>
+                        <a:srgbClr val="E4E7F0"/>
                       </a:solidFill>
                       <a:prstDash val="solid"/>
                       <a:round/>
@@ -4498,6 +4536,1770 @@
                         <a:cs typeface="Calibri" charset="0"/>
                       </a:endParaRPr>
                     </a:p>
+                  </a:txBody>
+                  <a:tcPr marL="45720" marR="45720" marT="18288" marB="18288" anchor="ctr">
+                    <a:lnL w="12700" cap="flat" cmpd="sng" algn="ctr">
+                      <a:solidFill>
+                        <a:srgbClr val="E4E7F0"/>
+                      </a:solidFill>
+                      <a:prstDash val="solid"/>
+                      <a:round/>
+                      <a:headEnd type="none" w="med" len="med"/>
+                      <a:tailEnd type="none" w="med" len="med"/>
+                    </a:lnL>
+                    <a:lnR w="12700" cap="flat" cmpd="sng" algn="ctr">
+                      <a:solidFill>
+                        <a:srgbClr val="E4E7F0"/>
+                      </a:solidFill>
+                      <a:prstDash val="solid"/>
+                      <a:round/>
+                      <a:headEnd type="none" w="med" len="med"/>
+                      <a:tailEnd type="none" w="med" len="med"/>
+                    </a:lnR>
+                    <a:lnT w="12700" cap="flat" cmpd="sng" algn="ctr">
+                      <a:solidFill>
+                        <a:srgbClr val="E4E7F0"/>
+                      </a:solidFill>
+                      <a:prstDash val="solid"/>
+                      <a:round/>
+                      <a:headEnd type="none" w="med" len="med"/>
+                      <a:tailEnd type="none" w="med" len="med"/>
+                    </a:lnT>
+                    <a:lnB w="12700" cap="flat" cmpd="sng" algn="ctr">
+                      <a:solidFill>
+                        <a:srgbClr val="E4E7F0"/>
+                      </a:solidFill>
+                      <a:prstDash val="solid"/>
+                      <a:round/>
+                      <a:headEnd type="none" w="med" len="med"/>
+                      <a:tailEnd type="none" w="med" len="med"/>
+                    </a:lnB>
+                    <a:solidFill>
+                      <a:srgbClr val="1E2761"/>
+                    </a:solidFill>
+                  </a:tcPr>
+                </a:tc>
+              </a:tr>
+              <a:tr h="201168">
+                <a:tc>
+                  <a:txBody>
+                    <a:bodyPr/>
+                    <a:lstStyle/>
+                    <a:p>
+                      <a:pPr algn="ctr" indent="0" marL="0">
+                        <a:buNone/>
+                      </a:pPr>
+                      <a:r>
+                        <a:rPr lang="en-US" sz="1050" b="1" dirty="0">
+                          <a:solidFill>
+                            <a:srgbClr val="33344A"/>
+                          </a:solidFill>
+                          <a:latin typeface="Calibri" pitchFamily="34" charset="0"/>
+                          <a:ea typeface="Calibri" pitchFamily="34" charset="-122"/>
+                          <a:cs typeface="Calibri" pitchFamily="34" charset="-120"/>
+                        </a:rPr>
+                        <a:t>A</a:t>
+                      </a:r>
+                      <a:endParaRPr lang="en-US" sz="1050" dirty="0">
+                        <a:latin typeface="Calibri" charset="0"/>
+                        <a:ea typeface="Calibri" charset="0"/>
+                        <a:cs typeface="Calibri" charset="0"/>
+                      </a:endParaRPr>
+                    </a:p>
+                  </a:txBody>
+                  <a:tcPr marL="45720" marR="45720" marT="18288" marB="18288" anchor="ctr">
+                    <a:lnL w="12700" cap="flat" cmpd="sng" algn="ctr">
+                      <a:solidFill>
+                        <a:srgbClr val="E4E7F0"/>
+                      </a:solidFill>
+                      <a:prstDash val="solid"/>
+                      <a:round/>
+                      <a:headEnd type="none" w="med" len="med"/>
+                      <a:tailEnd type="none" w="med" len="med"/>
+                    </a:lnL>
+                    <a:lnR w="12700" cap="flat" cmpd="sng" algn="ctr">
+                      <a:solidFill>
+                        <a:srgbClr val="E4E7F0"/>
+                      </a:solidFill>
+                      <a:prstDash val="solid"/>
+                      <a:round/>
+                      <a:headEnd type="none" w="med" len="med"/>
+                      <a:tailEnd type="none" w="med" len="med"/>
+                    </a:lnR>
+                    <a:lnT w="12700" cap="flat" cmpd="sng" algn="ctr">
+                      <a:solidFill>
+                        <a:srgbClr val="E4E7F0"/>
+                      </a:solidFill>
+                      <a:prstDash val="solid"/>
+                      <a:round/>
+                      <a:headEnd type="none" w="med" len="med"/>
+                      <a:tailEnd type="none" w="med" len="med"/>
+                    </a:lnT>
+                    <a:lnB w="12700" cap="flat" cmpd="sng" algn="ctr">
+                      <a:solidFill>
+                        <a:srgbClr val="E4E7F0"/>
+                      </a:solidFill>
+                      <a:prstDash val="solid"/>
+                      <a:round/>
+                      <a:headEnd type="none" w="med" len="med"/>
+                      <a:tailEnd type="none" w="med" len="med"/>
+                    </a:lnB>
+                    <a:solidFill>
+                      <a:srgbClr val="FFFFFF"/>
+                    </a:solidFill>
+                  </a:tcPr>
+                </a:tc>
+                <a:tc>
+                  <a:txBody>
+                    <a:bodyPr/>
+                    <a:lstStyle/>
+                    <a:p>
+                      <a:pPr algn="ctr" indent="0" marL="0">
+                        <a:buNone/>
+                      </a:pPr>
+                      <a:r>
+                        <a:rPr lang="en-US" sz="1050" dirty="0">
+                          <a:solidFill>
+                            <a:srgbClr val="1E2761"/>
+                          </a:solidFill>
+                          <a:latin typeface="Calibri" pitchFamily="34" charset="0"/>
+                          <a:ea typeface="Calibri" pitchFamily="34" charset="-122"/>
+                          <a:cs typeface="Calibri" pitchFamily="34" charset="-120"/>
+                        </a:rPr>
+                        <a:t>0 (old)</a:t>
+                      </a:r>
+                      <a:endParaRPr lang="en-US" sz="1050" dirty="0">
+                        <a:latin typeface="Calibri" charset="0"/>
+                        <a:ea typeface="Calibri" charset="0"/>
+                        <a:cs typeface="Calibri" charset="0"/>
+                      </a:endParaRPr>
+                    </a:p>
+                  </a:txBody>
+                  <a:tcPr marL="45720" marR="45720" marT="18288" marB="18288" anchor="ctr">
+                    <a:lnL w="12700" cap="flat" cmpd="sng" algn="ctr">
+                      <a:solidFill>
+                        <a:srgbClr val="E4E7F0"/>
+                      </a:solidFill>
+                      <a:prstDash val="solid"/>
+                      <a:round/>
+                      <a:headEnd type="none" w="med" len="med"/>
+                      <a:tailEnd type="none" w="med" len="med"/>
+                    </a:lnL>
+                    <a:lnR w="12700" cap="flat" cmpd="sng" algn="ctr">
+                      <a:solidFill>
+                        <a:srgbClr val="E4E7F0"/>
+                      </a:solidFill>
+                      <a:prstDash val="solid"/>
+                      <a:round/>
+                      <a:headEnd type="none" w="med" len="med"/>
+                      <a:tailEnd type="none" w="med" len="med"/>
+                    </a:lnR>
+                    <a:lnT w="12700" cap="flat" cmpd="sng" algn="ctr">
+                      <a:solidFill>
+                        <a:srgbClr val="E4E7F0"/>
+                      </a:solidFill>
+                      <a:prstDash val="solid"/>
+                      <a:round/>
+                      <a:headEnd type="none" w="med" len="med"/>
+                      <a:tailEnd type="none" w="med" len="med"/>
+                    </a:lnT>
+                    <a:lnB w="12700" cap="flat" cmpd="sng" algn="ctr">
+                      <a:solidFill>
+                        <a:srgbClr val="E4E7F0"/>
+                      </a:solidFill>
+                      <a:prstDash val="solid"/>
+                      <a:round/>
+                      <a:headEnd type="none" w="med" len="med"/>
+                      <a:tailEnd type="none" w="med" len="med"/>
+                    </a:lnB>
+                    <a:solidFill>
+                      <a:srgbClr val="FFFFFF"/>
+                    </a:solidFill>
+                  </a:tcPr>
+                </a:tc>
+                <a:tc>
+                  <a:txBody>
+                    <a:bodyPr/>
+                    <a:lstStyle/>
+                    <a:p>
+                      <a:pPr algn="ctr" indent="0" marL="0">
+                        <a:buNone/>
+                      </a:pPr>
+                      <a:r>
+                        <a:rPr lang="en-US" sz="1050" dirty="0">
+                          <a:solidFill>
+                            <a:srgbClr val="33344A"/>
+                          </a:solidFill>
+                          <a:latin typeface="Calibri" pitchFamily="34" charset="0"/>
+                          <a:ea typeface="Calibri" pitchFamily="34" charset="-122"/>
+                          <a:cs typeface="Calibri" pitchFamily="34" charset="-120"/>
+                        </a:rPr>
+                        <a:t>0</a:t>
+                      </a:r>
+                      <a:endParaRPr lang="en-US" sz="1050" dirty="0">
+                        <a:latin typeface="Calibri" charset="0"/>
+                        <a:ea typeface="Calibri" charset="0"/>
+                        <a:cs typeface="Calibri" charset="0"/>
+                      </a:endParaRPr>
+                    </a:p>
+                  </a:txBody>
+                  <a:tcPr marL="45720" marR="45720" marT="18288" marB="18288" anchor="ctr">
+                    <a:lnL w="12700" cap="flat" cmpd="sng" algn="ctr">
+                      <a:solidFill>
+                        <a:srgbClr val="E4E7F0"/>
+                      </a:solidFill>
+                      <a:prstDash val="solid"/>
+                      <a:round/>
+                      <a:headEnd type="none" w="med" len="med"/>
+                      <a:tailEnd type="none" w="med" len="med"/>
+                    </a:lnL>
+                    <a:lnR w="12700" cap="flat" cmpd="sng" algn="ctr">
+                      <a:solidFill>
+                        <a:srgbClr val="E4E7F0"/>
+                      </a:solidFill>
+                      <a:prstDash val="solid"/>
+                      <a:round/>
+                      <a:headEnd type="none" w="med" len="med"/>
+                      <a:tailEnd type="none" w="med" len="med"/>
+                    </a:lnR>
+                    <a:lnT w="12700" cap="flat" cmpd="sng" algn="ctr">
+                      <a:solidFill>
+                        <a:srgbClr val="E4E7F0"/>
+                      </a:solidFill>
+                      <a:prstDash val="solid"/>
+                      <a:round/>
+                      <a:headEnd type="none" w="med" len="med"/>
+                      <a:tailEnd type="none" w="med" len="med"/>
+                    </a:lnT>
+                    <a:lnB w="12700" cap="flat" cmpd="sng" algn="ctr">
+                      <a:solidFill>
+                        <a:srgbClr val="E4E7F0"/>
+                      </a:solidFill>
+                      <a:prstDash val="solid"/>
+                      <a:round/>
+                      <a:headEnd type="none" w="med" len="med"/>
+                      <a:tailEnd type="none" w="med" len="med"/>
+                    </a:lnB>
+                    <a:solidFill>
+                      <a:srgbClr val="FFFFFF"/>
+                    </a:solidFill>
+                  </a:tcPr>
+                </a:tc>
+                <a:tc>
+                  <a:txBody>
+                    <a:bodyPr/>
+                    <a:lstStyle/>
+                    <a:p>
+                      <a:pPr algn="ctr" indent="0" marL="0">
+                        <a:buNone/>
+                      </a:pPr>
+                      <a:r>
+                        <a:rPr lang="en-US" sz="1050" dirty="0">
+                          <a:solidFill>
+                            <a:srgbClr val="33344A"/>
+                          </a:solidFill>
+                          <a:latin typeface="Calibri" pitchFamily="34" charset="0"/>
+                          <a:ea typeface="Calibri" pitchFamily="34" charset="-122"/>
+                          <a:cs typeface="Calibri" pitchFamily="34" charset="-120"/>
+                        </a:rPr>
+                        <a:t>0.20</a:t>
+                      </a:r>
+                      <a:endParaRPr lang="en-US" sz="1050" dirty="0">
+                        <a:latin typeface="Calibri" charset="0"/>
+                        <a:ea typeface="Calibri" charset="0"/>
+                        <a:cs typeface="Calibri" charset="0"/>
+                      </a:endParaRPr>
+                    </a:p>
+                  </a:txBody>
+                  <a:tcPr marL="45720" marR="45720" marT="18288" marB="18288" anchor="ctr">
+                    <a:lnL w="12700" cap="flat" cmpd="sng" algn="ctr">
+                      <a:solidFill>
+                        <a:srgbClr val="E4E7F0"/>
+                      </a:solidFill>
+                      <a:prstDash val="solid"/>
+                      <a:round/>
+                      <a:headEnd type="none" w="med" len="med"/>
+                      <a:tailEnd type="none" w="med" len="med"/>
+                    </a:lnL>
+                    <a:lnR w="12700" cap="flat" cmpd="sng" algn="ctr">
+                      <a:solidFill>
+                        <a:srgbClr val="E4E7F0"/>
+                      </a:solidFill>
+                      <a:prstDash val="solid"/>
+                      <a:round/>
+                      <a:headEnd type="none" w="med" len="med"/>
+                      <a:tailEnd type="none" w="med" len="med"/>
+                    </a:lnR>
+                    <a:lnT w="12700" cap="flat" cmpd="sng" algn="ctr">
+                      <a:solidFill>
+                        <a:srgbClr val="E4E7F0"/>
+                      </a:solidFill>
+                      <a:prstDash val="solid"/>
+                      <a:round/>
+                      <a:headEnd type="none" w="med" len="med"/>
+                      <a:tailEnd type="none" w="med" len="med"/>
+                    </a:lnT>
+                    <a:lnB w="12700" cap="flat" cmpd="sng" algn="ctr">
+                      <a:solidFill>
+                        <a:srgbClr val="E4E7F0"/>
+                      </a:solidFill>
+                      <a:prstDash val="solid"/>
+                      <a:round/>
+                      <a:headEnd type="none" w="med" len="med"/>
+                      <a:tailEnd type="none" w="med" len="med"/>
+                    </a:lnB>
+                    <a:solidFill>
+                      <a:srgbClr val="FFFFFF"/>
+                    </a:solidFill>
+                  </a:tcPr>
+                </a:tc>
+              </a:tr>
+              <a:tr h="201168">
+                <a:tc>
+                  <a:txBody>
+                    <a:bodyPr/>
+                    <a:lstStyle/>
+                    <a:p>
+                      <a:pPr algn="ctr" indent="0" marL="0">
+                        <a:buNone/>
+                      </a:pPr>
+                      <a:r>
+                        <a:rPr lang="en-US" sz="1050" b="1" dirty="0">
+                          <a:solidFill>
+                            <a:srgbClr val="33344A"/>
+                          </a:solidFill>
+                          <a:latin typeface="Calibri" pitchFamily="34" charset="0"/>
+                          <a:ea typeface="Calibri" pitchFamily="34" charset="-122"/>
+                          <a:cs typeface="Calibri" pitchFamily="34" charset="-120"/>
+                        </a:rPr>
+                        <a:t>B</a:t>
+                      </a:r>
+                      <a:endParaRPr lang="en-US" sz="1050" dirty="0">
+                        <a:latin typeface="Calibri" charset="0"/>
+                        <a:ea typeface="Calibri" charset="0"/>
+                        <a:cs typeface="Calibri" charset="0"/>
+                      </a:endParaRPr>
+                    </a:p>
+                  </a:txBody>
+                  <a:tcPr marL="45720" marR="45720" marT="18288" marB="18288" anchor="ctr">
+                    <a:lnL w="12700" cap="flat" cmpd="sng" algn="ctr">
+                      <a:solidFill>
+                        <a:srgbClr val="E4E7F0"/>
+                      </a:solidFill>
+                      <a:prstDash val="solid"/>
+                      <a:round/>
+                      <a:headEnd type="none" w="med" len="med"/>
+                      <a:tailEnd type="none" w="med" len="med"/>
+                    </a:lnL>
+                    <a:lnR w="12700" cap="flat" cmpd="sng" algn="ctr">
+                      <a:solidFill>
+                        <a:srgbClr val="E4E7F0"/>
+                      </a:solidFill>
+                      <a:prstDash val="solid"/>
+                      <a:round/>
+                      <a:headEnd type="none" w="med" len="med"/>
+                      <a:tailEnd type="none" w="med" len="med"/>
+                    </a:lnR>
+                    <a:lnT w="12700" cap="flat" cmpd="sng" algn="ctr">
+                      <a:solidFill>
+                        <a:srgbClr val="E4E7F0"/>
+                      </a:solidFill>
+                      <a:prstDash val="solid"/>
+                      <a:round/>
+                      <a:headEnd type="none" w="med" len="med"/>
+                      <a:tailEnd type="none" w="med" len="med"/>
+                    </a:lnT>
+                    <a:lnB w="12700" cap="flat" cmpd="sng" algn="ctr">
+                      <a:solidFill>
+                        <a:srgbClr val="E4E7F0"/>
+                      </a:solidFill>
+                      <a:prstDash val="solid"/>
+                      <a:round/>
+                      <a:headEnd type="none" w="med" len="med"/>
+                      <a:tailEnd type="none" w="med" len="med"/>
+                    </a:lnB>
+                    <a:solidFill>
+                      <a:srgbClr val="EAF0FC"/>
+                    </a:solidFill>
+                  </a:tcPr>
+                </a:tc>
+                <a:tc>
+                  <a:txBody>
+                    <a:bodyPr/>
+                    <a:lstStyle/>
+                    <a:p>
+                      <a:pPr algn="ctr" indent="0" marL="0">
+                        <a:buNone/>
+                      </a:pPr>
+                      <a:r>
+                        <a:rPr lang="en-US" sz="1050" dirty="0">
+                          <a:solidFill>
+                            <a:srgbClr val="1E2761"/>
+                          </a:solidFill>
+                          <a:latin typeface="Calibri" pitchFamily="34" charset="0"/>
+                          <a:ea typeface="Calibri" pitchFamily="34" charset="-122"/>
+                          <a:cs typeface="Calibri" pitchFamily="34" charset="-120"/>
+                        </a:rPr>
+                        <a:t>0 (old)</a:t>
+                      </a:r>
+                      <a:endParaRPr lang="en-US" sz="1050" dirty="0">
+                        <a:latin typeface="Calibri" charset="0"/>
+                        <a:ea typeface="Calibri" charset="0"/>
+                        <a:cs typeface="Calibri" charset="0"/>
+                      </a:endParaRPr>
+                    </a:p>
+                  </a:txBody>
+                  <a:tcPr marL="45720" marR="45720" marT="18288" marB="18288" anchor="ctr">
+                    <a:lnL w="12700" cap="flat" cmpd="sng" algn="ctr">
+                      <a:solidFill>
+                        <a:srgbClr val="E4E7F0"/>
+                      </a:solidFill>
+                      <a:prstDash val="solid"/>
+                      <a:round/>
+                      <a:headEnd type="none" w="med" len="med"/>
+                      <a:tailEnd type="none" w="med" len="med"/>
+                    </a:lnL>
+                    <a:lnR w="12700" cap="flat" cmpd="sng" algn="ctr">
+                      <a:solidFill>
+                        <a:srgbClr val="E4E7F0"/>
+                      </a:solidFill>
+                      <a:prstDash val="solid"/>
+                      <a:round/>
+                      <a:headEnd type="none" w="med" len="med"/>
+                      <a:tailEnd type="none" w="med" len="med"/>
+                    </a:lnR>
+                    <a:lnT w="12700" cap="flat" cmpd="sng" algn="ctr">
+                      <a:solidFill>
+                        <a:srgbClr val="E4E7F0"/>
+                      </a:solidFill>
+                      <a:prstDash val="solid"/>
+                      <a:round/>
+                      <a:headEnd type="none" w="med" len="med"/>
+                      <a:tailEnd type="none" w="med" len="med"/>
+                    </a:lnT>
+                    <a:lnB w="12700" cap="flat" cmpd="sng" algn="ctr">
+                      <a:solidFill>
+                        <a:srgbClr val="E4E7F0"/>
+                      </a:solidFill>
+                      <a:prstDash val="solid"/>
+                      <a:round/>
+                      <a:headEnd type="none" w="med" len="med"/>
+                      <a:tailEnd type="none" w="med" len="med"/>
+                    </a:lnB>
+                    <a:solidFill>
+                      <a:srgbClr val="EAF0FC"/>
+                    </a:solidFill>
+                  </a:tcPr>
+                </a:tc>
+                <a:tc>
+                  <a:txBody>
+                    <a:bodyPr/>
+                    <a:lstStyle/>
+                    <a:p>
+                      <a:pPr algn="ctr" indent="0" marL="0">
+                        <a:buNone/>
+                      </a:pPr>
+                      <a:r>
+                        <a:rPr lang="en-US" sz="1050" dirty="0">
+                          <a:solidFill>
+                            <a:srgbClr val="33344A"/>
+                          </a:solidFill>
+                          <a:latin typeface="Calibri" pitchFamily="34" charset="0"/>
+                          <a:ea typeface="Calibri" pitchFamily="34" charset="-122"/>
+                          <a:cs typeface="Calibri" pitchFamily="34" charset="-120"/>
+                        </a:rPr>
+                        <a:t>1</a:t>
+                      </a:r>
+                      <a:endParaRPr lang="en-US" sz="1050" dirty="0">
+                        <a:latin typeface="Calibri" charset="0"/>
+                        <a:ea typeface="Calibri" charset="0"/>
+                        <a:cs typeface="Calibri" charset="0"/>
+                      </a:endParaRPr>
+                    </a:p>
+                  </a:txBody>
+                  <a:tcPr marL="45720" marR="45720" marT="18288" marB="18288" anchor="ctr">
+                    <a:lnL w="12700" cap="flat" cmpd="sng" algn="ctr">
+                      <a:solidFill>
+                        <a:srgbClr val="E4E7F0"/>
+                      </a:solidFill>
+                      <a:prstDash val="solid"/>
+                      <a:round/>
+                      <a:headEnd type="none" w="med" len="med"/>
+                      <a:tailEnd type="none" w="med" len="med"/>
+                    </a:lnL>
+                    <a:lnR w="12700" cap="flat" cmpd="sng" algn="ctr">
+                      <a:solidFill>
+                        <a:srgbClr val="E4E7F0"/>
+                      </a:solidFill>
+                      <a:prstDash val="solid"/>
+                      <a:round/>
+                      <a:headEnd type="none" w="med" len="med"/>
+                      <a:tailEnd type="none" w="med" len="med"/>
+                    </a:lnR>
+                    <a:lnT w="12700" cap="flat" cmpd="sng" algn="ctr">
+                      <a:solidFill>
+                        <a:srgbClr val="E4E7F0"/>
+                      </a:solidFill>
+                      <a:prstDash val="solid"/>
+                      <a:round/>
+                      <a:headEnd type="none" w="med" len="med"/>
+                      <a:tailEnd type="none" w="med" len="med"/>
+                    </a:lnT>
+                    <a:lnB w="12700" cap="flat" cmpd="sng" algn="ctr">
+                      <a:solidFill>
+                        <a:srgbClr val="E4E7F0"/>
+                      </a:solidFill>
+                      <a:prstDash val="solid"/>
+                      <a:round/>
+                      <a:headEnd type="none" w="med" len="med"/>
+                      <a:tailEnd type="none" w="med" len="med"/>
+                    </a:lnB>
+                    <a:solidFill>
+                      <a:srgbClr val="EAF0FC"/>
+                    </a:solidFill>
+                  </a:tcPr>
+                </a:tc>
+                <a:tc>
+                  <a:txBody>
+                    <a:bodyPr/>
+                    <a:lstStyle/>
+                    <a:p>
+                      <a:pPr algn="ctr" indent="0" marL="0">
+                        <a:buNone/>
+                      </a:pPr>
+                      <a:r>
+                        <a:rPr lang="en-US" sz="1050" dirty="0">
+                          <a:solidFill>
+                            <a:srgbClr val="33344A"/>
+                          </a:solidFill>
+                          <a:latin typeface="Calibri" pitchFamily="34" charset="0"/>
+                          <a:ea typeface="Calibri" pitchFamily="34" charset="-122"/>
+                          <a:cs typeface="Calibri" pitchFamily="34" charset="-120"/>
+                        </a:rPr>
+                        <a:t>0.60</a:t>
+                      </a:r>
+                      <a:endParaRPr lang="en-US" sz="1050" dirty="0">
+                        <a:latin typeface="Calibri" charset="0"/>
+                        <a:ea typeface="Calibri" charset="0"/>
+                        <a:cs typeface="Calibri" charset="0"/>
+                      </a:endParaRPr>
+                    </a:p>
+                  </a:txBody>
+                  <a:tcPr marL="45720" marR="45720" marT="18288" marB="18288" anchor="ctr">
+                    <a:lnL w="12700" cap="flat" cmpd="sng" algn="ctr">
+                      <a:solidFill>
+                        <a:srgbClr val="E4E7F0"/>
+                      </a:solidFill>
+                      <a:prstDash val="solid"/>
+                      <a:round/>
+                      <a:headEnd type="none" w="med" len="med"/>
+                      <a:tailEnd type="none" w="med" len="med"/>
+                    </a:lnL>
+                    <a:lnR w="12700" cap="flat" cmpd="sng" algn="ctr">
+                      <a:solidFill>
+                        <a:srgbClr val="E4E7F0"/>
+                      </a:solidFill>
+                      <a:prstDash val="solid"/>
+                      <a:round/>
+                      <a:headEnd type="none" w="med" len="med"/>
+                      <a:tailEnd type="none" w="med" len="med"/>
+                    </a:lnR>
+                    <a:lnT w="12700" cap="flat" cmpd="sng" algn="ctr">
+                      <a:solidFill>
+                        <a:srgbClr val="E4E7F0"/>
+                      </a:solidFill>
+                      <a:prstDash val="solid"/>
+                      <a:round/>
+                      <a:headEnd type="none" w="med" len="med"/>
+                      <a:tailEnd type="none" w="med" len="med"/>
+                    </a:lnT>
+                    <a:lnB w="12700" cap="flat" cmpd="sng" algn="ctr">
+                      <a:solidFill>
+                        <a:srgbClr val="E4E7F0"/>
+                      </a:solidFill>
+                      <a:prstDash val="solid"/>
+                      <a:round/>
+                      <a:headEnd type="none" w="med" len="med"/>
+                      <a:tailEnd type="none" w="med" len="med"/>
+                    </a:lnB>
+                    <a:solidFill>
+                      <a:srgbClr val="EAF0FC"/>
+                    </a:solidFill>
+                  </a:tcPr>
+                </a:tc>
+              </a:tr>
+              <a:tr h="201168">
+                <a:tc>
+                  <a:txBody>
+                    <a:bodyPr/>
+                    <a:lstStyle/>
+                    <a:p>
+                      <a:pPr algn="ctr" indent="0" marL="0">
+                        <a:buNone/>
+                      </a:pPr>
+                      <a:r>
+                        <a:rPr lang="en-US" sz="1050" b="1" dirty="0">
+                          <a:solidFill>
+                            <a:srgbClr val="33344A"/>
+                          </a:solidFill>
+                          <a:latin typeface="Calibri" pitchFamily="34" charset="0"/>
+                          <a:ea typeface="Calibri" pitchFamily="34" charset="-122"/>
+                          <a:cs typeface="Calibri" pitchFamily="34" charset="-120"/>
+                        </a:rPr>
+                        <a:t>C</a:t>
+                      </a:r>
+                      <a:endParaRPr lang="en-US" sz="1050" dirty="0">
+                        <a:latin typeface="Calibri" charset="0"/>
+                        <a:ea typeface="Calibri" charset="0"/>
+                        <a:cs typeface="Calibri" charset="0"/>
+                      </a:endParaRPr>
+                    </a:p>
+                  </a:txBody>
+                  <a:tcPr marL="45720" marR="45720" marT="18288" marB="18288" anchor="ctr">
+                    <a:lnL w="12700" cap="flat" cmpd="sng" algn="ctr">
+                      <a:solidFill>
+                        <a:srgbClr val="E4E7F0"/>
+                      </a:solidFill>
+                      <a:prstDash val="solid"/>
+                      <a:round/>
+                      <a:headEnd type="none" w="med" len="med"/>
+                      <a:tailEnd type="none" w="med" len="med"/>
+                    </a:lnL>
+                    <a:lnR w="12700" cap="flat" cmpd="sng" algn="ctr">
+                      <a:solidFill>
+                        <a:srgbClr val="E4E7F0"/>
+                      </a:solidFill>
+                      <a:prstDash val="solid"/>
+                      <a:round/>
+                      <a:headEnd type="none" w="med" len="med"/>
+                      <a:tailEnd type="none" w="med" len="med"/>
+                    </a:lnR>
+                    <a:lnT w="12700" cap="flat" cmpd="sng" algn="ctr">
+                      <a:solidFill>
+                        <a:srgbClr val="E4E7F0"/>
+                      </a:solidFill>
+                      <a:prstDash val="solid"/>
+                      <a:round/>
+                      <a:headEnd type="none" w="med" len="med"/>
+                      <a:tailEnd type="none" w="med" len="med"/>
+                    </a:lnT>
+                    <a:lnB w="12700" cap="flat" cmpd="sng" algn="ctr">
+                      <a:solidFill>
+                        <a:srgbClr val="E4E7F0"/>
+                      </a:solidFill>
+                      <a:prstDash val="solid"/>
+                      <a:round/>
+                      <a:headEnd type="none" w="med" len="med"/>
+                      <a:tailEnd type="none" w="med" len="med"/>
+                    </a:lnB>
+                    <a:solidFill>
+                      <a:srgbClr val="FFFFFF"/>
+                    </a:solidFill>
+                  </a:tcPr>
+                </a:tc>
+                <a:tc>
+                  <a:txBody>
+                    <a:bodyPr/>
+                    <a:lstStyle/>
+                    <a:p>
+                      <a:pPr algn="ctr" indent="0" marL="0">
+                        <a:buNone/>
+                      </a:pPr>
+                      <a:r>
+                        <a:rPr lang="en-US" sz="1050" dirty="0">
+                          <a:solidFill>
+                            <a:srgbClr val="1E2761"/>
+                          </a:solidFill>
+                          <a:latin typeface="Calibri" pitchFamily="34" charset="0"/>
+                          <a:ea typeface="Calibri" pitchFamily="34" charset="-122"/>
+                          <a:cs typeface="Calibri" pitchFamily="34" charset="-120"/>
+                        </a:rPr>
+                        <a:t>0 (old)</a:t>
+                      </a:r>
+                      <a:endParaRPr lang="en-US" sz="1050" dirty="0">
+                        <a:latin typeface="Calibri" charset="0"/>
+                        <a:ea typeface="Calibri" charset="0"/>
+                        <a:cs typeface="Calibri" charset="0"/>
+                      </a:endParaRPr>
+                    </a:p>
+                  </a:txBody>
+                  <a:tcPr marL="45720" marR="45720" marT="18288" marB="18288" anchor="ctr">
+                    <a:lnL w="12700" cap="flat" cmpd="sng" algn="ctr">
+                      <a:solidFill>
+                        <a:srgbClr val="E4E7F0"/>
+                      </a:solidFill>
+                      <a:prstDash val="solid"/>
+                      <a:round/>
+                      <a:headEnd type="none" w="med" len="med"/>
+                      <a:tailEnd type="none" w="med" len="med"/>
+                    </a:lnL>
+                    <a:lnR w="12700" cap="flat" cmpd="sng" algn="ctr">
+                      <a:solidFill>
+                        <a:srgbClr val="E4E7F0"/>
+                      </a:solidFill>
+                      <a:prstDash val="solid"/>
+                      <a:round/>
+                      <a:headEnd type="none" w="med" len="med"/>
+                      <a:tailEnd type="none" w="med" len="med"/>
+                    </a:lnR>
+                    <a:lnT w="12700" cap="flat" cmpd="sng" algn="ctr">
+                      <a:solidFill>
+                        <a:srgbClr val="E4E7F0"/>
+                      </a:solidFill>
+                      <a:prstDash val="solid"/>
+                      <a:round/>
+                      <a:headEnd type="none" w="med" len="med"/>
+                      <a:tailEnd type="none" w="med" len="med"/>
+                    </a:lnT>
+                    <a:lnB w="12700" cap="flat" cmpd="sng" algn="ctr">
+                      <a:solidFill>
+                        <a:srgbClr val="E4E7F0"/>
+                      </a:solidFill>
+                      <a:prstDash val="solid"/>
+                      <a:round/>
+                      <a:headEnd type="none" w="med" len="med"/>
+                      <a:tailEnd type="none" w="med" len="med"/>
+                    </a:lnB>
+                    <a:solidFill>
+                      <a:srgbClr val="FFFFFF"/>
+                    </a:solidFill>
+                  </a:tcPr>
+                </a:tc>
+                <a:tc>
+                  <a:txBody>
+                    <a:bodyPr/>
+                    <a:lstStyle/>
+                    <a:p>
+                      <a:pPr algn="ctr" indent="0" marL="0">
+                        <a:buNone/>
+                      </a:pPr>
+                      <a:r>
+                        <a:rPr lang="en-US" sz="1050" dirty="0">
+                          <a:solidFill>
+                            <a:srgbClr val="33344A"/>
+                          </a:solidFill>
+                          <a:latin typeface="Calibri" pitchFamily="34" charset="0"/>
+                          <a:ea typeface="Calibri" pitchFamily="34" charset="-122"/>
+                          <a:cs typeface="Calibri" pitchFamily="34" charset="-120"/>
+                        </a:rPr>
+                        <a:t>0</a:t>
+                      </a:r>
+                      <a:endParaRPr lang="en-US" sz="1050" dirty="0">
+                        <a:latin typeface="Calibri" charset="0"/>
+                        <a:ea typeface="Calibri" charset="0"/>
+                        <a:cs typeface="Calibri" charset="0"/>
+                      </a:endParaRPr>
+                    </a:p>
+                  </a:txBody>
+                  <a:tcPr marL="45720" marR="45720" marT="18288" marB="18288" anchor="ctr">
+                    <a:lnL w="12700" cap="flat" cmpd="sng" algn="ctr">
+                      <a:solidFill>
+                        <a:srgbClr val="E4E7F0"/>
+                      </a:solidFill>
+                      <a:prstDash val="solid"/>
+                      <a:round/>
+                      <a:headEnd type="none" w="med" len="med"/>
+                      <a:tailEnd type="none" w="med" len="med"/>
+                    </a:lnL>
+                    <a:lnR w="12700" cap="flat" cmpd="sng" algn="ctr">
+                      <a:solidFill>
+                        <a:srgbClr val="E4E7F0"/>
+                      </a:solidFill>
+                      <a:prstDash val="solid"/>
+                      <a:round/>
+                      <a:headEnd type="none" w="med" len="med"/>
+                      <a:tailEnd type="none" w="med" len="med"/>
+                    </a:lnR>
+                    <a:lnT w="12700" cap="flat" cmpd="sng" algn="ctr">
+                      <a:solidFill>
+                        <a:srgbClr val="E4E7F0"/>
+                      </a:solidFill>
+                      <a:prstDash val="solid"/>
+                      <a:round/>
+                      <a:headEnd type="none" w="med" len="med"/>
+                      <a:tailEnd type="none" w="med" len="med"/>
+                    </a:lnT>
+                    <a:lnB w="12700" cap="flat" cmpd="sng" algn="ctr">
+                      <a:solidFill>
+                        <a:srgbClr val="E4E7F0"/>
+                      </a:solidFill>
+                      <a:prstDash val="solid"/>
+                      <a:round/>
+                      <a:headEnd type="none" w="med" len="med"/>
+                      <a:tailEnd type="none" w="med" len="med"/>
+                    </a:lnB>
+                    <a:solidFill>
+                      <a:srgbClr val="FFFFFF"/>
+                    </a:solidFill>
+                  </a:tcPr>
+                </a:tc>
+                <a:tc>
+                  <a:txBody>
+                    <a:bodyPr/>
+                    <a:lstStyle/>
+                    <a:p>
+                      <a:pPr algn="ctr" indent="0" marL="0">
+                        <a:buNone/>
+                      </a:pPr>
+                      <a:r>
+                        <a:rPr lang="en-US" sz="1050" dirty="0">
+                          <a:solidFill>
+                            <a:srgbClr val="33344A"/>
+                          </a:solidFill>
+                          <a:latin typeface="Calibri" pitchFamily="34" charset="0"/>
+                          <a:ea typeface="Calibri" pitchFamily="34" charset="-122"/>
+                          <a:cs typeface="Calibri" pitchFamily="34" charset="-120"/>
+                        </a:rPr>
+                        <a:t>0.10</a:t>
+                      </a:r>
+                      <a:endParaRPr lang="en-US" sz="1050" dirty="0">
+                        <a:latin typeface="Calibri" charset="0"/>
+                        <a:ea typeface="Calibri" charset="0"/>
+                        <a:cs typeface="Calibri" charset="0"/>
+                      </a:endParaRPr>
+                    </a:p>
+                  </a:txBody>
+                  <a:tcPr marL="45720" marR="45720" marT="18288" marB="18288" anchor="ctr">
+                    <a:lnL w="12700" cap="flat" cmpd="sng" algn="ctr">
+                      <a:solidFill>
+                        <a:srgbClr val="E4E7F0"/>
+                      </a:solidFill>
+                      <a:prstDash val="solid"/>
+                      <a:round/>
+                      <a:headEnd type="none" w="med" len="med"/>
+                      <a:tailEnd type="none" w="med" len="med"/>
+                    </a:lnL>
+                    <a:lnR w="12700" cap="flat" cmpd="sng" algn="ctr">
+                      <a:solidFill>
+                        <a:srgbClr val="E4E7F0"/>
+                      </a:solidFill>
+                      <a:prstDash val="solid"/>
+                      <a:round/>
+                      <a:headEnd type="none" w="med" len="med"/>
+                      <a:tailEnd type="none" w="med" len="med"/>
+                    </a:lnR>
+                    <a:lnT w="12700" cap="flat" cmpd="sng" algn="ctr">
+                      <a:solidFill>
+                        <a:srgbClr val="E4E7F0"/>
+                      </a:solidFill>
+                      <a:prstDash val="solid"/>
+                      <a:round/>
+                      <a:headEnd type="none" w="med" len="med"/>
+                      <a:tailEnd type="none" w="med" len="med"/>
+                    </a:lnT>
+                    <a:lnB w="12700" cap="flat" cmpd="sng" algn="ctr">
+                      <a:solidFill>
+                        <a:srgbClr val="E4E7F0"/>
+                      </a:solidFill>
+                      <a:prstDash val="solid"/>
+                      <a:round/>
+                      <a:headEnd type="none" w="med" len="med"/>
+                      <a:tailEnd type="none" w="med" len="med"/>
+                    </a:lnB>
+                    <a:solidFill>
+                      <a:srgbClr val="FFFFFF"/>
+                    </a:solidFill>
+                  </a:tcPr>
+                </a:tc>
+              </a:tr>
+              <a:tr h="201168">
+                <a:tc>
+                  <a:txBody>
+                    <a:bodyPr/>
+                    <a:lstStyle/>
+                    <a:p>
+                      <a:pPr algn="ctr" indent="0" marL="0">
+                        <a:buNone/>
+                      </a:pPr>
+                      <a:r>
+                        <a:rPr lang="en-US" sz="1050" b="1" dirty="0">
+                          <a:solidFill>
+                            <a:srgbClr val="33344A"/>
+                          </a:solidFill>
+                          <a:latin typeface="Calibri" pitchFamily="34" charset="0"/>
+                          <a:ea typeface="Calibri" pitchFamily="34" charset="-122"/>
+                          <a:cs typeface="Calibri" pitchFamily="34" charset="-120"/>
+                        </a:rPr>
+                        <a:t>D</a:t>
+                      </a:r>
+                      <a:endParaRPr lang="en-US" sz="1050" dirty="0">
+                        <a:latin typeface="Calibri" charset="0"/>
+                        <a:ea typeface="Calibri" charset="0"/>
+                        <a:cs typeface="Calibri" charset="0"/>
+                      </a:endParaRPr>
+                    </a:p>
+                  </a:txBody>
+                  <a:tcPr marL="45720" marR="45720" marT="18288" marB="18288" anchor="ctr">
+                    <a:lnL w="12700" cap="flat" cmpd="sng" algn="ctr">
+                      <a:solidFill>
+                        <a:srgbClr val="E4E7F0"/>
+                      </a:solidFill>
+                      <a:prstDash val="solid"/>
+                      <a:round/>
+                      <a:headEnd type="none" w="med" len="med"/>
+                      <a:tailEnd type="none" w="med" len="med"/>
+                    </a:lnL>
+                    <a:lnR w="12700" cap="flat" cmpd="sng" algn="ctr">
+                      <a:solidFill>
+                        <a:srgbClr val="E4E7F0"/>
+                      </a:solidFill>
+                      <a:prstDash val="solid"/>
+                      <a:round/>
+                      <a:headEnd type="none" w="med" len="med"/>
+                      <a:tailEnd type="none" w="med" len="med"/>
+                    </a:lnR>
+                    <a:lnT w="12700" cap="flat" cmpd="sng" algn="ctr">
+                      <a:solidFill>
+                        <a:srgbClr val="E4E7F0"/>
+                      </a:solidFill>
+                      <a:prstDash val="solid"/>
+                      <a:round/>
+                      <a:headEnd type="none" w="med" len="med"/>
+                      <a:tailEnd type="none" w="med" len="med"/>
+                    </a:lnT>
+                    <a:lnB w="12700" cap="flat" cmpd="sng" algn="ctr">
+                      <a:solidFill>
+                        <a:srgbClr val="E4E7F0"/>
+                      </a:solidFill>
+                      <a:prstDash val="solid"/>
+                      <a:round/>
+                      <a:headEnd type="none" w="med" len="med"/>
+                      <a:tailEnd type="none" w="med" len="med"/>
+                    </a:lnB>
+                    <a:solidFill>
+                      <a:srgbClr val="EAF0FC"/>
+                    </a:solidFill>
+                  </a:tcPr>
+                </a:tc>
+                <a:tc>
+                  <a:txBody>
+                    <a:bodyPr/>
+                    <a:lstStyle/>
+                    <a:p>
+                      <a:pPr algn="ctr" indent="0" marL="0">
+                        <a:buNone/>
+                      </a:pPr>
+                      <a:r>
+                        <a:rPr lang="en-US" sz="1050" dirty="0">
+                          <a:solidFill>
+                            <a:srgbClr val="B8892B"/>
+                          </a:solidFill>
+                          <a:latin typeface="Calibri" pitchFamily="34" charset="0"/>
+                          <a:ea typeface="Calibri" pitchFamily="34" charset="-122"/>
+                          <a:cs typeface="Calibri" pitchFamily="34" charset="-120"/>
+                        </a:rPr>
+                        <a:t>1 (new)</a:t>
+                      </a:r>
+                      <a:endParaRPr lang="en-US" sz="1050" dirty="0">
+                        <a:latin typeface="Calibri" charset="0"/>
+                        <a:ea typeface="Calibri" charset="0"/>
+                        <a:cs typeface="Calibri" charset="0"/>
+                      </a:endParaRPr>
+                    </a:p>
+                  </a:txBody>
+                  <a:tcPr marL="45720" marR="45720" marT="18288" marB="18288" anchor="ctr">
+                    <a:lnL w="12700" cap="flat" cmpd="sng" algn="ctr">
+                      <a:solidFill>
+                        <a:srgbClr val="E4E7F0"/>
+                      </a:solidFill>
+                      <a:prstDash val="solid"/>
+                      <a:round/>
+                      <a:headEnd type="none" w="med" len="med"/>
+                      <a:tailEnd type="none" w="med" len="med"/>
+                    </a:lnL>
+                    <a:lnR w="12700" cap="flat" cmpd="sng" algn="ctr">
+                      <a:solidFill>
+                        <a:srgbClr val="E4E7F0"/>
+                      </a:solidFill>
+                      <a:prstDash val="solid"/>
+                      <a:round/>
+                      <a:headEnd type="none" w="med" len="med"/>
+                      <a:tailEnd type="none" w="med" len="med"/>
+                    </a:lnR>
+                    <a:lnT w="12700" cap="flat" cmpd="sng" algn="ctr">
+                      <a:solidFill>
+                        <a:srgbClr val="E4E7F0"/>
+                      </a:solidFill>
+                      <a:prstDash val="solid"/>
+                      <a:round/>
+                      <a:headEnd type="none" w="med" len="med"/>
+                      <a:tailEnd type="none" w="med" len="med"/>
+                    </a:lnT>
+                    <a:lnB w="12700" cap="flat" cmpd="sng" algn="ctr">
+                      <a:solidFill>
+                        <a:srgbClr val="E4E7F0"/>
+                      </a:solidFill>
+                      <a:prstDash val="solid"/>
+                      <a:round/>
+                      <a:headEnd type="none" w="med" len="med"/>
+                      <a:tailEnd type="none" w="med" len="med"/>
+                    </a:lnB>
+                    <a:solidFill>
+                      <a:srgbClr val="EAF0FC"/>
+                    </a:solidFill>
+                  </a:tcPr>
+                </a:tc>
+                <a:tc>
+                  <a:txBody>
+                    <a:bodyPr/>
+                    <a:lstStyle/>
+                    <a:p>
+                      <a:pPr algn="ctr" indent="0" marL="0">
+                        <a:buNone/>
+                      </a:pPr>
+                      <a:r>
+                        <a:rPr lang="en-US" sz="1050" dirty="0">
+                          <a:solidFill>
+                            <a:srgbClr val="33344A"/>
+                          </a:solidFill>
+                          <a:latin typeface="Calibri" pitchFamily="34" charset="0"/>
+                          <a:ea typeface="Calibri" pitchFamily="34" charset="-122"/>
+                          <a:cs typeface="Calibri" pitchFamily="34" charset="-120"/>
+                        </a:rPr>
+                        <a:t>1</a:t>
+                      </a:r>
+                      <a:endParaRPr lang="en-US" sz="1050" dirty="0">
+                        <a:latin typeface="Calibri" charset="0"/>
+                        <a:ea typeface="Calibri" charset="0"/>
+                        <a:cs typeface="Calibri" charset="0"/>
+                      </a:endParaRPr>
+                    </a:p>
+                  </a:txBody>
+                  <a:tcPr marL="45720" marR="45720" marT="18288" marB="18288" anchor="ctr">
+                    <a:lnL w="12700" cap="flat" cmpd="sng" algn="ctr">
+                      <a:solidFill>
+                        <a:srgbClr val="E4E7F0"/>
+                      </a:solidFill>
+                      <a:prstDash val="solid"/>
+                      <a:round/>
+                      <a:headEnd type="none" w="med" len="med"/>
+                      <a:tailEnd type="none" w="med" len="med"/>
+                    </a:lnL>
+                    <a:lnR w="12700" cap="flat" cmpd="sng" algn="ctr">
+                      <a:solidFill>
+                        <a:srgbClr val="E4E7F0"/>
+                      </a:solidFill>
+                      <a:prstDash val="solid"/>
+                      <a:round/>
+                      <a:headEnd type="none" w="med" len="med"/>
+                      <a:tailEnd type="none" w="med" len="med"/>
+                    </a:lnR>
+                    <a:lnT w="12700" cap="flat" cmpd="sng" algn="ctr">
+                      <a:solidFill>
+                        <a:srgbClr val="E4E7F0"/>
+                      </a:solidFill>
+                      <a:prstDash val="solid"/>
+                      <a:round/>
+                      <a:headEnd type="none" w="med" len="med"/>
+                      <a:tailEnd type="none" w="med" len="med"/>
+                    </a:lnT>
+                    <a:lnB w="12700" cap="flat" cmpd="sng" algn="ctr">
+                      <a:solidFill>
+                        <a:srgbClr val="E4E7F0"/>
+                      </a:solidFill>
+                      <a:prstDash val="solid"/>
+                      <a:round/>
+                      <a:headEnd type="none" w="med" len="med"/>
+                      <a:tailEnd type="none" w="med" len="med"/>
+                    </a:lnB>
+                    <a:solidFill>
+                      <a:srgbClr val="EAF0FC"/>
+                    </a:solidFill>
+                  </a:tcPr>
+                </a:tc>
+                <a:tc>
+                  <a:txBody>
+                    <a:bodyPr/>
+                    <a:lstStyle/>
+                    <a:p>
+                      <a:pPr algn="ctr" indent="0" marL="0">
+                        <a:buNone/>
+                      </a:pPr>
+                      <a:r>
+                        <a:rPr lang="en-US" sz="1050" dirty="0">
+                          <a:solidFill>
+                            <a:srgbClr val="33344A"/>
+                          </a:solidFill>
+                          <a:latin typeface="Calibri" pitchFamily="34" charset="0"/>
+                          <a:ea typeface="Calibri" pitchFamily="34" charset="-122"/>
+                          <a:cs typeface="Calibri" pitchFamily="34" charset="-120"/>
+                        </a:rPr>
+                        <a:t>0.35</a:t>
+                      </a:r>
+                      <a:endParaRPr lang="en-US" sz="1050" dirty="0">
+                        <a:latin typeface="Calibri" charset="0"/>
+                        <a:ea typeface="Calibri" charset="0"/>
+                        <a:cs typeface="Calibri" charset="0"/>
+                      </a:endParaRPr>
+                    </a:p>
+                  </a:txBody>
+                  <a:tcPr marL="45720" marR="45720" marT="18288" marB="18288" anchor="ctr">
+                    <a:lnL w="12700" cap="flat" cmpd="sng" algn="ctr">
+                      <a:solidFill>
+                        <a:srgbClr val="E4E7F0"/>
+                      </a:solidFill>
+                      <a:prstDash val="solid"/>
+                      <a:round/>
+                      <a:headEnd type="none" w="med" len="med"/>
+                      <a:tailEnd type="none" w="med" len="med"/>
+                    </a:lnL>
+                    <a:lnR w="12700" cap="flat" cmpd="sng" algn="ctr">
+                      <a:solidFill>
+                        <a:srgbClr val="E4E7F0"/>
+                      </a:solidFill>
+                      <a:prstDash val="solid"/>
+                      <a:round/>
+                      <a:headEnd type="none" w="med" len="med"/>
+                      <a:tailEnd type="none" w="med" len="med"/>
+                    </a:lnR>
+                    <a:lnT w="12700" cap="flat" cmpd="sng" algn="ctr">
+                      <a:solidFill>
+                        <a:srgbClr val="E4E7F0"/>
+                      </a:solidFill>
+                      <a:prstDash val="solid"/>
+                      <a:round/>
+                      <a:headEnd type="none" w="med" len="med"/>
+                      <a:tailEnd type="none" w="med" len="med"/>
+                    </a:lnT>
+                    <a:lnB w="12700" cap="flat" cmpd="sng" algn="ctr">
+                      <a:solidFill>
+                        <a:srgbClr val="E4E7F0"/>
+                      </a:solidFill>
+                      <a:prstDash val="solid"/>
+                      <a:round/>
+                      <a:headEnd type="none" w="med" len="med"/>
+                      <a:tailEnd type="none" w="med" len="med"/>
+                    </a:lnB>
+                    <a:solidFill>
+                      <a:srgbClr val="EAF0FC"/>
+                    </a:solidFill>
+                  </a:tcPr>
+                </a:tc>
+              </a:tr>
+              <a:tr h="201168">
+                <a:tc>
+                  <a:txBody>
+                    <a:bodyPr/>
+                    <a:lstStyle/>
+                    <a:p>
+                      <a:pPr algn="ctr" indent="0" marL="0">
+                        <a:buNone/>
+                      </a:pPr>
+                      <a:r>
+                        <a:rPr lang="en-US" sz="1050" b="1" dirty="0">
+                          <a:solidFill>
+                            <a:srgbClr val="33344A"/>
+                          </a:solidFill>
+                          <a:latin typeface="Calibri" pitchFamily="34" charset="0"/>
+                          <a:ea typeface="Calibri" pitchFamily="34" charset="-122"/>
+                          <a:cs typeface="Calibri" pitchFamily="34" charset="-120"/>
+                        </a:rPr>
+                        <a:t>E</a:t>
+                      </a:r>
+                      <a:endParaRPr lang="en-US" sz="1050" dirty="0">
+                        <a:latin typeface="Calibri" charset="0"/>
+                        <a:ea typeface="Calibri" charset="0"/>
+                        <a:cs typeface="Calibri" charset="0"/>
+                      </a:endParaRPr>
+                    </a:p>
+                  </a:txBody>
+                  <a:tcPr marL="45720" marR="45720" marT="18288" marB="18288" anchor="ctr">
+                    <a:lnL w="12700" cap="flat" cmpd="sng" algn="ctr">
+                      <a:solidFill>
+                        <a:srgbClr val="E4E7F0"/>
+                      </a:solidFill>
+                      <a:prstDash val="solid"/>
+                      <a:round/>
+                      <a:headEnd type="none" w="med" len="med"/>
+                      <a:tailEnd type="none" w="med" len="med"/>
+                    </a:lnL>
+                    <a:lnR w="12700" cap="flat" cmpd="sng" algn="ctr">
+                      <a:solidFill>
+                        <a:srgbClr val="E4E7F0"/>
+                      </a:solidFill>
+                      <a:prstDash val="solid"/>
+                      <a:round/>
+                      <a:headEnd type="none" w="med" len="med"/>
+                      <a:tailEnd type="none" w="med" len="med"/>
+                    </a:lnR>
+                    <a:lnT w="12700" cap="flat" cmpd="sng" algn="ctr">
+                      <a:solidFill>
+                        <a:srgbClr val="E4E7F0"/>
+                      </a:solidFill>
+                      <a:prstDash val="solid"/>
+                      <a:round/>
+                      <a:headEnd type="none" w="med" len="med"/>
+                      <a:tailEnd type="none" w="med" len="med"/>
+                    </a:lnT>
+                    <a:lnB w="12700" cap="flat" cmpd="sng" algn="ctr">
+                      <a:solidFill>
+                        <a:srgbClr val="E4E7F0"/>
+                      </a:solidFill>
+                      <a:prstDash val="solid"/>
+                      <a:round/>
+                      <a:headEnd type="none" w="med" len="med"/>
+                      <a:tailEnd type="none" w="med" len="med"/>
+                    </a:lnB>
+                    <a:solidFill>
+                      <a:srgbClr val="FFFFFF"/>
+                    </a:solidFill>
+                  </a:tcPr>
+                </a:tc>
+                <a:tc>
+                  <a:txBody>
+                    <a:bodyPr/>
+                    <a:lstStyle/>
+                    <a:p>
+                      <a:pPr algn="ctr" indent="0" marL="0">
+                        <a:buNone/>
+                      </a:pPr>
+                      <a:r>
+                        <a:rPr lang="en-US" sz="1050" dirty="0">
+                          <a:solidFill>
+                            <a:srgbClr val="B8892B"/>
+                          </a:solidFill>
+                          <a:latin typeface="Calibri" pitchFamily="34" charset="0"/>
+                          <a:ea typeface="Calibri" pitchFamily="34" charset="-122"/>
+                          <a:cs typeface="Calibri" pitchFamily="34" charset="-120"/>
+                        </a:rPr>
+                        <a:t>1 (new)</a:t>
+                      </a:r>
+                      <a:endParaRPr lang="en-US" sz="1050" dirty="0">
+                        <a:latin typeface="Calibri" charset="0"/>
+                        <a:ea typeface="Calibri" charset="0"/>
+                        <a:cs typeface="Calibri" charset="0"/>
+                      </a:endParaRPr>
+                    </a:p>
+                  </a:txBody>
+                  <a:tcPr marL="45720" marR="45720" marT="18288" marB="18288" anchor="ctr">
+                    <a:lnL w="12700" cap="flat" cmpd="sng" algn="ctr">
+                      <a:solidFill>
+                        <a:srgbClr val="E4E7F0"/>
+                      </a:solidFill>
+                      <a:prstDash val="solid"/>
+                      <a:round/>
+                      <a:headEnd type="none" w="med" len="med"/>
+                      <a:tailEnd type="none" w="med" len="med"/>
+                    </a:lnL>
+                    <a:lnR w="12700" cap="flat" cmpd="sng" algn="ctr">
+                      <a:solidFill>
+                        <a:srgbClr val="E4E7F0"/>
+                      </a:solidFill>
+                      <a:prstDash val="solid"/>
+                      <a:round/>
+                      <a:headEnd type="none" w="med" len="med"/>
+                      <a:tailEnd type="none" w="med" len="med"/>
+                    </a:lnR>
+                    <a:lnT w="12700" cap="flat" cmpd="sng" algn="ctr">
+                      <a:solidFill>
+                        <a:srgbClr val="E4E7F0"/>
+                      </a:solidFill>
+                      <a:prstDash val="solid"/>
+                      <a:round/>
+                      <a:headEnd type="none" w="med" len="med"/>
+                      <a:tailEnd type="none" w="med" len="med"/>
+                    </a:lnT>
+                    <a:lnB w="12700" cap="flat" cmpd="sng" algn="ctr">
+                      <a:solidFill>
+                        <a:srgbClr val="E4E7F0"/>
+                      </a:solidFill>
+                      <a:prstDash val="solid"/>
+                      <a:round/>
+                      <a:headEnd type="none" w="med" len="med"/>
+                      <a:tailEnd type="none" w="med" len="med"/>
+                    </a:lnB>
+                    <a:solidFill>
+                      <a:srgbClr val="FFFFFF"/>
+                    </a:solidFill>
+                  </a:tcPr>
+                </a:tc>
+                <a:tc>
+                  <a:txBody>
+                    <a:bodyPr/>
+                    <a:lstStyle/>
+                    <a:p>
+                      <a:pPr algn="ctr" indent="0" marL="0">
+                        <a:buNone/>
+                      </a:pPr>
+                      <a:r>
+                        <a:rPr lang="en-US" sz="1050" dirty="0">
+                          <a:solidFill>
+                            <a:srgbClr val="33344A"/>
+                          </a:solidFill>
+                          <a:latin typeface="Calibri" pitchFamily="34" charset="0"/>
+                          <a:ea typeface="Calibri" pitchFamily="34" charset="-122"/>
+                          <a:cs typeface="Calibri" pitchFamily="34" charset="-120"/>
+                        </a:rPr>
+                        <a:t>0</a:t>
+                      </a:r>
+                      <a:endParaRPr lang="en-US" sz="1050" dirty="0">
+                        <a:latin typeface="Calibri" charset="0"/>
+                        <a:ea typeface="Calibri" charset="0"/>
+                        <a:cs typeface="Calibri" charset="0"/>
+                      </a:endParaRPr>
+                    </a:p>
+                  </a:txBody>
+                  <a:tcPr marL="45720" marR="45720" marT="18288" marB="18288" anchor="ctr">
+                    <a:lnL w="12700" cap="flat" cmpd="sng" algn="ctr">
+                      <a:solidFill>
+                        <a:srgbClr val="E4E7F0"/>
+                      </a:solidFill>
+                      <a:prstDash val="solid"/>
+                      <a:round/>
+                      <a:headEnd type="none" w="med" len="med"/>
+                      <a:tailEnd type="none" w="med" len="med"/>
+                    </a:lnL>
+                    <a:lnR w="12700" cap="flat" cmpd="sng" algn="ctr">
+                      <a:solidFill>
+                        <a:srgbClr val="E4E7F0"/>
+                      </a:solidFill>
+                      <a:prstDash val="solid"/>
+                      <a:round/>
+                      <a:headEnd type="none" w="med" len="med"/>
+                      <a:tailEnd type="none" w="med" len="med"/>
+                    </a:lnR>
+                    <a:lnT w="12700" cap="flat" cmpd="sng" algn="ctr">
+                      <a:solidFill>
+                        <a:srgbClr val="E4E7F0"/>
+                      </a:solidFill>
+                      <a:prstDash val="solid"/>
+                      <a:round/>
+                      <a:headEnd type="none" w="med" len="med"/>
+                      <a:tailEnd type="none" w="med" len="med"/>
+                    </a:lnT>
+                    <a:lnB w="12700" cap="flat" cmpd="sng" algn="ctr">
+                      <a:solidFill>
+                        <a:srgbClr val="E4E7F0"/>
+                      </a:solidFill>
+                      <a:prstDash val="solid"/>
+                      <a:round/>
+                      <a:headEnd type="none" w="med" len="med"/>
+                      <a:tailEnd type="none" w="med" len="med"/>
+                    </a:lnB>
+                    <a:solidFill>
+                      <a:srgbClr val="FFFFFF"/>
+                    </a:solidFill>
+                  </a:tcPr>
+                </a:tc>
+                <a:tc>
+                  <a:txBody>
+                    <a:bodyPr/>
+                    <a:lstStyle/>
+                    <a:p>
+                      <a:pPr algn="ctr" indent="0" marL="0">
+                        <a:buNone/>
+                      </a:pPr>
+                      <a:r>
+                        <a:rPr lang="en-US" sz="1050" dirty="0">
+                          <a:solidFill>
+                            <a:srgbClr val="33344A"/>
+                          </a:solidFill>
+                          <a:latin typeface="Calibri" pitchFamily="34" charset="0"/>
+                          <a:ea typeface="Calibri" pitchFamily="34" charset="-122"/>
+                          <a:cs typeface="Calibri" pitchFamily="34" charset="-120"/>
+                        </a:rPr>
+                        <a:t>0.25</a:t>
+                      </a:r>
+                      <a:endParaRPr lang="en-US" sz="1050" dirty="0">
+                        <a:latin typeface="Calibri" charset="0"/>
+                        <a:ea typeface="Calibri" charset="0"/>
+                        <a:cs typeface="Calibri" charset="0"/>
+                      </a:endParaRPr>
+                    </a:p>
+                  </a:txBody>
+                  <a:tcPr marL="45720" marR="45720" marT="18288" marB="18288" anchor="ctr">
+                    <a:lnL w="12700" cap="flat" cmpd="sng" algn="ctr">
+                      <a:solidFill>
+                        <a:srgbClr val="E4E7F0"/>
+                      </a:solidFill>
+                      <a:prstDash val="solid"/>
+                      <a:round/>
+                      <a:headEnd type="none" w="med" len="med"/>
+                      <a:tailEnd type="none" w="med" len="med"/>
+                    </a:lnL>
+                    <a:lnR w="12700" cap="flat" cmpd="sng" algn="ctr">
+                      <a:solidFill>
+                        <a:srgbClr val="E4E7F0"/>
+                      </a:solidFill>
+                      <a:prstDash val="solid"/>
+                      <a:round/>
+                      <a:headEnd type="none" w="med" len="med"/>
+                      <a:tailEnd type="none" w="med" len="med"/>
+                    </a:lnR>
+                    <a:lnT w="12700" cap="flat" cmpd="sng" algn="ctr">
+                      <a:solidFill>
+                        <a:srgbClr val="E4E7F0"/>
+                      </a:solidFill>
+                      <a:prstDash val="solid"/>
+                      <a:round/>
+                      <a:headEnd type="none" w="med" len="med"/>
+                      <a:tailEnd type="none" w="med" len="med"/>
+                    </a:lnT>
+                    <a:lnB w="12700" cap="flat" cmpd="sng" algn="ctr">
+                      <a:solidFill>
+                        <a:srgbClr val="E4E7F0"/>
+                      </a:solidFill>
+                      <a:prstDash val="solid"/>
+                      <a:round/>
+                      <a:headEnd type="none" w="med" len="med"/>
+                      <a:tailEnd type="none" w="med" len="med"/>
+                    </a:lnB>
+                    <a:solidFill>
+                      <a:srgbClr val="FFFFFF"/>
+                    </a:solidFill>
+                  </a:tcPr>
+                </a:tc>
+              </a:tr>
+              <a:tr h="201168">
+                <a:tc>
+                  <a:txBody>
+                    <a:bodyPr/>
+                    <a:lstStyle/>
+                    <a:p>
+                      <a:pPr algn="ctr" indent="0" marL="0">
+                        <a:buNone/>
+                      </a:pPr>
+                      <a:r>
+                        <a:rPr lang="en-US" sz="1050" b="1" dirty="0">
+                          <a:solidFill>
+                            <a:srgbClr val="33344A"/>
+                          </a:solidFill>
+                          <a:latin typeface="Calibri" pitchFamily="34" charset="0"/>
+                          <a:ea typeface="Calibri" pitchFamily="34" charset="-122"/>
+                          <a:cs typeface="Calibri" pitchFamily="34" charset="-120"/>
+                        </a:rPr>
+                        <a:t>F</a:t>
+                      </a:r>
+                      <a:endParaRPr lang="en-US" sz="1050" dirty="0">
+                        <a:latin typeface="Calibri" charset="0"/>
+                        <a:ea typeface="Calibri" charset="0"/>
+                        <a:cs typeface="Calibri" charset="0"/>
+                      </a:endParaRPr>
+                    </a:p>
+                  </a:txBody>
+                  <a:tcPr marL="45720" marR="45720" marT="18288" marB="18288" anchor="ctr">
+                    <a:lnL w="12700" cap="flat" cmpd="sng" algn="ctr">
+                      <a:solidFill>
+                        <a:srgbClr val="E4E7F0"/>
+                      </a:solidFill>
+                      <a:prstDash val="solid"/>
+                      <a:round/>
+                      <a:headEnd type="none" w="med" len="med"/>
+                      <a:tailEnd type="none" w="med" len="med"/>
+                    </a:lnL>
+                    <a:lnR w="12700" cap="flat" cmpd="sng" algn="ctr">
+                      <a:solidFill>
+                        <a:srgbClr val="E4E7F0"/>
+                      </a:solidFill>
+                      <a:prstDash val="solid"/>
+                      <a:round/>
+                      <a:headEnd type="none" w="med" len="med"/>
+                      <a:tailEnd type="none" w="med" len="med"/>
+                    </a:lnR>
+                    <a:lnT w="12700" cap="flat" cmpd="sng" algn="ctr">
+                      <a:solidFill>
+                        <a:srgbClr val="E4E7F0"/>
+                      </a:solidFill>
+                      <a:prstDash val="solid"/>
+                      <a:round/>
+                      <a:headEnd type="none" w="med" len="med"/>
+                      <a:tailEnd type="none" w="med" len="med"/>
+                    </a:lnT>
+                    <a:lnB w="12700" cap="flat" cmpd="sng" algn="ctr">
+                      <a:solidFill>
+                        <a:srgbClr val="E4E7F0"/>
+                      </a:solidFill>
+                      <a:prstDash val="solid"/>
+                      <a:round/>
+                      <a:headEnd type="none" w="med" len="med"/>
+                      <a:tailEnd type="none" w="med" len="med"/>
+                    </a:lnB>
+                    <a:solidFill>
+                      <a:srgbClr val="EAF0FC"/>
+                    </a:solidFill>
+                  </a:tcPr>
+                </a:tc>
+                <a:tc>
+                  <a:txBody>
+                    <a:bodyPr/>
+                    <a:lstStyle/>
+                    <a:p>
+                      <a:pPr algn="ctr" indent="0" marL="0">
+                        <a:buNone/>
+                      </a:pPr>
+                      <a:r>
+                        <a:rPr lang="en-US" sz="1050" dirty="0">
+                          <a:solidFill>
+                            <a:srgbClr val="B8892B"/>
+                          </a:solidFill>
+                          <a:latin typeface="Calibri" pitchFamily="34" charset="0"/>
+                          <a:ea typeface="Calibri" pitchFamily="34" charset="-122"/>
+                          <a:cs typeface="Calibri" pitchFamily="34" charset="-120"/>
+                        </a:rPr>
+                        <a:t>1 (new)</a:t>
+                      </a:r>
+                      <a:endParaRPr lang="en-US" sz="1050" dirty="0">
+                        <a:latin typeface="Calibri" charset="0"/>
+                        <a:ea typeface="Calibri" charset="0"/>
+                        <a:cs typeface="Calibri" charset="0"/>
+                      </a:endParaRPr>
+                    </a:p>
+                  </a:txBody>
+                  <a:tcPr marL="45720" marR="45720" marT="18288" marB="18288" anchor="ctr">
+                    <a:lnL w="12700" cap="flat" cmpd="sng" algn="ctr">
+                      <a:solidFill>
+                        <a:srgbClr val="E4E7F0"/>
+                      </a:solidFill>
+                      <a:prstDash val="solid"/>
+                      <a:round/>
+                      <a:headEnd type="none" w="med" len="med"/>
+                      <a:tailEnd type="none" w="med" len="med"/>
+                    </a:lnL>
+                    <a:lnR w="12700" cap="flat" cmpd="sng" algn="ctr">
+                      <a:solidFill>
+                        <a:srgbClr val="E4E7F0"/>
+                      </a:solidFill>
+                      <a:prstDash val="solid"/>
+                      <a:round/>
+                      <a:headEnd type="none" w="med" len="med"/>
+                      <a:tailEnd type="none" w="med" len="med"/>
+                    </a:lnR>
+                    <a:lnT w="12700" cap="flat" cmpd="sng" algn="ctr">
+                      <a:solidFill>
+                        <a:srgbClr val="E4E7F0"/>
+                      </a:solidFill>
+                      <a:prstDash val="solid"/>
+                      <a:round/>
+                      <a:headEnd type="none" w="med" len="med"/>
+                      <a:tailEnd type="none" w="med" len="med"/>
+                    </a:lnT>
+                    <a:lnB w="12700" cap="flat" cmpd="sng" algn="ctr">
+                      <a:solidFill>
+                        <a:srgbClr val="E4E7F0"/>
+                      </a:solidFill>
+                      <a:prstDash val="solid"/>
+                      <a:round/>
+                      <a:headEnd type="none" w="med" len="med"/>
+                      <a:tailEnd type="none" w="med" len="med"/>
+                    </a:lnB>
+                    <a:solidFill>
+                      <a:srgbClr val="EAF0FC"/>
+                    </a:solidFill>
+                  </a:tcPr>
+                </a:tc>
+                <a:tc>
+                  <a:txBody>
+                    <a:bodyPr/>
+                    <a:lstStyle/>
+                    <a:p>
+                      <a:pPr algn="ctr" indent="0" marL="0">
+                        <a:buNone/>
+                      </a:pPr>
+                      <a:r>
+                        <a:rPr lang="en-US" sz="1050" dirty="0">
+                          <a:solidFill>
+                            <a:srgbClr val="33344A"/>
+                          </a:solidFill>
+                          <a:latin typeface="Calibri" pitchFamily="34" charset="0"/>
+                          <a:ea typeface="Calibri" pitchFamily="34" charset="-122"/>
+                          <a:cs typeface="Calibri" pitchFamily="34" charset="-120"/>
+                        </a:rPr>
+                        <a:t>1</a:t>
+                      </a:r>
+                      <a:endParaRPr lang="en-US" sz="1050" dirty="0">
+                        <a:latin typeface="Calibri" charset="0"/>
+                        <a:ea typeface="Calibri" charset="0"/>
+                        <a:cs typeface="Calibri" charset="0"/>
+                      </a:endParaRPr>
+                    </a:p>
+                  </a:txBody>
+                  <a:tcPr marL="45720" marR="45720" marT="18288" marB="18288" anchor="ctr">
+                    <a:lnL w="12700" cap="flat" cmpd="sng" algn="ctr">
+                      <a:solidFill>
+                        <a:srgbClr val="E4E7F0"/>
+                      </a:solidFill>
+                      <a:prstDash val="solid"/>
+                      <a:round/>
+                      <a:headEnd type="none" w="med" len="med"/>
+                      <a:tailEnd type="none" w="med" len="med"/>
+                    </a:lnL>
+                    <a:lnR w="12700" cap="flat" cmpd="sng" algn="ctr">
+                      <a:solidFill>
+                        <a:srgbClr val="E4E7F0"/>
+                      </a:solidFill>
+                      <a:prstDash val="solid"/>
+                      <a:round/>
+                      <a:headEnd type="none" w="med" len="med"/>
+                      <a:tailEnd type="none" w="med" len="med"/>
+                    </a:lnR>
+                    <a:lnT w="12700" cap="flat" cmpd="sng" algn="ctr">
+                      <a:solidFill>
+                        <a:srgbClr val="E4E7F0"/>
+                      </a:solidFill>
+                      <a:prstDash val="solid"/>
+                      <a:round/>
+                      <a:headEnd type="none" w="med" len="med"/>
+                      <a:tailEnd type="none" w="med" len="med"/>
+                    </a:lnT>
+                    <a:lnB w="12700" cap="flat" cmpd="sng" algn="ctr">
+                      <a:solidFill>
+                        <a:srgbClr val="E4E7F0"/>
+                      </a:solidFill>
+                      <a:prstDash val="solid"/>
+                      <a:round/>
+                      <a:headEnd type="none" w="med" len="med"/>
+                      <a:tailEnd type="none" w="med" len="med"/>
+                    </a:lnB>
+                    <a:solidFill>
+                      <a:srgbClr val="EAF0FC"/>
+                    </a:solidFill>
+                  </a:tcPr>
+                </a:tc>
+                <a:tc>
+                  <a:txBody>
+                    <a:bodyPr/>
+                    <a:lstStyle/>
+                    <a:p>
+                      <a:pPr algn="ctr" indent="0" marL="0">
+                        <a:buNone/>
+                      </a:pPr>
+                      <a:r>
+                        <a:rPr lang="en-US" sz="1050" dirty="0">
+                          <a:solidFill>
+                            <a:srgbClr val="33344A"/>
+                          </a:solidFill>
+                          <a:latin typeface="Calibri" pitchFamily="34" charset="0"/>
+                          <a:ea typeface="Calibri" pitchFamily="34" charset="-122"/>
+                          <a:cs typeface="Calibri" pitchFamily="34" charset="-120"/>
+                        </a:rPr>
+                        <a:t>0.50</a:t>
+                      </a:r>
+                      <a:endParaRPr lang="en-US" sz="1050" dirty="0">
+                        <a:latin typeface="Calibri" charset="0"/>
+                        <a:ea typeface="Calibri" charset="0"/>
+                        <a:cs typeface="Calibri" charset="0"/>
+                      </a:endParaRPr>
+                    </a:p>
+                  </a:txBody>
+                  <a:tcPr marL="45720" marR="45720" marT="18288" marB="18288" anchor="ctr">
+                    <a:lnL w="12700" cap="flat" cmpd="sng" algn="ctr">
+                      <a:solidFill>
+                        <a:srgbClr val="E4E7F0"/>
+                      </a:solidFill>
+                      <a:prstDash val="solid"/>
+                      <a:round/>
+                      <a:headEnd type="none" w="med" len="med"/>
+                      <a:tailEnd type="none" w="med" len="med"/>
+                    </a:lnL>
+                    <a:lnR w="12700" cap="flat" cmpd="sng" algn="ctr">
+                      <a:solidFill>
+                        <a:srgbClr val="E4E7F0"/>
+                      </a:solidFill>
+                      <a:prstDash val="solid"/>
+                      <a:round/>
+                      <a:headEnd type="none" w="med" len="med"/>
+                      <a:tailEnd type="none" w="med" len="med"/>
+                    </a:lnR>
+                    <a:lnT w="12700" cap="flat" cmpd="sng" algn="ctr">
+                      <a:solidFill>
+                        <a:srgbClr val="E4E7F0"/>
+                      </a:solidFill>
+                      <a:prstDash val="solid"/>
+                      <a:round/>
+                      <a:headEnd type="none" w="med" len="med"/>
+                      <a:tailEnd type="none" w="med" len="med"/>
+                    </a:lnT>
+                    <a:lnB w="12700" cap="flat" cmpd="sng" algn="ctr">
+                      <a:solidFill>
+                        <a:srgbClr val="E4E7F0"/>
+                      </a:solidFill>
+                      <a:prstDash val="solid"/>
+                      <a:round/>
+                      <a:headEnd type="none" w="med" len="med"/>
+                      <a:tailEnd type="none" w="med" len="med"/>
+                    </a:lnB>
+                    <a:solidFill>
+                      <a:srgbClr val="EAF0FC"/>
+                    </a:solidFill>
+                  </a:tcPr>
+                </a:tc>
+              </a:tr>
+            </a:tbl>
+          </a:graphicData>
+        </a:graphic>
+      </p:graphicFrame>
+      <p:sp>
+        <p:nvSpPr>
+          <p:cNvPr id="17" name="Text 12"/>
+          <p:cNvSpPr txBox="1"/>
+          <p:nvPr/>
+        </p:nvSpPr>
+        <p:spPr>
+          <a:xfrm>
+            <a:off x="6309360" y="4471416"/>
+            <a:ext cx="5074920" cy="201168"/>
+          </a:xfrm>
+          <a:prstGeom prst="rect">
+            <a:avLst/>
+          </a:prstGeom>
+          <a:noFill/>
+          <a:ln/>
+        </p:spPr>
+        <p:txBody>
+          <a:bodyPr wrap="square" lIns="0" tIns="0" rIns="0" bIns="0" rtlCol="0" anchor="ctr"/>
+          <a:lstStyle/>
+          <a:p>
+            <a:pPr indent="0" marL="0">
+              <a:buNone/>
+            </a:pPr>
+            <a:r>
+              <a:rPr lang="en-US" sz="1050" b="1" dirty="0">
+                <a:solidFill>
+                  <a:srgbClr val="B8892B"/>
+                </a:solidFill>
+                <a:latin typeface="Calibri" pitchFamily="34" charset="0"/>
+                <a:ea typeface="Calibri" pitchFamily="34" charset="-122"/>
+                <a:cs typeface="Calibri" pitchFamily="34" charset="-120"/>
+              </a:rPr>
+              <a:t>μ̂₁ scores ALL customers → pred. Applied, new offer</a:t>
+            </a:r>
+            <a:endParaRPr lang="en-US" sz="1050" dirty="0"/>
+          </a:p>
+        </p:txBody>
+      </p:sp>
+      <p:graphicFrame>
+        <p:nvGraphicFramePr>
+          <p:cNvPr id="41" name="Table 3"/>
+          <p:cNvGraphicFramePr>
+            <a:graphicFrameLocks noGrp="1"/>
+          </p:cNvGraphicFramePr>
+          <p:nvPr>
+            <p:extLst>
+              <p:ext uri="{D42A27DB-BD31-4B8C-83A1-F6EECF244321}">
+                <p14:modId xmlns:p14="http://schemas.microsoft.com/office/powerpoint/2010/main" val="1579011935"/>
+              </p:ext>
+            </p:extLst>
+          </p:nvPr>
+        </p:nvGraphicFramePr>
+        <p:xfrm>
+          <a:off x="6309360" y="4690872"/>
+          <a:ext cx="5074920" cy="1408176"/>
+        </p:xfrm>
+        <a:graphic>
+          <a:graphicData uri="http://schemas.openxmlformats.org/drawingml/2006/table">
+            <a:tbl>
+              <a:tblPr/>
+              <a:tblGrid>
+                <a:gridCol w="685800"/>
+                <a:gridCol w="1280160"/>
+                <a:gridCol w="685800"/>
+                <a:gridCol w="2423160"/>
+              </a:tblGrid>
+              <a:tr h="201168">
+                <a:tc>
+                  <a:txBody>
+                    <a:bodyPr/>
+                    <a:lstStyle/>
                     <a:p>
                       <a:pPr algn="ctr" indent="0" marL="0">
                         <a:buNone/>
@@ -4511,7 +6313,7 @@
                           <a:ea typeface="Calibri" pitchFamily="34" charset="-122"/>
                           <a:cs typeface="Calibri" pitchFamily="34" charset="-120"/>
                         </a:rPr>
-                        <a:t>pred. Applied, old offer</a:t>
+                        <a:t>Cust.</a:t>
                       </a:r>
                       <a:endParaRPr lang="en-US" sz="950" dirty="0">
                         <a:latin typeface="Calibri" charset="0"/>
@@ -4520,7 +6322,7 @@
                       </a:endParaRPr>
                     </a:p>
                   </a:txBody>
-                  <a:tcPr marL="73152" marR="73152" marT="36576" marB="36576" anchor="ctr">
+                  <a:tcPr marL="45720" marR="45720" marT="18288" marB="18288" anchor="ctr">
                     <a:lnL w="12700" cap="flat" cmpd="sng" algn="ctr">
                       <a:solidFill>
                         <a:srgbClr val="F0DFB0"/>
@@ -4558,7 +6360,143 @@
                       <a:tailEnd type="none" w="med" len="med"/>
                     </a:lnB>
                     <a:solidFill>
-                      <a:srgbClr val="1E2761"/>
+                      <a:srgbClr val="B8892B"/>
+                    </a:solidFill>
+                  </a:tcPr>
+                </a:tc>
+                <a:tc>
+                  <a:txBody>
+                    <a:bodyPr/>
+                    <a:lstStyle/>
+                    <a:p>
+                      <a:pPr algn="ctr" indent="0" marL="0">
+                        <a:buNone/>
+                      </a:pPr>
+                      <a:r>
+                        <a:rPr lang="en-US" sz="950" b="1" dirty="0">
+                          <a:solidFill>
+                            <a:srgbClr val="FFFFFF"/>
+                          </a:solidFill>
+                          <a:latin typeface="Calibri" pitchFamily="34" charset="0"/>
+                          <a:ea typeface="Calibri" pitchFamily="34" charset="-122"/>
+                          <a:cs typeface="Calibri" pitchFamily="34" charset="-120"/>
+                        </a:rPr>
+                        <a:t>new_offer</a:t>
+                      </a:r>
+                      <a:endParaRPr lang="en-US" sz="950" dirty="0">
+                        <a:latin typeface="Calibri" charset="0"/>
+                        <a:ea typeface="Calibri" charset="0"/>
+                        <a:cs typeface="Calibri" charset="0"/>
+                      </a:endParaRPr>
+                    </a:p>
+                  </a:txBody>
+                  <a:tcPr marL="45720" marR="45720" marT="18288" marB="18288" anchor="ctr">
+                    <a:lnL w="12700" cap="flat" cmpd="sng" algn="ctr">
+                      <a:solidFill>
+                        <a:srgbClr val="F0DFB0"/>
+                      </a:solidFill>
+                      <a:prstDash val="solid"/>
+                      <a:round/>
+                      <a:headEnd type="none" w="med" len="med"/>
+                      <a:tailEnd type="none" w="med" len="med"/>
+                    </a:lnL>
+                    <a:lnR w="12700" cap="flat" cmpd="sng" algn="ctr">
+                      <a:solidFill>
+                        <a:srgbClr val="F0DFB0"/>
+                      </a:solidFill>
+                      <a:prstDash val="solid"/>
+                      <a:round/>
+                      <a:headEnd type="none" w="med" len="med"/>
+                      <a:tailEnd type="none" w="med" len="med"/>
+                    </a:lnR>
+                    <a:lnT w="12700" cap="flat" cmpd="sng" algn="ctr">
+                      <a:solidFill>
+                        <a:srgbClr val="F0DFB0"/>
+                      </a:solidFill>
+                      <a:prstDash val="solid"/>
+                      <a:round/>
+                      <a:headEnd type="none" w="med" len="med"/>
+                      <a:tailEnd type="none" w="med" len="med"/>
+                    </a:lnT>
+                    <a:lnB w="12700" cap="flat" cmpd="sng" algn="ctr">
+                      <a:solidFill>
+                        <a:srgbClr val="F0DFB0"/>
+                      </a:solidFill>
+                      <a:prstDash val="solid"/>
+                      <a:round/>
+                      <a:headEnd type="none" w="med" len="med"/>
+                      <a:tailEnd type="none" w="med" len="med"/>
+                    </a:lnB>
+                    <a:solidFill>
+                      <a:srgbClr val="B8892B"/>
+                    </a:solidFill>
+                  </a:tcPr>
+                </a:tc>
+                <a:tc>
+                  <a:txBody>
+                    <a:bodyPr/>
+                    <a:lstStyle/>
+                    <a:p>
+                      <a:pPr algn="ctr" indent="0" marL="0">
+                        <a:buNone/>
+                      </a:pPr>
+                      <a:r>
+                        <a:rPr lang="en-US" sz="950" b="1" dirty="0">
+                          <a:solidFill>
+                            <a:srgbClr val="FFFFFF"/>
+                          </a:solidFill>
+                          <a:latin typeface="Calibri" pitchFamily="34" charset="0"/>
+                          <a:ea typeface="Calibri" pitchFamily="34" charset="-122"/>
+                          <a:cs typeface="Calibri" pitchFamily="34" charset="-120"/>
+                        </a:rPr>
+                        <a:t>Applied</a:t>
+                      </a:r>
+                      <a:endParaRPr lang="en-US" sz="950" dirty="0">
+                        <a:latin typeface="Calibri" charset="0"/>
+                        <a:ea typeface="Calibri" charset="0"/>
+                        <a:cs typeface="Calibri" charset="0"/>
+                      </a:endParaRPr>
+                    </a:p>
+                  </a:txBody>
+                  <a:tcPr marL="45720" marR="45720" marT="18288" marB="18288" anchor="ctr">
+                    <a:lnL w="12700" cap="flat" cmpd="sng" algn="ctr">
+                      <a:solidFill>
+                        <a:srgbClr val="F0DFB0"/>
+                      </a:solidFill>
+                      <a:prstDash val="solid"/>
+                      <a:round/>
+                      <a:headEnd type="none" w="med" len="med"/>
+                      <a:tailEnd type="none" w="med" len="med"/>
+                    </a:lnL>
+                    <a:lnR w="12700" cap="flat" cmpd="sng" algn="ctr">
+                      <a:solidFill>
+                        <a:srgbClr val="F0DFB0"/>
+                      </a:solidFill>
+                      <a:prstDash val="solid"/>
+                      <a:round/>
+                      <a:headEnd type="none" w="med" len="med"/>
+                      <a:tailEnd type="none" w="med" len="med"/>
+                    </a:lnR>
+                    <a:lnT w="12700" cap="flat" cmpd="sng" algn="ctr">
+                      <a:solidFill>
+                        <a:srgbClr val="F0DFB0"/>
+                      </a:solidFill>
+                      <a:prstDash val="solid"/>
+                      <a:round/>
+                      <a:headEnd type="none" w="med" len="med"/>
+                      <a:tailEnd type="none" w="med" len="med"/>
+                    </a:lnT>
+                    <a:lnB w="12700" cap="flat" cmpd="sng" algn="ctr">
+                      <a:solidFill>
+                        <a:srgbClr val="F0DFB0"/>
+                      </a:solidFill>
+                      <a:prstDash val="solid"/>
+                      <a:round/>
+                      <a:headEnd type="none" w="med" len="med"/>
+                      <a:tailEnd type="none" w="med" len="med"/>
+                    </a:lnB>
+                    <a:solidFill>
+                      <a:srgbClr val="B8892B"/>
                     </a:solidFill>
                   </a:tcPr>
                 </a:tc>
@@ -4587,82 +6525,61 @@
                         <a:cs typeface="Calibri" charset="0"/>
                       </a:endParaRPr>
                     </a:p>
+                  </a:txBody>
+                  <a:tcPr marL="45720" marR="45720" marT="18288" marB="18288" anchor="ctr">
+                    <a:lnL w="12700" cap="flat" cmpd="sng" algn="ctr">
+                      <a:solidFill>
+                        <a:srgbClr val="F0DFB0"/>
+                      </a:solidFill>
+                      <a:prstDash val="solid"/>
+                      <a:round/>
+                      <a:headEnd type="none" w="med" len="med"/>
+                      <a:tailEnd type="none" w="med" len="med"/>
+                    </a:lnL>
+                    <a:lnR w="12700" cap="flat" cmpd="sng" algn="ctr">
+                      <a:solidFill>
+                        <a:srgbClr val="F0DFB0"/>
+                      </a:solidFill>
+                      <a:prstDash val="solid"/>
+                      <a:round/>
+                      <a:headEnd type="none" w="med" len="med"/>
+                      <a:tailEnd type="none" w="med" len="med"/>
+                    </a:lnR>
+                    <a:lnT w="12700" cap="flat" cmpd="sng" algn="ctr">
+                      <a:solidFill>
+                        <a:srgbClr val="F0DFB0"/>
+                      </a:solidFill>
+                      <a:prstDash val="solid"/>
+                      <a:round/>
+                      <a:headEnd type="none" w="med" len="med"/>
+                      <a:tailEnd type="none" w="med" len="med"/>
+                    </a:lnT>
+                    <a:lnB w="12700" cap="flat" cmpd="sng" algn="ctr">
+                      <a:solidFill>
+                        <a:srgbClr val="F0DFB0"/>
+                      </a:solidFill>
+                      <a:prstDash val="solid"/>
+                      <a:round/>
+                      <a:headEnd type="none" w="med" len="med"/>
+                      <a:tailEnd type="none" w="med" len="med"/>
+                    </a:lnB>
+                    <a:solidFill>
+                      <a:srgbClr val="B8892B"/>
+                    </a:solidFill>
+                  </a:tcPr>
+                </a:tc>
+              </a:tr>
+              <a:tr h="201168">
+                <a:tc>
+                  <a:txBody>
+                    <a:bodyPr/>
+                    <a:lstStyle/>
                     <a:p>
                       <a:pPr algn="ctr" indent="0" marL="0">
                         <a:buNone/>
                       </a:pPr>
                       <a:r>
-                        <a:rPr lang="en-US" sz="950" b="1" dirty="0">
-                          <a:solidFill>
-                            <a:srgbClr val="FFFFFF"/>
-                          </a:solidFill>
-                          <a:latin typeface="Calibri" pitchFamily="34" charset="0"/>
-                          <a:ea typeface="Calibri" pitchFamily="34" charset="-122"/>
-                          <a:cs typeface="Calibri" pitchFamily="34" charset="-120"/>
-                        </a:rPr>
-                        <a:t>pred. Applied, new offer</a:t>
-                      </a:r>
-                      <a:endParaRPr lang="en-US" sz="950" dirty="0">
-                        <a:latin typeface="Calibri" charset="0"/>
-                        <a:ea typeface="Calibri" charset="0"/>
-                        <a:cs typeface="Calibri" charset="0"/>
-                      </a:endParaRPr>
-                    </a:p>
-                  </a:txBody>
-                  <a:tcPr marL="73152" marR="73152" marT="36576" marB="36576" anchor="ctr">
-                    <a:lnL w="12700" cap="flat" cmpd="sng" algn="ctr">
-                      <a:solidFill>
-                        <a:srgbClr val="F0DFB0"/>
-                      </a:solidFill>
-                      <a:prstDash val="solid"/>
-                      <a:round/>
-                      <a:headEnd type="none" w="med" len="med"/>
-                      <a:tailEnd type="none" w="med" len="med"/>
-                    </a:lnL>
-                    <a:lnR w="12700" cap="flat" cmpd="sng" algn="ctr">
-                      <a:solidFill>
-                        <a:srgbClr val="F0DFB0"/>
-                      </a:solidFill>
-                      <a:prstDash val="solid"/>
-                      <a:round/>
-                      <a:headEnd type="none" w="med" len="med"/>
-                      <a:tailEnd type="none" w="med" len="med"/>
-                    </a:lnR>
-                    <a:lnT w="12700" cap="flat" cmpd="sng" algn="ctr">
-                      <a:solidFill>
-                        <a:srgbClr val="F0DFB0"/>
-                      </a:solidFill>
-                      <a:prstDash val="solid"/>
-                      <a:round/>
-                      <a:headEnd type="none" w="med" len="med"/>
-                      <a:tailEnd type="none" w="med" len="med"/>
-                    </a:lnT>
-                    <a:lnB w="12700" cap="flat" cmpd="sng" algn="ctr">
-                      <a:solidFill>
-                        <a:srgbClr val="F0DFB0"/>
-                      </a:solidFill>
-                      <a:prstDash val="solid"/>
-                      <a:round/>
-                      <a:headEnd type="none" w="med" len="med"/>
-                      <a:tailEnd type="none" w="med" len="med"/>
-                    </a:lnB>
-                    <a:solidFill>
-                      <a:srgbClr val="1E2761"/>
-                    </a:solidFill>
-                  </a:tcPr>
-                </a:tc>
-              </a:tr>
-              <a:tr h="244275">
-                <a:tc>
-                  <a:txBody>
-                    <a:bodyPr/>
-                    <a:lstStyle/>
-                    <a:p>
-                      <a:pPr algn="l" indent="0" marL="0">
-                        <a:buNone/>
-                      </a:pPr>
-                      <a:r>
-                        <a:rPr lang="en-US" sz="1100" b="1" dirty="0">
+                        <a:rPr lang="en-US" sz="1050" b="1" dirty="0">
                           <a:solidFill>
                             <a:srgbClr val="33344A"/>
                           </a:solidFill>
@@ -4672,14 +6589,14 @@
                         </a:rPr>
                         <a:t>A</a:t>
                       </a:r>
-                      <a:endParaRPr lang="en-US" sz="1100" dirty="0">
+                      <a:endParaRPr lang="en-US" sz="1050" dirty="0">
                         <a:latin typeface="Calibri" charset="0"/>
                         <a:ea typeface="Calibri" charset="0"/>
                         <a:cs typeface="Calibri" charset="0"/>
                       </a:endParaRPr>
                     </a:p>
                   </a:txBody>
-                  <a:tcPr marL="73152" marR="73152" marT="36576" marB="36576" anchor="ctr">
+                  <a:tcPr marL="45720" marR="45720" marT="18288" marB="18288" anchor="ctr">
                     <a:lnL w="12700" cap="flat" cmpd="sng" algn="ctr">
                       <a:solidFill>
                         <a:srgbClr val="F0DFB0"/>
@@ -4730,7 +6647,7 @@
                         <a:buNone/>
                       </a:pPr>
                       <a:r>
-                        <a:rPr lang="en-US" sz="1100" dirty="0">
+                        <a:rPr lang="en-US" sz="1050" dirty="0">
                           <a:solidFill>
                             <a:srgbClr val="1E2761"/>
                           </a:solidFill>
@@ -4738,16 +6655,16 @@
                           <a:ea typeface="Calibri" pitchFamily="34" charset="-122"/>
                           <a:cs typeface="Calibri" pitchFamily="34" charset="-120"/>
                         </a:rPr>
-                        <a:t>0 (old offer)</a:t>
+                        <a:t>0 (old)</a:t>
                       </a:r>
-                      <a:endParaRPr lang="en-US" sz="1100" dirty="0">
+                      <a:endParaRPr lang="en-US" sz="1050" dirty="0">
                         <a:latin typeface="Calibri" charset="0"/>
                         <a:ea typeface="Calibri" charset="0"/>
                         <a:cs typeface="Calibri" charset="0"/>
                       </a:endParaRPr>
                     </a:p>
                   </a:txBody>
-                  <a:tcPr marL="73152" marR="73152" marT="36576" marB="36576" anchor="ctr">
+                  <a:tcPr marL="45720" marR="45720" marT="18288" marB="18288" anchor="ctr">
                     <a:lnL w="12700" cap="flat" cmpd="sng" algn="ctr">
                       <a:solidFill>
                         <a:srgbClr val="F0DFB0"/>
@@ -4798,7 +6715,7 @@
                         <a:buNone/>
                       </a:pPr>
                       <a:r>
-                        <a:rPr lang="en-US" sz="1100" dirty="0">
+                        <a:rPr lang="en-US" sz="1050" dirty="0">
                           <a:solidFill>
                             <a:srgbClr val="33344A"/>
                           </a:solidFill>
@@ -4808,14 +6725,14 @@
                         </a:rPr>
                         <a:t>0</a:t>
                       </a:r>
-                      <a:endParaRPr lang="en-US" sz="1100" dirty="0">
+                      <a:endParaRPr lang="en-US" sz="1050" dirty="0">
                         <a:latin typeface="Calibri" charset="0"/>
                         <a:ea typeface="Calibri" charset="0"/>
                         <a:cs typeface="Calibri" charset="0"/>
                       </a:endParaRPr>
                     </a:p>
                   </a:txBody>
-                  <a:tcPr marL="73152" marR="73152" marT="36576" marB="36576" anchor="ctr">
+                  <a:tcPr marL="45720" marR="45720" marT="18288" marB="18288" anchor="ctr">
                     <a:lnL w="12700" cap="flat" cmpd="sng" algn="ctr">
                       <a:solidFill>
                         <a:srgbClr val="F0DFB0"/>
@@ -4866,7 +6783,7 @@
                         <a:buNone/>
                       </a:pPr>
                       <a:r>
-                        <a:rPr lang="en-US" sz="1100" dirty="0">
+                        <a:rPr lang="en-US" sz="1050" dirty="0">
                           <a:solidFill>
                             <a:srgbClr val="33344A"/>
                           </a:solidFill>
@@ -4874,16 +6791,360 @@
                           <a:ea typeface="Calibri" pitchFamily="34" charset="-122"/>
                           <a:cs typeface="Calibri" pitchFamily="34" charset="-120"/>
                         </a:rPr>
-                        <a:t>0.20</a:t>
+                        <a:t>0.55</a:t>
                       </a:r>
-                      <a:endParaRPr lang="en-US" sz="1100" dirty="0">
+                      <a:endParaRPr lang="en-US" sz="1050" dirty="0">
                         <a:latin typeface="Calibri" charset="0"/>
                         <a:ea typeface="Calibri" charset="0"/>
                         <a:cs typeface="Calibri" charset="0"/>
                       </a:endParaRPr>
                     </a:p>
                   </a:txBody>
-                  <a:tcPr marL="73152" marR="73152" marT="36576" marB="36576" anchor="ctr">
+                  <a:tcPr marL="45720" marR="45720" marT="18288" marB="18288" anchor="ctr">
+                    <a:lnL w="12700" cap="flat" cmpd="sng" algn="ctr">
+                      <a:solidFill>
+                        <a:srgbClr val="F0DFB0"/>
+                      </a:solidFill>
+                      <a:prstDash val="solid"/>
+                      <a:round/>
+                      <a:headEnd type="none" w="med" len="med"/>
+                      <a:tailEnd type="none" w="med" len="med"/>
+                    </a:lnL>
+                    <a:lnR w="12700" cap="flat" cmpd="sng" algn="ctr">
+                      <a:solidFill>
+                        <a:srgbClr val="F0DFB0"/>
+                      </a:solidFill>
+                      <a:prstDash val="solid"/>
+                      <a:round/>
+                      <a:headEnd type="none" w="med" len="med"/>
+                      <a:tailEnd type="none" w="med" len="med"/>
+                    </a:lnR>
+                    <a:lnT w="12700" cap="flat" cmpd="sng" algn="ctr">
+                      <a:solidFill>
+                        <a:srgbClr val="F0DFB0"/>
+                      </a:solidFill>
+                      <a:prstDash val="solid"/>
+                      <a:round/>
+                      <a:headEnd type="none" w="med" len="med"/>
+                      <a:tailEnd type="none" w="med" len="med"/>
+                    </a:lnT>
+                    <a:lnB w="12700" cap="flat" cmpd="sng" algn="ctr">
+                      <a:solidFill>
+                        <a:srgbClr val="F0DFB0"/>
+                      </a:solidFill>
+                      <a:prstDash val="solid"/>
+                      <a:round/>
+                      <a:headEnd type="none" w="med" len="med"/>
+                      <a:tailEnd type="none" w="med" len="med"/>
+                    </a:lnB>
+                    <a:solidFill>
+                      <a:srgbClr val="FFFFFF"/>
+                    </a:solidFill>
+                  </a:tcPr>
+                </a:tc>
+              </a:tr>
+              <a:tr h="201168">
+                <a:tc>
+                  <a:txBody>
+                    <a:bodyPr/>
+                    <a:lstStyle/>
+                    <a:p>
+                      <a:pPr algn="ctr" indent="0" marL="0">
+                        <a:buNone/>
+                      </a:pPr>
+                      <a:r>
+                        <a:rPr lang="en-US" sz="1050" b="1" dirty="0">
+                          <a:solidFill>
+                            <a:srgbClr val="33344A"/>
+                          </a:solidFill>
+                          <a:latin typeface="Calibri" pitchFamily="34" charset="0"/>
+                          <a:ea typeface="Calibri" pitchFamily="34" charset="-122"/>
+                          <a:cs typeface="Calibri" pitchFamily="34" charset="-120"/>
+                        </a:rPr>
+                        <a:t>B</a:t>
+                      </a:r>
+                      <a:endParaRPr lang="en-US" sz="1050" dirty="0">
+                        <a:latin typeface="Calibri" charset="0"/>
+                        <a:ea typeface="Calibri" charset="0"/>
+                        <a:cs typeface="Calibri" charset="0"/>
+                      </a:endParaRPr>
+                    </a:p>
+                  </a:txBody>
+                  <a:tcPr marL="45720" marR="45720" marT="18288" marB="18288" anchor="ctr">
+                    <a:lnL w="12700" cap="flat" cmpd="sng" algn="ctr">
+                      <a:solidFill>
+                        <a:srgbClr val="F0DFB0"/>
+                      </a:solidFill>
+                      <a:prstDash val="solid"/>
+                      <a:round/>
+                      <a:headEnd type="none" w="med" len="med"/>
+                      <a:tailEnd type="none" w="med" len="med"/>
+                    </a:lnL>
+                    <a:lnR w="12700" cap="flat" cmpd="sng" algn="ctr">
+                      <a:solidFill>
+                        <a:srgbClr val="F0DFB0"/>
+                      </a:solidFill>
+                      <a:prstDash val="solid"/>
+                      <a:round/>
+                      <a:headEnd type="none" w="med" len="med"/>
+                      <a:tailEnd type="none" w="med" len="med"/>
+                    </a:lnR>
+                    <a:lnT w="12700" cap="flat" cmpd="sng" algn="ctr">
+                      <a:solidFill>
+                        <a:srgbClr val="F0DFB0"/>
+                      </a:solidFill>
+                      <a:prstDash val="solid"/>
+                      <a:round/>
+                      <a:headEnd type="none" w="med" len="med"/>
+                      <a:tailEnd type="none" w="med" len="med"/>
+                    </a:lnT>
+                    <a:lnB w="12700" cap="flat" cmpd="sng" algn="ctr">
+                      <a:solidFill>
+                        <a:srgbClr val="F0DFB0"/>
+                      </a:solidFill>
+                      <a:prstDash val="solid"/>
+                      <a:round/>
+                      <a:headEnd type="none" w="med" len="med"/>
+                      <a:tailEnd type="none" w="med" len="med"/>
+                    </a:lnB>
+                    <a:solidFill>
+                      <a:srgbClr val="FBF3E1"/>
+                    </a:solidFill>
+                  </a:tcPr>
+                </a:tc>
+                <a:tc>
+                  <a:txBody>
+                    <a:bodyPr/>
+                    <a:lstStyle/>
+                    <a:p>
+                      <a:pPr algn="ctr" indent="0" marL="0">
+                        <a:buNone/>
+                      </a:pPr>
+                      <a:r>
+                        <a:rPr lang="en-US" sz="1050" dirty="0">
+                          <a:solidFill>
+                            <a:srgbClr val="1E2761"/>
+                          </a:solidFill>
+                          <a:latin typeface="Calibri" pitchFamily="34" charset="0"/>
+                          <a:ea typeface="Calibri" pitchFamily="34" charset="-122"/>
+                          <a:cs typeface="Calibri" pitchFamily="34" charset="-120"/>
+                        </a:rPr>
+                        <a:t>0 (old)</a:t>
+                      </a:r>
+                      <a:endParaRPr lang="en-US" sz="1050" dirty="0">
+                        <a:latin typeface="Calibri" charset="0"/>
+                        <a:ea typeface="Calibri" charset="0"/>
+                        <a:cs typeface="Calibri" charset="0"/>
+                      </a:endParaRPr>
+                    </a:p>
+                  </a:txBody>
+                  <a:tcPr marL="45720" marR="45720" marT="18288" marB="18288" anchor="ctr">
+                    <a:lnL w="12700" cap="flat" cmpd="sng" algn="ctr">
+                      <a:solidFill>
+                        <a:srgbClr val="F0DFB0"/>
+                      </a:solidFill>
+                      <a:prstDash val="solid"/>
+                      <a:round/>
+                      <a:headEnd type="none" w="med" len="med"/>
+                      <a:tailEnd type="none" w="med" len="med"/>
+                    </a:lnL>
+                    <a:lnR w="12700" cap="flat" cmpd="sng" algn="ctr">
+                      <a:solidFill>
+                        <a:srgbClr val="F0DFB0"/>
+                      </a:solidFill>
+                      <a:prstDash val="solid"/>
+                      <a:round/>
+                      <a:headEnd type="none" w="med" len="med"/>
+                      <a:tailEnd type="none" w="med" len="med"/>
+                    </a:lnR>
+                    <a:lnT w="12700" cap="flat" cmpd="sng" algn="ctr">
+                      <a:solidFill>
+                        <a:srgbClr val="F0DFB0"/>
+                      </a:solidFill>
+                      <a:prstDash val="solid"/>
+                      <a:round/>
+                      <a:headEnd type="none" w="med" len="med"/>
+                      <a:tailEnd type="none" w="med" len="med"/>
+                    </a:lnT>
+                    <a:lnB w="12700" cap="flat" cmpd="sng" algn="ctr">
+                      <a:solidFill>
+                        <a:srgbClr val="F0DFB0"/>
+                      </a:solidFill>
+                      <a:prstDash val="solid"/>
+                      <a:round/>
+                      <a:headEnd type="none" w="med" len="med"/>
+                      <a:tailEnd type="none" w="med" len="med"/>
+                    </a:lnB>
+                    <a:solidFill>
+                      <a:srgbClr val="FBF3E1"/>
+                    </a:solidFill>
+                  </a:tcPr>
+                </a:tc>
+                <a:tc>
+                  <a:txBody>
+                    <a:bodyPr/>
+                    <a:lstStyle/>
+                    <a:p>
+                      <a:pPr algn="ctr" indent="0" marL="0">
+                        <a:buNone/>
+                      </a:pPr>
+                      <a:r>
+                        <a:rPr lang="en-US" sz="1050" dirty="0">
+                          <a:solidFill>
+                            <a:srgbClr val="33344A"/>
+                          </a:solidFill>
+                          <a:latin typeface="Calibri" pitchFamily="34" charset="0"/>
+                          <a:ea typeface="Calibri" pitchFamily="34" charset="-122"/>
+                          <a:cs typeface="Calibri" pitchFamily="34" charset="-120"/>
+                        </a:rPr>
+                        <a:t>1</a:t>
+                      </a:r>
+                      <a:endParaRPr lang="en-US" sz="1050" dirty="0">
+                        <a:latin typeface="Calibri" charset="0"/>
+                        <a:ea typeface="Calibri" charset="0"/>
+                        <a:cs typeface="Calibri" charset="0"/>
+                      </a:endParaRPr>
+                    </a:p>
+                  </a:txBody>
+                  <a:tcPr marL="45720" marR="45720" marT="18288" marB="18288" anchor="ctr">
+                    <a:lnL w="12700" cap="flat" cmpd="sng" algn="ctr">
+                      <a:solidFill>
+                        <a:srgbClr val="F0DFB0"/>
+                      </a:solidFill>
+                      <a:prstDash val="solid"/>
+                      <a:round/>
+                      <a:headEnd type="none" w="med" len="med"/>
+                      <a:tailEnd type="none" w="med" len="med"/>
+                    </a:lnL>
+                    <a:lnR w="12700" cap="flat" cmpd="sng" algn="ctr">
+                      <a:solidFill>
+                        <a:srgbClr val="F0DFB0"/>
+                      </a:solidFill>
+                      <a:prstDash val="solid"/>
+                      <a:round/>
+                      <a:headEnd type="none" w="med" len="med"/>
+                      <a:tailEnd type="none" w="med" len="med"/>
+                    </a:lnR>
+                    <a:lnT w="12700" cap="flat" cmpd="sng" algn="ctr">
+                      <a:solidFill>
+                        <a:srgbClr val="F0DFB0"/>
+                      </a:solidFill>
+                      <a:prstDash val="solid"/>
+                      <a:round/>
+                      <a:headEnd type="none" w="med" len="med"/>
+                      <a:tailEnd type="none" w="med" len="med"/>
+                    </a:lnT>
+                    <a:lnB w="12700" cap="flat" cmpd="sng" algn="ctr">
+                      <a:solidFill>
+                        <a:srgbClr val="F0DFB0"/>
+                      </a:solidFill>
+                      <a:prstDash val="solid"/>
+                      <a:round/>
+                      <a:headEnd type="none" w="med" len="med"/>
+                      <a:tailEnd type="none" w="med" len="med"/>
+                    </a:lnB>
+                    <a:solidFill>
+                      <a:srgbClr val="FBF3E1"/>
+                    </a:solidFill>
+                  </a:tcPr>
+                </a:tc>
+                <a:tc>
+                  <a:txBody>
+                    <a:bodyPr/>
+                    <a:lstStyle/>
+                    <a:p>
+                      <a:pPr algn="ctr" indent="0" marL="0">
+                        <a:buNone/>
+                      </a:pPr>
+                      <a:r>
+                        <a:rPr lang="en-US" sz="1050" dirty="0">
+                          <a:solidFill>
+                            <a:srgbClr val="33344A"/>
+                          </a:solidFill>
+                          <a:latin typeface="Calibri" pitchFamily="34" charset="0"/>
+                          <a:ea typeface="Calibri" pitchFamily="34" charset="-122"/>
+                          <a:cs typeface="Calibri" pitchFamily="34" charset="-120"/>
+                        </a:rPr>
+                        <a:t>0.75</a:t>
+                      </a:r>
+                      <a:endParaRPr lang="en-US" sz="1050" dirty="0">
+                        <a:latin typeface="Calibri" charset="0"/>
+                        <a:ea typeface="Calibri" charset="0"/>
+                        <a:cs typeface="Calibri" charset="0"/>
+                      </a:endParaRPr>
+                    </a:p>
+                  </a:txBody>
+                  <a:tcPr marL="45720" marR="45720" marT="18288" marB="18288" anchor="ctr">
+                    <a:lnL w="12700" cap="flat" cmpd="sng" algn="ctr">
+                      <a:solidFill>
+                        <a:srgbClr val="F0DFB0"/>
+                      </a:solidFill>
+                      <a:prstDash val="solid"/>
+                      <a:round/>
+                      <a:headEnd type="none" w="med" len="med"/>
+                      <a:tailEnd type="none" w="med" len="med"/>
+                    </a:lnL>
+                    <a:lnR w="12700" cap="flat" cmpd="sng" algn="ctr">
+                      <a:solidFill>
+                        <a:srgbClr val="F0DFB0"/>
+                      </a:solidFill>
+                      <a:prstDash val="solid"/>
+                      <a:round/>
+                      <a:headEnd type="none" w="med" len="med"/>
+                      <a:tailEnd type="none" w="med" len="med"/>
+                    </a:lnR>
+                    <a:lnT w="12700" cap="flat" cmpd="sng" algn="ctr">
+                      <a:solidFill>
+                        <a:srgbClr val="F0DFB0"/>
+                      </a:solidFill>
+                      <a:prstDash val="solid"/>
+                      <a:round/>
+                      <a:headEnd type="none" w="med" len="med"/>
+                      <a:tailEnd type="none" w="med" len="med"/>
+                    </a:lnT>
+                    <a:lnB w="12700" cap="flat" cmpd="sng" algn="ctr">
+                      <a:solidFill>
+                        <a:srgbClr val="F0DFB0"/>
+                      </a:solidFill>
+                      <a:prstDash val="solid"/>
+                      <a:round/>
+                      <a:headEnd type="none" w="med" len="med"/>
+                      <a:tailEnd type="none" w="med" len="med"/>
+                    </a:lnB>
+                    <a:solidFill>
+                      <a:srgbClr val="FBF3E1"/>
+                    </a:solidFill>
+                  </a:tcPr>
+                </a:tc>
+              </a:tr>
+              <a:tr h="201168">
+                <a:tc>
+                  <a:txBody>
+                    <a:bodyPr/>
+                    <a:lstStyle/>
+                    <a:p>
+                      <a:pPr algn="ctr" indent="0" marL="0">
+                        <a:buNone/>
+                      </a:pPr>
+                      <a:r>
+                        <a:rPr lang="en-US" sz="1050" b="1" dirty="0">
+                          <a:solidFill>
+                            <a:srgbClr val="33344A"/>
+                          </a:solidFill>
+                          <a:latin typeface="Calibri" pitchFamily="34" charset="0"/>
+                          <a:ea typeface="Calibri" pitchFamily="34" charset="-122"/>
+                          <a:cs typeface="Calibri" pitchFamily="34" charset="-120"/>
+                        </a:rPr>
+                        <a:t>C</a:t>
+                      </a:r>
+                      <a:endParaRPr lang="en-US" sz="1050" dirty="0">
+                        <a:latin typeface="Calibri" charset="0"/>
+                        <a:ea typeface="Calibri" charset="0"/>
+                        <a:cs typeface="Calibri" charset="0"/>
+                      </a:endParaRPr>
+                    </a:p>
+                  </a:txBody>
+                  <a:tcPr marL="45720" marR="45720" marT="18288" marB="18288" anchor="ctr">
                     <a:lnL w="12700" cap="flat" cmpd="sng" algn="ctr">
                       <a:solidFill>
                         <a:srgbClr val="F0DFB0"/>
@@ -4934,7 +7195,75 @@
                         <a:buNone/>
                       </a:pPr>
                       <a:r>
-                        <a:rPr lang="en-US" sz="1100" dirty="0">
+                        <a:rPr lang="en-US" sz="1050" dirty="0">
+                          <a:solidFill>
+                            <a:srgbClr val="1E2761"/>
+                          </a:solidFill>
+                          <a:latin typeface="Calibri" pitchFamily="34" charset="0"/>
+                          <a:ea typeface="Calibri" pitchFamily="34" charset="-122"/>
+                          <a:cs typeface="Calibri" pitchFamily="34" charset="-120"/>
+                        </a:rPr>
+                        <a:t>0 (old)</a:t>
+                      </a:r>
+                      <a:endParaRPr lang="en-US" sz="1050" dirty="0">
+                        <a:latin typeface="Calibri" charset="0"/>
+                        <a:ea typeface="Calibri" charset="0"/>
+                        <a:cs typeface="Calibri" charset="0"/>
+                      </a:endParaRPr>
+                    </a:p>
+                  </a:txBody>
+                  <a:tcPr marL="45720" marR="45720" marT="18288" marB="18288" anchor="ctr">
+                    <a:lnL w="12700" cap="flat" cmpd="sng" algn="ctr">
+                      <a:solidFill>
+                        <a:srgbClr val="F0DFB0"/>
+                      </a:solidFill>
+                      <a:prstDash val="solid"/>
+                      <a:round/>
+                      <a:headEnd type="none" w="med" len="med"/>
+                      <a:tailEnd type="none" w="med" len="med"/>
+                    </a:lnL>
+                    <a:lnR w="12700" cap="flat" cmpd="sng" algn="ctr">
+                      <a:solidFill>
+                        <a:srgbClr val="F0DFB0"/>
+                      </a:solidFill>
+                      <a:prstDash val="solid"/>
+                      <a:round/>
+                      <a:headEnd type="none" w="med" len="med"/>
+                      <a:tailEnd type="none" w="med" len="med"/>
+                    </a:lnR>
+                    <a:lnT w="12700" cap="flat" cmpd="sng" algn="ctr">
+                      <a:solidFill>
+                        <a:srgbClr val="F0DFB0"/>
+                      </a:solidFill>
+                      <a:prstDash val="solid"/>
+                      <a:round/>
+                      <a:headEnd type="none" w="med" len="med"/>
+                      <a:tailEnd type="none" w="med" len="med"/>
+                    </a:lnT>
+                    <a:lnB w="12700" cap="flat" cmpd="sng" algn="ctr">
+                      <a:solidFill>
+                        <a:srgbClr val="F0DFB0"/>
+                      </a:solidFill>
+                      <a:prstDash val="solid"/>
+                      <a:round/>
+                      <a:headEnd type="none" w="med" len="med"/>
+                      <a:tailEnd type="none" w="med" len="med"/>
+                    </a:lnB>
+                    <a:solidFill>
+                      <a:srgbClr val="FFFFFF"/>
+                    </a:solidFill>
+                  </a:tcPr>
+                </a:tc>
+                <a:tc>
+                  <a:txBody>
+                    <a:bodyPr/>
+                    <a:lstStyle/>
+                    <a:p>
+                      <a:pPr algn="ctr" indent="0" marL="0">
+                        <a:buNone/>
+                      </a:pPr>
+                      <a:r>
+                        <a:rPr lang="en-US" sz="1050" dirty="0">
                           <a:solidFill>
                             <a:srgbClr val="33344A"/>
                           </a:solidFill>
@@ -4942,16 +7271,84 @@
                           <a:ea typeface="Calibri" pitchFamily="34" charset="-122"/>
                           <a:cs typeface="Calibri" pitchFamily="34" charset="-120"/>
                         </a:rPr>
-                        <a:t>0.55</a:t>
+                        <a:t>0</a:t>
                       </a:r>
-                      <a:endParaRPr lang="en-US" sz="1100" dirty="0">
+                      <a:endParaRPr lang="en-US" sz="1050" dirty="0">
                         <a:latin typeface="Calibri" charset="0"/>
                         <a:ea typeface="Calibri" charset="0"/>
                         <a:cs typeface="Calibri" charset="0"/>
                       </a:endParaRPr>
                     </a:p>
                   </a:txBody>
-                  <a:tcPr marL="73152" marR="73152" marT="36576" marB="36576" anchor="ctr">
+                  <a:tcPr marL="45720" marR="45720" marT="18288" marB="18288" anchor="ctr">
+                    <a:lnL w="12700" cap="flat" cmpd="sng" algn="ctr">
+                      <a:solidFill>
+                        <a:srgbClr val="F0DFB0"/>
+                      </a:solidFill>
+                      <a:prstDash val="solid"/>
+                      <a:round/>
+                      <a:headEnd type="none" w="med" len="med"/>
+                      <a:tailEnd type="none" w="med" len="med"/>
+                    </a:lnL>
+                    <a:lnR w="12700" cap="flat" cmpd="sng" algn="ctr">
+                      <a:solidFill>
+                        <a:srgbClr val="F0DFB0"/>
+                      </a:solidFill>
+                      <a:prstDash val="solid"/>
+                      <a:round/>
+                      <a:headEnd type="none" w="med" len="med"/>
+                      <a:tailEnd type="none" w="med" len="med"/>
+                    </a:lnR>
+                    <a:lnT w="12700" cap="flat" cmpd="sng" algn="ctr">
+                      <a:solidFill>
+                        <a:srgbClr val="F0DFB0"/>
+                      </a:solidFill>
+                      <a:prstDash val="solid"/>
+                      <a:round/>
+                      <a:headEnd type="none" w="med" len="med"/>
+                      <a:tailEnd type="none" w="med" len="med"/>
+                    </a:lnT>
+                    <a:lnB w="12700" cap="flat" cmpd="sng" algn="ctr">
+                      <a:solidFill>
+                        <a:srgbClr val="F0DFB0"/>
+                      </a:solidFill>
+                      <a:prstDash val="solid"/>
+                      <a:round/>
+                      <a:headEnd type="none" w="med" len="med"/>
+                      <a:tailEnd type="none" w="med" len="med"/>
+                    </a:lnB>
+                    <a:solidFill>
+                      <a:srgbClr val="FFFFFF"/>
+                    </a:solidFill>
+                  </a:tcPr>
+                </a:tc>
+                <a:tc>
+                  <a:txBody>
+                    <a:bodyPr/>
+                    <a:lstStyle/>
+                    <a:p>
+                      <a:pPr algn="ctr" indent="0" marL="0">
+                        <a:buNone/>
+                      </a:pPr>
+                      <a:r>
+                        <a:rPr lang="en-US" sz="1050" dirty="0">
+                          <a:solidFill>
+                            <a:srgbClr val="33344A"/>
+                          </a:solidFill>
+                          <a:latin typeface="Calibri" pitchFamily="34" charset="0"/>
+                          <a:ea typeface="Calibri" pitchFamily="34" charset="-122"/>
+                          <a:cs typeface="Calibri" pitchFamily="34" charset="-120"/>
+                        </a:rPr>
+                        <a:t>0.30</a:t>
+                      </a:r>
+                      <a:endParaRPr lang="en-US" sz="1050" dirty="0">
+                        <a:latin typeface="Calibri" charset="0"/>
+                        <a:ea typeface="Calibri" charset="0"/>
+                        <a:cs typeface="Calibri" charset="0"/>
+                      </a:endParaRPr>
+                    </a:p>
+                  </a:txBody>
+                  <a:tcPr marL="45720" marR="45720" marT="18288" marB="18288" anchor="ctr">
                     <a:lnL w="12700" cap="flat" cmpd="sng" algn="ctr">
                       <a:solidFill>
                         <a:srgbClr val="F0DFB0"/>
@@ -4994,17 +7391,17 @@
                   </a:tcPr>
                 </a:tc>
               </a:tr>
-              <a:tr h="244275">
+              <a:tr h="201168">
                 <a:tc>
                   <a:txBody>
                     <a:bodyPr/>
                     <a:lstStyle/>
                     <a:p>
-                      <a:pPr algn="l" indent="0" marL="0">
+                      <a:pPr algn="ctr" indent="0" marL="0">
                         <a:buNone/>
                       </a:pPr>
                       <a:r>
-                        <a:rPr lang="en-US" sz="1100" b="1" dirty="0">
+                        <a:rPr lang="en-US" sz="1050" b="1" dirty="0">
                           <a:solidFill>
                             <a:srgbClr val="33344A"/>
                           </a:solidFill>
@@ -5012,16 +7409,16 @@
                           <a:ea typeface="Calibri" pitchFamily="34" charset="-122"/>
                           <a:cs typeface="Calibri" pitchFamily="34" charset="-120"/>
                         </a:rPr>
-                        <a:t>B</a:t>
+                        <a:t>D</a:t>
                       </a:r>
-                      <a:endParaRPr lang="en-US" sz="1100" dirty="0">
+                      <a:endParaRPr lang="en-US" sz="1050" dirty="0">
                         <a:latin typeface="Calibri" charset="0"/>
                         <a:ea typeface="Calibri" charset="0"/>
                         <a:cs typeface="Calibri" charset="0"/>
                       </a:endParaRPr>
                     </a:p>
                   </a:txBody>
-                  <a:tcPr marL="73152" marR="73152" marT="36576" marB="36576" anchor="ctr">
+                  <a:tcPr marL="45720" marR="45720" marT="18288" marB="18288" anchor="ctr">
                     <a:lnL w="12700" cap="flat" cmpd="sng" algn="ctr">
                       <a:solidFill>
                         <a:srgbClr val="F0DFB0"/>
@@ -5072,24 +7469,24 @@
                         <a:buNone/>
                       </a:pPr>
                       <a:r>
-                        <a:rPr lang="en-US" sz="1100" dirty="0">
+                        <a:rPr lang="en-US" sz="1050" dirty="0">
                           <a:solidFill>
-                            <a:srgbClr val="1E2761"/>
+                            <a:srgbClr val="B8892B"/>
                           </a:solidFill>
                           <a:latin typeface="Calibri" pitchFamily="34" charset="0"/>
                           <a:ea typeface="Calibri" pitchFamily="34" charset="-122"/>
                           <a:cs typeface="Calibri" pitchFamily="34" charset="-120"/>
                         </a:rPr>
-                        <a:t>0 (old offer)</a:t>
+                        <a:t>1 (new)</a:t>
                       </a:r>
-                      <a:endParaRPr lang="en-US" sz="1100" dirty="0">
+                      <a:endParaRPr lang="en-US" sz="1050" dirty="0">
                         <a:latin typeface="Calibri" charset="0"/>
                         <a:ea typeface="Calibri" charset="0"/>
                         <a:cs typeface="Calibri" charset="0"/>
                       </a:endParaRPr>
                     </a:p>
                   </a:txBody>
-                  <a:tcPr marL="73152" marR="73152" marT="36576" marB="36576" anchor="ctr">
+                  <a:tcPr marL="45720" marR="45720" marT="18288" marB="18288" anchor="ctr">
                     <a:lnL w="12700" cap="flat" cmpd="sng" algn="ctr">
                       <a:solidFill>
                         <a:srgbClr val="F0DFB0"/>
@@ -5140,7 +7537,7 @@
                         <a:buNone/>
                       </a:pPr>
                       <a:r>
-                        <a:rPr lang="en-US" sz="1100" dirty="0">
+                        <a:rPr lang="en-US" sz="1050" dirty="0">
                           <a:solidFill>
                             <a:srgbClr val="33344A"/>
                           </a:solidFill>
@@ -5150,14 +7547,14 @@
                         </a:rPr>
                         <a:t>1</a:t>
                       </a:r>
-                      <a:endParaRPr lang="en-US" sz="1100" dirty="0">
+                      <a:endParaRPr lang="en-US" sz="1050" dirty="0">
                         <a:latin typeface="Calibri" charset="0"/>
                         <a:ea typeface="Calibri" charset="0"/>
                         <a:cs typeface="Calibri" charset="0"/>
                       </a:endParaRPr>
                     </a:p>
                   </a:txBody>
-                  <a:tcPr marL="73152" marR="73152" marT="36576" marB="36576" anchor="ctr">
+                  <a:tcPr marL="45720" marR="45720" marT="18288" marB="18288" anchor="ctr">
                     <a:lnL w="12700" cap="flat" cmpd="sng" algn="ctr">
                       <a:solidFill>
                         <a:srgbClr val="F0DFB0"/>
@@ -5208,7 +7605,7 @@
                         <a:buNone/>
                       </a:pPr>
                       <a:r>
-                        <a:rPr lang="en-US" sz="1100" dirty="0">
+                        <a:rPr lang="en-US" sz="1050" dirty="0">
                           <a:solidFill>
                             <a:srgbClr val="33344A"/>
                           </a:solidFill>
@@ -5216,16 +7613,360 @@
                           <a:ea typeface="Calibri" pitchFamily="34" charset="-122"/>
                           <a:cs typeface="Calibri" pitchFamily="34" charset="-120"/>
                         </a:rPr>
-                        <a:t>0.60</a:t>
+                        <a:t>0.80</a:t>
                       </a:r>
-                      <a:endParaRPr lang="en-US" sz="1100" dirty="0">
+                      <a:endParaRPr lang="en-US" sz="1050" dirty="0">
                         <a:latin typeface="Calibri" charset="0"/>
                         <a:ea typeface="Calibri" charset="0"/>
                         <a:cs typeface="Calibri" charset="0"/>
                       </a:endParaRPr>
                     </a:p>
                   </a:txBody>
-                  <a:tcPr marL="73152" marR="73152" marT="36576" marB="36576" anchor="ctr">
+                  <a:tcPr marL="45720" marR="45720" marT="18288" marB="18288" anchor="ctr">
+                    <a:lnL w="12700" cap="flat" cmpd="sng" algn="ctr">
+                      <a:solidFill>
+                        <a:srgbClr val="F0DFB0"/>
+                      </a:solidFill>
+                      <a:prstDash val="solid"/>
+                      <a:round/>
+                      <a:headEnd type="none" w="med" len="med"/>
+                      <a:tailEnd type="none" w="med" len="med"/>
+                    </a:lnL>
+                    <a:lnR w="12700" cap="flat" cmpd="sng" algn="ctr">
+                      <a:solidFill>
+                        <a:srgbClr val="F0DFB0"/>
+                      </a:solidFill>
+                      <a:prstDash val="solid"/>
+                      <a:round/>
+                      <a:headEnd type="none" w="med" len="med"/>
+                      <a:tailEnd type="none" w="med" len="med"/>
+                    </a:lnR>
+                    <a:lnT w="12700" cap="flat" cmpd="sng" algn="ctr">
+                      <a:solidFill>
+                        <a:srgbClr val="F0DFB0"/>
+                      </a:solidFill>
+                      <a:prstDash val="solid"/>
+                      <a:round/>
+                      <a:headEnd type="none" w="med" len="med"/>
+                      <a:tailEnd type="none" w="med" len="med"/>
+                    </a:lnT>
+                    <a:lnB w="12700" cap="flat" cmpd="sng" algn="ctr">
+                      <a:solidFill>
+                        <a:srgbClr val="F0DFB0"/>
+                      </a:solidFill>
+                      <a:prstDash val="solid"/>
+                      <a:round/>
+                      <a:headEnd type="none" w="med" len="med"/>
+                      <a:tailEnd type="none" w="med" len="med"/>
+                    </a:lnB>
+                    <a:solidFill>
+                      <a:srgbClr val="FBF3E1"/>
+                    </a:solidFill>
+                  </a:tcPr>
+                </a:tc>
+              </a:tr>
+              <a:tr h="201168">
+                <a:tc>
+                  <a:txBody>
+                    <a:bodyPr/>
+                    <a:lstStyle/>
+                    <a:p>
+                      <a:pPr algn="ctr" indent="0" marL="0">
+                        <a:buNone/>
+                      </a:pPr>
+                      <a:r>
+                        <a:rPr lang="en-US" sz="1050" b="1" dirty="0">
+                          <a:solidFill>
+                            <a:srgbClr val="33344A"/>
+                          </a:solidFill>
+                          <a:latin typeface="Calibri" pitchFamily="34" charset="0"/>
+                          <a:ea typeface="Calibri" pitchFamily="34" charset="-122"/>
+                          <a:cs typeface="Calibri" pitchFamily="34" charset="-120"/>
+                        </a:rPr>
+                        <a:t>E</a:t>
+                      </a:r>
+                      <a:endParaRPr lang="en-US" sz="1050" dirty="0">
+                        <a:latin typeface="Calibri" charset="0"/>
+                        <a:ea typeface="Calibri" charset="0"/>
+                        <a:cs typeface="Calibri" charset="0"/>
+                      </a:endParaRPr>
+                    </a:p>
+                  </a:txBody>
+                  <a:tcPr marL="45720" marR="45720" marT="18288" marB="18288" anchor="ctr">
+                    <a:lnL w="12700" cap="flat" cmpd="sng" algn="ctr">
+                      <a:solidFill>
+                        <a:srgbClr val="F0DFB0"/>
+                      </a:solidFill>
+                      <a:prstDash val="solid"/>
+                      <a:round/>
+                      <a:headEnd type="none" w="med" len="med"/>
+                      <a:tailEnd type="none" w="med" len="med"/>
+                    </a:lnL>
+                    <a:lnR w="12700" cap="flat" cmpd="sng" algn="ctr">
+                      <a:solidFill>
+                        <a:srgbClr val="F0DFB0"/>
+                      </a:solidFill>
+                      <a:prstDash val="solid"/>
+                      <a:round/>
+                      <a:headEnd type="none" w="med" len="med"/>
+                      <a:tailEnd type="none" w="med" len="med"/>
+                    </a:lnR>
+                    <a:lnT w="12700" cap="flat" cmpd="sng" algn="ctr">
+                      <a:solidFill>
+                        <a:srgbClr val="F0DFB0"/>
+                      </a:solidFill>
+                      <a:prstDash val="solid"/>
+                      <a:round/>
+                      <a:headEnd type="none" w="med" len="med"/>
+                      <a:tailEnd type="none" w="med" len="med"/>
+                    </a:lnT>
+                    <a:lnB w="12700" cap="flat" cmpd="sng" algn="ctr">
+                      <a:solidFill>
+                        <a:srgbClr val="F0DFB0"/>
+                      </a:solidFill>
+                      <a:prstDash val="solid"/>
+                      <a:round/>
+                      <a:headEnd type="none" w="med" len="med"/>
+                      <a:tailEnd type="none" w="med" len="med"/>
+                    </a:lnB>
+                    <a:solidFill>
+                      <a:srgbClr val="FFFFFF"/>
+                    </a:solidFill>
+                  </a:tcPr>
+                </a:tc>
+                <a:tc>
+                  <a:txBody>
+                    <a:bodyPr/>
+                    <a:lstStyle/>
+                    <a:p>
+                      <a:pPr algn="ctr" indent="0" marL="0">
+                        <a:buNone/>
+                      </a:pPr>
+                      <a:r>
+                        <a:rPr lang="en-US" sz="1050" dirty="0">
+                          <a:solidFill>
+                            <a:srgbClr val="B8892B"/>
+                          </a:solidFill>
+                          <a:latin typeface="Calibri" pitchFamily="34" charset="0"/>
+                          <a:ea typeface="Calibri" pitchFamily="34" charset="-122"/>
+                          <a:cs typeface="Calibri" pitchFamily="34" charset="-120"/>
+                        </a:rPr>
+                        <a:t>1 (new)</a:t>
+                      </a:r>
+                      <a:endParaRPr lang="en-US" sz="1050" dirty="0">
+                        <a:latin typeface="Calibri" charset="0"/>
+                        <a:ea typeface="Calibri" charset="0"/>
+                        <a:cs typeface="Calibri" charset="0"/>
+                      </a:endParaRPr>
+                    </a:p>
+                  </a:txBody>
+                  <a:tcPr marL="45720" marR="45720" marT="18288" marB="18288" anchor="ctr">
+                    <a:lnL w="12700" cap="flat" cmpd="sng" algn="ctr">
+                      <a:solidFill>
+                        <a:srgbClr val="F0DFB0"/>
+                      </a:solidFill>
+                      <a:prstDash val="solid"/>
+                      <a:round/>
+                      <a:headEnd type="none" w="med" len="med"/>
+                      <a:tailEnd type="none" w="med" len="med"/>
+                    </a:lnL>
+                    <a:lnR w="12700" cap="flat" cmpd="sng" algn="ctr">
+                      <a:solidFill>
+                        <a:srgbClr val="F0DFB0"/>
+                      </a:solidFill>
+                      <a:prstDash val="solid"/>
+                      <a:round/>
+                      <a:headEnd type="none" w="med" len="med"/>
+                      <a:tailEnd type="none" w="med" len="med"/>
+                    </a:lnR>
+                    <a:lnT w="12700" cap="flat" cmpd="sng" algn="ctr">
+                      <a:solidFill>
+                        <a:srgbClr val="F0DFB0"/>
+                      </a:solidFill>
+                      <a:prstDash val="solid"/>
+                      <a:round/>
+                      <a:headEnd type="none" w="med" len="med"/>
+                      <a:tailEnd type="none" w="med" len="med"/>
+                    </a:lnT>
+                    <a:lnB w="12700" cap="flat" cmpd="sng" algn="ctr">
+                      <a:solidFill>
+                        <a:srgbClr val="F0DFB0"/>
+                      </a:solidFill>
+                      <a:prstDash val="solid"/>
+                      <a:round/>
+                      <a:headEnd type="none" w="med" len="med"/>
+                      <a:tailEnd type="none" w="med" len="med"/>
+                    </a:lnB>
+                    <a:solidFill>
+                      <a:srgbClr val="FFFFFF"/>
+                    </a:solidFill>
+                  </a:tcPr>
+                </a:tc>
+                <a:tc>
+                  <a:txBody>
+                    <a:bodyPr/>
+                    <a:lstStyle/>
+                    <a:p>
+                      <a:pPr algn="ctr" indent="0" marL="0">
+                        <a:buNone/>
+                      </a:pPr>
+                      <a:r>
+                        <a:rPr lang="en-US" sz="1050" dirty="0">
+                          <a:solidFill>
+                            <a:srgbClr val="33344A"/>
+                          </a:solidFill>
+                          <a:latin typeface="Calibri" pitchFamily="34" charset="0"/>
+                          <a:ea typeface="Calibri" pitchFamily="34" charset="-122"/>
+                          <a:cs typeface="Calibri" pitchFamily="34" charset="-120"/>
+                        </a:rPr>
+                        <a:t>0</a:t>
+                      </a:r>
+                      <a:endParaRPr lang="en-US" sz="1050" dirty="0">
+                        <a:latin typeface="Calibri" charset="0"/>
+                        <a:ea typeface="Calibri" charset="0"/>
+                        <a:cs typeface="Calibri" charset="0"/>
+                      </a:endParaRPr>
+                    </a:p>
+                  </a:txBody>
+                  <a:tcPr marL="45720" marR="45720" marT="18288" marB="18288" anchor="ctr">
+                    <a:lnL w="12700" cap="flat" cmpd="sng" algn="ctr">
+                      <a:solidFill>
+                        <a:srgbClr val="F0DFB0"/>
+                      </a:solidFill>
+                      <a:prstDash val="solid"/>
+                      <a:round/>
+                      <a:headEnd type="none" w="med" len="med"/>
+                      <a:tailEnd type="none" w="med" len="med"/>
+                    </a:lnL>
+                    <a:lnR w="12700" cap="flat" cmpd="sng" algn="ctr">
+                      <a:solidFill>
+                        <a:srgbClr val="F0DFB0"/>
+                      </a:solidFill>
+                      <a:prstDash val="solid"/>
+                      <a:round/>
+                      <a:headEnd type="none" w="med" len="med"/>
+                      <a:tailEnd type="none" w="med" len="med"/>
+                    </a:lnR>
+                    <a:lnT w="12700" cap="flat" cmpd="sng" algn="ctr">
+                      <a:solidFill>
+                        <a:srgbClr val="F0DFB0"/>
+                      </a:solidFill>
+                      <a:prstDash val="solid"/>
+                      <a:round/>
+                      <a:headEnd type="none" w="med" len="med"/>
+                      <a:tailEnd type="none" w="med" len="med"/>
+                    </a:lnT>
+                    <a:lnB w="12700" cap="flat" cmpd="sng" algn="ctr">
+                      <a:solidFill>
+                        <a:srgbClr val="F0DFB0"/>
+                      </a:solidFill>
+                      <a:prstDash val="solid"/>
+                      <a:round/>
+                      <a:headEnd type="none" w="med" len="med"/>
+                      <a:tailEnd type="none" w="med" len="med"/>
+                    </a:lnB>
+                    <a:solidFill>
+                      <a:srgbClr val="FFFFFF"/>
+                    </a:solidFill>
+                  </a:tcPr>
+                </a:tc>
+                <a:tc>
+                  <a:txBody>
+                    <a:bodyPr/>
+                    <a:lstStyle/>
+                    <a:p>
+                      <a:pPr algn="ctr" indent="0" marL="0">
+                        <a:buNone/>
+                      </a:pPr>
+                      <a:r>
+                        <a:rPr lang="en-US" sz="1050" dirty="0">
+                          <a:solidFill>
+                            <a:srgbClr val="33344A"/>
+                          </a:solidFill>
+                          <a:latin typeface="Calibri" pitchFamily="34" charset="0"/>
+                          <a:ea typeface="Calibri" pitchFamily="34" charset="-122"/>
+                          <a:cs typeface="Calibri" pitchFamily="34" charset="-120"/>
+                        </a:rPr>
+                        <a:t>0.40</a:t>
+                      </a:r>
+                      <a:endParaRPr lang="en-US" sz="1050" dirty="0">
+                        <a:latin typeface="Calibri" charset="0"/>
+                        <a:ea typeface="Calibri" charset="0"/>
+                        <a:cs typeface="Calibri" charset="0"/>
+                      </a:endParaRPr>
+                    </a:p>
+                  </a:txBody>
+                  <a:tcPr marL="45720" marR="45720" marT="18288" marB="18288" anchor="ctr">
+                    <a:lnL w="12700" cap="flat" cmpd="sng" algn="ctr">
+                      <a:solidFill>
+                        <a:srgbClr val="F0DFB0"/>
+                      </a:solidFill>
+                      <a:prstDash val="solid"/>
+                      <a:round/>
+                      <a:headEnd type="none" w="med" len="med"/>
+                      <a:tailEnd type="none" w="med" len="med"/>
+                    </a:lnL>
+                    <a:lnR w="12700" cap="flat" cmpd="sng" algn="ctr">
+                      <a:solidFill>
+                        <a:srgbClr val="F0DFB0"/>
+                      </a:solidFill>
+                      <a:prstDash val="solid"/>
+                      <a:round/>
+                      <a:headEnd type="none" w="med" len="med"/>
+                      <a:tailEnd type="none" w="med" len="med"/>
+                    </a:lnR>
+                    <a:lnT w="12700" cap="flat" cmpd="sng" algn="ctr">
+                      <a:solidFill>
+                        <a:srgbClr val="F0DFB0"/>
+                      </a:solidFill>
+                      <a:prstDash val="solid"/>
+                      <a:round/>
+                      <a:headEnd type="none" w="med" len="med"/>
+                      <a:tailEnd type="none" w="med" len="med"/>
+                    </a:lnT>
+                    <a:lnB w="12700" cap="flat" cmpd="sng" algn="ctr">
+                      <a:solidFill>
+                        <a:srgbClr val="F0DFB0"/>
+                      </a:solidFill>
+                      <a:prstDash val="solid"/>
+                      <a:round/>
+                      <a:headEnd type="none" w="med" len="med"/>
+                      <a:tailEnd type="none" w="med" len="med"/>
+                    </a:lnB>
+                    <a:solidFill>
+                      <a:srgbClr val="FFFFFF"/>
+                    </a:solidFill>
+                  </a:tcPr>
+                </a:tc>
+              </a:tr>
+              <a:tr h="201168">
+                <a:tc>
+                  <a:txBody>
+                    <a:bodyPr/>
+                    <a:lstStyle/>
+                    <a:p>
+                      <a:pPr algn="ctr" indent="0" marL="0">
+                        <a:buNone/>
+                      </a:pPr>
+                      <a:r>
+                        <a:rPr lang="en-US" sz="1050" b="1" dirty="0">
+                          <a:solidFill>
+                            <a:srgbClr val="33344A"/>
+                          </a:solidFill>
+                          <a:latin typeface="Calibri" pitchFamily="34" charset="0"/>
+                          <a:ea typeface="Calibri" pitchFamily="34" charset="-122"/>
+                          <a:cs typeface="Calibri" pitchFamily="34" charset="-120"/>
+                        </a:rPr>
+                        <a:t>F</a:t>
+                      </a:r>
+                      <a:endParaRPr lang="en-US" sz="1050" dirty="0">
+                        <a:latin typeface="Calibri" charset="0"/>
+                        <a:ea typeface="Calibri" charset="0"/>
+                        <a:cs typeface="Calibri" charset="0"/>
+                      </a:endParaRPr>
+                    </a:p>
+                  </a:txBody>
+                  <a:tcPr marL="45720" marR="45720" marT="18288" marB="18288" anchor="ctr">
                     <a:lnL w="12700" cap="flat" cmpd="sng" algn="ctr">
                       <a:solidFill>
                         <a:srgbClr val="F0DFB0"/>
@@ -5276,436 +8017,24 @@
                         <a:buNone/>
                       </a:pPr>
                       <a:r>
-                        <a:rPr lang="en-US" sz="1100" dirty="0">
+                        <a:rPr lang="en-US" sz="1050" dirty="0">
                           <a:solidFill>
-                            <a:srgbClr val="33344A"/>
+                            <a:srgbClr val="B8892B"/>
                           </a:solidFill>
                           <a:latin typeface="Calibri" pitchFamily="34" charset="0"/>
                           <a:ea typeface="Calibri" pitchFamily="34" charset="-122"/>
                           <a:cs typeface="Calibri" pitchFamily="34" charset="-120"/>
                         </a:rPr>
-                        <a:t>0.75</a:t>
+                        <a:t>1 (new)</a:t>
                       </a:r>
-                      <a:endParaRPr lang="en-US" sz="1100" dirty="0">
+                      <a:endParaRPr lang="en-US" sz="1050" dirty="0">
                         <a:latin typeface="Calibri" charset="0"/>
                         <a:ea typeface="Calibri" charset="0"/>
                         <a:cs typeface="Calibri" charset="0"/>
                       </a:endParaRPr>
                     </a:p>
                   </a:txBody>
-                  <a:tcPr marL="73152" marR="73152" marT="36576" marB="36576" anchor="ctr">
-                    <a:lnL w="12700" cap="flat" cmpd="sng" algn="ctr">
-                      <a:solidFill>
-                        <a:srgbClr val="F0DFB0"/>
-                      </a:solidFill>
-                      <a:prstDash val="solid"/>
-                      <a:round/>
-                      <a:headEnd type="none" w="med" len="med"/>
-                      <a:tailEnd type="none" w="med" len="med"/>
-                    </a:lnL>
-                    <a:lnR w="12700" cap="flat" cmpd="sng" algn="ctr">
-                      <a:solidFill>
-                        <a:srgbClr val="F0DFB0"/>
-                      </a:solidFill>
-                      <a:prstDash val="solid"/>
-                      <a:round/>
-                      <a:headEnd type="none" w="med" len="med"/>
-                      <a:tailEnd type="none" w="med" len="med"/>
-                    </a:lnR>
-                    <a:lnT w="12700" cap="flat" cmpd="sng" algn="ctr">
-                      <a:solidFill>
-                        <a:srgbClr val="F0DFB0"/>
-                      </a:solidFill>
-                      <a:prstDash val="solid"/>
-                      <a:round/>
-                      <a:headEnd type="none" w="med" len="med"/>
-                      <a:tailEnd type="none" w="med" len="med"/>
-                    </a:lnT>
-                    <a:lnB w="12700" cap="flat" cmpd="sng" algn="ctr">
-                      <a:solidFill>
-                        <a:srgbClr val="F0DFB0"/>
-                      </a:solidFill>
-                      <a:prstDash val="solid"/>
-                      <a:round/>
-                      <a:headEnd type="none" w="med" len="med"/>
-                      <a:tailEnd type="none" w="med" len="med"/>
-                    </a:lnB>
-                    <a:solidFill>
-                      <a:srgbClr val="FBF3E1"/>
-                    </a:solidFill>
-                  </a:tcPr>
-                </a:tc>
-              </a:tr>
-              <a:tr h="244275">
-                <a:tc>
-                  <a:txBody>
-                    <a:bodyPr/>
-                    <a:lstStyle/>
-                    <a:p>
-                      <a:pPr algn="l" indent="0" marL="0">
-                        <a:buNone/>
-                      </a:pPr>
-                      <a:r>
-                        <a:rPr lang="en-US" sz="1100" b="1" dirty="0">
-                          <a:solidFill>
-                            <a:srgbClr val="33344A"/>
-                          </a:solidFill>
-                          <a:latin typeface="Calibri" pitchFamily="34" charset="0"/>
-                          <a:ea typeface="Calibri" pitchFamily="34" charset="-122"/>
-                          <a:cs typeface="Calibri" pitchFamily="34" charset="-120"/>
-                        </a:rPr>
-                        <a:t>C</a:t>
-                      </a:r>
-                      <a:endParaRPr lang="en-US" sz="1100" dirty="0">
-                        <a:latin typeface="Calibri" charset="0"/>
-                        <a:ea typeface="Calibri" charset="0"/>
-                        <a:cs typeface="Calibri" charset="0"/>
-                      </a:endParaRPr>
-                    </a:p>
-                  </a:txBody>
-                  <a:tcPr marL="73152" marR="73152" marT="36576" marB="36576" anchor="ctr">
-                    <a:lnL w="12700" cap="flat" cmpd="sng" algn="ctr">
-                      <a:solidFill>
-                        <a:srgbClr val="F0DFB0"/>
-                      </a:solidFill>
-                      <a:prstDash val="solid"/>
-                      <a:round/>
-                      <a:headEnd type="none" w="med" len="med"/>
-                      <a:tailEnd type="none" w="med" len="med"/>
-                    </a:lnL>
-                    <a:lnR w="12700" cap="flat" cmpd="sng" algn="ctr">
-                      <a:solidFill>
-                        <a:srgbClr val="F0DFB0"/>
-                      </a:solidFill>
-                      <a:prstDash val="solid"/>
-                      <a:round/>
-                      <a:headEnd type="none" w="med" len="med"/>
-                      <a:tailEnd type="none" w="med" len="med"/>
-                    </a:lnR>
-                    <a:lnT w="12700" cap="flat" cmpd="sng" algn="ctr">
-                      <a:solidFill>
-                        <a:srgbClr val="F0DFB0"/>
-                      </a:solidFill>
-                      <a:prstDash val="solid"/>
-                      <a:round/>
-                      <a:headEnd type="none" w="med" len="med"/>
-                      <a:tailEnd type="none" w="med" len="med"/>
-                    </a:lnT>
-                    <a:lnB w="12700" cap="flat" cmpd="sng" algn="ctr">
-                      <a:solidFill>
-                        <a:srgbClr val="F0DFB0"/>
-                      </a:solidFill>
-                      <a:prstDash val="solid"/>
-                      <a:round/>
-                      <a:headEnd type="none" w="med" len="med"/>
-                      <a:tailEnd type="none" w="med" len="med"/>
-                    </a:lnB>
-                    <a:solidFill>
-                      <a:srgbClr val="FFFFFF"/>
-                    </a:solidFill>
-                  </a:tcPr>
-                </a:tc>
-                <a:tc>
-                  <a:txBody>
-                    <a:bodyPr/>
-                    <a:lstStyle/>
-                    <a:p>
-                      <a:pPr algn="ctr" indent="0" marL="0">
-                        <a:buNone/>
-                      </a:pPr>
-                      <a:r>
-                        <a:rPr lang="en-US" sz="1100" dirty="0">
-                          <a:solidFill>
-                            <a:srgbClr val="1E2761"/>
-                          </a:solidFill>
-                          <a:latin typeface="Calibri" pitchFamily="34" charset="0"/>
-                          <a:ea typeface="Calibri" pitchFamily="34" charset="-122"/>
-                          <a:cs typeface="Calibri" pitchFamily="34" charset="-120"/>
-                        </a:rPr>
-                        <a:t>0 (old offer)</a:t>
-                      </a:r>
-                      <a:endParaRPr lang="en-US" sz="1100" dirty="0">
-                        <a:latin typeface="Calibri" charset="0"/>
-                        <a:ea typeface="Calibri" charset="0"/>
-                        <a:cs typeface="Calibri" charset="0"/>
-                      </a:endParaRPr>
-                    </a:p>
-                  </a:txBody>
-                  <a:tcPr marL="73152" marR="73152" marT="36576" marB="36576" anchor="ctr">
-                    <a:lnL w="12700" cap="flat" cmpd="sng" algn="ctr">
-                      <a:solidFill>
-                        <a:srgbClr val="F0DFB0"/>
-                      </a:solidFill>
-                      <a:prstDash val="solid"/>
-                      <a:round/>
-                      <a:headEnd type="none" w="med" len="med"/>
-                      <a:tailEnd type="none" w="med" len="med"/>
-                    </a:lnL>
-                    <a:lnR w="12700" cap="flat" cmpd="sng" algn="ctr">
-                      <a:solidFill>
-                        <a:srgbClr val="F0DFB0"/>
-                      </a:solidFill>
-                      <a:prstDash val="solid"/>
-                      <a:round/>
-                      <a:headEnd type="none" w="med" len="med"/>
-                      <a:tailEnd type="none" w="med" len="med"/>
-                    </a:lnR>
-                    <a:lnT w="12700" cap="flat" cmpd="sng" algn="ctr">
-                      <a:solidFill>
-                        <a:srgbClr val="F0DFB0"/>
-                      </a:solidFill>
-                      <a:prstDash val="solid"/>
-                      <a:round/>
-                      <a:headEnd type="none" w="med" len="med"/>
-                      <a:tailEnd type="none" w="med" len="med"/>
-                    </a:lnT>
-                    <a:lnB w="12700" cap="flat" cmpd="sng" algn="ctr">
-                      <a:solidFill>
-                        <a:srgbClr val="F0DFB0"/>
-                      </a:solidFill>
-                      <a:prstDash val="solid"/>
-                      <a:round/>
-                      <a:headEnd type="none" w="med" len="med"/>
-                      <a:tailEnd type="none" w="med" len="med"/>
-                    </a:lnB>
-                    <a:solidFill>
-                      <a:srgbClr val="FFFFFF"/>
-                    </a:solidFill>
-                  </a:tcPr>
-                </a:tc>
-                <a:tc>
-                  <a:txBody>
-                    <a:bodyPr/>
-                    <a:lstStyle/>
-                    <a:p>
-                      <a:pPr algn="ctr" indent="0" marL="0">
-                        <a:buNone/>
-                      </a:pPr>
-                      <a:r>
-                        <a:rPr lang="en-US" sz="1100" dirty="0">
-                          <a:solidFill>
-                            <a:srgbClr val="33344A"/>
-                          </a:solidFill>
-                          <a:latin typeface="Calibri" pitchFamily="34" charset="0"/>
-                          <a:ea typeface="Calibri" pitchFamily="34" charset="-122"/>
-                          <a:cs typeface="Calibri" pitchFamily="34" charset="-120"/>
-                        </a:rPr>
-                        <a:t>0</a:t>
-                      </a:r>
-                      <a:endParaRPr lang="en-US" sz="1100" dirty="0">
-                        <a:latin typeface="Calibri" charset="0"/>
-                        <a:ea typeface="Calibri" charset="0"/>
-                        <a:cs typeface="Calibri" charset="0"/>
-                      </a:endParaRPr>
-                    </a:p>
-                  </a:txBody>
-                  <a:tcPr marL="73152" marR="73152" marT="36576" marB="36576" anchor="ctr">
-                    <a:lnL w="12700" cap="flat" cmpd="sng" algn="ctr">
-                      <a:solidFill>
-                        <a:srgbClr val="F0DFB0"/>
-                      </a:solidFill>
-                      <a:prstDash val="solid"/>
-                      <a:round/>
-                      <a:headEnd type="none" w="med" len="med"/>
-                      <a:tailEnd type="none" w="med" len="med"/>
-                    </a:lnL>
-                    <a:lnR w="12700" cap="flat" cmpd="sng" algn="ctr">
-                      <a:solidFill>
-                        <a:srgbClr val="F0DFB0"/>
-                      </a:solidFill>
-                      <a:prstDash val="solid"/>
-                      <a:round/>
-                      <a:headEnd type="none" w="med" len="med"/>
-                      <a:tailEnd type="none" w="med" len="med"/>
-                    </a:lnR>
-                    <a:lnT w="12700" cap="flat" cmpd="sng" algn="ctr">
-                      <a:solidFill>
-                        <a:srgbClr val="F0DFB0"/>
-                      </a:solidFill>
-                      <a:prstDash val="solid"/>
-                      <a:round/>
-                      <a:headEnd type="none" w="med" len="med"/>
-                      <a:tailEnd type="none" w="med" len="med"/>
-                    </a:lnT>
-                    <a:lnB w="12700" cap="flat" cmpd="sng" algn="ctr">
-                      <a:solidFill>
-                        <a:srgbClr val="F0DFB0"/>
-                      </a:solidFill>
-                      <a:prstDash val="solid"/>
-                      <a:round/>
-                      <a:headEnd type="none" w="med" len="med"/>
-                      <a:tailEnd type="none" w="med" len="med"/>
-                    </a:lnB>
-                    <a:solidFill>
-                      <a:srgbClr val="FFFFFF"/>
-                    </a:solidFill>
-                  </a:tcPr>
-                </a:tc>
-                <a:tc>
-                  <a:txBody>
-                    <a:bodyPr/>
-                    <a:lstStyle/>
-                    <a:p>
-                      <a:pPr algn="ctr" indent="0" marL="0">
-                        <a:buNone/>
-                      </a:pPr>
-                      <a:r>
-                        <a:rPr lang="en-US" sz="1100" dirty="0">
-                          <a:solidFill>
-                            <a:srgbClr val="33344A"/>
-                          </a:solidFill>
-                          <a:latin typeface="Calibri" pitchFamily="34" charset="0"/>
-                          <a:ea typeface="Calibri" pitchFamily="34" charset="-122"/>
-                          <a:cs typeface="Calibri" pitchFamily="34" charset="-120"/>
-                        </a:rPr>
-                        <a:t>0.10</a:t>
-                      </a:r>
-                      <a:endParaRPr lang="en-US" sz="1100" dirty="0">
-                        <a:latin typeface="Calibri" charset="0"/>
-                        <a:ea typeface="Calibri" charset="0"/>
-                        <a:cs typeface="Calibri" charset="0"/>
-                      </a:endParaRPr>
-                    </a:p>
-                  </a:txBody>
-                  <a:tcPr marL="73152" marR="73152" marT="36576" marB="36576" anchor="ctr">
-                    <a:lnL w="12700" cap="flat" cmpd="sng" algn="ctr">
-                      <a:solidFill>
-                        <a:srgbClr val="F0DFB0"/>
-                      </a:solidFill>
-                      <a:prstDash val="solid"/>
-                      <a:round/>
-                      <a:headEnd type="none" w="med" len="med"/>
-                      <a:tailEnd type="none" w="med" len="med"/>
-                    </a:lnL>
-                    <a:lnR w="12700" cap="flat" cmpd="sng" algn="ctr">
-                      <a:solidFill>
-                        <a:srgbClr val="F0DFB0"/>
-                      </a:solidFill>
-                      <a:prstDash val="solid"/>
-                      <a:round/>
-                      <a:headEnd type="none" w="med" len="med"/>
-                      <a:tailEnd type="none" w="med" len="med"/>
-                    </a:lnR>
-                    <a:lnT w="12700" cap="flat" cmpd="sng" algn="ctr">
-                      <a:solidFill>
-                        <a:srgbClr val="F0DFB0"/>
-                      </a:solidFill>
-                      <a:prstDash val="solid"/>
-                      <a:round/>
-                      <a:headEnd type="none" w="med" len="med"/>
-                      <a:tailEnd type="none" w="med" len="med"/>
-                    </a:lnT>
-                    <a:lnB w="12700" cap="flat" cmpd="sng" algn="ctr">
-                      <a:solidFill>
-                        <a:srgbClr val="F0DFB0"/>
-                      </a:solidFill>
-                      <a:prstDash val="solid"/>
-                      <a:round/>
-                      <a:headEnd type="none" w="med" len="med"/>
-                      <a:tailEnd type="none" w="med" len="med"/>
-                    </a:lnB>
-                    <a:solidFill>
-                      <a:srgbClr val="FFFFFF"/>
-                    </a:solidFill>
-                  </a:tcPr>
-                </a:tc>
-                <a:tc>
-                  <a:txBody>
-                    <a:bodyPr/>
-                    <a:lstStyle/>
-                    <a:p>
-                      <a:pPr algn="ctr" indent="0" marL="0">
-                        <a:buNone/>
-                      </a:pPr>
-                      <a:r>
-                        <a:rPr lang="en-US" sz="1100" dirty="0">
-                          <a:solidFill>
-                            <a:srgbClr val="33344A"/>
-                          </a:solidFill>
-                          <a:latin typeface="Calibri" pitchFamily="34" charset="0"/>
-                          <a:ea typeface="Calibri" pitchFamily="34" charset="-122"/>
-                          <a:cs typeface="Calibri" pitchFamily="34" charset="-120"/>
-                        </a:rPr>
-                        <a:t>0.30</a:t>
-                      </a:r>
-                      <a:endParaRPr lang="en-US" sz="1100" dirty="0">
-                        <a:latin typeface="Calibri" charset="0"/>
-                        <a:ea typeface="Calibri" charset="0"/>
-                        <a:cs typeface="Calibri" charset="0"/>
-                      </a:endParaRPr>
-                    </a:p>
-                  </a:txBody>
-                  <a:tcPr marL="73152" marR="73152" marT="36576" marB="36576" anchor="ctr">
-                    <a:lnL w="12700" cap="flat" cmpd="sng" algn="ctr">
-                      <a:solidFill>
-                        <a:srgbClr val="F0DFB0"/>
-                      </a:solidFill>
-                      <a:prstDash val="solid"/>
-                      <a:round/>
-                      <a:headEnd type="none" w="med" len="med"/>
-                      <a:tailEnd type="none" w="med" len="med"/>
-                    </a:lnL>
-                    <a:lnR w="12700" cap="flat" cmpd="sng" algn="ctr">
-                      <a:solidFill>
-                        <a:srgbClr val="F0DFB0"/>
-                      </a:solidFill>
-                      <a:prstDash val="solid"/>
-                      <a:round/>
-                      <a:headEnd type="none" w="med" len="med"/>
-                      <a:tailEnd type="none" w="med" len="med"/>
-                    </a:lnR>
-                    <a:lnT w="12700" cap="flat" cmpd="sng" algn="ctr">
-                      <a:solidFill>
-                        <a:srgbClr val="F0DFB0"/>
-                      </a:solidFill>
-                      <a:prstDash val="solid"/>
-                      <a:round/>
-                      <a:headEnd type="none" w="med" len="med"/>
-                      <a:tailEnd type="none" w="med" len="med"/>
-                    </a:lnT>
-                    <a:lnB w="12700" cap="flat" cmpd="sng" algn="ctr">
-                      <a:solidFill>
-                        <a:srgbClr val="F0DFB0"/>
-                      </a:solidFill>
-                      <a:prstDash val="solid"/>
-                      <a:round/>
-                      <a:headEnd type="none" w="med" len="med"/>
-                      <a:tailEnd type="none" w="med" len="med"/>
-                    </a:lnB>
-                    <a:solidFill>
-                      <a:srgbClr val="FFFFFF"/>
-                    </a:solidFill>
-                  </a:tcPr>
-                </a:tc>
-              </a:tr>
-              <a:tr h="244275">
-                <a:tc>
-                  <a:txBody>
-                    <a:bodyPr/>
-                    <a:lstStyle/>
-                    <a:p>
-                      <a:pPr algn="l" indent="0" marL="0">
-                        <a:buNone/>
-                      </a:pPr>
-                      <a:r>
-                        <a:rPr lang="en-US" sz="1100" b="1" dirty="0">
-                          <a:solidFill>
-                            <a:srgbClr val="33344A"/>
-                          </a:solidFill>
-                          <a:latin typeface="Calibri" pitchFamily="34" charset="0"/>
-                          <a:ea typeface="Calibri" pitchFamily="34" charset="-122"/>
-                          <a:cs typeface="Calibri" pitchFamily="34" charset="-120"/>
-                        </a:rPr>
-                        <a:t>D</a:t>
-                      </a:r>
-                      <a:endParaRPr lang="en-US" sz="1100" dirty="0">
-                        <a:latin typeface="Calibri" charset="0"/>
-                        <a:ea typeface="Calibri" charset="0"/>
-                        <a:cs typeface="Calibri" charset="0"/>
-                      </a:endParaRPr>
-                    </a:p>
-                  </a:txBody>
-                  <a:tcPr marL="73152" marR="73152" marT="36576" marB="36576" anchor="ctr">
+                  <a:tcPr marL="45720" marR="45720" marT="18288" marB="18288" anchor="ctr">
                     <a:lnL w="12700" cap="flat" cmpd="sng" algn="ctr">
                       <a:solidFill>
                         <a:srgbClr val="F0DFB0"/>
@@ -5756,24 +8085,24 @@
                         <a:buNone/>
                       </a:pPr>
                       <a:r>
-                        <a:rPr lang="en-US" sz="1100" dirty="0">
+                        <a:rPr lang="en-US" sz="1050" dirty="0">
                           <a:solidFill>
-                            <a:srgbClr val="B8892B"/>
+                            <a:srgbClr val="33344A"/>
                           </a:solidFill>
                           <a:latin typeface="Calibri" pitchFamily="34" charset="0"/>
                           <a:ea typeface="Calibri" pitchFamily="34" charset="-122"/>
                           <a:cs typeface="Calibri" pitchFamily="34" charset="-120"/>
                         </a:rPr>
-                        <a:t>1 (new offer)</a:t>
+                        <a:t>1</a:t>
                       </a:r>
-                      <a:endParaRPr lang="en-US" sz="1100" dirty="0">
+                      <a:endParaRPr lang="en-US" sz="1050" dirty="0">
                         <a:latin typeface="Calibri" charset="0"/>
                         <a:ea typeface="Calibri" charset="0"/>
                         <a:cs typeface="Calibri" charset="0"/>
                       </a:endParaRPr>
                     </a:p>
                   </a:txBody>
-                  <a:tcPr marL="73152" marR="73152" marT="36576" marB="36576" anchor="ctr">
+                  <a:tcPr marL="45720" marR="45720" marT="18288" marB="18288" anchor="ctr">
                     <a:lnL w="12700" cap="flat" cmpd="sng" algn="ctr">
                       <a:solidFill>
                         <a:srgbClr val="F0DFB0"/>
@@ -5824,827 +8153,7 @@
                         <a:buNone/>
                       </a:pPr>
                       <a:r>
-                        <a:rPr lang="en-US" sz="1100" dirty="0">
-                          <a:solidFill>
-                            <a:srgbClr val="33344A"/>
-                          </a:solidFill>
-                          <a:latin typeface="Calibri" pitchFamily="34" charset="0"/>
-                          <a:ea typeface="Calibri" pitchFamily="34" charset="-122"/>
-                          <a:cs typeface="Calibri" pitchFamily="34" charset="-120"/>
-                        </a:rPr>
-                        <a:t>1</a:t>
-                      </a:r>
-                      <a:endParaRPr lang="en-US" sz="1100" dirty="0">
-                        <a:latin typeface="Calibri" charset="0"/>
-                        <a:ea typeface="Calibri" charset="0"/>
-                        <a:cs typeface="Calibri" charset="0"/>
-                      </a:endParaRPr>
-                    </a:p>
-                  </a:txBody>
-                  <a:tcPr marL="73152" marR="73152" marT="36576" marB="36576" anchor="ctr">
-                    <a:lnL w="12700" cap="flat" cmpd="sng" algn="ctr">
-                      <a:solidFill>
-                        <a:srgbClr val="F0DFB0"/>
-                      </a:solidFill>
-                      <a:prstDash val="solid"/>
-                      <a:round/>
-                      <a:headEnd type="none" w="med" len="med"/>
-                      <a:tailEnd type="none" w="med" len="med"/>
-                    </a:lnL>
-                    <a:lnR w="12700" cap="flat" cmpd="sng" algn="ctr">
-                      <a:solidFill>
-                        <a:srgbClr val="F0DFB0"/>
-                      </a:solidFill>
-                      <a:prstDash val="solid"/>
-                      <a:round/>
-                      <a:headEnd type="none" w="med" len="med"/>
-                      <a:tailEnd type="none" w="med" len="med"/>
-                    </a:lnR>
-                    <a:lnT w="12700" cap="flat" cmpd="sng" algn="ctr">
-                      <a:solidFill>
-                        <a:srgbClr val="F0DFB0"/>
-                      </a:solidFill>
-                      <a:prstDash val="solid"/>
-                      <a:round/>
-                      <a:headEnd type="none" w="med" len="med"/>
-                      <a:tailEnd type="none" w="med" len="med"/>
-                    </a:lnT>
-                    <a:lnB w="12700" cap="flat" cmpd="sng" algn="ctr">
-                      <a:solidFill>
-                        <a:srgbClr val="F0DFB0"/>
-                      </a:solidFill>
-                      <a:prstDash val="solid"/>
-                      <a:round/>
-                      <a:headEnd type="none" w="med" len="med"/>
-                      <a:tailEnd type="none" w="med" len="med"/>
-                    </a:lnB>
-                    <a:solidFill>
-                      <a:srgbClr val="FBF3E1"/>
-                    </a:solidFill>
-                  </a:tcPr>
-                </a:tc>
-                <a:tc>
-                  <a:txBody>
-                    <a:bodyPr/>
-                    <a:lstStyle/>
-                    <a:p>
-                      <a:pPr algn="ctr" indent="0" marL="0">
-                        <a:buNone/>
-                      </a:pPr>
-                      <a:r>
-                        <a:rPr lang="en-US" sz="1100" dirty="0">
-                          <a:solidFill>
-                            <a:srgbClr val="33344A"/>
-                          </a:solidFill>
-                          <a:latin typeface="Calibri" pitchFamily="34" charset="0"/>
-                          <a:ea typeface="Calibri" pitchFamily="34" charset="-122"/>
-                          <a:cs typeface="Calibri" pitchFamily="34" charset="-120"/>
-                        </a:rPr>
-                        <a:t>0.35</a:t>
-                      </a:r>
-                      <a:endParaRPr lang="en-US" sz="1100" dirty="0">
-                        <a:latin typeface="Calibri" charset="0"/>
-                        <a:ea typeface="Calibri" charset="0"/>
-                        <a:cs typeface="Calibri" charset="0"/>
-                      </a:endParaRPr>
-                    </a:p>
-                  </a:txBody>
-                  <a:tcPr marL="73152" marR="73152" marT="36576" marB="36576" anchor="ctr">
-                    <a:lnL w="12700" cap="flat" cmpd="sng" algn="ctr">
-                      <a:solidFill>
-                        <a:srgbClr val="F0DFB0"/>
-                      </a:solidFill>
-                      <a:prstDash val="solid"/>
-                      <a:round/>
-                      <a:headEnd type="none" w="med" len="med"/>
-                      <a:tailEnd type="none" w="med" len="med"/>
-                    </a:lnL>
-                    <a:lnR w="12700" cap="flat" cmpd="sng" algn="ctr">
-                      <a:solidFill>
-                        <a:srgbClr val="F0DFB0"/>
-                      </a:solidFill>
-                      <a:prstDash val="solid"/>
-                      <a:round/>
-                      <a:headEnd type="none" w="med" len="med"/>
-                      <a:tailEnd type="none" w="med" len="med"/>
-                    </a:lnR>
-                    <a:lnT w="12700" cap="flat" cmpd="sng" algn="ctr">
-                      <a:solidFill>
-                        <a:srgbClr val="F0DFB0"/>
-                      </a:solidFill>
-                      <a:prstDash val="solid"/>
-                      <a:round/>
-                      <a:headEnd type="none" w="med" len="med"/>
-                      <a:tailEnd type="none" w="med" len="med"/>
-                    </a:lnT>
-                    <a:lnB w="12700" cap="flat" cmpd="sng" algn="ctr">
-                      <a:solidFill>
-                        <a:srgbClr val="F0DFB0"/>
-                      </a:solidFill>
-                      <a:prstDash val="solid"/>
-                      <a:round/>
-                      <a:headEnd type="none" w="med" len="med"/>
-                      <a:tailEnd type="none" w="med" len="med"/>
-                    </a:lnB>
-                    <a:solidFill>
-                      <a:srgbClr val="FBF3E1"/>
-                    </a:solidFill>
-                  </a:tcPr>
-                </a:tc>
-                <a:tc>
-                  <a:txBody>
-                    <a:bodyPr/>
-                    <a:lstStyle/>
-                    <a:p>
-                      <a:pPr algn="ctr" indent="0" marL="0">
-                        <a:buNone/>
-                      </a:pPr>
-                      <a:r>
-                        <a:rPr lang="en-US" sz="1100" dirty="0">
-                          <a:solidFill>
-                            <a:srgbClr val="33344A"/>
-                          </a:solidFill>
-                          <a:latin typeface="Calibri" pitchFamily="34" charset="0"/>
-                          <a:ea typeface="Calibri" pitchFamily="34" charset="-122"/>
-                          <a:cs typeface="Calibri" pitchFamily="34" charset="-120"/>
-                        </a:rPr>
-                        <a:t>0.80</a:t>
-                      </a:r>
-                      <a:endParaRPr lang="en-US" sz="1100" dirty="0">
-                        <a:latin typeface="Calibri" charset="0"/>
-                        <a:ea typeface="Calibri" charset="0"/>
-                        <a:cs typeface="Calibri" charset="0"/>
-                      </a:endParaRPr>
-                    </a:p>
-                  </a:txBody>
-                  <a:tcPr marL="73152" marR="73152" marT="36576" marB="36576" anchor="ctr">
-                    <a:lnL w="12700" cap="flat" cmpd="sng" algn="ctr">
-                      <a:solidFill>
-                        <a:srgbClr val="F0DFB0"/>
-                      </a:solidFill>
-                      <a:prstDash val="solid"/>
-                      <a:round/>
-                      <a:headEnd type="none" w="med" len="med"/>
-                      <a:tailEnd type="none" w="med" len="med"/>
-                    </a:lnL>
-                    <a:lnR w="12700" cap="flat" cmpd="sng" algn="ctr">
-                      <a:solidFill>
-                        <a:srgbClr val="F0DFB0"/>
-                      </a:solidFill>
-                      <a:prstDash val="solid"/>
-                      <a:round/>
-                      <a:headEnd type="none" w="med" len="med"/>
-                      <a:tailEnd type="none" w="med" len="med"/>
-                    </a:lnR>
-                    <a:lnT w="12700" cap="flat" cmpd="sng" algn="ctr">
-                      <a:solidFill>
-                        <a:srgbClr val="F0DFB0"/>
-                      </a:solidFill>
-                      <a:prstDash val="solid"/>
-                      <a:round/>
-                      <a:headEnd type="none" w="med" len="med"/>
-                      <a:tailEnd type="none" w="med" len="med"/>
-                    </a:lnT>
-                    <a:lnB w="12700" cap="flat" cmpd="sng" algn="ctr">
-                      <a:solidFill>
-                        <a:srgbClr val="F0DFB0"/>
-                      </a:solidFill>
-                      <a:prstDash val="solid"/>
-                      <a:round/>
-                      <a:headEnd type="none" w="med" len="med"/>
-                      <a:tailEnd type="none" w="med" len="med"/>
-                    </a:lnB>
-                    <a:solidFill>
-                      <a:srgbClr val="FBF3E1"/>
-                    </a:solidFill>
-                  </a:tcPr>
-                </a:tc>
-              </a:tr>
-              <a:tr h="244275">
-                <a:tc>
-                  <a:txBody>
-                    <a:bodyPr/>
-                    <a:lstStyle/>
-                    <a:p>
-                      <a:pPr algn="l" indent="0" marL="0">
-                        <a:buNone/>
-                      </a:pPr>
-                      <a:r>
-                        <a:rPr lang="en-US" sz="1100" b="1" dirty="0">
-                          <a:solidFill>
-                            <a:srgbClr val="33344A"/>
-                          </a:solidFill>
-                          <a:latin typeface="Calibri" pitchFamily="34" charset="0"/>
-                          <a:ea typeface="Calibri" pitchFamily="34" charset="-122"/>
-                          <a:cs typeface="Calibri" pitchFamily="34" charset="-120"/>
-                        </a:rPr>
-                        <a:t>E</a:t>
-                      </a:r>
-                      <a:endParaRPr lang="en-US" sz="1100" dirty="0">
-                        <a:latin typeface="Calibri" charset="0"/>
-                        <a:ea typeface="Calibri" charset="0"/>
-                        <a:cs typeface="Calibri" charset="0"/>
-                      </a:endParaRPr>
-                    </a:p>
-                  </a:txBody>
-                  <a:tcPr marL="73152" marR="73152" marT="36576" marB="36576" anchor="ctr">
-                    <a:lnL w="12700" cap="flat" cmpd="sng" algn="ctr">
-                      <a:solidFill>
-                        <a:srgbClr val="F0DFB0"/>
-                      </a:solidFill>
-                      <a:prstDash val="solid"/>
-                      <a:round/>
-                      <a:headEnd type="none" w="med" len="med"/>
-                      <a:tailEnd type="none" w="med" len="med"/>
-                    </a:lnL>
-                    <a:lnR w="12700" cap="flat" cmpd="sng" algn="ctr">
-                      <a:solidFill>
-                        <a:srgbClr val="F0DFB0"/>
-                      </a:solidFill>
-                      <a:prstDash val="solid"/>
-                      <a:round/>
-                      <a:headEnd type="none" w="med" len="med"/>
-                      <a:tailEnd type="none" w="med" len="med"/>
-                    </a:lnR>
-                    <a:lnT w="12700" cap="flat" cmpd="sng" algn="ctr">
-                      <a:solidFill>
-                        <a:srgbClr val="F0DFB0"/>
-                      </a:solidFill>
-                      <a:prstDash val="solid"/>
-                      <a:round/>
-                      <a:headEnd type="none" w="med" len="med"/>
-                      <a:tailEnd type="none" w="med" len="med"/>
-                    </a:lnT>
-                    <a:lnB w="12700" cap="flat" cmpd="sng" algn="ctr">
-                      <a:solidFill>
-                        <a:srgbClr val="F0DFB0"/>
-                      </a:solidFill>
-                      <a:prstDash val="solid"/>
-                      <a:round/>
-                      <a:headEnd type="none" w="med" len="med"/>
-                      <a:tailEnd type="none" w="med" len="med"/>
-                    </a:lnB>
-                    <a:solidFill>
-                      <a:srgbClr val="FFFFFF"/>
-                    </a:solidFill>
-                  </a:tcPr>
-                </a:tc>
-                <a:tc>
-                  <a:txBody>
-                    <a:bodyPr/>
-                    <a:lstStyle/>
-                    <a:p>
-                      <a:pPr algn="ctr" indent="0" marL="0">
-                        <a:buNone/>
-                      </a:pPr>
-                      <a:r>
-                        <a:rPr lang="en-US" sz="1100" dirty="0">
-                          <a:solidFill>
-                            <a:srgbClr val="B8892B"/>
-                          </a:solidFill>
-                          <a:latin typeface="Calibri" pitchFamily="34" charset="0"/>
-                          <a:ea typeface="Calibri" pitchFamily="34" charset="-122"/>
-                          <a:cs typeface="Calibri" pitchFamily="34" charset="-120"/>
-                        </a:rPr>
-                        <a:t>1 (new offer)</a:t>
-                      </a:r>
-                      <a:endParaRPr lang="en-US" sz="1100" dirty="0">
-                        <a:latin typeface="Calibri" charset="0"/>
-                        <a:ea typeface="Calibri" charset="0"/>
-                        <a:cs typeface="Calibri" charset="0"/>
-                      </a:endParaRPr>
-                    </a:p>
-                  </a:txBody>
-                  <a:tcPr marL="73152" marR="73152" marT="36576" marB="36576" anchor="ctr">
-                    <a:lnL w="12700" cap="flat" cmpd="sng" algn="ctr">
-                      <a:solidFill>
-                        <a:srgbClr val="F0DFB0"/>
-                      </a:solidFill>
-                      <a:prstDash val="solid"/>
-                      <a:round/>
-                      <a:headEnd type="none" w="med" len="med"/>
-                      <a:tailEnd type="none" w="med" len="med"/>
-                    </a:lnL>
-                    <a:lnR w="12700" cap="flat" cmpd="sng" algn="ctr">
-                      <a:solidFill>
-                        <a:srgbClr val="F0DFB0"/>
-                      </a:solidFill>
-                      <a:prstDash val="solid"/>
-                      <a:round/>
-                      <a:headEnd type="none" w="med" len="med"/>
-                      <a:tailEnd type="none" w="med" len="med"/>
-                    </a:lnR>
-                    <a:lnT w="12700" cap="flat" cmpd="sng" algn="ctr">
-                      <a:solidFill>
-                        <a:srgbClr val="F0DFB0"/>
-                      </a:solidFill>
-                      <a:prstDash val="solid"/>
-                      <a:round/>
-                      <a:headEnd type="none" w="med" len="med"/>
-                      <a:tailEnd type="none" w="med" len="med"/>
-                    </a:lnT>
-                    <a:lnB w="12700" cap="flat" cmpd="sng" algn="ctr">
-                      <a:solidFill>
-                        <a:srgbClr val="F0DFB0"/>
-                      </a:solidFill>
-                      <a:prstDash val="solid"/>
-                      <a:round/>
-                      <a:headEnd type="none" w="med" len="med"/>
-                      <a:tailEnd type="none" w="med" len="med"/>
-                    </a:lnB>
-                    <a:solidFill>
-                      <a:srgbClr val="FFFFFF"/>
-                    </a:solidFill>
-                  </a:tcPr>
-                </a:tc>
-                <a:tc>
-                  <a:txBody>
-                    <a:bodyPr/>
-                    <a:lstStyle/>
-                    <a:p>
-                      <a:pPr algn="ctr" indent="0" marL="0">
-                        <a:buNone/>
-                      </a:pPr>
-                      <a:r>
-                        <a:rPr lang="en-US" sz="1100" dirty="0">
-                          <a:solidFill>
-                            <a:srgbClr val="33344A"/>
-                          </a:solidFill>
-                          <a:latin typeface="Calibri" pitchFamily="34" charset="0"/>
-                          <a:ea typeface="Calibri" pitchFamily="34" charset="-122"/>
-                          <a:cs typeface="Calibri" pitchFamily="34" charset="-120"/>
-                        </a:rPr>
-                        <a:t>0</a:t>
-                      </a:r>
-                      <a:endParaRPr lang="en-US" sz="1100" dirty="0">
-                        <a:latin typeface="Calibri" charset="0"/>
-                        <a:ea typeface="Calibri" charset="0"/>
-                        <a:cs typeface="Calibri" charset="0"/>
-                      </a:endParaRPr>
-                    </a:p>
-                  </a:txBody>
-                  <a:tcPr marL="73152" marR="73152" marT="36576" marB="36576" anchor="ctr">
-                    <a:lnL w="12700" cap="flat" cmpd="sng" algn="ctr">
-                      <a:solidFill>
-                        <a:srgbClr val="F0DFB0"/>
-                      </a:solidFill>
-                      <a:prstDash val="solid"/>
-                      <a:round/>
-                      <a:headEnd type="none" w="med" len="med"/>
-                      <a:tailEnd type="none" w="med" len="med"/>
-                    </a:lnL>
-                    <a:lnR w="12700" cap="flat" cmpd="sng" algn="ctr">
-                      <a:solidFill>
-                        <a:srgbClr val="F0DFB0"/>
-                      </a:solidFill>
-                      <a:prstDash val="solid"/>
-                      <a:round/>
-                      <a:headEnd type="none" w="med" len="med"/>
-                      <a:tailEnd type="none" w="med" len="med"/>
-                    </a:lnR>
-                    <a:lnT w="12700" cap="flat" cmpd="sng" algn="ctr">
-                      <a:solidFill>
-                        <a:srgbClr val="F0DFB0"/>
-                      </a:solidFill>
-                      <a:prstDash val="solid"/>
-                      <a:round/>
-                      <a:headEnd type="none" w="med" len="med"/>
-                      <a:tailEnd type="none" w="med" len="med"/>
-                    </a:lnT>
-                    <a:lnB w="12700" cap="flat" cmpd="sng" algn="ctr">
-                      <a:solidFill>
-                        <a:srgbClr val="F0DFB0"/>
-                      </a:solidFill>
-                      <a:prstDash val="solid"/>
-                      <a:round/>
-                      <a:headEnd type="none" w="med" len="med"/>
-                      <a:tailEnd type="none" w="med" len="med"/>
-                    </a:lnB>
-                    <a:solidFill>
-                      <a:srgbClr val="FFFFFF"/>
-                    </a:solidFill>
-                  </a:tcPr>
-                </a:tc>
-                <a:tc>
-                  <a:txBody>
-                    <a:bodyPr/>
-                    <a:lstStyle/>
-                    <a:p>
-                      <a:pPr algn="ctr" indent="0" marL="0">
-                        <a:buNone/>
-                      </a:pPr>
-                      <a:r>
-                        <a:rPr lang="en-US" sz="1100" dirty="0">
-                          <a:solidFill>
-                            <a:srgbClr val="33344A"/>
-                          </a:solidFill>
-                          <a:latin typeface="Calibri" pitchFamily="34" charset="0"/>
-                          <a:ea typeface="Calibri" pitchFamily="34" charset="-122"/>
-                          <a:cs typeface="Calibri" pitchFamily="34" charset="-120"/>
-                        </a:rPr>
-                        <a:t>0.25</a:t>
-                      </a:r>
-                      <a:endParaRPr lang="en-US" sz="1100" dirty="0">
-                        <a:latin typeface="Calibri" charset="0"/>
-                        <a:ea typeface="Calibri" charset="0"/>
-                        <a:cs typeface="Calibri" charset="0"/>
-                      </a:endParaRPr>
-                    </a:p>
-                  </a:txBody>
-                  <a:tcPr marL="73152" marR="73152" marT="36576" marB="36576" anchor="ctr">
-                    <a:lnL w="12700" cap="flat" cmpd="sng" algn="ctr">
-                      <a:solidFill>
-                        <a:srgbClr val="F0DFB0"/>
-                      </a:solidFill>
-                      <a:prstDash val="solid"/>
-                      <a:round/>
-                      <a:headEnd type="none" w="med" len="med"/>
-                      <a:tailEnd type="none" w="med" len="med"/>
-                    </a:lnL>
-                    <a:lnR w="12700" cap="flat" cmpd="sng" algn="ctr">
-                      <a:solidFill>
-                        <a:srgbClr val="F0DFB0"/>
-                      </a:solidFill>
-                      <a:prstDash val="solid"/>
-                      <a:round/>
-                      <a:headEnd type="none" w="med" len="med"/>
-                      <a:tailEnd type="none" w="med" len="med"/>
-                    </a:lnR>
-                    <a:lnT w="12700" cap="flat" cmpd="sng" algn="ctr">
-                      <a:solidFill>
-                        <a:srgbClr val="F0DFB0"/>
-                      </a:solidFill>
-                      <a:prstDash val="solid"/>
-                      <a:round/>
-                      <a:headEnd type="none" w="med" len="med"/>
-                      <a:tailEnd type="none" w="med" len="med"/>
-                    </a:lnT>
-                    <a:lnB w="12700" cap="flat" cmpd="sng" algn="ctr">
-                      <a:solidFill>
-                        <a:srgbClr val="F0DFB0"/>
-                      </a:solidFill>
-                      <a:prstDash val="solid"/>
-                      <a:round/>
-                      <a:headEnd type="none" w="med" len="med"/>
-                      <a:tailEnd type="none" w="med" len="med"/>
-                    </a:lnB>
-                    <a:solidFill>
-                      <a:srgbClr val="FFFFFF"/>
-                    </a:solidFill>
-                  </a:tcPr>
-                </a:tc>
-                <a:tc>
-                  <a:txBody>
-                    <a:bodyPr/>
-                    <a:lstStyle/>
-                    <a:p>
-                      <a:pPr algn="ctr" indent="0" marL="0">
-                        <a:buNone/>
-                      </a:pPr>
-                      <a:r>
-                        <a:rPr lang="en-US" sz="1100" dirty="0">
-                          <a:solidFill>
-                            <a:srgbClr val="33344A"/>
-                          </a:solidFill>
-                          <a:latin typeface="Calibri" pitchFamily="34" charset="0"/>
-                          <a:ea typeface="Calibri" pitchFamily="34" charset="-122"/>
-                          <a:cs typeface="Calibri" pitchFamily="34" charset="-120"/>
-                        </a:rPr>
-                        <a:t>0.40</a:t>
-                      </a:r>
-                      <a:endParaRPr lang="en-US" sz="1100" dirty="0">
-                        <a:latin typeface="Calibri" charset="0"/>
-                        <a:ea typeface="Calibri" charset="0"/>
-                        <a:cs typeface="Calibri" charset="0"/>
-                      </a:endParaRPr>
-                    </a:p>
-                  </a:txBody>
-                  <a:tcPr marL="73152" marR="73152" marT="36576" marB="36576" anchor="ctr">
-                    <a:lnL w="12700" cap="flat" cmpd="sng" algn="ctr">
-                      <a:solidFill>
-                        <a:srgbClr val="F0DFB0"/>
-                      </a:solidFill>
-                      <a:prstDash val="solid"/>
-                      <a:round/>
-                      <a:headEnd type="none" w="med" len="med"/>
-                      <a:tailEnd type="none" w="med" len="med"/>
-                    </a:lnL>
-                    <a:lnR w="12700" cap="flat" cmpd="sng" algn="ctr">
-                      <a:solidFill>
-                        <a:srgbClr val="F0DFB0"/>
-                      </a:solidFill>
-                      <a:prstDash val="solid"/>
-                      <a:round/>
-                      <a:headEnd type="none" w="med" len="med"/>
-                      <a:tailEnd type="none" w="med" len="med"/>
-                    </a:lnR>
-                    <a:lnT w="12700" cap="flat" cmpd="sng" algn="ctr">
-                      <a:solidFill>
-                        <a:srgbClr val="F0DFB0"/>
-                      </a:solidFill>
-                      <a:prstDash val="solid"/>
-                      <a:round/>
-                      <a:headEnd type="none" w="med" len="med"/>
-                      <a:tailEnd type="none" w="med" len="med"/>
-                    </a:lnT>
-                    <a:lnB w="12700" cap="flat" cmpd="sng" algn="ctr">
-                      <a:solidFill>
-                        <a:srgbClr val="F0DFB0"/>
-                      </a:solidFill>
-                      <a:prstDash val="solid"/>
-                      <a:round/>
-                      <a:headEnd type="none" w="med" len="med"/>
-                      <a:tailEnd type="none" w="med" len="med"/>
-                    </a:lnB>
-                    <a:solidFill>
-                      <a:srgbClr val="FFFFFF"/>
-                    </a:solidFill>
-                  </a:tcPr>
-                </a:tc>
-              </a:tr>
-              <a:tr h="244275">
-                <a:tc>
-                  <a:txBody>
-                    <a:bodyPr/>
-                    <a:lstStyle/>
-                    <a:p>
-                      <a:pPr algn="l" indent="0" marL="0">
-                        <a:buNone/>
-                      </a:pPr>
-                      <a:r>
-                        <a:rPr lang="en-US" sz="1100" b="1" dirty="0">
-                          <a:solidFill>
-                            <a:srgbClr val="33344A"/>
-                          </a:solidFill>
-                          <a:latin typeface="Calibri" pitchFamily="34" charset="0"/>
-                          <a:ea typeface="Calibri" pitchFamily="34" charset="-122"/>
-                          <a:cs typeface="Calibri" pitchFamily="34" charset="-120"/>
-                        </a:rPr>
-                        <a:t>F</a:t>
-                      </a:r>
-                      <a:endParaRPr lang="en-US" sz="1100" dirty="0">
-                        <a:latin typeface="Calibri" charset="0"/>
-                        <a:ea typeface="Calibri" charset="0"/>
-                        <a:cs typeface="Calibri" charset="0"/>
-                      </a:endParaRPr>
-                    </a:p>
-                  </a:txBody>
-                  <a:tcPr marL="73152" marR="73152" marT="36576" marB="36576" anchor="ctr">
-                    <a:lnL w="12700" cap="flat" cmpd="sng" algn="ctr">
-                      <a:solidFill>
-                        <a:srgbClr val="F0DFB0"/>
-                      </a:solidFill>
-                      <a:prstDash val="solid"/>
-                      <a:round/>
-                      <a:headEnd type="none" w="med" len="med"/>
-                      <a:tailEnd type="none" w="med" len="med"/>
-                    </a:lnL>
-                    <a:lnR w="12700" cap="flat" cmpd="sng" algn="ctr">
-                      <a:solidFill>
-                        <a:srgbClr val="F0DFB0"/>
-                      </a:solidFill>
-                      <a:prstDash val="solid"/>
-                      <a:round/>
-                      <a:headEnd type="none" w="med" len="med"/>
-                      <a:tailEnd type="none" w="med" len="med"/>
-                    </a:lnR>
-                    <a:lnT w="12700" cap="flat" cmpd="sng" algn="ctr">
-                      <a:solidFill>
-                        <a:srgbClr val="F0DFB0"/>
-                      </a:solidFill>
-                      <a:prstDash val="solid"/>
-                      <a:round/>
-                      <a:headEnd type="none" w="med" len="med"/>
-                      <a:tailEnd type="none" w="med" len="med"/>
-                    </a:lnT>
-                    <a:lnB w="12700" cap="flat" cmpd="sng" algn="ctr">
-                      <a:solidFill>
-                        <a:srgbClr val="F0DFB0"/>
-                      </a:solidFill>
-                      <a:prstDash val="solid"/>
-                      <a:round/>
-                      <a:headEnd type="none" w="med" len="med"/>
-                      <a:tailEnd type="none" w="med" len="med"/>
-                    </a:lnB>
-                    <a:solidFill>
-                      <a:srgbClr val="FBF3E1"/>
-                    </a:solidFill>
-                  </a:tcPr>
-                </a:tc>
-                <a:tc>
-                  <a:txBody>
-                    <a:bodyPr/>
-                    <a:lstStyle/>
-                    <a:p>
-                      <a:pPr algn="ctr" indent="0" marL="0">
-                        <a:buNone/>
-                      </a:pPr>
-                      <a:r>
-                        <a:rPr lang="en-US" sz="1100" dirty="0">
-                          <a:solidFill>
-                            <a:srgbClr val="B8892B"/>
-                          </a:solidFill>
-                          <a:latin typeface="Calibri" pitchFamily="34" charset="0"/>
-                          <a:ea typeface="Calibri" pitchFamily="34" charset="-122"/>
-                          <a:cs typeface="Calibri" pitchFamily="34" charset="-120"/>
-                        </a:rPr>
-                        <a:t>1 (new offer)</a:t>
-                      </a:r>
-                      <a:endParaRPr lang="en-US" sz="1100" dirty="0">
-                        <a:latin typeface="Calibri" charset="0"/>
-                        <a:ea typeface="Calibri" charset="0"/>
-                        <a:cs typeface="Calibri" charset="0"/>
-                      </a:endParaRPr>
-                    </a:p>
-                  </a:txBody>
-                  <a:tcPr marL="73152" marR="73152" marT="36576" marB="36576" anchor="ctr">
-                    <a:lnL w="12700" cap="flat" cmpd="sng" algn="ctr">
-                      <a:solidFill>
-                        <a:srgbClr val="F0DFB0"/>
-                      </a:solidFill>
-                      <a:prstDash val="solid"/>
-                      <a:round/>
-                      <a:headEnd type="none" w="med" len="med"/>
-                      <a:tailEnd type="none" w="med" len="med"/>
-                    </a:lnL>
-                    <a:lnR w="12700" cap="flat" cmpd="sng" algn="ctr">
-                      <a:solidFill>
-                        <a:srgbClr val="F0DFB0"/>
-                      </a:solidFill>
-                      <a:prstDash val="solid"/>
-                      <a:round/>
-                      <a:headEnd type="none" w="med" len="med"/>
-                      <a:tailEnd type="none" w="med" len="med"/>
-                    </a:lnR>
-                    <a:lnT w="12700" cap="flat" cmpd="sng" algn="ctr">
-                      <a:solidFill>
-                        <a:srgbClr val="F0DFB0"/>
-                      </a:solidFill>
-                      <a:prstDash val="solid"/>
-                      <a:round/>
-                      <a:headEnd type="none" w="med" len="med"/>
-                      <a:tailEnd type="none" w="med" len="med"/>
-                    </a:lnT>
-                    <a:lnB w="12700" cap="flat" cmpd="sng" algn="ctr">
-                      <a:solidFill>
-                        <a:srgbClr val="F0DFB0"/>
-                      </a:solidFill>
-                      <a:prstDash val="solid"/>
-                      <a:round/>
-                      <a:headEnd type="none" w="med" len="med"/>
-                      <a:tailEnd type="none" w="med" len="med"/>
-                    </a:lnB>
-                    <a:solidFill>
-                      <a:srgbClr val="FBF3E1"/>
-                    </a:solidFill>
-                  </a:tcPr>
-                </a:tc>
-                <a:tc>
-                  <a:txBody>
-                    <a:bodyPr/>
-                    <a:lstStyle/>
-                    <a:p>
-                      <a:pPr algn="ctr" indent="0" marL="0">
-                        <a:buNone/>
-                      </a:pPr>
-                      <a:r>
-                        <a:rPr lang="en-US" sz="1100" dirty="0">
-                          <a:solidFill>
-                            <a:srgbClr val="33344A"/>
-                          </a:solidFill>
-                          <a:latin typeface="Calibri" pitchFamily="34" charset="0"/>
-                          <a:ea typeface="Calibri" pitchFamily="34" charset="-122"/>
-                          <a:cs typeface="Calibri" pitchFamily="34" charset="-120"/>
-                        </a:rPr>
-                        <a:t>1</a:t>
-                      </a:r>
-                      <a:endParaRPr lang="en-US" sz="1100" dirty="0">
-                        <a:latin typeface="Calibri" charset="0"/>
-                        <a:ea typeface="Calibri" charset="0"/>
-                        <a:cs typeface="Calibri" charset="0"/>
-                      </a:endParaRPr>
-                    </a:p>
-                  </a:txBody>
-                  <a:tcPr marL="73152" marR="73152" marT="36576" marB="36576" anchor="ctr">
-                    <a:lnL w="12700" cap="flat" cmpd="sng" algn="ctr">
-                      <a:solidFill>
-                        <a:srgbClr val="F0DFB0"/>
-                      </a:solidFill>
-                      <a:prstDash val="solid"/>
-                      <a:round/>
-                      <a:headEnd type="none" w="med" len="med"/>
-                      <a:tailEnd type="none" w="med" len="med"/>
-                    </a:lnL>
-                    <a:lnR w="12700" cap="flat" cmpd="sng" algn="ctr">
-                      <a:solidFill>
-                        <a:srgbClr val="F0DFB0"/>
-                      </a:solidFill>
-                      <a:prstDash val="solid"/>
-                      <a:round/>
-                      <a:headEnd type="none" w="med" len="med"/>
-                      <a:tailEnd type="none" w="med" len="med"/>
-                    </a:lnR>
-                    <a:lnT w="12700" cap="flat" cmpd="sng" algn="ctr">
-                      <a:solidFill>
-                        <a:srgbClr val="F0DFB0"/>
-                      </a:solidFill>
-                      <a:prstDash val="solid"/>
-                      <a:round/>
-                      <a:headEnd type="none" w="med" len="med"/>
-                      <a:tailEnd type="none" w="med" len="med"/>
-                    </a:lnT>
-                    <a:lnB w="12700" cap="flat" cmpd="sng" algn="ctr">
-                      <a:solidFill>
-                        <a:srgbClr val="F0DFB0"/>
-                      </a:solidFill>
-                      <a:prstDash val="solid"/>
-                      <a:round/>
-                      <a:headEnd type="none" w="med" len="med"/>
-                      <a:tailEnd type="none" w="med" len="med"/>
-                    </a:lnB>
-                    <a:solidFill>
-                      <a:srgbClr val="FBF3E1"/>
-                    </a:solidFill>
-                  </a:tcPr>
-                </a:tc>
-                <a:tc>
-                  <a:txBody>
-                    <a:bodyPr/>
-                    <a:lstStyle/>
-                    <a:p>
-                      <a:pPr algn="ctr" indent="0" marL="0">
-                        <a:buNone/>
-                      </a:pPr>
-                      <a:r>
-                        <a:rPr lang="en-US" sz="1100" dirty="0">
-                          <a:solidFill>
-                            <a:srgbClr val="33344A"/>
-                          </a:solidFill>
-                          <a:latin typeface="Calibri" pitchFamily="34" charset="0"/>
-                          <a:ea typeface="Calibri" pitchFamily="34" charset="-122"/>
-                          <a:cs typeface="Calibri" pitchFamily="34" charset="-120"/>
-                        </a:rPr>
-                        <a:t>0.50</a:t>
-                      </a:r>
-                      <a:endParaRPr lang="en-US" sz="1100" dirty="0">
-                        <a:latin typeface="Calibri" charset="0"/>
-                        <a:ea typeface="Calibri" charset="0"/>
-                        <a:cs typeface="Calibri" charset="0"/>
-                      </a:endParaRPr>
-                    </a:p>
-                  </a:txBody>
-                  <a:tcPr marL="73152" marR="73152" marT="36576" marB="36576" anchor="ctr">
-                    <a:lnL w="12700" cap="flat" cmpd="sng" algn="ctr">
-                      <a:solidFill>
-                        <a:srgbClr val="F0DFB0"/>
-                      </a:solidFill>
-                      <a:prstDash val="solid"/>
-                      <a:round/>
-                      <a:headEnd type="none" w="med" len="med"/>
-                      <a:tailEnd type="none" w="med" len="med"/>
-                    </a:lnL>
-                    <a:lnR w="12700" cap="flat" cmpd="sng" algn="ctr">
-                      <a:solidFill>
-                        <a:srgbClr val="F0DFB0"/>
-                      </a:solidFill>
-                      <a:prstDash val="solid"/>
-                      <a:round/>
-                      <a:headEnd type="none" w="med" len="med"/>
-                      <a:tailEnd type="none" w="med" len="med"/>
-                    </a:lnR>
-                    <a:lnT w="12700" cap="flat" cmpd="sng" algn="ctr">
-                      <a:solidFill>
-                        <a:srgbClr val="F0DFB0"/>
-                      </a:solidFill>
-                      <a:prstDash val="solid"/>
-                      <a:round/>
-                      <a:headEnd type="none" w="med" len="med"/>
-                      <a:tailEnd type="none" w="med" len="med"/>
-                    </a:lnT>
-                    <a:lnB w="12700" cap="flat" cmpd="sng" algn="ctr">
-                      <a:solidFill>
-                        <a:srgbClr val="F0DFB0"/>
-                      </a:solidFill>
-                      <a:prstDash val="solid"/>
-                      <a:round/>
-                      <a:headEnd type="none" w="med" len="med"/>
-                      <a:tailEnd type="none" w="med" len="med"/>
-                    </a:lnB>
-                    <a:solidFill>
-                      <a:srgbClr val="FBF3E1"/>
-                    </a:solidFill>
-                  </a:tcPr>
-                </a:tc>
-                <a:tc>
-                  <a:txBody>
-                    <a:bodyPr/>
-                    <a:lstStyle/>
-                    <a:p>
-                      <a:pPr algn="ctr" indent="0" marL="0">
-                        <a:buNone/>
-                      </a:pPr>
-                      <a:r>
-                        <a:rPr lang="en-US" sz="1100" dirty="0">
+                        <a:rPr lang="en-US" sz="1050" dirty="0">
                           <a:solidFill>
                             <a:srgbClr val="33344A"/>
                           </a:solidFill>
@@ -6654,14 +8163,14 @@
                         </a:rPr>
                         <a:t>0.70</a:t>
                       </a:r>
-                      <a:endParaRPr lang="en-US" sz="1100" dirty="0">
+                      <a:endParaRPr lang="en-US" sz="1050" dirty="0">
                         <a:latin typeface="Calibri" charset="0"/>
                         <a:ea typeface="Calibri" charset="0"/>
                         <a:cs typeface="Calibri" charset="0"/>
                       </a:endParaRPr>
                     </a:p>
                   </a:txBody>
-                  <a:tcPr marL="73152" marR="73152" marT="36576" marB="36576" anchor="ctr">
+                  <a:tcPr marL="45720" marR="45720" marT="18288" marB="18288" anchor="ctr">
                     <a:lnL w="12700" cap="flat" cmpd="sng" algn="ctr">
                       <a:solidFill>
                         <a:srgbClr val="F0DFB0"/>
@@ -6710,7 +8219,7 @@
       </p:graphicFrame>
       <p:sp>
         <p:nvSpPr>
-          <p:cNvPr id="16" name="Text 11"/>
+          <p:cNvPr id="19" name="Text 13"/>
           <p:cNvSpPr txBox="1"/>
           <p:nvPr/>
         </p:nvSpPr>
@@ -6749,7 +8258,7 @@
       </p:sp>
       <p:sp>
         <p:nvSpPr>
-          <p:cNvPr id="17" name="Text 12"/>
+          <p:cNvPr id="20" name="Text 14"/>
           <p:cNvSpPr txBox="1"/>
           <p:nvPr/>
         </p:nvSpPr>

--- a/uplift_model_deck.pptx
+++ b/uplift_model_deck.pptx
@@ -4168,11 +4168,11 @@
         <p:spPr>
           <a:xfrm>
             <a:off x="548640" y="4032504"/>
-            <a:ext cx="11064240" cy="2212848"/>
+            <a:ext cx="11064240" cy="1554480"/>
           </a:xfrm>
           <a:prstGeom prst="roundRect">
             <a:avLst>
-              <a:gd name="adj" fmla="val 4132"/>
+              <a:gd name="adj" fmla="val 5882"/>
             </a:avLst>
           </a:prstGeom>
           <a:solidFill>
@@ -4233,7 +4233,7 @@
                 <a:ea typeface="Calibri" pitchFamily="34" charset="-122"/>
                 <a:cs typeface="Calibri" pitchFamily="34" charset="-120"/>
               </a:rPr>
-              <a:t>once trained, BOTH models score EVERY customer — including their own counterfactual arm — as two separate passes</a:t>
+              <a:t>each model only scores the OTHER arm — its own arm's real outcome is already observed, no prediction needed</a:t>
             </a:r>
             <a:endParaRPr lang="en-US" sz="1100" dirty="0"/>
           </a:p>
@@ -4272,7 +4272,7 @@
                 <a:ea typeface="Calibri" pitchFamily="34" charset="-122"/>
                 <a:cs typeface="Calibri" pitchFamily="34" charset="-120"/>
               </a:rPr>
-              <a:t>μ̂₀ scores ALL customers → pred. Applied, old offer</a:t>
+              <a:t>μ̂₀ scores the TREATMENT arm (D,E,F) — counterfactual: old offer</a:t>
             </a:r>
             <a:endParaRPr lang="en-US" sz="1050" dirty="0"/>
           </a:p>
@@ -4294,7 +4294,7 @@
         </p:nvGraphicFramePr>
         <p:xfrm>
           <a:off x="777240" y="4690872"/>
-          <a:ext cx="5074920" cy="1408176"/>
+          <a:ext cx="5074920" cy="749808"/>
         </p:xfrm>
         <a:graphic>
           <a:graphicData uri="http://schemas.openxmlformats.org/drawingml/2006/table">
@@ -4306,7 +4306,7 @@
                 <a:gridCol w="685800"/>
                 <a:gridCol w="2423160"/>
               </a:tblGrid>
-              <a:tr h="201168">
+              <a:tr h="187452">
                 <a:tc>
                   <a:txBody>
                     <a:bodyPr/>
@@ -4580,7 +4580,7 @@
                   </a:tcPr>
                 </a:tc>
               </a:tr>
-              <a:tr h="201168">
+              <a:tr h="187452">
                 <a:tc>
                   <a:txBody>
                     <a:bodyPr/>
@@ -4590,7 +4590,7 @@
                         <a:buNone/>
                       </a:pPr>
                       <a:r>
-                        <a:rPr lang="en-US" sz="1050" b="1" dirty="0">
+                        <a:rPr lang="en-US" sz="1100" b="1" dirty="0">
                           <a:solidFill>
                             <a:srgbClr val="33344A"/>
                           </a:solidFill>
@@ -4598,9 +4598,9 @@
                           <a:ea typeface="Calibri" pitchFamily="34" charset="-122"/>
                           <a:cs typeface="Calibri" pitchFamily="34" charset="-120"/>
                         </a:rPr>
-                        <a:t>A</a:t>
+                        <a:t>D</a:t>
                       </a:r>
-                      <a:endParaRPr lang="en-US" sz="1050" dirty="0">
+                      <a:endParaRPr lang="en-US" sz="1100" dirty="0">
                         <a:latin typeface="Calibri" charset="0"/>
                         <a:ea typeface="Calibri" charset="0"/>
                         <a:cs typeface="Calibri" charset="0"/>
@@ -4658,17 +4658,17 @@
                         <a:buNone/>
                       </a:pPr>
                       <a:r>
-                        <a:rPr lang="en-US" sz="1050" dirty="0">
+                        <a:rPr lang="en-US" sz="1100" dirty="0">
                           <a:solidFill>
-                            <a:srgbClr val="1E2761"/>
+                            <a:srgbClr val="B8892B"/>
                           </a:solidFill>
                           <a:latin typeface="Calibri" pitchFamily="34" charset="0"/>
                           <a:ea typeface="Calibri" pitchFamily="34" charset="-122"/>
                           <a:cs typeface="Calibri" pitchFamily="34" charset="-120"/>
                         </a:rPr>
-                        <a:t>0 (old)</a:t>
+                        <a:t>1 (new)</a:t>
                       </a:r>
-                      <a:endParaRPr lang="en-US" sz="1050" dirty="0">
+                      <a:endParaRPr lang="en-US" sz="1100" dirty="0">
                         <a:latin typeface="Calibri" charset="0"/>
                         <a:ea typeface="Calibri" charset="0"/>
                         <a:cs typeface="Calibri" charset="0"/>
@@ -4726,7 +4726,7 @@
                         <a:buNone/>
                       </a:pPr>
                       <a:r>
-                        <a:rPr lang="en-US" sz="1050" dirty="0">
+                        <a:rPr lang="en-US" sz="1100" dirty="0">
                           <a:solidFill>
                             <a:srgbClr val="33344A"/>
                           </a:solidFill>
@@ -4734,9 +4734,9 @@
                           <a:ea typeface="Calibri" pitchFamily="34" charset="-122"/>
                           <a:cs typeface="Calibri" pitchFamily="34" charset="-120"/>
                         </a:rPr>
-                        <a:t>0</a:t>
+                        <a:t>1</a:t>
                       </a:r>
-                      <a:endParaRPr lang="en-US" sz="1050" dirty="0">
+                      <a:endParaRPr lang="en-US" sz="1100" dirty="0">
                         <a:latin typeface="Calibri" charset="0"/>
                         <a:ea typeface="Calibri" charset="0"/>
                         <a:cs typeface="Calibri" charset="0"/>
@@ -4794,7 +4794,7 @@
                         <a:buNone/>
                       </a:pPr>
                       <a:r>
-                        <a:rPr lang="en-US" sz="1050" dirty="0">
+                        <a:rPr lang="en-US" sz="1100" dirty="0">
                           <a:solidFill>
                             <a:srgbClr val="33344A"/>
                           </a:solidFill>
@@ -4802,9 +4802,9 @@
                           <a:ea typeface="Calibri" pitchFamily="34" charset="-122"/>
                           <a:cs typeface="Calibri" pitchFamily="34" charset="-120"/>
                         </a:rPr>
-                        <a:t>0.20</a:t>
+                        <a:t>0.35</a:t>
                       </a:r>
-                      <a:endParaRPr lang="en-US" sz="1050" dirty="0">
+                      <a:endParaRPr lang="en-US" sz="1100" dirty="0">
                         <a:latin typeface="Calibri" charset="0"/>
                         <a:ea typeface="Calibri" charset="0"/>
                         <a:cs typeface="Calibri" charset="0"/>
@@ -4854,7 +4854,7 @@
                   </a:tcPr>
                 </a:tc>
               </a:tr>
-              <a:tr h="201168">
+              <a:tr h="187452">
                 <a:tc>
                   <a:txBody>
                     <a:bodyPr/>
@@ -4864,7 +4864,7 @@
                         <a:buNone/>
                       </a:pPr>
                       <a:r>
-                        <a:rPr lang="en-US" sz="1050" b="1" dirty="0">
+                        <a:rPr lang="en-US" sz="1100" b="1" dirty="0">
                           <a:solidFill>
                             <a:srgbClr val="33344A"/>
                           </a:solidFill>
@@ -4872,9 +4872,9 @@
                           <a:ea typeface="Calibri" pitchFamily="34" charset="-122"/>
                           <a:cs typeface="Calibri" pitchFamily="34" charset="-120"/>
                         </a:rPr>
-                        <a:t>B</a:t>
+                        <a:t>E</a:t>
                       </a:r>
-                      <a:endParaRPr lang="en-US" sz="1050" dirty="0">
+                      <a:endParaRPr lang="en-US" sz="1100" dirty="0">
                         <a:latin typeface="Calibri" charset="0"/>
                         <a:ea typeface="Calibri" charset="0"/>
                         <a:cs typeface="Calibri" charset="0"/>
@@ -4932,17 +4932,17 @@
                         <a:buNone/>
                       </a:pPr>
                       <a:r>
-                        <a:rPr lang="en-US" sz="1050" dirty="0">
+                        <a:rPr lang="en-US" sz="1100" dirty="0">
                           <a:solidFill>
-                            <a:srgbClr val="1E2761"/>
+                            <a:srgbClr val="B8892B"/>
                           </a:solidFill>
                           <a:latin typeface="Calibri" pitchFamily="34" charset="0"/>
                           <a:ea typeface="Calibri" pitchFamily="34" charset="-122"/>
                           <a:cs typeface="Calibri" pitchFamily="34" charset="-120"/>
                         </a:rPr>
-                        <a:t>0 (old)</a:t>
+                        <a:t>1 (new)</a:t>
                       </a:r>
-                      <a:endParaRPr lang="en-US" sz="1050" dirty="0">
+                      <a:endParaRPr lang="en-US" sz="1100" dirty="0">
                         <a:latin typeface="Calibri" charset="0"/>
                         <a:ea typeface="Calibri" charset="0"/>
                         <a:cs typeface="Calibri" charset="0"/>
@@ -5000,7 +5000,7 @@
                         <a:buNone/>
                       </a:pPr>
                       <a:r>
-                        <a:rPr lang="en-US" sz="1050" dirty="0">
+                        <a:rPr lang="en-US" sz="1100" dirty="0">
                           <a:solidFill>
                             <a:srgbClr val="33344A"/>
                           </a:solidFill>
@@ -5008,9 +5008,9 @@
                           <a:ea typeface="Calibri" pitchFamily="34" charset="-122"/>
                           <a:cs typeface="Calibri" pitchFamily="34" charset="-120"/>
                         </a:rPr>
-                        <a:t>1</a:t>
+                        <a:t>0</a:t>
                       </a:r>
-                      <a:endParaRPr lang="en-US" sz="1050" dirty="0">
+                      <a:endParaRPr lang="en-US" sz="1100" dirty="0">
                         <a:latin typeface="Calibri" charset="0"/>
                         <a:ea typeface="Calibri" charset="0"/>
                         <a:cs typeface="Calibri" charset="0"/>
@@ -5068,7 +5068,7 @@
                         <a:buNone/>
                       </a:pPr>
                       <a:r>
-                        <a:rPr lang="en-US" sz="1050" dirty="0">
+                        <a:rPr lang="en-US" sz="1100" dirty="0">
                           <a:solidFill>
                             <a:srgbClr val="33344A"/>
                           </a:solidFill>
@@ -5076,9 +5076,9 @@
                           <a:ea typeface="Calibri" pitchFamily="34" charset="-122"/>
                           <a:cs typeface="Calibri" pitchFamily="34" charset="-120"/>
                         </a:rPr>
-                        <a:t>0.60</a:t>
+                        <a:t>0.25</a:t>
                       </a:r>
-                      <a:endParaRPr lang="en-US" sz="1050" dirty="0">
+                      <a:endParaRPr lang="en-US" sz="1100" dirty="0">
                         <a:latin typeface="Calibri" charset="0"/>
                         <a:ea typeface="Calibri" charset="0"/>
                         <a:cs typeface="Calibri" charset="0"/>
@@ -5128,7 +5128,7 @@
                   </a:tcPr>
                 </a:tc>
               </a:tr>
-              <a:tr h="201168">
+              <a:tr h="187452">
                 <a:tc>
                   <a:txBody>
                     <a:bodyPr/>
@@ -5138,7 +5138,7 @@
                         <a:buNone/>
                       </a:pPr>
                       <a:r>
-                        <a:rPr lang="en-US" sz="1050" b="1" dirty="0">
+                        <a:rPr lang="en-US" sz="1100" b="1" dirty="0">
                           <a:solidFill>
                             <a:srgbClr val="33344A"/>
                           </a:solidFill>
@@ -5146,9 +5146,9 @@
                           <a:ea typeface="Calibri" pitchFamily="34" charset="-122"/>
                           <a:cs typeface="Calibri" pitchFamily="34" charset="-120"/>
                         </a:rPr>
-                        <a:t>C</a:t>
+                        <a:t>F</a:t>
                       </a:r>
-                      <a:endParaRPr lang="en-US" sz="1050" dirty="0">
+                      <a:endParaRPr lang="en-US" sz="1100" dirty="0">
                         <a:latin typeface="Calibri" charset="0"/>
                         <a:ea typeface="Calibri" charset="0"/>
                         <a:cs typeface="Calibri" charset="0"/>
@@ -5206,17 +5206,17 @@
                         <a:buNone/>
                       </a:pPr>
                       <a:r>
-                        <a:rPr lang="en-US" sz="1050" dirty="0">
+                        <a:rPr lang="en-US" sz="1100" dirty="0">
                           <a:solidFill>
-                            <a:srgbClr val="1E2761"/>
+                            <a:srgbClr val="B8892B"/>
                           </a:solidFill>
                           <a:latin typeface="Calibri" pitchFamily="34" charset="0"/>
                           <a:ea typeface="Calibri" pitchFamily="34" charset="-122"/>
                           <a:cs typeface="Calibri" pitchFamily="34" charset="-120"/>
                         </a:rPr>
-                        <a:t>0 (old)</a:t>
+                        <a:t>1 (new)</a:t>
                       </a:r>
-                      <a:endParaRPr lang="en-US" sz="1050" dirty="0">
+                      <a:endParaRPr lang="en-US" sz="1100" dirty="0">
                         <a:latin typeface="Calibri" charset="0"/>
                         <a:ea typeface="Calibri" charset="0"/>
                         <a:cs typeface="Calibri" charset="0"/>
@@ -5274,7 +5274,7 @@
                         <a:buNone/>
                       </a:pPr>
                       <a:r>
-                        <a:rPr lang="en-US" sz="1050" dirty="0">
+                        <a:rPr lang="en-US" sz="1100" dirty="0">
                           <a:solidFill>
                             <a:srgbClr val="33344A"/>
                           </a:solidFill>
@@ -5282,9 +5282,9 @@
                           <a:ea typeface="Calibri" pitchFamily="34" charset="-122"/>
                           <a:cs typeface="Calibri" pitchFamily="34" charset="-120"/>
                         </a:rPr>
-                        <a:t>0</a:t>
+                        <a:t>1</a:t>
                       </a:r>
-                      <a:endParaRPr lang="en-US" sz="1050" dirty="0">
+                      <a:endParaRPr lang="en-US" sz="1100" dirty="0">
                         <a:latin typeface="Calibri" charset="0"/>
                         <a:ea typeface="Calibri" charset="0"/>
                         <a:cs typeface="Calibri" charset="0"/>
@@ -5342,829 +5342,7 @@
                         <a:buNone/>
                       </a:pPr>
                       <a:r>
-                        <a:rPr lang="en-US" sz="1050" dirty="0">
-                          <a:solidFill>
-                            <a:srgbClr val="33344A"/>
-                          </a:solidFill>
-                          <a:latin typeface="Calibri" pitchFamily="34" charset="0"/>
-                          <a:ea typeface="Calibri" pitchFamily="34" charset="-122"/>
-                          <a:cs typeface="Calibri" pitchFamily="34" charset="-120"/>
-                        </a:rPr>
-                        <a:t>0.10</a:t>
-                      </a:r>
-                      <a:endParaRPr lang="en-US" sz="1050" dirty="0">
-                        <a:latin typeface="Calibri" charset="0"/>
-                        <a:ea typeface="Calibri" charset="0"/>
-                        <a:cs typeface="Calibri" charset="0"/>
-                      </a:endParaRPr>
-                    </a:p>
-                  </a:txBody>
-                  <a:tcPr marL="45720" marR="45720" marT="18288" marB="18288" anchor="ctr">
-                    <a:lnL w="12700" cap="flat" cmpd="sng" algn="ctr">
-                      <a:solidFill>
-                        <a:srgbClr val="E4E7F0"/>
-                      </a:solidFill>
-                      <a:prstDash val="solid"/>
-                      <a:round/>
-                      <a:headEnd type="none" w="med" len="med"/>
-                      <a:tailEnd type="none" w="med" len="med"/>
-                    </a:lnL>
-                    <a:lnR w="12700" cap="flat" cmpd="sng" algn="ctr">
-                      <a:solidFill>
-                        <a:srgbClr val="E4E7F0"/>
-                      </a:solidFill>
-                      <a:prstDash val="solid"/>
-                      <a:round/>
-                      <a:headEnd type="none" w="med" len="med"/>
-                      <a:tailEnd type="none" w="med" len="med"/>
-                    </a:lnR>
-                    <a:lnT w="12700" cap="flat" cmpd="sng" algn="ctr">
-                      <a:solidFill>
-                        <a:srgbClr val="E4E7F0"/>
-                      </a:solidFill>
-                      <a:prstDash val="solid"/>
-                      <a:round/>
-                      <a:headEnd type="none" w="med" len="med"/>
-                      <a:tailEnd type="none" w="med" len="med"/>
-                    </a:lnT>
-                    <a:lnB w="12700" cap="flat" cmpd="sng" algn="ctr">
-                      <a:solidFill>
-                        <a:srgbClr val="E4E7F0"/>
-                      </a:solidFill>
-                      <a:prstDash val="solid"/>
-                      <a:round/>
-                      <a:headEnd type="none" w="med" len="med"/>
-                      <a:tailEnd type="none" w="med" len="med"/>
-                    </a:lnB>
-                    <a:solidFill>
-                      <a:srgbClr val="FFFFFF"/>
-                    </a:solidFill>
-                  </a:tcPr>
-                </a:tc>
-              </a:tr>
-              <a:tr h="201168">
-                <a:tc>
-                  <a:txBody>
-                    <a:bodyPr/>
-                    <a:lstStyle/>
-                    <a:p>
-                      <a:pPr algn="ctr" indent="0" marL="0">
-                        <a:buNone/>
-                      </a:pPr>
-                      <a:r>
-                        <a:rPr lang="en-US" sz="1050" b="1" dirty="0">
-                          <a:solidFill>
-                            <a:srgbClr val="33344A"/>
-                          </a:solidFill>
-                          <a:latin typeface="Calibri" pitchFamily="34" charset="0"/>
-                          <a:ea typeface="Calibri" pitchFamily="34" charset="-122"/>
-                          <a:cs typeface="Calibri" pitchFamily="34" charset="-120"/>
-                        </a:rPr>
-                        <a:t>D</a:t>
-                      </a:r>
-                      <a:endParaRPr lang="en-US" sz="1050" dirty="0">
-                        <a:latin typeface="Calibri" charset="0"/>
-                        <a:ea typeface="Calibri" charset="0"/>
-                        <a:cs typeface="Calibri" charset="0"/>
-                      </a:endParaRPr>
-                    </a:p>
-                  </a:txBody>
-                  <a:tcPr marL="45720" marR="45720" marT="18288" marB="18288" anchor="ctr">
-                    <a:lnL w="12700" cap="flat" cmpd="sng" algn="ctr">
-                      <a:solidFill>
-                        <a:srgbClr val="E4E7F0"/>
-                      </a:solidFill>
-                      <a:prstDash val="solid"/>
-                      <a:round/>
-                      <a:headEnd type="none" w="med" len="med"/>
-                      <a:tailEnd type="none" w="med" len="med"/>
-                    </a:lnL>
-                    <a:lnR w="12700" cap="flat" cmpd="sng" algn="ctr">
-                      <a:solidFill>
-                        <a:srgbClr val="E4E7F0"/>
-                      </a:solidFill>
-                      <a:prstDash val="solid"/>
-                      <a:round/>
-                      <a:headEnd type="none" w="med" len="med"/>
-                      <a:tailEnd type="none" w="med" len="med"/>
-                    </a:lnR>
-                    <a:lnT w="12700" cap="flat" cmpd="sng" algn="ctr">
-                      <a:solidFill>
-                        <a:srgbClr val="E4E7F0"/>
-                      </a:solidFill>
-                      <a:prstDash val="solid"/>
-                      <a:round/>
-                      <a:headEnd type="none" w="med" len="med"/>
-                      <a:tailEnd type="none" w="med" len="med"/>
-                    </a:lnT>
-                    <a:lnB w="12700" cap="flat" cmpd="sng" algn="ctr">
-                      <a:solidFill>
-                        <a:srgbClr val="E4E7F0"/>
-                      </a:solidFill>
-                      <a:prstDash val="solid"/>
-                      <a:round/>
-                      <a:headEnd type="none" w="med" len="med"/>
-                      <a:tailEnd type="none" w="med" len="med"/>
-                    </a:lnB>
-                    <a:solidFill>
-                      <a:srgbClr val="EAF0FC"/>
-                    </a:solidFill>
-                  </a:tcPr>
-                </a:tc>
-                <a:tc>
-                  <a:txBody>
-                    <a:bodyPr/>
-                    <a:lstStyle/>
-                    <a:p>
-                      <a:pPr algn="ctr" indent="0" marL="0">
-                        <a:buNone/>
-                      </a:pPr>
-                      <a:r>
-                        <a:rPr lang="en-US" sz="1050" dirty="0">
-                          <a:solidFill>
-                            <a:srgbClr val="B8892B"/>
-                          </a:solidFill>
-                          <a:latin typeface="Calibri" pitchFamily="34" charset="0"/>
-                          <a:ea typeface="Calibri" pitchFamily="34" charset="-122"/>
-                          <a:cs typeface="Calibri" pitchFamily="34" charset="-120"/>
-                        </a:rPr>
-                        <a:t>1 (new)</a:t>
-                      </a:r>
-                      <a:endParaRPr lang="en-US" sz="1050" dirty="0">
-                        <a:latin typeface="Calibri" charset="0"/>
-                        <a:ea typeface="Calibri" charset="0"/>
-                        <a:cs typeface="Calibri" charset="0"/>
-                      </a:endParaRPr>
-                    </a:p>
-                  </a:txBody>
-                  <a:tcPr marL="45720" marR="45720" marT="18288" marB="18288" anchor="ctr">
-                    <a:lnL w="12700" cap="flat" cmpd="sng" algn="ctr">
-                      <a:solidFill>
-                        <a:srgbClr val="E4E7F0"/>
-                      </a:solidFill>
-                      <a:prstDash val="solid"/>
-                      <a:round/>
-                      <a:headEnd type="none" w="med" len="med"/>
-                      <a:tailEnd type="none" w="med" len="med"/>
-                    </a:lnL>
-                    <a:lnR w="12700" cap="flat" cmpd="sng" algn="ctr">
-                      <a:solidFill>
-                        <a:srgbClr val="E4E7F0"/>
-                      </a:solidFill>
-                      <a:prstDash val="solid"/>
-                      <a:round/>
-                      <a:headEnd type="none" w="med" len="med"/>
-                      <a:tailEnd type="none" w="med" len="med"/>
-                    </a:lnR>
-                    <a:lnT w="12700" cap="flat" cmpd="sng" algn="ctr">
-                      <a:solidFill>
-                        <a:srgbClr val="E4E7F0"/>
-                      </a:solidFill>
-                      <a:prstDash val="solid"/>
-                      <a:round/>
-                      <a:headEnd type="none" w="med" len="med"/>
-                      <a:tailEnd type="none" w="med" len="med"/>
-                    </a:lnT>
-                    <a:lnB w="12700" cap="flat" cmpd="sng" algn="ctr">
-                      <a:solidFill>
-                        <a:srgbClr val="E4E7F0"/>
-                      </a:solidFill>
-                      <a:prstDash val="solid"/>
-                      <a:round/>
-                      <a:headEnd type="none" w="med" len="med"/>
-                      <a:tailEnd type="none" w="med" len="med"/>
-                    </a:lnB>
-                    <a:solidFill>
-                      <a:srgbClr val="EAF0FC"/>
-                    </a:solidFill>
-                  </a:tcPr>
-                </a:tc>
-                <a:tc>
-                  <a:txBody>
-                    <a:bodyPr/>
-                    <a:lstStyle/>
-                    <a:p>
-                      <a:pPr algn="ctr" indent="0" marL="0">
-                        <a:buNone/>
-                      </a:pPr>
-                      <a:r>
-                        <a:rPr lang="en-US" sz="1050" dirty="0">
-                          <a:solidFill>
-                            <a:srgbClr val="33344A"/>
-                          </a:solidFill>
-                          <a:latin typeface="Calibri" pitchFamily="34" charset="0"/>
-                          <a:ea typeface="Calibri" pitchFamily="34" charset="-122"/>
-                          <a:cs typeface="Calibri" pitchFamily="34" charset="-120"/>
-                        </a:rPr>
-                        <a:t>1</a:t>
-                      </a:r>
-                      <a:endParaRPr lang="en-US" sz="1050" dirty="0">
-                        <a:latin typeface="Calibri" charset="0"/>
-                        <a:ea typeface="Calibri" charset="0"/>
-                        <a:cs typeface="Calibri" charset="0"/>
-                      </a:endParaRPr>
-                    </a:p>
-                  </a:txBody>
-                  <a:tcPr marL="45720" marR="45720" marT="18288" marB="18288" anchor="ctr">
-                    <a:lnL w="12700" cap="flat" cmpd="sng" algn="ctr">
-                      <a:solidFill>
-                        <a:srgbClr val="E4E7F0"/>
-                      </a:solidFill>
-                      <a:prstDash val="solid"/>
-                      <a:round/>
-                      <a:headEnd type="none" w="med" len="med"/>
-                      <a:tailEnd type="none" w="med" len="med"/>
-                    </a:lnL>
-                    <a:lnR w="12700" cap="flat" cmpd="sng" algn="ctr">
-                      <a:solidFill>
-                        <a:srgbClr val="E4E7F0"/>
-                      </a:solidFill>
-                      <a:prstDash val="solid"/>
-                      <a:round/>
-                      <a:headEnd type="none" w="med" len="med"/>
-                      <a:tailEnd type="none" w="med" len="med"/>
-                    </a:lnR>
-                    <a:lnT w="12700" cap="flat" cmpd="sng" algn="ctr">
-                      <a:solidFill>
-                        <a:srgbClr val="E4E7F0"/>
-                      </a:solidFill>
-                      <a:prstDash val="solid"/>
-                      <a:round/>
-                      <a:headEnd type="none" w="med" len="med"/>
-                      <a:tailEnd type="none" w="med" len="med"/>
-                    </a:lnT>
-                    <a:lnB w="12700" cap="flat" cmpd="sng" algn="ctr">
-                      <a:solidFill>
-                        <a:srgbClr val="E4E7F0"/>
-                      </a:solidFill>
-                      <a:prstDash val="solid"/>
-                      <a:round/>
-                      <a:headEnd type="none" w="med" len="med"/>
-                      <a:tailEnd type="none" w="med" len="med"/>
-                    </a:lnB>
-                    <a:solidFill>
-                      <a:srgbClr val="EAF0FC"/>
-                    </a:solidFill>
-                  </a:tcPr>
-                </a:tc>
-                <a:tc>
-                  <a:txBody>
-                    <a:bodyPr/>
-                    <a:lstStyle/>
-                    <a:p>
-                      <a:pPr algn="ctr" indent="0" marL="0">
-                        <a:buNone/>
-                      </a:pPr>
-                      <a:r>
-                        <a:rPr lang="en-US" sz="1050" dirty="0">
-                          <a:solidFill>
-                            <a:srgbClr val="33344A"/>
-                          </a:solidFill>
-                          <a:latin typeface="Calibri" pitchFamily="34" charset="0"/>
-                          <a:ea typeface="Calibri" pitchFamily="34" charset="-122"/>
-                          <a:cs typeface="Calibri" pitchFamily="34" charset="-120"/>
-                        </a:rPr>
-                        <a:t>0.35</a:t>
-                      </a:r>
-                      <a:endParaRPr lang="en-US" sz="1050" dirty="0">
-                        <a:latin typeface="Calibri" charset="0"/>
-                        <a:ea typeface="Calibri" charset="0"/>
-                        <a:cs typeface="Calibri" charset="0"/>
-                      </a:endParaRPr>
-                    </a:p>
-                  </a:txBody>
-                  <a:tcPr marL="45720" marR="45720" marT="18288" marB="18288" anchor="ctr">
-                    <a:lnL w="12700" cap="flat" cmpd="sng" algn="ctr">
-                      <a:solidFill>
-                        <a:srgbClr val="E4E7F0"/>
-                      </a:solidFill>
-                      <a:prstDash val="solid"/>
-                      <a:round/>
-                      <a:headEnd type="none" w="med" len="med"/>
-                      <a:tailEnd type="none" w="med" len="med"/>
-                    </a:lnL>
-                    <a:lnR w="12700" cap="flat" cmpd="sng" algn="ctr">
-                      <a:solidFill>
-                        <a:srgbClr val="E4E7F0"/>
-                      </a:solidFill>
-                      <a:prstDash val="solid"/>
-                      <a:round/>
-                      <a:headEnd type="none" w="med" len="med"/>
-                      <a:tailEnd type="none" w="med" len="med"/>
-                    </a:lnR>
-                    <a:lnT w="12700" cap="flat" cmpd="sng" algn="ctr">
-                      <a:solidFill>
-                        <a:srgbClr val="E4E7F0"/>
-                      </a:solidFill>
-                      <a:prstDash val="solid"/>
-                      <a:round/>
-                      <a:headEnd type="none" w="med" len="med"/>
-                      <a:tailEnd type="none" w="med" len="med"/>
-                    </a:lnT>
-                    <a:lnB w="12700" cap="flat" cmpd="sng" algn="ctr">
-                      <a:solidFill>
-                        <a:srgbClr val="E4E7F0"/>
-                      </a:solidFill>
-                      <a:prstDash val="solid"/>
-                      <a:round/>
-                      <a:headEnd type="none" w="med" len="med"/>
-                      <a:tailEnd type="none" w="med" len="med"/>
-                    </a:lnB>
-                    <a:solidFill>
-                      <a:srgbClr val="EAF0FC"/>
-                    </a:solidFill>
-                  </a:tcPr>
-                </a:tc>
-              </a:tr>
-              <a:tr h="201168">
-                <a:tc>
-                  <a:txBody>
-                    <a:bodyPr/>
-                    <a:lstStyle/>
-                    <a:p>
-                      <a:pPr algn="ctr" indent="0" marL="0">
-                        <a:buNone/>
-                      </a:pPr>
-                      <a:r>
-                        <a:rPr lang="en-US" sz="1050" b="1" dirty="0">
-                          <a:solidFill>
-                            <a:srgbClr val="33344A"/>
-                          </a:solidFill>
-                          <a:latin typeface="Calibri" pitchFamily="34" charset="0"/>
-                          <a:ea typeface="Calibri" pitchFamily="34" charset="-122"/>
-                          <a:cs typeface="Calibri" pitchFamily="34" charset="-120"/>
-                        </a:rPr>
-                        <a:t>E</a:t>
-                      </a:r>
-                      <a:endParaRPr lang="en-US" sz="1050" dirty="0">
-                        <a:latin typeface="Calibri" charset="0"/>
-                        <a:ea typeface="Calibri" charset="0"/>
-                        <a:cs typeface="Calibri" charset="0"/>
-                      </a:endParaRPr>
-                    </a:p>
-                  </a:txBody>
-                  <a:tcPr marL="45720" marR="45720" marT="18288" marB="18288" anchor="ctr">
-                    <a:lnL w="12700" cap="flat" cmpd="sng" algn="ctr">
-                      <a:solidFill>
-                        <a:srgbClr val="E4E7F0"/>
-                      </a:solidFill>
-                      <a:prstDash val="solid"/>
-                      <a:round/>
-                      <a:headEnd type="none" w="med" len="med"/>
-                      <a:tailEnd type="none" w="med" len="med"/>
-                    </a:lnL>
-                    <a:lnR w="12700" cap="flat" cmpd="sng" algn="ctr">
-                      <a:solidFill>
-                        <a:srgbClr val="E4E7F0"/>
-                      </a:solidFill>
-                      <a:prstDash val="solid"/>
-                      <a:round/>
-                      <a:headEnd type="none" w="med" len="med"/>
-                      <a:tailEnd type="none" w="med" len="med"/>
-                    </a:lnR>
-                    <a:lnT w="12700" cap="flat" cmpd="sng" algn="ctr">
-                      <a:solidFill>
-                        <a:srgbClr val="E4E7F0"/>
-                      </a:solidFill>
-                      <a:prstDash val="solid"/>
-                      <a:round/>
-                      <a:headEnd type="none" w="med" len="med"/>
-                      <a:tailEnd type="none" w="med" len="med"/>
-                    </a:lnT>
-                    <a:lnB w="12700" cap="flat" cmpd="sng" algn="ctr">
-                      <a:solidFill>
-                        <a:srgbClr val="E4E7F0"/>
-                      </a:solidFill>
-                      <a:prstDash val="solid"/>
-                      <a:round/>
-                      <a:headEnd type="none" w="med" len="med"/>
-                      <a:tailEnd type="none" w="med" len="med"/>
-                    </a:lnB>
-                    <a:solidFill>
-                      <a:srgbClr val="FFFFFF"/>
-                    </a:solidFill>
-                  </a:tcPr>
-                </a:tc>
-                <a:tc>
-                  <a:txBody>
-                    <a:bodyPr/>
-                    <a:lstStyle/>
-                    <a:p>
-                      <a:pPr algn="ctr" indent="0" marL="0">
-                        <a:buNone/>
-                      </a:pPr>
-                      <a:r>
-                        <a:rPr lang="en-US" sz="1050" dirty="0">
-                          <a:solidFill>
-                            <a:srgbClr val="B8892B"/>
-                          </a:solidFill>
-                          <a:latin typeface="Calibri" pitchFamily="34" charset="0"/>
-                          <a:ea typeface="Calibri" pitchFamily="34" charset="-122"/>
-                          <a:cs typeface="Calibri" pitchFamily="34" charset="-120"/>
-                        </a:rPr>
-                        <a:t>1 (new)</a:t>
-                      </a:r>
-                      <a:endParaRPr lang="en-US" sz="1050" dirty="0">
-                        <a:latin typeface="Calibri" charset="0"/>
-                        <a:ea typeface="Calibri" charset="0"/>
-                        <a:cs typeface="Calibri" charset="0"/>
-                      </a:endParaRPr>
-                    </a:p>
-                  </a:txBody>
-                  <a:tcPr marL="45720" marR="45720" marT="18288" marB="18288" anchor="ctr">
-                    <a:lnL w="12700" cap="flat" cmpd="sng" algn="ctr">
-                      <a:solidFill>
-                        <a:srgbClr val="E4E7F0"/>
-                      </a:solidFill>
-                      <a:prstDash val="solid"/>
-                      <a:round/>
-                      <a:headEnd type="none" w="med" len="med"/>
-                      <a:tailEnd type="none" w="med" len="med"/>
-                    </a:lnL>
-                    <a:lnR w="12700" cap="flat" cmpd="sng" algn="ctr">
-                      <a:solidFill>
-                        <a:srgbClr val="E4E7F0"/>
-                      </a:solidFill>
-                      <a:prstDash val="solid"/>
-                      <a:round/>
-                      <a:headEnd type="none" w="med" len="med"/>
-                      <a:tailEnd type="none" w="med" len="med"/>
-                    </a:lnR>
-                    <a:lnT w="12700" cap="flat" cmpd="sng" algn="ctr">
-                      <a:solidFill>
-                        <a:srgbClr val="E4E7F0"/>
-                      </a:solidFill>
-                      <a:prstDash val="solid"/>
-                      <a:round/>
-                      <a:headEnd type="none" w="med" len="med"/>
-                      <a:tailEnd type="none" w="med" len="med"/>
-                    </a:lnT>
-                    <a:lnB w="12700" cap="flat" cmpd="sng" algn="ctr">
-                      <a:solidFill>
-                        <a:srgbClr val="E4E7F0"/>
-                      </a:solidFill>
-                      <a:prstDash val="solid"/>
-                      <a:round/>
-                      <a:headEnd type="none" w="med" len="med"/>
-                      <a:tailEnd type="none" w="med" len="med"/>
-                    </a:lnB>
-                    <a:solidFill>
-                      <a:srgbClr val="FFFFFF"/>
-                    </a:solidFill>
-                  </a:tcPr>
-                </a:tc>
-                <a:tc>
-                  <a:txBody>
-                    <a:bodyPr/>
-                    <a:lstStyle/>
-                    <a:p>
-                      <a:pPr algn="ctr" indent="0" marL="0">
-                        <a:buNone/>
-                      </a:pPr>
-                      <a:r>
-                        <a:rPr lang="en-US" sz="1050" dirty="0">
-                          <a:solidFill>
-                            <a:srgbClr val="33344A"/>
-                          </a:solidFill>
-                          <a:latin typeface="Calibri" pitchFamily="34" charset="0"/>
-                          <a:ea typeface="Calibri" pitchFamily="34" charset="-122"/>
-                          <a:cs typeface="Calibri" pitchFamily="34" charset="-120"/>
-                        </a:rPr>
-                        <a:t>0</a:t>
-                      </a:r>
-                      <a:endParaRPr lang="en-US" sz="1050" dirty="0">
-                        <a:latin typeface="Calibri" charset="0"/>
-                        <a:ea typeface="Calibri" charset="0"/>
-                        <a:cs typeface="Calibri" charset="0"/>
-                      </a:endParaRPr>
-                    </a:p>
-                  </a:txBody>
-                  <a:tcPr marL="45720" marR="45720" marT="18288" marB="18288" anchor="ctr">
-                    <a:lnL w="12700" cap="flat" cmpd="sng" algn="ctr">
-                      <a:solidFill>
-                        <a:srgbClr val="E4E7F0"/>
-                      </a:solidFill>
-                      <a:prstDash val="solid"/>
-                      <a:round/>
-                      <a:headEnd type="none" w="med" len="med"/>
-                      <a:tailEnd type="none" w="med" len="med"/>
-                    </a:lnL>
-                    <a:lnR w="12700" cap="flat" cmpd="sng" algn="ctr">
-                      <a:solidFill>
-                        <a:srgbClr val="E4E7F0"/>
-                      </a:solidFill>
-                      <a:prstDash val="solid"/>
-                      <a:round/>
-                      <a:headEnd type="none" w="med" len="med"/>
-                      <a:tailEnd type="none" w="med" len="med"/>
-                    </a:lnR>
-                    <a:lnT w="12700" cap="flat" cmpd="sng" algn="ctr">
-                      <a:solidFill>
-                        <a:srgbClr val="E4E7F0"/>
-                      </a:solidFill>
-                      <a:prstDash val="solid"/>
-                      <a:round/>
-                      <a:headEnd type="none" w="med" len="med"/>
-                      <a:tailEnd type="none" w="med" len="med"/>
-                    </a:lnT>
-                    <a:lnB w="12700" cap="flat" cmpd="sng" algn="ctr">
-                      <a:solidFill>
-                        <a:srgbClr val="E4E7F0"/>
-                      </a:solidFill>
-                      <a:prstDash val="solid"/>
-                      <a:round/>
-                      <a:headEnd type="none" w="med" len="med"/>
-                      <a:tailEnd type="none" w="med" len="med"/>
-                    </a:lnB>
-                    <a:solidFill>
-                      <a:srgbClr val="FFFFFF"/>
-                    </a:solidFill>
-                  </a:tcPr>
-                </a:tc>
-                <a:tc>
-                  <a:txBody>
-                    <a:bodyPr/>
-                    <a:lstStyle/>
-                    <a:p>
-                      <a:pPr algn="ctr" indent="0" marL="0">
-                        <a:buNone/>
-                      </a:pPr>
-                      <a:r>
-                        <a:rPr lang="en-US" sz="1050" dirty="0">
-                          <a:solidFill>
-                            <a:srgbClr val="33344A"/>
-                          </a:solidFill>
-                          <a:latin typeface="Calibri" pitchFamily="34" charset="0"/>
-                          <a:ea typeface="Calibri" pitchFamily="34" charset="-122"/>
-                          <a:cs typeface="Calibri" pitchFamily="34" charset="-120"/>
-                        </a:rPr>
-                        <a:t>0.25</a:t>
-                      </a:r>
-                      <a:endParaRPr lang="en-US" sz="1050" dirty="0">
-                        <a:latin typeface="Calibri" charset="0"/>
-                        <a:ea typeface="Calibri" charset="0"/>
-                        <a:cs typeface="Calibri" charset="0"/>
-                      </a:endParaRPr>
-                    </a:p>
-                  </a:txBody>
-                  <a:tcPr marL="45720" marR="45720" marT="18288" marB="18288" anchor="ctr">
-                    <a:lnL w="12700" cap="flat" cmpd="sng" algn="ctr">
-                      <a:solidFill>
-                        <a:srgbClr val="E4E7F0"/>
-                      </a:solidFill>
-                      <a:prstDash val="solid"/>
-                      <a:round/>
-                      <a:headEnd type="none" w="med" len="med"/>
-                      <a:tailEnd type="none" w="med" len="med"/>
-                    </a:lnL>
-                    <a:lnR w="12700" cap="flat" cmpd="sng" algn="ctr">
-                      <a:solidFill>
-                        <a:srgbClr val="E4E7F0"/>
-                      </a:solidFill>
-                      <a:prstDash val="solid"/>
-                      <a:round/>
-                      <a:headEnd type="none" w="med" len="med"/>
-                      <a:tailEnd type="none" w="med" len="med"/>
-                    </a:lnR>
-                    <a:lnT w="12700" cap="flat" cmpd="sng" algn="ctr">
-                      <a:solidFill>
-                        <a:srgbClr val="E4E7F0"/>
-                      </a:solidFill>
-                      <a:prstDash val="solid"/>
-                      <a:round/>
-                      <a:headEnd type="none" w="med" len="med"/>
-                      <a:tailEnd type="none" w="med" len="med"/>
-                    </a:lnT>
-                    <a:lnB w="12700" cap="flat" cmpd="sng" algn="ctr">
-                      <a:solidFill>
-                        <a:srgbClr val="E4E7F0"/>
-                      </a:solidFill>
-                      <a:prstDash val="solid"/>
-                      <a:round/>
-                      <a:headEnd type="none" w="med" len="med"/>
-                      <a:tailEnd type="none" w="med" len="med"/>
-                    </a:lnB>
-                    <a:solidFill>
-                      <a:srgbClr val="FFFFFF"/>
-                    </a:solidFill>
-                  </a:tcPr>
-                </a:tc>
-              </a:tr>
-              <a:tr h="201168">
-                <a:tc>
-                  <a:txBody>
-                    <a:bodyPr/>
-                    <a:lstStyle/>
-                    <a:p>
-                      <a:pPr algn="ctr" indent="0" marL="0">
-                        <a:buNone/>
-                      </a:pPr>
-                      <a:r>
-                        <a:rPr lang="en-US" sz="1050" b="1" dirty="0">
-                          <a:solidFill>
-                            <a:srgbClr val="33344A"/>
-                          </a:solidFill>
-                          <a:latin typeface="Calibri" pitchFamily="34" charset="0"/>
-                          <a:ea typeface="Calibri" pitchFamily="34" charset="-122"/>
-                          <a:cs typeface="Calibri" pitchFamily="34" charset="-120"/>
-                        </a:rPr>
-                        <a:t>F</a:t>
-                      </a:r>
-                      <a:endParaRPr lang="en-US" sz="1050" dirty="0">
-                        <a:latin typeface="Calibri" charset="0"/>
-                        <a:ea typeface="Calibri" charset="0"/>
-                        <a:cs typeface="Calibri" charset="0"/>
-                      </a:endParaRPr>
-                    </a:p>
-                  </a:txBody>
-                  <a:tcPr marL="45720" marR="45720" marT="18288" marB="18288" anchor="ctr">
-                    <a:lnL w="12700" cap="flat" cmpd="sng" algn="ctr">
-                      <a:solidFill>
-                        <a:srgbClr val="E4E7F0"/>
-                      </a:solidFill>
-                      <a:prstDash val="solid"/>
-                      <a:round/>
-                      <a:headEnd type="none" w="med" len="med"/>
-                      <a:tailEnd type="none" w="med" len="med"/>
-                    </a:lnL>
-                    <a:lnR w="12700" cap="flat" cmpd="sng" algn="ctr">
-                      <a:solidFill>
-                        <a:srgbClr val="E4E7F0"/>
-                      </a:solidFill>
-                      <a:prstDash val="solid"/>
-                      <a:round/>
-                      <a:headEnd type="none" w="med" len="med"/>
-                      <a:tailEnd type="none" w="med" len="med"/>
-                    </a:lnR>
-                    <a:lnT w="12700" cap="flat" cmpd="sng" algn="ctr">
-                      <a:solidFill>
-                        <a:srgbClr val="E4E7F0"/>
-                      </a:solidFill>
-                      <a:prstDash val="solid"/>
-                      <a:round/>
-                      <a:headEnd type="none" w="med" len="med"/>
-                      <a:tailEnd type="none" w="med" len="med"/>
-                    </a:lnT>
-                    <a:lnB w="12700" cap="flat" cmpd="sng" algn="ctr">
-                      <a:solidFill>
-                        <a:srgbClr val="E4E7F0"/>
-                      </a:solidFill>
-                      <a:prstDash val="solid"/>
-                      <a:round/>
-                      <a:headEnd type="none" w="med" len="med"/>
-                      <a:tailEnd type="none" w="med" len="med"/>
-                    </a:lnB>
-                    <a:solidFill>
-                      <a:srgbClr val="EAF0FC"/>
-                    </a:solidFill>
-                  </a:tcPr>
-                </a:tc>
-                <a:tc>
-                  <a:txBody>
-                    <a:bodyPr/>
-                    <a:lstStyle/>
-                    <a:p>
-                      <a:pPr algn="ctr" indent="0" marL="0">
-                        <a:buNone/>
-                      </a:pPr>
-                      <a:r>
-                        <a:rPr lang="en-US" sz="1050" dirty="0">
-                          <a:solidFill>
-                            <a:srgbClr val="B8892B"/>
-                          </a:solidFill>
-                          <a:latin typeface="Calibri" pitchFamily="34" charset="0"/>
-                          <a:ea typeface="Calibri" pitchFamily="34" charset="-122"/>
-                          <a:cs typeface="Calibri" pitchFamily="34" charset="-120"/>
-                        </a:rPr>
-                        <a:t>1 (new)</a:t>
-                      </a:r>
-                      <a:endParaRPr lang="en-US" sz="1050" dirty="0">
-                        <a:latin typeface="Calibri" charset="0"/>
-                        <a:ea typeface="Calibri" charset="0"/>
-                        <a:cs typeface="Calibri" charset="0"/>
-                      </a:endParaRPr>
-                    </a:p>
-                  </a:txBody>
-                  <a:tcPr marL="45720" marR="45720" marT="18288" marB="18288" anchor="ctr">
-                    <a:lnL w="12700" cap="flat" cmpd="sng" algn="ctr">
-                      <a:solidFill>
-                        <a:srgbClr val="E4E7F0"/>
-                      </a:solidFill>
-                      <a:prstDash val="solid"/>
-                      <a:round/>
-                      <a:headEnd type="none" w="med" len="med"/>
-                      <a:tailEnd type="none" w="med" len="med"/>
-                    </a:lnL>
-                    <a:lnR w="12700" cap="flat" cmpd="sng" algn="ctr">
-                      <a:solidFill>
-                        <a:srgbClr val="E4E7F0"/>
-                      </a:solidFill>
-                      <a:prstDash val="solid"/>
-                      <a:round/>
-                      <a:headEnd type="none" w="med" len="med"/>
-                      <a:tailEnd type="none" w="med" len="med"/>
-                    </a:lnR>
-                    <a:lnT w="12700" cap="flat" cmpd="sng" algn="ctr">
-                      <a:solidFill>
-                        <a:srgbClr val="E4E7F0"/>
-                      </a:solidFill>
-                      <a:prstDash val="solid"/>
-                      <a:round/>
-                      <a:headEnd type="none" w="med" len="med"/>
-                      <a:tailEnd type="none" w="med" len="med"/>
-                    </a:lnT>
-                    <a:lnB w="12700" cap="flat" cmpd="sng" algn="ctr">
-                      <a:solidFill>
-                        <a:srgbClr val="E4E7F0"/>
-                      </a:solidFill>
-                      <a:prstDash val="solid"/>
-                      <a:round/>
-                      <a:headEnd type="none" w="med" len="med"/>
-                      <a:tailEnd type="none" w="med" len="med"/>
-                    </a:lnB>
-                    <a:solidFill>
-                      <a:srgbClr val="EAF0FC"/>
-                    </a:solidFill>
-                  </a:tcPr>
-                </a:tc>
-                <a:tc>
-                  <a:txBody>
-                    <a:bodyPr/>
-                    <a:lstStyle/>
-                    <a:p>
-                      <a:pPr algn="ctr" indent="0" marL="0">
-                        <a:buNone/>
-                      </a:pPr>
-                      <a:r>
-                        <a:rPr lang="en-US" sz="1050" dirty="0">
-                          <a:solidFill>
-                            <a:srgbClr val="33344A"/>
-                          </a:solidFill>
-                          <a:latin typeface="Calibri" pitchFamily="34" charset="0"/>
-                          <a:ea typeface="Calibri" pitchFamily="34" charset="-122"/>
-                          <a:cs typeface="Calibri" pitchFamily="34" charset="-120"/>
-                        </a:rPr>
-                        <a:t>1</a:t>
-                      </a:r>
-                      <a:endParaRPr lang="en-US" sz="1050" dirty="0">
-                        <a:latin typeface="Calibri" charset="0"/>
-                        <a:ea typeface="Calibri" charset="0"/>
-                        <a:cs typeface="Calibri" charset="0"/>
-                      </a:endParaRPr>
-                    </a:p>
-                  </a:txBody>
-                  <a:tcPr marL="45720" marR="45720" marT="18288" marB="18288" anchor="ctr">
-                    <a:lnL w="12700" cap="flat" cmpd="sng" algn="ctr">
-                      <a:solidFill>
-                        <a:srgbClr val="E4E7F0"/>
-                      </a:solidFill>
-                      <a:prstDash val="solid"/>
-                      <a:round/>
-                      <a:headEnd type="none" w="med" len="med"/>
-                      <a:tailEnd type="none" w="med" len="med"/>
-                    </a:lnL>
-                    <a:lnR w="12700" cap="flat" cmpd="sng" algn="ctr">
-                      <a:solidFill>
-                        <a:srgbClr val="E4E7F0"/>
-                      </a:solidFill>
-                      <a:prstDash val="solid"/>
-                      <a:round/>
-                      <a:headEnd type="none" w="med" len="med"/>
-                      <a:tailEnd type="none" w="med" len="med"/>
-                    </a:lnR>
-                    <a:lnT w="12700" cap="flat" cmpd="sng" algn="ctr">
-                      <a:solidFill>
-                        <a:srgbClr val="E4E7F0"/>
-                      </a:solidFill>
-                      <a:prstDash val="solid"/>
-                      <a:round/>
-                      <a:headEnd type="none" w="med" len="med"/>
-                      <a:tailEnd type="none" w="med" len="med"/>
-                    </a:lnT>
-                    <a:lnB w="12700" cap="flat" cmpd="sng" algn="ctr">
-                      <a:solidFill>
-                        <a:srgbClr val="E4E7F0"/>
-                      </a:solidFill>
-                      <a:prstDash val="solid"/>
-                      <a:round/>
-                      <a:headEnd type="none" w="med" len="med"/>
-                      <a:tailEnd type="none" w="med" len="med"/>
-                    </a:lnB>
-                    <a:solidFill>
-                      <a:srgbClr val="EAF0FC"/>
-                    </a:solidFill>
-                  </a:tcPr>
-                </a:tc>
-                <a:tc>
-                  <a:txBody>
-                    <a:bodyPr/>
-                    <a:lstStyle/>
-                    <a:p>
-                      <a:pPr algn="ctr" indent="0" marL="0">
-                        <a:buNone/>
-                      </a:pPr>
-                      <a:r>
-                        <a:rPr lang="en-US" sz="1050" dirty="0">
+                        <a:rPr lang="en-US" sz="1100" dirty="0">
                           <a:solidFill>
                             <a:srgbClr val="33344A"/>
                           </a:solidFill>
@@ -6174,7 +5352,7 @@
                         </a:rPr>
                         <a:t>0.50</a:t>
                       </a:r>
-                      <a:endParaRPr lang="en-US" sz="1050" dirty="0">
+                      <a:endParaRPr lang="en-US" sz="1100" dirty="0">
                         <a:latin typeface="Calibri" charset="0"/>
                         <a:ea typeface="Calibri" charset="0"/>
                         <a:cs typeface="Calibri" charset="0"/>
@@ -6219,7 +5397,7 @@
                       <a:tailEnd type="none" w="med" len="med"/>
                     </a:lnB>
                     <a:solidFill>
-                      <a:srgbClr val="EAF0FC"/>
+                      <a:srgbClr val="FFFFFF"/>
                     </a:solidFill>
                   </a:tcPr>
                 </a:tc>
@@ -6261,7 +5439,7 @@
                 <a:ea typeface="Calibri" pitchFamily="34" charset="-122"/>
                 <a:cs typeface="Calibri" pitchFamily="34" charset="-120"/>
               </a:rPr>
-              <a:t>μ̂₁ scores ALL customers → pred. Applied, new offer</a:t>
+              <a:t>μ̂₁ scores the CONTROL arm (A,B,C) — counterfactual: new offer</a:t>
             </a:r>
             <a:endParaRPr lang="en-US" sz="1050" dirty="0"/>
           </a:p>
@@ -6283,7 +5461,7 @@
         </p:nvGraphicFramePr>
         <p:xfrm>
           <a:off x="6309360" y="4690872"/>
-          <a:ext cx="5074920" cy="1408176"/>
+          <a:ext cx="5074920" cy="749808"/>
         </p:xfrm>
         <a:graphic>
           <a:graphicData uri="http://schemas.openxmlformats.org/drawingml/2006/table">
@@ -6295,7 +5473,7 @@
                 <a:gridCol w="685800"/>
                 <a:gridCol w="2423160"/>
               </a:tblGrid>
-              <a:tr h="201168">
+              <a:tr h="187452">
                 <a:tc>
                   <a:txBody>
                     <a:bodyPr/>
@@ -6569,7 +5747,7 @@
                   </a:tcPr>
                 </a:tc>
               </a:tr>
-              <a:tr h="201168">
+              <a:tr h="187452">
                 <a:tc>
                   <a:txBody>
                     <a:bodyPr/>
@@ -6579,7 +5757,7 @@
                         <a:buNone/>
                       </a:pPr>
                       <a:r>
-                        <a:rPr lang="en-US" sz="1050" b="1" dirty="0">
+                        <a:rPr lang="en-US" sz="1100" b="1" dirty="0">
                           <a:solidFill>
                             <a:srgbClr val="33344A"/>
                           </a:solidFill>
@@ -6589,7 +5767,7 @@
                         </a:rPr>
                         <a:t>A</a:t>
                       </a:r>
-                      <a:endParaRPr lang="en-US" sz="1050" dirty="0">
+                      <a:endParaRPr lang="en-US" sz="1100" dirty="0">
                         <a:latin typeface="Calibri" charset="0"/>
                         <a:ea typeface="Calibri" charset="0"/>
                         <a:cs typeface="Calibri" charset="0"/>
@@ -6647,7 +5825,7 @@
                         <a:buNone/>
                       </a:pPr>
                       <a:r>
-                        <a:rPr lang="en-US" sz="1050" dirty="0">
+                        <a:rPr lang="en-US" sz="1100" dirty="0">
                           <a:solidFill>
                             <a:srgbClr val="1E2761"/>
                           </a:solidFill>
@@ -6657,7 +5835,7 @@
                         </a:rPr>
                         <a:t>0 (old)</a:t>
                       </a:r>
-                      <a:endParaRPr lang="en-US" sz="1050" dirty="0">
+                      <a:endParaRPr lang="en-US" sz="1100" dirty="0">
                         <a:latin typeface="Calibri" charset="0"/>
                         <a:ea typeface="Calibri" charset="0"/>
                         <a:cs typeface="Calibri" charset="0"/>
@@ -6715,7 +5893,7 @@
                         <a:buNone/>
                       </a:pPr>
                       <a:r>
-                        <a:rPr lang="en-US" sz="1050" dirty="0">
+                        <a:rPr lang="en-US" sz="1100" dirty="0">
                           <a:solidFill>
                             <a:srgbClr val="33344A"/>
                           </a:solidFill>
@@ -6725,7 +5903,7 @@
                         </a:rPr>
                         <a:t>0</a:t>
                       </a:r>
-                      <a:endParaRPr lang="en-US" sz="1050" dirty="0">
+                      <a:endParaRPr lang="en-US" sz="1100" dirty="0">
                         <a:latin typeface="Calibri" charset="0"/>
                         <a:ea typeface="Calibri" charset="0"/>
                         <a:cs typeface="Calibri" charset="0"/>
@@ -6783,7 +5961,7 @@
                         <a:buNone/>
                       </a:pPr>
                       <a:r>
-                        <a:rPr lang="en-US" sz="1050" dirty="0">
+                        <a:rPr lang="en-US" sz="1100" dirty="0">
                           <a:solidFill>
                             <a:srgbClr val="33344A"/>
                           </a:solidFill>
@@ -6793,7 +5971,7 @@
                         </a:rPr>
                         <a:t>0.55</a:t>
                       </a:r>
-                      <a:endParaRPr lang="en-US" sz="1050" dirty="0">
+                      <a:endParaRPr lang="en-US" sz="1100" dirty="0">
                         <a:latin typeface="Calibri" charset="0"/>
                         <a:ea typeface="Calibri" charset="0"/>
                         <a:cs typeface="Calibri" charset="0"/>
@@ -6843,7 +6021,7 @@
                   </a:tcPr>
                 </a:tc>
               </a:tr>
-              <a:tr h="201168">
+              <a:tr h="187452">
                 <a:tc>
                   <a:txBody>
                     <a:bodyPr/>
@@ -6853,7 +6031,7 @@
                         <a:buNone/>
                       </a:pPr>
                       <a:r>
-                        <a:rPr lang="en-US" sz="1050" b="1" dirty="0">
+                        <a:rPr lang="en-US" sz="1100" b="1" dirty="0">
                           <a:solidFill>
                             <a:srgbClr val="33344A"/>
                           </a:solidFill>
@@ -6863,7 +6041,7 @@
                         </a:rPr>
                         <a:t>B</a:t>
                       </a:r>
-                      <a:endParaRPr lang="en-US" sz="1050" dirty="0">
+                      <a:endParaRPr lang="en-US" sz="1100" dirty="0">
                         <a:latin typeface="Calibri" charset="0"/>
                         <a:ea typeface="Calibri" charset="0"/>
                         <a:cs typeface="Calibri" charset="0"/>
@@ -6921,7 +6099,7 @@
                         <a:buNone/>
                       </a:pPr>
                       <a:r>
-                        <a:rPr lang="en-US" sz="1050" dirty="0">
+                        <a:rPr lang="en-US" sz="1100" dirty="0">
                           <a:solidFill>
                             <a:srgbClr val="1E2761"/>
                           </a:solidFill>
@@ -6931,7 +6109,7 @@
                         </a:rPr>
                         <a:t>0 (old)</a:t>
                       </a:r>
-                      <a:endParaRPr lang="en-US" sz="1050" dirty="0">
+                      <a:endParaRPr lang="en-US" sz="1100" dirty="0">
                         <a:latin typeface="Calibri" charset="0"/>
                         <a:ea typeface="Calibri" charset="0"/>
                         <a:cs typeface="Calibri" charset="0"/>
@@ -6989,7 +6167,7 @@
                         <a:buNone/>
                       </a:pPr>
                       <a:r>
-                        <a:rPr lang="en-US" sz="1050" dirty="0">
+                        <a:rPr lang="en-US" sz="1100" dirty="0">
                           <a:solidFill>
                             <a:srgbClr val="33344A"/>
                           </a:solidFill>
@@ -6999,7 +6177,7 @@
                         </a:rPr>
                         <a:t>1</a:t>
                       </a:r>
-                      <a:endParaRPr lang="en-US" sz="1050" dirty="0">
+                      <a:endParaRPr lang="en-US" sz="1100" dirty="0">
                         <a:latin typeface="Calibri" charset="0"/>
                         <a:ea typeface="Calibri" charset="0"/>
                         <a:cs typeface="Calibri" charset="0"/>
@@ -7057,7 +6235,7 @@
                         <a:buNone/>
                       </a:pPr>
                       <a:r>
-                        <a:rPr lang="en-US" sz="1050" dirty="0">
+                        <a:rPr lang="en-US" sz="1100" dirty="0">
                           <a:solidFill>
                             <a:srgbClr val="33344A"/>
                           </a:solidFill>
@@ -7067,7 +6245,7 @@
                         </a:rPr>
                         <a:t>0.75</a:t>
                       </a:r>
-                      <a:endParaRPr lang="en-US" sz="1050" dirty="0">
+                      <a:endParaRPr lang="en-US" sz="1100" dirty="0">
                         <a:latin typeface="Calibri" charset="0"/>
                         <a:ea typeface="Calibri" charset="0"/>
                         <a:cs typeface="Calibri" charset="0"/>
@@ -7117,7 +6295,7 @@
                   </a:tcPr>
                 </a:tc>
               </a:tr>
-              <a:tr h="201168">
+              <a:tr h="187452">
                 <a:tc>
                   <a:txBody>
                     <a:bodyPr/>
@@ -7127,7 +6305,7 @@
                         <a:buNone/>
                       </a:pPr>
                       <a:r>
-                        <a:rPr lang="en-US" sz="1050" b="1" dirty="0">
+                        <a:rPr lang="en-US" sz="1100" b="1" dirty="0">
                           <a:solidFill>
                             <a:srgbClr val="33344A"/>
                           </a:solidFill>
@@ -7137,7 +6315,7 @@
                         </a:rPr>
                         <a:t>C</a:t>
                       </a:r>
-                      <a:endParaRPr lang="en-US" sz="1050" dirty="0">
+                      <a:endParaRPr lang="en-US" sz="1100" dirty="0">
                         <a:latin typeface="Calibri" charset="0"/>
                         <a:ea typeface="Calibri" charset="0"/>
                         <a:cs typeface="Calibri" charset="0"/>
@@ -7195,7 +6373,7 @@
                         <a:buNone/>
                       </a:pPr>
                       <a:r>
-                        <a:rPr lang="en-US" sz="1050" dirty="0">
+                        <a:rPr lang="en-US" sz="1100" dirty="0">
                           <a:solidFill>
                             <a:srgbClr val="1E2761"/>
                           </a:solidFill>
@@ -7205,7 +6383,7 @@
                         </a:rPr>
                         <a:t>0 (old)</a:t>
                       </a:r>
-                      <a:endParaRPr lang="en-US" sz="1050" dirty="0">
+                      <a:endParaRPr lang="en-US" sz="1100" dirty="0">
                         <a:latin typeface="Calibri" charset="0"/>
                         <a:ea typeface="Calibri" charset="0"/>
                         <a:cs typeface="Calibri" charset="0"/>
@@ -7263,7 +6441,7 @@
                         <a:buNone/>
                       </a:pPr>
                       <a:r>
-                        <a:rPr lang="en-US" sz="1050" dirty="0">
+                        <a:rPr lang="en-US" sz="1100" dirty="0">
                           <a:solidFill>
                             <a:srgbClr val="33344A"/>
                           </a:solidFill>
@@ -7273,7 +6451,7 @@
                         </a:rPr>
                         <a:t>0</a:t>
                       </a:r>
-                      <a:endParaRPr lang="en-US" sz="1050" dirty="0">
+                      <a:endParaRPr lang="en-US" sz="1100" dirty="0">
                         <a:latin typeface="Calibri" charset="0"/>
                         <a:ea typeface="Calibri" charset="0"/>
                         <a:cs typeface="Calibri" charset="0"/>
@@ -7331,7 +6509,7 @@
                         <a:buNone/>
                       </a:pPr>
                       <a:r>
-                        <a:rPr lang="en-US" sz="1050" dirty="0">
+                        <a:rPr lang="en-US" sz="1100" dirty="0">
                           <a:solidFill>
                             <a:srgbClr val="33344A"/>
                           </a:solidFill>
@@ -7341,7 +6519,7 @@
                         </a:rPr>
                         <a:t>0.30</a:t>
                       </a:r>
-                      <a:endParaRPr lang="en-US" sz="1050" dirty="0">
+                      <a:endParaRPr lang="en-US" sz="1100" dirty="0">
                         <a:latin typeface="Calibri" charset="0"/>
                         <a:ea typeface="Calibri" charset="0"/>
                         <a:cs typeface="Calibri" charset="0"/>
@@ -7391,835 +6569,94 @@
                   </a:tcPr>
                 </a:tc>
               </a:tr>
-              <a:tr h="201168">
-                <a:tc>
-                  <a:txBody>
-                    <a:bodyPr/>
-                    <a:lstStyle/>
-                    <a:p>
-                      <a:pPr algn="ctr" indent="0" marL="0">
-                        <a:buNone/>
-                      </a:pPr>
-                      <a:r>
-                        <a:rPr lang="en-US" sz="1050" b="1" dirty="0">
-                          <a:solidFill>
-                            <a:srgbClr val="33344A"/>
-                          </a:solidFill>
-                          <a:latin typeface="Calibri" pitchFamily="34" charset="0"/>
-                          <a:ea typeface="Calibri" pitchFamily="34" charset="-122"/>
-                          <a:cs typeface="Calibri" pitchFamily="34" charset="-120"/>
-                        </a:rPr>
-                        <a:t>D</a:t>
-                      </a:r>
-                      <a:endParaRPr lang="en-US" sz="1050" dirty="0">
-                        <a:latin typeface="Calibri" charset="0"/>
-                        <a:ea typeface="Calibri" charset="0"/>
-                        <a:cs typeface="Calibri" charset="0"/>
-                      </a:endParaRPr>
-                    </a:p>
-                  </a:txBody>
-                  <a:tcPr marL="45720" marR="45720" marT="18288" marB="18288" anchor="ctr">
-                    <a:lnL w="12700" cap="flat" cmpd="sng" algn="ctr">
-                      <a:solidFill>
-                        <a:srgbClr val="F0DFB0"/>
-                      </a:solidFill>
-                      <a:prstDash val="solid"/>
-                      <a:round/>
-                      <a:headEnd type="none" w="med" len="med"/>
-                      <a:tailEnd type="none" w="med" len="med"/>
-                    </a:lnL>
-                    <a:lnR w="12700" cap="flat" cmpd="sng" algn="ctr">
-                      <a:solidFill>
-                        <a:srgbClr val="F0DFB0"/>
-                      </a:solidFill>
-                      <a:prstDash val="solid"/>
-                      <a:round/>
-                      <a:headEnd type="none" w="med" len="med"/>
-                      <a:tailEnd type="none" w="med" len="med"/>
-                    </a:lnR>
-                    <a:lnT w="12700" cap="flat" cmpd="sng" algn="ctr">
-                      <a:solidFill>
-                        <a:srgbClr val="F0DFB0"/>
-                      </a:solidFill>
-                      <a:prstDash val="solid"/>
-                      <a:round/>
-                      <a:headEnd type="none" w="med" len="med"/>
-                      <a:tailEnd type="none" w="med" len="med"/>
-                    </a:lnT>
-                    <a:lnB w="12700" cap="flat" cmpd="sng" algn="ctr">
-                      <a:solidFill>
-                        <a:srgbClr val="F0DFB0"/>
-                      </a:solidFill>
-                      <a:prstDash val="solid"/>
-                      <a:round/>
-                      <a:headEnd type="none" w="med" len="med"/>
-                      <a:tailEnd type="none" w="med" len="med"/>
-                    </a:lnB>
-                    <a:solidFill>
-                      <a:srgbClr val="FBF3E1"/>
-                    </a:solidFill>
-                  </a:tcPr>
-                </a:tc>
-                <a:tc>
-                  <a:txBody>
-                    <a:bodyPr/>
-                    <a:lstStyle/>
-                    <a:p>
-                      <a:pPr algn="ctr" indent="0" marL="0">
-                        <a:buNone/>
-                      </a:pPr>
-                      <a:r>
-                        <a:rPr lang="en-US" sz="1050" dirty="0">
-                          <a:solidFill>
-                            <a:srgbClr val="B8892B"/>
-                          </a:solidFill>
-                          <a:latin typeface="Calibri" pitchFamily="34" charset="0"/>
-                          <a:ea typeface="Calibri" pitchFamily="34" charset="-122"/>
-                          <a:cs typeface="Calibri" pitchFamily="34" charset="-120"/>
-                        </a:rPr>
-                        <a:t>1 (new)</a:t>
-                      </a:r>
-                      <a:endParaRPr lang="en-US" sz="1050" dirty="0">
-                        <a:latin typeface="Calibri" charset="0"/>
-                        <a:ea typeface="Calibri" charset="0"/>
-                        <a:cs typeface="Calibri" charset="0"/>
-                      </a:endParaRPr>
-                    </a:p>
-                  </a:txBody>
-                  <a:tcPr marL="45720" marR="45720" marT="18288" marB="18288" anchor="ctr">
-                    <a:lnL w="12700" cap="flat" cmpd="sng" algn="ctr">
-                      <a:solidFill>
-                        <a:srgbClr val="F0DFB0"/>
-                      </a:solidFill>
-                      <a:prstDash val="solid"/>
-                      <a:round/>
-                      <a:headEnd type="none" w="med" len="med"/>
-                      <a:tailEnd type="none" w="med" len="med"/>
-                    </a:lnL>
-                    <a:lnR w="12700" cap="flat" cmpd="sng" algn="ctr">
-                      <a:solidFill>
-                        <a:srgbClr val="F0DFB0"/>
-                      </a:solidFill>
-                      <a:prstDash val="solid"/>
-                      <a:round/>
-                      <a:headEnd type="none" w="med" len="med"/>
-                      <a:tailEnd type="none" w="med" len="med"/>
-                    </a:lnR>
-                    <a:lnT w="12700" cap="flat" cmpd="sng" algn="ctr">
-                      <a:solidFill>
-                        <a:srgbClr val="F0DFB0"/>
-                      </a:solidFill>
-                      <a:prstDash val="solid"/>
-                      <a:round/>
-                      <a:headEnd type="none" w="med" len="med"/>
-                      <a:tailEnd type="none" w="med" len="med"/>
-                    </a:lnT>
-                    <a:lnB w="12700" cap="flat" cmpd="sng" algn="ctr">
-                      <a:solidFill>
-                        <a:srgbClr val="F0DFB0"/>
-                      </a:solidFill>
-                      <a:prstDash val="solid"/>
-                      <a:round/>
-                      <a:headEnd type="none" w="med" len="med"/>
-                      <a:tailEnd type="none" w="med" len="med"/>
-                    </a:lnB>
-                    <a:solidFill>
-                      <a:srgbClr val="FBF3E1"/>
-                    </a:solidFill>
-                  </a:tcPr>
-                </a:tc>
-                <a:tc>
-                  <a:txBody>
-                    <a:bodyPr/>
-                    <a:lstStyle/>
-                    <a:p>
-                      <a:pPr algn="ctr" indent="0" marL="0">
-                        <a:buNone/>
-                      </a:pPr>
-                      <a:r>
-                        <a:rPr lang="en-US" sz="1050" dirty="0">
-                          <a:solidFill>
-                            <a:srgbClr val="33344A"/>
-                          </a:solidFill>
-                          <a:latin typeface="Calibri" pitchFamily="34" charset="0"/>
-                          <a:ea typeface="Calibri" pitchFamily="34" charset="-122"/>
-                          <a:cs typeface="Calibri" pitchFamily="34" charset="-120"/>
-                        </a:rPr>
-                        <a:t>1</a:t>
-                      </a:r>
-                      <a:endParaRPr lang="en-US" sz="1050" dirty="0">
-                        <a:latin typeface="Calibri" charset="0"/>
-                        <a:ea typeface="Calibri" charset="0"/>
-                        <a:cs typeface="Calibri" charset="0"/>
-                      </a:endParaRPr>
-                    </a:p>
-                  </a:txBody>
-                  <a:tcPr marL="45720" marR="45720" marT="18288" marB="18288" anchor="ctr">
-                    <a:lnL w="12700" cap="flat" cmpd="sng" algn="ctr">
-                      <a:solidFill>
-                        <a:srgbClr val="F0DFB0"/>
-                      </a:solidFill>
-                      <a:prstDash val="solid"/>
-                      <a:round/>
-                      <a:headEnd type="none" w="med" len="med"/>
-                      <a:tailEnd type="none" w="med" len="med"/>
-                    </a:lnL>
-                    <a:lnR w="12700" cap="flat" cmpd="sng" algn="ctr">
-                      <a:solidFill>
-                        <a:srgbClr val="F0DFB0"/>
-                      </a:solidFill>
-                      <a:prstDash val="solid"/>
-                      <a:round/>
-                      <a:headEnd type="none" w="med" len="med"/>
-                      <a:tailEnd type="none" w="med" len="med"/>
-                    </a:lnR>
-                    <a:lnT w="12700" cap="flat" cmpd="sng" algn="ctr">
-                      <a:solidFill>
-                        <a:srgbClr val="F0DFB0"/>
-                      </a:solidFill>
-                      <a:prstDash val="solid"/>
-                      <a:round/>
-                      <a:headEnd type="none" w="med" len="med"/>
-                      <a:tailEnd type="none" w="med" len="med"/>
-                    </a:lnT>
-                    <a:lnB w="12700" cap="flat" cmpd="sng" algn="ctr">
-                      <a:solidFill>
-                        <a:srgbClr val="F0DFB0"/>
-                      </a:solidFill>
-                      <a:prstDash val="solid"/>
-                      <a:round/>
-                      <a:headEnd type="none" w="med" len="med"/>
-                      <a:tailEnd type="none" w="med" len="med"/>
-                    </a:lnB>
-                    <a:solidFill>
-                      <a:srgbClr val="FBF3E1"/>
-                    </a:solidFill>
-                  </a:tcPr>
-                </a:tc>
-                <a:tc>
-                  <a:txBody>
-                    <a:bodyPr/>
-                    <a:lstStyle/>
-                    <a:p>
-                      <a:pPr algn="ctr" indent="0" marL="0">
-                        <a:buNone/>
-                      </a:pPr>
-                      <a:r>
-                        <a:rPr lang="en-US" sz="1050" dirty="0">
-                          <a:solidFill>
-                            <a:srgbClr val="33344A"/>
-                          </a:solidFill>
-                          <a:latin typeface="Calibri" pitchFamily="34" charset="0"/>
-                          <a:ea typeface="Calibri" pitchFamily="34" charset="-122"/>
-                          <a:cs typeface="Calibri" pitchFamily="34" charset="-120"/>
-                        </a:rPr>
-                        <a:t>0.80</a:t>
-                      </a:r>
-                      <a:endParaRPr lang="en-US" sz="1050" dirty="0">
-                        <a:latin typeface="Calibri" charset="0"/>
-                        <a:ea typeface="Calibri" charset="0"/>
-                        <a:cs typeface="Calibri" charset="0"/>
-                      </a:endParaRPr>
-                    </a:p>
-                  </a:txBody>
-                  <a:tcPr marL="45720" marR="45720" marT="18288" marB="18288" anchor="ctr">
-                    <a:lnL w="12700" cap="flat" cmpd="sng" algn="ctr">
-                      <a:solidFill>
-                        <a:srgbClr val="F0DFB0"/>
-                      </a:solidFill>
-                      <a:prstDash val="solid"/>
-                      <a:round/>
-                      <a:headEnd type="none" w="med" len="med"/>
-                      <a:tailEnd type="none" w="med" len="med"/>
-                    </a:lnL>
-                    <a:lnR w="12700" cap="flat" cmpd="sng" algn="ctr">
-                      <a:solidFill>
-                        <a:srgbClr val="F0DFB0"/>
-                      </a:solidFill>
-                      <a:prstDash val="solid"/>
-                      <a:round/>
-                      <a:headEnd type="none" w="med" len="med"/>
-                      <a:tailEnd type="none" w="med" len="med"/>
-                    </a:lnR>
-                    <a:lnT w="12700" cap="flat" cmpd="sng" algn="ctr">
-                      <a:solidFill>
-                        <a:srgbClr val="F0DFB0"/>
-                      </a:solidFill>
-                      <a:prstDash val="solid"/>
-                      <a:round/>
-                      <a:headEnd type="none" w="med" len="med"/>
-                      <a:tailEnd type="none" w="med" len="med"/>
-                    </a:lnT>
-                    <a:lnB w="12700" cap="flat" cmpd="sng" algn="ctr">
-                      <a:solidFill>
-                        <a:srgbClr val="F0DFB0"/>
-                      </a:solidFill>
-                      <a:prstDash val="solid"/>
-                      <a:round/>
-                      <a:headEnd type="none" w="med" len="med"/>
-                      <a:tailEnd type="none" w="med" len="med"/>
-                    </a:lnB>
-                    <a:solidFill>
-                      <a:srgbClr val="FBF3E1"/>
-                    </a:solidFill>
-                  </a:tcPr>
-                </a:tc>
-              </a:tr>
-              <a:tr h="201168">
-                <a:tc>
-                  <a:txBody>
-                    <a:bodyPr/>
-                    <a:lstStyle/>
-                    <a:p>
-                      <a:pPr algn="ctr" indent="0" marL="0">
-                        <a:buNone/>
-                      </a:pPr>
-                      <a:r>
-                        <a:rPr lang="en-US" sz="1050" b="1" dirty="0">
-                          <a:solidFill>
-                            <a:srgbClr val="33344A"/>
-                          </a:solidFill>
-                          <a:latin typeface="Calibri" pitchFamily="34" charset="0"/>
-                          <a:ea typeface="Calibri" pitchFamily="34" charset="-122"/>
-                          <a:cs typeface="Calibri" pitchFamily="34" charset="-120"/>
-                        </a:rPr>
-                        <a:t>E</a:t>
-                      </a:r>
-                      <a:endParaRPr lang="en-US" sz="1050" dirty="0">
-                        <a:latin typeface="Calibri" charset="0"/>
-                        <a:ea typeface="Calibri" charset="0"/>
-                        <a:cs typeface="Calibri" charset="0"/>
-                      </a:endParaRPr>
-                    </a:p>
-                  </a:txBody>
-                  <a:tcPr marL="45720" marR="45720" marT="18288" marB="18288" anchor="ctr">
-                    <a:lnL w="12700" cap="flat" cmpd="sng" algn="ctr">
-                      <a:solidFill>
-                        <a:srgbClr val="F0DFB0"/>
-                      </a:solidFill>
-                      <a:prstDash val="solid"/>
-                      <a:round/>
-                      <a:headEnd type="none" w="med" len="med"/>
-                      <a:tailEnd type="none" w="med" len="med"/>
-                    </a:lnL>
-                    <a:lnR w="12700" cap="flat" cmpd="sng" algn="ctr">
-                      <a:solidFill>
-                        <a:srgbClr val="F0DFB0"/>
-                      </a:solidFill>
-                      <a:prstDash val="solid"/>
-                      <a:round/>
-                      <a:headEnd type="none" w="med" len="med"/>
-                      <a:tailEnd type="none" w="med" len="med"/>
-                    </a:lnR>
-                    <a:lnT w="12700" cap="flat" cmpd="sng" algn="ctr">
-                      <a:solidFill>
-                        <a:srgbClr val="F0DFB0"/>
-                      </a:solidFill>
-                      <a:prstDash val="solid"/>
-                      <a:round/>
-                      <a:headEnd type="none" w="med" len="med"/>
-                      <a:tailEnd type="none" w="med" len="med"/>
-                    </a:lnT>
-                    <a:lnB w="12700" cap="flat" cmpd="sng" algn="ctr">
-                      <a:solidFill>
-                        <a:srgbClr val="F0DFB0"/>
-                      </a:solidFill>
-                      <a:prstDash val="solid"/>
-                      <a:round/>
-                      <a:headEnd type="none" w="med" len="med"/>
-                      <a:tailEnd type="none" w="med" len="med"/>
-                    </a:lnB>
-                    <a:solidFill>
-                      <a:srgbClr val="FFFFFF"/>
-                    </a:solidFill>
-                  </a:tcPr>
-                </a:tc>
-                <a:tc>
-                  <a:txBody>
-                    <a:bodyPr/>
-                    <a:lstStyle/>
-                    <a:p>
-                      <a:pPr algn="ctr" indent="0" marL="0">
-                        <a:buNone/>
-                      </a:pPr>
-                      <a:r>
-                        <a:rPr lang="en-US" sz="1050" dirty="0">
-                          <a:solidFill>
-                            <a:srgbClr val="B8892B"/>
-                          </a:solidFill>
-                          <a:latin typeface="Calibri" pitchFamily="34" charset="0"/>
-                          <a:ea typeface="Calibri" pitchFamily="34" charset="-122"/>
-                          <a:cs typeface="Calibri" pitchFamily="34" charset="-120"/>
-                        </a:rPr>
-                        <a:t>1 (new)</a:t>
-                      </a:r>
-                      <a:endParaRPr lang="en-US" sz="1050" dirty="0">
-                        <a:latin typeface="Calibri" charset="0"/>
-                        <a:ea typeface="Calibri" charset="0"/>
-                        <a:cs typeface="Calibri" charset="0"/>
-                      </a:endParaRPr>
-                    </a:p>
-                  </a:txBody>
-                  <a:tcPr marL="45720" marR="45720" marT="18288" marB="18288" anchor="ctr">
-                    <a:lnL w="12700" cap="flat" cmpd="sng" algn="ctr">
-                      <a:solidFill>
-                        <a:srgbClr val="F0DFB0"/>
-                      </a:solidFill>
-                      <a:prstDash val="solid"/>
-                      <a:round/>
-                      <a:headEnd type="none" w="med" len="med"/>
-                      <a:tailEnd type="none" w="med" len="med"/>
-                    </a:lnL>
-                    <a:lnR w="12700" cap="flat" cmpd="sng" algn="ctr">
-                      <a:solidFill>
-                        <a:srgbClr val="F0DFB0"/>
-                      </a:solidFill>
-                      <a:prstDash val="solid"/>
-                      <a:round/>
-                      <a:headEnd type="none" w="med" len="med"/>
-                      <a:tailEnd type="none" w="med" len="med"/>
-                    </a:lnR>
-                    <a:lnT w="12700" cap="flat" cmpd="sng" algn="ctr">
-                      <a:solidFill>
-                        <a:srgbClr val="F0DFB0"/>
-                      </a:solidFill>
-                      <a:prstDash val="solid"/>
-                      <a:round/>
-                      <a:headEnd type="none" w="med" len="med"/>
-                      <a:tailEnd type="none" w="med" len="med"/>
-                    </a:lnT>
-                    <a:lnB w="12700" cap="flat" cmpd="sng" algn="ctr">
-                      <a:solidFill>
-                        <a:srgbClr val="F0DFB0"/>
-                      </a:solidFill>
-                      <a:prstDash val="solid"/>
-                      <a:round/>
-                      <a:headEnd type="none" w="med" len="med"/>
-                      <a:tailEnd type="none" w="med" len="med"/>
-                    </a:lnB>
-                    <a:solidFill>
-                      <a:srgbClr val="FFFFFF"/>
-                    </a:solidFill>
-                  </a:tcPr>
-                </a:tc>
-                <a:tc>
-                  <a:txBody>
-                    <a:bodyPr/>
-                    <a:lstStyle/>
-                    <a:p>
-                      <a:pPr algn="ctr" indent="0" marL="0">
-                        <a:buNone/>
-                      </a:pPr>
-                      <a:r>
-                        <a:rPr lang="en-US" sz="1050" dirty="0">
-                          <a:solidFill>
-                            <a:srgbClr val="33344A"/>
-                          </a:solidFill>
-                          <a:latin typeface="Calibri" pitchFamily="34" charset="0"/>
-                          <a:ea typeface="Calibri" pitchFamily="34" charset="-122"/>
-                          <a:cs typeface="Calibri" pitchFamily="34" charset="-120"/>
-                        </a:rPr>
-                        <a:t>0</a:t>
-                      </a:r>
-                      <a:endParaRPr lang="en-US" sz="1050" dirty="0">
-                        <a:latin typeface="Calibri" charset="0"/>
-                        <a:ea typeface="Calibri" charset="0"/>
-                        <a:cs typeface="Calibri" charset="0"/>
-                      </a:endParaRPr>
-                    </a:p>
-                  </a:txBody>
-                  <a:tcPr marL="45720" marR="45720" marT="18288" marB="18288" anchor="ctr">
-                    <a:lnL w="12700" cap="flat" cmpd="sng" algn="ctr">
-                      <a:solidFill>
-                        <a:srgbClr val="F0DFB0"/>
-                      </a:solidFill>
-                      <a:prstDash val="solid"/>
-                      <a:round/>
-                      <a:headEnd type="none" w="med" len="med"/>
-                      <a:tailEnd type="none" w="med" len="med"/>
-                    </a:lnL>
-                    <a:lnR w="12700" cap="flat" cmpd="sng" algn="ctr">
-                      <a:solidFill>
-                        <a:srgbClr val="F0DFB0"/>
-                      </a:solidFill>
-                      <a:prstDash val="solid"/>
-                      <a:round/>
-                      <a:headEnd type="none" w="med" len="med"/>
-                      <a:tailEnd type="none" w="med" len="med"/>
-                    </a:lnR>
-                    <a:lnT w="12700" cap="flat" cmpd="sng" algn="ctr">
-                      <a:solidFill>
-                        <a:srgbClr val="F0DFB0"/>
-                      </a:solidFill>
-                      <a:prstDash val="solid"/>
-                      <a:round/>
-                      <a:headEnd type="none" w="med" len="med"/>
-                      <a:tailEnd type="none" w="med" len="med"/>
-                    </a:lnT>
-                    <a:lnB w="12700" cap="flat" cmpd="sng" algn="ctr">
-                      <a:solidFill>
-                        <a:srgbClr val="F0DFB0"/>
-                      </a:solidFill>
-                      <a:prstDash val="solid"/>
-                      <a:round/>
-                      <a:headEnd type="none" w="med" len="med"/>
-                      <a:tailEnd type="none" w="med" len="med"/>
-                    </a:lnB>
-                    <a:solidFill>
-                      <a:srgbClr val="FFFFFF"/>
-                    </a:solidFill>
-                  </a:tcPr>
-                </a:tc>
-                <a:tc>
-                  <a:txBody>
-                    <a:bodyPr/>
-                    <a:lstStyle/>
-                    <a:p>
-                      <a:pPr algn="ctr" indent="0" marL="0">
-                        <a:buNone/>
-                      </a:pPr>
-                      <a:r>
-                        <a:rPr lang="en-US" sz="1050" dirty="0">
-                          <a:solidFill>
-                            <a:srgbClr val="33344A"/>
-                          </a:solidFill>
-                          <a:latin typeface="Calibri" pitchFamily="34" charset="0"/>
-                          <a:ea typeface="Calibri" pitchFamily="34" charset="-122"/>
-                          <a:cs typeface="Calibri" pitchFamily="34" charset="-120"/>
-                        </a:rPr>
-                        <a:t>0.40</a:t>
-                      </a:r>
-                      <a:endParaRPr lang="en-US" sz="1050" dirty="0">
-                        <a:latin typeface="Calibri" charset="0"/>
-                        <a:ea typeface="Calibri" charset="0"/>
-                        <a:cs typeface="Calibri" charset="0"/>
-                      </a:endParaRPr>
-                    </a:p>
-                  </a:txBody>
-                  <a:tcPr marL="45720" marR="45720" marT="18288" marB="18288" anchor="ctr">
-                    <a:lnL w="12700" cap="flat" cmpd="sng" algn="ctr">
-                      <a:solidFill>
-                        <a:srgbClr val="F0DFB0"/>
-                      </a:solidFill>
-                      <a:prstDash val="solid"/>
-                      <a:round/>
-                      <a:headEnd type="none" w="med" len="med"/>
-                      <a:tailEnd type="none" w="med" len="med"/>
-                    </a:lnL>
-                    <a:lnR w="12700" cap="flat" cmpd="sng" algn="ctr">
-                      <a:solidFill>
-                        <a:srgbClr val="F0DFB0"/>
-                      </a:solidFill>
-                      <a:prstDash val="solid"/>
-                      <a:round/>
-                      <a:headEnd type="none" w="med" len="med"/>
-                      <a:tailEnd type="none" w="med" len="med"/>
-                    </a:lnR>
-                    <a:lnT w="12700" cap="flat" cmpd="sng" algn="ctr">
-                      <a:solidFill>
-                        <a:srgbClr val="F0DFB0"/>
-                      </a:solidFill>
-                      <a:prstDash val="solid"/>
-                      <a:round/>
-                      <a:headEnd type="none" w="med" len="med"/>
-                      <a:tailEnd type="none" w="med" len="med"/>
-                    </a:lnT>
-                    <a:lnB w="12700" cap="flat" cmpd="sng" algn="ctr">
-                      <a:solidFill>
-                        <a:srgbClr val="F0DFB0"/>
-                      </a:solidFill>
-                      <a:prstDash val="solid"/>
-                      <a:round/>
-                      <a:headEnd type="none" w="med" len="med"/>
-                      <a:tailEnd type="none" w="med" len="med"/>
-                    </a:lnB>
-                    <a:solidFill>
-                      <a:srgbClr val="FFFFFF"/>
-                    </a:solidFill>
-                  </a:tcPr>
-                </a:tc>
-              </a:tr>
-              <a:tr h="201168">
-                <a:tc>
-                  <a:txBody>
-                    <a:bodyPr/>
-                    <a:lstStyle/>
-                    <a:p>
-                      <a:pPr algn="ctr" indent="0" marL="0">
-                        <a:buNone/>
-                      </a:pPr>
-                      <a:r>
-                        <a:rPr lang="en-US" sz="1050" b="1" dirty="0">
-                          <a:solidFill>
-                            <a:srgbClr val="33344A"/>
-                          </a:solidFill>
-                          <a:latin typeface="Calibri" pitchFamily="34" charset="0"/>
-                          <a:ea typeface="Calibri" pitchFamily="34" charset="-122"/>
-                          <a:cs typeface="Calibri" pitchFamily="34" charset="-120"/>
-                        </a:rPr>
-                        <a:t>F</a:t>
-                      </a:r>
-                      <a:endParaRPr lang="en-US" sz="1050" dirty="0">
-                        <a:latin typeface="Calibri" charset="0"/>
-                        <a:ea typeface="Calibri" charset="0"/>
-                        <a:cs typeface="Calibri" charset="0"/>
-                      </a:endParaRPr>
-                    </a:p>
-                  </a:txBody>
-                  <a:tcPr marL="45720" marR="45720" marT="18288" marB="18288" anchor="ctr">
-                    <a:lnL w="12700" cap="flat" cmpd="sng" algn="ctr">
-                      <a:solidFill>
-                        <a:srgbClr val="F0DFB0"/>
-                      </a:solidFill>
-                      <a:prstDash val="solid"/>
-                      <a:round/>
-                      <a:headEnd type="none" w="med" len="med"/>
-                      <a:tailEnd type="none" w="med" len="med"/>
-                    </a:lnL>
-                    <a:lnR w="12700" cap="flat" cmpd="sng" algn="ctr">
-                      <a:solidFill>
-                        <a:srgbClr val="F0DFB0"/>
-                      </a:solidFill>
-                      <a:prstDash val="solid"/>
-                      <a:round/>
-                      <a:headEnd type="none" w="med" len="med"/>
-                      <a:tailEnd type="none" w="med" len="med"/>
-                    </a:lnR>
-                    <a:lnT w="12700" cap="flat" cmpd="sng" algn="ctr">
-                      <a:solidFill>
-                        <a:srgbClr val="F0DFB0"/>
-                      </a:solidFill>
-                      <a:prstDash val="solid"/>
-                      <a:round/>
-                      <a:headEnd type="none" w="med" len="med"/>
-                      <a:tailEnd type="none" w="med" len="med"/>
-                    </a:lnT>
-                    <a:lnB w="12700" cap="flat" cmpd="sng" algn="ctr">
-                      <a:solidFill>
-                        <a:srgbClr val="F0DFB0"/>
-                      </a:solidFill>
-                      <a:prstDash val="solid"/>
-                      <a:round/>
-                      <a:headEnd type="none" w="med" len="med"/>
-                      <a:tailEnd type="none" w="med" len="med"/>
-                    </a:lnB>
-                    <a:solidFill>
-                      <a:srgbClr val="FBF3E1"/>
-                    </a:solidFill>
-                  </a:tcPr>
-                </a:tc>
-                <a:tc>
-                  <a:txBody>
-                    <a:bodyPr/>
-                    <a:lstStyle/>
-                    <a:p>
-                      <a:pPr algn="ctr" indent="0" marL="0">
-                        <a:buNone/>
-                      </a:pPr>
-                      <a:r>
-                        <a:rPr lang="en-US" sz="1050" dirty="0">
-                          <a:solidFill>
-                            <a:srgbClr val="B8892B"/>
-                          </a:solidFill>
-                          <a:latin typeface="Calibri" pitchFamily="34" charset="0"/>
-                          <a:ea typeface="Calibri" pitchFamily="34" charset="-122"/>
-                          <a:cs typeface="Calibri" pitchFamily="34" charset="-120"/>
-                        </a:rPr>
-                        <a:t>1 (new)</a:t>
-                      </a:r>
-                      <a:endParaRPr lang="en-US" sz="1050" dirty="0">
-                        <a:latin typeface="Calibri" charset="0"/>
-                        <a:ea typeface="Calibri" charset="0"/>
-                        <a:cs typeface="Calibri" charset="0"/>
-                      </a:endParaRPr>
-                    </a:p>
-                  </a:txBody>
-                  <a:tcPr marL="45720" marR="45720" marT="18288" marB="18288" anchor="ctr">
-                    <a:lnL w="12700" cap="flat" cmpd="sng" algn="ctr">
-                      <a:solidFill>
-                        <a:srgbClr val="F0DFB0"/>
-                      </a:solidFill>
-                      <a:prstDash val="solid"/>
-                      <a:round/>
-                      <a:headEnd type="none" w="med" len="med"/>
-                      <a:tailEnd type="none" w="med" len="med"/>
-                    </a:lnL>
-                    <a:lnR w="12700" cap="flat" cmpd="sng" algn="ctr">
-                      <a:solidFill>
-                        <a:srgbClr val="F0DFB0"/>
-                      </a:solidFill>
-                      <a:prstDash val="solid"/>
-                      <a:round/>
-                      <a:headEnd type="none" w="med" len="med"/>
-                      <a:tailEnd type="none" w="med" len="med"/>
-                    </a:lnR>
-                    <a:lnT w="12700" cap="flat" cmpd="sng" algn="ctr">
-                      <a:solidFill>
-                        <a:srgbClr val="F0DFB0"/>
-                      </a:solidFill>
-                      <a:prstDash val="solid"/>
-                      <a:round/>
-                      <a:headEnd type="none" w="med" len="med"/>
-                      <a:tailEnd type="none" w="med" len="med"/>
-                    </a:lnT>
-                    <a:lnB w="12700" cap="flat" cmpd="sng" algn="ctr">
-                      <a:solidFill>
-                        <a:srgbClr val="F0DFB0"/>
-                      </a:solidFill>
-                      <a:prstDash val="solid"/>
-                      <a:round/>
-                      <a:headEnd type="none" w="med" len="med"/>
-                      <a:tailEnd type="none" w="med" len="med"/>
-                    </a:lnB>
-                    <a:solidFill>
-                      <a:srgbClr val="FBF3E1"/>
-                    </a:solidFill>
-                  </a:tcPr>
-                </a:tc>
-                <a:tc>
-                  <a:txBody>
-                    <a:bodyPr/>
-                    <a:lstStyle/>
-                    <a:p>
-                      <a:pPr algn="ctr" indent="0" marL="0">
-                        <a:buNone/>
-                      </a:pPr>
-                      <a:r>
-                        <a:rPr lang="en-US" sz="1050" dirty="0">
-                          <a:solidFill>
-                            <a:srgbClr val="33344A"/>
-                          </a:solidFill>
-                          <a:latin typeface="Calibri" pitchFamily="34" charset="0"/>
-                          <a:ea typeface="Calibri" pitchFamily="34" charset="-122"/>
-                          <a:cs typeface="Calibri" pitchFamily="34" charset="-120"/>
-                        </a:rPr>
-                        <a:t>1</a:t>
-                      </a:r>
-                      <a:endParaRPr lang="en-US" sz="1050" dirty="0">
-                        <a:latin typeface="Calibri" charset="0"/>
-                        <a:ea typeface="Calibri" charset="0"/>
-                        <a:cs typeface="Calibri" charset="0"/>
-                      </a:endParaRPr>
-                    </a:p>
-                  </a:txBody>
-                  <a:tcPr marL="45720" marR="45720" marT="18288" marB="18288" anchor="ctr">
-                    <a:lnL w="12700" cap="flat" cmpd="sng" algn="ctr">
-                      <a:solidFill>
-                        <a:srgbClr val="F0DFB0"/>
-                      </a:solidFill>
-                      <a:prstDash val="solid"/>
-                      <a:round/>
-                      <a:headEnd type="none" w="med" len="med"/>
-                      <a:tailEnd type="none" w="med" len="med"/>
-                    </a:lnL>
-                    <a:lnR w="12700" cap="flat" cmpd="sng" algn="ctr">
-                      <a:solidFill>
-                        <a:srgbClr val="F0DFB0"/>
-                      </a:solidFill>
-                      <a:prstDash val="solid"/>
-                      <a:round/>
-                      <a:headEnd type="none" w="med" len="med"/>
-                      <a:tailEnd type="none" w="med" len="med"/>
-                    </a:lnR>
-                    <a:lnT w="12700" cap="flat" cmpd="sng" algn="ctr">
-                      <a:solidFill>
-                        <a:srgbClr val="F0DFB0"/>
-                      </a:solidFill>
-                      <a:prstDash val="solid"/>
-                      <a:round/>
-                      <a:headEnd type="none" w="med" len="med"/>
-                      <a:tailEnd type="none" w="med" len="med"/>
-                    </a:lnT>
-                    <a:lnB w="12700" cap="flat" cmpd="sng" algn="ctr">
-                      <a:solidFill>
-                        <a:srgbClr val="F0DFB0"/>
-                      </a:solidFill>
-                      <a:prstDash val="solid"/>
-                      <a:round/>
-                      <a:headEnd type="none" w="med" len="med"/>
-                      <a:tailEnd type="none" w="med" len="med"/>
-                    </a:lnB>
-                    <a:solidFill>
-                      <a:srgbClr val="FBF3E1"/>
-                    </a:solidFill>
-                  </a:tcPr>
-                </a:tc>
-                <a:tc>
-                  <a:txBody>
-                    <a:bodyPr/>
-                    <a:lstStyle/>
-                    <a:p>
-                      <a:pPr algn="ctr" indent="0" marL="0">
-                        <a:buNone/>
-                      </a:pPr>
-                      <a:r>
-                        <a:rPr lang="en-US" sz="1050" dirty="0">
-                          <a:solidFill>
-                            <a:srgbClr val="33344A"/>
-                          </a:solidFill>
-                          <a:latin typeface="Calibri" pitchFamily="34" charset="0"/>
-                          <a:ea typeface="Calibri" pitchFamily="34" charset="-122"/>
-                          <a:cs typeface="Calibri" pitchFamily="34" charset="-120"/>
-                        </a:rPr>
-                        <a:t>0.70</a:t>
-                      </a:r>
-                      <a:endParaRPr lang="en-US" sz="1050" dirty="0">
-                        <a:latin typeface="Calibri" charset="0"/>
-                        <a:ea typeface="Calibri" charset="0"/>
-                        <a:cs typeface="Calibri" charset="0"/>
-                      </a:endParaRPr>
-                    </a:p>
-                  </a:txBody>
-                  <a:tcPr marL="45720" marR="45720" marT="18288" marB="18288" anchor="ctr">
-                    <a:lnL w="12700" cap="flat" cmpd="sng" algn="ctr">
-                      <a:solidFill>
-                        <a:srgbClr val="F0DFB0"/>
-                      </a:solidFill>
-                      <a:prstDash val="solid"/>
-                      <a:round/>
-                      <a:headEnd type="none" w="med" len="med"/>
-                      <a:tailEnd type="none" w="med" len="med"/>
-                    </a:lnL>
-                    <a:lnR w="12700" cap="flat" cmpd="sng" algn="ctr">
-                      <a:solidFill>
-                        <a:srgbClr val="F0DFB0"/>
-                      </a:solidFill>
-                      <a:prstDash val="solid"/>
-                      <a:round/>
-                      <a:headEnd type="none" w="med" len="med"/>
-                      <a:tailEnd type="none" w="med" len="med"/>
-                    </a:lnR>
-                    <a:lnT w="12700" cap="flat" cmpd="sng" algn="ctr">
-                      <a:solidFill>
-                        <a:srgbClr val="F0DFB0"/>
-                      </a:solidFill>
-                      <a:prstDash val="solid"/>
-                      <a:round/>
-                      <a:headEnd type="none" w="med" len="med"/>
-                      <a:tailEnd type="none" w="med" len="med"/>
-                    </a:lnT>
-                    <a:lnB w="12700" cap="flat" cmpd="sng" algn="ctr">
-                      <a:solidFill>
-                        <a:srgbClr val="F0DFB0"/>
-                      </a:solidFill>
-                      <a:prstDash val="solid"/>
-                      <a:round/>
-                      <a:headEnd type="none" w="med" len="med"/>
-                      <a:tailEnd type="none" w="med" len="med"/>
-                    </a:lnB>
-                    <a:solidFill>
-                      <a:srgbClr val="FBF3E1"/>
-                    </a:solidFill>
-                  </a:tcPr>
-                </a:tc>
-              </a:tr>
             </a:tbl>
           </a:graphicData>
         </a:graphic>
       </p:graphicFrame>
       <p:sp>
         <p:nvSpPr>
-          <p:cNvPr id="19" name="Text 13"/>
+          <p:cNvPr id="19" name="Shape 13"/>
+          <p:cNvSpPr/>
+          <p:nvPr/>
+        </p:nvSpPr>
+        <p:spPr>
+          <a:xfrm>
+            <a:off x="548640" y="5724144"/>
+            <a:ext cx="11064240" cy="502920"/>
+          </a:xfrm>
+          <a:prstGeom prst="roundRect">
+            <a:avLst>
+              <a:gd name="adj" fmla="val 10909"/>
+            </a:avLst>
+          </a:prstGeom>
+          <a:solidFill>
+            <a:srgbClr val="141B4D"/>
+          </a:solidFill>
+          <a:ln/>
+        </p:spPr>
+      </p:sp>
+      <p:sp>
+        <p:nvSpPr>
+          <p:cNvPr id="20" name="Text 14"/>
+          <p:cNvSpPr txBox="1"/>
+          <p:nvPr/>
+        </p:nvSpPr>
+        <p:spPr>
+          <a:xfrm>
+            <a:off x="777240" y="5724144"/>
+            <a:ext cx="10607040" cy="502920"/>
+          </a:xfrm>
+          <a:prstGeom prst="rect">
+            <a:avLst/>
+          </a:prstGeom>
+          <a:noFill/>
+          <a:ln/>
+        </p:spPr>
+        <p:txBody>
+          <a:bodyPr wrap="square" lIns="0" tIns="0" rIns="0" bIns="0" rtlCol="0" anchor="ctr"/>
+          <a:lstStyle/>
+          <a:p>
+            <a:pPr indent="0" marL="0">
+              <a:lnSpc>
+                <a:spcPct val="110000"/>
+              </a:lnSpc>
+              <a:buNone/>
+            </a:pPr>
+            <a:r>
+              <a:rPr lang="en-US" sz="1050" b="1" dirty="0">
+                <a:solidFill>
+                  <a:srgbClr val="B8892B"/>
+                </a:solidFill>
+                <a:latin typeface="Calibri" pitchFamily="34" charset="0"/>
+                <a:ea typeface="Calibri" pitchFamily="34" charset="-122"/>
+                <a:cs typeface="Calibri" pitchFamily="34" charset="-120"/>
+              </a:rPr>
+              <a:t>Neither model ever scores its own training arm — </a:t>
+            </a:r>
+            <a:pPr indent="0" marL="0">
+              <a:lnSpc>
+                <a:spcPct val="110000"/>
+              </a:lnSpc>
+              <a:buNone/>
+            </a:pPr>
+            <a:r>
+              <a:rPr lang="en-US" sz="1050" dirty="0">
+                <a:solidFill>
+                  <a:srgbClr val="FFFFFF"/>
+                </a:solidFill>
+                <a:latin typeface="Calibri" pitchFamily="34" charset="0"/>
+                <a:ea typeface="Calibri" pitchFamily="34" charset="-122"/>
+                <a:cs typeface="Calibri" pitchFamily="34" charset="-120"/>
+              </a:rPr>
+              <a:t>A, B, C already have a real Applied outcome (they never needed μ̂₀'s guess), and D, E, F already have theirs (they never needed μ̂₁'s guess). Only the counterfactual — the arm each model never saw — gets predicted.</a:t>
+            </a:r>
+            <a:endParaRPr lang="en-US" sz="1050" dirty="0"/>
+          </a:p>
+        </p:txBody>
+      </p:sp>
+      <p:sp>
+        <p:nvSpPr>
+          <p:cNvPr id="21" name="Text 15"/>
           <p:cNvSpPr txBox="1"/>
           <p:nvPr/>
         </p:nvSpPr>
@@ -8258,7 +6695,7 @@
       </p:sp>
       <p:sp>
         <p:nvSpPr>
-          <p:cNvPr id="20" name="Text 14"/>
+          <p:cNvPr id="22" name="Text 16"/>
           <p:cNvSpPr txBox="1"/>
           <p:nvPr/>
         </p:nvSpPr>

--- a/uplift_model_deck.pptx
+++ b/uplift_model_deck.pptx
@@ -10144,108 +10144,8 @@
         </p:nvSpPr>
         <p:spPr>
           <a:xfrm>
-            <a:off x="548640" y="1417320"/>
-            <a:ext cx="11064240" cy="411480"/>
-          </a:xfrm>
-          <a:prstGeom prst="rect">
-            <a:avLst/>
-          </a:prstGeom>
-          <a:noFill/>
-          <a:ln/>
-        </p:spPr>
-        <p:txBody>
-          <a:bodyPr wrap="square" lIns="0" tIns="0" rIns="0" bIns="0" rtlCol="0" anchor="ctr"/>
-          <a:lstStyle/>
-          <a:p>
-            <a:pPr indent="0" marL="0">
-              <a:buNone/>
-            </a:pPr>
-            <a:r>
-              <a:rPr lang="en-US" sz="1300" dirty="0">
-                <a:solidFill>
-                  <a:srgbClr val="33344A"/>
-                </a:solidFill>
-                <a:latin typeface="Calibri" pitchFamily="34" charset="0"/>
-                <a:ea typeface="Calibri" pitchFamily="34" charset="-122"/>
-                <a:cs typeface="Calibri" pitchFamily="34" charset="-120"/>
-              </a:rPr>
-              <a:t>The labels are now continuous effect values, not 0/1 — so both effect models are regressors, not classifiers.</a:t>
-            </a:r>
-            <a:endParaRPr lang="en-US" sz="1300" dirty="0"/>
-          </a:p>
-        </p:txBody>
-      </p:sp>
-      <p:sp>
-        <p:nvSpPr>
-          <p:cNvPr id="5" name="Shape 3"/>
-          <p:cNvSpPr/>
-          <p:nvPr/>
-        </p:nvSpPr>
-        <p:spPr>
-          <a:xfrm>
-            <a:off x="548640" y="1965960"/>
-            <a:ext cx="5349240" cy="1417320"/>
-          </a:xfrm>
-          <a:prstGeom prst="roundRect">
-            <a:avLst>
-              <a:gd name="adj" fmla="val 6452"/>
-            </a:avLst>
-          </a:prstGeom>
-          <a:solidFill>
-            <a:srgbClr val="E4F3EC"/>
-          </a:solidFill>
-          <a:ln/>
-        </p:spPr>
-      </p:sp>
-      <p:sp>
-        <p:nvSpPr>
-          <p:cNvPr id="6" name="Text 4"/>
-          <p:cNvSpPr txBox="1"/>
-          <p:nvPr/>
-        </p:nvSpPr>
-        <p:spPr>
-          <a:xfrm>
-            <a:off x="822960" y="2130552"/>
-            <a:ext cx="4800600" cy="365760"/>
-          </a:xfrm>
-          <a:prstGeom prst="rect">
-            <a:avLst/>
-          </a:prstGeom>
-          <a:noFill/>
-          <a:ln/>
-        </p:spPr>
-        <p:txBody>
-          <a:bodyPr wrap="square" lIns="0" tIns="0" rIns="0" bIns="0" rtlCol="0" anchor="ctr"/>
-          <a:lstStyle/>
-          <a:p>
-            <a:pPr indent="0" marL="0">
-              <a:buNone/>
-            </a:pPr>
-            <a:r>
-              <a:rPr lang="en-US" sz="1600" b="1" dirty="0">
-                <a:solidFill>
-                  <a:srgbClr val="1B7A5A"/>
-                </a:solidFill>
-                <a:latin typeface="Cambria" pitchFamily="34" charset="0"/>
-                <a:ea typeface="Cambria" pitchFamily="34" charset="-122"/>
-                <a:cs typeface="Cambria" pitchFamily="34" charset="-120"/>
-              </a:rPr>
-              <a:t>Effect Model C</a:t>
-            </a:r>
-            <a:endParaRPr lang="en-US" sz="1600" dirty="0"/>
-          </a:p>
-        </p:txBody>
-      </p:sp>
-      <p:sp>
-        <p:nvSpPr>
-          <p:cNvPr id="7" name="Text 5"/>
-          <p:cNvSpPr txBox="1"/>
-          <p:nvPr/>
-        </p:nvSpPr>
-        <p:spPr>
-          <a:xfrm>
-            <a:off x="822960" y="2532888"/>
-            <a:ext cx="4800600" cy="731520"/>
+            <a:off x="548640" y="1298448"/>
+            <a:ext cx="11064240" cy="457200"/>
           </a:xfrm>
           <a:prstGeom prst="rect">
             <a:avLst/>
@@ -10264,7 +10164,7 @@
               <a:buNone/>
             </a:pPr>
             <a:r>
-              <a:rPr lang="en-US" sz="1250" dirty="0">
+              <a:rPr lang="en-US" sz="1200" dirty="0">
                 <a:solidFill>
                   <a:srgbClr val="33344A"/>
                 </a:solidFill>
@@ -10272,44 +10172,83 @@
                 <a:ea typeface="Calibri" pitchFamily="34" charset="-122"/>
                 <a:cs typeface="Calibri" pitchFamily="34" charset="-120"/>
               </a:rPr>
-              <a:t>Input X → predicts τC(x). Learned the pattern in the control-side pseudo effects.</a:t>
-            </a:r>
-            <a:endParaRPr lang="en-US" sz="1250" dirty="0"/>
+              <a:t>τC and τT are regressors fit on the pseudo effects from Layer 2 — </a:t>
+            </a:r>
+            <a:pPr indent="0" marL="0">
+              <a:lnSpc>
+                <a:spcPct val="120000"/>
+              </a:lnSpc>
+              <a:buNone/>
+            </a:pPr>
+            <a:r>
+              <a:rPr lang="en-US" sz="1200" b="1" dirty="0">
+                <a:solidFill>
+                  <a:srgbClr val="1E2761"/>
+                </a:solidFill>
+                <a:latin typeface="Calibri" pitchFamily="34" charset="0"/>
+                <a:ea typeface="Calibri" pitchFamily="34" charset="-122"/>
+                <a:cs typeface="Calibri" pitchFamily="34" charset="-120"/>
+              </a:rPr>
+              <a:t>unlike μ̂ or D̃, there's no closed-form formula for their output.</a:t>
+            </a:r>
+            <a:pPr indent="0" marL="0">
+              <a:lnSpc>
+                <a:spcPct val="120000"/>
+              </a:lnSpc>
+              <a:buNone/>
+            </a:pPr>
+            <a:r>
+              <a:rPr lang="en-US" sz="1200" dirty="0">
+                <a:solidFill>
+                  <a:srgbClr val="33344A"/>
+                </a:solidFill>
+                <a:latin typeface="Calibri" pitchFamily="34" charset="0"/>
+                <a:ea typeface="Calibri" pitchFamily="34" charset="-122"/>
+                <a:cs typeface="Calibri" pitchFamily="34" charset="-120"/>
+              </a:rPr>
+              <a:t> Each score below is simply what the fitted model returns for a customer.</a:t>
+            </a:r>
+            <a:endParaRPr lang="en-US" sz="1200" dirty="0"/>
           </a:p>
         </p:txBody>
       </p:sp>
       <p:sp>
         <p:nvSpPr>
-          <p:cNvPr id="8" name="Shape 6"/>
+          <p:cNvPr id="5" name="Shape 3"/>
           <p:cNvSpPr/>
           <p:nvPr/>
         </p:nvSpPr>
         <p:spPr>
           <a:xfrm>
-            <a:off x="6263640" y="1965960"/>
-            <a:ext cx="5349240" cy="1417320"/>
+            <a:off x="548640" y="1828800"/>
+            <a:ext cx="11064240" cy="1554480"/>
           </a:xfrm>
           <a:prstGeom prst="roundRect">
             <a:avLst>
-              <a:gd name="adj" fmla="val 6452"/>
+              <a:gd name="adj" fmla="val 5882"/>
             </a:avLst>
           </a:prstGeom>
           <a:solidFill>
-            <a:srgbClr val="FBF3E1"/>
+            <a:srgbClr val="EAF0FC"/>
           </a:solidFill>
-          <a:ln/>
-        </p:spPr>
-      </p:sp>
-      <p:sp>
-        <p:nvSpPr>
-          <p:cNvPr id="9" name="Text 7"/>
+          <a:ln w="12700">
+            <a:solidFill>
+              <a:srgbClr val="1E2761"/>
+            </a:solidFill>
+            <a:prstDash val="solid"/>
+          </a:ln>
+        </p:spPr>
+      </p:sp>
+      <p:sp>
+        <p:nvSpPr>
+          <p:cNvPr id="6" name="Text 4"/>
           <p:cNvSpPr txBox="1"/>
           <p:nvPr/>
         </p:nvSpPr>
         <p:spPr>
           <a:xfrm>
-            <a:off x="6537960" y="2130552"/>
-            <a:ext cx="4800600" cy="365760"/>
+            <a:off x="777240" y="1956816"/>
+            <a:ext cx="10607040" cy="237744"/>
           </a:xfrm>
           <a:prstGeom prst="rect">
             <a:avLst/>
@@ -10325,30 +10264,2078 @@
               <a:buNone/>
             </a:pPr>
             <a:r>
-              <a:rPr lang="en-US" sz="1600" b="1" dirty="0">
+              <a:rPr lang="en-US" sz="1100" b="1" dirty="0">
+                <a:solidFill>
+                  <a:srgbClr val="1E2761"/>
+                </a:solidFill>
+                <a:latin typeface="Calibri" pitchFamily="34" charset="0"/>
+                <a:ea typeface="Calibri" pitchFamily="34" charset="-122"/>
+                <a:cs typeface="Calibri" pitchFamily="34" charset="-120"/>
+              </a:rPr>
+              <a:t>TRAIN   </a:t>
+            </a:r>
+            <a:pPr indent="0" marL="0">
+              <a:buNone/>
+            </a:pPr>
+            <a:r>
+              <a:rPr lang="en-US" sz="1100" i="1" dirty="0">
+                <a:solidFill>
+                  <a:srgbClr val="6B7280"/>
+                </a:solidFill>
+                <a:latin typeface="Calibri" pitchFamily="34" charset="0"/>
+                <a:ea typeface="Calibri" pitchFamily="34" charset="-122"/>
+                <a:cs typeface="Calibri" pitchFamily="34" charset="-120"/>
+              </a:rPr>
+              <a:t>each effect model fit on its own pseudo-effect sample from Layer 2</a:t>
+            </a:r>
+            <a:endParaRPr lang="en-US" sz="1100" dirty="0"/>
+          </a:p>
+        </p:txBody>
+      </p:sp>
+      <p:sp>
+        <p:nvSpPr>
+          <p:cNvPr id="7" name="Text 5"/>
+          <p:cNvSpPr txBox="1"/>
+          <p:nvPr/>
+        </p:nvSpPr>
+        <p:spPr>
+          <a:xfrm>
+            <a:off x="777240" y="2267712"/>
+            <a:ext cx="5074920" cy="201168"/>
+          </a:xfrm>
+          <a:prstGeom prst="rect">
+            <a:avLst/>
+          </a:prstGeom>
+          <a:noFill/>
+          <a:ln/>
+        </p:spPr>
+        <p:txBody>
+          <a:bodyPr wrap="square" lIns="0" tIns="0" rIns="0" bIns="0" rtlCol="0" anchor="ctr"/>
+          <a:lstStyle/>
+          <a:p>
+            <a:pPr indent="0" marL="0">
+              <a:buNone/>
+            </a:pPr>
+            <a:r>
+              <a:rPr lang="en-US" sz="1050" b="1" dirty="0">
+                <a:solidFill>
+                  <a:srgbClr val="1B7A5A"/>
+                </a:solidFill>
+                <a:latin typeface="Calibri" pitchFamily="34" charset="0"/>
+                <a:ea typeface="Calibri" pitchFamily="34" charset="-122"/>
+                <a:cs typeface="Calibri" pitchFamily="34" charset="-120"/>
+              </a:rPr>
+              <a:t>Control pseudo effects (A,B,C) → trains τC</a:t>
+            </a:r>
+            <a:endParaRPr lang="en-US" sz="1050" dirty="0"/>
+          </a:p>
+        </p:txBody>
+      </p:sp>
+      <p:graphicFrame>
+        <p:nvGraphicFramePr>
+          <p:cNvPr id="14" name="Table 0"/>
+          <p:cNvGraphicFramePr>
+            <a:graphicFrameLocks noGrp="1"/>
+          </p:cNvGraphicFramePr>
+          <p:nvPr>
+            <p:extLst>
+              <p:ext uri="{D42A27DB-BD31-4B8C-83A1-F6EECF244321}">
+                <p14:modId xmlns:p14="http://schemas.microsoft.com/office/powerpoint/2010/main" val="1579011935"/>
+              </p:ext>
+            </p:extLst>
+          </p:nvPr>
+        </p:nvGraphicFramePr>
+        <p:xfrm>
+          <a:off x="777240" y="2487168"/>
+          <a:ext cx="5074920" cy="749808"/>
+        </p:xfrm>
+        <a:graphic>
+          <a:graphicData uri="http://schemas.openxmlformats.org/drawingml/2006/table">
+            <a:tbl>
+              <a:tblPr/>
+              <a:tblGrid>
+                <a:gridCol w="2537460"/>
+                <a:gridCol w="2537460"/>
+              </a:tblGrid>
+              <a:tr h="187452">
+                <a:tc>
+                  <a:txBody>
+                    <a:bodyPr/>
+                    <a:lstStyle/>
+                    <a:p>
+                      <a:pPr algn="ctr" indent="0" marL="0">
+                        <a:buNone/>
+                      </a:pPr>
+                      <a:r>
+                        <a:rPr lang="en-US" sz="1100" b="1" dirty="0">
+                          <a:solidFill>
+                            <a:srgbClr val="FFFFFF"/>
+                          </a:solidFill>
+                          <a:latin typeface="Calibri" pitchFamily="34" charset="0"/>
+                          <a:ea typeface="Calibri" pitchFamily="34" charset="-122"/>
+                          <a:cs typeface="Calibri" pitchFamily="34" charset="-120"/>
+                        </a:rPr>
+                        <a:t>Customer</a:t>
+                      </a:r>
+                      <a:endParaRPr lang="en-US" sz="1100" dirty="0">
+                        <a:latin typeface="Calibri" charset="0"/>
+                        <a:ea typeface="Calibri" charset="0"/>
+                        <a:cs typeface="Calibri" charset="0"/>
+                      </a:endParaRPr>
+                    </a:p>
+                  </a:txBody>
+                  <a:tcPr marL="45720" marR="45720" marT="18288" marB="18288" anchor="ctr">
+                    <a:lnL w="12700" cap="flat" cmpd="sng" algn="ctr">
+                      <a:solidFill>
+                        <a:srgbClr val="E4E7F0"/>
+                      </a:solidFill>
+                      <a:prstDash val="solid"/>
+                      <a:round/>
+                      <a:headEnd type="none" w="med" len="med"/>
+                      <a:tailEnd type="none" w="med" len="med"/>
+                    </a:lnL>
+                    <a:lnR w="12700" cap="flat" cmpd="sng" algn="ctr">
+                      <a:solidFill>
+                        <a:srgbClr val="E4E7F0"/>
+                      </a:solidFill>
+                      <a:prstDash val="solid"/>
+                      <a:round/>
+                      <a:headEnd type="none" w="med" len="med"/>
+                      <a:tailEnd type="none" w="med" len="med"/>
+                    </a:lnR>
+                    <a:lnT w="12700" cap="flat" cmpd="sng" algn="ctr">
+                      <a:solidFill>
+                        <a:srgbClr val="E4E7F0"/>
+                      </a:solidFill>
+                      <a:prstDash val="solid"/>
+                      <a:round/>
+                      <a:headEnd type="none" w="med" len="med"/>
+                      <a:tailEnd type="none" w="med" len="med"/>
+                    </a:lnT>
+                    <a:lnB w="12700" cap="flat" cmpd="sng" algn="ctr">
+                      <a:solidFill>
+                        <a:srgbClr val="E4E7F0"/>
+                      </a:solidFill>
+                      <a:prstDash val="solid"/>
+                      <a:round/>
+                      <a:headEnd type="none" w="med" len="med"/>
+                      <a:tailEnd type="none" w="med" len="med"/>
+                    </a:lnB>
+                    <a:solidFill>
+                      <a:srgbClr val="1B7A5A"/>
+                    </a:solidFill>
+                  </a:tcPr>
+                </a:tc>
+                <a:tc>
+                  <a:txBody>
+                    <a:bodyPr/>
+                    <a:lstStyle/>
+                    <a:p>
+                      <a:pPr algn="ctr" indent="0" marL="0">
+                        <a:buNone/>
+                      </a:pPr>
+                      <a:r>
+                        <a:rPr lang="en-US" sz="1100" b="1" dirty="0">
+                          <a:solidFill>
+                            <a:srgbClr val="FFFFFF"/>
+                          </a:solidFill>
+                          <a:latin typeface="Calibri" pitchFamily="34" charset="0"/>
+                          <a:ea typeface="Calibri" pitchFamily="34" charset="-122"/>
+                          <a:cs typeface="Calibri" pitchFamily="34" charset="-120"/>
+                        </a:rPr>
+                        <a:t>D̃ᶜ (label)</a:t>
+                      </a:r>
+                      <a:endParaRPr lang="en-US" sz="1100" dirty="0">
+                        <a:latin typeface="Calibri" charset="0"/>
+                        <a:ea typeface="Calibri" charset="0"/>
+                        <a:cs typeface="Calibri" charset="0"/>
+                      </a:endParaRPr>
+                    </a:p>
+                  </a:txBody>
+                  <a:tcPr marL="45720" marR="45720" marT="18288" marB="18288" anchor="ctr">
+                    <a:lnL w="12700" cap="flat" cmpd="sng" algn="ctr">
+                      <a:solidFill>
+                        <a:srgbClr val="E4E7F0"/>
+                      </a:solidFill>
+                      <a:prstDash val="solid"/>
+                      <a:round/>
+                      <a:headEnd type="none" w="med" len="med"/>
+                      <a:tailEnd type="none" w="med" len="med"/>
+                    </a:lnL>
+                    <a:lnR w="12700" cap="flat" cmpd="sng" algn="ctr">
+                      <a:solidFill>
+                        <a:srgbClr val="E4E7F0"/>
+                      </a:solidFill>
+                      <a:prstDash val="solid"/>
+                      <a:round/>
+                      <a:headEnd type="none" w="med" len="med"/>
+                      <a:tailEnd type="none" w="med" len="med"/>
+                    </a:lnR>
+                    <a:lnT w="12700" cap="flat" cmpd="sng" algn="ctr">
+                      <a:solidFill>
+                        <a:srgbClr val="E4E7F0"/>
+                      </a:solidFill>
+                      <a:prstDash val="solid"/>
+                      <a:round/>
+                      <a:headEnd type="none" w="med" len="med"/>
+                      <a:tailEnd type="none" w="med" len="med"/>
+                    </a:lnT>
+                    <a:lnB w="12700" cap="flat" cmpd="sng" algn="ctr">
+                      <a:solidFill>
+                        <a:srgbClr val="E4E7F0"/>
+                      </a:solidFill>
+                      <a:prstDash val="solid"/>
+                      <a:round/>
+                      <a:headEnd type="none" w="med" len="med"/>
+                      <a:tailEnd type="none" w="med" len="med"/>
+                    </a:lnB>
+                    <a:solidFill>
+                      <a:srgbClr val="1B7A5A"/>
+                    </a:solidFill>
+                  </a:tcPr>
+                </a:tc>
+              </a:tr>
+              <a:tr h="187452">
+                <a:tc>
+                  <a:txBody>
+                    <a:bodyPr/>
+                    <a:lstStyle/>
+                    <a:p>
+                      <a:pPr algn="ctr" indent="0" marL="0">
+                        <a:buNone/>
+                      </a:pPr>
+                      <a:r>
+                        <a:rPr lang="en-US" sz="1100" b="1" dirty="0">
+                          <a:solidFill>
+                            <a:srgbClr val="33344A"/>
+                          </a:solidFill>
+                          <a:latin typeface="Calibri" pitchFamily="34" charset="0"/>
+                          <a:ea typeface="Calibri" pitchFamily="34" charset="-122"/>
+                          <a:cs typeface="Calibri" pitchFamily="34" charset="-120"/>
+                        </a:rPr>
+                        <a:t>A</a:t>
+                      </a:r>
+                      <a:endParaRPr lang="en-US" sz="1100" dirty="0">
+                        <a:latin typeface="Calibri" charset="0"/>
+                        <a:ea typeface="Calibri" charset="0"/>
+                        <a:cs typeface="Calibri" charset="0"/>
+                      </a:endParaRPr>
+                    </a:p>
+                  </a:txBody>
+                  <a:tcPr marL="45720" marR="45720" marT="18288" marB="18288" anchor="ctr">
+                    <a:lnL w="12700" cap="flat" cmpd="sng" algn="ctr">
+                      <a:solidFill>
+                        <a:srgbClr val="E4E7F0"/>
+                      </a:solidFill>
+                      <a:prstDash val="solid"/>
+                      <a:round/>
+                      <a:headEnd type="none" w="med" len="med"/>
+                      <a:tailEnd type="none" w="med" len="med"/>
+                    </a:lnL>
+                    <a:lnR w="12700" cap="flat" cmpd="sng" algn="ctr">
+                      <a:solidFill>
+                        <a:srgbClr val="E4E7F0"/>
+                      </a:solidFill>
+                      <a:prstDash val="solid"/>
+                      <a:round/>
+                      <a:headEnd type="none" w="med" len="med"/>
+                      <a:tailEnd type="none" w="med" len="med"/>
+                    </a:lnR>
+                    <a:lnT w="12700" cap="flat" cmpd="sng" algn="ctr">
+                      <a:solidFill>
+                        <a:srgbClr val="E4E7F0"/>
+                      </a:solidFill>
+                      <a:prstDash val="solid"/>
+                      <a:round/>
+                      <a:headEnd type="none" w="med" len="med"/>
+                      <a:tailEnd type="none" w="med" len="med"/>
+                    </a:lnT>
+                    <a:lnB w="12700" cap="flat" cmpd="sng" algn="ctr">
+                      <a:solidFill>
+                        <a:srgbClr val="E4E7F0"/>
+                      </a:solidFill>
+                      <a:prstDash val="solid"/>
+                      <a:round/>
+                      <a:headEnd type="none" w="med" len="med"/>
+                      <a:tailEnd type="none" w="med" len="med"/>
+                    </a:lnB>
+                    <a:solidFill>
+                      <a:srgbClr val="FFFFFF"/>
+                    </a:solidFill>
+                  </a:tcPr>
+                </a:tc>
+                <a:tc>
+                  <a:txBody>
+                    <a:bodyPr/>
+                    <a:lstStyle/>
+                    <a:p>
+                      <a:pPr algn="ctr" indent="0" marL="0">
+                        <a:buNone/>
+                      </a:pPr>
+                      <a:r>
+                        <a:rPr lang="en-US" sz="1100" dirty="0">
+                          <a:solidFill>
+                            <a:srgbClr val="33344A"/>
+                          </a:solidFill>
+                          <a:latin typeface="Calibri" pitchFamily="34" charset="0"/>
+                          <a:ea typeface="Calibri" pitchFamily="34" charset="-122"/>
+                          <a:cs typeface="Calibri" pitchFamily="34" charset="-120"/>
+                        </a:rPr>
+                        <a:t>0.55</a:t>
+                      </a:r>
+                      <a:endParaRPr lang="en-US" sz="1100" dirty="0">
+                        <a:latin typeface="Calibri" charset="0"/>
+                        <a:ea typeface="Calibri" charset="0"/>
+                        <a:cs typeface="Calibri" charset="0"/>
+                      </a:endParaRPr>
+                    </a:p>
+                  </a:txBody>
+                  <a:tcPr marL="45720" marR="45720" marT="18288" marB="18288" anchor="ctr">
+                    <a:lnL w="12700" cap="flat" cmpd="sng" algn="ctr">
+                      <a:solidFill>
+                        <a:srgbClr val="E4E7F0"/>
+                      </a:solidFill>
+                      <a:prstDash val="solid"/>
+                      <a:round/>
+                      <a:headEnd type="none" w="med" len="med"/>
+                      <a:tailEnd type="none" w="med" len="med"/>
+                    </a:lnL>
+                    <a:lnR w="12700" cap="flat" cmpd="sng" algn="ctr">
+                      <a:solidFill>
+                        <a:srgbClr val="E4E7F0"/>
+                      </a:solidFill>
+                      <a:prstDash val="solid"/>
+                      <a:round/>
+                      <a:headEnd type="none" w="med" len="med"/>
+                      <a:tailEnd type="none" w="med" len="med"/>
+                    </a:lnR>
+                    <a:lnT w="12700" cap="flat" cmpd="sng" algn="ctr">
+                      <a:solidFill>
+                        <a:srgbClr val="E4E7F0"/>
+                      </a:solidFill>
+                      <a:prstDash val="solid"/>
+                      <a:round/>
+                      <a:headEnd type="none" w="med" len="med"/>
+                      <a:tailEnd type="none" w="med" len="med"/>
+                    </a:lnT>
+                    <a:lnB w="12700" cap="flat" cmpd="sng" algn="ctr">
+                      <a:solidFill>
+                        <a:srgbClr val="E4E7F0"/>
+                      </a:solidFill>
+                      <a:prstDash val="solid"/>
+                      <a:round/>
+                      <a:headEnd type="none" w="med" len="med"/>
+                      <a:tailEnd type="none" w="med" len="med"/>
+                    </a:lnB>
+                    <a:solidFill>
+                      <a:srgbClr val="FFFFFF"/>
+                    </a:solidFill>
+                  </a:tcPr>
+                </a:tc>
+              </a:tr>
+              <a:tr h="187452">
+                <a:tc>
+                  <a:txBody>
+                    <a:bodyPr/>
+                    <a:lstStyle/>
+                    <a:p>
+                      <a:pPr algn="ctr" indent="0" marL="0">
+                        <a:buNone/>
+                      </a:pPr>
+                      <a:r>
+                        <a:rPr lang="en-US" sz="1100" b="1" dirty="0">
+                          <a:solidFill>
+                            <a:srgbClr val="33344A"/>
+                          </a:solidFill>
+                          <a:latin typeface="Calibri" pitchFamily="34" charset="0"/>
+                          <a:ea typeface="Calibri" pitchFamily="34" charset="-122"/>
+                          <a:cs typeface="Calibri" pitchFamily="34" charset="-120"/>
+                        </a:rPr>
+                        <a:t>B</a:t>
+                      </a:r>
+                      <a:endParaRPr lang="en-US" sz="1100" dirty="0">
+                        <a:latin typeface="Calibri" charset="0"/>
+                        <a:ea typeface="Calibri" charset="0"/>
+                        <a:cs typeface="Calibri" charset="0"/>
+                      </a:endParaRPr>
+                    </a:p>
+                  </a:txBody>
+                  <a:tcPr marL="45720" marR="45720" marT="18288" marB="18288" anchor="ctr">
+                    <a:lnL w="12700" cap="flat" cmpd="sng" algn="ctr">
+                      <a:solidFill>
+                        <a:srgbClr val="E4E7F0"/>
+                      </a:solidFill>
+                      <a:prstDash val="solid"/>
+                      <a:round/>
+                      <a:headEnd type="none" w="med" len="med"/>
+                      <a:tailEnd type="none" w="med" len="med"/>
+                    </a:lnL>
+                    <a:lnR w="12700" cap="flat" cmpd="sng" algn="ctr">
+                      <a:solidFill>
+                        <a:srgbClr val="E4E7F0"/>
+                      </a:solidFill>
+                      <a:prstDash val="solid"/>
+                      <a:round/>
+                      <a:headEnd type="none" w="med" len="med"/>
+                      <a:tailEnd type="none" w="med" len="med"/>
+                    </a:lnR>
+                    <a:lnT w="12700" cap="flat" cmpd="sng" algn="ctr">
+                      <a:solidFill>
+                        <a:srgbClr val="E4E7F0"/>
+                      </a:solidFill>
+                      <a:prstDash val="solid"/>
+                      <a:round/>
+                      <a:headEnd type="none" w="med" len="med"/>
+                      <a:tailEnd type="none" w="med" len="med"/>
+                    </a:lnT>
+                    <a:lnB w="12700" cap="flat" cmpd="sng" algn="ctr">
+                      <a:solidFill>
+                        <a:srgbClr val="E4E7F0"/>
+                      </a:solidFill>
+                      <a:prstDash val="solid"/>
+                      <a:round/>
+                      <a:headEnd type="none" w="med" len="med"/>
+                      <a:tailEnd type="none" w="med" len="med"/>
+                    </a:lnB>
+                    <a:solidFill>
+                      <a:srgbClr val="E4F3EC"/>
+                    </a:solidFill>
+                  </a:tcPr>
+                </a:tc>
+                <a:tc>
+                  <a:txBody>
+                    <a:bodyPr/>
+                    <a:lstStyle/>
+                    <a:p>
+                      <a:pPr algn="ctr" indent="0" marL="0">
+                        <a:buNone/>
+                      </a:pPr>
+                      <a:r>
+                        <a:rPr lang="en-US" sz="1100" dirty="0">
+                          <a:solidFill>
+                            <a:srgbClr val="33344A"/>
+                          </a:solidFill>
+                          <a:latin typeface="Calibri" pitchFamily="34" charset="0"/>
+                          <a:ea typeface="Calibri" pitchFamily="34" charset="-122"/>
+                          <a:cs typeface="Calibri" pitchFamily="34" charset="-120"/>
+                        </a:rPr>
+                        <a:t>−0.25</a:t>
+                      </a:r>
+                      <a:endParaRPr lang="en-US" sz="1100" dirty="0">
+                        <a:latin typeface="Calibri" charset="0"/>
+                        <a:ea typeface="Calibri" charset="0"/>
+                        <a:cs typeface="Calibri" charset="0"/>
+                      </a:endParaRPr>
+                    </a:p>
+                  </a:txBody>
+                  <a:tcPr marL="45720" marR="45720" marT="18288" marB="18288" anchor="ctr">
+                    <a:lnL w="12700" cap="flat" cmpd="sng" algn="ctr">
+                      <a:solidFill>
+                        <a:srgbClr val="E4E7F0"/>
+                      </a:solidFill>
+                      <a:prstDash val="solid"/>
+                      <a:round/>
+                      <a:headEnd type="none" w="med" len="med"/>
+                      <a:tailEnd type="none" w="med" len="med"/>
+                    </a:lnL>
+                    <a:lnR w="12700" cap="flat" cmpd="sng" algn="ctr">
+                      <a:solidFill>
+                        <a:srgbClr val="E4E7F0"/>
+                      </a:solidFill>
+                      <a:prstDash val="solid"/>
+                      <a:round/>
+                      <a:headEnd type="none" w="med" len="med"/>
+                      <a:tailEnd type="none" w="med" len="med"/>
+                    </a:lnR>
+                    <a:lnT w="12700" cap="flat" cmpd="sng" algn="ctr">
+                      <a:solidFill>
+                        <a:srgbClr val="E4E7F0"/>
+                      </a:solidFill>
+                      <a:prstDash val="solid"/>
+                      <a:round/>
+                      <a:headEnd type="none" w="med" len="med"/>
+                      <a:tailEnd type="none" w="med" len="med"/>
+                    </a:lnT>
+                    <a:lnB w="12700" cap="flat" cmpd="sng" algn="ctr">
+                      <a:solidFill>
+                        <a:srgbClr val="E4E7F0"/>
+                      </a:solidFill>
+                      <a:prstDash val="solid"/>
+                      <a:round/>
+                      <a:headEnd type="none" w="med" len="med"/>
+                      <a:tailEnd type="none" w="med" len="med"/>
+                    </a:lnB>
+                    <a:solidFill>
+                      <a:srgbClr val="E4F3EC"/>
+                    </a:solidFill>
+                  </a:tcPr>
+                </a:tc>
+              </a:tr>
+              <a:tr h="187452">
+                <a:tc>
+                  <a:txBody>
+                    <a:bodyPr/>
+                    <a:lstStyle/>
+                    <a:p>
+                      <a:pPr algn="ctr" indent="0" marL="0">
+                        <a:buNone/>
+                      </a:pPr>
+                      <a:r>
+                        <a:rPr lang="en-US" sz="1100" b="1" dirty="0">
+                          <a:solidFill>
+                            <a:srgbClr val="33344A"/>
+                          </a:solidFill>
+                          <a:latin typeface="Calibri" pitchFamily="34" charset="0"/>
+                          <a:ea typeface="Calibri" pitchFamily="34" charset="-122"/>
+                          <a:cs typeface="Calibri" pitchFamily="34" charset="-120"/>
+                        </a:rPr>
+                        <a:t>C</a:t>
+                      </a:r>
+                      <a:endParaRPr lang="en-US" sz="1100" dirty="0">
+                        <a:latin typeface="Calibri" charset="0"/>
+                        <a:ea typeface="Calibri" charset="0"/>
+                        <a:cs typeface="Calibri" charset="0"/>
+                      </a:endParaRPr>
+                    </a:p>
+                  </a:txBody>
+                  <a:tcPr marL="45720" marR="45720" marT="18288" marB="18288" anchor="ctr">
+                    <a:lnL w="12700" cap="flat" cmpd="sng" algn="ctr">
+                      <a:solidFill>
+                        <a:srgbClr val="E4E7F0"/>
+                      </a:solidFill>
+                      <a:prstDash val="solid"/>
+                      <a:round/>
+                      <a:headEnd type="none" w="med" len="med"/>
+                      <a:tailEnd type="none" w="med" len="med"/>
+                    </a:lnL>
+                    <a:lnR w="12700" cap="flat" cmpd="sng" algn="ctr">
+                      <a:solidFill>
+                        <a:srgbClr val="E4E7F0"/>
+                      </a:solidFill>
+                      <a:prstDash val="solid"/>
+                      <a:round/>
+                      <a:headEnd type="none" w="med" len="med"/>
+                      <a:tailEnd type="none" w="med" len="med"/>
+                    </a:lnR>
+                    <a:lnT w="12700" cap="flat" cmpd="sng" algn="ctr">
+                      <a:solidFill>
+                        <a:srgbClr val="E4E7F0"/>
+                      </a:solidFill>
+                      <a:prstDash val="solid"/>
+                      <a:round/>
+                      <a:headEnd type="none" w="med" len="med"/>
+                      <a:tailEnd type="none" w="med" len="med"/>
+                    </a:lnT>
+                    <a:lnB w="12700" cap="flat" cmpd="sng" algn="ctr">
+                      <a:solidFill>
+                        <a:srgbClr val="E4E7F0"/>
+                      </a:solidFill>
+                      <a:prstDash val="solid"/>
+                      <a:round/>
+                      <a:headEnd type="none" w="med" len="med"/>
+                      <a:tailEnd type="none" w="med" len="med"/>
+                    </a:lnB>
+                    <a:solidFill>
+                      <a:srgbClr val="FFFFFF"/>
+                    </a:solidFill>
+                  </a:tcPr>
+                </a:tc>
+                <a:tc>
+                  <a:txBody>
+                    <a:bodyPr/>
+                    <a:lstStyle/>
+                    <a:p>
+                      <a:pPr algn="ctr" indent="0" marL="0">
+                        <a:buNone/>
+                      </a:pPr>
+                      <a:r>
+                        <a:rPr lang="en-US" sz="1100" dirty="0">
+                          <a:solidFill>
+                            <a:srgbClr val="33344A"/>
+                          </a:solidFill>
+                          <a:latin typeface="Calibri" pitchFamily="34" charset="0"/>
+                          <a:ea typeface="Calibri" pitchFamily="34" charset="-122"/>
+                          <a:cs typeface="Calibri" pitchFamily="34" charset="-120"/>
+                        </a:rPr>
+                        <a:t>0.30</a:t>
+                      </a:r>
+                      <a:endParaRPr lang="en-US" sz="1100" dirty="0">
+                        <a:latin typeface="Calibri" charset="0"/>
+                        <a:ea typeface="Calibri" charset="0"/>
+                        <a:cs typeface="Calibri" charset="0"/>
+                      </a:endParaRPr>
+                    </a:p>
+                  </a:txBody>
+                  <a:tcPr marL="45720" marR="45720" marT="18288" marB="18288" anchor="ctr">
+                    <a:lnL w="12700" cap="flat" cmpd="sng" algn="ctr">
+                      <a:solidFill>
+                        <a:srgbClr val="E4E7F0"/>
+                      </a:solidFill>
+                      <a:prstDash val="solid"/>
+                      <a:round/>
+                      <a:headEnd type="none" w="med" len="med"/>
+                      <a:tailEnd type="none" w="med" len="med"/>
+                    </a:lnL>
+                    <a:lnR w="12700" cap="flat" cmpd="sng" algn="ctr">
+                      <a:solidFill>
+                        <a:srgbClr val="E4E7F0"/>
+                      </a:solidFill>
+                      <a:prstDash val="solid"/>
+                      <a:round/>
+                      <a:headEnd type="none" w="med" len="med"/>
+                      <a:tailEnd type="none" w="med" len="med"/>
+                    </a:lnR>
+                    <a:lnT w="12700" cap="flat" cmpd="sng" algn="ctr">
+                      <a:solidFill>
+                        <a:srgbClr val="E4E7F0"/>
+                      </a:solidFill>
+                      <a:prstDash val="solid"/>
+                      <a:round/>
+                      <a:headEnd type="none" w="med" len="med"/>
+                      <a:tailEnd type="none" w="med" len="med"/>
+                    </a:lnT>
+                    <a:lnB w="12700" cap="flat" cmpd="sng" algn="ctr">
+                      <a:solidFill>
+                        <a:srgbClr val="E4E7F0"/>
+                      </a:solidFill>
+                      <a:prstDash val="solid"/>
+                      <a:round/>
+                      <a:headEnd type="none" w="med" len="med"/>
+                      <a:tailEnd type="none" w="med" len="med"/>
+                    </a:lnB>
+                    <a:solidFill>
+                      <a:srgbClr val="FFFFFF"/>
+                    </a:solidFill>
+                  </a:tcPr>
+                </a:tc>
+              </a:tr>
+            </a:tbl>
+          </a:graphicData>
+        </a:graphic>
+      </p:graphicFrame>
+      <p:sp>
+        <p:nvSpPr>
+          <p:cNvPr id="9" name="Text 6"/>
+          <p:cNvSpPr txBox="1"/>
+          <p:nvPr/>
+        </p:nvSpPr>
+        <p:spPr>
+          <a:xfrm>
+            <a:off x="6309360" y="2267712"/>
+            <a:ext cx="5074920" cy="201168"/>
+          </a:xfrm>
+          <a:prstGeom prst="rect">
+            <a:avLst/>
+          </a:prstGeom>
+          <a:noFill/>
+          <a:ln/>
+        </p:spPr>
+        <p:txBody>
+          <a:bodyPr wrap="square" lIns="0" tIns="0" rIns="0" bIns="0" rtlCol="0" anchor="ctr"/>
+          <a:lstStyle/>
+          <a:p>
+            <a:pPr indent="0" marL="0">
+              <a:buNone/>
+            </a:pPr>
+            <a:r>
+              <a:rPr lang="en-US" sz="1050" b="1" dirty="0">
                 <a:solidFill>
                   <a:srgbClr val="B8892B"/>
                 </a:solidFill>
-                <a:latin typeface="Cambria" pitchFamily="34" charset="0"/>
-                <a:ea typeface="Cambria" pitchFamily="34" charset="-122"/>
-                <a:cs typeface="Cambria" pitchFamily="34" charset="-120"/>
+                <a:latin typeface="Calibri" pitchFamily="34" charset="0"/>
+                <a:ea typeface="Calibri" pitchFamily="34" charset="-122"/>
+                <a:cs typeface="Calibri" pitchFamily="34" charset="-120"/>
               </a:rPr>
-              <a:t>Effect Model T</a:t>
-            </a:r>
-            <a:endParaRPr lang="en-US" sz="1600" dirty="0"/>
+              <a:t>Treatment pseudo effects (D,E,F) → trains τT</a:t>
+            </a:r>
+            <a:endParaRPr lang="en-US" sz="1050" dirty="0"/>
           </a:p>
         </p:txBody>
       </p:sp>
-      <p:sp>
-        <p:nvSpPr>
-          <p:cNvPr id="10" name="Text 8"/>
+      <p:graphicFrame>
+        <p:nvGraphicFramePr>
+          <p:cNvPr id="27" name="Table 1"/>
+          <p:cNvGraphicFramePr>
+            <a:graphicFrameLocks noGrp="1"/>
+          </p:cNvGraphicFramePr>
+          <p:nvPr>
+            <p:extLst>
+              <p:ext uri="{D42A27DB-BD31-4B8C-83A1-F6EECF244321}">
+                <p14:modId xmlns:p14="http://schemas.microsoft.com/office/powerpoint/2010/main" val="1579011935"/>
+              </p:ext>
+            </p:extLst>
+          </p:nvPr>
+        </p:nvGraphicFramePr>
+        <p:xfrm>
+          <a:off x="6309360" y="2487168"/>
+          <a:ext cx="5074920" cy="749808"/>
+        </p:xfrm>
+        <a:graphic>
+          <a:graphicData uri="http://schemas.openxmlformats.org/drawingml/2006/table">
+            <a:tbl>
+              <a:tblPr/>
+              <a:tblGrid>
+                <a:gridCol w="2537460"/>
+                <a:gridCol w="2537460"/>
+              </a:tblGrid>
+              <a:tr h="187452">
+                <a:tc>
+                  <a:txBody>
+                    <a:bodyPr/>
+                    <a:lstStyle/>
+                    <a:p>
+                      <a:pPr algn="ctr" indent="0" marL="0">
+                        <a:buNone/>
+                      </a:pPr>
+                      <a:r>
+                        <a:rPr lang="en-US" sz="1100" b="1" dirty="0">
+                          <a:solidFill>
+                            <a:srgbClr val="FFFFFF"/>
+                          </a:solidFill>
+                          <a:latin typeface="Calibri" pitchFamily="34" charset="0"/>
+                          <a:ea typeface="Calibri" pitchFamily="34" charset="-122"/>
+                          <a:cs typeface="Calibri" pitchFamily="34" charset="-120"/>
+                        </a:rPr>
+                        <a:t>Customer</a:t>
+                      </a:r>
+                      <a:endParaRPr lang="en-US" sz="1100" dirty="0">
+                        <a:latin typeface="Calibri" charset="0"/>
+                        <a:ea typeface="Calibri" charset="0"/>
+                        <a:cs typeface="Calibri" charset="0"/>
+                      </a:endParaRPr>
+                    </a:p>
+                  </a:txBody>
+                  <a:tcPr marL="45720" marR="45720" marT="18288" marB="18288" anchor="ctr">
+                    <a:lnL w="12700" cap="flat" cmpd="sng" algn="ctr">
+                      <a:solidFill>
+                        <a:srgbClr val="E4E7F0"/>
+                      </a:solidFill>
+                      <a:prstDash val="solid"/>
+                      <a:round/>
+                      <a:headEnd type="none" w="med" len="med"/>
+                      <a:tailEnd type="none" w="med" len="med"/>
+                    </a:lnL>
+                    <a:lnR w="12700" cap="flat" cmpd="sng" algn="ctr">
+                      <a:solidFill>
+                        <a:srgbClr val="E4E7F0"/>
+                      </a:solidFill>
+                      <a:prstDash val="solid"/>
+                      <a:round/>
+                      <a:headEnd type="none" w="med" len="med"/>
+                      <a:tailEnd type="none" w="med" len="med"/>
+                    </a:lnR>
+                    <a:lnT w="12700" cap="flat" cmpd="sng" algn="ctr">
+                      <a:solidFill>
+                        <a:srgbClr val="E4E7F0"/>
+                      </a:solidFill>
+                      <a:prstDash val="solid"/>
+                      <a:round/>
+                      <a:headEnd type="none" w="med" len="med"/>
+                      <a:tailEnd type="none" w="med" len="med"/>
+                    </a:lnT>
+                    <a:lnB w="12700" cap="flat" cmpd="sng" algn="ctr">
+                      <a:solidFill>
+                        <a:srgbClr val="E4E7F0"/>
+                      </a:solidFill>
+                      <a:prstDash val="solid"/>
+                      <a:round/>
+                      <a:headEnd type="none" w="med" len="med"/>
+                      <a:tailEnd type="none" w="med" len="med"/>
+                    </a:lnB>
+                    <a:solidFill>
+                      <a:srgbClr val="B8892B"/>
+                    </a:solidFill>
+                  </a:tcPr>
+                </a:tc>
+                <a:tc>
+                  <a:txBody>
+                    <a:bodyPr/>
+                    <a:lstStyle/>
+                    <a:p>
+                      <a:pPr algn="ctr" indent="0" marL="0">
+                        <a:buNone/>
+                      </a:pPr>
+                      <a:r>
+                        <a:rPr lang="en-US" sz="1100" b="1" dirty="0">
+                          <a:solidFill>
+                            <a:srgbClr val="FFFFFF"/>
+                          </a:solidFill>
+                          <a:latin typeface="Calibri" pitchFamily="34" charset="0"/>
+                          <a:ea typeface="Calibri" pitchFamily="34" charset="-122"/>
+                          <a:cs typeface="Calibri" pitchFamily="34" charset="-120"/>
+                        </a:rPr>
+                        <a:t>D̃ᵀ (label)</a:t>
+                      </a:r>
+                      <a:endParaRPr lang="en-US" sz="1100" dirty="0">
+                        <a:latin typeface="Calibri" charset="0"/>
+                        <a:ea typeface="Calibri" charset="0"/>
+                        <a:cs typeface="Calibri" charset="0"/>
+                      </a:endParaRPr>
+                    </a:p>
+                  </a:txBody>
+                  <a:tcPr marL="45720" marR="45720" marT="18288" marB="18288" anchor="ctr">
+                    <a:lnL w="12700" cap="flat" cmpd="sng" algn="ctr">
+                      <a:solidFill>
+                        <a:srgbClr val="E4E7F0"/>
+                      </a:solidFill>
+                      <a:prstDash val="solid"/>
+                      <a:round/>
+                      <a:headEnd type="none" w="med" len="med"/>
+                      <a:tailEnd type="none" w="med" len="med"/>
+                    </a:lnL>
+                    <a:lnR w="12700" cap="flat" cmpd="sng" algn="ctr">
+                      <a:solidFill>
+                        <a:srgbClr val="E4E7F0"/>
+                      </a:solidFill>
+                      <a:prstDash val="solid"/>
+                      <a:round/>
+                      <a:headEnd type="none" w="med" len="med"/>
+                      <a:tailEnd type="none" w="med" len="med"/>
+                    </a:lnR>
+                    <a:lnT w="12700" cap="flat" cmpd="sng" algn="ctr">
+                      <a:solidFill>
+                        <a:srgbClr val="E4E7F0"/>
+                      </a:solidFill>
+                      <a:prstDash val="solid"/>
+                      <a:round/>
+                      <a:headEnd type="none" w="med" len="med"/>
+                      <a:tailEnd type="none" w="med" len="med"/>
+                    </a:lnT>
+                    <a:lnB w="12700" cap="flat" cmpd="sng" algn="ctr">
+                      <a:solidFill>
+                        <a:srgbClr val="E4E7F0"/>
+                      </a:solidFill>
+                      <a:prstDash val="solid"/>
+                      <a:round/>
+                      <a:headEnd type="none" w="med" len="med"/>
+                      <a:tailEnd type="none" w="med" len="med"/>
+                    </a:lnB>
+                    <a:solidFill>
+                      <a:srgbClr val="B8892B"/>
+                    </a:solidFill>
+                  </a:tcPr>
+                </a:tc>
+              </a:tr>
+              <a:tr h="187452">
+                <a:tc>
+                  <a:txBody>
+                    <a:bodyPr/>
+                    <a:lstStyle/>
+                    <a:p>
+                      <a:pPr algn="ctr" indent="0" marL="0">
+                        <a:buNone/>
+                      </a:pPr>
+                      <a:r>
+                        <a:rPr lang="en-US" sz="1100" b="1" dirty="0">
+                          <a:solidFill>
+                            <a:srgbClr val="33344A"/>
+                          </a:solidFill>
+                          <a:latin typeface="Calibri" pitchFamily="34" charset="0"/>
+                          <a:ea typeface="Calibri" pitchFamily="34" charset="-122"/>
+                          <a:cs typeface="Calibri" pitchFamily="34" charset="-120"/>
+                        </a:rPr>
+                        <a:t>D</a:t>
+                      </a:r>
+                      <a:endParaRPr lang="en-US" sz="1100" dirty="0">
+                        <a:latin typeface="Calibri" charset="0"/>
+                        <a:ea typeface="Calibri" charset="0"/>
+                        <a:cs typeface="Calibri" charset="0"/>
+                      </a:endParaRPr>
+                    </a:p>
+                  </a:txBody>
+                  <a:tcPr marL="45720" marR="45720" marT="18288" marB="18288" anchor="ctr">
+                    <a:lnL w="12700" cap="flat" cmpd="sng" algn="ctr">
+                      <a:solidFill>
+                        <a:srgbClr val="E4E7F0"/>
+                      </a:solidFill>
+                      <a:prstDash val="solid"/>
+                      <a:round/>
+                      <a:headEnd type="none" w="med" len="med"/>
+                      <a:tailEnd type="none" w="med" len="med"/>
+                    </a:lnL>
+                    <a:lnR w="12700" cap="flat" cmpd="sng" algn="ctr">
+                      <a:solidFill>
+                        <a:srgbClr val="E4E7F0"/>
+                      </a:solidFill>
+                      <a:prstDash val="solid"/>
+                      <a:round/>
+                      <a:headEnd type="none" w="med" len="med"/>
+                      <a:tailEnd type="none" w="med" len="med"/>
+                    </a:lnR>
+                    <a:lnT w="12700" cap="flat" cmpd="sng" algn="ctr">
+                      <a:solidFill>
+                        <a:srgbClr val="E4E7F0"/>
+                      </a:solidFill>
+                      <a:prstDash val="solid"/>
+                      <a:round/>
+                      <a:headEnd type="none" w="med" len="med"/>
+                      <a:tailEnd type="none" w="med" len="med"/>
+                    </a:lnT>
+                    <a:lnB w="12700" cap="flat" cmpd="sng" algn="ctr">
+                      <a:solidFill>
+                        <a:srgbClr val="E4E7F0"/>
+                      </a:solidFill>
+                      <a:prstDash val="solid"/>
+                      <a:round/>
+                      <a:headEnd type="none" w="med" len="med"/>
+                      <a:tailEnd type="none" w="med" len="med"/>
+                    </a:lnB>
+                    <a:solidFill>
+                      <a:srgbClr val="FFFFFF"/>
+                    </a:solidFill>
+                  </a:tcPr>
+                </a:tc>
+                <a:tc>
+                  <a:txBody>
+                    <a:bodyPr/>
+                    <a:lstStyle/>
+                    <a:p>
+                      <a:pPr algn="ctr" indent="0" marL="0">
+                        <a:buNone/>
+                      </a:pPr>
+                      <a:r>
+                        <a:rPr lang="en-US" sz="1100" dirty="0">
+                          <a:solidFill>
+                            <a:srgbClr val="33344A"/>
+                          </a:solidFill>
+                          <a:latin typeface="Calibri" pitchFamily="34" charset="0"/>
+                          <a:ea typeface="Calibri" pitchFamily="34" charset="-122"/>
+                          <a:cs typeface="Calibri" pitchFamily="34" charset="-120"/>
+                        </a:rPr>
+                        <a:t>0.65</a:t>
+                      </a:r>
+                      <a:endParaRPr lang="en-US" sz="1100" dirty="0">
+                        <a:latin typeface="Calibri" charset="0"/>
+                        <a:ea typeface="Calibri" charset="0"/>
+                        <a:cs typeface="Calibri" charset="0"/>
+                      </a:endParaRPr>
+                    </a:p>
+                  </a:txBody>
+                  <a:tcPr marL="45720" marR="45720" marT="18288" marB="18288" anchor="ctr">
+                    <a:lnL w="12700" cap="flat" cmpd="sng" algn="ctr">
+                      <a:solidFill>
+                        <a:srgbClr val="E4E7F0"/>
+                      </a:solidFill>
+                      <a:prstDash val="solid"/>
+                      <a:round/>
+                      <a:headEnd type="none" w="med" len="med"/>
+                      <a:tailEnd type="none" w="med" len="med"/>
+                    </a:lnL>
+                    <a:lnR w="12700" cap="flat" cmpd="sng" algn="ctr">
+                      <a:solidFill>
+                        <a:srgbClr val="E4E7F0"/>
+                      </a:solidFill>
+                      <a:prstDash val="solid"/>
+                      <a:round/>
+                      <a:headEnd type="none" w="med" len="med"/>
+                      <a:tailEnd type="none" w="med" len="med"/>
+                    </a:lnR>
+                    <a:lnT w="12700" cap="flat" cmpd="sng" algn="ctr">
+                      <a:solidFill>
+                        <a:srgbClr val="E4E7F0"/>
+                      </a:solidFill>
+                      <a:prstDash val="solid"/>
+                      <a:round/>
+                      <a:headEnd type="none" w="med" len="med"/>
+                      <a:tailEnd type="none" w="med" len="med"/>
+                    </a:lnT>
+                    <a:lnB w="12700" cap="flat" cmpd="sng" algn="ctr">
+                      <a:solidFill>
+                        <a:srgbClr val="E4E7F0"/>
+                      </a:solidFill>
+                      <a:prstDash val="solid"/>
+                      <a:round/>
+                      <a:headEnd type="none" w="med" len="med"/>
+                      <a:tailEnd type="none" w="med" len="med"/>
+                    </a:lnB>
+                    <a:solidFill>
+                      <a:srgbClr val="FFFFFF"/>
+                    </a:solidFill>
+                  </a:tcPr>
+                </a:tc>
+              </a:tr>
+              <a:tr h="187452">
+                <a:tc>
+                  <a:txBody>
+                    <a:bodyPr/>
+                    <a:lstStyle/>
+                    <a:p>
+                      <a:pPr algn="ctr" indent="0" marL="0">
+                        <a:buNone/>
+                      </a:pPr>
+                      <a:r>
+                        <a:rPr lang="en-US" sz="1100" b="1" dirty="0">
+                          <a:solidFill>
+                            <a:srgbClr val="33344A"/>
+                          </a:solidFill>
+                          <a:latin typeface="Calibri" pitchFamily="34" charset="0"/>
+                          <a:ea typeface="Calibri" pitchFamily="34" charset="-122"/>
+                          <a:cs typeface="Calibri" pitchFamily="34" charset="-120"/>
+                        </a:rPr>
+                        <a:t>E</a:t>
+                      </a:r>
+                      <a:endParaRPr lang="en-US" sz="1100" dirty="0">
+                        <a:latin typeface="Calibri" charset="0"/>
+                        <a:ea typeface="Calibri" charset="0"/>
+                        <a:cs typeface="Calibri" charset="0"/>
+                      </a:endParaRPr>
+                    </a:p>
+                  </a:txBody>
+                  <a:tcPr marL="45720" marR="45720" marT="18288" marB="18288" anchor="ctr">
+                    <a:lnL w="12700" cap="flat" cmpd="sng" algn="ctr">
+                      <a:solidFill>
+                        <a:srgbClr val="E4E7F0"/>
+                      </a:solidFill>
+                      <a:prstDash val="solid"/>
+                      <a:round/>
+                      <a:headEnd type="none" w="med" len="med"/>
+                      <a:tailEnd type="none" w="med" len="med"/>
+                    </a:lnL>
+                    <a:lnR w="12700" cap="flat" cmpd="sng" algn="ctr">
+                      <a:solidFill>
+                        <a:srgbClr val="E4E7F0"/>
+                      </a:solidFill>
+                      <a:prstDash val="solid"/>
+                      <a:round/>
+                      <a:headEnd type="none" w="med" len="med"/>
+                      <a:tailEnd type="none" w="med" len="med"/>
+                    </a:lnR>
+                    <a:lnT w="12700" cap="flat" cmpd="sng" algn="ctr">
+                      <a:solidFill>
+                        <a:srgbClr val="E4E7F0"/>
+                      </a:solidFill>
+                      <a:prstDash val="solid"/>
+                      <a:round/>
+                      <a:headEnd type="none" w="med" len="med"/>
+                      <a:tailEnd type="none" w="med" len="med"/>
+                    </a:lnT>
+                    <a:lnB w="12700" cap="flat" cmpd="sng" algn="ctr">
+                      <a:solidFill>
+                        <a:srgbClr val="E4E7F0"/>
+                      </a:solidFill>
+                      <a:prstDash val="solid"/>
+                      <a:round/>
+                      <a:headEnd type="none" w="med" len="med"/>
+                      <a:tailEnd type="none" w="med" len="med"/>
+                    </a:lnB>
+                    <a:solidFill>
+                      <a:srgbClr val="FBF3E1"/>
+                    </a:solidFill>
+                  </a:tcPr>
+                </a:tc>
+                <a:tc>
+                  <a:txBody>
+                    <a:bodyPr/>
+                    <a:lstStyle/>
+                    <a:p>
+                      <a:pPr algn="ctr" indent="0" marL="0">
+                        <a:buNone/>
+                      </a:pPr>
+                      <a:r>
+                        <a:rPr lang="en-US" sz="1100" dirty="0">
+                          <a:solidFill>
+                            <a:srgbClr val="33344A"/>
+                          </a:solidFill>
+                          <a:latin typeface="Calibri" pitchFamily="34" charset="0"/>
+                          <a:ea typeface="Calibri" pitchFamily="34" charset="-122"/>
+                          <a:cs typeface="Calibri" pitchFamily="34" charset="-120"/>
+                        </a:rPr>
+                        <a:t>−0.25</a:t>
+                      </a:r>
+                      <a:endParaRPr lang="en-US" sz="1100" dirty="0">
+                        <a:latin typeface="Calibri" charset="0"/>
+                        <a:ea typeface="Calibri" charset="0"/>
+                        <a:cs typeface="Calibri" charset="0"/>
+                      </a:endParaRPr>
+                    </a:p>
+                  </a:txBody>
+                  <a:tcPr marL="45720" marR="45720" marT="18288" marB="18288" anchor="ctr">
+                    <a:lnL w="12700" cap="flat" cmpd="sng" algn="ctr">
+                      <a:solidFill>
+                        <a:srgbClr val="E4E7F0"/>
+                      </a:solidFill>
+                      <a:prstDash val="solid"/>
+                      <a:round/>
+                      <a:headEnd type="none" w="med" len="med"/>
+                      <a:tailEnd type="none" w="med" len="med"/>
+                    </a:lnL>
+                    <a:lnR w="12700" cap="flat" cmpd="sng" algn="ctr">
+                      <a:solidFill>
+                        <a:srgbClr val="E4E7F0"/>
+                      </a:solidFill>
+                      <a:prstDash val="solid"/>
+                      <a:round/>
+                      <a:headEnd type="none" w="med" len="med"/>
+                      <a:tailEnd type="none" w="med" len="med"/>
+                    </a:lnR>
+                    <a:lnT w="12700" cap="flat" cmpd="sng" algn="ctr">
+                      <a:solidFill>
+                        <a:srgbClr val="E4E7F0"/>
+                      </a:solidFill>
+                      <a:prstDash val="solid"/>
+                      <a:round/>
+                      <a:headEnd type="none" w="med" len="med"/>
+                      <a:tailEnd type="none" w="med" len="med"/>
+                    </a:lnT>
+                    <a:lnB w="12700" cap="flat" cmpd="sng" algn="ctr">
+                      <a:solidFill>
+                        <a:srgbClr val="E4E7F0"/>
+                      </a:solidFill>
+                      <a:prstDash val="solid"/>
+                      <a:round/>
+                      <a:headEnd type="none" w="med" len="med"/>
+                      <a:tailEnd type="none" w="med" len="med"/>
+                    </a:lnB>
+                    <a:solidFill>
+                      <a:srgbClr val="FBF3E1"/>
+                    </a:solidFill>
+                  </a:tcPr>
+                </a:tc>
+              </a:tr>
+              <a:tr h="187452">
+                <a:tc>
+                  <a:txBody>
+                    <a:bodyPr/>
+                    <a:lstStyle/>
+                    <a:p>
+                      <a:pPr algn="ctr" indent="0" marL="0">
+                        <a:buNone/>
+                      </a:pPr>
+                      <a:r>
+                        <a:rPr lang="en-US" sz="1100" b="1" dirty="0">
+                          <a:solidFill>
+                            <a:srgbClr val="33344A"/>
+                          </a:solidFill>
+                          <a:latin typeface="Calibri" pitchFamily="34" charset="0"/>
+                          <a:ea typeface="Calibri" pitchFamily="34" charset="-122"/>
+                          <a:cs typeface="Calibri" pitchFamily="34" charset="-120"/>
+                        </a:rPr>
+                        <a:t>F</a:t>
+                      </a:r>
+                      <a:endParaRPr lang="en-US" sz="1100" dirty="0">
+                        <a:latin typeface="Calibri" charset="0"/>
+                        <a:ea typeface="Calibri" charset="0"/>
+                        <a:cs typeface="Calibri" charset="0"/>
+                      </a:endParaRPr>
+                    </a:p>
+                  </a:txBody>
+                  <a:tcPr marL="45720" marR="45720" marT="18288" marB="18288" anchor="ctr">
+                    <a:lnL w="12700" cap="flat" cmpd="sng" algn="ctr">
+                      <a:solidFill>
+                        <a:srgbClr val="E4E7F0"/>
+                      </a:solidFill>
+                      <a:prstDash val="solid"/>
+                      <a:round/>
+                      <a:headEnd type="none" w="med" len="med"/>
+                      <a:tailEnd type="none" w="med" len="med"/>
+                    </a:lnL>
+                    <a:lnR w="12700" cap="flat" cmpd="sng" algn="ctr">
+                      <a:solidFill>
+                        <a:srgbClr val="E4E7F0"/>
+                      </a:solidFill>
+                      <a:prstDash val="solid"/>
+                      <a:round/>
+                      <a:headEnd type="none" w="med" len="med"/>
+                      <a:tailEnd type="none" w="med" len="med"/>
+                    </a:lnR>
+                    <a:lnT w="12700" cap="flat" cmpd="sng" algn="ctr">
+                      <a:solidFill>
+                        <a:srgbClr val="E4E7F0"/>
+                      </a:solidFill>
+                      <a:prstDash val="solid"/>
+                      <a:round/>
+                      <a:headEnd type="none" w="med" len="med"/>
+                      <a:tailEnd type="none" w="med" len="med"/>
+                    </a:lnT>
+                    <a:lnB w="12700" cap="flat" cmpd="sng" algn="ctr">
+                      <a:solidFill>
+                        <a:srgbClr val="E4E7F0"/>
+                      </a:solidFill>
+                      <a:prstDash val="solid"/>
+                      <a:round/>
+                      <a:headEnd type="none" w="med" len="med"/>
+                      <a:tailEnd type="none" w="med" len="med"/>
+                    </a:lnB>
+                    <a:solidFill>
+                      <a:srgbClr val="FFFFFF"/>
+                    </a:solidFill>
+                  </a:tcPr>
+                </a:tc>
+                <a:tc>
+                  <a:txBody>
+                    <a:bodyPr/>
+                    <a:lstStyle/>
+                    <a:p>
+                      <a:pPr algn="ctr" indent="0" marL="0">
+                        <a:buNone/>
+                      </a:pPr>
+                      <a:r>
+                        <a:rPr lang="en-US" sz="1100" dirty="0">
+                          <a:solidFill>
+                            <a:srgbClr val="33344A"/>
+                          </a:solidFill>
+                          <a:latin typeface="Calibri" pitchFamily="34" charset="0"/>
+                          <a:ea typeface="Calibri" pitchFamily="34" charset="-122"/>
+                          <a:cs typeface="Calibri" pitchFamily="34" charset="-120"/>
+                        </a:rPr>
+                        <a:t>0.50</a:t>
+                      </a:r>
+                      <a:endParaRPr lang="en-US" sz="1100" dirty="0">
+                        <a:latin typeface="Calibri" charset="0"/>
+                        <a:ea typeface="Calibri" charset="0"/>
+                        <a:cs typeface="Calibri" charset="0"/>
+                      </a:endParaRPr>
+                    </a:p>
+                  </a:txBody>
+                  <a:tcPr marL="45720" marR="45720" marT="18288" marB="18288" anchor="ctr">
+                    <a:lnL w="12700" cap="flat" cmpd="sng" algn="ctr">
+                      <a:solidFill>
+                        <a:srgbClr val="E4E7F0"/>
+                      </a:solidFill>
+                      <a:prstDash val="solid"/>
+                      <a:round/>
+                      <a:headEnd type="none" w="med" len="med"/>
+                      <a:tailEnd type="none" w="med" len="med"/>
+                    </a:lnL>
+                    <a:lnR w="12700" cap="flat" cmpd="sng" algn="ctr">
+                      <a:solidFill>
+                        <a:srgbClr val="E4E7F0"/>
+                      </a:solidFill>
+                      <a:prstDash val="solid"/>
+                      <a:round/>
+                      <a:headEnd type="none" w="med" len="med"/>
+                      <a:tailEnd type="none" w="med" len="med"/>
+                    </a:lnR>
+                    <a:lnT w="12700" cap="flat" cmpd="sng" algn="ctr">
+                      <a:solidFill>
+                        <a:srgbClr val="E4E7F0"/>
+                      </a:solidFill>
+                      <a:prstDash val="solid"/>
+                      <a:round/>
+                      <a:headEnd type="none" w="med" len="med"/>
+                      <a:tailEnd type="none" w="med" len="med"/>
+                    </a:lnT>
+                    <a:lnB w="12700" cap="flat" cmpd="sng" algn="ctr">
+                      <a:solidFill>
+                        <a:srgbClr val="E4E7F0"/>
+                      </a:solidFill>
+                      <a:prstDash val="solid"/>
+                      <a:round/>
+                      <a:headEnd type="none" w="med" len="med"/>
+                      <a:tailEnd type="none" w="med" len="med"/>
+                    </a:lnB>
+                    <a:solidFill>
+                      <a:srgbClr val="FFFFFF"/>
+                    </a:solidFill>
+                  </a:tcPr>
+                </a:tc>
+              </a:tr>
+            </a:tbl>
+          </a:graphicData>
+        </a:graphic>
+      </p:graphicFrame>
+      <p:sp>
+        <p:nvSpPr>
+          <p:cNvPr id="11" name="Shape 7"/>
+          <p:cNvSpPr/>
+          <p:nvPr/>
+        </p:nvSpPr>
+        <p:spPr>
+          <a:xfrm>
+            <a:off x="548640" y="3520440"/>
+            <a:ext cx="11064240" cy="1188720"/>
+          </a:xfrm>
+          <a:prstGeom prst="roundRect">
+            <a:avLst>
+              <a:gd name="adj" fmla="val 7692"/>
+            </a:avLst>
+          </a:prstGeom>
+          <a:solidFill>
+            <a:srgbClr val="FBF3E1"/>
+          </a:solidFill>
+          <a:ln w="12700">
+            <a:solidFill>
+              <a:srgbClr val="B8892B"/>
+            </a:solidFill>
+            <a:prstDash val="solid"/>
+          </a:ln>
+        </p:spPr>
+      </p:sp>
+      <p:sp>
+        <p:nvSpPr>
+          <p:cNvPr id="12" name="Text 8"/>
           <p:cNvSpPr txBox="1"/>
           <p:nvPr/>
         </p:nvSpPr>
         <p:spPr>
           <a:xfrm>
-            <a:off x="6537960" y="2532888"/>
-            <a:ext cx="4800600" cy="731520"/>
+            <a:off x="777240" y="3648456"/>
+            <a:ext cx="10607040" cy="237744"/>
+          </a:xfrm>
+          <a:prstGeom prst="rect">
+            <a:avLst/>
+          </a:prstGeom>
+          <a:noFill/>
+          <a:ln/>
+        </p:spPr>
+        <p:txBody>
+          <a:bodyPr wrap="square" lIns="0" tIns="0" rIns="0" bIns="0" rtlCol="0" anchor="ctr"/>
+          <a:lstStyle/>
+          <a:p>
+            <a:pPr indent="0" marL="0">
+              <a:buNone/>
+            </a:pPr>
+            <a:r>
+              <a:rPr lang="en-US" sz="1100" b="1" dirty="0">
+                <a:solidFill>
+                  <a:srgbClr val="B8892B"/>
+                </a:solidFill>
+                <a:latin typeface="Calibri" pitchFamily="34" charset="0"/>
+                <a:ea typeface="Calibri" pitchFamily="34" charset="-122"/>
+                <a:cs typeface="Calibri" pitchFamily="34" charset="-120"/>
+              </a:rPr>
+              <a:t>SCORE   </a:t>
+            </a:r>
+            <a:pPr indent="0" marL="0">
+              <a:buNone/>
+            </a:pPr>
+            <a:r>
+              <a:rPr lang="en-US" sz="1100" i="1" dirty="0">
+                <a:solidFill>
+                  <a:srgbClr val="6B7280"/>
+                </a:solidFill>
+                <a:latin typeface="Calibri" pitchFamily="34" charset="0"/>
+                <a:ea typeface="Calibri" pitchFamily="34" charset="-122"/>
+                <a:cs typeface="Calibri" pitchFamily="34" charset="-120"/>
+              </a:rPr>
+              <a:t>both models score a brand-new customer, G — never in A–F, so this is a genuine out-of-sample prediction</a:t>
+            </a:r>
+            <a:endParaRPr lang="en-US" sz="1100" dirty="0"/>
+          </a:p>
+        </p:txBody>
+      </p:sp>
+      <p:sp>
+        <p:nvSpPr>
+          <p:cNvPr id="13" name="Text 9"/>
+          <p:cNvSpPr txBox="1"/>
+          <p:nvPr/>
+        </p:nvSpPr>
+        <p:spPr>
+          <a:xfrm>
+            <a:off x="777240" y="3959352"/>
+            <a:ext cx="5074920" cy="201168"/>
+          </a:xfrm>
+          <a:prstGeom prst="rect">
+            <a:avLst/>
+          </a:prstGeom>
+          <a:noFill/>
+          <a:ln/>
+        </p:spPr>
+        <p:txBody>
+          <a:bodyPr wrap="square" lIns="0" tIns="0" rIns="0" bIns="0" rtlCol="0" anchor="ctr"/>
+          <a:lstStyle/>
+          <a:p>
+            <a:pPr indent="0" marL="0">
+              <a:buNone/>
+            </a:pPr>
+            <a:r>
+              <a:rPr lang="en-US" sz="1050" b="1" dirty="0">
+                <a:solidFill>
+                  <a:srgbClr val="1B7A5A"/>
+                </a:solidFill>
+                <a:latin typeface="Calibri" pitchFamily="34" charset="0"/>
+                <a:ea typeface="Calibri" pitchFamily="34" charset="-122"/>
+                <a:cs typeface="Calibri" pitchFamily="34" charset="-120"/>
+              </a:rPr>
+              <a:t>τC(x) scores customer G</a:t>
+            </a:r>
+            <a:endParaRPr lang="en-US" sz="1050" dirty="0"/>
+          </a:p>
+        </p:txBody>
+      </p:sp>
+      <p:graphicFrame>
+        <p:nvGraphicFramePr>
+          <p:cNvPr id="40" name="Table 2"/>
+          <p:cNvGraphicFramePr>
+            <a:graphicFrameLocks noGrp="1"/>
+          </p:cNvGraphicFramePr>
+          <p:nvPr>
+            <p:extLst>
+              <p:ext uri="{D42A27DB-BD31-4B8C-83A1-F6EECF244321}">
+                <p14:modId xmlns:p14="http://schemas.microsoft.com/office/powerpoint/2010/main" val="1579011935"/>
+              </p:ext>
+            </p:extLst>
+          </p:nvPr>
+        </p:nvGraphicFramePr>
+        <p:xfrm>
+          <a:off x="777240" y="4178808"/>
+          <a:ext cx="5074920" cy="384048"/>
+        </p:xfrm>
+        <a:graphic>
+          <a:graphicData uri="http://schemas.openxmlformats.org/drawingml/2006/table">
+            <a:tbl>
+              <a:tblPr/>
+              <a:tblGrid>
+                <a:gridCol w="2537460"/>
+                <a:gridCol w="2537460"/>
+              </a:tblGrid>
+              <a:tr h="192024">
+                <a:tc>
+                  <a:txBody>
+                    <a:bodyPr/>
+                    <a:lstStyle/>
+                    <a:p>
+                      <a:pPr algn="ctr" indent="0" marL="0">
+                        <a:buNone/>
+                      </a:pPr>
+                      <a:r>
+                        <a:rPr lang="en-US" sz="1100" b="1" dirty="0">
+                          <a:solidFill>
+                            <a:srgbClr val="FFFFFF"/>
+                          </a:solidFill>
+                          <a:latin typeface="Calibri" pitchFamily="34" charset="0"/>
+                          <a:ea typeface="Calibri" pitchFamily="34" charset="-122"/>
+                          <a:cs typeface="Calibri" pitchFamily="34" charset="-120"/>
+                        </a:rPr>
+                        <a:t>Customer</a:t>
+                      </a:r>
+                      <a:endParaRPr lang="en-US" sz="1100" dirty="0">
+                        <a:latin typeface="Calibri" charset="0"/>
+                        <a:ea typeface="Calibri" charset="0"/>
+                        <a:cs typeface="Calibri" charset="0"/>
+                      </a:endParaRPr>
+                    </a:p>
+                  </a:txBody>
+                  <a:tcPr marL="45720" marR="45720" marT="18288" marB="18288" anchor="ctr">
+                    <a:lnL w="12700" cap="flat" cmpd="sng" algn="ctr">
+                      <a:solidFill>
+                        <a:srgbClr val="F0DFB0"/>
+                      </a:solidFill>
+                      <a:prstDash val="solid"/>
+                      <a:round/>
+                      <a:headEnd type="none" w="med" len="med"/>
+                      <a:tailEnd type="none" w="med" len="med"/>
+                    </a:lnL>
+                    <a:lnR w="12700" cap="flat" cmpd="sng" algn="ctr">
+                      <a:solidFill>
+                        <a:srgbClr val="F0DFB0"/>
+                      </a:solidFill>
+                      <a:prstDash val="solid"/>
+                      <a:round/>
+                      <a:headEnd type="none" w="med" len="med"/>
+                      <a:tailEnd type="none" w="med" len="med"/>
+                    </a:lnR>
+                    <a:lnT w="12700" cap="flat" cmpd="sng" algn="ctr">
+                      <a:solidFill>
+                        <a:srgbClr val="F0DFB0"/>
+                      </a:solidFill>
+                      <a:prstDash val="solid"/>
+                      <a:round/>
+                      <a:headEnd type="none" w="med" len="med"/>
+                      <a:tailEnd type="none" w="med" len="med"/>
+                    </a:lnT>
+                    <a:lnB w="12700" cap="flat" cmpd="sng" algn="ctr">
+                      <a:solidFill>
+                        <a:srgbClr val="F0DFB0"/>
+                      </a:solidFill>
+                      <a:prstDash val="solid"/>
+                      <a:round/>
+                      <a:headEnd type="none" w="med" len="med"/>
+                      <a:tailEnd type="none" w="med" len="med"/>
+                    </a:lnB>
+                    <a:solidFill>
+                      <a:srgbClr val="1B7A5A"/>
+                    </a:solidFill>
+                  </a:tcPr>
+                </a:tc>
+                <a:tc>
+                  <a:txBody>
+                    <a:bodyPr/>
+                    <a:lstStyle/>
+                    <a:p>
+                      <a:pPr algn="ctr" indent="0" marL="0">
+                        <a:buNone/>
+                      </a:pPr>
+                      <a:r>
+                        <a:rPr lang="en-US" sz="1100" b="1" dirty="0">
+                          <a:solidFill>
+                            <a:srgbClr val="FFFFFF"/>
+                          </a:solidFill>
+                          <a:latin typeface="Calibri" pitchFamily="34" charset="0"/>
+                          <a:ea typeface="Calibri" pitchFamily="34" charset="-122"/>
+                          <a:cs typeface="Calibri" pitchFamily="34" charset="-120"/>
+                        </a:rPr>
+                        <a:t>τC(x)</a:t>
+                      </a:r>
+                      <a:endParaRPr lang="en-US" sz="1100" dirty="0">
+                        <a:latin typeface="Calibri" charset="0"/>
+                        <a:ea typeface="Calibri" charset="0"/>
+                        <a:cs typeface="Calibri" charset="0"/>
+                      </a:endParaRPr>
+                    </a:p>
+                  </a:txBody>
+                  <a:tcPr marL="45720" marR="45720" marT="18288" marB="18288" anchor="ctr">
+                    <a:lnL w="12700" cap="flat" cmpd="sng" algn="ctr">
+                      <a:solidFill>
+                        <a:srgbClr val="F0DFB0"/>
+                      </a:solidFill>
+                      <a:prstDash val="solid"/>
+                      <a:round/>
+                      <a:headEnd type="none" w="med" len="med"/>
+                      <a:tailEnd type="none" w="med" len="med"/>
+                    </a:lnL>
+                    <a:lnR w="12700" cap="flat" cmpd="sng" algn="ctr">
+                      <a:solidFill>
+                        <a:srgbClr val="F0DFB0"/>
+                      </a:solidFill>
+                      <a:prstDash val="solid"/>
+                      <a:round/>
+                      <a:headEnd type="none" w="med" len="med"/>
+                      <a:tailEnd type="none" w="med" len="med"/>
+                    </a:lnR>
+                    <a:lnT w="12700" cap="flat" cmpd="sng" algn="ctr">
+                      <a:solidFill>
+                        <a:srgbClr val="F0DFB0"/>
+                      </a:solidFill>
+                      <a:prstDash val="solid"/>
+                      <a:round/>
+                      <a:headEnd type="none" w="med" len="med"/>
+                      <a:tailEnd type="none" w="med" len="med"/>
+                    </a:lnT>
+                    <a:lnB w="12700" cap="flat" cmpd="sng" algn="ctr">
+                      <a:solidFill>
+                        <a:srgbClr val="F0DFB0"/>
+                      </a:solidFill>
+                      <a:prstDash val="solid"/>
+                      <a:round/>
+                      <a:headEnd type="none" w="med" len="med"/>
+                      <a:tailEnd type="none" w="med" len="med"/>
+                    </a:lnB>
+                    <a:solidFill>
+                      <a:srgbClr val="1B7A5A"/>
+                    </a:solidFill>
+                  </a:tcPr>
+                </a:tc>
+              </a:tr>
+              <a:tr h="192024">
+                <a:tc>
+                  <a:txBody>
+                    <a:bodyPr/>
+                    <a:lstStyle/>
+                    <a:p>
+                      <a:pPr algn="ctr" indent="0" marL="0">
+                        <a:buNone/>
+                      </a:pPr>
+                      <a:r>
+                        <a:rPr lang="en-US" sz="1100" b="1" dirty="0">
+                          <a:solidFill>
+                            <a:srgbClr val="33344A"/>
+                          </a:solidFill>
+                          <a:latin typeface="Calibri" pitchFamily="34" charset="0"/>
+                          <a:ea typeface="Calibri" pitchFamily="34" charset="-122"/>
+                          <a:cs typeface="Calibri" pitchFamily="34" charset="-120"/>
+                        </a:rPr>
+                        <a:t>G</a:t>
+                      </a:r>
+                      <a:endParaRPr lang="en-US" sz="1100" dirty="0">
+                        <a:latin typeface="Calibri" charset="0"/>
+                        <a:ea typeface="Calibri" charset="0"/>
+                        <a:cs typeface="Calibri" charset="0"/>
+                      </a:endParaRPr>
+                    </a:p>
+                  </a:txBody>
+                  <a:tcPr marL="45720" marR="45720" marT="18288" marB="18288" anchor="ctr">
+                    <a:lnL w="12700" cap="flat" cmpd="sng" algn="ctr">
+                      <a:solidFill>
+                        <a:srgbClr val="F0DFB0"/>
+                      </a:solidFill>
+                      <a:prstDash val="solid"/>
+                      <a:round/>
+                      <a:headEnd type="none" w="med" len="med"/>
+                      <a:tailEnd type="none" w="med" len="med"/>
+                    </a:lnL>
+                    <a:lnR w="12700" cap="flat" cmpd="sng" algn="ctr">
+                      <a:solidFill>
+                        <a:srgbClr val="F0DFB0"/>
+                      </a:solidFill>
+                      <a:prstDash val="solid"/>
+                      <a:round/>
+                      <a:headEnd type="none" w="med" len="med"/>
+                      <a:tailEnd type="none" w="med" len="med"/>
+                    </a:lnR>
+                    <a:lnT w="12700" cap="flat" cmpd="sng" algn="ctr">
+                      <a:solidFill>
+                        <a:srgbClr val="F0DFB0"/>
+                      </a:solidFill>
+                      <a:prstDash val="solid"/>
+                      <a:round/>
+                      <a:headEnd type="none" w="med" len="med"/>
+                      <a:tailEnd type="none" w="med" len="med"/>
+                    </a:lnT>
+                    <a:lnB w="12700" cap="flat" cmpd="sng" algn="ctr">
+                      <a:solidFill>
+                        <a:srgbClr val="F0DFB0"/>
+                      </a:solidFill>
+                      <a:prstDash val="solid"/>
+                      <a:round/>
+                      <a:headEnd type="none" w="med" len="med"/>
+                      <a:tailEnd type="none" w="med" len="med"/>
+                    </a:lnB>
+                    <a:solidFill>
+                      <a:srgbClr val="FFFFFF"/>
+                    </a:solidFill>
+                  </a:tcPr>
+                </a:tc>
+                <a:tc>
+                  <a:txBody>
+                    <a:bodyPr/>
+                    <a:lstStyle/>
+                    <a:p>
+                      <a:pPr algn="ctr" indent="0" marL="0">
+                        <a:buNone/>
+                      </a:pPr>
+                      <a:r>
+                        <a:rPr lang="en-US" sz="1100" dirty="0">
+                          <a:solidFill>
+                            <a:srgbClr val="33344A"/>
+                          </a:solidFill>
+                          <a:latin typeface="Calibri" pitchFamily="34" charset="0"/>
+                          <a:ea typeface="Calibri" pitchFamily="34" charset="-122"/>
+                          <a:cs typeface="Calibri" pitchFamily="34" charset="-120"/>
+                        </a:rPr>
+                        <a:t>0.12</a:t>
+                      </a:r>
+                      <a:endParaRPr lang="en-US" sz="1100" dirty="0">
+                        <a:latin typeface="Calibri" charset="0"/>
+                        <a:ea typeface="Calibri" charset="0"/>
+                        <a:cs typeface="Calibri" charset="0"/>
+                      </a:endParaRPr>
+                    </a:p>
+                  </a:txBody>
+                  <a:tcPr marL="45720" marR="45720" marT="18288" marB="18288" anchor="ctr">
+                    <a:lnL w="12700" cap="flat" cmpd="sng" algn="ctr">
+                      <a:solidFill>
+                        <a:srgbClr val="F0DFB0"/>
+                      </a:solidFill>
+                      <a:prstDash val="solid"/>
+                      <a:round/>
+                      <a:headEnd type="none" w="med" len="med"/>
+                      <a:tailEnd type="none" w="med" len="med"/>
+                    </a:lnL>
+                    <a:lnR w="12700" cap="flat" cmpd="sng" algn="ctr">
+                      <a:solidFill>
+                        <a:srgbClr val="F0DFB0"/>
+                      </a:solidFill>
+                      <a:prstDash val="solid"/>
+                      <a:round/>
+                      <a:headEnd type="none" w="med" len="med"/>
+                      <a:tailEnd type="none" w="med" len="med"/>
+                    </a:lnR>
+                    <a:lnT w="12700" cap="flat" cmpd="sng" algn="ctr">
+                      <a:solidFill>
+                        <a:srgbClr val="F0DFB0"/>
+                      </a:solidFill>
+                      <a:prstDash val="solid"/>
+                      <a:round/>
+                      <a:headEnd type="none" w="med" len="med"/>
+                      <a:tailEnd type="none" w="med" len="med"/>
+                    </a:lnT>
+                    <a:lnB w="12700" cap="flat" cmpd="sng" algn="ctr">
+                      <a:solidFill>
+                        <a:srgbClr val="F0DFB0"/>
+                      </a:solidFill>
+                      <a:prstDash val="solid"/>
+                      <a:round/>
+                      <a:headEnd type="none" w="med" len="med"/>
+                      <a:tailEnd type="none" w="med" len="med"/>
+                    </a:lnB>
+                    <a:solidFill>
+                      <a:srgbClr val="FFFFFF"/>
+                    </a:solidFill>
+                  </a:tcPr>
+                </a:tc>
+              </a:tr>
+            </a:tbl>
+          </a:graphicData>
+        </a:graphic>
+      </p:graphicFrame>
+      <p:sp>
+        <p:nvSpPr>
+          <p:cNvPr id="15" name="Text 10"/>
+          <p:cNvSpPr txBox="1"/>
+          <p:nvPr/>
+        </p:nvSpPr>
+        <p:spPr>
+          <a:xfrm>
+            <a:off x="6309360" y="3959352"/>
+            <a:ext cx="5074920" cy="201168"/>
+          </a:xfrm>
+          <a:prstGeom prst="rect">
+            <a:avLst/>
+          </a:prstGeom>
+          <a:noFill/>
+          <a:ln/>
+        </p:spPr>
+        <p:txBody>
+          <a:bodyPr wrap="square" lIns="0" tIns="0" rIns="0" bIns="0" rtlCol="0" anchor="ctr"/>
+          <a:lstStyle/>
+          <a:p>
+            <a:pPr indent="0" marL="0">
+              <a:buNone/>
+            </a:pPr>
+            <a:r>
+              <a:rPr lang="en-US" sz="1050" b="1" dirty="0">
+                <a:solidFill>
+                  <a:srgbClr val="B8892B"/>
+                </a:solidFill>
+                <a:latin typeface="Calibri" pitchFamily="34" charset="0"/>
+                <a:ea typeface="Calibri" pitchFamily="34" charset="-122"/>
+                <a:cs typeface="Calibri" pitchFamily="34" charset="-120"/>
+              </a:rPr>
+              <a:t>τT(x) scores customer G</a:t>
+            </a:r>
+            <a:endParaRPr lang="en-US" sz="1050" dirty="0"/>
+          </a:p>
+        </p:txBody>
+      </p:sp>
+      <p:graphicFrame>
+        <p:nvGraphicFramePr>
+          <p:cNvPr id="53" name="Table 3"/>
+          <p:cNvGraphicFramePr>
+            <a:graphicFrameLocks noGrp="1"/>
+          </p:cNvGraphicFramePr>
+          <p:nvPr>
+            <p:extLst>
+              <p:ext uri="{D42A27DB-BD31-4B8C-83A1-F6EECF244321}">
+                <p14:modId xmlns:p14="http://schemas.microsoft.com/office/powerpoint/2010/main" val="1579011935"/>
+              </p:ext>
+            </p:extLst>
+          </p:nvPr>
+        </p:nvGraphicFramePr>
+        <p:xfrm>
+          <a:off x="6309360" y="4178808"/>
+          <a:ext cx="5074920" cy="384048"/>
+        </p:xfrm>
+        <a:graphic>
+          <a:graphicData uri="http://schemas.openxmlformats.org/drawingml/2006/table">
+            <a:tbl>
+              <a:tblPr/>
+              <a:tblGrid>
+                <a:gridCol w="2537460"/>
+                <a:gridCol w="2537460"/>
+              </a:tblGrid>
+              <a:tr h="192024">
+                <a:tc>
+                  <a:txBody>
+                    <a:bodyPr/>
+                    <a:lstStyle/>
+                    <a:p>
+                      <a:pPr algn="ctr" indent="0" marL="0">
+                        <a:buNone/>
+                      </a:pPr>
+                      <a:r>
+                        <a:rPr lang="en-US" sz="1100" b="1" dirty="0">
+                          <a:solidFill>
+                            <a:srgbClr val="FFFFFF"/>
+                          </a:solidFill>
+                          <a:latin typeface="Calibri" pitchFamily="34" charset="0"/>
+                          <a:ea typeface="Calibri" pitchFamily="34" charset="-122"/>
+                          <a:cs typeface="Calibri" pitchFamily="34" charset="-120"/>
+                        </a:rPr>
+                        <a:t>Customer</a:t>
+                      </a:r>
+                      <a:endParaRPr lang="en-US" sz="1100" dirty="0">
+                        <a:latin typeface="Calibri" charset="0"/>
+                        <a:ea typeface="Calibri" charset="0"/>
+                        <a:cs typeface="Calibri" charset="0"/>
+                      </a:endParaRPr>
+                    </a:p>
+                  </a:txBody>
+                  <a:tcPr marL="45720" marR="45720" marT="18288" marB="18288" anchor="ctr">
+                    <a:lnL w="12700" cap="flat" cmpd="sng" algn="ctr">
+                      <a:solidFill>
+                        <a:srgbClr val="F0DFB0"/>
+                      </a:solidFill>
+                      <a:prstDash val="solid"/>
+                      <a:round/>
+                      <a:headEnd type="none" w="med" len="med"/>
+                      <a:tailEnd type="none" w="med" len="med"/>
+                    </a:lnL>
+                    <a:lnR w="12700" cap="flat" cmpd="sng" algn="ctr">
+                      <a:solidFill>
+                        <a:srgbClr val="F0DFB0"/>
+                      </a:solidFill>
+                      <a:prstDash val="solid"/>
+                      <a:round/>
+                      <a:headEnd type="none" w="med" len="med"/>
+                      <a:tailEnd type="none" w="med" len="med"/>
+                    </a:lnR>
+                    <a:lnT w="12700" cap="flat" cmpd="sng" algn="ctr">
+                      <a:solidFill>
+                        <a:srgbClr val="F0DFB0"/>
+                      </a:solidFill>
+                      <a:prstDash val="solid"/>
+                      <a:round/>
+                      <a:headEnd type="none" w="med" len="med"/>
+                      <a:tailEnd type="none" w="med" len="med"/>
+                    </a:lnT>
+                    <a:lnB w="12700" cap="flat" cmpd="sng" algn="ctr">
+                      <a:solidFill>
+                        <a:srgbClr val="F0DFB0"/>
+                      </a:solidFill>
+                      <a:prstDash val="solid"/>
+                      <a:round/>
+                      <a:headEnd type="none" w="med" len="med"/>
+                      <a:tailEnd type="none" w="med" len="med"/>
+                    </a:lnB>
+                    <a:solidFill>
+                      <a:srgbClr val="B8892B"/>
+                    </a:solidFill>
+                  </a:tcPr>
+                </a:tc>
+                <a:tc>
+                  <a:txBody>
+                    <a:bodyPr/>
+                    <a:lstStyle/>
+                    <a:p>
+                      <a:pPr algn="ctr" indent="0" marL="0">
+                        <a:buNone/>
+                      </a:pPr>
+                      <a:r>
+                        <a:rPr lang="en-US" sz="1100" b="1" dirty="0">
+                          <a:solidFill>
+                            <a:srgbClr val="FFFFFF"/>
+                          </a:solidFill>
+                          <a:latin typeface="Calibri" pitchFamily="34" charset="0"/>
+                          <a:ea typeface="Calibri" pitchFamily="34" charset="-122"/>
+                          <a:cs typeface="Calibri" pitchFamily="34" charset="-120"/>
+                        </a:rPr>
+                        <a:t>τT(x)</a:t>
+                      </a:r>
+                      <a:endParaRPr lang="en-US" sz="1100" dirty="0">
+                        <a:latin typeface="Calibri" charset="0"/>
+                        <a:ea typeface="Calibri" charset="0"/>
+                        <a:cs typeface="Calibri" charset="0"/>
+                      </a:endParaRPr>
+                    </a:p>
+                  </a:txBody>
+                  <a:tcPr marL="45720" marR="45720" marT="18288" marB="18288" anchor="ctr">
+                    <a:lnL w="12700" cap="flat" cmpd="sng" algn="ctr">
+                      <a:solidFill>
+                        <a:srgbClr val="F0DFB0"/>
+                      </a:solidFill>
+                      <a:prstDash val="solid"/>
+                      <a:round/>
+                      <a:headEnd type="none" w="med" len="med"/>
+                      <a:tailEnd type="none" w="med" len="med"/>
+                    </a:lnL>
+                    <a:lnR w="12700" cap="flat" cmpd="sng" algn="ctr">
+                      <a:solidFill>
+                        <a:srgbClr val="F0DFB0"/>
+                      </a:solidFill>
+                      <a:prstDash val="solid"/>
+                      <a:round/>
+                      <a:headEnd type="none" w="med" len="med"/>
+                      <a:tailEnd type="none" w="med" len="med"/>
+                    </a:lnR>
+                    <a:lnT w="12700" cap="flat" cmpd="sng" algn="ctr">
+                      <a:solidFill>
+                        <a:srgbClr val="F0DFB0"/>
+                      </a:solidFill>
+                      <a:prstDash val="solid"/>
+                      <a:round/>
+                      <a:headEnd type="none" w="med" len="med"/>
+                      <a:tailEnd type="none" w="med" len="med"/>
+                    </a:lnT>
+                    <a:lnB w="12700" cap="flat" cmpd="sng" algn="ctr">
+                      <a:solidFill>
+                        <a:srgbClr val="F0DFB0"/>
+                      </a:solidFill>
+                      <a:prstDash val="solid"/>
+                      <a:round/>
+                      <a:headEnd type="none" w="med" len="med"/>
+                      <a:tailEnd type="none" w="med" len="med"/>
+                    </a:lnB>
+                    <a:solidFill>
+                      <a:srgbClr val="B8892B"/>
+                    </a:solidFill>
+                  </a:tcPr>
+                </a:tc>
+              </a:tr>
+              <a:tr h="192024">
+                <a:tc>
+                  <a:txBody>
+                    <a:bodyPr/>
+                    <a:lstStyle/>
+                    <a:p>
+                      <a:pPr algn="ctr" indent="0" marL="0">
+                        <a:buNone/>
+                      </a:pPr>
+                      <a:r>
+                        <a:rPr lang="en-US" sz="1100" b="1" dirty="0">
+                          <a:solidFill>
+                            <a:srgbClr val="33344A"/>
+                          </a:solidFill>
+                          <a:latin typeface="Calibri" pitchFamily="34" charset="0"/>
+                          <a:ea typeface="Calibri" pitchFamily="34" charset="-122"/>
+                          <a:cs typeface="Calibri" pitchFamily="34" charset="-120"/>
+                        </a:rPr>
+                        <a:t>G</a:t>
+                      </a:r>
+                      <a:endParaRPr lang="en-US" sz="1100" dirty="0">
+                        <a:latin typeface="Calibri" charset="0"/>
+                        <a:ea typeface="Calibri" charset="0"/>
+                        <a:cs typeface="Calibri" charset="0"/>
+                      </a:endParaRPr>
+                    </a:p>
+                  </a:txBody>
+                  <a:tcPr marL="45720" marR="45720" marT="18288" marB="18288" anchor="ctr">
+                    <a:lnL w="12700" cap="flat" cmpd="sng" algn="ctr">
+                      <a:solidFill>
+                        <a:srgbClr val="F0DFB0"/>
+                      </a:solidFill>
+                      <a:prstDash val="solid"/>
+                      <a:round/>
+                      <a:headEnd type="none" w="med" len="med"/>
+                      <a:tailEnd type="none" w="med" len="med"/>
+                    </a:lnL>
+                    <a:lnR w="12700" cap="flat" cmpd="sng" algn="ctr">
+                      <a:solidFill>
+                        <a:srgbClr val="F0DFB0"/>
+                      </a:solidFill>
+                      <a:prstDash val="solid"/>
+                      <a:round/>
+                      <a:headEnd type="none" w="med" len="med"/>
+                      <a:tailEnd type="none" w="med" len="med"/>
+                    </a:lnR>
+                    <a:lnT w="12700" cap="flat" cmpd="sng" algn="ctr">
+                      <a:solidFill>
+                        <a:srgbClr val="F0DFB0"/>
+                      </a:solidFill>
+                      <a:prstDash val="solid"/>
+                      <a:round/>
+                      <a:headEnd type="none" w="med" len="med"/>
+                      <a:tailEnd type="none" w="med" len="med"/>
+                    </a:lnT>
+                    <a:lnB w="12700" cap="flat" cmpd="sng" algn="ctr">
+                      <a:solidFill>
+                        <a:srgbClr val="F0DFB0"/>
+                      </a:solidFill>
+                      <a:prstDash val="solid"/>
+                      <a:round/>
+                      <a:headEnd type="none" w="med" len="med"/>
+                      <a:tailEnd type="none" w="med" len="med"/>
+                    </a:lnB>
+                    <a:solidFill>
+                      <a:srgbClr val="FFFFFF"/>
+                    </a:solidFill>
+                  </a:tcPr>
+                </a:tc>
+                <a:tc>
+                  <a:txBody>
+                    <a:bodyPr/>
+                    <a:lstStyle/>
+                    <a:p>
+                      <a:pPr algn="ctr" indent="0" marL="0">
+                        <a:buNone/>
+                      </a:pPr>
+                      <a:r>
+                        <a:rPr lang="en-US" sz="1100" dirty="0">
+                          <a:solidFill>
+                            <a:srgbClr val="33344A"/>
+                          </a:solidFill>
+                          <a:latin typeface="Calibri" pitchFamily="34" charset="0"/>
+                          <a:ea typeface="Calibri" pitchFamily="34" charset="-122"/>
+                          <a:cs typeface="Calibri" pitchFamily="34" charset="-120"/>
+                        </a:rPr>
+                        <a:t>0.28</a:t>
+                      </a:r>
+                      <a:endParaRPr lang="en-US" sz="1100" dirty="0">
+                        <a:latin typeface="Calibri" charset="0"/>
+                        <a:ea typeface="Calibri" charset="0"/>
+                        <a:cs typeface="Calibri" charset="0"/>
+                      </a:endParaRPr>
+                    </a:p>
+                  </a:txBody>
+                  <a:tcPr marL="45720" marR="45720" marT="18288" marB="18288" anchor="ctr">
+                    <a:lnL w="12700" cap="flat" cmpd="sng" algn="ctr">
+                      <a:solidFill>
+                        <a:srgbClr val="F0DFB0"/>
+                      </a:solidFill>
+                      <a:prstDash val="solid"/>
+                      <a:round/>
+                      <a:headEnd type="none" w="med" len="med"/>
+                      <a:tailEnd type="none" w="med" len="med"/>
+                    </a:lnL>
+                    <a:lnR w="12700" cap="flat" cmpd="sng" algn="ctr">
+                      <a:solidFill>
+                        <a:srgbClr val="F0DFB0"/>
+                      </a:solidFill>
+                      <a:prstDash val="solid"/>
+                      <a:round/>
+                      <a:headEnd type="none" w="med" len="med"/>
+                      <a:tailEnd type="none" w="med" len="med"/>
+                    </a:lnR>
+                    <a:lnT w="12700" cap="flat" cmpd="sng" algn="ctr">
+                      <a:solidFill>
+                        <a:srgbClr val="F0DFB0"/>
+                      </a:solidFill>
+                      <a:prstDash val="solid"/>
+                      <a:round/>
+                      <a:headEnd type="none" w="med" len="med"/>
+                      <a:tailEnd type="none" w="med" len="med"/>
+                    </a:lnT>
+                    <a:lnB w="12700" cap="flat" cmpd="sng" algn="ctr">
+                      <a:solidFill>
+                        <a:srgbClr val="F0DFB0"/>
+                      </a:solidFill>
+                      <a:prstDash val="solid"/>
+                      <a:round/>
+                      <a:headEnd type="none" w="med" len="med"/>
+                      <a:tailEnd type="none" w="med" len="med"/>
+                    </a:lnB>
+                    <a:solidFill>
+                      <a:srgbClr val="FFFFFF"/>
+                    </a:solidFill>
+                  </a:tcPr>
+                </a:tc>
+              </a:tr>
+            </a:tbl>
+          </a:graphicData>
+        </a:graphic>
+      </p:graphicFrame>
+      <p:sp>
+        <p:nvSpPr>
+          <p:cNvPr id="17" name="Shape 11"/>
+          <p:cNvSpPr/>
+          <p:nvPr/>
+        </p:nvSpPr>
+        <p:spPr>
+          <a:xfrm>
+            <a:off x="548640" y="4846320"/>
+            <a:ext cx="11064240" cy="777240"/>
+          </a:xfrm>
+          <a:prstGeom prst="roundRect">
+            <a:avLst>
+              <a:gd name="adj" fmla="val 7059"/>
+            </a:avLst>
+          </a:prstGeom>
+          <a:solidFill>
+            <a:srgbClr val="EAF0FC"/>
+          </a:solidFill>
+          <a:ln/>
+        </p:spPr>
+      </p:sp>
+      <p:sp>
+        <p:nvSpPr>
+          <p:cNvPr id="18" name="Text 12"/>
+          <p:cNvSpPr txBox="1"/>
+          <p:nvPr/>
+        </p:nvSpPr>
+        <p:spPr>
+          <a:xfrm>
+            <a:off x="777240" y="4846320"/>
+            <a:ext cx="10607040" cy="777240"/>
           </a:xfrm>
           <a:prstGeom prst="rect">
             <a:avLst/>
@@ -10367,71 +12354,7 @@
               <a:buNone/>
             </a:pPr>
             <a:r>
-              <a:rPr lang="en-US" sz="1250" dirty="0">
-                <a:solidFill>
-                  <a:srgbClr val="33344A"/>
-                </a:solidFill>
-                <a:latin typeface="Calibri" pitchFamily="34" charset="0"/>
-                <a:ea typeface="Calibri" pitchFamily="34" charset="-122"/>
-                <a:cs typeface="Calibri" pitchFamily="34" charset="-120"/>
-              </a:rPr>
-              <a:t>Input X → predicts τT(x). Learned the pattern in the treatment-side pseudo effects.</a:t>
-            </a:r>
-            <a:endParaRPr lang="en-US" sz="1250" dirty="0"/>
-          </a:p>
-        </p:txBody>
-      </p:sp>
-      <p:sp>
-        <p:nvSpPr>
-          <p:cNvPr id="11" name="Shape 9"/>
-          <p:cNvSpPr/>
-          <p:nvPr/>
-        </p:nvSpPr>
-        <p:spPr>
-          <a:xfrm>
-            <a:off x="548640" y="3566160"/>
-            <a:ext cx="11064240" cy="777240"/>
-          </a:xfrm>
-          <a:prstGeom prst="roundRect">
-            <a:avLst>
-              <a:gd name="adj" fmla="val 7059"/>
-            </a:avLst>
-          </a:prstGeom>
-          <a:solidFill>
-            <a:srgbClr val="EAF0FC"/>
-          </a:solidFill>
-          <a:ln/>
-        </p:spPr>
-      </p:sp>
-      <p:sp>
-        <p:nvSpPr>
-          <p:cNvPr id="12" name="Text 10"/>
-          <p:cNvSpPr txBox="1"/>
-          <p:nvPr/>
-        </p:nvSpPr>
-        <p:spPr>
-          <a:xfrm>
-            <a:off x="777240" y="3566160"/>
-            <a:ext cx="10607040" cy="777240"/>
-          </a:xfrm>
-          <a:prstGeom prst="rect">
-            <a:avLst/>
-          </a:prstGeom>
-          <a:noFill/>
-          <a:ln/>
-        </p:spPr>
-        <p:txBody>
-          <a:bodyPr wrap="square" lIns="0" tIns="0" rIns="0" bIns="0" rtlCol="0" anchor="ctr"/>
-          <a:lstStyle/>
-          <a:p>
-            <a:pPr indent="0" marL="0">
-              <a:lnSpc>
-                <a:spcPct val="122000"/>
-              </a:lnSpc>
-              <a:buNone/>
-            </a:pPr>
-            <a:r>
-              <a:rPr lang="en-US" sz="1150" b="1" dirty="0">
+              <a:rPr lang="en-US" sz="1100" b="1" dirty="0">
                 <a:solidFill>
                   <a:srgbClr val="1E2761"/>
                 </a:solidFill>
@@ -10443,12 +12366,12 @@
             </a:r>
             <a:pPr indent="0" marL="0">
               <a:lnSpc>
-                <a:spcPct val="122000"/>
+                <a:spcPct val="120000"/>
               </a:lnSpc>
               <a:buNone/>
             </a:pPr>
             <a:r>
-              <a:rPr lang="en-US" sz="1150" dirty="0">
+              <a:rPr lang="en-US" sz="1100" dirty="0">
                 <a:solidFill>
                   <a:srgbClr val="1E2761"/>
                 </a:solidFill>
@@ -10460,12 +12383,12 @@
             </a:r>
             <a:pPr indent="0" marL="0">
               <a:lnSpc>
-                <a:spcPct val="122000"/>
+                <a:spcPct val="120000"/>
               </a:lnSpc>
               <a:buNone/>
             </a:pPr>
             <a:r>
-              <a:rPr lang="en-US" sz="1150" b="1" dirty="0">
+              <a:rPr lang="en-US" sz="1100" b="1" dirty="0">
                 <a:solidFill>
                   <a:srgbClr val="1E2761"/>
                 </a:solidFill>
@@ -10477,12 +12400,12 @@
             </a:r>
             <a:pPr indent="0" marL="0">
               <a:lnSpc>
-                <a:spcPct val="122000"/>
+                <a:spcPct val="120000"/>
               </a:lnSpc>
               <a:buNone/>
             </a:pPr>
             <a:r>
-              <a:rPr lang="en-US" sz="1150" dirty="0">
+              <a:rPr lang="en-US" sz="1100" dirty="0">
                 <a:solidFill>
                   <a:srgbClr val="1E2761"/>
                 </a:solidFill>
@@ -10490,293 +12413,15 @@
                 <a:ea typeface="Calibri" pitchFamily="34" charset="-122"/>
                 <a:cs typeface="Calibri" pitchFamily="34" charset="-120"/>
               </a:rPr>
-              <a:t>each is trained on a different pseudo-effect sample — τC on the large control-side sample, τT on the small treatment-side one — so neither is fully trustworthy alone. Layer 4 decides how much to lean on each.</a:t>
-            </a:r>
-            <a:endParaRPr lang="en-US" sz="1150" dirty="0"/>
+              <a:t>τC(G) = 0.12 and τT(G) = 0.28 are two different estimates of the same customer's uplift, each trained on a different, differently-sized sample — so neither is fully trustworthy alone. Layer 4 decides how much to lean on each.</a:t>
+            </a:r>
+            <a:endParaRPr lang="en-US" sz="1100" dirty="0"/>
           </a:p>
         </p:txBody>
       </p:sp>
       <p:sp>
         <p:nvSpPr>
-          <p:cNvPr id="13" name="Text 11"/>
-          <p:cNvSpPr txBox="1"/>
-          <p:nvPr/>
-        </p:nvSpPr>
-        <p:spPr>
-          <a:xfrm>
-            <a:off x="548640" y="4480560"/>
-            <a:ext cx="11064240" cy="320040"/>
-          </a:xfrm>
-          <a:prstGeom prst="rect">
-            <a:avLst/>
-          </a:prstGeom>
-          <a:noFill/>
-          <a:ln/>
-        </p:spPr>
-        <p:txBody>
-          <a:bodyPr wrap="square" lIns="0" tIns="0" rIns="0" bIns="0" rtlCol="0" anchor="ctr"/>
-          <a:lstStyle/>
-          <a:p>
-            <a:pPr indent="0" marL="0">
-              <a:buNone/>
-            </a:pPr>
-            <a:r>
-              <a:rPr lang="en-US" sz="1300" b="1" dirty="0">
-                <a:solidFill>
-                  <a:srgbClr val="1E2761"/>
-                </a:solidFill>
-                <a:latin typeface="Calibri" pitchFamily="34" charset="0"/>
-                <a:ea typeface="Calibri" pitchFamily="34" charset="-122"/>
-                <a:cs typeface="Calibri" pitchFamily="34" charset="-120"/>
-              </a:rPr>
-              <a:t>Worked example — a new customer, G, scored by both:</a:t>
-            </a:r>
-            <a:endParaRPr lang="en-US" sz="1300" dirty="0"/>
-          </a:p>
-        </p:txBody>
-      </p:sp>
-      <p:sp>
-        <p:nvSpPr>
-          <p:cNvPr id="14" name="Shape 12"/>
-          <p:cNvSpPr/>
-          <p:nvPr/>
-        </p:nvSpPr>
-        <p:spPr>
-          <a:xfrm>
-            <a:off x="3352648" y="4864608"/>
-            <a:ext cx="2468880" cy="1005840"/>
-          </a:xfrm>
-          <a:prstGeom prst="roundRect">
-            <a:avLst>
-              <a:gd name="adj" fmla="val 7273"/>
-            </a:avLst>
-          </a:prstGeom>
-          <a:solidFill>
-            <a:srgbClr val="1B7A5A"/>
-          </a:solidFill>
-          <a:ln/>
-        </p:spPr>
-      </p:sp>
-      <p:sp>
-        <p:nvSpPr>
-          <p:cNvPr id="15" name="Text 13"/>
-          <p:cNvSpPr txBox="1"/>
-          <p:nvPr/>
-        </p:nvSpPr>
-        <p:spPr>
-          <a:xfrm>
-            <a:off x="3352648" y="4974336"/>
-            <a:ext cx="2468880" cy="292608"/>
-          </a:xfrm>
-          <a:prstGeom prst="rect">
-            <a:avLst/>
-          </a:prstGeom>
-          <a:noFill/>
-          <a:ln/>
-        </p:spPr>
-        <p:txBody>
-          <a:bodyPr wrap="square" lIns="0" tIns="0" rIns="0" bIns="0" rtlCol="0" anchor="ctr"/>
-          <a:lstStyle/>
-          <a:p>
-            <a:pPr algn="ctr" indent="0" marL="0">
-              <a:buNone/>
-            </a:pPr>
-            <a:r>
-              <a:rPr lang="en-US" sz="1250" dirty="0">
-                <a:solidFill>
-                  <a:srgbClr val="FFFFFF"/>
-                </a:solidFill>
-                <a:latin typeface="Calibri" pitchFamily="34" charset="0"/>
-                <a:ea typeface="Calibri" pitchFamily="34" charset="-122"/>
-                <a:cs typeface="Calibri" pitchFamily="34" charset="-120"/>
-              </a:rPr>
-              <a:t>τC(G)</a:t>
-            </a:r>
-            <a:endParaRPr lang="en-US" sz="1250" dirty="0"/>
-          </a:p>
-        </p:txBody>
-      </p:sp>
-      <p:sp>
-        <p:nvSpPr>
-          <p:cNvPr id="16" name="Text 14"/>
-          <p:cNvSpPr txBox="1"/>
-          <p:nvPr/>
-        </p:nvSpPr>
-        <p:spPr>
-          <a:xfrm>
-            <a:off x="3352648" y="5248656"/>
-            <a:ext cx="2468880" cy="548640"/>
-          </a:xfrm>
-          <a:prstGeom prst="rect">
-            <a:avLst/>
-          </a:prstGeom>
-          <a:noFill/>
-          <a:ln/>
-        </p:spPr>
-        <p:txBody>
-          <a:bodyPr wrap="square" lIns="0" tIns="0" rIns="0" bIns="0" rtlCol="0" anchor="ctr"/>
-          <a:lstStyle/>
-          <a:p>
-            <a:pPr algn="ctr" indent="0" marL="0">
-              <a:buNone/>
-            </a:pPr>
-            <a:r>
-              <a:rPr lang="en-US" sz="2700" b="1" dirty="0">
-                <a:solidFill>
-                  <a:srgbClr val="FFFFFF"/>
-                </a:solidFill>
-                <a:latin typeface="Cambria" pitchFamily="34" charset="0"/>
-                <a:ea typeface="Cambria" pitchFamily="34" charset="-122"/>
-                <a:cs typeface="Cambria" pitchFamily="34" charset="-120"/>
-              </a:rPr>
-              <a:t>0.12</a:t>
-            </a:r>
-            <a:endParaRPr lang="en-US" sz="2700" dirty="0"/>
-          </a:p>
-        </p:txBody>
-      </p:sp>
-      <p:sp>
-        <p:nvSpPr>
-          <p:cNvPr id="17" name="Shape 15"/>
-          <p:cNvSpPr/>
-          <p:nvPr/>
-        </p:nvSpPr>
-        <p:spPr>
-          <a:xfrm>
-            <a:off x="6370168" y="4864608"/>
-            <a:ext cx="2468880" cy="1005840"/>
-          </a:xfrm>
-          <a:prstGeom prst="roundRect">
-            <a:avLst>
-              <a:gd name="adj" fmla="val 7273"/>
-            </a:avLst>
-          </a:prstGeom>
-          <a:solidFill>
-            <a:srgbClr val="B8892B"/>
-          </a:solidFill>
-          <a:ln/>
-        </p:spPr>
-      </p:sp>
-      <p:sp>
-        <p:nvSpPr>
-          <p:cNvPr id="18" name="Text 16"/>
-          <p:cNvSpPr txBox="1"/>
-          <p:nvPr/>
-        </p:nvSpPr>
-        <p:spPr>
-          <a:xfrm>
-            <a:off x="6370168" y="4974336"/>
-            <a:ext cx="2468880" cy="292608"/>
-          </a:xfrm>
-          <a:prstGeom prst="rect">
-            <a:avLst/>
-          </a:prstGeom>
-          <a:noFill/>
-          <a:ln/>
-        </p:spPr>
-        <p:txBody>
-          <a:bodyPr wrap="square" lIns="0" tIns="0" rIns="0" bIns="0" rtlCol="0" anchor="ctr"/>
-          <a:lstStyle/>
-          <a:p>
-            <a:pPr algn="ctr" indent="0" marL="0">
-              <a:buNone/>
-            </a:pPr>
-            <a:r>
-              <a:rPr lang="en-US" sz="1250" dirty="0">
-                <a:solidFill>
-                  <a:srgbClr val="FFFFFF"/>
-                </a:solidFill>
-                <a:latin typeface="Calibri" pitchFamily="34" charset="0"/>
-                <a:ea typeface="Calibri" pitchFamily="34" charset="-122"/>
-                <a:cs typeface="Calibri" pitchFamily="34" charset="-120"/>
-              </a:rPr>
-              <a:t>τT(G)</a:t>
-            </a:r>
-            <a:endParaRPr lang="en-US" sz="1250" dirty="0"/>
-          </a:p>
-        </p:txBody>
-      </p:sp>
-      <p:sp>
-        <p:nvSpPr>
-          <p:cNvPr id="19" name="Text 17"/>
-          <p:cNvSpPr txBox="1"/>
-          <p:nvPr/>
-        </p:nvSpPr>
-        <p:spPr>
-          <a:xfrm>
-            <a:off x="6370168" y="5248656"/>
-            <a:ext cx="2468880" cy="548640"/>
-          </a:xfrm>
-          <a:prstGeom prst="rect">
-            <a:avLst/>
-          </a:prstGeom>
-          <a:noFill/>
-          <a:ln/>
-        </p:spPr>
-        <p:txBody>
-          <a:bodyPr wrap="square" lIns="0" tIns="0" rIns="0" bIns="0" rtlCol="0" anchor="ctr"/>
-          <a:lstStyle/>
-          <a:p>
-            <a:pPr algn="ctr" indent="0" marL="0">
-              <a:buNone/>
-            </a:pPr>
-            <a:r>
-              <a:rPr lang="en-US" sz="2700" b="1" dirty="0">
-                <a:solidFill>
-                  <a:srgbClr val="FFFFFF"/>
-                </a:solidFill>
-                <a:latin typeface="Cambria" pitchFamily="34" charset="0"/>
-                <a:ea typeface="Cambria" pitchFamily="34" charset="-122"/>
-                <a:cs typeface="Cambria" pitchFamily="34" charset="-120"/>
-              </a:rPr>
-              <a:t>0.28</a:t>
-            </a:r>
-            <a:endParaRPr lang="en-US" sz="2700" dirty="0"/>
-          </a:p>
-        </p:txBody>
-      </p:sp>
-      <p:sp>
-        <p:nvSpPr>
-          <p:cNvPr id="20" name="Text 18"/>
-          <p:cNvSpPr txBox="1"/>
-          <p:nvPr/>
-        </p:nvSpPr>
-        <p:spPr>
-          <a:xfrm>
-            <a:off x="548640" y="5980176"/>
-            <a:ext cx="11064240" cy="320040"/>
-          </a:xfrm>
-          <a:prstGeom prst="rect">
-            <a:avLst/>
-          </a:prstGeom>
-          <a:noFill/>
-          <a:ln/>
-        </p:spPr>
-        <p:txBody>
-          <a:bodyPr wrap="square" lIns="0" tIns="0" rIns="0" bIns="0" rtlCol="0" anchor="ctr"/>
-          <a:lstStyle/>
-          <a:p>
-            <a:pPr algn="ctr" indent="0" marL="0">
-              <a:buNone/>
-            </a:pPr>
-            <a:r>
-              <a:rPr lang="en-US" sz="1150" i="1" dirty="0">
-                <a:solidFill>
-                  <a:srgbClr val="6B7280"/>
-                </a:solidFill>
-                <a:latin typeface="Calibri" pitchFamily="34" charset="0"/>
-                <a:ea typeface="Calibri" pitchFamily="34" charset="-122"/>
-                <a:cs typeface="Calibri" pitchFamily="34" charset="-120"/>
-              </a:rPr>
-              <a:t>Two different estimates of the same customer's uplift — neither is the final answer yet.</a:t>
-            </a:r>
-            <a:endParaRPr lang="en-US" sz="1150" dirty="0"/>
-          </a:p>
-        </p:txBody>
-      </p:sp>
-      <p:sp>
-        <p:nvSpPr>
-          <p:cNvPr id="21" name="Text 19"/>
+          <p:cNvPr id="19" name="Text 13"/>
           <p:cNvSpPr txBox="1"/>
           <p:nvPr/>
         </p:nvSpPr>
@@ -10815,7 +12460,7 @@
       </p:sp>
       <p:sp>
         <p:nvSpPr>
-          <p:cNvPr id="22" name="Text 20"/>
+          <p:cNvPr id="20" name="Text 14"/>
           <p:cNvSpPr txBox="1"/>
           <p:nvPr/>
         </p:nvSpPr>
